--- a/report/方案B_B2_架构图集.pptx
+++ b/report/方案B_B2_架构图集.pptx
@@ -3445,21 +3445,8 @@
             </a:solidFill>
             <a:tailEnd type="triangle" w="med" len="med"/>
           </a:ln>
-        </p:spPr>
-        <p:style>
-          <a:lnRef idx="2">
-            <a:schemeClr val="accent1"/>
-          </a:lnRef>
-          <a:fillRef idx="0">
-            <a:schemeClr val="accent1"/>
-          </a:fillRef>
-          <a:effectRef idx="1">
-            <a:schemeClr val="accent1"/>
-          </a:effectRef>
-          <a:fontRef idx="minor">
-            <a:schemeClr val="tx1"/>
-          </a:fontRef>
-        </p:style>
+          <a:effectLst/>
+        </p:spPr>
       </p:cxnSp>
       <p:sp>
         <p:nvSpPr>
@@ -3575,21 +3562,8 @@
             </a:solidFill>
             <a:tailEnd type="triangle" w="med" len="med"/>
           </a:ln>
-        </p:spPr>
-        <p:style>
-          <a:lnRef idx="2">
-            <a:schemeClr val="accent1"/>
-          </a:lnRef>
-          <a:fillRef idx="0">
-            <a:schemeClr val="accent1"/>
-          </a:fillRef>
-          <a:effectRef idx="1">
-            <a:schemeClr val="accent1"/>
-          </a:effectRef>
-          <a:fontRef idx="minor">
-            <a:schemeClr val="tx1"/>
-          </a:fontRef>
-        </p:style>
+          <a:effectLst/>
+        </p:spPr>
       </p:cxnSp>
       <p:cxnSp>
         <p:nvCxnSpPr>
@@ -3611,21 +3585,8 @@
             </a:solidFill>
             <a:tailEnd type="triangle" w="med" len="med"/>
           </a:ln>
-        </p:spPr>
-        <p:style>
-          <a:lnRef idx="2">
-            <a:schemeClr val="accent1"/>
-          </a:lnRef>
-          <a:fillRef idx="0">
-            <a:schemeClr val="accent1"/>
-          </a:fillRef>
-          <a:effectRef idx="1">
-            <a:schemeClr val="accent1"/>
-          </a:effectRef>
-          <a:fontRef idx="minor">
-            <a:schemeClr val="tx1"/>
-          </a:fontRef>
-        </p:style>
+          <a:effectLst/>
+        </p:spPr>
       </p:cxnSp>
       <p:sp>
         <p:nvSpPr>
@@ -3835,21 +3796,8 @@
             </a:solidFill>
             <a:tailEnd type="triangle" w="med" len="med"/>
           </a:ln>
-        </p:spPr>
-        <p:style>
-          <a:lnRef idx="2">
-            <a:schemeClr val="accent1"/>
-          </a:lnRef>
-          <a:fillRef idx="0">
-            <a:schemeClr val="accent1"/>
-          </a:fillRef>
-          <a:effectRef idx="1">
-            <a:schemeClr val="accent1"/>
-          </a:effectRef>
-          <a:fontRef idx="minor">
-            <a:schemeClr val="tx1"/>
-          </a:fontRef>
-        </p:style>
+          <a:effectLst/>
+        </p:spPr>
       </p:cxnSp>
       <p:sp>
         <p:nvSpPr>
@@ -10114,21 +10062,8 @@
             </a:solidFill>
             <a:tailEnd type="triangle" w="med" len="med"/>
           </a:ln>
-        </p:spPr>
-        <p:style>
-          <a:lnRef idx="2">
-            <a:schemeClr val="accent1"/>
-          </a:lnRef>
-          <a:fillRef idx="0">
-            <a:schemeClr val="accent1"/>
-          </a:fillRef>
-          <a:effectRef idx="1">
-            <a:schemeClr val="accent1"/>
-          </a:effectRef>
-          <a:fontRef idx="minor">
-            <a:schemeClr val="tx1"/>
-          </a:fontRef>
-        </p:style>
+          <a:effectLst/>
+        </p:spPr>
       </p:cxnSp>
       <p:cxnSp>
         <p:nvCxnSpPr>
@@ -10150,21 +10085,8 @@
             </a:solidFill>
             <a:tailEnd type="triangle" w="med" len="med"/>
           </a:ln>
-        </p:spPr>
-        <p:style>
-          <a:lnRef idx="2">
-            <a:schemeClr val="accent1"/>
-          </a:lnRef>
-          <a:fillRef idx="0">
-            <a:schemeClr val="accent1"/>
-          </a:fillRef>
-          <a:effectRef idx="1">
-            <a:schemeClr val="accent1"/>
-          </a:effectRef>
-          <a:fontRef idx="minor">
-            <a:schemeClr val="tx1"/>
-          </a:fontRef>
-        </p:style>
+          <a:effectLst/>
+        </p:spPr>
       </p:cxnSp>
       <p:cxnSp>
         <p:nvCxnSpPr>
@@ -10186,21 +10108,8 @@
             </a:solidFill>
             <a:tailEnd type="triangle" w="med" len="med"/>
           </a:ln>
-        </p:spPr>
-        <p:style>
-          <a:lnRef idx="2">
-            <a:schemeClr val="accent1"/>
-          </a:lnRef>
-          <a:fillRef idx="0">
-            <a:schemeClr val="accent1"/>
-          </a:fillRef>
-          <a:effectRef idx="1">
-            <a:schemeClr val="accent1"/>
-          </a:effectRef>
-          <a:fontRef idx="minor">
-            <a:schemeClr val="tx1"/>
-          </a:fontRef>
-        </p:style>
+          <a:effectLst/>
+        </p:spPr>
       </p:cxnSp>
       <p:sp>
         <p:nvSpPr>
@@ -11355,21 +11264,8 @@
             </a:solidFill>
             <a:tailEnd type="triangle" w="med" len="med"/>
           </a:ln>
-        </p:spPr>
-        <p:style>
-          <a:lnRef idx="2">
-            <a:schemeClr val="accent1"/>
-          </a:lnRef>
-          <a:fillRef idx="0">
-            <a:schemeClr val="accent1"/>
-          </a:fillRef>
-          <a:effectRef idx="1">
-            <a:schemeClr val="accent1"/>
-          </a:effectRef>
-          <a:fontRef idx="minor">
-            <a:schemeClr val="tx1"/>
-          </a:fontRef>
-        </p:style>
+          <a:effectLst/>
+        </p:spPr>
       </p:cxnSp>
       <p:sp>
         <p:nvSpPr>
@@ -11483,21 +11379,8 @@
             </a:solidFill>
             <a:tailEnd type="triangle" w="med" len="med"/>
           </a:ln>
-        </p:spPr>
-        <p:style>
-          <a:lnRef idx="2">
-            <a:schemeClr val="accent1"/>
-          </a:lnRef>
-          <a:fillRef idx="0">
-            <a:schemeClr val="accent1"/>
-          </a:fillRef>
-          <a:effectRef idx="1">
-            <a:schemeClr val="accent1"/>
-          </a:effectRef>
-          <a:fontRef idx="minor">
-            <a:schemeClr val="tx1"/>
-          </a:fontRef>
-        </p:style>
+          <a:effectLst/>
+        </p:spPr>
       </p:cxnSp>
       <p:sp>
         <p:nvSpPr>
@@ -11566,21 +11449,8 @@
             <a:prstDash val="dash"/>
             <a:tailEnd type="triangle" w="med" len="med"/>
           </a:ln>
-        </p:spPr>
-        <p:style>
-          <a:lnRef idx="2">
-            <a:schemeClr val="accent1"/>
-          </a:lnRef>
-          <a:fillRef idx="0">
-            <a:schemeClr val="accent1"/>
-          </a:fillRef>
-          <a:effectRef idx="1">
-            <a:schemeClr val="accent1"/>
-          </a:effectRef>
-          <a:fontRef idx="minor">
-            <a:schemeClr val="tx1"/>
-          </a:fontRef>
-        </p:style>
+          <a:effectLst/>
+        </p:spPr>
       </p:cxnSp>
       <p:sp>
         <p:nvSpPr>
@@ -11649,21 +11519,8 @@
             <a:prstDash val="dash"/>
             <a:tailEnd type="triangle" w="med" len="med"/>
           </a:ln>
-        </p:spPr>
-        <p:style>
-          <a:lnRef idx="2">
-            <a:schemeClr val="accent1"/>
-          </a:lnRef>
-          <a:fillRef idx="0">
-            <a:schemeClr val="accent1"/>
-          </a:fillRef>
-          <a:effectRef idx="1">
-            <a:schemeClr val="accent1"/>
-          </a:effectRef>
-          <a:fontRef idx="minor">
-            <a:schemeClr val="tx1"/>
-          </a:fontRef>
-        </p:style>
+          <a:effectLst/>
+        </p:spPr>
       </p:cxnSp>
       <p:sp>
         <p:nvSpPr>
@@ -11731,21 +11588,8 @@
             </a:solidFill>
             <a:prstDash val="dash"/>
           </a:ln>
-        </p:spPr>
-        <p:style>
-          <a:lnRef idx="2">
-            <a:schemeClr val="accent1"/>
-          </a:lnRef>
-          <a:fillRef idx="0">
-            <a:schemeClr val="accent1"/>
-          </a:fillRef>
-          <a:effectRef idx="1">
-            <a:schemeClr val="accent1"/>
-          </a:effectRef>
-          <a:fontRef idx="minor">
-            <a:schemeClr val="tx1"/>
-          </a:fontRef>
-        </p:style>
+          <a:effectLst/>
+        </p:spPr>
       </p:cxnSp>
       <p:cxnSp>
         <p:nvCxnSpPr>
@@ -11768,21 +11612,8 @@
             <a:prstDash val="dash"/>
             <a:tailEnd type="triangle" w="med" len="med"/>
           </a:ln>
-        </p:spPr>
-        <p:style>
-          <a:lnRef idx="2">
-            <a:schemeClr val="accent1"/>
-          </a:lnRef>
-          <a:fillRef idx="0">
-            <a:schemeClr val="accent1"/>
-          </a:fillRef>
-          <a:effectRef idx="1">
-            <a:schemeClr val="accent1"/>
-          </a:effectRef>
-          <a:fontRef idx="minor">
-            <a:schemeClr val="tx1"/>
-          </a:fontRef>
-        </p:style>
+          <a:effectLst/>
+        </p:spPr>
       </p:cxnSp>
       <p:sp>
         <p:nvSpPr>
@@ -14190,21 +14021,8 @@
             <a:prstDash val="dash"/>
             <a:tailEnd type="triangle" w="med" len="med"/>
           </a:ln>
-        </p:spPr>
-        <p:style>
-          <a:lnRef idx="2">
-            <a:schemeClr val="accent1"/>
-          </a:lnRef>
-          <a:fillRef idx="0">
-            <a:schemeClr val="accent1"/>
-          </a:fillRef>
-          <a:effectRef idx="1">
-            <a:schemeClr val="accent1"/>
-          </a:effectRef>
-          <a:fontRef idx="minor">
-            <a:schemeClr val="tx1"/>
-          </a:fontRef>
-        </p:style>
+          <a:effectLst/>
+        </p:spPr>
       </p:cxnSp>
       <p:cxnSp>
         <p:nvCxnSpPr>
@@ -14227,21 +14045,8 @@
             <a:prstDash val="dash"/>
             <a:tailEnd type="triangle" w="med" len="med"/>
           </a:ln>
-        </p:spPr>
-        <p:style>
-          <a:lnRef idx="2">
-            <a:schemeClr val="accent1"/>
-          </a:lnRef>
-          <a:fillRef idx="0">
-            <a:schemeClr val="accent1"/>
-          </a:fillRef>
-          <a:effectRef idx="1">
-            <a:schemeClr val="accent1"/>
-          </a:effectRef>
-          <a:fontRef idx="minor">
-            <a:schemeClr val="tx1"/>
-          </a:fontRef>
-        </p:style>
+          <a:effectLst/>
+        </p:spPr>
       </p:cxnSp>
       <p:cxnSp>
         <p:nvCxnSpPr>
@@ -14263,21 +14068,8 @@
             </a:solidFill>
             <a:prstDash val="dash"/>
           </a:ln>
-        </p:spPr>
-        <p:style>
-          <a:lnRef idx="2">
-            <a:schemeClr val="accent1"/>
-          </a:lnRef>
-          <a:fillRef idx="0">
-            <a:schemeClr val="accent1"/>
-          </a:fillRef>
-          <a:effectRef idx="1">
-            <a:schemeClr val="accent1"/>
-          </a:effectRef>
-          <a:fontRef idx="minor">
-            <a:schemeClr val="tx1"/>
-          </a:fontRef>
-        </p:style>
+          <a:effectLst/>
+        </p:spPr>
       </p:cxnSp>
       <p:cxnSp>
         <p:nvCxnSpPr>
@@ -14299,21 +14091,8 @@
             </a:solidFill>
             <a:prstDash val="dash"/>
           </a:ln>
-        </p:spPr>
-        <p:style>
-          <a:lnRef idx="2">
-            <a:schemeClr val="accent1"/>
-          </a:lnRef>
-          <a:fillRef idx="0">
-            <a:schemeClr val="accent1"/>
-          </a:fillRef>
-          <a:effectRef idx="1">
-            <a:schemeClr val="accent1"/>
-          </a:effectRef>
-          <a:fontRef idx="minor">
-            <a:schemeClr val="tx1"/>
-          </a:fontRef>
-        </p:style>
+          <a:effectLst/>
+        </p:spPr>
       </p:cxnSp>
       <p:cxnSp>
         <p:nvCxnSpPr>
@@ -14336,21 +14115,8 @@
             <a:prstDash val="dash"/>
             <a:tailEnd type="triangle" w="med" len="med"/>
           </a:ln>
-        </p:spPr>
-        <p:style>
-          <a:lnRef idx="2">
-            <a:schemeClr val="accent1"/>
-          </a:lnRef>
-          <a:fillRef idx="0">
-            <a:schemeClr val="accent1"/>
-          </a:fillRef>
-          <a:effectRef idx="1">
-            <a:schemeClr val="accent1"/>
-          </a:effectRef>
-          <a:fontRef idx="minor">
-            <a:schemeClr val="tx1"/>
-          </a:fontRef>
-        </p:style>
+          <a:effectLst/>
+        </p:spPr>
       </p:cxnSp>
       <p:sp>
         <p:nvSpPr>
@@ -14464,21 +14230,8 @@
             </a:solidFill>
             <a:tailEnd type="triangle" w="med" len="med"/>
           </a:ln>
-        </p:spPr>
-        <p:style>
-          <a:lnRef idx="2">
-            <a:schemeClr val="accent1"/>
-          </a:lnRef>
-          <a:fillRef idx="0">
-            <a:schemeClr val="accent1"/>
-          </a:fillRef>
-          <a:effectRef idx="1">
-            <a:schemeClr val="accent1"/>
-          </a:effectRef>
-          <a:fontRef idx="minor">
-            <a:schemeClr val="tx1"/>
-          </a:fontRef>
-        </p:style>
+          <a:effectLst/>
+        </p:spPr>
       </p:cxnSp>
       <p:sp>
         <p:nvSpPr>
@@ -16430,21 +16183,8 @@
             </a:solidFill>
             <a:tailEnd type="triangle" w="med" len="med"/>
           </a:ln>
-        </p:spPr>
-        <p:style>
-          <a:lnRef idx="2">
-            <a:schemeClr val="accent1"/>
-          </a:lnRef>
-          <a:fillRef idx="0">
-            <a:schemeClr val="accent1"/>
-          </a:fillRef>
-          <a:effectRef idx="1">
-            <a:schemeClr val="accent1"/>
-          </a:effectRef>
-          <a:fontRef idx="minor">
-            <a:schemeClr val="tx1"/>
-          </a:fontRef>
-        </p:style>
+          <a:effectLst/>
+        </p:spPr>
       </p:cxnSp>
       <p:sp>
         <p:nvSpPr>
@@ -17113,21 +16853,8 @@
             </a:solidFill>
             <a:tailEnd type="triangle" w="med" len="med"/>
           </a:ln>
-        </p:spPr>
-        <p:style>
-          <a:lnRef idx="2">
-            <a:schemeClr val="accent1"/>
-          </a:lnRef>
-          <a:fillRef idx="0">
-            <a:schemeClr val="accent1"/>
-          </a:fillRef>
-          <a:effectRef idx="1">
-            <a:schemeClr val="accent1"/>
-          </a:effectRef>
-          <a:fontRef idx="minor">
-            <a:schemeClr val="tx1"/>
-          </a:fontRef>
-        </p:style>
+          <a:effectLst/>
+        </p:spPr>
       </p:cxnSp>
       <p:sp>
         <p:nvSpPr>
@@ -17675,21 +17402,8 @@
             </a:solidFill>
             <a:tailEnd type="triangle" w="med" len="med"/>
           </a:ln>
-        </p:spPr>
-        <p:style>
-          <a:lnRef idx="2">
-            <a:schemeClr val="accent1"/>
-          </a:lnRef>
-          <a:fillRef idx="0">
-            <a:schemeClr val="accent1"/>
-          </a:fillRef>
-          <a:effectRef idx="1">
-            <a:schemeClr val="accent1"/>
-          </a:effectRef>
-          <a:fontRef idx="minor">
-            <a:schemeClr val="tx1"/>
-          </a:fontRef>
-        </p:style>
+          <a:effectLst/>
+        </p:spPr>
       </p:cxnSp>
       <p:sp>
         <p:nvSpPr>
@@ -18191,21 +17905,8 @@
             </a:solidFill>
             <a:tailEnd type="triangle" w="med" len="med"/>
           </a:ln>
-        </p:spPr>
-        <p:style>
-          <a:lnRef idx="2">
-            <a:schemeClr val="accent1"/>
-          </a:lnRef>
-          <a:fillRef idx="0">
-            <a:schemeClr val="accent1"/>
-          </a:fillRef>
-          <a:effectRef idx="1">
-            <a:schemeClr val="accent1"/>
-          </a:effectRef>
-          <a:fontRef idx="minor">
-            <a:schemeClr val="tx1"/>
-          </a:fontRef>
-        </p:style>
+          <a:effectLst/>
+        </p:spPr>
       </p:cxnSp>
       <p:sp>
         <p:nvSpPr>
@@ -18707,21 +18408,8 @@
             </a:solidFill>
             <a:tailEnd type="triangle" w="med" len="med"/>
           </a:ln>
-        </p:spPr>
-        <p:style>
-          <a:lnRef idx="2">
-            <a:schemeClr val="accent1"/>
-          </a:lnRef>
-          <a:fillRef idx="0">
-            <a:schemeClr val="accent1"/>
-          </a:fillRef>
-          <a:effectRef idx="1">
-            <a:schemeClr val="accent1"/>
-          </a:effectRef>
-          <a:fontRef idx="minor">
-            <a:schemeClr val="tx1"/>
-          </a:fontRef>
-        </p:style>
+          <a:effectLst/>
+        </p:spPr>
       </p:cxnSp>
       <p:sp>
         <p:nvSpPr>
@@ -18836,21 +18524,8 @@
               <a:srgbClr val="059669"/>
             </a:solidFill>
           </a:ln>
-        </p:spPr>
-        <p:style>
-          <a:lnRef idx="2">
-            <a:schemeClr val="accent1"/>
-          </a:lnRef>
-          <a:fillRef idx="0">
-            <a:schemeClr val="accent1"/>
-          </a:fillRef>
-          <a:effectRef idx="1">
-            <a:schemeClr val="accent1"/>
-          </a:effectRef>
-          <a:fontRef idx="minor">
-            <a:schemeClr val="tx1"/>
-          </a:fontRef>
-        </p:style>
+          <a:effectLst/>
+        </p:spPr>
       </p:cxnSp>
       <p:cxnSp>
         <p:nvCxnSpPr>
@@ -18871,21 +18546,8 @@
               <a:srgbClr val="059669"/>
             </a:solidFill>
           </a:ln>
-        </p:spPr>
-        <p:style>
-          <a:lnRef idx="2">
-            <a:schemeClr val="accent1"/>
-          </a:lnRef>
-          <a:fillRef idx="0">
-            <a:schemeClr val="accent1"/>
-          </a:fillRef>
-          <a:effectRef idx="1">
-            <a:schemeClr val="accent1"/>
-          </a:effectRef>
-          <a:fontRef idx="minor">
-            <a:schemeClr val="tx1"/>
-          </a:fontRef>
-        </p:style>
+          <a:effectLst/>
+        </p:spPr>
       </p:cxnSp>
       <p:cxnSp>
         <p:nvCxnSpPr>
@@ -18907,21 +18569,8 @@
             </a:solidFill>
             <a:tailEnd type="triangle" w="med" len="med"/>
           </a:ln>
-        </p:spPr>
-        <p:style>
-          <a:lnRef idx="2">
-            <a:schemeClr val="accent1"/>
-          </a:lnRef>
-          <a:fillRef idx="0">
-            <a:schemeClr val="accent1"/>
-          </a:fillRef>
-          <a:effectRef idx="1">
-            <a:schemeClr val="accent1"/>
-          </a:effectRef>
-          <a:fontRef idx="minor">
-            <a:schemeClr val="tx1"/>
-          </a:fontRef>
-        </p:style>
+          <a:effectLst/>
+        </p:spPr>
       </p:cxnSp>
       <p:sp>
         <p:nvSpPr>
@@ -18989,21 +18638,8 @@
             </a:solidFill>
             <a:tailEnd type="triangle" w="med" len="med"/>
           </a:ln>
-        </p:spPr>
-        <p:style>
-          <a:lnRef idx="2">
-            <a:schemeClr val="accent1"/>
-          </a:lnRef>
-          <a:fillRef idx="0">
-            <a:schemeClr val="accent1"/>
-          </a:fillRef>
-          <a:effectRef idx="1">
-            <a:schemeClr val="accent1"/>
-          </a:effectRef>
-          <a:fontRef idx="minor">
-            <a:schemeClr val="tx1"/>
-          </a:fontRef>
-        </p:style>
+          <a:effectLst/>
+        </p:spPr>
       </p:cxnSp>
       <p:sp>
         <p:nvSpPr>
@@ -19070,21 +18706,8 @@
               <a:srgbClr val="D97706"/>
             </a:solidFill>
           </a:ln>
-        </p:spPr>
-        <p:style>
-          <a:lnRef idx="2">
-            <a:schemeClr val="accent1"/>
-          </a:lnRef>
-          <a:fillRef idx="0">
-            <a:schemeClr val="accent1"/>
-          </a:fillRef>
-          <a:effectRef idx="1">
-            <a:schemeClr val="accent1"/>
-          </a:effectRef>
-          <a:fontRef idx="minor">
-            <a:schemeClr val="tx1"/>
-          </a:fontRef>
-        </p:style>
+          <a:effectLst/>
+        </p:spPr>
       </p:cxnSp>
       <p:cxnSp>
         <p:nvCxnSpPr>
@@ -19105,21 +18728,8 @@
               <a:srgbClr val="D97706"/>
             </a:solidFill>
           </a:ln>
-        </p:spPr>
-        <p:style>
-          <a:lnRef idx="2">
-            <a:schemeClr val="accent1"/>
-          </a:lnRef>
-          <a:fillRef idx="0">
-            <a:schemeClr val="accent1"/>
-          </a:fillRef>
-          <a:effectRef idx="1">
-            <a:schemeClr val="accent1"/>
-          </a:effectRef>
-          <a:fontRef idx="minor">
-            <a:schemeClr val="tx1"/>
-          </a:fontRef>
-        </p:style>
+          <a:effectLst/>
+        </p:spPr>
       </p:cxnSp>
       <p:cxnSp>
         <p:nvCxnSpPr>
@@ -19141,21 +18751,8 @@
             </a:solidFill>
             <a:tailEnd type="triangle" w="med" len="med"/>
           </a:ln>
-        </p:spPr>
-        <p:style>
-          <a:lnRef idx="2">
-            <a:schemeClr val="accent1"/>
-          </a:lnRef>
-          <a:fillRef idx="0">
-            <a:schemeClr val="accent1"/>
-          </a:fillRef>
-          <a:effectRef idx="1">
-            <a:schemeClr val="accent1"/>
-          </a:effectRef>
-          <a:fontRef idx="minor">
-            <a:schemeClr val="tx1"/>
-          </a:fontRef>
-        </p:style>
+          <a:effectLst/>
+        </p:spPr>
       </p:cxnSp>
       <p:sp>
         <p:nvSpPr>
@@ -19686,21 +19283,8 @@
             </a:solidFill>
             <a:tailEnd type="triangle" w="med" len="med"/>
           </a:ln>
-        </p:spPr>
-        <p:style>
-          <a:lnRef idx="2">
-            <a:schemeClr val="accent1"/>
-          </a:lnRef>
-          <a:fillRef idx="0">
-            <a:schemeClr val="accent1"/>
-          </a:fillRef>
-          <a:effectRef idx="1">
-            <a:schemeClr val="accent1"/>
-          </a:effectRef>
-          <a:fontRef idx="minor">
-            <a:schemeClr val="tx1"/>
-          </a:fontRef>
-        </p:style>
+          <a:effectLst/>
+        </p:spPr>
       </p:cxnSp>
       <p:sp>
         <p:nvSpPr>
@@ -19767,21 +19351,8 @@
               <a:srgbClr val="7C3AED"/>
             </a:solidFill>
           </a:ln>
-        </p:spPr>
-        <p:style>
-          <a:lnRef idx="2">
-            <a:schemeClr val="accent1"/>
-          </a:lnRef>
-          <a:fillRef idx="0">
-            <a:schemeClr val="accent1"/>
-          </a:fillRef>
-          <a:effectRef idx="1">
-            <a:schemeClr val="accent1"/>
-          </a:effectRef>
-          <a:fontRef idx="minor">
-            <a:schemeClr val="tx1"/>
-          </a:fontRef>
-        </p:style>
+          <a:effectLst/>
+        </p:spPr>
       </p:cxnSp>
       <p:cxnSp>
         <p:nvCxnSpPr>
@@ -19802,21 +19373,8 @@
               <a:srgbClr val="7C3AED"/>
             </a:solidFill>
           </a:ln>
-        </p:spPr>
-        <p:style>
-          <a:lnRef idx="2">
-            <a:schemeClr val="accent1"/>
-          </a:lnRef>
-          <a:fillRef idx="0">
-            <a:schemeClr val="accent1"/>
-          </a:fillRef>
-          <a:effectRef idx="1">
-            <a:schemeClr val="accent1"/>
-          </a:effectRef>
-          <a:fontRef idx="minor">
-            <a:schemeClr val="tx1"/>
-          </a:fontRef>
-        </p:style>
+          <a:effectLst/>
+        </p:spPr>
       </p:cxnSp>
       <p:cxnSp>
         <p:nvCxnSpPr>
@@ -19838,21 +19396,8 @@
             </a:solidFill>
             <a:tailEnd type="triangle" w="med" len="med"/>
           </a:ln>
-        </p:spPr>
-        <p:style>
-          <a:lnRef idx="2">
-            <a:schemeClr val="accent1"/>
-          </a:lnRef>
-          <a:fillRef idx="0">
-            <a:schemeClr val="accent1"/>
-          </a:fillRef>
-          <a:effectRef idx="1">
-            <a:schemeClr val="accent1"/>
-          </a:effectRef>
-          <a:fontRef idx="minor">
-            <a:schemeClr val="tx1"/>
-          </a:fontRef>
-        </p:style>
+          <a:effectLst/>
+        </p:spPr>
       </p:cxnSp>
       <p:sp>
         <p:nvSpPr>
@@ -19920,21 +19465,8 @@
             </a:solidFill>
             <a:tailEnd type="triangle" w="med" len="med"/>
           </a:ln>
-        </p:spPr>
-        <p:style>
-          <a:lnRef idx="2">
-            <a:schemeClr val="accent1"/>
-          </a:lnRef>
-          <a:fillRef idx="0">
-            <a:schemeClr val="accent1"/>
-          </a:fillRef>
-          <a:effectRef idx="1">
-            <a:schemeClr val="accent1"/>
-          </a:effectRef>
-          <a:fontRef idx="minor">
-            <a:schemeClr val="tx1"/>
-          </a:fontRef>
-        </p:style>
+          <a:effectLst/>
+        </p:spPr>
       </p:cxnSp>
       <p:sp>
         <p:nvSpPr>
@@ -22495,21 +22027,8 @@
             </a:solidFill>
             <a:tailEnd type="triangle" w="med" len="med"/>
           </a:ln>
-        </p:spPr>
-        <p:style>
-          <a:lnRef idx="2">
-            <a:schemeClr val="accent1"/>
-          </a:lnRef>
-          <a:fillRef idx="0">
-            <a:schemeClr val="accent1"/>
-          </a:fillRef>
-          <a:effectRef idx="1">
-            <a:schemeClr val="accent1"/>
-          </a:effectRef>
-          <a:fontRef idx="minor">
-            <a:schemeClr val="tx1"/>
-          </a:fontRef>
-        </p:style>
+          <a:effectLst/>
+        </p:spPr>
       </p:cxnSp>
       <p:cxnSp>
         <p:nvCxnSpPr>
@@ -22531,21 +22050,8 @@
             </a:solidFill>
             <a:tailEnd type="triangle" w="med" len="med"/>
           </a:ln>
-        </p:spPr>
-        <p:style>
-          <a:lnRef idx="2">
-            <a:schemeClr val="accent1"/>
-          </a:lnRef>
-          <a:fillRef idx="0">
-            <a:schemeClr val="accent1"/>
-          </a:fillRef>
-          <a:effectRef idx="1">
-            <a:schemeClr val="accent1"/>
-          </a:effectRef>
-          <a:fontRef idx="minor">
-            <a:schemeClr val="tx1"/>
-          </a:fontRef>
-        </p:style>
+          <a:effectLst/>
+        </p:spPr>
       </p:cxnSp>
       <p:sp>
         <p:nvSpPr>
@@ -24853,21 +24359,8 @@
             </a:solidFill>
             <a:prstDash val="dash"/>
           </a:ln>
-        </p:spPr>
-        <p:style>
-          <a:lnRef idx="2">
-            <a:schemeClr val="accent1"/>
-          </a:lnRef>
-          <a:fillRef idx="0">
-            <a:schemeClr val="accent1"/>
-          </a:fillRef>
-          <a:effectRef idx="1">
-            <a:schemeClr val="accent1"/>
-          </a:effectRef>
-          <a:fontRef idx="minor">
-            <a:schemeClr val="tx1"/>
-          </a:fontRef>
-        </p:style>
+          <a:effectLst/>
+        </p:spPr>
       </p:cxnSp>
       <p:sp>
         <p:nvSpPr>
@@ -25075,21 +24568,8 @@
             </a:solidFill>
             <a:tailEnd type="triangle" w="med" len="med"/>
           </a:ln>
-        </p:spPr>
-        <p:style>
-          <a:lnRef idx="2">
-            <a:schemeClr val="accent1"/>
-          </a:lnRef>
-          <a:fillRef idx="0">
-            <a:schemeClr val="accent1"/>
-          </a:fillRef>
-          <a:effectRef idx="1">
-            <a:schemeClr val="accent1"/>
-          </a:effectRef>
-          <a:fontRef idx="minor">
-            <a:schemeClr val="tx1"/>
-          </a:fontRef>
-        </p:style>
+          <a:effectLst/>
+        </p:spPr>
       </p:cxnSp>
       <p:sp>
         <p:nvSpPr>
@@ -25204,21 +24684,8 @@
             </a:solidFill>
             <a:tailEnd type="triangle" w="med" len="med"/>
           </a:ln>
-        </p:spPr>
-        <p:style>
-          <a:lnRef idx="2">
-            <a:schemeClr val="accent1"/>
-          </a:lnRef>
-          <a:fillRef idx="0">
-            <a:schemeClr val="accent1"/>
-          </a:fillRef>
-          <a:effectRef idx="1">
-            <a:schemeClr val="accent1"/>
-          </a:effectRef>
-          <a:fontRef idx="minor">
-            <a:schemeClr val="tx1"/>
-          </a:fontRef>
-        </p:style>
+          <a:effectLst/>
+        </p:spPr>
       </p:cxnSp>
       <p:sp>
         <p:nvSpPr>
@@ -26769,21 +26236,8 @@
             </a:solidFill>
             <a:tailEnd type="triangle" w="med" len="med"/>
           </a:ln>
-        </p:spPr>
-        <p:style>
-          <a:lnRef idx="2">
-            <a:schemeClr val="accent1"/>
-          </a:lnRef>
-          <a:fillRef idx="0">
-            <a:schemeClr val="accent1"/>
-          </a:fillRef>
-          <a:effectRef idx="1">
-            <a:schemeClr val="accent1"/>
-          </a:effectRef>
-          <a:fontRef idx="minor">
-            <a:schemeClr val="tx1"/>
-          </a:fontRef>
-        </p:style>
+          <a:effectLst/>
+        </p:spPr>
       </p:cxnSp>
       <p:cxnSp>
         <p:nvCxnSpPr>
@@ -26805,21 +26259,8 @@
             </a:solidFill>
             <a:tailEnd type="triangle" w="med" len="med"/>
           </a:ln>
-        </p:spPr>
-        <p:style>
-          <a:lnRef idx="2">
-            <a:schemeClr val="accent1"/>
-          </a:lnRef>
-          <a:fillRef idx="0">
-            <a:schemeClr val="accent1"/>
-          </a:fillRef>
-          <a:effectRef idx="1">
-            <a:schemeClr val="accent1"/>
-          </a:effectRef>
-          <a:fontRef idx="minor">
-            <a:schemeClr val="tx1"/>
-          </a:fontRef>
-        </p:style>
+          <a:effectLst/>
+        </p:spPr>
       </p:cxnSp>
       <p:cxnSp>
         <p:nvCxnSpPr>
@@ -26841,21 +26282,8 @@
             </a:solidFill>
             <a:tailEnd type="triangle" w="med" len="med"/>
           </a:ln>
-        </p:spPr>
-        <p:style>
-          <a:lnRef idx="2">
-            <a:schemeClr val="accent1"/>
-          </a:lnRef>
-          <a:fillRef idx="0">
-            <a:schemeClr val="accent1"/>
-          </a:fillRef>
-          <a:effectRef idx="1">
-            <a:schemeClr val="accent1"/>
-          </a:effectRef>
-          <a:fontRef idx="minor">
-            <a:schemeClr val="tx1"/>
-          </a:fontRef>
-        </p:style>
+          <a:effectLst/>
+        </p:spPr>
       </p:cxnSp>
       <p:cxnSp>
         <p:nvCxnSpPr>
@@ -26877,21 +26305,8 @@
             </a:solidFill>
             <a:tailEnd type="triangle" w="med" len="med"/>
           </a:ln>
-        </p:spPr>
-        <p:style>
-          <a:lnRef idx="2">
-            <a:schemeClr val="accent1"/>
-          </a:lnRef>
-          <a:fillRef idx="0">
-            <a:schemeClr val="accent1"/>
-          </a:fillRef>
-          <a:effectRef idx="1">
-            <a:schemeClr val="accent1"/>
-          </a:effectRef>
-          <a:fontRef idx="minor">
-            <a:schemeClr val="tx1"/>
-          </a:fontRef>
-        </p:style>
+          <a:effectLst/>
+        </p:spPr>
       </p:cxnSp>
       <p:sp>
         <p:nvSpPr>
@@ -27226,21 +26641,8 @@
             <a:prstDash val="dash"/>
             <a:tailEnd type="triangle" w="med" len="med"/>
           </a:ln>
-        </p:spPr>
-        <p:style>
-          <a:lnRef idx="2">
-            <a:schemeClr val="accent1"/>
-          </a:lnRef>
-          <a:fillRef idx="0">
-            <a:schemeClr val="accent1"/>
-          </a:fillRef>
-          <a:effectRef idx="1">
-            <a:schemeClr val="accent1"/>
-          </a:effectRef>
-          <a:fontRef idx="minor">
-            <a:schemeClr val="tx1"/>
-          </a:fontRef>
-        </p:style>
+          <a:effectLst/>
+        </p:spPr>
       </p:cxnSp>
       <p:sp>
         <p:nvSpPr>
@@ -27308,21 +26710,8 @@
             </a:solidFill>
             <a:prstDash val="dash"/>
           </a:ln>
-        </p:spPr>
-        <p:style>
-          <a:lnRef idx="2">
-            <a:schemeClr val="accent1"/>
-          </a:lnRef>
-          <a:fillRef idx="0">
-            <a:schemeClr val="accent1"/>
-          </a:fillRef>
-          <a:effectRef idx="1">
-            <a:schemeClr val="accent1"/>
-          </a:effectRef>
-          <a:fontRef idx="minor">
-            <a:schemeClr val="tx1"/>
-          </a:fontRef>
-        </p:style>
+          <a:effectLst/>
+        </p:spPr>
       </p:cxnSp>
       <p:cxnSp>
         <p:nvCxnSpPr>
@@ -27345,21 +26734,8 @@
             <a:prstDash val="dash"/>
             <a:tailEnd type="triangle" w="med" len="med"/>
           </a:ln>
-        </p:spPr>
-        <p:style>
-          <a:lnRef idx="2">
-            <a:schemeClr val="accent1"/>
-          </a:lnRef>
-          <a:fillRef idx="0">
-            <a:schemeClr val="accent1"/>
-          </a:fillRef>
-          <a:effectRef idx="1">
-            <a:schemeClr val="accent1"/>
-          </a:effectRef>
-          <a:fontRef idx="minor">
-            <a:schemeClr val="tx1"/>
-          </a:fontRef>
-        </p:style>
+          <a:effectLst/>
+        </p:spPr>
       </p:cxnSp>
       <p:sp>
         <p:nvSpPr>
@@ -28128,21 +27504,8 @@
             </a:solidFill>
             <a:tailEnd type="triangle" w="med" len="med"/>
           </a:ln>
-        </p:spPr>
-        <p:style>
-          <a:lnRef idx="2">
-            <a:schemeClr val="accent1"/>
-          </a:lnRef>
-          <a:fillRef idx="0">
-            <a:schemeClr val="accent1"/>
-          </a:fillRef>
-          <a:effectRef idx="1">
-            <a:schemeClr val="accent1"/>
-          </a:effectRef>
-          <a:fontRef idx="minor">
-            <a:schemeClr val="tx1"/>
-          </a:fontRef>
-        </p:style>
+          <a:effectLst/>
+        </p:spPr>
       </p:cxnSp>
       <p:cxnSp>
         <p:nvCxnSpPr>
@@ -28164,21 +27527,8 @@
             </a:solidFill>
             <a:tailEnd type="triangle" w="med" len="med"/>
           </a:ln>
-        </p:spPr>
-        <p:style>
-          <a:lnRef idx="2">
-            <a:schemeClr val="accent1"/>
-          </a:lnRef>
-          <a:fillRef idx="0">
-            <a:schemeClr val="accent1"/>
-          </a:fillRef>
-          <a:effectRef idx="1">
-            <a:schemeClr val="accent1"/>
-          </a:effectRef>
-          <a:fontRef idx="minor">
-            <a:schemeClr val="tx1"/>
-          </a:fontRef>
-        </p:style>
+          <a:effectLst/>
+        </p:spPr>
       </p:cxnSp>
       <p:cxnSp>
         <p:nvCxnSpPr>
@@ -28200,21 +27550,8 @@
             </a:solidFill>
             <a:tailEnd type="triangle" w="med" len="med"/>
           </a:ln>
-        </p:spPr>
-        <p:style>
-          <a:lnRef idx="2">
-            <a:schemeClr val="accent1"/>
-          </a:lnRef>
-          <a:fillRef idx="0">
-            <a:schemeClr val="accent1"/>
-          </a:fillRef>
-          <a:effectRef idx="1">
-            <a:schemeClr val="accent1"/>
-          </a:effectRef>
-          <a:fontRef idx="minor">
-            <a:schemeClr val="tx1"/>
-          </a:fontRef>
-        </p:style>
+          <a:effectLst/>
+        </p:spPr>
       </p:cxnSp>
       <p:sp>
         <p:nvSpPr>
@@ -28331,21 +27668,8 @@
             <a:prstDash val="dash"/>
             <a:tailEnd type="triangle" w="med" len="med"/>
           </a:ln>
-        </p:spPr>
-        <p:style>
-          <a:lnRef idx="2">
-            <a:schemeClr val="accent1"/>
-          </a:lnRef>
-          <a:fillRef idx="0">
-            <a:schemeClr val="accent1"/>
-          </a:fillRef>
-          <a:effectRef idx="1">
-            <a:schemeClr val="accent1"/>
-          </a:effectRef>
-          <a:fontRef idx="minor">
-            <a:schemeClr val="tx1"/>
-          </a:fontRef>
-        </p:style>
+          <a:effectLst/>
+        </p:spPr>
       </p:cxnSp>
       <p:sp>
         <p:nvSpPr>

--- a/report/方案B_B2_架构图集.pptx
+++ b/report/方案B_B2_架构图集.pptx
@@ -3771,7 +3771,7 @@
                 <a:latin typeface="Segoe UI"/>
                 <a:ea typeface="Microsoft YaHei"/>
               </a:rPr>
-              <a:t>读侧 · Trino</a:t>
+              <a:t>读侧 · Serverless</a:t>
             </a:r>
           </a:p>
         </p:txBody>
@@ -4550,7 +4550,7 @@
                 <a:latin typeface="Segoe UI"/>
                 <a:ea typeface="Microsoft YaHei"/>
               </a:rPr>
-              <a:t>应用架构图 · 方案 B（湖仓一体 + Trino 读）</a:t>
+              <a:t>应用架构图 · 方案 B2（湖仓一体 · Databricks Serverless 读）</a:t>
             </a:r>
           </a:p>
         </p:txBody>
@@ -4790,7 +4790,7 @@
                 <a:latin typeface="Segoe UI"/>
                 <a:ea typeface="Microsoft YaHei"/>
               </a:rPr>
-              <a:t>方案 B · 湖仓一体 · 存算分离架构</a:t>
+              <a:t>方案 B2 · 湖仓一体 · 存算分离架构</a:t>
             </a:r>
           </a:p>
         </p:txBody>
@@ -4836,7 +4836,7 @@
                 <a:latin typeface="Segoe UI"/>
                 <a:ea typeface="Microsoft YaHei"/>
               </a:rPr>
-              <a:t>源系统 → 接入配置 → 抽取 → Iceberg 冷湖 → 统一计算层 → 消费入口 + 销毁回路</a:t>
+              <a:t>源系统 → 接入配置 → 抽取 → Iceberg 冷湖 → Databricks 读写一体计算层 → 消费入口 + 销毁回路</a:t>
             </a:r>
           </a:p>
         </p:txBody>
@@ -15164,7 +15164,7 @@
                 <a:latin typeface="Segoe UI"/>
                 <a:ea typeface="Microsoft YaHei"/>
               </a:rPr>
-              <a:t>应用架构图 · 方案 B（湖仓一体 + Trino 读）</a:t>
+              <a:t>应用架构图 · 方案 B2（湖仓一体 · Databricks Serverless 读）</a:t>
             </a:r>
           </a:p>
         </p:txBody>
@@ -15210,7 +15210,7 @@
                 <a:latin typeface="Segoe UI"/>
                 <a:ea typeface="Microsoft YaHei"/>
               </a:rPr>
-              <a:t>应用逻辑分层视角 · 与基础设施部署拓扑互补</a:t>
+              <a:t>应用逻辑分层视角 · 读侧 SQL Warehouse · 与基础设施部署拓扑互补</a:t>
             </a:r>
           </a:p>
         </p:txBody>
@@ -17857,7 +17857,7 @@
                 <a:latin typeface="Segoe UI"/>
                 <a:ea typeface="Microsoft YaHei"/>
               </a:rPr>
-              <a:t>Trino</a:t>
+              <a:t>Databricks Serverless</a:t>
             </a:r>
           </a:p>
           <a:p>
@@ -17880,7 +17880,7 @@
                 <a:latin typeface="Segoe UI"/>
                 <a:ea typeface="Microsoft YaHei"/>
               </a:rPr>
-              <a:t>MPP 查询引擎</a:t>
+              <a:t>SQL Warehouse 查询</a:t>
             </a:r>
           </a:p>
         </p:txBody>
@@ -17997,7 +17997,7 @@
                 <a:latin typeface="Segoe UI"/>
                 <a:ea typeface="Microsoft YaHei"/>
               </a:rPr>
-              <a:t>rules.json 表级授权 · SERVE 层首屏 2–5 s</a:t>
+              <a:t>Unity Catalog 表级授权 · SERVE 层首屏 2–5 s</a:t>
             </a:r>
           </a:p>
         </p:txBody>
@@ -19613,7 +19613,7 @@
                 <a:latin typeface="Segoe UI"/>
                 <a:ea typeface="Microsoft YaHei"/>
               </a:rPr>
-              <a:t>Key Vault · App Insights · Azure Monitor · Trino Query History · 全部 PaaS 私有端点 · 入口 WAF</a:t>
+              <a:t>Key Vault · App Insights · Azure Monitor · Databricks Query History · 全部 PaaS 私有端点 · 入口 WAF</a:t>
             </a:r>
           </a:p>
         </p:txBody>
@@ -19707,7 +19707,7 @@
                 <a:latin typeface="Segoe UI"/>
                 <a:ea typeface="Microsoft YaHei"/>
               </a:rPr>
-              <a:t>B 的取舍：</a:t>
+              <a:t>B2 读侧：</a:t>
             </a:r>
             <a:r>
               <a:rPr sz="680" b="0" i="0">
@@ -19717,7 +19717,7 @@
                 <a:latin typeface="Segoe UI"/>
                 <a:ea typeface="Microsoft YaHei"/>
               </a:rPr>
-              <a:t>引擎中立，但需自运维 Trino；列级脱敏不能直接用 UC</a:t>
+              <a:t>SQL Serverless 完全托管 · 空闲缩 0；代价是引擎绑定 + 需 Premium 层（NCC / 私有端点）</a:t>
             </a:r>
           </a:p>
         </p:txBody>
@@ -20285,7 +20285,7 @@
                 <a:latin typeface="Segoe UI"/>
                 <a:ea typeface="Microsoft YaHei"/>
               </a:rPr>
-              <a:t>方案 B · 湖仓一体 · 存算分离架构</a:t>
+              <a:t>方案 B2 · 湖仓一体 · 存算分离架构</a:t>
             </a:r>
           </a:p>
         </p:txBody>
@@ -20331,7 +20331,7 @@
                 <a:latin typeface="Segoe UI"/>
                 <a:ea typeface="Microsoft YaHei"/>
               </a:rPr>
-              <a:t>对象存储冷湖（Iceberg）· Databricks 写侧 + Trino 读侧 · PB 级从容</a:t>
+              <a:t>对象存储冷湖（Iceberg）· Databricks 写读一体（Serverless）· PB 级从容</a:t>
             </a:r>
           </a:p>
         </p:txBody>
@@ -23804,7 +23804,7 @@
                 <a:latin typeface="Segoe UI"/>
                 <a:ea typeface="Microsoft YaHei"/>
               </a:rPr>
-              <a:t>　热表物化 · Z-Order · 供 Trino 直接查询</a:t>
+              <a:t>　热表物化 · Z-Order · 供 SQL Warehouse 直接查询</a:t>
             </a:r>
           </a:p>
         </p:txBody>
@@ -23990,7 +23990,7 @@
                 <a:latin typeface="Segoe UI"/>
                 <a:ea typeface="Microsoft YaHei"/>
               </a:rPr>
-              <a:t>Trino 外表直查</a:t>
+              <a:t>Serverless 直查</a:t>
             </a:r>
           </a:p>
         </p:txBody>
@@ -24337,7 +24337,7 @@
                 <a:latin typeface="Segoe UI"/>
                 <a:ea typeface="Microsoft YaHei"/>
               </a:rPr>
-              <a:t>写侧 · 读侧并列</a:t>
+              <a:t>Databricks 读写一体</a:t>
             </a:r>
           </a:p>
         </p:txBody>
@@ -24847,7 +24847,7 @@
                 <a:latin typeface="Segoe UI"/>
                 <a:ea typeface="Microsoft YaHei"/>
               </a:rPr>
-              <a:t>Trino · 读侧查询引擎</a:t>
+              <a:t>SQL Warehouse · 读侧查询</a:t>
             </a:r>
           </a:p>
         </p:txBody>
@@ -24893,7 +24893,7 @@
                 <a:latin typeface="Segoe UI"/>
                 <a:ea typeface="Microsoft YaHei"/>
               </a:rPr>
-              <a:t>Iceberg 外表 · MPP 分布式</a:t>
+              <a:t>Serverless · 零运维 · 故障自动重建</a:t>
             </a:r>
           </a:p>
         </p:txBody>
@@ -24939,7 +24939,7 @@
                 <a:latin typeface="Segoe UI"/>
                 <a:ea typeface="Microsoft YaHei"/>
               </a:rPr>
-              <a:t>首屏 2–5 s · SERVE 层加速</a:t>
+              <a:t>Iceberg 直查 · SERVE 加速 · 首屏 2–5 s</a:t>
             </a:r>
           </a:p>
         </p:txBody>
@@ -24985,7 +24985,7 @@
                 <a:latin typeface="Segoe UI"/>
                 <a:ea typeface="Microsoft YaHei"/>
               </a:rPr>
-              <a:t>RLS 行级权限 · 查询网关</a:t>
+              <a:t>UC 表 / 行 / 列级授权 + 审计</a:t>
             </a:r>
           </a:p>
         </p:txBody>
@@ -25031,7 +25031,7 @@
                 <a:latin typeface="Segoe UI"/>
                 <a:ea typeface="Microsoft YaHei"/>
               </a:rPr>
-              <a:t>常驻小集群 · 弹性扩缩 ≈¥0.4–0.6 万/月</a:t>
+              <a:t>X-Small 6 DBU/h · 空闲缩 0 ≈¥0.5–0.9 万/月</a:t>
             </a:r>
           </a:p>
         </p:txBody>
@@ -27683,7 +27683,7 @@
                 <a:latin typeface="Segoe UI"/>
                 <a:ea typeface="Microsoft YaHei"/>
               </a:rPr>
-              <a:t>Databricks ≈¥0.4–0.8 万/月 · Trino ≈¥0.4–0.6 万/月</a:t>
+              <a:t>写侧 Jobs ≈¥0.4–0.8 万/月 · 读侧 Warehouse ≈¥0.5–0.9 万/月</a:t>
             </a:r>
           </a:p>
         </p:txBody>
@@ -27823,7 +27823,7 @@
                 <a:latin typeface="Segoe UI"/>
                 <a:ea typeface="Microsoft YaHei"/>
               </a:rPr>
-              <a:t>方案 B 要点</a:t>
+              <a:t>方案 B2 要点</a:t>
             </a:r>
           </a:p>
         </p:txBody>
@@ -27879,7 +27879,7 @@
                 <a:latin typeface="Segoe UI"/>
                 <a:ea typeface="Microsoft YaHei"/>
               </a:rPr>
-              <a:t>冷湖常驻，Databricks / Trino 按需拉起 · 按量计费</a:t>
+              <a:t>冷湖常驻，Serverless 读写按需拉起 · 空闲缩 0</a:t>
             </a:r>
           </a:p>
         </p:txBody>
@@ -28037,7 +28037,7 @@
                 <a:latin typeface="Segoe UI"/>
                 <a:ea typeface="Microsoft YaHei"/>
               </a:rPr>
-              <a:t>· 与 B2 差异 — </a:t>
+              <a:t>· 读侧托管 — </a:t>
             </a:r>
             <a:r>
               <a:rPr sz="610" b="0" i="0">
@@ -28047,7 +28047,7 @@
                 <a:latin typeface="Segoe UI"/>
                 <a:ea typeface="Microsoft YaHei"/>
               </a:rPr>
-              <a:t>自建 Trino（rules.json 授权）· 引擎中立避免锁定</a:t>
+              <a:t>SQL Warehouse Serverless · 零集群运维 · UC 授权</a:t>
             </a:r>
           </a:p>
         </p:txBody>
@@ -28197,7 +28197,7 @@
                 <a:latin typeface="Segoe UI"/>
                 <a:ea typeface="Microsoft YaHei"/>
               </a:rPr>
-              <a:t>B 的取舍</a:t>
+              <a:t>B2 的取舍</a:t>
             </a:r>
           </a:p>
         </p:txBody>
@@ -28243,7 +28243,7 @@
                 <a:latin typeface="Segoe UI"/>
                 <a:ea typeface="Microsoft YaHei"/>
               </a:rPr>
-              <a:t>引擎中立、无单一厂商锁定；代价是需自运维 Trino 集群（部署 / 升级 / 容量），列级脱敏不能直接用 Unity Catalog。</a:t>
+              <a:t>读侧完全托管、UC 治理原生；代价是计算引擎绑定 Databricks（数据仍为开放 Iceberg，随时可换引擎），且 Serverless / NCC 需 Premium 层。</a:t>
             </a:r>
           </a:p>
         </p:txBody>

--- a/report/方案B_B2_架构图集.pptx
+++ b/report/方案B_B2_架构图集.pptx
@@ -5442,7 +5442,7 @@
                 <a:latin typeface="Segoe UI"/>
                 <a:ea typeface="Microsoft YaHei"/>
               </a:rPr>
-              <a:t>抽取 · DataX / SeaTunnel</a:t>
+              <a:t>抽取 · Apache SeaTunnel</a:t>
             </a:r>
           </a:p>
         </p:txBody>
@@ -7480,7 +7480,7 @@
                 <a:latin typeface="Segoe UI"/>
                 <a:ea typeface="Microsoft YaHei"/>
               </a:rPr>
-              <a:t>DataX / SeaTunnel</a:t>
+              <a:t>Apache SeaTunnel</a:t>
             </a:r>
           </a:p>
           <a:p>
@@ -11493,7 +11493,7 @@
                 <a:latin typeface="Segoe UI"/>
                 <a:ea typeface="Microsoft YaHei"/>
               </a:rPr>
-              <a:t>DataX / SeaTunnel 抽取 · NAT 固定 IP</a:t>
+              <a:t>SeaTunnel 抽取 · NAT 固定 IP</a:t>
             </a:r>
           </a:p>
         </p:txBody>

--- a/report/方案B_B2_架构图集.pptx
+++ b/report/方案B_B2_架构图集.pptx
@@ -5498,7 +5498,7 @@
                 <a:latin typeface="Segoe UI"/>
                 <a:ea typeface="Microsoft YaHei"/>
               </a:rPr>
-              <a:t>编排 · Airflow / ADF</a:t>
+              <a:t>编排 · Azure Data Factory</a:t>
             </a:r>
           </a:p>
         </p:txBody>
@@ -7503,7 +7503,7 @@
                 <a:latin typeface="Segoe UI"/>
                 <a:ea typeface="Microsoft YaHei"/>
               </a:rPr>
-              <a:t>仅读权限 · 按勾选的表抽取（10 选 5）· Airflow / ADF 编排</a:t>
+              <a:t>仅读权限 · 按勾选的表抽取（10 选 5）· ADF 编排</a:t>
             </a:r>
           </a:p>
         </p:txBody>
@@ -17231,7 +17231,7 @@
                 <a:latin typeface="Segoe UI"/>
                 <a:ea typeface="Microsoft YaHei"/>
               </a:rPr>
-              <a:t>Airflow / ADF</a:t>
+              <a:t>Azure Data Factory</a:t>
             </a:r>
           </a:p>
           <a:p>
@@ -22485,7 +22485,7 @@
                 <a:latin typeface="Segoe UI"/>
                 <a:ea typeface="Microsoft YaHei"/>
               </a:rPr>
-              <a:t>Airflow / ADF 编排</a:t>
+              <a:t>ADF 编排调度</a:t>
             </a:r>
           </a:p>
         </p:txBody>

--- a/report/方案B_B2_架构图集.pptx
+++ b/report/方案B_B2_架构图集.pptx
@@ -4550,7 +4550,7 @@
                 <a:latin typeface="Segoe UI"/>
                 <a:ea typeface="Microsoft YaHei"/>
               </a:rPr>
-              <a:t>应用架构图 · 方案 B2（湖仓一体 · Databricks Serverless 读）</a:t>
+              <a:t>应用架构图 · 方案 B2（湖仓一体 · Serverless SQL Warehouse 读）</a:t>
             </a:r>
           </a:p>
         </p:txBody>
@@ -15164,7 +15164,7 @@
                 <a:latin typeface="Segoe UI"/>
                 <a:ea typeface="Microsoft YaHei"/>
               </a:rPr>
-              <a:t>应用架构图 · 方案 B2（湖仓一体 · Databricks Serverless 读）</a:t>
+              <a:t>应用架构图 · 方案 B2（湖仓一体 · Serverless SQL Warehouse 读）</a:t>
             </a:r>
           </a:p>
         </p:txBody>
@@ -17857,7 +17857,7 @@
                 <a:latin typeface="Segoe UI"/>
                 <a:ea typeface="Microsoft YaHei"/>
               </a:rPr>
-              <a:t>Databricks Serverless</a:t>
+              <a:t>Serverless SQL Warehouse</a:t>
             </a:r>
           </a:p>
           <a:p>
@@ -17880,7 +17880,7 @@
                 <a:latin typeface="Segoe UI"/>
                 <a:ea typeface="Microsoft YaHei"/>
               </a:rPr>
-              <a:t>SQL Warehouse 查询</a:t>
+              <a:t>读侧查询 · 空闲缩 0</a:t>
             </a:r>
           </a:p>
         </p:txBody>
@@ -19717,7 +19717,7 @@
                 <a:latin typeface="Segoe UI"/>
                 <a:ea typeface="Microsoft YaHei"/>
               </a:rPr>
-              <a:t>SQL Serverless 完全托管 · 空闲缩 0；代价是引擎绑定 + 需 Premium 层（NCC / 私有端点）</a:t>
+              <a:t>Serverless SQL Warehouse 完全托管 · 空闲缩 0；代价是引擎绑定 + 需 Premium 层（NCC / PE）</a:t>
             </a:r>
           </a:p>
         </p:txBody>
@@ -24847,7 +24847,7 @@
                 <a:latin typeface="Segoe UI"/>
                 <a:ea typeface="Microsoft YaHei"/>
               </a:rPr>
-              <a:t>SQL Warehouse · 读侧查询</a:t>
+              <a:t>Serverless SQL Warehouse</a:t>
             </a:r>
           </a:p>
         </p:txBody>
@@ -24893,7 +24893,7 @@
                 <a:latin typeface="Segoe UI"/>
                 <a:ea typeface="Microsoft YaHei"/>
               </a:rPr>
-              <a:t>Serverless · 零运维 · 故障自动重建</a:t>
+              <a:t>读侧查询 · 零运维 · 故障自动重建</a:t>
             </a:r>
           </a:p>
         </p:txBody>
@@ -28047,7 +28047,7 @@
                 <a:latin typeface="Segoe UI"/>
                 <a:ea typeface="Microsoft YaHei"/>
               </a:rPr>
-              <a:t>SQL Warehouse Serverless · 零集群运维 · UC 授权</a:t>
+              <a:t>Serverless SQL Warehouse · 零集群运维 · UC 授权</a:t>
             </a:r>
           </a:p>
         </p:txBody>

--- a/report/方案B_B2_架构图集.pptx
+++ b/report/方案B_B2_架构图集.pptx
@@ -9678,52 +9678,6 @@
         </p:nvSpPr>
         <p:spPr>
           <a:xfrm>
-            <a:off x="2377440" y="2587752"/>
-            <a:ext cx="155448" cy="118872"/>
-          </a:xfrm>
-          <a:prstGeom prst="roundRect">
-            <a:avLst>
-              <a:gd name="adj" fmla="val 15384"/>
-            </a:avLst>
-          </a:prstGeom>
-          <a:solidFill>
-            <a:srgbClr val="DC2626"/>
-          </a:solidFill>
-          <a:ln>
-            <a:noFill/>
-          </a:ln>
-          <a:effectLst/>
-        </p:spPr>
-        <p:style>
-          <a:lnRef idx="1">
-            <a:schemeClr val="accent1"/>
-          </a:lnRef>
-          <a:fillRef idx="3">
-            <a:schemeClr val="accent1"/>
-          </a:fillRef>
-          <a:effectRef idx="2">
-            <a:schemeClr val="accent1"/>
-          </a:effectRef>
-          <a:fontRef idx="minor">
-            <a:schemeClr val="lt1"/>
-          </a:fontRef>
-        </p:style>
-        <p:txBody>
-          <a:bodyPr rtlCol="0" anchor="ctr"/>
-          <a:lstStyle/>
-          <a:p>
-            <a:pPr algn="ctr"/>
-          </a:p>
-        </p:txBody>
-      </p:sp>
-      <p:sp>
-        <p:nvSpPr>
-          <p:cNvPr id="98" name="Rounded Rectangle 97"/>
-          <p:cNvSpPr/>
-          <p:nvPr/>
-        </p:nvSpPr>
-        <p:spPr>
-          <a:xfrm>
             <a:off x="3346704" y="2505456"/>
             <a:ext cx="1335024" cy="420624"/>
           </a:xfrm>
@@ -9766,7 +9720,7 @@
       </p:sp>
       <p:sp>
         <p:nvSpPr>
-          <p:cNvPr id="99" name="TextBox 98"/>
+          <p:cNvPr id="98" name="TextBox 97"/>
           <p:cNvSpPr txBox="1"/>
           <p:nvPr/>
         </p:nvSpPr>
@@ -9835,53 +9789,7 @@
       </p:sp>
       <p:sp>
         <p:nvSpPr>
-          <p:cNvPr id="100" name="Rounded Rectangle 99"/>
-          <p:cNvSpPr/>
-          <p:nvPr/>
-        </p:nvSpPr>
-        <p:spPr>
-          <a:xfrm>
-            <a:off x="3410712" y="2587752"/>
-            <a:ext cx="155448" cy="118872"/>
-          </a:xfrm>
-          <a:prstGeom prst="roundRect">
-            <a:avLst>
-              <a:gd name="adj" fmla="val 15384"/>
-            </a:avLst>
-          </a:prstGeom>
-          <a:solidFill>
-            <a:srgbClr val="0078D4"/>
-          </a:solidFill>
-          <a:ln>
-            <a:noFill/>
-          </a:ln>
-          <a:effectLst/>
-        </p:spPr>
-        <p:style>
-          <a:lnRef idx="1">
-            <a:schemeClr val="accent1"/>
-          </a:lnRef>
-          <a:fillRef idx="3">
-            <a:schemeClr val="accent1"/>
-          </a:fillRef>
-          <a:effectRef idx="2">
-            <a:schemeClr val="accent1"/>
-          </a:effectRef>
-          <a:fontRef idx="minor">
-            <a:schemeClr val="lt1"/>
-          </a:fontRef>
-        </p:style>
-        <p:txBody>
-          <a:bodyPr rtlCol="0" anchor="ctr"/>
-          <a:lstStyle/>
-          <a:p>
-            <a:pPr algn="ctr"/>
-          </a:p>
-        </p:txBody>
-      </p:sp>
-      <p:sp>
-        <p:nvSpPr>
-          <p:cNvPr id="101" name="Rounded Rectangle 100"/>
+          <p:cNvPr id="99" name="Rounded Rectangle 98"/>
           <p:cNvSpPr/>
           <p:nvPr/>
         </p:nvSpPr>
@@ -9929,7 +9837,7 @@
       </p:sp>
       <p:sp>
         <p:nvSpPr>
-          <p:cNvPr id="102" name="TextBox 101"/>
+          <p:cNvPr id="100" name="TextBox 99"/>
           <p:cNvSpPr txBox="1"/>
           <p:nvPr/>
         </p:nvSpPr>
@@ -9996,55 +9904,9 @@
           </a:p>
         </p:txBody>
       </p:sp>
-      <p:sp>
-        <p:nvSpPr>
-          <p:cNvPr id="103" name="Rounded Rectangle 102"/>
-          <p:cNvSpPr/>
-          <p:nvPr/>
-        </p:nvSpPr>
-        <p:spPr>
-          <a:xfrm>
-            <a:off x="4892040" y="2587752"/>
-            <a:ext cx="155448" cy="118872"/>
-          </a:xfrm>
-          <a:prstGeom prst="roundRect">
-            <a:avLst>
-              <a:gd name="adj" fmla="val 15384"/>
-            </a:avLst>
-          </a:prstGeom>
-          <a:solidFill>
-            <a:srgbClr val="D97706"/>
-          </a:solidFill>
-          <a:ln>
-            <a:noFill/>
-          </a:ln>
-          <a:effectLst/>
-        </p:spPr>
-        <p:style>
-          <a:lnRef idx="1">
-            <a:schemeClr val="accent1"/>
-          </a:lnRef>
-          <a:fillRef idx="3">
-            <a:schemeClr val="accent1"/>
-          </a:fillRef>
-          <a:effectRef idx="2">
-            <a:schemeClr val="accent1"/>
-          </a:effectRef>
-          <a:fontRef idx="minor">
-            <a:schemeClr val="lt1"/>
-          </a:fontRef>
-        </p:style>
-        <p:txBody>
-          <a:bodyPr rtlCol="0" anchor="ctr"/>
-          <a:lstStyle/>
-          <a:p>
-            <a:pPr algn="ctr"/>
-          </a:p>
-        </p:txBody>
-      </p:sp>
       <p:cxnSp>
         <p:nvCxnSpPr>
-          <p:cNvPr id="104" name="Connector 103"/>
+          <p:cNvPr id="101" name="Connector 100"/>
           <p:cNvCxnSpPr/>
           <p:nvPr/>
         </p:nvCxnSpPr>
@@ -10067,7 +9929,7 @@
       </p:cxnSp>
       <p:cxnSp>
         <p:nvCxnSpPr>
-          <p:cNvPr id="105" name="Connector 104"/>
+          <p:cNvPr id="102" name="Connector 101"/>
           <p:cNvCxnSpPr/>
           <p:nvPr/>
         </p:nvCxnSpPr>
@@ -10090,7 +9952,7 @@
       </p:cxnSp>
       <p:cxnSp>
         <p:nvCxnSpPr>
-          <p:cNvPr id="106" name="Connector 105"/>
+          <p:cNvPr id="103" name="Connector 102"/>
           <p:cNvCxnSpPr/>
           <p:nvPr/>
         </p:nvCxnSpPr>
@@ -10113,7 +9975,7 @@
       </p:cxnSp>
       <p:sp>
         <p:nvSpPr>
-          <p:cNvPr id="107" name="TextBox 106"/>
+          <p:cNvPr id="104" name="TextBox 103"/>
           <p:cNvSpPr txBox="1"/>
           <p:nvPr/>
         </p:nvSpPr>
@@ -10169,7 +10031,7 @@
       </p:sp>
       <p:sp>
         <p:nvSpPr>
-          <p:cNvPr id="108" name="Rounded Rectangle 107"/>
+          <p:cNvPr id="105" name="Rounded Rectangle 104"/>
           <p:cNvSpPr/>
           <p:nvPr/>
         </p:nvSpPr>
@@ -10217,7 +10079,7 @@
       </p:sp>
       <p:sp>
         <p:nvSpPr>
-          <p:cNvPr id="109" name="TextBox 108"/>
+          <p:cNvPr id="106" name="TextBox 105"/>
           <p:cNvSpPr txBox="1"/>
           <p:nvPr/>
         </p:nvSpPr>
@@ -10263,7 +10125,7 @@
       </p:sp>
       <p:sp>
         <p:nvSpPr>
-          <p:cNvPr id="110" name="TextBox 109"/>
+          <p:cNvPr id="107" name="TextBox 106"/>
           <p:cNvSpPr txBox="1"/>
           <p:nvPr/>
         </p:nvSpPr>
@@ -10309,7 +10171,7 @@
       </p:sp>
       <p:sp>
         <p:nvSpPr>
-          <p:cNvPr id="111" name="Rounded Rectangle 110"/>
+          <p:cNvPr id="108" name="Rounded Rectangle 107"/>
           <p:cNvSpPr/>
           <p:nvPr/>
         </p:nvSpPr>
@@ -10356,7 +10218,7 @@
       </p:sp>
       <p:sp>
         <p:nvSpPr>
-          <p:cNvPr id="112" name="TextBox 111"/>
+          <p:cNvPr id="109" name="TextBox 108"/>
           <p:cNvSpPr txBox="1"/>
           <p:nvPr/>
         </p:nvSpPr>
@@ -10402,7 +10264,7 @@
       </p:sp>
       <p:sp>
         <p:nvSpPr>
-          <p:cNvPr id="113" name="Rounded Rectangle 112"/>
+          <p:cNvPr id="110" name="Rounded Rectangle 109"/>
           <p:cNvSpPr/>
           <p:nvPr/>
         </p:nvSpPr>
@@ -10450,7 +10312,7 @@
       </p:sp>
       <p:sp>
         <p:nvSpPr>
-          <p:cNvPr id="114" name="TextBox 113"/>
+          <p:cNvPr id="111" name="TextBox 110"/>
           <p:cNvSpPr txBox="1"/>
           <p:nvPr/>
         </p:nvSpPr>
@@ -10519,7 +10381,7 @@
       </p:sp>
       <p:sp>
         <p:nvSpPr>
-          <p:cNvPr id="115" name="Rounded Rectangle 114"/>
+          <p:cNvPr id="112" name="Rounded Rectangle 111"/>
           <p:cNvSpPr/>
           <p:nvPr/>
         </p:nvSpPr>
@@ -10567,7 +10429,7 @@
       </p:sp>
       <p:sp>
         <p:nvSpPr>
-          <p:cNvPr id="116" name="TextBox 115"/>
+          <p:cNvPr id="113" name="TextBox 112"/>
           <p:cNvSpPr txBox="1"/>
           <p:nvPr/>
         </p:nvSpPr>
@@ -10636,7 +10498,7 @@
       </p:sp>
       <p:sp>
         <p:nvSpPr>
-          <p:cNvPr id="117" name="Rounded Rectangle 116"/>
+          <p:cNvPr id="114" name="Rounded Rectangle 113"/>
           <p:cNvSpPr/>
           <p:nvPr/>
         </p:nvSpPr>
@@ -10684,7 +10546,7 @@
       </p:sp>
       <p:sp>
         <p:nvSpPr>
-          <p:cNvPr id="118" name="TextBox 117"/>
+          <p:cNvPr id="115" name="TextBox 114"/>
           <p:cNvSpPr txBox="1"/>
           <p:nvPr/>
         </p:nvSpPr>
@@ -10730,7 +10592,7 @@
       </p:sp>
       <p:sp>
         <p:nvSpPr>
-          <p:cNvPr id="119" name="Rounded Rectangle 118"/>
+          <p:cNvPr id="116" name="Rounded Rectangle 115"/>
           <p:cNvSpPr/>
           <p:nvPr/>
         </p:nvSpPr>
@@ -10778,7 +10640,7 @@
       </p:sp>
       <p:sp>
         <p:nvSpPr>
-          <p:cNvPr id="120" name="TextBox 119"/>
+          <p:cNvPr id="117" name="TextBox 116"/>
           <p:cNvSpPr txBox="1"/>
           <p:nvPr/>
         </p:nvSpPr>
@@ -10824,7 +10686,7 @@
       </p:sp>
       <p:sp>
         <p:nvSpPr>
-          <p:cNvPr id="121" name="Rounded Rectangle 120"/>
+          <p:cNvPr id="118" name="Rounded Rectangle 117"/>
           <p:cNvSpPr/>
           <p:nvPr/>
         </p:nvSpPr>
@@ -10872,7 +10734,7 @@
       </p:sp>
       <p:sp>
         <p:nvSpPr>
-          <p:cNvPr id="122" name="TextBox 121"/>
+          <p:cNvPr id="119" name="TextBox 118"/>
           <p:cNvSpPr txBox="1"/>
           <p:nvPr/>
         </p:nvSpPr>
@@ -10918,7 +10780,7 @@
       </p:sp>
       <p:sp>
         <p:nvSpPr>
-          <p:cNvPr id="123" name="Rounded Rectangle 122"/>
+          <p:cNvPr id="120" name="Rounded Rectangle 119"/>
           <p:cNvSpPr/>
           <p:nvPr/>
         </p:nvSpPr>
@@ -10966,7 +10828,7 @@
       </p:sp>
       <p:sp>
         <p:nvSpPr>
-          <p:cNvPr id="124" name="TextBox 123"/>
+          <p:cNvPr id="121" name="TextBox 120"/>
           <p:cNvSpPr txBox="1"/>
           <p:nvPr/>
         </p:nvSpPr>
@@ -11012,7 +10874,7 @@
       </p:sp>
       <p:sp>
         <p:nvSpPr>
-          <p:cNvPr id="125" name="Rounded Rectangle 124"/>
+          <p:cNvPr id="122" name="Rounded Rectangle 121"/>
           <p:cNvSpPr/>
           <p:nvPr/>
         </p:nvSpPr>
@@ -11060,7 +10922,7 @@
       </p:sp>
       <p:sp>
         <p:nvSpPr>
-          <p:cNvPr id="126" name="TextBox 125"/>
+          <p:cNvPr id="123" name="TextBox 122"/>
           <p:cNvSpPr txBox="1"/>
           <p:nvPr/>
         </p:nvSpPr>
@@ -11106,7 +10968,7 @@
       </p:sp>
       <p:sp>
         <p:nvSpPr>
-          <p:cNvPr id="127" name="Rounded Rectangle 126"/>
+          <p:cNvPr id="124" name="Rounded Rectangle 123"/>
           <p:cNvSpPr/>
           <p:nvPr/>
         </p:nvSpPr>
@@ -11154,7 +11016,7 @@
       </p:sp>
       <p:sp>
         <p:nvSpPr>
-          <p:cNvPr id="128" name="TextBox 127"/>
+          <p:cNvPr id="125" name="TextBox 124"/>
           <p:cNvSpPr txBox="1"/>
           <p:nvPr/>
         </p:nvSpPr>
@@ -11200,7 +11062,7 @@
       </p:sp>
       <p:sp>
         <p:nvSpPr>
-          <p:cNvPr id="129" name="TextBox 128"/>
+          <p:cNvPr id="126" name="TextBox 125"/>
           <p:cNvSpPr txBox="1"/>
           <p:nvPr/>
         </p:nvSpPr>
@@ -11246,7 +11108,7 @@
       </p:sp>
       <p:cxnSp>
         <p:nvCxnSpPr>
-          <p:cNvPr id="130" name="Connector 129"/>
+          <p:cNvPr id="127" name="Connector 126"/>
           <p:cNvCxnSpPr/>
           <p:nvPr/>
         </p:nvCxnSpPr>
@@ -11269,7 +11131,7 @@
       </p:cxnSp>
       <p:sp>
         <p:nvSpPr>
-          <p:cNvPr id="131" name="TextBox 130"/>
+          <p:cNvPr id="128" name="TextBox 127"/>
           <p:cNvSpPr txBox="1"/>
           <p:nvPr/>
         </p:nvSpPr>
@@ -11315,7 +11177,7 @@
       </p:sp>
       <p:sp>
         <p:nvSpPr>
-          <p:cNvPr id="132" name="TextBox 131"/>
+          <p:cNvPr id="129" name="TextBox 128"/>
           <p:cNvSpPr txBox="1"/>
           <p:nvPr/>
         </p:nvSpPr>
@@ -11361,7 +11223,7 @@
       </p:sp>
       <p:cxnSp>
         <p:nvCxnSpPr>
-          <p:cNvPr id="133" name="Connector 132"/>
+          <p:cNvPr id="130" name="Connector 129"/>
           <p:cNvCxnSpPr/>
           <p:nvPr/>
         </p:nvCxnSpPr>
@@ -11384,7 +11246,7 @@
       </p:cxnSp>
       <p:sp>
         <p:nvSpPr>
-          <p:cNvPr id="134" name="TextBox 133"/>
+          <p:cNvPr id="131" name="TextBox 130"/>
           <p:cNvSpPr txBox="1"/>
           <p:nvPr/>
         </p:nvSpPr>
@@ -11430,7 +11292,7 @@
       </p:sp>
       <p:cxnSp>
         <p:nvCxnSpPr>
-          <p:cNvPr id="135" name="Connector 134"/>
+          <p:cNvPr id="132" name="Connector 131"/>
           <p:cNvCxnSpPr/>
           <p:nvPr/>
         </p:nvCxnSpPr>
@@ -11454,7 +11316,7 @@
       </p:cxnSp>
       <p:sp>
         <p:nvSpPr>
-          <p:cNvPr id="136" name="TextBox 135"/>
+          <p:cNvPr id="133" name="TextBox 132"/>
           <p:cNvSpPr txBox="1"/>
           <p:nvPr/>
         </p:nvSpPr>
@@ -11500,7 +11362,7 @@
       </p:sp>
       <p:cxnSp>
         <p:nvCxnSpPr>
-          <p:cNvPr id="137" name="Connector 136"/>
+          <p:cNvPr id="134" name="Connector 133"/>
           <p:cNvCxnSpPr/>
           <p:nvPr/>
         </p:nvCxnSpPr>
@@ -11524,7 +11386,7 @@
       </p:cxnSp>
       <p:sp>
         <p:nvSpPr>
-          <p:cNvPr id="138" name="TextBox 137"/>
+          <p:cNvPr id="135" name="TextBox 134"/>
           <p:cNvSpPr txBox="1"/>
           <p:nvPr/>
         </p:nvSpPr>
@@ -11570,7 +11432,7 @@
       </p:sp>
       <p:cxnSp>
         <p:nvCxnSpPr>
-          <p:cNvPr id="139" name="Connector 138"/>
+          <p:cNvPr id="136" name="Connector 135"/>
           <p:cNvCxnSpPr/>
           <p:nvPr/>
         </p:nvCxnSpPr>
@@ -11593,7 +11455,7 @@
       </p:cxnSp>
       <p:cxnSp>
         <p:nvCxnSpPr>
-          <p:cNvPr id="140" name="Connector 139"/>
+          <p:cNvPr id="137" name="Connector 136"/>
           <p:cNvCxnSpPr/>
           <p:nvPr/>
         </p:nvCxnSpPr>
@@ -11617,7 +11479,7 @@
       </p:cxnSp>
       <p:sp>
         <p:nvSpPr>
-          <p:cNvPr id="141" name="TextBox 140"/>
+          <p:cNvPr id="138" name="TextBox 137"/>
           <p:cNvSpPr txBox="1"/>
           <p:nvPr/>
         </p:nvSpPr>
@@ -11663,7 +11525,7 @@
       </p:sp>
       <p:sp>
         <p:nvSpPr>
-          <p:cNvPr id="142" name="Rounded Rectangle 141"/>
+          <p:cNvPr id="139" name="Rounded Rectangle 138"/>
           <p:cNvSpPr/>
           <p:nvPr/>
         </p:nvSpPr>
@@ -11711,7 +11573,7 @@
       </p:sp>
       <p:sp>
         <p:nvSpPr>
-          <p:cNvPr id="143" name="TextBox 142"/>
+          <p:cNvPr id="140" name="TextBox 139"/>
           <p:cNvSpPr txBox="1"/>
           <p:nvPr/>
         </p:nvSpPr>
@@ -11757,7 +11619,7 @@
       </p:sp>
       <p:sp>
         <p:nvSpPr>
-          <p:cNvPr id="144" name="Rounded Rectangle 143"/>
+          <p:cNvPr id="141" name="Rounded Rectangle 140"/>
           <p:cNvSpPr/>
           <p:nvPr/>
         </p:nvSpPr>
@@ -11811,7 +11673,7 @@
       </p:sp>
       <p:sp>
         <p:nvSpPr>
-          <p:cNvPr id="145" name="Rounded Rectangle 144"/>
+          <p:cNvPr id="142" name="Rounded Rectangle 141"/>
           <p:cNvSpPr/>
           <p:nvPr/>
         </p:nvSpPr>
@@ -11857,7 +11719,7 @@
       </p:sp>
       <p:sp>
         <p:nvSpPr>
-          <p:cNvPr id="146" name="TextBox 145"/>
+          <p:cNvPr id="143" name="TextBox 142"/>
           <p:cNvSpPr txBox="1"/>
           <p:nvPr/>
         </p:nvSpPr>
@@ -11903,7 +11765,7 @@
       </p:sp>
       <p:sp>
         <p:nvSpPr>
-          <p:cNvPr id="147" name="TextBox 146"/>
+          <p:cNvPr id="144" name="TextBox 143"/>
           <p:cNvSpPr txBox="1"/>
           <p:nvPr/>
         </p:nvSpPr>
@@ -11949,7 +11811,7 @@
       </p:sp>
       <p:sp>
         <p:nvSpPr>
-          <p:cNvPr id="148" name="TextBox 147"/>
+          <p:cNvPr id="145" name="TextBox 144"/>
           <p:cNvSpPr txBox="1"/>
           <p:nvPr/>
         </p:nvSpPr>
@@ -11995,7 +11857,7 @@
       </p:sp>
       <p:sp>
         <p:nvSpPr>
-          <p:cNvPr id="149" name="Rounded Rectangle 148"/>
+          <p:cNvPr id="146" name="Rounded Rectangle 145"/>
           <p:cNvSpPr/>
           <p:nvPr/>
         </p:nvSpPr>
@@ -12043,7 +11905,7 @@
       </p:sp>
       <p:sp>
         <p:nvSpPr>
-          <p:cNvPr id="150" name="TextBox 149"/>
+          <p:cNvPr id="147" name="TextBox 146"/>
           <p:cNvSpPr txBox="1"/>
           <p:nvPr/>
         </p:nvSpPr>
@@ -12089,7 +11951,7 @@
       </p:sp>
       <p:sp>
         <p:nvSpPr>
-          <p:cNvPr id="151" name="TextBox 150"/>
+          <p:cNvPr id="148" name="TextBox 147"/>
           <p:cNvSpPr txBox="1"/>
           <p:nvPr/>
         </p:nvSpPr>
@@ -12135,7 +11997,7 @@
       </p:sp>
       <p:sp>
         <p:nvSpPr>
-          <p:cNvPr id="152" name="Rounded Rectangle 151"/>
+          <p:cNvPr id="149" name="Rounded Rectangle 148"/>
           <p:cNvSpPr/>
           <p:nvPr/>
         </p:nvSpPr>
@@ -12189,7 +12051,7 @@
       </p:sp>
       <p:sp>
         <p:nvSpPr>
-          <p:cNvPr id="153" name="Rounded Rectangle 152"/>
+          <p:cNvPr id="150" name="Rounded Rectangle 149"/>
           <p:cNvSpPr/>
           <p:nvPr/>
         </p:nvSpPr>
@@ -12235,7 +12097,7 @@
       </p:sp>
       <p:sp>
         <p:nvSpPr>
-          <p:cNvPr id="154" name="TextBox 153"/>
+          <p:cNvPr id="151" name="TextBox 150"/>
           <p:cNvSpPr txBox="1"/>
           <p:nvPr/>
         </p:nvSpPr>
@@ -12281,7 +12143,7 @@
       </p:sp>
       <p:sp>
         <p:nvSpPr>
-          <p:cNvPr id="155" name="TextBox 154"/>
+          <p:cNvPr id="152" name="TextBox 151"/>
           <p:cNvSpPr txBox="1"/>
           <p:nvPr/>
         </p:nvSpPr>
@@ -12327,7 +12189,7 @@
       </p:sp>
       <p:sp>
         <p:nvSpPr>
-          <p:cNvPr id="156" name="TextBox 155"/>
+          <p:cNvPr id="153" name="TextBox 152"/>
           <p:cNvSpPr txBox="1"/>
           <p:nvPr/>
         </p:nvSpPr>
@@ -12373,7 +12235,7 @@
       </p:sp>
       <p:sp>
         <p:nvSpPr>
-          <p:cNvPr id="157" name="Rounded Rectangle 156"/>
+          <p:cNvPr id="154" name="Rounded Rectangle 153"/>
           <p:cNvSpPr/>
           <p:nvPr/>
         </p:nvSpPr>
@@ -12421,7 +12283,7 @@
       </p:sp>
       <p:sp>
         <p:nvSpPr>
-          <p:cNvPr id="158" name="TextBox 157"/>
+          <p:cNvPr id="155" name="TextBox 154"/>
           <p:cNvSpPr txBox="1"/>
           <p:nvPr/>
         </p:nvSpPr>
@@ -12467,7 +12329,7 @@
       </p:sp>
       <p:sp>
         <p:nvSpPr>
-          <p:cNvPr id="159" name="TextBox 158"/>
+          <p:cNvPr id="156" name="TextBox 155"/>
           <p:cNvSpPr txBox="1"/>
           <p:nvPr/>
         </p:nvSpPr>
@@ -12513,7 +12375,7 @@
       </p:sp>
       <p:sp>
         <p:nvSpPr>
-          <p:cNvPr id="160" name="Rounded Rectangle 159"/>
+          <p:cNvPr id="157" name="Rounded Rectangle 156"/>
           <p:cNvSpPr/>
           <p:nvPr/>
         </p:nvSpPr>
@@ -12567,7 +12429,7 @@
       </p:sp>
       <p:sp>
         <p:nvSpPr>
-          <p:cNvPr id="161" name="Rounded Rectangle 160"/>
+          <p:cNvPr id="158" name="Rounded Rectangle 157"/>
           <p:cNvSpPr/>
           <p:nvPr/>
         </p:nvSpPr>
@@ -12613,7 +12475,7 @@
       </p:sp>
       <p:sp>
         <p:nvSpPr>
-          <p:cNvPr id="162" name="TextBox 161"/>
+          <p:cNvPr id="159" name="TextBox 158"/>
           <p:cNvSpPr txBox="1"/>
           <p:nvPr/>
         </p:nvSpPr>
@@ -12659,7 +12521,7 @@
       </p:sp>
       <p:sp>
         <p:nvSpPr>
-          <p:cNvPr id="163" name="TextBox 162"/>
+          <p:cNvPr id="160" name="TextBox 159"/>
           <p:cNvSpPr txBox="1"/>
           <p:nvPr/>
         </p:nvSpPr>
@@ -12705,7 +12567,7 @@
       </p:sp>
       <p:sp>
         <p:nvSpPr>
-          <p:cNvPr id="164" name="TextBox 163"/>
+          <p:cNvPr id="161" name="TextBox 160"/>
           <p:cNvSpPr txBox="1"/>
           <p:nvPr/>
         </p:nvSpPr>
@@ -12751,7 +12613,7 @@
       </p:sp>
       <p:sp>
         <p:nvSpPr>
-          <p:cNvPr id="165" name="Rounded Rectangle 164"/>
+          <p:cNvPr id="162" name="Rounded Rectangle 161"/>
           <p:cNvSpPr/>
           <p:nvPr/>
         </p:nvSpPr>
@@ -12799,7 +12661,7 @@
       </p:sp>
       <p:sp>
         <p:nvSpPr>
-          <p:cNvPr id="166" name="TextBox 165"/>
+          <p:cNvPr id="163" name="TextBox 162"/>
           <p:cNvSpPr txBox="1"/>
           <p:nvPr/>
         </p:nvSpPr>
@@ -12845,7 +12707,7 @@
       </p:sp>
       <p:sp>
         <p:nvSpPr>
-          <p:cNvPr id="167" name="TextBox 166"/>
+          <p:cNvPr id="164" name="TextBox 163"/>
           <p:cNvSpPr txBox="1"/>
           <p:nvPr/>
         </p:nvSpPr>
@@ -12891,7 +12753,7 @@
       </p:sp>
       <p:sp>
         <p:nvSpPr>
-          <p:cNvPr id="168" name="Rounded Rectangle 167"/>
+          <p:cNvPr id="165" name="Rounded Rectangle 164"/>
           <p:cNvSpPr/>
           <p:nvPr/>
         </p:nvSpPr>
@@ -12945,7 +12807,7 @@
       </p:sp>
       <p:sp>
         <p:nvSpPr>
-          <p:cNvPr id="169" name="Rounded Rectangle 168"/>
+          <p:cNvPr id="166" name="Rounded Rectangle 165"/>
           <p:cNvSpPr/>
           <p:nvPr/>
         </p:nvSpPr>
@@ -12991,7 +12853,7 @@
       </p:sp>
       <p:sp>
         <p:nvSpPr>
-          <p:cNvPr id="170" name="TextBox 169"/>
+          <p:cNvPr id="167" name="TextBox 166"/>
           <p:cNvSpPr txBox="1"/>
           <p:nvPr/>
         </p:nvSpPr>
@@ -13037,7 +12899,7 @@
       </p:sp>
       <p:sp>
         <p:nvSpPr>
-          <p:cNvPr id="171" name="TextBox 170"/>
+          <p:cNvPr id="168" name="TextBox 167"/>
           <p:cNvSpPr txBox="1"/>
           <p:nvPr/>
         </p:nvSpPr>
@@ -13083,7 +12945,7 @@
       </p:sp>
       <p:sp>
         <p:nvSpPr>
-          <p:cNvPr id="172" name="TextBox 171"/>
+          <p:cNvPr id="169" name="TextBox 168"/>
           <p:cNvSpPr txBox="1"/>
           <p:nvPr/>
         </p:nvSpPr>
@@ -13129,7 +12991,7 @@
       </p:sp>
       <p:sp>
         <p:nvSpPr>
-          <p:cNvPr id="173" name="Rounded Rectangle 172"/>
+          <p:cNvPr id="170" name="Rounded Rectangle 169"/>
           <p:cNvSpPr/>
           <p:nvPr/>
         </p:nvSpPr>
@@ -13177,7 +13039,7 @@
       </p:sp>
       <p:sp>
         <p:nvSpPr>
-          <p:cNvPr id="174" name="TextBox 173"/>
+          <p:cNvPr id="171" name="TextBox 170"/>
           <p:cNvSpPr txBox="1"/>
           <p:nvPr/>
         </p:nvSpPr>
@@ -13223,7 +13085,7 @@
       </p:sp>
       <p:sp>
         <p:nvSpPr>
-          <p:cNvPr id="175" name="TextBox 174"/>
+          <p:cNvPr id="172" name="TextBox 171"/>
           <p:cNvSpPr txBox="1"/>
           <p:nvPr/>
         </p:nvSpPr>
@@ -13269,7 +13131,7 @@
       </p:sp>
       <p:sp>
         <p:nvSpPr>
-          <p:cNvPr id="176" name="Rounded Rectangle 175"/>
+          <p:cNvPr id="173" name="Rounded Rectangle 172"/>
           <p:cNvSpPr/>
           <p:nvPr/>
         </p:nvSpPr>
@@ -13323,7 +13185,7 @@
       </p:sp>
       <p:sp>
         <p:nvSpPr>
-          <p:cNvPr id="177" name="Rounded Rectangle 176"/>
+          <p:cNvPr id="174" name="Rounded Rectangle 173"/>
           <p:cNvSpPr/>
           <p:nvPr/>
         </p:nvSpPr>
@@ -13369,7 +13231,7 @@
       </p:sp>
       <p:sp>
         <p:nvSpPr>
-          <p:cNvPr id="178" name="TextBox 177"/>
+          <p:cNvPr id="175" name="TextBox 174"/>
           <p:cNvSpPr txBox="1"/>
           <p:nvPr/>
         </p:nvSpPr>
@@ -13415,7 +13277,7 @@
       </p:sp>
       <p:sp>
         <p:nvSpPr>
-          <p:cNvPr id="179" name="TextBox 178"/>
+          <p:cNvPr id="176" name="TextBox 175"/>
           <p:cNvSpPr txBox="1"/>
           <p:nvPr/>
         </p:nvSpPr>
@@ -13461,7 +13323,7 @@
       </p:sp>
       <p:sp>
         <p:nvSpPr>
-          <p:cNvPr id="180" name="TextBox 179"/>
+          <p:cNvPr id="177" name="TextBox 176"/>
           <p:cNvSpPr txBox="1"/>
           <p:nvPr/>
         </p:nvSpPr>
@@ -13507,7 +13369,7 @@
       </p:sp>
       <p:sp>
         <p:nvSpPr>
-          <p:cNvPr id="181" name="Rounded Rectangle 180"/>
+          <p:cNvPr id="178" name="Rounded Rectangle 177"/>
           <p:cNvSpPr/>
           <p:nvPr/>
         </p:nvSpPr>
@@ -13555,7 +13417,7 @@
       </p:sp>
       <p:sp>
         <p:nvSpPr>
-          <p:cNvPr id="182" name="TextBox 181"/>
+          <p:cNvPr id="179" name="TextBox 178"/>
           <p:cNvSpPr txBox="1"/>
           <p:nvPr/>
         </p:nvSpPr>
@@ -13601,7 +13463,7 @@
       </p:sp>
       <p:sp>
         <p:nvSpPr>
-          <p:cNvPr id="183" name="TextBox 182"/>
+          <p:cNvPr id="180" name="TextBox 179"/>
           <p:cNvSpPr txBox="1"/>
           <p:nvPr/>
         </p:nvSpPr>
@@ -13647,7 +13509,7 @@
       </p:sp>
       <p:sp>
         <p:nvSpPr>
-          <p:cNvPr id="184" name="Rounded Rectangle 183"/>
+          <p:cNvPr id="181" name="Rounded Rectangle 180"/>
           <p:cNvSpPr/>
           <p:nvPr/>
         </p:nvSpPr>
@@ -13701,7 +13563,7 @@
       </p:sp>
       <p:sp>
         <p:nvSpPr>
-          <p:cNvPr id="185" name="Rounded Rectangle 184"/>
+          <p:cNvPr id="182" name="Rounded Rectangle 181"/>
           <p:cNvSpPr/>
           <p:nvPr/>
         </p:nvSpPr>
@@ -13747,7 +13609,7 @@
       </p:sp>
       <p:sp>
         <p:nvSpPr>
-          <p:cNvPr id="186" name="TextBox 185"/>
+          <p:cNvPr id="183" name="TextBox 182"/>
           <p:cNvSpPr txBox="1"/>
           <p:nvPr/>
         </p:nvSpPr>
@@ -13793,7 +13655,7 @@
       </p:sp>
       <p:sp>
         <p:nvSpPr>
-          <p:cNvPr id="187" name="TextBox 186"/>
+          <p:cNvPr id="184" name="TextBox 183"/>
           <p:cNvSpPr txBox="1"/>
           <p:nvPr/>
         </p:nvSpPr>
@@ -13862,7 +13724,7 @@
       </p:sp>
       <p:sp>
         <p:nvSpPr>
-          <p:cNvPr id="188" name="Rounded Rectangle 187"/>
+          <p:cNvPr id="185" name="Rounded Rectangle 184"/>
           <p:cNvSpPr/>
           <p:nvPr/>
         </p:nvSpPr>
@@ -13910,7 +13772,7 @@
       </p:sp>
       <p:sp>
         <p:nvSpPr>
-          <p:cNvPr id="189" name="TextBox 188"/>
+          <p:cNvPr id="186" name="TextBox 185"/>
           <p:cNvSpPr txBox="1"/>
           <p:nvPr/>
         </p:nvSpPr>
@@ -13956,7 +13818,7 @@
       </p:sp>
       <p:sp>
         <p:nvSpPr>
-          <p:cNvPr id="190" name="TextBox 189"/>
+          <p:cNvPr id="187" name="TextBox 186"/>
           <p:cNvSpPr txBox="1"/>
           <p:nvPr/>
         </p:nvSpPr>
@@ -14002,7 +13864,7 @@
       </p:sp>
       <p:cxnSp>
         <p:nvCxnSpPr>
-          <p:cNvPr id="191" name="Connector 190"/>
+          <p:cNvPr id="188" name="Connector 187"/>
           <p:cNvCxnSpPr/>
           <p:nvPr/>
         </p:nvCxnSpPr>
@@ -14026,7 +13888,7 @@
       </p:cxnSp>
       <p:cxnSp>
         <p:nvCxnSpPr>
-          <p:cNvPr id="192" name="Connector 191"/>
+          <p:cNvPr id="189" name="Connector 188"/>
           <p:cNvCxnSpPr/>
           <p:nvPr/>
         </p:nvCxnSpPr>
@@ -14050,7 +13912,7 @@
       </p:cxnSp>
       <p:cxnSp>
         <p:nvCxnSpPr>
-          <p:cNvPr id="193" name="Connector 192"/>
+          <p:cNvPr id="190" name="Connector 189"/>
           <p:cNvCxnSpPr/>
           <p:nvPr/>
         </p:nvCxnSpPr>
@@ -14073,7 +13935,7 @@
       </p:cxnSp>
       <p:cxnSp>
         <p:nvCxnSpPr>
-          <p:cNvPr id="194" name="Connector 193"/>
+          <p:cNvPr id="191" name="Connector 190"/>
           <p:cNvCxnSpPr/>
           <p:nvPr/>
         </p:nvCxnSpPr>
@@ -14096,7 +13958,7 @@
       </p:cxnSp>
       <p:cxnSp>
         <p:nvCxnSpPr>
-          <p:cNvPr id="195" name="Connector 194"/>
+          <p:cNvPr id="192" name="Connector 191"/>
           <p:cNvCxnSpPr/>
           <p:nvPr/>
         </p:nvCxnSpPr>
@@ -14120,7 +13982,7 @@
       </p:cxnSp>
       <p:sp>
         <p:nvSpPr>
-          <p:cNvPr id="196" name="TextBox 195"/>
+          <p:cNvPr id="193" name="TextBox 192"/>
           <p:cNvSpPr txBox="1"/>
           <p:nvPr/>
         </p:nvSpPr>
@@ -14166,7 +14028,7 @@
       </p:sp>
       <p:sp>
         <p:nvSpPr>
-          <p:cNvPr id="197" name="TextBox 196"/>
+          <p:cNvPr id="194" name="TextBox 193"/>
           <p:cNvSpPr txBox="1"/>
           <p:nvPr/>
         </p:nvSpPr>
@@ -14212,7 +14074,7 @@
       </p:sp>
       <p:cxnSp>
         <p:nvCxnSpPr>
-          <p:cNvPr id="198" name="Connector 197"/>
+          <p:cNvPr id="195" name="Connector 194"/>
           <p:cNvCxnSpPr/>
           <p:nvPr/>
         </p:nvCxnSpPr>
@@ -14235,7 +14097,7 @@
       </p:cxnSp>
       <p:sp>
         <p:nvSpPr>
-          <p:cNvPr id="199" name="TextBox 198"/>
+          <p:cNvPr id="196" name="TextBox 195"/>
           <p:cNvSpPr txBox="1"/>
           <p:nvPr/>
         </p:nvSpPr>
@@ -14304,7 +14166,7 @@
       </p:sp>
       <p:sp>
         <p:nvSpPr>
-          <p:cNvPr id="200" name="Rounded Rectangle 199"/>
+          <p:cNvPr id="197" name="Rounded Rectangle 196"/>
           <p:cNvSpPr/>
           <p:nvPr/>
         </p:nvSpPr>
@@ -14352,14 +14214,172 @@
       </p:sp>
       <p:sp>
         <p:nvSpPr>
+          <p:cNvPr id="198" name="TextBox 197"/>
+          <p:cNvSpPr txBox="1"/>
+          <p:nvPr/>
+        </p:nvSpPr>
+        <p:spPr>
+          <a:xfrm>
+            <a:off x="329184" y="5907024"/>
+            <a:ext cx="2743200" cy="155448"/>
+          </a:xfrm>
+          <a:prstGeom prst="rect">
+            <a:avLst/>
+          </a:prstGeom>
+          <a:noFill/>
+        </p:spPr>
+        <p:txBody>
+          <a:bodyPr wrap="square" lIns="0" rIns="0" tIns="0" bIns="0" anchor="t">
+            <a:noAutofit/>
+          </a:bodyPr>
+          <a:lstStyle/>
+          <a:p>
+            <a:pPr algn="l">
+              <a:lnSpc>
+                <a:spcPct val="112000"/>
+              </a:lnSpc>
+              <a:spcBef>
+                <a:spcPts val="0"/>
+              </a:spcBef>
+              <a:spcAft>
+                <a:spcPts val="0"/>
+              </a:spcAft>
+            </a:pPr>
+            <a:r>
+              <a:rPr sz="850" b="1" i="0">
+                <a:solidFill>
+                  <a:srgbClr val="0F172A"/>
+                </a:solidFill>
+                <a:latin typeface="Segoe UI"/>
+                <a:ea typeface="Microsoft YaHei"/>
+              </a:rPr>
+              <a:t>关键设计要点</a:t>
+            </a:r>
+          </a:p>
+        </p:txBody>
+      </p:sp>
+      <p:sp>
+        <p:nvSpPr>
+          <p:cNvPr id="199" name="TextBox 198"/>
+          <p:cNvSpPr txBox="1"/>
+          <p:nvPr/>
+        </p:nvSpPr>
+        <p:spPr>
+          <a:xfrm>
+            <a:off x="329184" y="6080760"/>
+            <a:ext cx="4160520" cy="137160"/>
+          </a:xfrm>
+          <a:prstGeom prst="rect">
+            <a:avLst/>
+          </a:prstGeom>
+          <a:noFill/>
+        </p:spPr>
+        <p:txBody>
+          <a:bodyPr wrap="square" lIns="0" rIns="0" tIns="0" bIns="0" anchor="t">
+            <a:noAutofit/>
+          </a:bodyPr>
+          <a:lstStyle/>
+          <a:p>
+            <a:pPr algn="l">
+              <a:lnSpc>
+                <a:spcPct val="112000"/>
+              </a:lnSpc>
+              <a:spcBef>
+                <a:spcPts val="0"/>
+              </a:spcBef>
+              <a:spcAft>
+                <a:spcPts val="0"/>
+              </a:spcAft>
+            </a:pPr>
+            <a:r>
+              <a:rPr sz="620" b="1" i="0">
+                <a:solidFill>
+                  <a:srgbClr val="0078D4"/>
+                </a:solidFill>
+                <a:latin typeface="Segoe UI"/>
+                <a:ea typeface="Microsoft YaHei"/>
+              </a:rPr>
+              <a:t>① </a:t>
+            </a:r>
+            <a:r>
+              <a:rPr sz="620" b="0" i="0">
+                <a:solidFill>
+                  <a:srgbClr val="475569"/>
+                </a:solidFill>
+                <a:latin typeface="Segoe UI"/>
+                <a:ea typeface="Microsoft YaHei"/>
+              </a:rPr>
+              <a:t>全部 PaaS 私有端点接入，流量不出 Azure 骨干网；入口 WAF + App Gateway 收敛</a:t>
+            </a:r>
+          </a:p>
+        </p:txBody>
+      </p:sp>
+      <p:sp>
+        <p:nvSpPr>
+          <p:cNvPr id="200" name="TextBox 199"/>
+          <p:cNvSpPr txBox="1"/>
+          <p:nvPr/>
+        </p:nvSpPr>
+        <p:spPr>
+          <a:xfrm>
+            <a:off x="329184" y="6222492"/>
+            <a:ext cx="4160520" cy="137160"/>
+          </a:xfrm>
+          <a:prstGeom prst="rect">
+            <a:avLst/>
+          </a:prstGeom>
+          <a:noFill/>
+        </p:spPr>
+        <p:txBody>
+          <a:bodyPr wrap="square" lIns="0" rIns="0" tIns="0" bIns="0" anchor="t">
+            <a:noAutofit/>
+          </a:bodyPr>
+          <a:lstStyle/>
+          <a:p>
+            <a:pPr algn="l">
+              <a:lnSpc>
+                <a:spcPct val="112000"/>
+              </a:lnSpc>
+              <a:spcBef>
+                <a:spcPts val="0"/>
+              </a:spcBef>
+              <a:spcAft>
+                <a:spcPts val="0"/>
+              </a:spcAft>
+            </a:pPr>
+            <a:r>
+              <a:rPr sz="620" b="1" i="0">
+                <a:solidFill>
+                  <a:srgbClr val="0078D4"/>
+                </a:solidFill>
+                <a:latin typeface="Segoe UI"/>
+                <a:ea typeface="Microsoft YaHei"/>
+              </a:rPr>
+              <a:t>② </a:t>
+            </a:r>
+            <a:r>
+              <a:rPr sz="620" b="0" i="0">
+                <a:solidFill>
+                  <a:srgbClr val="475569"/>
+                </a:solidFill>
+                <a:latin typeface="Segoe UI"/>
+                <a:ea typeface="Microsoft YaHei"/>
+              </a:rPr>
+              <a:t>Serverless 不支持 VNet 对等 / VPN —— 私有访问 ADLS 唯一方式：NCC + 托管私有端点</a:t>
+            </a:r>
+          </a:p>
+        </p:txBody>
+      </p:sp>
+      <p:sp>
+        <p:nvSpPr>
           <p:cNvPr id="201" name="TextBox 200"/>
           <p:cNvSpPr txBox="1"/>
           <p:nvPr/>
         </p:nvSpPr>
         <p:spPr>
           <a:xfrm>
-            <a:off x="329184" y="5907024"/>
-            <a:ext cx="2743200" cy="155448"/>
+            <a:off x="329184" y="6364224"/>
+            <a:ext cx="4160520" cy="137160"/>
           </a:xfrm>
           <a:prstGeom prst="rect">
             <a:avLst/>
@@ -14384,14 +14404,24 @@
               </a:spcAft>
             </a:pPr>
             <a:r>
-              <a:rPr sz="850" b="1" i="0">
-                <a:solidFill>
-                  <a:srgbClr val="0F172A"/>
-                </a:solidFill>
-                <a:latin typeface="Segoe UI"/>
-                <a:ea typeface="Microsoft YaHei"/>
-              </a:rPr>
-              <a:t>关键设计要点</a:t>
+              <a:rPr sz="620" b="1" i="0">
+                <a:solidFill>
+                  <a:srgbClr val="0078D4"/>
+                </a:solidFill>
+                <a:latin typeface="Segoe UI"/>
+                <a:ea typeface="Microsoft YaHei"/>
+              </a:rPr>
+              <a:t>③ </a:t>
+            </a:r>
+            <a:r>
+              <a:rPr sz="620" b="0" i="0">
+                <a:solidFill>
+                  <a:srgbClr val="475569"/>
+                </a:solidFill>
+                <a:latin typeface="Segoe UI"/>
+                <a:ea typeface="Microsoft YaHei"/>
+              </a:rPr>
+              <a:t>源库抽取走 NAT 固定出口 IP 白名单；跨机房走 ExpressRoute / 站点到站点 VPN</a:t>
             </a:r>
           </a:p>
         </p:txBody>
@@ -14404,7 +14434,7 @@
         </p:nvSpPr>
         <p:spPr>
           <a:xfrm>
-            <a:off x="329184" y="6080760"/>
+            <a:off x="4626864" y="6080760"/>
             <a:ext cx="4160520" cy="137160"/>
           </a:xfrm>
           <a:prstGeom prst="rect">
@@ -14437,7 +14467,7 @@
                 <a:latin typeface="Segoe UI"/>
                 <a:ea typeface="Microsoft YaHei"/>
               </a:rPr>
-              <a:t>① </a:t>
+              <a:t>④ </a:t>
             </a:r>
             <a:r>
               <a:rPr sz="620" b="0" i="0">
@@ -14447,7 +14477,7 @@
                 <a:latin typeface="Segoe UI"/>
                 <a:ea typeface="Microsoft YaHei"/>
               </a:rPr>
-              <a:t>全部 PaaS 私有端点接入，流量不出 Azure 骨干网；入口 WAF + App Gateway 收敛</a:t>
+              <a:t>元数据与销毁策略存 SQL DB S2 · 审计进 App Insights · 密钥由 Key Vault 托管</a:t>
             </a:r>
           </a:p>
         </p:txBody>
@@ -14460,7 +14490,7 @@
         </p:nvSpPr>
         <p:spPr>
           <a:xfrm>
-            <a:off x="329184" y="6222492"/>
+            <a:off x="4626864" y="6222492"/>
             <a:ext cx="4160520" cy="137160"/>
           </a:xfrm>
           <a:prstGeom prst="rect">
@@ -14493,7 +14523,7 @@
                 <a:latin typeface="Segoe UI"/>
                 <a:ea typeface="Microsoft YaHei"/>
               </a:rPr>
-              <a:t>② </a:t>
+              <a:t>⑤ </a:t>
             </a:r>
             <a:r>
               <a:rPr sz="620" b="0" i="0">
@@ -14503,7 +14533,7 @@
                 <a:latin typeface="Segoe UI"/>
                 <a:ea typeface="Microsoft YaHei"/>
               </a:rPr>
-              <a:t>Serverless 不支持 VNet 对等 / VPN —— 私有访问 ADLS 唯一方式：NCC + 托管私有端点</a:t>
+              <a:t>相比方案 B：省去 Trino 集群与双子网注入，查询层完全托管、零集群运维</a:t>
             </a:r>
           </a:p>
         </p:txBody>
@@ -14516,7 +14546,7 @@
         </p:nvSpPr>
         <p:spPr>
           <a:xfrm>
-            <a:off x="329184" y="6364224"/>
+            <a:off x="4626864" y="6364224"/>
             <a:ext cx="4160520" cy="137160"/>
           </a:xfrm>
           <a:prstGeom prst="rect">
@@ -14549,7 +14579,7 @@
                 <a:latin typeface="Segoe UI"/>
                 <a:ea typeface="Microsoft YaHei"/>
               </a:rPr>
-              <a:t>③ </a:t>
+              <a:t>⑥ </a:t>
             </a:r>
             <a:r>
               <a:rPr sz="620" b="0" i="0">
@@ -14559,174 +14589,6 @@
                 <a:latin typeface="Segoe UI"/>
                 <a:ea typeface="Microsoft YaHei"/>
               </a:rPr>
-              <a:t>源库抽取走 NAT 固定出口 IP 白名单；跨机房走 ExpressRoute / 站点到站点 VPN</a:t>
-            </a:r>
-          </a:p>
-        </p:txBody>
-      </p:sp>
-      <p:sp>
-        <p:nvSpPr>
-          <p:cNvPr id="205" name="TextBox 204"/>
-          <p:cNvSpPr txBox="1"/>
-          <p:nvPr/>
-        </p:nvSpPr>
-        <p:spPr>
-          <a:xfrm>
-            <a:off x="4626864" y="6080760"/>
-            <a:ext cx="4160520" cy="137160"/>
-          </a:xfrm>
-          <a:prstGeom prst="rect">
-            <a:avLst/>
-          </a:prstGeom>
-          <a:noFill/>
-        </p:spPr>
-        <p:txBody>
-          <a:bodyPr wrap="square" lIns="0" rIns="0" tIns="0" bIns="0" anchor="t">
-            <a:noAutofit/>
-          </a:bodyPr>
-          <a:lstStyle/>
-          <a:p>
-            <a:pPr algn="l">
-              <a:lnSpc>
-                <a:spcPct val="112000"/>
-              </a:lnSpc>
-              <a:spcBef>
-                <a:spcPts val="0"/>
-              </a:spcBef>
-              <a:spcAft>
-                <a:spcPts val="0"/>
-              </a:spcAft>
-            </a:pPr>
-            <a:r>
-              <a:rPr sz="620" b="1" i="0">
-                <a:solidFill>
-                  <a:srgbClr val="0078D4"/>
-                </a:solidFill>
-                <a:latin typeface="Segoe UI"/>
-                <a:ea typeface="Microsoft YaHei"/>
-              </a:rPr>
-              <a:t>④ </a:t>
-            </a:r>
-            <a:r>
-              <a:rPr sz="620" b="0" i="0">
-                <a:solidFill>
-                  <a:srgbClr val="475569"/>
-                </a:solidFill>
-                <a:latin typeface="Segoe UI"/>
-                <a:ea typeface="Microsoft YaHei"/>
-              </a:rPr>
-              <a:t>元数据与销毁策略存 SQL DB S2 · 审计进 App Insights · 密钥由 Key Vault 托管</a:t>
-            </a:r>
-          </a:p>
-        </p:txBody>
-      </p:sp>
-      <p:sp>
-        <p:nvSpPr>
-          <p:cNvPr id="206" name="TextBox 205"/>
-          <p:cNvSpPr txBox="1"/>
-          <p:nvPr/>
-        </p:nvSpPr>
-        <p:spPr>
-          <a:xfrm>
-            <a:off x="4626864" y="6222492"/>
-            <a:ext cx="4160520" cy="137160"/>
-          </a:xfrm>
-          <a:prstGeom prst="rect">
-            <a:avLst/>
-          </a:prstGeom>
-          <a:noFill/>
-        </p:spPr>
-        <p:txBody>
-          <a:bodyPr wrap="square" lIns="0" rIns="0" tIns="0" bIns="0" anchor="t">
-            <a:noAutofit/>
-          </a:bodyPr>
-          <a:lstStyle/>
-          <a:p>
-            <a:pPr algn="l">
-              <a:lnSpc>
-                <a:spcPct val="112000"/>
-              </a:lnSpc>
-              <a:spcBef>
-                <a:spcPts val="0"/>
-              </a:spcBef>
-              <a:spcAft>
-                <a:spcPts val="0"/>
-              </a:spcAft>
-            </a:pPr>
-            <a:r>
-              <a:rPr sz="620" b="1" i="0">
-                <a:solidFill>
-                  <a:srgbClr val="0078D4"/>
-                </a:solidFill>
-                <a:latin typeface="Segoe UI"/>
-                <a:ea typeface="Microsoft YaHei"/>
-              </a:rPr>
-              <a:t>⑤ </a:t>
-            </a:r>
-            <a:r>
-              <a:rPr sz="620" b="0" i="0">
-                <a:solidFill>
-                  <a:srgbClr val="475569"/>
-                </a:solidFill>
-                <a:latin typeface="Segoe UI"/>
-                <a:ea typeface="Microsoft YaHei"/>
-              </a:rPr>
-              <a:t>相比方案 B：省去 Trino 集群与双子网注入，查询层完全托管、零集群运维</a:t>
-            </a:r>
-          </a:p>
-        </p:txBody>
-      </p:sp>
-      <p:sp>
-        <p:nvSpPr>
-          <p:cNvPr id="207" name="TextBox 206"/>
-          <p:cNvSpPr txBox="1"/>
-          <p:nvPr/>
-        </p:nvSpPr>
-        <p:spPr>
-          <a:xfrm>
-            <a:off x="4626864" y="6364224"/>
-            <a:ext cx="4160520" cy="137160"/>
-          </a:xfrm>
-          <a:prstGeom prst="rect">
-            <a:avLst/>
-          </a:prstGeom>
-          <a:noFill/>
-        </p:spPr>
-        <p:txBody>
-          <a:bodyPr wrap="square" lIns="0" rIns="0" tIns="0" bIns="0" anchor="t">
-            <a:noAutofit/>
-          </a:bodyPr>
-          <a:lstStyle/>
-          <a:p>
-            <a:pPr algn="l">
-              <a:lnSpc>
-                <a:spcPct val="112000"/>
-              </a:lnSpc>
-              <a:spcBef>
-                <a:spcPts val="0"/>
-              </a:spcBef>
-              <a:spcAft>
-                <a:spcPts val="0"/>
-              </a:spcAft>
-            </a:pPr>
-            <a:r>
-              <a:rPr sz="620" b="1" i="0">
-                <a:solidFill>
-                  <a:srgbClr val="0078D4"/>
-                </a:solidFill>
-                <a:latin typeface="Segoe UI"/>
-                <a:ea typeface="Microsoft YaHei"/>
-              </a:rPr>
-              <a:t>⑥ </a:t>
-            </a:r>
-            <a:r>
-              <a:rPr sz="620" b="0" i="0">
-                <a:solidFill>
-                  <a:srgbClr val="475569"/>
-                </a:solidFill>
-                <a:latin typeface="Segoe UI"/>
-                <a:ea typeface="Microsoft YaHei"/>
-              </a:rPr>
               <a:t>需 Databricks Premium 层（PE / NCC 均为 Premium 特性）；NCC 需 Account Admin</a:t>
             </a:r>
           </a:p>
@@ -14734,7 +14596,7 @@
       </p:sp>
       <p:sp>
         <p:nvSpPr>
-          <p:cNvPr id="208" name="Rounded Rectangle 207"/>
+          <p:cNvPr id="205" name="Rounded Rectangle 204"/>
           <p:cNvSpPr/>
           <p:nvPr/>
         </p:nvSpPr>
@@ -14783,14 +14645,172 @@
       </p:sp>
       <p:sp>
         <p:nvSpPr>
+          <p:cNvPr id="206" name="TextBox 205"/>
+          <p:cNvSpPr txBox="1"/>
+          <p:nvPr/>
+        </p:nvSpPr>
+        <p:spPr>
+          <a:xfrm>
+            <a:off x="9125712" y="5907024"/>
+            <a:ext cx="2743200" cy="146304"/>
+          </a:xfrm>
+          <a:prstGeom prst="rect">
+            <a:avLst/>
+          </a:prstGeom>
+          <a:noFill/>
+        </p:spPr>
+        <p:txBody>
+          <a:bodyPr wrap="square" lIns="0" rIns="0" tIns="0" bIns="0" anchor="t">
+            <a:noAutofit/>
+          </a:bodyPr>
+          <a:lstStyle/>
+          <a:p>
+            <a:pPr algn="l">
+              <a:lnSpc>
+                <a:spcPct val="112000"/>
+              </a:lnSpc>
+              <a:spcBef>
+                <a:spcPts val="0"/>
+              </a:spcBef>
+              <a:spcAft>
+                <a:spcPts val="0"/>
+              </a:spcAft>
+            </a:pPr>
+            <a:r>
+              <a:rPr sz="750" b="1" i="0">
+                <a:solidFill>
+                  <a:srgbClr val="B91C1C"/>
+                </a:solidFill>
+                <a:latin typeface="Segoe UI"/>
+                <a:ea typeface="Microsoft YaHei"/>
+              </a:rPr>
+              <a:t>高可用 &amp; 容灾（HA / DR）</a:t>
+            </a:r>
+          </a:p>
+        </p:txBody>
+      </p:sp>
+      <p:sp>
+        <p:nvSpPr>
+          <p:cNvPr id="207" name="TextBox 206"/>
+          <p:cNvSpPr txBox="1"/>
+          <p:nvPr/>
+        </p:nvSpPr>
+        <p:spPr>
+          <a:xfrm>
+            <a:off x="9125712" y="6080760"/>
+            <a:ext cx="2761488" cy="137160"/>
+          </a:xfrm>
+          <a:prstGeom prst="rect">
+            <a:avLst/>
+          </a:prstGeom>
+          <a:noFill/>
+        </p:spPr>
+        <p:txBody>
+          <a:bodyPr wrap="square" lIns="0" rIns="0" tIns="0" bIns="0" anchor="t">
+            <a:noAutofit/>
+          </a:bodyPr>
+          <a:lstStyle/>
+          <a:p>
+            <a:pPr algn="l">
+              <a:lnSpc>
+                <a:spcPct val="112000"/>
+              </a:lnSpc>
+              <a:spcBef>
+                <a:spcPts val="0"/>
+              </a:spcBef>
+              <a:spcAft>
+                <a:spcPts val="0"/>
+              </a:spcAft>
+            </a:pPr>
+            <a:r>
+              <a:rPr sz="600" b="1" i="0">
+                <a:solidFill>
+                  <a:srgbClr val="E11D48"/>
+                </a:solidFill>
+                <a:latin typeface="Segoe UI"/>
+                <a:ea typeface="Microsoft YaHei"/>
+              </a:rPr>
+              <a:t>· </a:t>
+            </a:r>
+            <a:r>
+              <a:rPr sz="600" b="0" i="0">
+                <a:solidFill>
+                  <a:srgbClr val="475569"/>
+                </a:solidFill>
+                <a:latin typeface="Segoe UI"/>
+                <a:ea typeface="Microsoft YaHei"/>
+              </a:rPr>
+              <a:t>AKS 跨 AZ · SQL 主备自动转移 · 存储 ZRS 冗余</a:t>
+            </a:r>
+          </a:p>
+        </p:txBody>
+      </p:sp>
+      <p:sp>
+        <p:nvSpPr>
+          <p:cNvPr id="208" name="TextBox 207"/>
+          <p:cNvSpPr txBox="1"/>
+          <p:nvPr/>
+        </p:nvSpPr>
+        <p:spPr>
+          <a:xfrm>
+            <a:off x="9125712" y="6222492"/>
+            <a:ext cx="2761488" cy="137160"/>
+          </a:xfrm>
+          <a:prstGeom prst="rect">
+            <a:avLst/>
+          </a:prstGeom>
+          <a:noFill/>
+        </p:spPr>
+        <p:txBody>
+          <a:bodyPr wrap="square" lIns="0" rIns="0" tIns="0" bIns="0" anchor="t">
+            <a:noAutofit/>
+          </a:bodyPr>
+          <a:lstStyle/>
+          <a:p>
+            <a:pPr algn="l">
+              <a:lnSpc>
+                <a:spcPct val="112000"/>
+              </a:lnSpc>
+              <a:spcBef>
+                <a:spcPts val="0"/>
+              </a:spcBef>
+              <a:spcAft>
+                <a:spcPts val="0"/>
+              </a:spcAft>
+            </a:pPr>
+            <a:r>
+              <a:rPr sz="600" b="1" i="0">
+                <a:solidFill>
+                  <a:srgbClr val="E11D48"/>
+                </a:solidFill>
+                <a:latin typeface="Segoe UI"/>
+                <a:ea typeface="Microsoft YaHei"/>
+              </a:rPr>
+              <a:t>· </a:t>
+            </a:r>
+            <a:r>
+              <a:rPr sz="600" b="0" i="0">
+                <a:solidFill>
+                  <a:srgbClr val="475569"/>
+                </a:solidFill>
+                <a:latin typeface="Segoe UI"/>
+                <a:ea typeface="Microsoft YaHei"/>
+              </a:rPr>
+              <a:t>平台托管无单点 · Serverless 空闲归零自动重建</a:t>
+            </a:r>
+          </a:p>
+        </p:txBody>
+      </p:sp>
+      <p:sp>
+        <p:nvSpPr>
           <p:cNvPr id="209" name="TextBox 208"/>
           <p:cNvSpPr txBox="1"/>
           <p:nvPr/>
         </p:nvSpPr>
         <p:spPr>
           <a:xfrm>
-            <a:off x="9125712" y="5907024"/>
-            <a:ext cx="2743200" cy="146304"/>
+            <a:off x="9125712" y="6364224"/>
+            <a:ext cx="2761488" cy="137160"/>
           </a:xfrm>
           <a:prstGeom prst="rect">
             <a:avLst/>
@@ -14815,14 +14835,24 @@
               </a:spcAft>
             </a:pPr>
             <a:r>
-              <a:rPr sz="750" b="1" i="0">
-                <a:solidFill>
-                  <a:srgbClr val="B91C1C"/>
-                </a:solidFill>
-                <a:latin typeface="Segoe UI"/>
-                <a:ea typeface="Microsoft YaHei"/>
-              </a:rPr>
-              <a:t>高可用 &amp; 容灾（HA / DR）</a:t>
+              <a:rPr sz="600" b="1" i="0">
+                <a:solidFill>
+                  <a:srgbClr val="E11D48"/>
+                </a:solidFill>
+                <a:latin typeface="Segoe UI"/>
+                <a:ea typeface="Microsoft YaHei"/>
+              </a:rPr>
+              <a:t>· </a:t>
+            </a:r>
+            <a:r>
+              <a:rPr sz="600" b="0" i="0">
+                <a:solidFill>
+                  <a:srgbClr val="475569"/>
+                </a:solidFill>
+                <a:latin typeface="Segoe UI"/>
+                <a:ea typeface="Microsoft YaHei"/>
+              </a:rPr>
+              <a:t>SQL 自动备份 + PITR · ADLS 生命周期分层 / GRS</a:t>
             </a:r>
           </a:p>
         </p:txBody>
@@ -14830,174 +14860,6 @@
       <p:sp>
         <p:nvSpPr>
           <p:cNvPr id="210" name="TextBox 209"/>
-          <p:cNvSpPr txBox="1"/>
-          <p:nvPr/>
-        </p:nvSpPr>
-        <p:spPr>
-          <a:xfrm>
-            <a:off x="9125712" y="6080760"/>
-            <a:ext cx="2761488" cy="137160"/>
-          </a:xfrm>
-          <a:prstGeom prst="rect">
-            <a:avLst/>
-          </a:prstGeom>
-          <a:noFill/>
-        </p:spPr>
-        <p:txBody>
-          <a:bodyPr wrap="square" lIns="0" rIns="0" tIns="0" bIns="0" anchor="t">
-            <a:noAutofit/>
-          </a:bodyPr>
-          <a:lstStyle/>
-          <a:p>
-            <a:pPr algn="l">
-              <a:lnSpc>
-                <a:spcPct val="112000"/>
-              </a:lnSpc>
-              <a:spcBef>
-                <a:spcPts val="0"/>
-              </a:spcBef>
-              <a:spcAft>
-                <a:spcPts val="0"/>
-              </a:spcAft>
-            </a:pPr>
-            <a:r>
-              <a:rPr sz="600" b="1" i="0">
-                <a:solidFill>
-                  <a:srgbClr val="E11D48"/>
-                </a:solidFill>
-                <a:latin typeface="Segoe UI"/>
-                <a:ea typeface="Microsoft YaHei"/>
-              </a:rPr>
-              <a:t>· </a:t>
-            </a:r>
-            <a:r>
-              <a:rPr sz="600" b="0" i="0">
-                <a:solidFill>
-                  <a:srgbClr val="475569"/>
-                </a:solidFill>
-                <a:latin typeface="Segoe UI"/>
-                <a:ea typeface="Microsoft YaHei"/>
-              </a:rPr>
-              <a:t>AKS 跨 AZ · SQL 主备自动转移 · 存储 ZRS 冗余</a:t>
-            </a:r>
-          </a:p>
-        </p:txBody>
-      </p:sp>
-      <p:sp>
-        <p:nvSpPr>
-          <p:cNvPr id="211" name="TextBox 210"/>
-          <p:cNvSpPr txBox="1"/>
-          <p:nvPr/>
-        </p:nvSpPr>
-        <p:spPr>
-          <a:xfrm>
-            <a:off x="9125712" y="6222492"/>
-            <a:ext cx="2761488" cy="137160"/>
-          </a:xfrm>
-          <a:prstGeom prst="rect">
-            <a:avLst/>
-          </a:prstGeom>
-          <a:noFill/>
-        </p:spPr>
-        <p:txBody>
-          <a:bodyPr wrap="square" lIns="0" rIns="0" tIns="0" bIns="0" anchor="t">
-            <a:noAutofit/>
-          </a:bodyPr>
-          <a:lstStyle/>
-          <a:p>
-            <a:pPr algn="l">
-              <a:lnSpc>
-                <a:spcPct val="112000"/>
-              </a:lnSpc>
-              <a:spcBef>
-                <a:spcPts val="0"/>
-              </a:spcBef>
-              <a:spcAft>
-                <a:spcPts val="0"/>
-              </a:spcAft>
-            </a:pPr>
-            <a:r>
-              <a:rPr sz="600" b="1" i="0">
-                <a:solidFill>
-                  <a:srgbClr val="E11D48"/>
-                </a:solidFill>
-                <a:latin typeface="Segoe UI"/>
-                <a:ea typeface="Microsoft YaHei"/>
-              </a:rPr>
-              <a:t>· </a:t>
-            </a:r>
-            <a:r>
-              <a:rPr sz="600" b="0" i="0">
-                <a:solidFill>
-                  <a:srgbClr val="475569"/>
-                </a:solidFill>
-                <a:latin typeface="Segoe UI"/>
-                <a:ea typeface="Microsoft YaHei"/>
-              </a:rPr>
-              <a:t>平台托管无单点 · Serverless 空闲归零自动重建</a:t>
-            </a:r>
-          </a:p>
-        </p:txBody>
-      </p:sp>
-      <p:sp>
-        <p:nvSpPr>
-          <p:cNvPr id="212" name="TextBox 211"/>
-          <p:cNvSpPr txBox="1"/>
-          <p:nvPr/>
-        </p:nvSpPr>
-        <p:spPr>
-          <a:xfrm>
-            <a:off x="9125712" y="6364224"/>
-            <a:ext cx="2761488" cy="137160"/>
-          </a:xfrm>
-          <a:prstGeom prst="rect">
-            <a:avLst/>
-          </a:prstGeom>
-          <a:noFill/>
-        </p:spPr>
-        <p:txBody>
-          <a:bodyPr wrap="square" lIns="0" rIns="0" tIns="0" bIns="0" anchor="t">
-            <a:noAutofit/>
-          </a:bodyPr>
-          <a:lstStyle/>
-          <a:p>
-            <a:pPr algn="l">
-              <a:lnSpc>
-                <a:spcPct val="112000"/>
-              </a:lnSpc>
-              <a:spcBef>
-                <a:spcPts val="0"/>
-              </a:spcBef>
-              <a:spcAft>
-                <a:spcPts val="0"/>
-              </a:spcAft>
-            </a:pPr>
-            <a:r>
-              <a:rPr sz="600" b="1" i="0">
-                <a:solidFill>
-                  <a:srgbClr val="E11D48"/>
-                </a:solidFill>
-                <a:latin typeface="Segoe UI"/>
-                <a:ea typeface="Microsoft YaHei"/>
-              </a:rPr>
-              <a:t>· </a:t>
-            </a:r>
-            <a:r>
-              <a:rPr sz="600" b="0" i="0">
-                <a:solidFill>
-                  <a:srgbClr val="475569"/>
-                </a:solidFill>
-                <a:latin typeface="Segoe UI"/>
-                <a:ea typeface="Microsoft YaHei"/>
-              </a:rPr>
-              <a:t>SQL 自动备份 + PITR · ADLS 生命周期分层 / GRS</a:t>
-            </a:r>
-          </a:p>
-        </p:txBody>
-      </p:sp>
-      <p:sp>
-        <p:nvSpPr>
-          <p:cNvPr id="213" name="TextBox 212"/>
           <p:cNvSpPr txBox="1"/>
           <p:nvPr/>
         </p:nvSpPr>
@@ -16411,52 +16273,6 @@
         </p:nvSpPr>
         <p:spPr>
           <a:xfrm>
-            <a:off x="548640" y="1755648"/>
-            <a:ext cx="45720" cy="457200"/>
-          </a:xfrm>
-          <a:prstGeom prst="roundRect">
-            <a:avLst>
-              <a:gd name="adj" fmla="val 50000"/>
-            </a:avLst>
-          </a:prstGeom>
-          <a:solidFill>
-            <a:srgbClr val="0891B2"/>
-          </a:solidFill>
-          <a:ln>
-            <a:noFill/>
-          </a:ln>
-          <a:effectLst/>
-        </p:spPr>
-        <p:style>
-          <a:lnRef idx="1">
-            <a:schemeClr val="accent1"/>
-          </a:lnRef>
-          <a:fillRef idx="3">
-            <a:schemeClr val="accent1"/>
-          </a:fillRef>
-          <a:effectRef idx="2">
-            <a:schemeClr val="accent1"/>
-          </a:effectRef>
-          <a:fontRef idx="minor">
-            <a:schemeClr val="lt1"/>
-          </a:fontRef>
-        </p:style>
-        <p:txBody>
-          <a:bodyPr rtlCol="0" anchor="ctr"/>
-          <a:lstStyle/>
-          <a:p>
-            <a:pPr algn="ctr"/>
-          </a:p>
-        </p:txBody>
-      </p:sp>
-      <p:sp>
-        <p:nvSpPr>
-          <p:cNvPr id="29" name="Rounded Rectangle 28"/>
-          <p:cNvSpPr/>
-          <p:nvPr/>
-        </p:nvSpPr>
-        <p:spPr>
-          <a:xfrm>
             <a:off x="3200400" y="1700784"/>
             <a:ext cx="4846320" cy="566928"/>
           </a:xfrm>
@@ -16505,53 +16321,7 @@
       </p:sp>
       <p:sp>
         <p:nvSpPr>
-          <p:cNvPr id="30" name="Rounded Rectangle 29"/>
-          <p:cNvSpPr/>
-          <p:nvPr/>
-        </p:nvSpPr>
-        <p:spPr>
-          <a:xfrm>
-            <a:off x="3200400" y="1755648"/>
-            <a:ext cx="45720" cy="457200"/>
-          </a:xfrm>
-          <a:prstGeom prst="roundRect">
-            <a:avLst>
-              <a:gd name="adj" fmla="val 50000"/>
-            </a:avLst>
-          </a:prstGeom>
-          <a:solidFill>
-            <a:srgbClr val="0891B2"/>
-          </a:solidFill>
-          <a:ln>
-            <a:noFill/>
-          </a:ln>
-          <a:effectLst/>
-        </p:spPr>
-        <p:style>
-          <a:lnRef idx="1">
-            <a:schemeClr val="accent1"/>
-          </a:lnRef>
-          <a:fillRef idx="3">
-            <a:schemeClr val="accent1"/>
-          </a:fillRef>
-          <a:effectRef idx="2">
-            <a:schemeClr val="accent1"/>
-          </a:effectRef>
-          <a:fontRef idx="minor">
-            <a:schemeClr val="lt1"/>
-          </a:fontRef>
-        </p:style>
-        <p:txBody>
-          <a:bodyPr rtlCol="0" anchor="ctr"/>
-          <a:lstStyle/>
-          <a:p>
-            <a:pPr algn="ctr"/>
-          </a:p>
-        </p:txBody>
-      </p:sp>
-      <p:sp>
-        <p:nvSpPr>
-          <p:cNvPr id="31" name="TextBox 30"/>
+          <p:cNvPr id="29" name="TextBox 28"/>
           <p:cNvSpPr txBox="1"/>
           <p:nvPr/>
         </p:nvSpPr>
@@ -16597,7 +16367,7 @@
       </p:sp>
       <p:sp>
         <p:nvSpPr>
-          <p:cNvPr id="32" name="TextBox 31"/>
+          <p:cNvPr id="30" name="TextBox 29"/>
           <p:cNvSpPr txBox="1"/>
           <p:nvPr/>
         </p:nvSpPr>
@@ -16666,7 +16436,7 @@
       </p:sp>
       <p:sp>
         <p:nvSpPr>
-          <p:cNvPr id="33" name="Rounded Rectangle 32"/>
+          <p:cNvPr id="31" name="Rounded Rectangle 30"/>
           <p:cNvSpPr/>
           <p:nvPr/>
         </p:nvSpPr>
@@ -16720,7 +16490,7 @@
       </p:sp>
       <p:sp>
         <p:nvSpPr>
-          <p:cNvPr id="34" name="TextBox 33"/>
+          <p:cNvPr id="32" name="TextBox 31"/>
           <p:cNvSpPr txBox="1"/>
           <p:nvPr/>
         </p:nvSpPr>
@@ -16787,55 +16557,9 @@
           </a:p>
         </p:txBody>
       </p:sp>
-      <p:sp>
-        <p:nvSpPr>
-          <p:cNvPr id="35" name="Rounded Rectangle 34"/>
-          <p:cNvSpPr/>
-          <p:nvPr/>
-        </p:nvSpPr>
-        <p:spPr>
-          <a:xfrm>
-            <a:off x="9646920" y="1755648"/>
-            <a:ext cx="45720" cy="457200"/>
-          </a:xfrm>
-          <a:prstGeom prst="roundRect">
-            <a:avLst>
-              <a:gd name="adj" fmla="val 50000"/>
-            </a:avLst>
-          </a:prstGeom>
-          <a:solidFill>
-            <a:srgbClr val="0891B2"/>
-          </a:solidFill>
-          <a:ln>
-            <a:noFill/>
-          </a:ln>
-          <a:effectLst/>
-        </p:spPr>
-        <p:style>
-          <a:lnRef idx="1">
-            <a:schemeClr val="accent1"/>
-          </a:lnRef>
-          <a:fillRef idx="3">
-            <a:schemeClr val="accent1"/>
-          </a:fillRef>
-          <a:effectRef idx="2">
-            <a:schemeClr val="accent1"/>
-          </a:effectRef>
-          <a:fontRef idx="minor">
-            <a:schemeClr val="lt1"/>
-          </a:fontRef>
-        </p:style>
-        <p:txBody>
-          <a:bodyPr rtlCol="0" anchor="ctr"/>
-          <a:lstStyle/>
-          <a:p>
-            <a:pPr algn="ctr"/>
-          </a:p>
-        </p:txBody>
-      </p:sp>
       <p:cxnSp>
         <p:nvCxnSpPr>
-          <p:cNvPr id="36" name="Connector 35"/>
+          <p:cNvPr id="33" name="Connector 32"/>
           <p:cNvCxnSpPr/>
           <p:nvPr/>
         </p:nvCxnSpPr>
@@ -16858,7 +16582,7 @@
       </p:cxnSp>
       <p:sp>
         <p:nvSpPr>
-          <p:cNvPr id="37" name="TextBox 36"/>
+          <p:cNvPr id="34" name="TextBox 33"/>
           <p:cNvSpPr txBox="1"/>
           <p:nvPr/>
         </p:nvSpPr>
@@ -16904,7 +16628,7 @@
       </p:sp>
       <p:sp>
         <p:nvSpPr>
-          <p:cNvPr id="38" name="Rounded Rectangle 37"/>
+          <p:cNvPr id="35" name="Rounded Rectangle 34"/>
           <p:cNvSpPr/>
           <p:nvPr/>
         </p:nvSpPr>
@@ -16952,7 +16676,7 @@
       </p:sp>
       <p:sp>
         <p:nvSpPr>
-          <p:cNvPr id="39" name="TextBox 38"/>
+          <p:cNvPr id="36" name="TextBox 35"/>
           <p:cNvSpPr txBox="1"/>
           <p:nvPr/>
         </p:nvSpPr>
@@ -16998,7 +16722,7 @@
       </p:sp>
       <p:sp>
         <p:nvSpPr>
-          <p:cNvPr id="40" name="Rounded Rectangle 39"/>
+          <p:cNvPr id="37" name="Rounded Rectangle 36"/>
           <p:cNvSpPr/>
           <p:nvPr/>
         </p:nvSpPr>
@@ -17046,7 +16770,7 @@
       </p:sp>
       <p:sp>
         <p:nvSpPr>
-          <p:cNvPr id="41" name="TextBox 40"/>
+          <p:cNvPr id="38" name="TextBox 37"/>
           <p:cNvSpPr txBox="1"/>
           <p:nvPr/>
         </p:nvSpPr>
@@ -17092,7 +16816,7 @@
       </p:sp>
       <p:sp>
         <p:nvSpPr>
-          <p:cNvPr id="42" name="TextBox 41"/>
+          <p:cNvPr id="39" name="TextBox 38"/>
           <p:cNvSpPr txBox="1"/>
           <p:nvPr/>
         </p:nvSpPr>
@@ -17138,7 +16862,7 @@
       </p:sp>
       <p:sp>
         <p:nvSpPr>
-          <p:cNvPr id="43" name="Rounded Rectangle 42"/>
+          <p:cNvPr id="40" name="Rounded Rectangle 39"/>
           <p:cNvSpPr/>
           <p:nvPr/>
         </p:nvSpPr>
@@ -17192,7 +16916,7 @@
       </p:sp>
       <p:sp>
         <p:nvSpPr>
-          <p:cNvPr id="44" name="TextBox 43"/>
+          <p:cNvPr id="41" name="TextBox 40"/>
           <p:cNvSpPr txBox="1"/>
           <p:nvPr/>
         </p:nvSpPr>
@@ -17261,7 +16985,7 @@
       </p:sp>
       <p:sp>
         <p:nvSpPr>
-          <p:cNvPr id="45" name="Rounded Rectangle 44"/>
+          <p:cNvPr id="42" name="Rounded Rectangle 41"/>
           <p:cNvSpPr/>
           <p:nvPr/>
         </p:nvSpPr>
@@ -17315,7 +17039,7 @@
       </p:sp>
       <p:sp>
         <p:nvSpPr>
-          <p:cNvPr id="46" name="TextBox 45"/>
+          <p:cNvPr id="43" name="TextBox 42"/>
           <p:cNvSpPr txBox="1"/>
           <p:nvPr/>
         </p:nvSpPr>
@@ -17384,7 +17108,7 @@
       </p:sp>
       <p:cxnSp>
         <p:nvCxnSpPr>
-          <p:cNvPr id="47" name="Connector 46"/>
+          <p:cNvPr id="44" name="Connector 43"/>
           <p:cNvCxnSpPr/>
           <p:nvPr/>
         </p:nvCxnSpPr>
@@ -17407,7 +17131,7 @@
       </p:cxnSp>
       <p:sp>
         <p:nvSpPr>
-          <p:cNvPr id="48" name="Rounded Rectangle 47"/>
+          <p:cNvPr id="45" name="Rounded Rectangle 44"/>
           <p:cNvSpPr/>
           <p:nvPr/>
         </p:nvSpPr>
@@ -17455,7 +17179,7 @@
       </p:sp>
       <p:sp>
         <p:nvSpPr>
-          <p:cNvPr id="49" name="TextBox 48"/>
+          <p:cNvPr id="46" name="TextBox 45"/>
           <p:cNvSpPr txBox="1"/>
           <p:nvPr/>
         </p:nvSpPr>
@@ -17501,7 +17225,7 @@
       </p:sp>
       <p:sp>
         <p:nvSpPr>
-          <p:cNvPr id="50" name="Rounded Rectangle 49"/>
+          <p:cNvPr id="47" name="Rounded Rectangle 46"/>
           <p:cNvSpPr/>
           <p:nvPr/>
         </p:nvSpPr>
@@ -17549,7 +17273,7 @@
       </p:sp>
       <p:sp>
         <p:nvSpPr>
-          <p:cNvPr id="51" name="TextBox 50"/>
+          <p:cNvPr id="48" name="TextBox 47"/>
           <p:cNvSpPr txBox="1"/>
           <p:nvPr/>
         </p:nvSpPr>
@@ -17595,7 +17319,7 @@
       </p:sp>
       <p:sp>
         <p:nvSpPr>
-          <p:cNvPr id="52" name="TextBox 51"/>
+          <p:cNvPr id="49" name="TextBox 48"/>
           <p:cNvSpPr txBox="1"/>
           <p:nvPr/>
         </p:nvSpPr>
@@ -17641,7 +17365,7 @@
       </p:sp>
       <p:sp>
         <p:nvSpPr>
-          <p:cNvPr id="53" name="Rounded Rectangle 52"/>
+          <p:cNvPr id="50" name="Rounded Rectangle 49"/>
           <p:cNvSpPr/>
           <p:nvPr/>
         </p:nvSpPr>
@@ -17695,7 +17419,7 @@
       </p:sp>
       <p:sp>
         <p:nvSpPr>
-          <p:cNvPr id="54" name="TextBox 53"/>
+          <p:cNvPr id="51" name="TextBox 50"/>
           <p:cNvSpPr txBox="1"/>
           <p:nvPr/>
         </p:nvSpPr>
@@ -17764,7 +17488,7 @@
       </p:sp>
       <p:sp>
         <p:nvSpPr>
-          <p:cNvPr id="55" name="Rounded Rectangle 54"/>
+          <p:cNvPr id="52" name="Rounded Rectangle 51"/>
           <p:cNvSpPr/>
           <p:nvPr/>
         </p:nvSpPr>
@@ -17818,7 +17542,7 @@
       </p:sp>
       <p:sp>
         <p:nvSpPr>
-          <p:cNvPr id="56" name="TextBox 55"/>
+          <p:cNvPr id="53" name="TextBox 52"/>
           <p:cNvSpPr txBox="1"/>
           <p:nvPr/>
         </p:nvSpPr>
@@ -17887,7 +17611,7 @@
       </p:sp>
       <p:cxnSp>
         <p:nvCxnSpPr>
-          <p:cNvPr id="57" name="Connector 56"/>
+          <p:cNvPr id="54" name="Connector 53"/>
           <p:cNvCxnSpPr/>
           <p:nvPr/>
         </p:nvCxnSpPr>
@@ -17910,7 +17634,7 @@
       </p:cxnSp>
       <p:sp>
         <p:nvSpPr>
-          <p:cNvPr id="58" name="Rounded Rectangle 57"/>
+          <p:cNvPr id="55" name="Rounded Rectangle 54"/>
           <p:cNvSpPr/>
           <p:nvPr/>
         </p:nvSpPr>
@@ -17958,7 +17682,7 @@
       </p:sp>
       <p:sp>
         <p:nvSpPr>
-          <p:cNvPr id="59" name="TextBox 58"/>
+          <p:cNvPr id="56" name="TextBox 55"/>
           <p:cNvSpPr txBox="1"/>
           <p:nvPr/>
         </p:nvSpPr>
@@ -18004,7 +17728,7 @@
       </p:sp>
       <p:sp>
         <p:nvSpPr>
-          <p:cNvPr id="60" name="Rounded Rectangle 59"/>
+          <p:cNvPr id="57" name="Rounded Rectangle 56"/>
           <p:cNvSpPr/>
           <p:nvPr/>
         </p:nvSpPr>
@@ -18052,7 +17776,7 @@
       </p:sp>
       <p:sp>
         <p:nvSpPr>
-          <p:cNvPr id="61" name="TextBox 60"/>
+          <p:cNvPr id="58" name="TextBox 57"/>
           <p:cNvSpPr txBox="1"/>
           <p:nvPr/>
         </p:nvSpPr>
@@ -18098,7 +17822,7 @@
       </p:sp>
       <p:sp>
         <p:nvSpPr>
-          <p:cNvPr id="62" name="TextBox 61"/>
+          <p:cNvPr id="59" name="TextBox 58"/>
           <p:cNvSpPr txBox="1"/>
           <p:nvPr/>
         </p:nvSpPr>
@@ -18144,7 +17868,7 @@
       </p:sp>
       <p:sp>
         <p:nvSpPr>
-          <p:cNvPr id="63" name="Rounded Rectangle 62"/>
+          <p:cNvPr id="60" name="Rounded Rectangle 59"/>
           <p:cNvSpPr/>
           <p:nvPr/>
         </p:nvSpPr>
@@ -18198,7 +17922,7 @@
       </p:sp>
       <p:sp>
         <p:nvSpPr>
-          <p:cNvPr id="64" name="TextBox 63"/>
+          <p:cNvPr id="61" name="TextBox 60"/>
           <p:cNvSpPr txBox="1"/>
           <p:nvPr/>
         </p:nvSpPr>
@@ -18267,7 +17991,7 @@
       </p:sp>
       <p:sp>
         <p:nvSpPr>
-          <p:cNvPr id="65" name="Rounded Rectangle 64"/>
+          <p:cNvPr id="62" name="Rounded Rectangle 61"/>
           <p:cNvSpPr/>
           <p:nvPr/>
         </p:nvSpPr>
@@ -18321,7 +18045,7 @@
       </p:sp>
       <p:sp>
         <p:nvSpPr>
-          <p:cNvPr id="66" name="TextBox 65"/>
+          <p:cNvPr id="63" name="TextBox 62"/>
           <p:cNvSpPr txBox="1"/>
           <p:nvPr/>
         </p:nvSpPr>
@@ -18390,7 +18114,7 @@
       </p:sp>
       <p:cxnSp>
         <p:nvCxnSpPr>
-          <p:cNvPr id="67" name="Connector 66"/>
+          <p:cNvPr id="64" name="Connector 63"/>
           <p:cNvCxnSpPr/>
           <p:nvPr/>
         </p:nvCxnSpPr>
@@ -18413,7 +18137,7 @@
       </p:cxnSp>
       <p:sp>
         <p:nvSpPr>
-          <p:cNvPr id="68" name="Rounded Rectangle 67"/>
+          <p:cNvPr id="65" name="Rounded Rectangle 64"/>
           <p:cNvSpPr/>
           <p:nvPr/>
         </p:nvSpPr>
@@ -18461,7 +18185,7 @@
       </p:sp>
       <p:sp>
         <p:nvSpPr>
-          <p:cNvPr id="69" name="TextBox 68"/>
+          <p:cNvPr id="66" name="TextBox 65"/>
           <p:cNvSpPr txBox="1"/>
           <p:nvPr/>
         </p:nvSpPr>
@@ -18507,7 +18231,7 @@
       </p:sp>
       <p:cxnSp>
         <p:nvCxnSpPr>
-          <p:cNvPr id="70" name="Connector 69"/>
+          <p:cNvPr id="67" name="Connector 66"/>
           <p:cNvCxnSpPr/>
           <p:nvPr/>
         </p:nvCxnSpPr>
@@ -18529,7 +18253,7 @@
       </p:cxnSp>
       <p:cxnSp>
         <p:nvCxnSpPr>
-          <p:cNvPr id="71" name="Connector 70"/>
+          <p:cNvPr id="68" name="Connector 67"/>
           <p:cNvCxnSpPr/>
           <p:nvPr/>
         </p:nvCxnSpPr>
@@ -18551,7 +18275,7 @@
       </p:cxnSp>
       <p:cxnSp>
         <p:nvCxnSpPr>
-          <p:cNvPr id="72" name="Connector 71"/>
+          <p:cNvPr id="69" name="Connector 68"/>
           <p:cNvCxnSpPr/>
           <p:nvPr/>
         </p:nvCxnSpPr>
@@ -18574,7 +18298,7 @@
       </p:cxnSp>
       <p:sp>
         <p:nvSpPr>
-          <p:cNvPr id="73" name="TextBox 72"/>
+          <p:cNvPr id="70" name="TextBox 69"/>
           <p:cNvSpPr txBox="1"/>
           <p:nvPr/>
         </p:nvSpPr>
@@ -18620,7 +18344,7 @@
       </p:sp>
       <p:cxnSp>
         <p:nvCxnSpPr>
-          <p:cNvPr id="74" name="Connector 73"/>
+          <p:cNvPr id="71" name="Connector 70"/>
           <p:cNvCxnSpPr/>
           <p:nvPr/>
         </p:nvCxnSpPr>
@@ -18643,7 +18367,7 @@
       </p:cxnSp>
       <p:sp>
         <p:nvSpPr>
-          <p:cNvPr id="75" name="TextBox 74"/>
+          <p:cNvPr id="72" name="TextBox 71"/>
           <p:cNvSpPr txBox="1"/>
           <p:nvPr/>
         </p:nvSpPr>
@@ -18689,7 +18413,7 @@
       </p:sp>
       <p:cxnSp>
         <p:nvCxnSpPr>
-          <p:cNvPr id="76" name="Connector 75"/>
+          <p:cNvPr id="73" name="Connector 72"/>
           <p:cNvCxnSpPr/>
           <p:nvPr/>
         </p:nvCxnSpPr>
@@ -18711,7 +18435,7 @@
       </p:cxnSp>
       <p:cxnSp>
         <p:nvCxnSpPr>
-          <p:cNvPr id="77" name="Connector 76"/>
+          <p:cNvPr id="74" name="Connector 73"/>
           <p:cNvCxnSpPr/>
           <p:nvPr/>
         </p:nvCxnSpPr>
@@ -18733,7 +18457,7 @@
       </p:cxnSp>
       <p:cxnSp>
         <p:nvCxnSpPr>
-          <p:cNvPr id="78" name="Connector 77"/>
+          <p:cNvPr id="75" name="Connector 74"/>
           <p:cNvCxnSpPr/>
           <p:nvPr/>
         </p:nvCxnSpPr>
@@ -18756,7 +18480,7 @@
       </p:cxnSp>
       <p:sp>
         <p:nvSpPr>
-          <p:cNvPr id="79" name="TextBox 78"/>
+          <p:cNvPr id="76" name="TextBox 75"/>
           <p:cNvSpPr txBox="1"/>
           <p:nvPr/>
         </p:nvSpPr>
@@ -18802,7 +18526,7 @@
       </p:sp>
       <p:sp>
         <p:nvSpPr>
-          <p:cNvPr id="80" name="Rounded Rectangle 79"/>
+          <p:cNvPr id="77" name="Rounded Rectangle 76"/>
           <p:cNvSpPr/>
           <p:nvPr/>
         </p:nvSpPr>
@@ -18850,7 +18574,7 @@
       </p:sp>
       <p:sp>
         <p:nvSpPr>
-          <p:cNvPr id="81" name="TextBox 80"/>
+          <p:cNvPr id="78" name="TextBox 77"/>
           <p:cNvSpPr txBox="1"/>
           <p:nvPr/>
         </p:nvSpPr>
@@ -18896,7 +18620,7 @@
       </p:sp>
       <p:sp>
         <p:nvSpPr>
-          <p:cNvPr id="82" name="Rounded Rectangle 81"/>
+          <p:cNvPr id="79" name="Rounded Rectangle 78"/>
           <p:cNvSpPr/>
           <p:nvPr/>
         </p:nvSpPr>
@@ -18950,7 +18674,7 @@
       </p:sp>
       <p:sp>
         <p:nvSpPr>
-          <p:cNvPr id="83" name="TextBox 82"/>
+          <p:cNvPr id="80" name="TextBox 79"/>
           <p:cNvSpPr txBox="1"/>
           <p:nvPr/>
         </p:nvSpPr>
@@ -19019,7 +18743,7 @@
       </p:sp>
       <p:sp>
         <p:nvSpPr>
-          <p:cNvPr id="84" name="Rounded Rectangle 83"/>
+          <p:cNvPr id="81" name="Rounded Rectangle 80"/>
           <p:cNvSpPr/>
           <p:nvPr/>
         </p:nvSpPr>
@@ -19073,7 +18797,7 @@
       </p:sp>
       <p:sp>
         <p:nvSpPr>
-          <p:cNvPr id="85" name="TextBox 84"/>
+          <p:cNvPr id="82" name="TextBox 81"/>
           <p:cNvSpPr txBox="1"/>
           <p:nvPr/>
         </p:nvSpPr>
@@ -19142,7 +18866,7 @@
       </p:sp>
       <p:sp>
         <p:nvSpPr>
-          <p:cNvPr id="86" name="Rounded Rectangle 85"/>
+          <p:cNvPr id="83" name="Rounded Rectangle 82"/>
           <p:cNvSpPr/>
           <p:nvPr/>
         </p:nvSpPr>
@@ -19196,7 +18920,7 @@
       </p:sp>
       <p:sp>
         <p:nvSpPr>
-          <p:cNvPr id="87" name="TextBox 86"/>
+          <p:cNvPr id="84" name="TextBox 83"/>
           <p:cNvSpPr txBox="1"/>
           <p:nvPr/>
         </p:nvSpPr>
@@ -19265,7 +18989,7 @@
       </p:sp>
       <p:cxnSp>
         <p:nvCxnSpPr>
-          <p:cNvPr id="88" name="Connector 87"/>
+          <p:cNvPr id="85" name="Connector 84"/>
           <p:cNvCxnSpPr/>
           <p:nvPr/>
         </p:nvCxnSpPr>
@@ -19288,7 +19012,7 @@
       </p:cxnSp>
       <p:sp>
         <p:nvSpPr>
-          <p:cNvPr id="89" name="TextBox 88"/>
+          <p:cNvPr id="86" name="TextBox 85"/>
           <p:cNvSpPr txBox="1"/>
           <p:nvPr/>
         </p:nvSpPr>
@@ -19334,7 +19058,7 @@
       </p:sp>
       <p:cxnSp>
         <p:nvCxnSpPr>
-          <p:cNvPr id="90" name="Connector 89"/>
+          <p:cNvPr id="87" name="Connector 86"/>
           <p:cNvCxnSpPr/>
           <p:nvPr/>
         </p:nvCxnSpPr>
@@ -19356,7 +19080,7 @@
       </p:cxnSp>
       <p:cxnSp>
         <p:nvCxnSpPr>
-          <p:cNvPr id="91" name="Connector 90"/>
+          <p:cNvPr id="88" name="Connector 87"/>
           <p:cNvCxnSpPr/>
           <p:nvPr/>
         </p:nvCxnSpPr>
@@ -19378,7 +19102,7 @@
       </p:cxnSp>
       <p:cxnSp>
         <p:nvCxnSpPr>
-          <p:cNvPr id="92" name="Connector 91"/>
+          <p:cNvPr id="89" name="Connector 88"/>
           <p:cNvCxnSpPr/>
           <p:nvPr/>
         </p:nvCxnSpPr>
@@ -19401,7 +19125,7 @@
       </p:cxnSp>
       <p:sp>
         <p:nvSpPr>
-          <p:cNvPr id="93" name="TextBox 92"/>
+          <p:cNvPr id="90" name="TextBox 89"/>
           <p:cNvSpPr txBox="1"/>
           <p:nvPr/>
         </p:nvSpPr>
@@ -19447,7 +19171,7 @@
       </p:sp>
       <p:cxnSp>
         <p:nvCxnSpPr>
-          <p:cNvPr id="94" name="Connector 93"/>
+          <p:cNvPr id="91" name="Connector 90"/>
           <p:cNvCxnSpPr/>
           <p:nvPr/>
         </p:nvCxnSpPr>
@@ -19470,7 +19194,7 @@
       </p:cxnSp>
       <p:sp>
         <p:nvSpPr>
-          <p:cNvPr id="95" name="TextBox 94"/>
+          <p:cNvPr id="92" name="TextBox 91"/>
           <p:cNvSpPr txBox="1"/>
           <p:nvPr/>
         </p:nvSpPr>
@@ -19516,7 +19240,7 @@
       </p:sp>
       <p:sp>
         <p:nvSpPr>
-          <p:cNvPr id="96" name="Rounded Rectangle 95"/>
+          <p:cNvPr id="93" name="Rounded Rectangle 92"/>
           <p:cNvSpPr/>
           <p:nvPr/>
         </p:nvSpPr>
@@ -19564,7 +19288,7 @@
       </p:sp>
       <p:sp>
         <p:nvSpPr>
-          <p:cNvPr id="97" name="TextBox 96"/>
+          <p:cNvPr id="94" name="TextBox 93"/>
           <p:cNvSpPr txBox="1"/>
           <p:nvPr/>
         </p:nvSpPr>
@@ -19620,7 +19344,7 @@
       </p:sp>
       <p:sp>
         <p:nvSpPr>
-          <p:cNvPr id="98" name="Rounded Rectangle 97"/>
+          <p:cNvPr id="95" name="Rounded Rectangle 94"/>
           <p:cNvSpPr/>
           <p:nvPr/>
         </p:nvSpPr>
@@ -19668,7 +19392,7 @@
       </p:sp>
       <p:sp>
         <p:nvSpPr>
-          <p:cNvPr id="99" name="TextBox 98"/>
+          <p:cNvPr id="96" name="TextBox 95"/>
           <p:cNvSpPr txBox="1"/>
           <p:nvPr/>
         </p:nvSpPr>
@@ -19724,7 +19448,7 @@
       </p:sp>
       <p:sp>
         <p:nvSpPr>
-          <p:cNvPr id="100" name="Oval 99"/>
+          <p:cNvPr id="97" name="Oval 96"/>
           <p:cNvSpPr/>
           <p:nvPr/>
         </p:nvSpPr>
@@ -19768,7 +19492,7 @@
       </p:sp>
       <p:sp>
         <p:nvSpPr>
-          <p:cNvPr id="101" name="TextBox 100"/>
+          <p:cNvPr id="98" name="TextBox 97"/>
           <p:cNvSpPr txBox="1"/>
           <p:nvPr/>
         </p:nvSpPr>
@@ -19814,7 +19538,7 @@
       </p:sp>
       <p:sp>
         <p:nvSpPr>
-          <p:cNvPr id="102" name="Oval 101"/>
+          <p:cNvPr id="99" name="Oval 98"/>
           <p:cNvSpPr/>
           <p:nvPr/>
         </p:nvSpPr>
@@ -19858,7 +19582,7 @@
       </p:sp>
       <p:sp>
         <p:nvSpPr>
-          <p:cNvPr id="103" name="TextBox 102"/>
+          <p:cNvPr id="100" name="TextBox 99"/>
           <p:cNvSpPr txBox="1"/>
           <p:nvPr/>
         </p:nvSpPr>
@@ -19904,7 +19628,7 @@
       </p:sp>
       <p:sp>
         <p:nvSpPr>
-          <p:cNvPr id="104" name="Oval 103"/>
+          <p:cNvPr id="101" name="Oval 100"/>
           <p:cNvSpPr/>
           <p:nvPr/>
         </p:nvSpPr>
@@ -19948,7 +19672,7 @@
       </p:sp>
       <p:sp>
         <p:nvSpPr>
-          <p:cNvPr id="105" name="TextBox 104"/>
+          <p:cNvPr id="102" name="TextBox 101"/>
           <p:cNvSpPr txBox="1"/>
           <p:nvPr/>
         </p:nvSpPr>
@@ -19994,7 +19718,7 @@
       </p:sp>
       <p:sp>
         <p:nvSpPr>
-          <p:cNvPr id="106" name="Oval 105"/>
+          <p:cNvPr id="103" name="Oval 102"/>
           <p:cNvSpPr/>
           <p:nvPr/>
         </p:nvSpPr>
@@ -20038,7 +19762,7 @@
       </p:sp>
       <p:sp>
         <p:nvSpPr>
-          <p:cNvPr id="107" name="TextBox 106"/>
+          <p:cNvPr id="104" name="TextBox 103"/>
           <p:cNvSpPr txBox="1"/>
           <p:nvPr/>
         </p:nvSpPr>
@@ -20084,7 +19808,7 @@
       </p:sp>
       <p:sp>
         <p:nvSpPr>
-          <p:cNvPr id="108" name="Oval 107"/>
+          <p:cNvPr id="105" name="Oval 104"/>
           <p:cNvSpPr/>
           <p:nvPr/>
         </p:nvSpPr>
@@ -20128,7 +19852,7 @@
       </p:sp>
       <p:sp>
         <p:nvSpPr>
-          <p:cNvPr id="109" name="TextBox 108"/>
+          <p:cNvPr id="106" name="TextBox 105"/>
           <p:cNvSpPr txBox="1"/>
           <p:nvPr/>
         </p:nvSpPr>
@@ -21405,47 +21129,47 @@
       </p:sp>
       <p:sp>
         <p:nvSpPr>
-          <p:cNvPr id="28" name="Rounded Rectangle 27"/>
-          <p:cNvSpPr/>
-          <p:nvPr/>
-        </p:nvSpPr>
-        <p:spPr>
-          <a:xfrm>
-            <a:off x="2231136" y="1408176"/>
-            <a:ext cx="32004" cy="475488"/>
-          </a:xfrm>
-          <a:prstGeom prst="roundRect">
-            <a:avLst>
-              <a:gd name="adj" fmla="val 48571"/>
-            </a:avLst>
-          </a:prstGeom>
-          <a:solidFill>
-            <a:srgbClr val="0891B2"/>
-          </a:solidFill>
-          <a:ln>
-            <a:noFill/>
-          </a:ln>
-          <a:effectLst/>
-        </p:spPr>
-        <p:style>
-          <a:lnRef idx="1">
-            <a:schemeClr val="accent1"/>
-          </a:lnRef>
-          <a:fillRef idx="3">
-            <a:schemeClr val="accent1"/>
-          </a:fillRef>
-          <a:effectRef idx="2">
-            <a:schemeClr val="accent1"/>
-          </a:effectRef>
-          <a:fontRef idx="minor">
-            <a:schemeClr val="lt1"/>
-          </a:fontRef>
-        </p:style>
-        <p:txBody>
-          <a:bodyPr rtlCol="0" anchor="ctr"/>
-          <a:lstStyle/>
-          <a:p>
-            <a:pPr algn="ctr"/>
+          <p:cNvPr id="28" name="TextBox 27"/>
+          <p:cNvSpPr txBox="1"/>
+          <p:nvPr/>
+        </p:nvSpPr>
+        <p:spPr>
+          <a:xfrm>
+            <a:off x="2322576" y="1408176"/>
+            <a:ext cx="1536192" cy="118872"/>
+          </a:xfrm>
+          <a:prstGeom prst="rect">
+            <a:avLst/>
+          </a:prstGeom>
+          <a:noFill/>
+        </p:spPr>
+        <p:txBody>
+          <a:bodyPr wrap="square" lIns="0" rIns="0" tIns="0" bIns="0" anchor="t">
+            <a:noAutofit/>
+          </a:bodyPr>
+          <a:lstStyle/>
+          <a:p>
+            <a:pPr algn="l">
+              <a:lnSpc>
+                <a:spcPct val="112000"/>
+              </a:lnSpc>
+              <a:spcBef>
+                <a:spcPts val="0"/>
+              </a:spcBef>
+              <a:spcAft>
+                <a:spcPts val="0"/>
+              </a:spcAft>
+            </a:pPr>
+            <a:r>
+              <a:rPr sz="680" b="1" i="0">
+                <a:solidFill>
+                  <a:srgbClr val="0F172A"/>
+                </a:solidFill>
+                <a:latin typeface="Segoe UI"/>
+                <a:ea typeface="Microsoft YaHei"/>
+              </a:rPr>
+              <a:t>① 录入连接信息</a:t>
+            </a:r>
           </a:p>
         </p:txBody>
       </p:sp>
@@ -21457,8 +21181,8 @@
         </p:nvSpPr>
         <p:spPr>
           <a:xfrm>
-            <a:off x="2322576" y="1408176"/>
-            <a:ext cx="1536192" cy="118872"/>
+            <a:off x="2322576" y="1554480"/>
+            <a:ext cx="1536192" cy="201168"/>
           </a:xfrm>
           <a:prstGeom prst="rect">
             <a:avLst/>
@@ -21473,24 +21197,24 @@
           <a:p>
             <a:pPr algn="l">
               <a:lnSpc>
-                <a:spcPct val="112000"/>
-              </a:lnSpc>
-              <a:spcBef>
-                <a:spcPts val="0"/>
-              </a:spcBef>
-              <a:spcAft>
-                <a:spcPts val="0"/>
-              </a:spcAft>
-            </a:pPr>
-            <a:r>
-              <a:rPr sz="680" b="1" i="0">
-                <a:solidFill>
-                  <a:srgbClr val="0F172A"/>
-                </a:solidFill>
-                <a:latin typeface="Segoe UI"/>
-                <a:ea typeface="Microsoft YaHei"/>
-              </a:rPr>
-              <a:t>① 录入连接信息</a:t>
+                <a:spcPct val="110000"/>
+              </a:lnSpc>
+              <a:spcBef>
+                <a:spcPts val="0"/>
+              </a:spcBef>
+              <a:spcAft>
+                <a:spcPts val="0"/>
+              </a:spcAft>
+            </a:pPr>
+            <a:r>
+              <a:rPr sz="570" b="0" i="0">
+                <a:solidFill>
+                  <a:srgbClr val="64748B"/>
+                </a:solidFill>
+                <a:latin typeface="Segoe UI"/>
+                <a:ea typeface="Microsoft YaHei"/>
+              </a:rPr>
+              <a:t>主机 / 端口 / 账号 · 凭据存 Key Vault</a:t>
             </a:r>
           </a:p>
         </p:txBody>
@@ -21503,7 +21227,7 @@
         </p:nvSpPr>
         <p:spPr>
           <a:xfrm>
-            <a:off x="2322576" y="1554480"/>
+            <a:off x="2322576" y="1746504"/>
             <a:ext cx="1536192" cy="201168"/>
           </a:xfrm>
           <a:prstGeom prst="rect">
@@ -21536,52 +21260,6 @@
                 <a:latin typeface="Segoe UI"/>
                 <a:ea typeface="Microsoft YaHei"/>
               </a:rPr>
-              <a:t>主机 / 端口 / 账号 · 凭据存 Key Vault</a:t>
-            </a:r>
-          </a:p>
-        </p:txBody>
-      </p:sp>
-      <p:sp>
-        <p:nvSpPr>
-          <p:cNvPr id="31" name="TextBox 30"/>
-          <p:cNvSpPr txBox="1"/>
-          <p:nvPr/>
-        </p:nvSpPr>
-        <p:spPr>
-          <a:xfrm>
-            <a:off x="2322576" y="1746504"/>
-            <a:ext cx="1536192" cy="201168"/>
-          </a:xfrm>
-          <a:prstGeom prst="rect">
-            <a:avLst/>
-          </a:prstGeom>
-          <a:noFill/>
-        </p:spPr>
-        <p:txBody>
-          <a:bodyPr wrap="square" lIns="0" rIns="0" tIns="0" bIns="0" anchor="t">
-            <a:noAutofit/>
-          </a:bodyPr>
-          <a:lstStyle/>
-          <a:p>
-            <a:pPr algn="l">
-              <a:lnSpc>
-                <a:spcPct val="110000"/>
-              </a:lnSpc>
-              <a:spcBef>
-                <a:spcPts val="0"/>
-              </a:spcBef>
-              <a:spcAft>
-                <a:spcPts val="0"/>
-              </a:spcAft>
-            </a:pPr>
-            <a:r>
-              <a:rPr sz="570" b="0" i="0">
-                <a:solidFill>
-                  <a:srgbClr val="64748B"/>
-                </a:solidFill>
-                <a:latin typeface="Segoe UI"/>
-                <a:ea typeface="Microsoft YaHei"/>
-              </a:rPr>
               <a:t>「测试连接」校验连通与权限</a:t>
             </a:r>
           </a:p>
@@ -21589,7 +21267,7 @@
       </p:sp>
       <p:sp>
         <p:nvSpPr>
-          <p:cNvPr id="32" name="Rounded Rectangle 31"/>
+          <p:cNvPr id="31" name="Rounded Rectangle 30"/>
           <p:cNvSpPr/>
           <p:nvPr/>
         </p:nvSpPr>
@@ -21637,47 +21315,93 @@
       </p:sp>
       <p:sp>
         <p:nvSpPr>
-          <p:cNvPr id="33" name="Rounded Rectangle 32"/>
-          <p:cNvSpPr/>
-          <p:nvPr/>
-        </p:nvSpPr>
-        <p:spPr>
-          <a:xfrm>
-            <a:off x="4133087" y="1408176"/>
-            <a:ext cx="32004" cy="475488"/>
-          </a:xfrm>
-          <a:prstGeom prst="roundRect">
-            <a:avLst>
-              <a:gd name="adj" fmla="val 48571"/>
-            </a:avLst>
-          </a:prstGeom>
-          <a:solidFill>
-            <a:srgbClr val="0891B2"/>
-          </a:solidFill>
-          <a:ln>
-            <a:noFill/>
-          </a:ln>
-          <a:effectLst/>
-        </p:spPr>
-        <p:style>
-          <a:lnRef idx="1">
-            <a:schemeClr val="accent1"/>
-          </a:lnRef>
-          <a:fillRef idx="3">
-            <a:schemeClr val="accent1"/>
-          </a:fillRef>
-          <a:effectRef idx="2">
-            <a:schemeClr val="accent1"/>
-          </a:effectRef>
-          <a:fontRef idx="minor">
-            <a:schemeClr val="lt1"/>
-          </a:fontRef>
-        </p:style>
-        <p:txBody>
-          <a:bodyPr rtlCol="0" anchor="ctr"/>
-          <a:lstStyle/>
-          <a:p>
-            <a:pPr algn="ctr"/>
+          <p:cNvPr id="32" name="TextBox 31"/>
+          <p:cNvSpPr txBox="1"/>
+          <p:nvPr/>
+        </p:nvSpPr>
+        <p:spPr>
+          <a:xfrm>
+            <a:off x="4224527" y="1408176"/>
+            <a:ext cx="1536192" cy="118872"/>
+          </a:xfrm>
+          <a:prstGeom prst="rect">
+            <a:avLst/>
+          </a:prstGeom>
+          <a:noFill/>
+        </p:spPr>
+        <p:txBody>
+          <a:bodyPr wrap="square" lIns="0" rIns="0" tIns="0" bIns="0" anchor="t">
+            <a:noAutofit/>
+          </a:bodyPr>
+          <a:lstStyle/>
+          <a:p>
+            <a:pPr algn="l">
+              <a:lnSpc>
+                <a:spcPct val="112000"/>
+              </a:lnSpc>
+              <a:spcBef>
+                <a:spcPts val="0"/>
+              </a:spcBef>
+              <a:spcAft>
+                <a:spcPts val="0"/>
+              </a:spcAft>
+            </a:pPr>
+            <a:r>
+              <a:rPr sz="680" b="1" i="0">
+                <a:solidFill>
+                  <a:srgbClr val="0F172A"/>
+                </a:solidFill>
+                <a:latin typeface="Segoe UI"/>
+                <a:ea typeface="Microsoft YaHei"/>
+              </a:rPr>
+              <a:t>② 自动读取表清单</a:t>
+            </a:r>
+          </a:p>
+        </p:txBody>
+      </p:sp>
+      <p:sp>
+        <p:nvSpPr>
+          <p:cNvPr id="33" name="TextBox 32"/>
+          <p:cNvSpPr txBox="1"/>
+          <p:nvPr/>
+        </p:nvSpPr>
+        <p:spPr>
+          <a:xfrm>
+            <a:off x="4224527" y="1554480"/>
+            <a:ext cx="1536192" cy="201168"/>
+          </a:xfrm>
+          <a:prstGeom prst="rect">
+            <a:avLst/>
+          </a:prstGeom>
+          <a:noFill/>
+        </p:spPr>
+        <p:txBody>
+          <a:bodyPr wrap="square" lIns="0" rIns="0" tIns="0" bIns="0" anchor="t">
+            <a:noAutofit/>
+          </a:bodyPr>
+          <a:lstStyle/>
+          <a:p>
+            <a:pPr algn="l">
+              <a:lnSpc>
+                <a:spcPct val="110000"/>
+              </a:lnSpc>
+              <a:spcBef>
+                <a:spcPts val="0"/>
+              </a:spcBef>
+              <a:spcAft>
+                <a:spcPts val="0"/>
+              </a:spcAft>
+            </a:pPr>
+            <a:r>
+              <a:rPr sz="570" b="0" i="0">
+                <a:solidFill>
+                  <a:srgbClr val="64748B"/>
+                </a:solidFill>
+                <a:latin typeface="Segoe UI"/>
+                <a:ea typeface="Microsoft YaHei"/>
+              </a:rPr>
+              <a:t>扫描 information_schema · 表名 / 行数 / 大小</a:t>
+            </a:r>
           </a:p>
         </p:txBody>
       </p:sp>
@@ -21689,8 +21413,8 @@
         </p:nvSpPr>
         <p:spPr>
           <a:xfrm>
-            <a:off x="4224527" y="1408176"/>
-            <a:ext cx="1536192" cy="118872"/>
+            <a:off x="4224527" y="1746504"/>
+            <a:ext cx="1536192" cy="201168"/>
           </a:xfrm>
           <a:prstGeom prst="rect">
             <a:avLst/>
@@ -21705,52 +21429,6 @@
           <a:p>
             <a:pPr algn="l">
               <a:lnSpc>
-                <a:spcPct val="112000"/>
-              </a:lnSpc>
-              <a:spcBef>
-                <a:spcPts val="0"/>
-              </a:spcBef>
-              <a:spcAft>
-                <a:spcPts val="0"/>
-              </a:spcAft>
-            </a:pPr>
-            <a:r>
-              <a:rPr sz="680" b="1" i="0">
-                <a:solidFill>
-                  <a:srgbClr val="0F172A"/>
-                </a:solidFill>
-                <a:latin typeface="Segoe UI"/>
-                <a:ea typeface="Microsoft YaHei"/>
-              </a:rPr>
-              <a:t>② 自动读取表清单</a:t>
-            </a:r>
-          </a:p>
-        </p:txBody>
-      </p:sp>
-      <p:sp>
-        <p:nvSpPr>
-          <p:cNvPr id="35" name="TextBox 34"/>
-          <p:cNvSpPr txBox="1"/>
-          <p:nvPr/>
-        </p:nvSpPr>
-        <p:spPr>
-          <a:xfrm>
-            <a:off x="4224527" y="1554480"/>
-            <a:ext cx="1536192" cy="201168"/>
-          </a:xfrm>
-          <a:prstGeom prst="rect">
-            <a:avLst/>
-          </a:prstGeom>
-          <a:noFill/>
-        </p:spPr>
-        <p:txBody>
-          <a:bodyPr wrap="square" lIns="0" rIns="0" tIns="0" bIns="0" anchor="t">
-            <a:noAutofit/>
-          </a:bodyPr>
-          <a:lstStyle/>
-          <a:p>
-            <a:pPr algn="l">
-              <a:lnSpc>
                 <a:spcPct val="110000"/>
               </a:lnSpc>
               <a:spcBef>
@@ -21768,52 +21446,6 @@
                 <a:latin typeface="Segoe UI"/>
                 <a:ea typeface="Microsoft YaHei"/>
               </a:rPr>
-              <a:t>扫描 information_schema · 表名 / 行数 / 大小</a:t>
-            </a:r>
-          </a:p>
-        </p:txBody>
-      </p:sp>
-      <p:sp>
-        <p:nvSpPr>
-          <p:cNvPr id="36" name="TextBox 35"/>
-          <p:cNvSpPr txBox="1"/>
-          <p:nvPr/>
-        </p:nvSpPr>
-        <p:spPr>
-          <a:xfrm>
-            <a:off x="4224527" y="1746504"/>
-            <a:ext cx="1536192" cy="201168"/>
-          </a:xfrm>
-          <a:prstGeom prst="rect">
-            <a:avLst/>
-          </a:prstGeom>
-          <a:noFill/>
-        </p:spPr>
-        <p:txBody>
-          <a:bodyPr wrap="square" lIns="0" rIns="0" tIns="0" bIns="0" anchor="t">
-            <a:noAutofit/>
-          </a:bodyPr>
-          <a:lstStyle/>
-          <a:p>
-            <a:pPr algn="l">
-              <a:lnSpc>
-                <a:spcPct val="110000"/>
-              </a:lnSpc>
-              <a:spcBef>
-                <a:spcPts val="0"/>
-              </a:spcBef>
-              <a:spcAft>
-                <a:spcPts val="0"/>
-              </a:spcAft>
-            </a:pPr>
-            <a:r>
-              <a:rPr sz="570" b="0" i="0">
-                <a:solidFill>
-                  <a:srgbClr val="64748B"/>
-                </a:solidFill>
-                <a:latin typeface="Segoe UI"/>
-                <a:ea typeface="Microsoft YaHei"/>
-              </a:rPr>
               <a:t>共发现 10 张表（含类型与主键）</a:t>
             </a:r>
           </a:p>
@@ -21821,7 +21453,7 @@
       </p:sp>
       <p:sp>
         <p:nvSpPr>
-          <p:cNvPr id="37" name="Rounded Rectangle 36"/>
+          <p:cNvPr id="35" name="Rounded Rectangle 34"/>
           <p:cNvSpPr/>
           <p:nvPr/>
         </p:nvSpPr>
@@ -21869,53 +21501,7 @@
       </p:sp>
       <p:sp>
         <p:nvSpPr>
-          <p:cNvPr id="38" name="Rounded Rectangle 37"/>
-          <p:cNvSpPr/>
-          <p:nvPr/>
-        </p:nvSpPr>
-        <p:spPr>
-          <a:xfrm>
-            <a:off x="6035040" y="1408176"/>
-            <a:ext cx="32004" cy="475488"/>
-          </a:xfrm>
-          <a:prstGeom prst="roundRect">
-            <a:avLst>
-              <a:gd name="adj" fmla="val 48571"/>
-            </a:avLst>
-          </a:prstGeom>
-          <a:solidFill>
-            <a:srgbClr val="0891B2"/>
-          </a:solidFill>
-          <a:ln>
-            <a:noFill/>
-          </a:ln>
-          <a:effectLst/>
-        </p:spPr>
-        <p:style>
-          <a:lnRef idx="1">
-            <a:schemeClr val="accent1"/>
-          </a:lnRef>
-          <a:fillRef idx="3">
-            <a:schemeClr val="accent1"/>
-          </a:fillRef>
-          <a:effectRef idx="2">
-            <a:schemeClr val="accent1"/>
-          </a:effectRef>
-          <a:fontRef idx="minor">
-            <a:schemeClr val="lt1"/>
-          </a:fontRef>
-        </p:style>
-        <p:txBody>
-          <a:bodyPr rtlCol="0" anchor="ctr"/>
-          <a:lstStyle/>
-          <a:p>
-            <a:pPr algn="ctr"/>
-          </a:p>
-        </p:txBody>
-      </p:sp>
-      <p:sp>
-        <p:nvSpPr>
-          <p:cNvPr id="39" name="TextBox 38"/>
+          <p:cNvPr id="36" name="TextBox 35"/>
           <p:cNvSpPr txBox="1"/>
           <p:nvPr/>
         </p:nvSpPr>
@@ -21961,7 +21547,7 @@
       </p:sp>
       <p:sp>
         <p:nvSpPr>
-          <p:cNvPr id="40" name="TextBox 39"/>
+          <p:cNvPr id="37" name="TextBox 36"/>
           <p:cNvSpPr txBox="1"/>
           <p:nvPr/>
         </p:nvSpPr>
@@ -22007,7 +21593,7 @@
       </p:sp>
       <p:sp>
         <p:nvSpPr>
-          <p:cNvPr id="41" name="TextBox 40"/>
+          <p:cNvPr id="38" name="TextBox 37"/>
           <p:cNvSpPr txBox="1"/>
           <p:nvPr/>
         </p:nvSpPr>
@@ -22053,7 +21639,7 @@
       </p:sp>
       <p:cxnSp>
         <p:nvCxnSpPr>
-          <p:cNvPr id="42" name="Connector 41"/>
+          <p:cNvPr id="39" name="Connector 38"/>
           <p:cNvCxnSpPr/>
           <p:nvPr/>
         </p:nvCxnSpPr>
@@ -22076,7 +21662,7 @@
       </p:cxnSp>
       <p:cxnSp>
         <p:nvCxnSpPr>
-          <p:cNvPr id="43" name="Connector 42"/>
+          <p:cNvPr id="40" name="Connector 39"/>
           <p:cNvCxnSpPr/>
           <p:nvPr/>
         </p:nvCxnSpPr>
@@ -22099,7 +21685,7 @@
       </p:cxnSp>
       <p:sp>
         <p:nvSpPr>
-          <p:cNvPr id="44" name="TextBox 43"/>
+          <p:cNvPr id="41" name="TextBox 40"/>
           <p:cNvSpPr txBox="1"/>
           <p:nvPr/>
         </p:nvSpPr>
@@ -22145,7 +21731,7 @@
       </p:sp>
       <p:cxnSp>
         <p:nvCxnSpPr>
-          <p:cNvPr id="45" name="Connector 44"/>
+          <p:cNvPr id="42" name="Connector 41"/>
           <p:cNvCxnSpPr/>
           <p:nvPr/>
         </p:nvCxnSpPr>
@@ -22168,7 +21754,7 @@
       </p:cxnSp>
       <p:sp>
         <p:nvSpPr>
-          <p:cNvPr id="46" name="Rounded Rectangle 45"/>
+          <p:cNvPr id="43" name="Rounded Rectangle 42"/>
           <p:cNvSpPr/>
           <p:nvPr/>
         </p:nvSpPr>
@@ -22216,7 +21802,7 @@
       </p:sp>
       <p:sp>
         <p:nvSpPr>
-          <p:cNvPr id="47" name="Oval 46"/>
+          <p:cNvPr id="44" name="Oval 43"/>
           <p:cNvSpPr/>
           <p:nvPr/>
         </p:nvSpPr>
@@ -22262,14 +21848,152 @@
       </p:sp>
       <p:sp>
         <p:nvSpPr>
+          <p:cNvPr id="45" name="TextBox 44"/>
+          <p:cNvSpPr txBox="1"/>
+          <p:nvPr/>
+        </p:nvSpPr>
+        <p:spPr>
+          <a:xfrm>
+            <a:off x="347472" y="2404872"/>
+            <a:ext cx="310896" cy="310896"/>
+          </a:xfrm>
+          <a:prstGeom prst="rect">
+            <a:avLst/>
+          </a:prstGeom>
+          <a:noFill/>
+        </p:spPr>
+        <p:txBody>
+          <a:bodyPr wrap="square" lIns="0" rIns="0" tIns="0" bIns="0" anchor="ctr">
+            <a:noAutofit/>
+          </a:bodyPr>
+          <a:lstStyle/>
+          <a:p>
+            <a:pPr algn="ctr">
+              <a:lnSpc>
+                <a:spcPct val="112000"/>
+              </a:lnSpc>
+              <a:spcBef>
+                <a:spcPts val="0"/>
+              </a:spcBef>
+              <a:spcAft>
+                <a:spcPts val="0"/>
+              </a:spcAft>
+            </a:pPr>
+            <a:r>
+              <a:rPr sz="650" b="1" i="0">
+                <a:solidFill>
+                  <a:srgbClr val="EA580C"/>
+                </a:solidFill>
+                <a:latin typeface="Consolas"/>
+                <a:ea typeface="Microsoft YaHei"/>
+              </a:rPr>
+              <a:t>02</a:t>
+            </a:r>
+          </a:p>
+        </p:txBody>
+      </p:sp>
+      <p:sp>
+        <p:nvSpPr>
+          <p:cNvPr id="46" name="TextBox 45"/>
+          <p:cNvSpPr txBox="1"/>
+          <p:nvPr/>
+        </p:nvSpPr>
+        <p:spPr>
+          <a:xfrm>
+            <a:off x="822960" y="2304288"/>
+            <a:ext cx="1335024" cy="164592"/>
+          </a:xfrm>
+          <a:prstGeom prst="rect">
+            <a:avLst/>
+          </a:prstGeom>
+          <a:noFill/>
+        </p:spPr>
+        <p:txBody>
+          <a:bodyPr wrap="square" lIns="0" rIns="0" tIns="0" bIns="0" anchor="t">
+            <a:noAutofit/>
+          </a:bodyPr>
+          <a:lstStyle/>
+          <a:p>
+            <a:pPr algn="l">
+              <a:lnSpc>
+                <a:spcPct val="112000"/>
+              </a:lnSpc>
+              <a:spcBef>
+                <a:spcPts val="0"/>
+              </a:spcBef>
+              <a:spcAft>
+                <a:spcPts val="0"/>
+              </a:spcAft>
+            </a:pPr>
+            <a:r>
+              <a:rPr sz="919" b="1" i="0">
+                <a:solidFill>
+                  <a:srgbClr val="0F172A"/>
+                </a:solidFill>
+                <a:latin typeface="Segoe UI"/>
+                <a:ea typeface="Microsoft YaHei"/>
+              </a:rPr>
+              <a:t>数据抽取</a:t>
+            </a:r>
+          </a:p>
+        </p:txBody>
+      </p:sp>
+      <p:sp>
+        <p:nvSpPr>
+          <p:cNvPr id="47" name="TextBox 46"/>
+          <p:cNvSpPr txBox="1"/>
+          <p:nvPr/>
+        </p:nvSpPr>
+        <p:spPr>
+          <a:xfrm>
+            <a:off x="822960" y="2478024"/>
+            <a:ext cx="1335024" cy="109728"/>
+          </a:xfrm>
+          <a:prstGeom prst="rect">
+            <a:avLst/>
+          </a:prstGeom>
+          <a:noFill/>
+        </p:spPr>
+        <p:txBody>
+          <a:bodyPr wrap="square" lIns="0" rIns="0" tIns="0" bIns="0" anchor="t">
+            <a:noAutofit/>
+          </a:bodyPr>
+          <a:lstStyle/>
+          <a:p>
+            <a:pPr algn="l">
+              <a:lnSpc>
+                <a:spcPct val="112000"/>
+              </a:lnSpc>
+              <a:spcBef>
+                <a:spcPts val="0"/>
+              </a:spcBef>
+              <a:spcAft>
+                <a:spcPts val="0"/>
+              </a:spcAft>
+            </a:pPr>
+            <a:r>
+              <a:rPr sz="520" b="1" i="0" spc="110">
+                <a:solidFill>
+                  <a:srgbClr val="EA580C"/>
+                </a:solidFill>
+                <a:latin typeface="Consolas"/>
+                <a:ea typeface="Microsoft YaHei"/>
+              </a:rPr>
+              <a:t>INGEST</a:t>
+            </a:r>
+          </a:p>
+        </p:txBody>
+      </p:sp>
+      <p:sp>
+        <p:nvSpPr>
           <p:cNvPr id="48" name="TextBox 47"/>
           <p:cNvSpPr txBox="1"/>
           <p:nvPr/>
         </p:nvSpPr>
         <p:spPr>
           <a:xfrm>
-            <a:off x="347472" y="2404872"/>
-            <a:ext cx="310896" cy="310896"/>
+            <a:off x="822960" y="2615184"/>
+            <a:ext cx="1353312" cy="114300"/>
           </a:xfrm>
           <a:prstGeom prst="rect">
             <a:avLst/>
@@ -22277,12 +22001,12 @@
           <a:noFill/>
         </p:spPr>
         <p:txBody>
-          <a:bodyPr wrap="square" lIns="0" rIns="0" tIns="0" bIns="0" anchor="ctr">
+          <a:bodyPr wrap="square" lIns="0" rIns="0" tIns="0" bIns="0" anchor="t">
             <a:noAutofit/>
           </a:bodyPr>
           <a:lstStyle/>
           <a:p>
-            <a:pPr algn="ctr">
+            <a:pPr algn="l">
               <a:lnSpc>
                 <a:spcPct val="112000"/>
               </a:lnSpc>
@@ -22294,14 +22018,14 @@
               </a:spcAft>
             </a:pPr>
             <a:r>
-              <a:rPr sz="650" b="1" i="0">
-                <a:solidFill>
-                  <a:srgbClr val="EA580C"/>
-                </a:solidFill>
-                <a:latin typeface="Consolas"/>
-                <a:ea typeface="Microsoft YaHei"/>
-              </a:rPr>
-              <a:t>02</a:t>
+              <a:rPr sz="590" b="0" i="0">
+                <a:solidFill>
+                  <a:srgbClr val="64748B"/>
+                </a:solidFill>
+                <a:latin typeface="Segoe UI"/>
+                <a:ea typeface="Microsoft YaHei"/>
+              </a:rPr>
+              <a:t>批量 · 全量 + 增量</a:t>
             </a:r>
           </a:p>
         </p:txBody>
@@ -22314,8 +22038,8 @@
         </p:nvSpPr>
         <p:spPr>
           <a:xfrm>
-            <a:off x="822960" y="2304288"/>
-            <a:ext cx="1335024" cy="164592"/>
+            <a:off x="822960" y="2734056"/>
+            <a:ext cx="1353312" cy="114300"/>
           </a:xfrm>
           <a:prstGeom prst="rect">
             <a:avLst/>
@@ -22340,98 +22064,6 @@
               </a:spcAft>
             </a:pPr>
             <a:r>
-              <a:rPr sz="919" b="1" i="0">
-                <a:solidFill>
-                  <a:srgbClr val="0F172A"/>
-                </a:solidFill>
-                <a:latin typeface="Segoe UI"/>
-                <a:ea typeface="Microsoft YaHei"/>
-              </a:rPr>
-              <a:t>数据抽取</a:t>
-            </a:r>
-          </a:p>
-        </p:txBody>
-      </p:sp>
-      <p:sp>
-        <p:nvSpPr>
-          <p:cNvPr id="50" name="TextBox 49"/>
-          <p:cNvSpPr txBox="1"/>
-          <p:nvPr/>
-        </p:nvSpPr>
-        <p:spPr>
-          <a:xfrm>
-            <a:off x="822960" y="2478024"/>
-            <a:ext cx="1335024" cy="109728"/>
-          </a:xfrm>
-          <a:prstGeom prst="rect">
-            <a:avLst/>
-          </a:prstGeom>
-          <a:noFill/>
-        </p:spPr>
-        <p:txBody>
-          <a:bodyPr wrap="square" lIns="0" rIns="0" tIns="0" bIns="0" anchor="t">
-            <a:noAutofit/>
-          </a:bodyPr>
-          <a:lstStyle/>
-          <a:p>
-            <a:pPr algn="l">
-              <a:lnSpc>
-                <a:spcPct val="112000"/>
-              </a:lnSpc>
-              <a:spcBef>
-                <a:spcPts val="0"/>
-              </a:spcBef>
-              <a:spcAft>
-                <a:spcPts val="0"/>
-              </a:spcAft>
-            </a:pPr>
-            <a:r>
-              <a:rPr sz="520" b="1" i="0" spc="110">
-                <a:solidFill>
-                  <a:srgbClr val="EA580C"/>
-                </a:solidFill>
-                <a:latin typeface="Consolas"/>
-                <a:ea typeface="Microsoft YaHei"/>
-              </a:rPr>
-              <a:t>INGEST</a:t>
-            </a:r>
-          </a:p>
-        </p:txBody>
-      </p:sp>
-      <p:sp>
-        <p:nvSpPr>
-          <p:cNvPr id="51" name="TextBox 50"/>
-          <p:cNvSpPr txBox="1"/>
-          <p:nvPr/>
-        </p:nvSpPr>
-        <p:spPr>
-          <a:xfrm>
-            <a:off x="822960" y="2615184"/>
-            <a:ext cx="1353312" cy="114300"/>
-          </a:xfrm>
-          <a:prstGeom prst="rect">
-            <a:avLst/>
-          </a:prstGeom>
-          <a:noFill/>
-        </p:spPr>
-        <p:txBody>
-          <a:bodyPr wrap="square" lIns="0" rIns="0" tIns="0" bIns="0" anchor="t">
-            <a:noAutofit/>
-          </a:bodyPr>
-          <a:lstStyle/>
-          <a:p>
-            <a:pPr algn="l">
-              <a:lnSpc>
-                <a:spcPct val="112000"/>
-              </a:lnSpc>
-              <a:spcBef>
-                <a:spcPts val="0"/>
-              </a:spcBef>
-              <a:spcAft>
-                <a:spcPts val="0"/>
-              </a:spcAft>
-            </a:pPr>
-            <a:r>
               <a:rPr sz="590" b="0" i="0">
                 <a:solidFill>
                   <a:srgbClr val="64748B"/>
@@ -22439,52 +22071,6 @@
                 <a:latin typeface="Segoe UI"/>
                 <a:ea typeface="Microsoft YaHei"/>
               </a:rPr>
-              <a:t>批量 · 全量 + 增量</a:t>
-            </a:r>
-          </a:p>
-        </p:txBody>
-      </p:sp>
-      <p:sp>
-        <p:nvSpPr>
-          <p:cNvPr id="52" name="TextBox 51"/>
-          <p:cNvSpPr txBox="1"/>
-          <p:nvPr/>
-        </p:nvSpPr>
-        <p:spPr>
-          <a:xfrm>
-            <a:off x="822960" y="2734056"/>
-            <a:ext cx="1353312" cy="114300"/>
-          </a:xfrm>
-          <a:prstGeom prst="rect">
-            <a:avLst/>
-          </a:prstGeom>
-          <a:noFill/>
-        </p:spPr>
-        <p:txBody>
-          <a:bodyPr wrap="square" lIns="0" rIns="0" tIns="0" bIns="0" anchor="t">
-            <a:noAutofit/>
-          </a:bodyPr>
-          <a:lstStyle/>
-          <a:p>
-            <a:pPr algn="l">
-              <a:lnSpc>
-                <a:spcPct val="112000"/>
-              </a:lnSpc>
-              <a:spcBef>
-                <a:spcPts val="0"/>
-              </a:spcBef>
-              <a:spcAft>
-                <a:spcPts val="0"/>
-              </a:spcAft>
-            </a:pPr>
-            <a:r>
-              <a:rPr sz="590" b="0" i="0">
-                <a:solidFill>
-                  <a:srgbClr val="64748B"/>
-                </a:solidFill>
-                <a:latin typeface="Segoe UI"/>
-                <a:ea typeface="Microsoft YaHei"/>
-              </a:rPr>
               <a:t>ADF 编排调度</a:t>
             </a:r>
           </a:p>
@@ -22492,7 +22078,7 @@
       </p:sp>
       <p:sp>
         <p:nvSpPr>
-          <p:cNvPr id="53" name="Rounded Rectangle 52"/>
+          <p:cNvPr id="50" name="Rounded Rectangle 49"/>
           <p:cNvSpPr/>
           <p:nvPr/>
         </p:nvSpPr>
@@ -22540,7 +22126,7 @@
       </p:sp>
       <p:sp>
         <p:nvSpPr>
-          <p:cNvPr id="54" name="TextBox 53"/>
+          <p:cNvPr id="51" name="TextBox 50"/>
           <p:cNvSpPr txBox="1"/>
           <p:nvPr/>
         </p:nvSpPr>
@@ -22609,7 +22195,7 @@
       </p:sp>
       <p:sp>
         <p:nvSpPr>
-          <p:cNvPr id="55" name="Rounded Rectangle 54"/>
+          <p:cNvPr id="52" name="Rounded Rectangle 51"/>
           <p:cNvSpPr/>
           <p:nvPr/>
         </p:nvSpPr>
@@ -22657,7 +22243,7 @@
       </p:sp>
       <p:sp>
         <p:nvSpPr>
-          <p:cNvPr id="56" name="TextBox 55"/>
+          <p:cNvPr id="53" name="TextBox 52"/>
           <p:cNvSpPr txBox="1"/>
           <p:nvPr/>
         </p:nvSpPr>
@@ -22726,7 +22312,7 @@
       </p:sp>
       <p:cxnSp>
         <p:nvCxnSpPr>
-          <p:cNvPr id="57" name="Connector 56"/>
+          <p:cNvPr id="54" name="Connector 53"/>
           <p:cNvCxnSpPr/>
           <p:nvPr/>
         </p:nvCxnSpPr>
@@ -22749,7 +22335,7 @@
       </p:cxnSp>
       <p:sp>
         <p:nvSpPr>
-          <p:cNvPr id="58" name="Rounded Rectangle 57"/>
+          <p:cNvPr id="55" name="Rounded Rectangle 54"/>
           <p:cNvSpPr/>
           <p:nvPr/>
         </p:nvSpPr>
@@ -22797,7 +22383,7 @@
       </p:sp>
       <p:sp>
         <p:nvSpPr>
-          <p:cNvPr id="59" name="Oval 58"/>
+          <p:cNvPr id="56" name="Oval 55"/>
           <p:cNvSpPr/>
           <p:nvPr/>
         </p:nvSpPr>
@@ -22843,14 +22429,152 @@
       </p:sp>
       <p:sp>
         <p:nvSpPr>
+          <p:cNvPr id="57" name="TextBox 56"/>
+          <p:cNvSpPr txBox="1"/>
+          <p:nvPr/>
+        </p:nvSpPr>
+        <p:spPr>
+          <a:xfrm>
+            <a:off x="347472" y="3392424"/>
+            <a:ext cx="310896" cy="310896"/>
+          </a:xfrm>
+          <a:prstGeom prst="rect">
+            <a:avLst/>
+          </a:prstGeom>
+          <a:noFill/>
+        </p:spPr>
+        <p:txBody>
+          <a:bodyPr wrap="square" lIns="0" rIns="0" tIns="0" bIns="0" anchor="ctr">
+            <a:noAutofit/>
+          </a:bodyPr>
+          <a:lstStyle/>
+          <a:p>
+            <a:pPr algn="ctr">
+              <a:lnSpc>
+                <a:spcPct val="112000"/>
+              </a:lnSpc>
+              <a:spcBef>
+                <a:spcPts val="0"/>
+              </a:spcBef>
+              <a:spcAft>
+                <a:spcPts val="0"/>
+              </a:spcAft>
+            </a:pPr>
+            <a:r>
+              <a:rPr sz="530" b="1" i="0">
+                <a:solidFill>
+                  <a:srgbClr val="7C3AED"/>
+                </a:solidFill>
+                <a:latin typeface="Consolas"/>
+                <a:ea typeface="Microsoft YaHei"/>
+              </a:rPr>
+              <a:t>B-03</a:t>
+            </a:r>
+          </a:p>
+        </p:txBody>
+      </p:sp>
+      <p:sp>
+        <p:nvSpPr>
+          <p:cNvPr id="58" name="TextBox 57"/>
+          <p:cNvSpPr txBox="1"/>
+          <p:nvPr/>
+        </p:nvSpPr>
+        <p:spPr>
+          <a:xfrm>
+            <a:off x="822960" y="3035808"/>
+            <a:ext cx="1335024" cy="164592"/>
+          </a:xfrm>
+          <a:prstGeom prst="rect">
+            <a:avLst/>
+          </a:prstGeom>
+          <a:noFill/>
+        </p:spPr>
+        <p:txBody>
+          <a:bodyPr wrap="square" lIns="0" rIns="0" tIns="0" bIns="0" anchor="t">
+            <a:noAutofit/>
+          </a:bodyPr>
+          <a:lstStyle/>
+          <a:p>
+            <a:pPr algn="l">
+              <a:lnSpc>
+                <a:spcPct val="112000"/>
+              </a:lnSpc>
+              <a:spcBef>
+                <a:spcPts val="0"/>
+              </a:spcBef>
+              <a:spcAft>
+                <a:spcPts val="0"/>
+              </a:spcAft>
+            </a:pPr>
+            <a:r>
+              <a:rPr sz="919" b="1" i="0">
+                <a:solidFill>
+                  <a:srgbClr val="0F172A"/>
+                </a:solidFill>
+                <a:latin typeface="Segoe UI"/>
+                <a:ea typeface="Microsoft YaHei"/>
+              </a:rPr>
+              <a:t>Iceberg 冷湖</a:t>
+            </a:r>
+          </a:p>
+        </p:txBody>
+      </p:sp>
+      <p:sp>
+        <p:nvSpPr>
+          <p:cNvPr id="59" name="TextBox 58"/>
+          <p:cNvSpPr txBox="1"/>
+          <p:nvPr/>
+        </p:nvSpPr>
+        <p:spPr>
+          <a:xfrm>
+            <a:off x="822960" y="3209544"/>
+            <a:ext cx="1335024" cy="109728"/>
+          </a:xfrm>
+          <a:prstGeom prst="rect">
+            <a:avLst/>
+          </a:prstGeom>
+          <a:noFill/>
+        </p:spPr>
+        <p:txBody>
+          <a:bodyPr wrap="square" lIns="0" rIns="0" tIns="0" bIns="0" anchor="t">
+            <a:noAutofit/>
+          </a:bodyPr>
+          <a:lstStyle/>
+          <a:p>
+            <a:pPr algn="l">
+              <a:lnSpc>
+                <a:spcPct val="112000"/>
+              </a:lnSpc>
+              <a:spcBef>
+                <a:spcPts val="0"/>
+              </a:spcBef>
+              <a:spcAft>
+                <a:spcPts val="0"/>
+              </a:spcAft>
+            </a:pPr>
+            <a:r>
+              <a:rPr sz="520" b="1" i="0" spc="110">
+                <a:solidFill>
+                  <a:srgbClr val="7C3AED"/>
+                </a:solidFill>
+                <a:latin typeface="Consolas"/>
+                <a:ea typeface="Microsoft YaHei"/>
+              </a:rPr>
+              <a:t>COLD LAKE · STORAGE</a:t>
+            </a:r>
+          </a:p>
+        </p:txBody>
+      </p:sp>
+      <p:sp>
+        <p:nvSpPr>
           <p:cNvPr id="60" name="TextBox 59"/>
           <p:cNvSpPr txBox="1"/>
           <p:nvPr/>
         </p:nvSpPr>
         <p:spPr>
           <a:xfrm>
-            <a:off x="347472" y="3392424"/>
-            <a:ext cx="310896" cy="310896"/>
+            <a:off x="822960" y="3346703"/>
+            <a:ext cx="1353312" cy="114300"/>
           </a:xfrm>
           <a:prstGeom prst="rect">
             <a:avLst/>
@@ -22858,12 +22582,12 @@
           <a:noFill/>
         </p:spPr>
         <p:txBody>
-          <a:bodyPr wrap="square" lIns="0" rIns="0" tIns="0" bIns="0" anchor="ctr">
+          <a:bodyPr wrap="square" lIns="0" rIns="0" tIns="0" bIns="0" anchor="t">
             <a:noAutofit/>
           </a:bodyPr>
           <a:lstStyle/>
           <a:p>
-            <a:pPr algn="ctr">
+            <a:pPr algn="l">
               <a:lnSpc>
                 <a:spcPct val="112000"/>
               </a:lnSpc>
@@ -22875,14 +22599,14 @@
               </a:spcAft>
             </a:pPr>
             <a:r>
-              <a:rPr sz="530" b="1" i="0">
-                <a:solidFill>
-                  <a:srgbClr val="7C3AED"/>
-                </a:solidFill>
-                <a:latin typeface="Consolas"/>
-                <a:ea typeface="Microsoft YaHei"/>
-              </a:rPr>
-              <a:t>B-03</a:t>
+              <a:rPr sz="590" b="0" i="0">
+                <a:solidFill>
+                  <a:srgbClr val="64748B"/>
+                </a:solidFill>
+                <a:latin typeface="Segoe UI"/>
+                <a:ea typeface="Microsoft YaHei"/>
+              </a:rPr>
+              <a:t>ADLS Gen2 · Parquet + ZSTD</a:t>
             </a:r>
           </a:p>
         </p:txBody>
@@ -22895,8 +22619,8 @@
         </p:nvSpPr>
         <p:spPr>
           <a:xfrm>
-            <a:off x="822960" y="3035808"/>
-            <a:ext cx="1335024" cy="164592"/>
+            <a:off x="822960" y="3465575"/>
+            <a:ext cx="1353312" cy="114300"/>
           </a:xfrm>
           <a:prstGeom prst="rect">
             <a:avLst/>
@@ -22921,14 +22645,14 @@
               </a:spcAft>
             </a:pPr>
             <a:r>
-              <a:rPr sz="919" b="1" i="0">
-                <a:solidFill>
-                  <a:srgbClr val="0F172A"/>
-                </a:solidFill>
-                <a:latin typeface="Segoe UI"/>
-                <a:ea typeface="Microsoft YaHei"/>
-              </a:rPr>
-              <a:t>Iceberg 冷湖</a:t>
+              <a:rPr sz="590" b="1" i="0">
+                <a:solidFill>
+                  <a:srgbClr val="7C3AED"/>
+                </a:solidFill>
+                <a:latin typeface="Segoe UI"/>
+                <a:ea typeface="Microsoft YaHei"/>
+              </a:rPr>
+              <a:t>≈¥90–150/TB·月 · PB 级</a:t>
             </a:r>
           </a:p>
         </p:txBody>
@@ -22941,8 +22665,8 @@
         </p:nvSpPr>
         <p:spPr>
           <a:xfrm>
-            <a:off x="822960" y="3209544"/>
-            <a:ext cx="1335024" cy="109728"/>
+            <a:off x="822960" y="3584447"/>
+            <a:ext cx="1353312" cy="114300"/>
           </a:xfrm>
           <a:prstGeom prst="rect">
             <a:avLst/>
@@ -22967,14 +22691,14 @@
               </a:spcAft>
             </a:pPr>
             <a:r>
-              <a:rPr sz="520" b="1" i="0" spc="110">
-                <a:solidFill>
-                  <a:srgbClr val="7C3AED"/>
-                </a:solidFill>
-                <a:latin typeface="Consolas"/>
-                <a:ea typeface="Microsoft YaHei"/>
-              </a:rPr>
-              <a:t>COLD LAKE · STORAGE</a:t>
+              <a:rPr sz="590" b="0" i="0">
+                <a:solidFill>
+                  <a:srgbClr val="64748B"/>
+                </a:solidFill>
+                <a:latin typeface="Segoe UI"/>
+                <a:ea typeface="Microsoft YaHei"/>
+              </a:rPr>
+              <a:t>100 张表 · 1:1 原样</a:t>
             </a:r>
           </a:p>
         </p:txBody>
@@ -22987,7 +22711,7 @@
         </p:nvSpPr>
         <p:spPr>
           <a:xfrm>
-            <a:off x="822960" y="3346703"/>
+            <a:off x="822960" y="3703320"/>
             <a:ext cx="1353312" cy="114300"/>
           </a:xfrm>
           <a:prstGeom prst="rect">
@@ -23020,7 +22744,7 @@
                 <a:latin typeface="Segoe UI"/>
                 <a:ea typeface="Microsoft YaHei"/>
               </a:rPr>
-              <a:t>ADLS Gen2 · Parquet + ZSTD</a:t>
+              <a:t>Hot / Cool 分层 · ZRS</a:t>
             </a:r>
           </a:p>
         </p:txBody>
@@ -23033,8 +22757,8 @@
         </p:nvSpPr>
         <p:spPr>
           <a:xfrm>
-            <a:off x="822960" y="3465575"/>
-            <a:ext cx="1353312" cy="114300"/>
+            <a:off x="2231136" y="3035808"/>
+            <a:ext cx="5495544" cy="128016"/>
           </a:xfrm>
           <a:prstGeom prst="rect">
             <a:avLst/>
@@ -23059,151 +22783,13 @@
               </a:spcAft>
             </a:pPr>
             <a:r>
-              <a:rPr sz="590" b="1" i="0">
+              <a:rPr sz="640" b="1" i="0">
                 <a:solidFill>
                   <a:srgbClr val="7C3AED"/>
                 </a:solidFill>
                 <a:latin typeface="Segoe UI"/>
                 <a:ea typeface="Microsoft YaHei"/>
               </a:rPr>
-              <a:t>≈¥90–150/TB·月 · PB 级</a:t>
-            </a:r>
-          </a:p>
-        </p:txBody>
-      </p:sp>
-      <p:sp>
-        <p:nvSpPr>
-          <p:cNvPr id="65" name="TextBox 64"/>
-          <p:cNvSpPr txBox="1"/>
-          <p:nvPr/>
-        </p:nvSpPr>
-        <p:spPr>
-          <a:xfrm>
-            <a:off x="822960" y="3584447"/>
-            <a:ext cx="1353312" cy="114300"/>
-          </a:xfrm>
-          <a:prstGeom prst="rect">
-            <a:avLst/>
-          </a:prstGeom>
-          <a:noFill/>
-        </p:spPr>
-        <p:txBody>
-          <a:bodyPr wrap="square" lIns="0" rIns="0" tIns="0" bIns="0" anchor="t">
-            <a:noAutofit/>
-          </a:bodyPr>
-          <a:lstStyle/>
-          <a:p>
-            <a:pPr algn="l">
-              <a:lnSpc>
-                <a:spcPct val="112000"/>
-              </a:lnSpc>
-              <a:spcBef>
-                <a:spcPts val="0"/>
-              </a:spcBef>
-              <a:spcAft>
-                <a:spcPts val="0"/>
-              </a:spcAft>
-            </a:pPr>
-            <a:r>
-              <a:rPr sz="590" b="0" i="0">
-                <a:solidFill>
-                  <a:srgbClr val="64748B"/>
-                </a:solidFill>
-                <a:latin typeface="Segoe UI"/>
-                <a:ea typeface="Microsoft YaHei"/>
-              </a:rPr>
-              <a:t>100 张表 · 1:1 原样</a:t>
-            </a:r>
-          </a:p>
-        </p:txBody>
-      </p:sp>
-      <p:sp>
-        <p:nvSpPr>
-          <p:cNvPr id="66" name="TextBox 65"/>
-          <p:cNvSpPr txBox="1"/>
-          <p:nvPr/>
-        </p:nvSpPr>
-        <p:spPr>
-          <a:xfrm>
-            <a:off x="822960" y="3703320"/>
-            <a:ext cx="1353312" cy="114300"/>
-          </a:xfrm>
-          <a:prstGeom prst="rect">
-            <a:avLst/>
-          </a:prstGeom>
-          <a:noFill/>
-        </p:spPr>
-        <p:txBody>
-          <a:bodyPr wrap="square" lIns="0" rIns="0" tIns="0" bIns="0" anchor="t">
-            <a:noAutofit/>
-          </a:bodyPr>
-          <a:lstStyle/>
-          <a:p>
-            <a:pPr algn="l">
-              <a:lnSpc>
-                <a:spcPct val="112000"/>
-              </a:lnSpc>
-              <a:spcBef>
-                <a:spcPts val="0"/>
-              </a:spcBef>
-              <a:spcAft>
-                <a:spcPts val="0"/>
-              </a:spcAft>
-            </a:pPr>
-            <a:r>
-              <a:rPr sz="590" b="0" i="0">
-                <a:solidFill>
-                  <a:srgbClr val="64748B"/>
-                </a:solidFill>
-                <a:latin typeface="Segoe UI"/>
-                <a:ea typeface="Microsoft YaHei"/>
-              </a:rPr>
-              <a:t>Hot / Cool 分层 · ZRS</a:t>
-            </a:r>
-          </a:p>
-        </p:txBody>
-      </p:sp>
-      <p:sp>
-        <p:nvSpPr>
-          <p:cNvPr id="67" name="TextBox 66"/>
-          <p:cNvSpPr txBox="1"/>
-          <p:nvPr/>
-        </p:nvSpPr>
-        <p:spPr>
-          <a:xfrm>
-            <a:off x="2231136" y="3035808"/>
-            <a:ext cx="5495544" cy="128016"/>
-          </a:xfrm>
-          <a:prstGeom prst="rect">
-            <a:avLst/>
-          </a:prstGeom>
-          <a:noFill/>
-        </p:spPr>
-        <p:txBody>
-          <a:bodyPr wrap="square" lIns="0" rIns="0" tIns="0" bIns="0" anchor="t">
-            <a:noAutofit/>
-          </a:bodyPr>
-          <a:lstStyle/>
-          <a:p>
-            <a:pPr algn="l">
-              <a:lnSpc>
-                <a:spcPct val="112000"/>
-              </a:lnSpc>
-              <a:spcBef>
-                <a:spcPts val="0"/>
-              </a:spcBef>
-              <a:spcAft>
-                <a:spcPts val="0"/>
-              </a:spcAft>
-            </a:pPr>
-            <a:r>
-              <a:rPr sz="640" b="1" i="0">
-                <a:solidFill>
-                  <a:srgbClr val="7C3AED"/>
-                </a:solidFill>
-                <a:latin typeface="Segoe UI"/>
-                <a:ea typeface="Microsoft YaHei"/>
-              </a:rPr>
               <a:t>Iceberg 表 · 四层分层（RAW → SERVE 逐层升温，越往下越热）</a:t>
             </a:r>
           </a:p>
@@ -23211,7 +22797,7 @@
       </p:sp>
       <p:sp>
         <p:nvSpPr>
-          <p:cNvPr id="68" name="Rounded Rectangle 67"/>
+          <p:cNvPr id="65" name="Rounded Rectangle 64"/>
           <p:cNvSpPr/>
           <p:nvPr/>
         </p:nvSpPr>
@@ -23259,7 +22845,7 @@
       </p:sp>
       <p:sp>
         <p:nvSpPr>
-          <p:cNvPr id="69" name="Rounded Rectangle 68"/>
+          <p:cNvPr id="66" name="Rounded Rectangle 65"/>
           <p:cNvSpPr/>
           <p:nvPr/>
         </p:nvSpPr>
@@ -23305,7 +22891,7 @@
       </p:sp>
       <p:sp>
         <p:nvSpPr>
-          <p:cNvPr id="70" name="TextBox 69"/>
+          <p:cNvPr id="67" name="TextBox 66"/>
           <p:cNvSpPr txBox="1"/>
           <p:nvPr/>
         </p:nvSpPr>
@@ -23361,7 +22947,7 @@
       </p:sp>
       <p:sp>
         <p:nvSpPr>
-          <p:cNvPr id="71" name="Rounded Rectangle 70"/>
+          <p:cNvPr id="68" name="Rounded Rectangle 67"/>
           <p:cNvSpPr/>
           <p:nvPr/>
         </p:nvSpPr>
@@ -23409,7 +22995,7 @@
       </p:sp>
       <p:sp>
         <p:nvSpPr>
-          <p:cNvPr id="72" name="Rounded Rectangle 71"/>
+          <p:cNvPr id="69" name="Rounded Rectangle 68"/>
           <p:cNvSpPr/>
           <p:nvPr/>
         </p:nvSpPr>
@@ -23455,7 +23041,7 @@
       </p:sp>
       <p:sp>
         <p:nvSpPr>
-          <p:cNvPr id="73" name="TextBox 72"/>
+          <p:cNvPr id="70" name="TextBox 69"/>
           <p:cNvSpPr txBox="1"/>
           <p:nvPr/>
         </p:nvSpPr>
@@ -23511,7 +23097,7 @@
       </p:sp>
       <p:sp>
         <p:nvSpPr>
-          <p:cNvPr id="74" name="Rounded Rectangle 73"/>
+          <p:cNvPr id="71" name="Rounded Rectangle 70"/>
           <p:cNvSpPr/>
           <p:nvPr/>
         </p:nvSpPr>
@@ -23559,7 +23145,7 @@
       </p:sp>
       <p:sp>
         <p:nvSpPr>
-          <p:cNvPr id="75" name="Rounded Rectangle 74"/>
+          <p:cNvPr id="72" name="Rounded Rectangle 71"/>
           <p:cNvSpPr/>
           <p:nvPr/>
         </p:nvSpPr>
@@ -23605,7 +23191,7 @@
       </p:sp>
       <p:sp>
         <p:nvSpPr>
-          <p:cNvPr id="76" name="TextBox 75"/>
+          <p:cNvPr id="73" name="TextBox 72"/>
           <p:cNvSpPr txBox="1"/>
           <p:nvPr/>
         </p:nvSpPr>
@@ -23661,7 +23247,7 @@
       </p:sp>
       <p:sp>
         <p:nvSpPr>
-          <p:cNvPr id="77" name="Rounded Rectangle 76"/>
+          <p:cNvPr id="74" name="Rounded Rectangle 73"/>
           <p:cNvSpPr/>
           <p:nvPr/>
         </p:nvSpPr>
@@ -23709,7 +23295,7 @@
       </p:sp>
       <p:sp>
         <p:nvSpPr>
-          <p:cNvPr id="78" name="Rounded Rectangle 77"/>
+          <p:cNvPr id="75" name="Rounded Rectangle 74"/>
           <p:cNvSpPr/>
           <p:nvPr/>
         </p:nvSpPr>
@@ -23755,7 +23341,7 @@
       </p:sp>
       <p:sp>
         <p:nvSpPr>
-          <p:cNvPr id="79" name="TextBox 78"/>
+          <p:cNvPr id="76" name="TextBox 75"/>
           <p:cNvSpPr txBox="1"/>
           <p:nvPr/>
         </p:nvSpPr>
@@ -23811,7 +23397,7 @@
       </p:sp>
       <p:cxnSp>
         <p:nvCxnSpPr>
-          <p:cNvPr id="80" name="Connector 79"/>
+          <p:cNvPr id="77" name="Connector 76"/>
           <p:cNvCxnSpPr/>
           <p:nvPr/>
         </p:nvCxnSpPr>
@@ -23834,7 +23420,7 @@
       </p:cxnSp>
       <p:sp>
         <p:nvSpPr>
-          <p:cNvPr id="81" name="Rounded Rectangle 80"/>
+          <p:cNvPr id="78" name="Rounded Rectangle 77"/>
           <p:cNvSpPr/>
           <p:nvPr/>
         </p:nvSpPr>
@@ -23882,7 +23468,7 @@
       </p:sp>
       <p:sp>
         <p:nvSpPr>
-          <p:cNvPr id="82" name="TextBox 81"/>
+          <p:cNvPr id="79" name="TextBox 78"/>
           <p:cNvSpPr txBox="1"/>
           <p:nvPr/>
         </p:nvSpPr>
@@ -23928,7 +23514,7 @@
       </p:sp>
       <p:cxnSp>
         <p:nvCxnSpPr>
-          <p:cNvPr id="83" name="Connector 82"/>
+          <p:cNvPr id="80" name="Connector 79"/>
           <p:cNvCxnSpPr/>
           <p:nvPr/>
         </p:nvCxnSpPr>
@@ -23951,7 +23537,7 @@
       </p:cxnSp>
       <p:sp>
         <p:nvSpPr>
-          <p:cNvPr id="84" name="TextBox 83"/>
+          <p:cNvPr id="81" name="TextBox 80"/>
           <p:cNvSpPr txBox="1"/>
           <p:nvPr/>
         </p:nvSpPr>
@@ -23997,7 +23583,7 @@
       </p:sp>
       <p:cxnSp>
         <p:nvCxnSpPr>
-          <p:cNvPr id="85" name="Connector 84"/>
+          <p:cNvPr id="82" name="Connector 81"/>
           <p:cNvCxnSpPr/>
           <p:nvPr/>
         </p:nvCxnSpPr>
@@ -24020,7 +23606,7 @@
       </p:cxnSp>
       <p:sp>
         <p:nvSpPr>
-          <p:cNvPr id="86" name="TextBox 85"/>
+          <p:cNvPr id="83" name="TextBox 82"/>
           <p:cNvSpPr txBox="1"/>
           <p:nvPr/>
         </p:nvSpPr>
@@ -24066,7 +23652,7 @@
       </p:sp>
       <p:sp>
         <p:nvSpPr>
-          <p:cNvPr id="87" name="Rounded Rectangle 86"/>
+          <p:cNvPr id="84" name="Rounded Rectangle 83"/>
           <p:cNvSpPr/>
           <p:nvPr/>
         </p:nvSpPr>
@@ -24114,7 +23700,7 @@
       </p:sp>
       <p:sp>
         <p:nvSpPr>
-          <p:cNvPr id="88" name="Oval 87"/>
+          <p:cNvPr id="85" name="Oval 84"/>
           <p:cNvSpPr/>
           <p:nvPr/>
         </p:nvSpPr>
@@ -24160,14 +23746,152 @@
       </p:sp>
       <p:sp>
         <p:nvSpPr>
+          <p:cNvPr id="86" name="TextBox 85"/>
+          <p:cNvSpPr txBox="1"/>
+          <p:nvPr/>
+        </p:nvSpPr>
+        <p:spPr>
+          <a:xfrm>
+            <a:off x="347472" y="4617720"/>
+            <a:ext cx="310896" cy="310896"/>
+          </a:xfrm>
+          <a:prstGeom prst="rect">
+            <a:avLst/>
+          </a:prstGeom>
+          <a:noFill/>
+        </p:spPr>
+        <p:txBody>
+          <a:bodyPr wrap="square" lIns="0" rIns="0" tIns="0" bIns="0" anchor="ctr">
+            <a:noAutofit/>
+          </a:bodyPr>
+          <a:lstStyle/>
+          <a:p>
+            <a:pPr algn="ctr">
+              <a:lnSpc>
+                <a:spcPct val="112000"/>
+              </a:lnSpc>
+              <a:spcBef>
+                <a:spcPts val="0"/>
+              </a:spcBef>
+              <a:spcAft>
+                <a:spcPts val="0"/>
+              </a:spcAft>
+            </a:pPr>
+            <a:r>
+              <a:rPr sz="530" b="1" i="0">
+                <a:solidFill>
+                  <a:srgbClr val="059669"/>
+                </a:solidFill>
+                <a:latin typeface="Consolas"/>
+                <a:ea typeface="Microsoft YaHei"/>
+              </a:rPr>
+              <a:t>B-04</a:t>
+            </a:r>
+          </a:p>
+        </p:txBody>
+      </p:sp>
+      <p:sp>
+        <p:nvSpPr>
+          <p:cNvPr id="87" name="TextBox 86"/>
+          <p:cNvSpPr txBox="1"/>
+          <p:nvPr/>
+        </p:nvSpPr>
+        <p:spPr>
+          <a:xfrm>
+            <a:off x="822960" y="4443983"/>
+            <a:ext cx="1335024" cy="164592"/>
+          </a:xfrm>
+          <a:prstGeom prst="rect">
+            <a:avLst/>
+          </a:prstGeom>
+          <a:noFill/>
+        </p:spPr>
+        <p:txBody>
+          <a:bodyPr wrap="square" lIns="0" rIns="0" tIns="0" bIns="0" anchor="t">
+            <a:noAutofit/>
+          </a:bodyPr>
+          <a:lstStyle/>
+          <a:p>
+            <a:pPr algn="l">
+              <a:lnSpc>
+                <a:spcPct val="112000"/>
+              </a:lnSpc>
+              <a:spcBef>
+                <a:spcPts val="0"/>
+              </a:spcBef>
+              <a:spcAft>
+                <a:spcPts val="0"/>
+              </a:spcAft>
+            </a:pPr>
+            <a:r>
+              <a:rPr sz="919" b="1" i="0">
+                <a:solidFill>
+                  <a:srgbClr val="0F172A"/>
+                </a:solidFill>
+                <a:latin typeface="Segoe UI"/>
+                <a:ea typeface="Microsoft YaHei"/>
+              </a:rPr>
+              <a:t>统一计算层</a:t>
+            </a:r>
+          </a:p>
+        </p:txBody>
+      </p:sp>
+      <p:sp>
+        <p:nvSpPr>
+          <p:cNvPr id="88" name="TextBox 87"/>
+          <p:cNvSpPr txBox="1"/>
+          <p:nvPr/>
+        </p:nvSpPr>
+        <p:spPr>
+          <a:xfrm>
+            <a:off x="822960" y="4617720"/>
+            <a:ext cx="1335024" cy="109728"/>
+          </a:xfrm>
+          <a:prstGeom prst="rect">
+            <a:avLst/>
+          </a:prstGeom>
+          <a:noFill/>
+        </p:spPr>
+        <p:txBody>
+          <a:bodyPr wrap="square" lIns="0" rIns="0" tIns="0" bIns="0" anchor="t">
+            <a:noAutofit/>
+          </a:bodyPr>
+          <a:lstStyle/>
+          <a:p>
+            <a:pPr algn="l">
+              <a:lnSpc>
+                <a:spcPct val="112000"/>
+              </a:lnSpc>
+              <a:spcBef>
+                <a:spcPts val="0"/>
+              </a:spcBef>
+              <a:spcAft>
+                <a:spcPts val="0"/>
+              </a:spcAft>
+            </a:pPr>
+            <a:r>
+              <a:rPr sz="520" b="1" i="0" spc="110">
+                <a:solidFill>
+                  <a:srgbClr val="059669"/>
+                </a:solidFill>
+                <a:latin typeface="Consolas"/>
+                <a:ea typeface="Microsoft YaHei"/>
+              </a:rPr>
+              <a:t>COMPUTE</a:t>
+            </a:r>
+          </a:p>
+        </p:txBody>
+      </p:sp>
+      <p:sp>
+        <p:nvSpPr>
           <p:cNvPr id="89" name="TextBox 88"/>
           <p:cNvSpPr txBox="1"/>
           <p:nvPr/>
         </p:nvSpPr>
         <p:spPr>
           <a:xfrm>
-            <a:off x="347472" y="4617720"/>
-            <a:ext cx="310896" cy="310896"/>
+            <a:off x="822960" y="4754880"/>
+            <a:ext cx="1353312" cy="114300"/>
           </a:xfrm>
           <a:prstGeom prst="rect">
             <a:avLst/>
@@ -24175,12 +23899,12 @@
           <a:noFill/>
         </p:spPr>
         <p:txBody>
-          <a:bodyPr wrap="square" lIns="0" rIns="0" tIns="0" bIns="0" anchor="ctr">
+          <a:bodyPr wrap="square" lIns="0" rIns="0" tIns="0" bIns="0" anchor="t">
             <a:noAutofit/>
           </a:bodyPr>
           <a:lstStyle/>
           <a:p>
-            <a:pPr algn="ctr">
+            <a:pPr algn="l">
               <a:lnSpc>
                 <a:spcPct val="112000"/>
               </a:lnSpc>
@@ -24192,14 +23916,14 @@
               </a:spcAft>
             </a:pPr>
             <a:r>
-              <a:rPr sz="530" b="1" i="0">
-                <a:solidFill>
-                  <a:srgbClr val="059669"/>
-                </a:solidFill>
-                <a:latin typeface="Consolas"/>
-                <a:ea typeface="Microsoft YaHei"/>
-              </a:rPr>
-              <a:t>B-04</a:t>
+              <a:rPr sz="590" b="0" i="0">
+                <a:solidFill>
+                  <a:srgbClr val="64748B"/>
+                </a:solidFill>
+                <a:latin typeface="Segoe UI"/>
+                <a:ea typeface="Microsoft YaHei"/>
+              </a:rPr>
+              <a:t>Databricks 读写一体</a:t>
             </a:r>
           </a:p>
         </p:txBody>
@@ -24212,8 +23936,8 @@
         </p:nvSpPr>
         <p:spPr>
           <a:xfrm>
-            <a:off x="822960" y="4443983"/>
-            <a:ext cx="1335024" cy="164592"/>
+            <a:off x="822960" y="4873752"/>
+            <a:ext cx="1353312" cy="114300"/>
           </a:xfrm>
           <a:prstGeom prst="rect">
             <a:avLst/>
@@ -24238,98 +23962,6 @@
               </a:spcAft>
             </a:pPr>
             <a:r>
-              <a:rPr sz="919" b="1" i="0">
-                <a:solidFill>
-                  <a:srgbClr val="0F172A"/>
-                </a:solidFill>
-                <a:latin typeface="Segoe UI"/>
-                <a:ea typeface="Microsoft YaHei"/>
-              </a:rPr>
-              <a:t>统一计算层</a:t>
-            </a:r>
-          </a:p>
-        </p:txBody>
-      </p:sp>
-      <p:sp>
-        <p:nvSpPr>
-          <p:cNvPr id="91" name="TextBox 90"/>
-          <p:cNvSpPr txBox="1"/>
-          <p:nvPr/>
-        </p:nvSpPr>
-        <p:spPr>
-          <a:xfrm>
-            <a:off x="822960" y="4617720"/>
-            <a:ext cx="1335024" cy="109728"/>
-          </a:xfrm>
-          <a:prstGeom prst="rect">
-            <a:avLst/>
-          </a:prstGeom>
-          <a:noFill/>
-        </p:spPr>
-        <p:txBody>
-          <a:bodyPr wrap="square" lIns="0" rIns="0" tIns="0" bIns="0" anchor="t">
-            <a:noAutofit/>
-          </a:bodyPr>
-          <a:lstStyle/>
-          <a:p>
-            <a:pPr algn="l">
-              <a:lnSpc>
-                <a:spcPct val="112000"/>
-              </a:lnSpc>
-              <a:spcBef>
-                <a:spcPts val="0"/>
-              </a:spcBef>
-              <a:spcAft>
-                <a:spcPts val="0"/>
-              </a:spcAft>
-            </a:pPr>
-            <a:r>
-              <a:rPr sz="520" b="1" i="0" spc="110">
-                <a:solidFill>
-                  <a:srgbClr val="059669"/>
-                </a:solidFill>
-                <a:latin typeface="Consolas"/>
-                <a:ea typeface="Microsoft YaHei"/>
-              </a:rPr>
-              <a:t>COMPUTE</a:t>
-            </a:r>
-          </a:p>
-        </p:txBody>
-      </p:sp>
-      <p:sp>
-        <p:nvSpPr>
-          <p:cNvPr id="92" name="TextBox 91"/>
-          <p:cNvSpPr txBox="1"/>
-          <p:nvPr/>
-        </p:nvSpPr>
-        <p:spPr>
-          <a:xfrm>
-            <a:off x="822960" y="4754880"/>
-            <a:ext cx="1353312" cy="114300"/>
-          </a:xfrm>
-          <a:prstGeom prst="rect">
-            <a:avLst/>
-          </a:prstGeom>
-          <a:noFill/>
-        </p:spPr>
-        <p:txBody>
-          <a:bodyPr wrap="square" lIns="0" rIns="0" tIns="0" bIns="0" anchor="t">
-            <a:noAutofit/>
-          </a:bodyPr>
-          <a:lstStyle/>
-          <a:p>
-            <a:pPr algn="l">
-              <a:lnSpc>
-                <a:spcPct val="112000"/>
-              </a:lnSpc>
-              <a:spcBef>
-                <a:spcPts val="0"/>
-              </a:spcBef>
-              <a:spcAft>
-                <a:spcPts val="0"/>
-              </a:spcAft>
-            </a:pPr>
-            <a:r>
               <a:rPr sz="590" b="0" i="0">
                 <a:solidFill>
                   <a:srgbClr val="64748B"/>
@@ -24337,52 +23969,6 @@
                 <a:latin typeface="Segoe UI"/>
                 <a:ea typeface="Microsoft YaHei"/>
               </a:rPr>
-              <a:t>Databricks 读写一体</a:t>
-            </a:r>
-          </a:p>
-        </p:txBody>
-      </p:sp>
-      <p:sp>
-        <p:nvSpPr>
-          <p:cNvPr id="93" name="TextBox 92"/>
-          <p:cNvSpPr txBox="1"/>
-          <p:nvPr/>
-        </p:nvSpPr>
-        <p:spPr>
-          <a:xfrm>
-            <a:off x="822960" y="4873752"/>
-            <a:ext cx="1353312" cy="114300"/>
-          </a:xfrm>
-          <a:prstGeom prst="rect">
-            <a:avLst/>
-          </a:prstGeom>
-          <a:noFill/>
-        </p:spPr>
-        <p:txBody>
-          <a:bodyPr wrap="square" lIns="0" rIns="0" tIns="0" bIns="0" anchor="t">
-            <a:noAutofit/>
-          </a:bodyPr>
-          <a:lstStyle/>
-          <a:p>
-            <a:pPr algn="l">
-              <a:lnSpc>
-                <a:spcPct val="112000"/>
-              </a:lnSpc>
-              <a:spcBef>
-                <a:spcPts val="0"/>
-              </a:spcBef>
-              <a:spcAft>
-                <a:spcPts val="0"/>
-              </a:spcAft>
-            </a:pPr>
-            <a:r>
-              <a:rPr sz="590" b="0" i="0">
-                <a:solidFill>
-                  <a:srgbClr val="64748B"/>
-                </a:solidFill>
-                <a:latin typeface="Segoe UI"/>
-                <a:ea typeface="Microsoft YaHei"/>
-              </a:rPr>
               <a:t>弹性 · 按量计费</a:t>
             </a:r>
           </a:p>
@@ -24390,7 +23976,7 @@
       </p:sp>
       <p:sp>
         <p:nvSpPr>
-          <p:cNvPr id="94" name="Rounded Rectangle 93"/>
+          <p:cNvPr id="91" name="Rounded Rectangle 90"/>
           <p:cNvSpPr/>
           <p:nvPr/>
         </p:nvSpPr>
@@ -24438,47 +24024,185 @@
       </p:sp>
       <p:sp>
         <p:nvSpPr>
-          <p:cNvPr id="95" name="Rounded Rectangle 94"/>
-          <p:cNvSpPr/>
-          <p:nvPr/>
-        </p:nvSpPr>
-        <p:spPr>
-          <a:xfrm>
-            <a:off x="2231136" y="4498848"/>
-            <a:ext cx="32004" cy="548640"/>
-          </a:xfrm>
-          <a:prstGeom prst="roundRect">
-            <a:avLst>
-              <a:gd name="adj" fmla="val 48571"/>
-            </a:avLst>
-          </a:prstGeom>
-          <a:solidFill>
-            <a:srgbClr val="059669"/>
-          </a:solidFill>
-          <a:ln>
-            <a:noFill/>
-          </a:ln>
-          <a:effectLst/>
-        </p:spPr>
-        <p:style>
-          <a:lnRef idx="1">
-            <a:schemeClr val="accent1"/>
-          </a:lnRef>
-          <a:fillRef idx="3">
-            <a:schemeClr val="accent1"/>
-          </a:fillRef>
-          <a:effectRef idx="2">
-            <a:schemeClr val="accent1"/>
-          </a:effectRef>
-          <a:fontRef idx="minor">
-            <a:schemeClr val="lt1"/>
-          </a:fontRef>
-        </p:style>
-        <p:txBody>
-          <a:bodyPr rtlCol="0" anchor="ctr"/>
-          <a:lstStyle/>
-          <a:p>
-            <a:pPr algn="ctr"/>
+          <p:cNvPr id="92" name="TextBox 91"/>
+          <p:cNvSpPr txBox="1"/>
+          <p:nvPr/>
+        </p:nvSpPr>
+        <p:spPr>
+          <a:xfrm>
+            <a:off x="2322576" y="4498848"/>
+            <a:ext cx="2523744" cy="118872"/>
+          </a:xfrm>
+          <a:prstGeom prst="rect">
+            <a:avLst/>
+          </a:prstGeom>
+          <a:noFill/>
+        </p:spPr>
+        <p:txBody>
+          <a:bodyPr wrap="square" lIns="0" rIns="0" tIns="0" bIns="0" anchor="t">
+            <a:noAutofit/>
+          </a:bodyPr>
+          <a:lstStyle/>
+          <a:p>
+            <a:pPr algn="ctr">
+              <a:lnSpc>
+                <a:spcPct val="112000"/>
+              </a:lnSpc>
+              <a:spcBef>
+                <a:spcPts val="0"/>
+              </a:spcBef>
+              <a:spcAft>
+                <a:spcPts val="0"/>
+              </a:spcAft>
+            </a:pPr>
+            <a:r>
+              <a:rPr sz="720" b="1" i="0">
+                <a:solidFill>
+                  <a:srgbClr val="0F172A"/>
+                </a:solidFill>
+                <a:latin typeface="Segoe UI"/>
+                <a:ea typeface="Microsoft YaHei"/>
+              </a:rPr>
+              <a:t>Databricks · 写侧 ETL</a:t>
+            </a:r>
+          </a:p>
+        </p:txBody>
+      </p:sp>
+      <p:sp>
+        <p:nvSpPr>
+          <p:cNvPr id="93" name="TextBox 92"/>
+          <p:cNvSpPr txBox="1"/>
+          <p:nvPr/>
+        </p:nvSpPr>
+        <p:spPr>
+          <a:xfrm>
+            <a:off x="2304288" y="4645152"/>
+            <a:ext cx="2560320" cy="105156"/>
+          </a:xfrm>
+          <a:prstGeom prst="rect">
+            <a:avLst/>
+          </a:prstGeom>
+          <a:noFill/>
+        </p:spPr>
+        <p:txBody>
+          <a:bodyPr wrap="square" lIns="0" rIns="0" tIns="0" bIns="0" anchor="t">
+            <a:noAutofit/>
+          </a:bodyPr>
+          <a:lstStyle/>
+          <a:p>
+            <a:pPr algn="ctr">
+              <a:lnSpc>
+                <a:spcPct val="112000"/>
+              </a:lnSpc>
+              <a:spcBef>
+                <a:spcPts val="0"/>
+              </a:spcBef>
+              <a:spcAft>
+                <a:spcPts val="0"/>
+              </a:spcAft>
+            </a:pPr>
+            <a:r>
+              <a:rPr sz="590" b="0" i="0">
+                <a:solidFill>
+                  <a:srgbClr val="64748B"/>
+                </a:solidFill>
+                <a:latin typeface="Segoe UI"/>
+                <a:ea typeface="Microsoft YaHei"/>
+              </a:rPr>
+              <a:t>RAW → CURATED → LAKE → SERVE</a:t>
+            </a:r>
+          </a:p>
+        </p:txBody>
+      </p:sp>
+      <p:sp>
+        <p:nvSpPr>
+          <p:cNvPr id="94" name="TextBox 93"/>
+          <p:cNvSpPr txBox="1"/>
+          <p:nvPr/>
+        </p:nvSpPr>
+        <p:spPr>
+          <a:xfrm>
+            <a:off x="2304288" y="4759452"/>
+            <a:ext cx="2560320" cy="105156"/>
+          </a:xfrm>
+          <a:prstGeom prst="rect">
+            <a:avLst/>
+          </a:prstGeom>
+          <a:noFill/>
+        </p:spPr>
+        <p:txBody>
+          <a:bodyPr wrap="square" lIns="0" rIns="0" tIns="0" bIns="0" anchor="t">
+            <a:noAutofit/>
+          </a:bodyPr>
+          <a:lstStyle/>
+          <a:p>
+            <a:pPr algn="ctr">
+              <a:lnSpc>
+                <a:spcPct val="112000"/>
+              </a:lnSpc>
+              <a:spcBef>
+                <a:spcPts val="0"/>
+              </a:spcBef>
+              <a:spcAft>
+                <a:spcPts val="0"/>
+              </a:spcAft>
+            </a:pPr>
+            <a:r>
+              <a:rPr sz="590" b="0" i="0">
+                <a:solidFill>
+                  <a:srgbClr val="64748B"/>
+                </a:solidFill>
+                <a:latin typeface="Segoe UI"/>
+                <a:ea typeface="Microsoft YaHei"/>
+              </a:rPr>
+              <a:t>Spark 批处理 · Iceberg 写入 · Z-Order</a:t>
+            </a:r>
+          </a:p>
+        </p:txBody>
+      </p:sp>
+      <p:sp>
+        <p:nvSpPr>
+          <p:cNvPr id="95" name="TextBox 94"/>
+          <p:cNvSpPr txBox="1"/>
+          <p:nvPr/>
+        </p:nvSpPr>
+        <p:spPr>
+          <a:xfrm>
+            <a:off x="2304288" y="4873752"/>
+            <a:ext cx="2560320" cy="105156"/>
+          </a:xfrm>
+          <a:prstGeom prst="rect">
+            <a:avLst/>
+          </a:prstGeom>
+          <a:noFill/>
+        </p:spPr>
+        <p:txBody>
+          <a:bodyPr wrap="square" lIns="0" rIns="0" tIns="0" bIns="0" anchor="t">
+            <a:noAutofit/>
+          </a:bodyPr>
+          <a:lstStyle/>
+          <a:p>
+            <a:pPr algn="ctr">
+              <a:lnSpc>
+                <a:spcPct val="112000"/>
+              </a:lnSpc>
+              <a:spcBef>
+                <a:spcPts val="0"/>
+              </a:spcBef>
+              <a:spcAft>
+                <a:spcPts val="0"/>
+              </a:spcAft>
+            </a:pPr>
+            <a:r>
+              <a:rPr sz="590" b="0" i="0">
+                <a:solidFill>
+                  <a:srgbClr val="64748B"/>
+                </a:solidFill>
+                <a:latin typeface="Segoe UI"/>
+                <a:ea typeface="Microsoft YaHei"/>
+              </a:rPr>
+              <a:t>Compaction · VACUUM · 到期销毁</a:t>
+            </a:r>
           </a:p>
         </p:txBody>
       </p:sp>
@@ -24490,8 +24214,8 @@
         </p:nvSpPr>
         <p:spPr>
           <a:xfrm>
-            <a:off x="2322576" y="4498848"/>
-            <a:ext cx="2523744" cy="118872"/>
+            <a:off x="2304288" y="4988052"/>
+            <a:ext cx="2560320" cy="105156"/>
           </a:xfrm>
           <a:prstGeom prst="rect">
             <a:avLst/>
@@ -24516,190 +24240,6 @@
               </a:spcAft>
             </a:pPr>
             <a:r>
-              <a:rPr sz="720" b="1" i="0">
-                <a:solidFill>
-                  <a:srgbClr val="0F172A"/>
-                </a:solidFill>
-                <a:latin typeface="Segoe UI"/>
-                <a:ea typeface="Microsoft YaHei"/>
-              </a:rPr>
-              <a:t>Databricks · 写侧 ETL</a:t>
-            </a:r>
-          </a:p>
-        </p:txBody>
-      </p:sp>
-      <p:sp>
-        <p:nvSpPr>
-          <p:cNvPr id="97" name="TextBox 96"/>
-          <p:cNvSpPr txBox="1"/>
-          <p:nvPr/>
-        </p:nvSpPr>
-        <p:spPr>
-          <a:xfrm>
-            <a:off x="2304288" y="4645152"/>
-            <a:ext cx="2560320" cy="105156"/>
-          </a:xfrm>
-          <a:prstGeom prst="rect">
-            <a:avLst/>
-          </a:prstGeom>
-          <a:noFill/>
-        </p:spPr>
-        <p:txBody>
-          <a:bodyPr wrap="square" lIns="0" rIns="0" tIns="0" bIns="0" anchor="t">
-            <a:noAutofit/>
-          </a:bodyPr>
-          <a:lstStyle/>
-          <a:p>
-            <a:pPr algn="ctr">
-              <a:lnSpc>
-                <a:spcPct val="112000"/>
-              </a:lnSpc>
-              <a:spcBef>
-                <a:spcPts val="0"/>
-              </a:spcBef>
-              <a:spcAft>
-                <a:spcPts val="0"/>
-              </a:spcAft>
-            </a:pPr>
-            <a:r>
-              <a:rPr sz="590" b="0" i="0">
-                <a:solidFill>
-                  <a:srgbClr val="64748B"/>
-                </a:solidFill>
-                <a:latin typeface="Segoe UI"/>
-                <a:ea typeface="Microsoft YaHei"/>
-              </a:rPr>
-              <a:t>RAW → CURATED → LAKE → SERVE</a:t>
-            </a:r>
-          </a:p>
-        </p:txBody>
-      </p:sp>
-      <p:sp>
-        <p:nvSpPr>
-          <p:cNvPr id="98" name="TextBox 97"/>
-          <p:cNvSpPr txBox="1"/>
-          <p:nvPr/>
-        </p:nvSpPr>
-        <p:spPr>
-          <a:xfrm>
-            <a:off x="2304288" y="4759452"/>
-            <a:ext cx="2560320" cy="105156"/>
-          </a:xfrm>
-          <a:prstGeom prst="rect">
-            <a:avLst/>
-          </a:prstGeom>
-          <a:noFill/>
-        </p:spPr>
-        <p:txBody>
-          <a:bodyPr wrap="square" lIns="0" rIns="0" tIns="0" bIns="0" anchor="t">
-            <a:noAutofit/>
-          </a:bodyPr>
-          <a:lstStyle/>
-          <a:p>
-            <a:pPr algn="ctr">
-              <a:lnSpc>
-                <a:spcPct val="112000"/>
-              </a:lnSpc>
-              <a:spcBef>
-                <a:spcPts val="0"/>
-              </a:spcBef>
-              <a:spcAft>
-                <a:spcPts val="0"/>
-              </a:spcAft>
-            </a:pPr>
-            <a:r>
-              <a:rPr sz="590" b="0" i="0">
-                <a:solidFill>
-                  <a:srgbClr val="64748B"/>
-                </a:solidFill>
-                <a:latin typeface="Segoe UI"/>
-                <a:ea typeface="Microsoft YaHei"/>
-              </a:rPr>
-              <a:t>Spark 批处理 · Iceberg 写入 · Z-Order</a:t>
-            </a:r>
-          </a:p>
-        </p:txBody>
-      </p:sp>
-      <p:sp>
-        <p:nvSpPr>
-          <p:cNvPr id="99" name="TextBox 98"/>
-          <p:cNvSpPr txBox="1"/>
-          <p:nvPr/>
-        </p:nvSpPr>
-        <p:spPr>
-          <a:xfrm>
-            <a:off x="2304288" y="4873752"/>
-            <a:ext cx="2560320" cy="105156"/>
-          </a:xfrm>
-          <a:prstGeom prst="rect">
-            <a:avLst/>
-          </a:prstGeom>
-          <a:noFill/>
-        </p:spPr>
-        <p:txBody>
-          <a:bodyPr wrap="square" lIns="0" rIns="0" tIns="0" bIns="0" anchor="t">
-            <a:noAutofit/>
-          </a:bodyPr>
-          <a:lstStyle/>
-          <a:p>
-            <a:pPr algn="ctr">
-              <a:lnSpc>
-                <a:spcPct val="112000"/>
-              </a:lnSpc>
-              <a:spcBef>
-                <a:spcPts val="0"/>
-              </a:spcBef>
-              <a:spcAft>
-                <a:spcPts val="0"/>
-              </a:spcAft>
-            </a:pPr>
-            <a:r>
-              <a:rPr sz="590" b="0" i="0">
-                <a:solidFill>
-                  <a:srgbClr val="64748B"/>
-                </a:solidFill>
-                <a:latin typeface="Segoe UI"/>
-                <a:ea typeface="Microsoft YaHei"/>
-              </a:rPr>
-              <a:t>Compaction · VACUUM · 到期销毁</a:t>
-            </a:r>
-          </a:p>
-        </p:txBody>
-      </p:sp>
-      <p:sp>
-        <p:nvSpPr>
-          <p:cNvPr id="100" name="TextBox 99"/>
-          <p:cNvSpPr txBox="1"/>
-          <p:nvPr/>
-        </p:nvSpPr>
-        <p:spPr>
-          <a:xfrm>
-            <a:off x="2304288" y="4988052"/>
-            <a:ext cx="2560320" cy="105156"/>
-          </a:xfrm>
-          <a:prstGeom prst="rect">
-            <a:avLst/>
-          </a:prstGeom>
-          <a:noFill/>
-        </p:spPr>
-        <p:txBody>
-          <a:bodyPr wrap="square" lIns="0" rIns="0" tIns="0" bIns="0" anchor="t">
-            <a:noAutofit/>
-          </a:bodyPr>
-          <a:lstStyle/>
-          <a:p>
-            <a:pPr algn="ctr">
-              <a:lnSpc>
-                <a:spcPct val="112000"/>
-              </a:lnSpc>
-              <a:spcBef>
-                <a:spcPts val="0"/>
-              </a:spcBef>
-              <a:spcAft>
-                <a:spcPts val="0"/>
-              </a:spcAft>
-            </a:pPr>
-            <a:r>
               <a:rPr sz="590" b="1" i="0">
                 <a:solidFill>
                   <a:srgbClr val="059669"/>
@@ -24714,7 +24254,7 @@
       </p:sp>
       <p:sp>
         <p:nvSpPr>
-          <p:cNvPr id="101" name="Rounded Rectangle 100"/>
+          <p:cNvPr id="97" name="Rounded Rectangle 96"/>
           <p:cNvSpPr/>
           <p:nvPr/>
         </p:nvSpPr>
@@ -24762,53 +24302,7 @@
       </p:sp>
       <p:sp>
         <p:nvSpPr>
-          <p:cNvPr id="102" name="Rounded Rectangle 101"/>
-          <p:cNvSpPr/>
-          <p:nvPr/>
-        </p:nvSpPr>
-        <p:spPr>
-          <a:xfrm>
-            <a:off x="5038344" y="4498848"/>
-            <a:ext cx="32004" cy="548640"/>
-          </a:xfrm>
-          <a:prstGeom prst="roundRect">
-            <a:avLst>
-              <a:gd name="adj" fmla="val 48571"/>
-            </a:avLst>
-          </a:prstGeom>
-          <a:solidFill>
-            <a:srgbClr val="059669"/>
-          </a:solidFill>
-          <a:ln>
-            <a:noFill/>
-          </a:ln>
-          <a:effectLst/>
-        </p:spPr>
-        <p:style>
-          <a:lnRef idx="1">
-            <a:schemeClr val="accent1"/>
-          </a:lnRef>
-          <a:fillRef idx="3">
-            <a:schemeClr val="accent1"/>
-          </a:fillRef>
-          <a:effectRef idx="2">
-            <a:schemeClr val="accent1"/>
-          </a:effectRef>
-          <a:fontRef idx="minor">
-            <a:schemeClr val="lt1"/>
-          </a:fontRef>
-        </p:style>
-        <p:txBody>
-          <a:bodyPr rtlCol="0" anchor="ctr"/>
-          <a:lstStyle/>
-          <a:p>
-            <a:pPr algn="ctr"/>
-          </a:p>
-        </p:txBody>
-      </p:sp>
-      <p:sp>
-        <p:nvSpPr>
-          <p:cNvPr id="103" name="TextBox 102"/>
+          <p:cNvPr id="98" name="TextBox 97"/>
           <p:cNvSpPr txBox="1"/>
           <p:nvPr/>
         </p:nvSpPr>
@@ -24854,7 +24348,7 @@
       </p:sp>
       <p:sp>
         <p:nvSpPr>
-          <p:cNvPr id="104" name="TextBox 103"/>
+          <p:cNvPr id="99" name="TextBox 98"/>
           <p:cNvSpPr txBox="1"/>
           <p:nvPr/>
         </p:nvSpPr>
@@ -24900,7 +24394,7 @@
       </p:sp>
       <p:sp>
         <p:nvSpPr>
-          <p:cNvPr id="105" name="TextBox 104"/>
+          <p:cNvPr id="100" name="TextBox 99"/>
           <p:cNvSpPr txBox="1"/>
           <p:nvPr/>
         </p:nvSpPr>
@@ -24946,7 +24440,7 @@
       </p:sp>
       <p:sp>
         <p:nvSpPr>
-          <p:cNvPr id="106" name="TextBox 105"/>
+          <p:cNvPr id="101" name="TextBox 100"/>
           <p:cNvSpPr txBox="1"/>
           <p:nvPr/>
         </p:nvSpPr>
@@ -24992,7 +24486,7 @@
       </p:sp>
       <p:sp>
         <p:nvSpPr>
-          <p:cNvPr id="107" name="TextBox 106"/>
+          <p:cNvPr id="102" name="TextBox 101"/>
           <p:cNvSpPr txBox="1"/>
           <p:nvPr/>
         </p:nvSpPr>
@@ -25038,7 +24532,7 @@
       </p:sp>
       <p:cxnSp>
         <p:nvCxnSpPr>
-          <p:cNvPr id="108" name="Connector 107"/>
+          <p:cNvPr id="103" name="Connector 102"/>
           <p:cNvCxnSpPr/>
           <p:nvPr/>
         </p:nvCxnSpPr>
@@ -25061,7 +24555,7 @@
       </p:cxnSp>
       <p:sp>
         <p:nvSpPr>
-          <p:cNvPr id="109" name="Rounded Rectangle 108"/>
+          <p:cNvPr id="104" name="Rounded Rectangle 103"/>
           <p:cNvSpPr/>
           <p:nvPr/>
         </p:nvSpPr>
@@ -25109,7 +24603,7 @@
       </p:sp>
       <p:sp>
         <p:nvSpPr>
-          <p:cNvPr id="110" name="Oval 109"/>
+          <p:cNvPr id="105" name="Oval 104"/>
           <p:cNvSpPr/>
           <p:nvPr/>
         </p:nvSpPr>
@@ -25155,7 +24649,7 @@
       </p:sp>
       <p:sp>
         <p:nvSpPr>
-          <p:cNvPr id="111" name="TextBox 110"/>
+          <p:cNvPr id="106" name="TextBox 105"/>
           <p:cNvSpPr txBox="1"/>
           <p:nvPr/>
         </p:nvSpPr>
@@ -25201,7 +24695,7 @@
       </p:sp>
       <p:sp>
         <p:nvSpPr>
-          <p:cNvPr id="112" name="TextBox 111"/>
+          <p:cNvPr id="107" name="TextBox 106"/>
           <p:cNvSpPr txBox="1"/>
           <p:nvPr/>
         </p:nvSpPr>
@@ -25247,7 +24741,7 @@
       </p:sp>
       <p:sp>
         <p:nvSpPr>
-          <p:cNvPr id="113" name="TextBox 112"/>
+          <p:cNvPr id="108" name="TextBox 107"/>
           <p:cNvSpPr txBox="1"/>
           <p:nvPr/>
         </p:nvSpPr>
@@ -25293,7 +24787,7 @@
       </p:sp>
       <p:sp>
         <p:nvSpPr>
-          <p:cNvPr id="114" name="TextBox 113"/>
+          <p:cNvPr id="109" name="TextBox 108"/>
           <p:cNvSpPr txBox="1"/>
           <p:nvPr/>
         </p:nvSpPr>
@@ -25339,7 +24833,7 @@
       </p:sp>
       <p:sp>
         <p:nvSpPr>
-          <p:cNvPr id="115" name="TextBox 114"/>
+          <p:cNvPr id="110" name="TextBox 109"/>
           <p:cNvSpPr txBox="1"/>
           <p:nvPr/>
         </p:nvSpPr>
@@ -25385,7 +24879,7 @@
       </p:sp>
       <p:sp>
         <p:nvSpPr>
-          <p:cNvPr id="116" name="Rounded Rectangle 115"/>
+          <p:cNvPr id="111" name="Rounded Rectangle 110"/>
           <p:cNvSpPr/>
           <p:nvPr/>
         </p:nvSpPr>
@@ -25439,7 +24933,7 @@
       </p:sp>
       <p:sp>
         <p:nvSpPr>
-          <p:cNvPr id="117" name="TextBox 116"/>
+          <p:cNvPr id="112" name="TextBox 111"/>
           <p:cNvSpPr txBox="1"/>
           <p:nvPr/>
         </p:nvSpPr>
@@ -25531,7 +25025,7 @@
       </p:sp>
       <p:sp>
         <p:nvSpPr>
-          <p:cNvPr id="118" name="Rounded Rectangle 117"/>
+          <p:cNvPr id="113" name="Rounded Rectangle 112"/>
           <p:cNvSpPr/>
           <p:nvPr/>
         </p:nvSpPr>
@@ -25580,7 +25074,7 @@
       </p:sp>
       <p:sp>
         <p:nvSpPr>
-          <p:cNvPr id="119" name="Oval 118"/>
+          <p:cNvPr id="114" name="Oval 113"/>
           <p:cNvSpPr/>
           <p:nvPr/>
         </p:nvSpPr>
@@ -25626,7 +25120,7 @@
       </p:sp>
       <p:sp>
         <p:nvSpPr>
-          <p:cNvPr id="120" name="TextBox 119"/>
+          <p:cNvPr id="115" name="TextBox 114"/>
           <p:cNvSpPr txBox="1"/>
           <p:nvPr/>
         </p:nvSpPr>
@@ -25672,7 +25166,7 @@
       </p:sp>
       <p:sp>
         <p:nvSpPr>
-          <p:cNvPr id="121" name="TextBox 120"/>
+          <p:cNvPr id="116" name="TextBox 115"/>
           <p:cNvSpPr txBox="1"/>
           <p:nvPr/>
         </p:nvSpPr>
@@ -25718,7 +25212,7 @@
       </p:sp>
       <p:sp>
         <p:nvSpPr>
-          <p:cNvPr id="122" name="TextBox 121"/>
+          <p:cNvPr id="117" name="TextBox 116"/>
           <p:cNvSpPr txBox="1"/>
           <p:nvPr/>
         </p:nvSpPr>
@@ -25764,7 +25258,7 @@
       </p:sp>
       <p:sp>
         <p:nvSpPr>
-          <p:cNvPr id="123" name="TextBox 122"/>
+          <p:cNvPr id="118" name="TextBox 117"/>
           <p:cNvSpPr txBox="1"/>
           <p:nvPr/>
         </p:nvSpPr>
@@ -25811,7 +25305,7 @@
       </p:sp>
       <p:sp>
         <p:nvSpPr>
-          <p:cNvPr id="124" name="Rounded Rectangle 123"/>
+          <p:cNvPr id="119" name="Rounded Rectangle 118"/>
           <p:cNvSpPr/>
           <p:nvPr/>
         </p:nvSpPr>
@@ -25859,7 +25353,7 @@
       </p:sp>
       <p:sp>
         <p:nvSpPr>
-          <p:cNvPr id="125" name="TextBox 124"/>
+          <p:cNvPr id="120" name="TextBox 119"/>
           <p:cNvSpPr txBox="1"/>
           <p:nvPr/>
         </p:nvSpPr>
@@ -25928,7 +25422,7 @@
       </p:sp>
       <p:sp>
         <p:nvSpPr>
-          <p:cNvPr id="126" name="Rounded Rectangle 125"/>
+          <p:cNvPr id="121" name="Rounded Rectangle 120"/>
           <p:cNvSpPr/>
           <p:nvPr/>
         </p:nvSpPr>
@@ -25976,7 +25470,7 @@
       </p:sp>
       <p:sp>
         <p:nvSpPr>
-          <p:cNvPr id="127" name="TextBox 126"/>
+          <p:cNvPr id="122" name="TextBox 121"/>
           <p:cNvSpPr txBox="1"/>
           <p:nvPr/>
         </p:nvSpPr>
@@ -26045,7 +25539,7 @@
       </p:sp>
       <p:sp>
         <p:nvSpPr>
-          <p:cNvPr id="128" name="Rounded Rectangle 127"/>
+          <p:cNvPr id="123" name="Rounded Rectangle 122"/>
           <p:cNvSpPr/>
           <p:nvPr/>
         </p:nvSpPr>
@@ -26093,7 +25587,7 @@
       </p:sp>
       <p:sp>
         <p:nvSpPr>
-          <p:cNvPr id="129" name="TextBox 128"/>
+          <p:cNvPr id="124" name="TextBox 123"/>
           <p:cNvSpPr txBox="1"/>
           <p:nvPr/>
         </p:nvSpPr>
@@ -26162,7 +25656,7 @@
       </p:sp>
       <p:sp>
         <p:nvSpPr>
-          <p:cNvPr id="130" name="Rounded Rectangle 129"/>
+          <p:cNvPr id="125" name="Rounded Rectangle 124"/>
           <p:cNvSpPr/>
           <p:nvPr/>
         </p:nvSpPr>
@@ -26210,7 +25704,7 @@
       </p:sp>
       <p:sp>
         <p:nvSpPr>
-          <p:cNvPr id="131" name="TextBox 130"/>
+          <p:cNvPr id="126" name="TextBox 125"/>
           <p:cNvSpPr txBox="1"/>
           <p:nvPr/>
         </p:nvSpPr>
@@ -26279,7 +25773,7 @@
       </p:sp>
       <p:cxnSp>
         <p:nvCxnSpPr>
-          <p:cNvPr id="132" name="Connector 131"/>
+          <p:cNvPr id="127" name="Connector 126"/>
           <p:cNvCxnSpPr/>
           <p:nvPr/>
         </p:nvCxnSpPr>
@@ -26302,7 +25796,7 @@
       </p:cxnSp>
       <p:cxnSp>
         <p:nvCxnSpPr>
-          <p:cNvPr id="133" name="Connector 132"/>
+          <p:cNvPr id="128" name="Connector 127"/>
           <p:cNvCxnSpPr/>
           <p:nvPr/>
         </p:nvCxnSpPr>
@@ -26325,7 +25819,7 @@
       </p:cxnSp>
       <p:cxnSp>
         <p:nvCxnSpPr>
-          <p:cNvPr id="134" name="Connector 133"/>
+          <p:cNvPr id="129" name="Connector 128"/>
           <p:cNvCxnSpPr/>
           <p:nvPr/>
         </p:nvCxnSpPr>
@@ -26348,7 +25842,7 @@
       </p:cxnSp>
       <p:sp>
         <p:nvSpPr>
-          <p:cNvPr id="135" name="TextBox 134"/>
+          <p:cNvPr id="130" name="TextBox 129"/>
           <p:cNvSpPr txBox="1"/>
           <p:nvPr/>
         </p:nvSpPr>
@@ -26394,7 +25888,7 @@
       </p:sp>
       <p:cxnSp>
         <p:nvCxnSpPr>
-          <p:cNvPr id="136" name="Connector 135"/>
+          <p:cNvPr id="131" name="Connector 130"/>
           <p:cNvCxnSpPr/>
           <p:nvPr/>
         </p:nvCxnSpPr>
@@ -26417,7 +25911,7 @@
       </p:cxnSp>
       <p:cxnSp>
         <p:nvCxnSpPr>
-          <p:cNvPr id="137" name="Connector 136"/>
+          <p:cNvPr id="132" name="Connector 131"/>
           <p:cNvCxnSpPr/>
           <p:nvPr/>
         </p:nvCxnSpPr>
@@ -26440,7 +25934,7 @@
       </p:cxnSp>
       <p:cxnSp>
         <p:nvCxnSpPr>
-          <p:cNvPr id="138" name="Connector 137"/>
+          <p:cNvPr id="133" name="Connector 132"/>
           <p:cNvCxnSpPr/>
           <p:nvPr/>
         </p:nvCxnSpPr>
@@ -26464,7 +25958,7 @@
       </p:cxnSp>
       <p:sp>
         <p:nvSpPr>
-          <p:cNvPr id="139" name="TextBox 138"/>
+          <p:cNvPr id="134" name="TextBox 133"/>
           <p:cNvSpPr txBox="1"/>
           <p:nvPr/>
         </p:nvSpPr>
@@ -26510,7 +26004,7 @@
       </p:sp>
       <p:sp>
         <p:nvSpPr>
-          <p:cNvPr id="140" name="Rounded Rectangle 139"/>
+          <p:cNvPr id="135" name="Rounded Rectangle 134"/>
           <p:cNvSpPr/>
           <p:nvPr/>
         </p:nvSpPr>
@@ -26559,7 +26053,7 @@
       </p:sp>
       <p:sp>
         <p:nvSpPr>
-          <p:cNvPr id="141" name="TextBox 140"/>
+          <p:cNvPr id="136" name="TextBox 135"/>
           <p:cNvSpPr txBox="1"/>
           <p:nvPr/>
         </p:nvSpPr>
@@ -26615,7 +26109,7 @@
       </p:sp>
       <p:sp>
         <p:nvSpPr>
-          <p:cNvPr id="142" name="TextBox 141"/>
+          <p:cNvPr id="137" name="TextBox 136"/>
           <p:cNvSpPr txBox="1"/>
           <p:nvPr/>
         </p:nvSpPr>
@@ -26661,7 +26155,7 @@
       </p:sp>
       <p:sp>
         <p:nvSpPr>
-          <p:cNvPr id="143" name="Rounded Rectangle 142"/>
+          <p:cNvPr id="138" name="Rounded Rectangle 137"/>
           <p:cNvSpPr/>
           <p:nvPr/>
         </p:nvSpPr>
@@ -26709,7 +26203,7 @@
       </p:sp>
       <p:sp>
         <p:nvSpPr>
-          <p:cNvPr id="144" name="TextBox 143"/>
+          <p:cNvPr id="139" name="TextBox 138"/>
           <p:cNvSpPr txBox="1"/>
           <p:nvPr/>
         </p:nvSpPr>
@@ -26778,7 +26272,7 @@
       </p:sp>
       <p:sp>
         <p:nvSpPr>
-          <p:cNvPr id="145" name="Rounded Rectangle 144"/>
+          <p:cNvPr id="140" name="Rounded Rectangle 139"/>
           <p:cNvSpPr/>
           <p:nvPr/>
         </p:nvSpPr>
@@ -26826,7 +26320,7 @@
       </p:sp>
       <p:sp>
         <p:nvSpPr>
-          <p:cNvPr id="146" name="TextBox 145"/>
+          <p:cNvPr id="141" name="TextBox 140"/>
           <p:cNvSpPr txBox="1"/>
           <p:nvPr/>
         </p:nvSpPr>
@@ -26895,7 +26389,7 @@
       </p:sp>
       <p:sp>
         <p:nvSpPr>
-          <p:cNvPr id="147" name="Rounded Rectangle 146"/>
+          <p:cNvPr id="142" name="Rounded Rectangle 141"/>
           <p:cNvSpPr/>
           <p:nvPr/>
         </p:nvSpPr>
@@ -26943,7 +26437,7 @@
       </p:sp>
       <p:sp>
         <p:nvSpPr>
-          <p:cNvPr id="148" name="TextBox 147"/>
+          <p:cNvPr id="143" name="TextBox 142"/>
           <p:cNvSpPr txBox="1"/>
           <p:nvPr/>
         </p:nvSpPr>
@@ -27012,7 +26506,7 @@
       </p:sp>
       <p:sp>
         <p:nvSpPr>
-          <p:cNvPr id="149" name="Rounded Rectangle 148"/>
+          <p:cNvPr id="144" name="Rounded Rectangle 143"/>
           <p:cNvSpPr/>
           <p:nvPr/>
         </p:nvSpPr>
@@ -27060,7 +26554,7 @@
       </p:sp>
       <p:sp>
         <p:nvSpPr>
-          <p:cNvPr id="150" name="TextBox 149"/>
+          <p:cNvPr id="145" name="TextBox 144"/>
           <p:cNvSpPr txBox="1"/>
           <p:nvPr/>
         </p:nvSpPr>
@@ -27129,7 +26623,7 @@
       </p:sp>
       <p:cxnSp>
         <p:nvCxnSpPr>
-          <p:cNvPr id="151" name="Connector 150"/>
+          <p:cNvPr id="146" name="Connector 145"/>
           <p:cNvCxnSpPr/>
           <p:nvPr/>
         </p:nvCxnSpPr>
@@ -27153,7 +26647,7 @@
       </p:cxnSp>
       <p:cxnSp>
         <p:nvCxnSpPr>
-          <p:cNvPr id="152" name="Connector 151"/>
+          <p:cNvPr id="147" name="Connector 146"/>
           <p:cNvCxnSpPr/>
           <p:nvPr/>
         </p:nvCxnSpPr>
@@ -27177,7 +26671,7 @@
       </p:cxnSp>
       <p:cxnSp>
         <p:nvCxnSpPr>
-          <p:cNvPr id="153" name="Connector 152"/>
+          <p:cNvPr id="148" name="Connector 147"/>
           <p:cNvCxnSpPr/>
           <p:nvPr/>
         </p:nvCxnSpPr>
@@ -27200,7 +26694,7 @@
       </p:cxnSp>
       <p:cxnSp>
         <p:nvCxnSpPr>
-          <p:cNvPr id="154" name="Connector 153"/>
+          <p:cNvPr id="149" name="Connector 148"/>
           <p:cNvCxnSpPr/>
           <p:nvPr/>
         </p:nvCxnSpPr>
@@ -27223,7 +26717,7 @@
       </p:cxnSp>
       <p:cxnSp>
         <p:nvCxnSpPr>
-          <p:cNvPr id="155" name="Connector 154"/>
+          <p:cNvPr id="150" name="Connector 149"/>
           <p:cNvCxnSpPr/>
           <p:nvPr/>
         </p:nvCxnSpPr>
@@ -27246,7 +26740,7 @@
       </p:cxnSp>
       <p:cxnSp>
         <p:nvCxnSpPr>
-          <p:cNvPr id="156" name="Connector 155"/>
+          <p:cNvPr id="151" name="Connector 150"/>
           <p:cNvCxnSpPr/>
           <p:nvPr/>
         </p:nvCxnSpPr>
@@ -27270,7 +26764,7 @@
       </p:cxnSp>
       <p:sp>
         <p:nvSpPr>
-          <p:cNvPr id="157" name="TextBox 156"/>
+          <p:cNvPr id="152" name="TextBox 151"/>
           <p:cNvSpPr txBox="1"/>
           <p:nvPr/>
         </p:nvSpPr>
@@ -27316,7 +26810,7 @@
       </p:sp>
       <p:sp>
         <p:nvSpPr>
-          <p:cNvPr id="158" name="Rounded Rectangle 157"/>
+          <p:cNvPr id="153" name="Rounded Rectangle 152"/>
           <p:cNvSpPr/>
           <p:nvPr/>
         </p:nvSpPr>
@@ -27364,7 +26858,7 @@
       </p:sp>
       <p:sp>
         <p:nvSpPr>
-          <p:cNvPr id="159" name="TextBox 158"/>
+          <p:cNvPr id="154" name="TextBox 153"/>
           <p:cNvSpPr txBox="1"/>
           <p:nvPr/>
         </p:nvSpPr>
@@ -27410,7 +26904,7 @@
       </p:sp>
       <p:sp>
         <p:nvSpPr>
-          <p:cNvPr id="160" name="Rounded Rectangle 159"/>
+          <p:cNvPr id="155" name="Rounded Rectangle 154"/>
           <p:cNvSpPr/>
           <p:nvPr/>
         </p:nvSpPr>
@@ -27458,7 +26952,7 @@
       </p:sp>
       <p:sp>
         <p:nvSpPr>
-          <p:cNvPr id="161" name="TextBox 160"/>
+          <p:cNvPr id="156" name="TextBox 155"/>
           <p:cNvSpPr txBox="1"/>
           <p:nvPr/>
         </p:nvSpPr>
@@ -27504,7 +26998,7 @@
       </p:sp>
       <p:sp>
         <p:nvSpPr>
-          <p:cNvPr id="162" name="TextBox 161"/>
+          <p:cNvPr id="157" name="TextBox 156"/>
           <p:cNvSpPr txBox="1"/>
           <p:nvPr/>
         </p:nvSpPr>
@@ -27550,7 +27044,7 @@
       </p:sp>
       <p:sp>
         <p:nvSpPr>
-          <p:cNvPr id="163" name="Rounded Rectangle 162"/>
+          <p:cNvPr id="158" name="Rounded Rectangle 157"/>
           <p:cNvSpPr/>
           <p:nvPr/>
         </p:nvSpPr>
@@ -27598,7 +27092,7 @@
       </p:sp>
       <p:sp>
         <p:nvSpPr>
-          <p:cNvPr id="164" name="TextBox 163"/>
+          <p:cNvPr id="159" name="TextBox 158"/>
           <p:cNvSpPr txBox="1"/>
           <p:nvPr/>
         </p:nvSpPr>
@@ -27644,7 +27138,7 @@
       </p:sp>
       <p:sp>
         <p:nvSpPr>
-          <p:cNvPr id="165" name="TextBox 164"/>
+          <p:cNvPr id="160" name="TextBox 159"/>
           <p:cNvSpPr txBox="1"/>
           <p:nvPr/>
         </p:nvSpPr>
@@ -27690,7 +27184,7 @@
       </p:sp>
       <p:sp>
         <p:nvSpPr>
-          <p:cNvPr id="166" name="TextBox 165"/>
+          <p:cNvPr id="161" name="TextBox 160"/>
           <p:cNvSpPr txBox="1"/>
           <p:nvPr/>
         </p:nvSpPr>
@@ -27736,7 +27230,7 @@
       </p:sp>
       <p:sp>
         <p:nvSpPr>
-          <p:cNvPr id="167" name="Rounded Rectangle 166"/>
+          <p:cNvPr id="162" name="Rounded Rectangle 161"/>
           <p:cNvSpPr/>
           <p:nvPr/>
         </p:nvSpPr>
@@ -27784,14 +27278,284 @@
       </p:sp>
       <p:sp>
         <p:nvSpPr>
+          <p:cNvPr id="163" name="TextBox 162"/>
+          <p:cNvSpPr txBox="1"/>
+          <p:nvPr/>
+        </p:nvSpPr>
+        <p:spPr>
+          <a:xfrm>
+            <a:off x="8129016" y="3749039"/>
+            <a:ext cx="3749039" cy="146304"/>
+          </a:xfrm>
+          <a:prstGeom prst="rect">
+            <a:avLst/>
+          </a:prstGeom>
+          <a:noFill/>
+        </p:spPr>
+        <p:txBody>
+          <a:bodyPr wrap="square" lIns="0" rIns="0" tIns="0" bIns="0" anchor="t">
+            <a:noAutofit/>
+          </a:bodyPr>
+          <a:lstStyle/>
+          <a:p>
+            <a:pPr algn="l">
+              <a:lnSpc>
+                <a:spcPct val="112000"/>
+              </a:lnSpc>
+              <a:spcBef>
+                <a:spcPts val="0"/>
+              </a:spcBef>
+              <a:spcAft>
+                <a:spcPts val="0"/>
+              </a:spcAft>
+            </a:pPr>
+            <a:r>
+              <a:rPr sz="819" b="1" i="0">
+                <a:solidFill>
+                  <a:srgbClr val="0F172A"/>
+                </a:solidFill>
+                <a:latin typeface="Segoe UI"/>
+                <a:ea typeface="Microsoft YaHei"/>
+              </a:rPr>
+              <a:t>方案 B2 要点</a:t>
+            </a:r>
+          </a:p>
+        </p:txBody>
+      </p:sp>
+      <p:sp>
+        <p:nvSpPr>
+          <p:cNvPr id="164" name="TextBox 163"/>
+          <p:cNvSpPr txBox="1"/>
+          <p:nvPr/>
+        </p:nvSpPr>
+        <p:spPr>
+          <a:xfrm>
+            <a:off x="8129016" y="3950208"/>
+            <a:ext cx="3767328" cy="219456"/>
+          </a:xfrm>
+          <a:prstGeom prst="rect">
+            <a:avLst/>
+          </a:prstGeom>
+          <a:noFill/>
+        </p:spPr>
+        <p:txBody>
+          <a:bodyPr wrap="square" lIns="0" rIns="0" tIns="0" bIns="0" anchor="t">
+            <a:noAutofit/>
+          </a:bodyPr>
+          <a:lstStyle/>
+          <a:p>
+            <a:pPr algn="l">
+              <a:lnSpc>
+                <a:spcPct val="110000"/>
+              </a:lnSpc>
+              <a:spcBef>
+                <a:spcPts val="0"/>
+              </a:spcBef>
+              <a:spcAft>
+                <a:spcPts val="0"/>
+              </a:spcAft>
+            </a:pPr>
+            <a:r>
+              <a:rPr sz="610" b="1" i="0">
+                <a:solidFill>
+                  <a:srgbClr val="7C3AED"/>
+                </a:solidFill>
+                <a:latin typeface="Segoe UI"/>
+                <a:ea typeface="Microsoft YaHei"/>
+              </a:rPr>
+              <a:t>· 存算分离 — </a:t>
+            </a:r>
+            <a:r>
+              <a:rPr sz="610" b="0" i="0">
+                <a:solidFill>
+                  <a:srgbClr val="475569"/>
+                </a:solidFill>
+                <a:latin typeface="Segoe UI"/>
+                <a:ea typeface="Microsoft YaHei"/>
+              </a:rPr>
+              <a:t>冷湖常驻，Serverless 读写按需拉起 · 空闲缩 0</a:t>
+            </a:r>
+          </a:p>
+        </p:txBody>
+      </p:sp>
+      <p:sp>
+        <p:nvSpPr>
+          <p:cNvPr id="165" name="TextBox 164"/>
+          <p:cNvSpPr txBox="1"/>
+          <p:nvPr/>
+        </p:nvSpPr>
+        <p:spPr>
+          <a:xfrm>
+            <a:off x="8129016" y="4192524"/>
+            <a:ext cx="3767328" cy="219456"/>
+          </a:xfrm>
+          <a:prstGeom prst="rect">
+            <a:avLst/>
+          </a:prstGeom>
+          <a:noFill/>
+        </p:spPr>
+        <p:txBody>
+          <a:bodyPr wrap="square" lIns="0" rIns="0" tIns="0" bIns="0" anchor="t">
+            <a:noAutofit/>
+          </a:bodyPr>
+          <a:lstStyle/>
+          <a:p>
+            <a:pPr algn="l">
+              <a:lnSpc>
+                <a:spcPct val="110000"/>
+              </a:lnSpc>
+              <a:spcBef>
+                <a:spcPts val="0"/>
+              </a:spcBef>
+              <a:spcAft>
+                <a:spcPts val="0"/>
+              </a:spcAft>
+            </a:pPr>
+            <a:r>
+              <a:rPr sz="610" b="1" i="0">
+                <a:solidFill>
+                  <a:srgbClr val="E11D48"/>
+                </a:solidFill>
+                <a:latin typeface="Segoe UI"/>
+                <a:ea typeface="Microsoft YaHei"/>
+              </a:rPr>
+              <a:t>· 到期即毁 — </a:t>
+            </a:r>
+            <a:r>
+              <a:rPr sz="610" b="0" i="0">
+                <a:solidFill>
+                  <a:srgbClr val="475569"/>
+                </a:solidFill>
+                <a:latin typeface="Segoe UI"/>
+                <a:ea typeface="Microsoft YaHei"/>
+              </a:rPr>
+              <a:t>DROP PARTITION + VACUUM 物理清除，附件与审计同步</a:t>
+            </a:r>
+          </a:p>
+        </p:txBody>
+      </p:sp>
+      <p:sp>
+        <p:nvSpPr>
+          <p:cNvPr id="166" name="TextBox 165"/>
+          <p:cNvSpPr txBox="1"/>
+          <p:nvPr/>
+        </p:nvSpPr>
+        <p:spPr>
+          <a:xfrm>
+            <a:off x="8129016" y="4434840"/>
+            <a:ext cx="3767328" cy="219456"/>
+          </a:xfrm>
+          <a:prstGeom prst="rect">
+            <a:avLst/>
+          </a:prstGeom>
+          <a:noFill/>
+        </p:spPr>
+        <p:txBody>
+          <a:bodyPr wrap="square" lIns="0" rIns="0" tIns="0" bIns="0" anchor="t">
+            <a:noAutofit/>
+          </a:bodyPr>
+          <a:lstStyle/>
+          <a:p>
+            <a:pPr algn="l">
+              <a:lnSpc>
+                <a:spcPct val="110000"/>
+              </a:lnSpc>
+              <a:spcBef>
+                <a:spcPts val="0"/>
+              </a:spcBef>
+              <a:spcAft>
+                <a:spcPts val="0"/>
+              </a:spcAft>
+            </a:pPr>
+            <a:r>
+              <a:rPr sz="610" b="1" i="0">
+                <a:solidFill>
+                  <a:srgbClr val="0891B2"/>
+                </a:solidFill>
+                <a:latin typeface="Segoe UI"/>
+                <a:ea typeface="Microsoft YaHei"/>
+              </a:rPr>
+              <a:t>· 零代码接入 — </a:t>
+            </a:r>
+            <a:r>
+              <a:rPr sz="610" b="0" i="0">
+                <a:solidFill>
+                  <a:srgbClr val="475569"/>
+                </a:solidFill>
+                <a:latin typeface="Segoe UI"/>
+                <a:ea typeface="Microsoft YaHei"/>
+              </a:rPr>
+              <a:t>元数据驱动前端 · 边际 +3~6 人天 / 系统</a:t>
+            </a:r>
+          </a:p>
+        </p:txBody>
+      </p:sp>
+      <p:sp>
+        <p:nvSpPr>
+          <p:cNvPr id="167" name="TextBox 166"/>
+          <p:cNvSpPr txBox="1"/>
+          <p:nvPr/>
+        </p:nvSpPr>
+        <p:spPr>
+          <a:xfrm>
+            <a:off x="8129016" y="4677155"/>
+            <a:ext cx="3767328" cy="219456"/>
+          </a:xfrm>
+          <a:prstGeom prst="rect">
+            <a:avLst/>
+          </a:prstGeom>
+          <a:noFill/>
+        </p:spPr>
+        <p:txBody>
+          <a:bodyPr wrap="square" lIns="0" rIns="0" tIns="0" bIns="0" anchor="t">
+            <a:noAutofit/>
+          </a:bodyPr>
+          <a:lstStyle/>
+          <a:p>
+            <a:pPr algn="l">
+              <a:lnSpc>
+                <a:spcPct val="110000"/>
+              </a:lnSpc>
+              <a:spcBef>
+                <a:spcPts val="0"/>
+              </a:spcBef>
+              <a:spcAft>
+                <a:spcPts val="0"/>
+              </a:spcAft>
+            </a:pPr>
+            <a:r>
+              <a:rPr sz="610" b="1" i="0">
+                <a:solidFill>
+                  <a:srgbClr val="059669"/>
+                </a:solidFill>
+                <a:latin typeface="Segoe UI"/>
+                <a:ea typeface="Microsoft YaHei"/>
+              </a:rPr>
+              <a:t>· 读侧托管 — </a:t>
+            </a:r>
+            <a:r>
+              <a:rPr sz="610" b="0" i="0">
+                <a:solidFill>
+                  <a:srgbClr val="475569"/>
+                </a:solidFill>
+                <a:latin typeface="Segoe UI"/>
+                <a:ea typeface="Microsoft YaHei"/>
+              </a:rPr>
+              <a:t>Serverless SQL Warehouse · 零集群运维 · UC 授权</a:t>
+            </a:r>
+          </a:p>
+        </p:txBody>
+      </p:sp>
+      <p:sp>
+        <p:nvSpPr>
           <p:cNvPr id="168" name="TextBox 167"/>
           <p:cNvSpPr txBox="1"/>
           <p:nvPr/>
         </p:nvSpPr>
         <p:spPr>
           <a:xfrm>
-            <a:off x="8129016" y="3749039"/>
-            <a:ext cx="3749039" cy="146304"/>
+            <a:off x="8129016" y="4919471"/>
+            <a:ext cx="3767328" cy="219456"/>
           </a:xfrm>
           <a:prstGeom prst="rect">
             <a:avLst/>
@@ -27806,52 +27570,6 @@
           <a:p>
             <a:pPr algn="l">
               <a:lnSpc>
-                <a:spcPct val="112000"/>
-              </a:lnSpc>
-              <a:spcBef>
-                <a:spcPts val="0"/>
-              </a:spcBef>
-              <a:spcAft>
-                <a:spcPts val="0"/>
-              </a:spcAft>
-            </a:pPr>
-            <a:r>
-              <a:rPr sz="819" b="1" i="0">
-                <a:solidFill>
-                  <a:srgbClr val="0F172A"/>
-                </a:solidFill>
-                <a:latin typeface="Segoe UI"/>
-                <a:ea typeface="Microsoft YaHei"/>
-              </a:rPr>
-              <a:t>方案 B2 要点</a:t>
-            </a:r>
-          </a:p>
-        </p:txBody>
-      </p:sp>
-      <p:sp>
-        <p:nvSpPr>
-          <p:cNvPr id="169" name="TextBox 168"/>
-          <p:cNvSpPr txBox="1"/>
-          <p:nvPr/>
-        </p:nvSpPr>
-        <p:spPr>
-          <a:xfrm>
-            <a:off x="8129016" y="3950208"/>
-            <a:ext cx="3767328" cy="219456"/>
-          </a:xfrm>
-          <a:prstGeom prst="rect">
-            <a:avLst/>
-          </a:prstGeom>
-          <a:noFill/>
-        </p:spPr>
-        <p:txBody>
-          <a:bodyPr wrap="square" lIns="0" rIns="0" tIns="0" bIns="0" anchor="t">
-            <a:noAutofit/>
-          </a:bodyPr>
-          <a:lstStyle/>
-          <a:p>
-            <a:pPr algn="l">
-              <a:lnSpc>
                 <a:spcPct val="110000"/>
               </a:lnSpc>
               <a:spcBef>
@@ -27864,12 +27582,12 @@
             <a:r>
               <a:rPr sz="610" b="1" i="0">
                 <a:solidFill>
-                  <a:srgbClr val="7C3AED"/>
-                </a:solidFill>
-                <a:latin typeface="Segoe UI"/>
-                <a:ea typeface="Microsoft YaHei"/>
-              </a:rPr>
-              <a:t>· 存算分离 — </a:t>
+                  <a:srgbClr val="475569"/>
+                </a:solidFill>
+                <a:latin typeface="Segoe UI"/>
+                <a:ea typeface="Microsoft YaHei"/>
+              </a:rPr>
+              <a:t>· 适用规模 — </a:t>
             </a:r>
             <a:r>
               <a:rPr sz="610" b="0" i="0">
@@ -27879,230 +27597,6 @@
                 <a:latin typeface="Segoe UI"/>
                 <a:ea typeface="Microsoft YaHei"/>
               </a:rPr>
-              <a:t>冷湖常驻，Serverless 读写按需拉起 · 空闲缩 0</a:t>
-            </a:r>
-          </a:p>
-        </p:txBody>
-      </p:sp>
-      <p:sp>
-        <p:nvSpPr>
-          <p:cNvPr id="170" name="TextBox 169"/>
-          <p:cNvSpPr txBox="1"/>
-          <p:nvPr/>
-        </p:nvSpPr>
-        <p:spPr>
-          <a:xfrm>
-            <a:off x="8129016" y="4192524"/>
-            <a:ext cx="3767328" cy="219456"/>
-          </a:xfrm>
-          <a:prstGeom prst="rect">
-            <a:avLst/>
-          </a:prstGeom>
-          <a:noFill/>
-        </p:spPr>
-        <p:txBody>
-          <a:bodyPr wrap="square" lIns="0" rIns="0" tIns="0" bIns="0" anchor="t">
-            <a:noAutofit/>
-          </a:bodyPr>
-          <a:lstStyle/>
-          <a:p>
-            <a:pPr algn="l">
-              <a:lnSpc>
-                <a:spcPct val="110000"/>
-              </a:lnSpc>
-              <a:spcBef>
-                <a:spcPts val="0"/>
-              </a:spcBef>
-              <a:spcAft>
-                <a:spcPts val="0"/>
-              </a:spcAft>
-            </a:pPr>
-            <a:r>
-              <a:rPr sz="610" b="1" i="0">
-                <a:solidFill>
-                  <a:srgbClr val="E11D48"/>
-                </a:solidFill>
-                <a:latin typeface="Segoe UI"/>
-                <a:ea typeface="Microsoft YaHei"/>
-              </a:rPr>
-              <a:t>· 到期即毁 — </a:t>
-            </a:r>
-            <a:r>
-              <a:rPr sz="610" b="0" i="0">
-                <a:solidFill>
-                  <a:srgbClr val="475569"/>
-                </a:solidFill>
-                <a:latin typeface="Segoe UI"/>
-                <a:ea typeface="Microsoft YaHei"/>
-              </a:rPr>
-              <a:t>DROP PARTITION + VACUUM 物理清除，附件与审计同步</a:t>
-            </a:r>
-          </a:p>
-        </p:txBody>
-      </p:sp>
-      <p:sp>
-        <p:nvSpPr>
-          <p:cNvPr id="171" name="TextBox 170"/>
-          <p:cNvSpPr txBox="1"/>
-          <p:nvPr/>
-        </p:nvSpPr>
-        <p:spPr>
-          <a:xfrm>
-            <a:off x="8129016" y="4434840"/>
-            <a:ext cx="3767328" cy="219456"/>
-          </a:xfrm>
-          <a:prstGeom prst="rect">
-            <a:avLst/>
-          </a:prstGeom>
-          <a:noFill/>
-        </p:spPr>
-        <p:txBody>
-          <a:bodyPr wrap="square" lIns="0" rIns="0" tIns="0" bIns="0" anchor="t">
-            <a:noAutofit/>
-          </a:bodyPr>
-          <a:lstStyle/>
-          <a:p>
-            <a:pPr algn="l">
-              <a:lnSpc>
-                <a:spcPct val="110000"/>
-              </a:lnSpc>
-              <a:spcBef>
-                <a:spcPts val="0"/>
-              </a:spcBef>
-              <a:spcAft>
-                <a:spcPts val="0"/>
-              </a:spcAft>
-            </a:pPr>
-            <a:r>
-              <a:rPr sz="610" b="1" i="0">
-                <a:solidFill>
-                  <a:srgbClr val="0891B2"/>
-                </a:solidFill>
-                <a:latin typeface="Segoe UI"/>
-                <a:ea typeface="Microsoft YaHei"/>
-              </a:rPr>
-              <a:t>· 零代码接入 — </a:t>
-            </a:r>
-            <a:r>
-              <a:rPr sz="610" b="0" i="0">
-                <a:solidFill>
-                  <a:srgbClr val="475569"/>
-                </a:solidFill>
-                <a:latin typeface="Segoe UI"/>
-                <a:ea typeface="Microsoft YaHei"/>
-              </a:rPr>
-              <a:t>元数据驱动前端 · 边际 +3~6 人天 / 系统</a:t>
-            </a:r>
-          </a:p>
-        </p:txBody>
-      </p:sp>
-      <p:sp>
-        <p:nvSpPr>
-          <p:cNvPr id="172" name="TextBox 171"/>
-          <p:cNvSpPr txBox="1"/>
-          <p:nvPr/>
-        </p:nvSpPr>
-        <p:spPr>
-          <a:xfrm>
-            <a:off x="8129016" y="4677155"/>
-            <a:ext cx="3767328" cy="219456"/>
-          </a:xfrm>
-          <a:prstGeom prst="rect">
-            <a:avLst/>
-          </a:prstGeom>
-          <a:noFill/>
-        </p:spPr>
-        <p:txBody>
-          <a:bodyPr wrap="square" lIns="0" rIns="0" tIns="0" bIns="0" anchor="t">
-            <a:noAutofit/>
-          </a:bodyPr>
-          <a:lstStyle/>
-          <a:p>
-            <a:pPr algn="l">
-              <a:lnSpc>
-                <a:spcPct val="110000"/>
-              </a:lnSpc>
-              <a:spcBef>
-                <a:spcPts val="0"/>
-              </a:spcBef>
-              <a:spcAft>
-                <a:spcPts val="0"/>
-              </a:spcAft>
-            </a:pPr>
-            <a:r>
-              <a:rPr sz="610" b="1" i="0">
-                <a:solidFill>
-                  <a:srgbClr val="059669"/>
-                </a:solidFill>
-                <a:latin typeface="Segoe UI"/>
-                <a:ea typeface="Microsoft YaHei"/>
-              </a:rPr>
-              <a:t>· 读侧托管 — </a:t>
-            </a:r>
-            <a:r>
-              <a:rPr sz="610" b="0" i="0">
-                <a:solidFill>
-                  <a:srgbClr val="475569"/>
-                </a:solidFill>
-                <a:latin typeface="Segoe UI"/>
-                <a:ea typeface="Microsoft YaHei"/>
-              </a:rPr>
-              <a:t>Serverless SQL Warehouse · 零集群运维 · UC 授权</a:t>
-            </a:r>
-          </a:p>
-        </p:txBody>
-      </p:sp>
-      <p:sp>
-        <p:nvSpPr>
-          <p:cNvPr id="173" name="TextBox 172"/>
-          <p:cNvSpPr txBox="1"/>
-          <p:nvPr/>
-        </p:nvSpPr>
-        <p:spPr>
-          <a:xfrm>
-            <a:off x="8129016" y="4919471"/>
-            <a:ext cx="3767328" cy="219456"/>
-          </a:xfrm>
-          <a:prstGeom prst="rect">
-            <a:avLst/>
-          </a:prstGeom>
-          <a:noFill/>
-        </p:spPr>
-        <p:txBody>
-          <a:bodyPr wrap="square" lIns="0" rIns="0" tIns="0" bIns="0" anchor="t">
-            <a:noAutofit/>
-          </a:bodyPr>
-          <a:lstStyle/>
-          <a:p>
-            <a:pPr algn="l">
-              <a:lnSpc>
-                <a:spcPct val="110000"/>
-              </a:lnSpc>
-              <a:spcBef>
-                <a:spcPts val="0"/>
-              </a:spcBef>
-              <a:spcAft>
-                <a:spcPts val="0"/>
-              </a:spcAft>
-            </a:pPr>
-            <a:r>
-              <a:rPr sz="610" b="1" i="0">
-                <a:solidFill>
-                  <a:srgbClr val="475569"/>
-                </a:solidFill>
-                <a:latin typeface="Segoe UI"/>
-                <a:ea typeface="Microsoft YaHei"/>
-              </a:rPr>
-              <a:t>· 适用规模 — </a:t>
-            </a:r>
-            <a:r>
-              <a:rPr sz="610" b="0" i="0">
-                <a:solidFill>
-                  <a:srgbClr val="475569"/>
-                </a:solidFill>
-                <a:latin typeface="Segoe UI"/>
-                <a:ea typeface="Microsoft YaHei"/>
-              </a:rPr>
               <a:t>≥15 套系统或 &gt;20 TB 长期保留 · PB 级从容</a:t>
             </a:r>
           </a:p>
@@ -28110,7 +27604,7 @@
       </p:sp>
       <p:sp>
         <p:nvSpPr>
-          <p:cNvPr id="174" name="Rounded Rectangle 173"/>
+          <p:cNvPr id="169" name="Rounded Rectangle 168"/>
           <p:cNvSpPr/>
           <p:nvPr/>
         </p:nvSpPr>
@@ -28158,7 +27652,7 @@
       </p:sp>
       <p:sp>
         <p:nvSpPr>
-          <p:cNvPr id="175" name="TextBox 174"/>
+          <p:cNvPr id="170" name="TextBox 169"/>
           <p:cNvSpPr txBox="1"/>
           <p:nvPr/>
         </p:nvSpPr>
@@ -28204,7 +27698,7 @@
       </p:sp>
       <p:sp>
         <p:nvSpPr>
-          <p:cNvPr id="176" name="TextBox 175"/>
+          <p:cNvPr id="171" name="TextBox 170"/>
           <p:cNvSpPr txBox="1"/>
           <p:nvPr/>
         </p:nvSpPr>
@@ -28250,7 +27744,7 @@
       </p:sp>
       <p:sp>
         <p:nvSpPr>
-          <p:cNvPr id="177" name="TextBox 176"/>
+          <p:cNvPr id="172" name="TextBox 171"/>
           <p:cNvSpPr txBox="1"/>
           <p:nvPr/>
         </p:nvSpPr>

--- a/report/方案B_B2_架构图集.pptx
+++ b/report/方案B_B2_架构图集.pptx
@@ -16327,8 +16327,8 @@
         </p:nvSpPr>
         <p:spPr>
           <a:xfrm>
-            <a:off x="3346704" y="1764792"/>
-            <a:ext cx="4572000" cy="146304"/>
+            <a:off x="3255264" y="1700784"/>
+            <a:ext cx="4736592" cy="566928"/>
           </a:xfrm>
           <a:prstGeom prst="rect">
             <a:avLst/>
@@ -16336,12 +16336,12 @@
           <a:noFill/>
         </p:spPr>
         <p:txBody>
-          <a:bodyPr wrap="square" lIns="0" rIns="0" tIns="0" bIns="0" anchor="t">
+          <a:bodyPr wrap="square" lIns="0" rIns="0" tIns="0" bIns="0" anchor="ctr">
             <a:noAutofit/>
           </a:bodyPr>
           <a:lstStyle/>
           <a:p>
-            <a:pPr algn="l">
+            <a:pPr algn="ctr">
               <a:lnSpc>
                 <a:spcPct val="112000"/>
               </a:lnSpc>
@@ -16363,36 +16363,13 @@
               <a:t>.NET 10 后端服务组</a:t>
             </a:r>
           </a:p>
-        </p:txBody>
-      </p:sp>
-      <p:sp>
-        <p:nvSpPr>
-          <p:cNvPr id="30" name="TextBox 29"/>
-          <p:cNvSpPr txBox="1"/>
-          <p:nvPr/>
-        </p:nvSpPr>
-        <p:spPr>
-          <a:xfrm>
-            <a:off x="3346704" y="1938528"/>
-            <a:ext cx="4572000" cy="310896"/>
-          </a:xfrm>
-          <a:prstGeom prst="rect">
-            <a:avLst/>
-          </a:prstGeom>
-          <a:noFill/>
-        </p:spPr>
-        <p:txBody>
-          <a:bodyPr wrap="square" lIns="0" rIns="0" tIns="0" bIns="0" anchor="t">
-            <a:noAutofit/>
-          </a:bodyPr>
-          <a:lstStyle/>
-          <a:p>
-            <a:pPr algn="l">
-              <a:lnSpc>
-                <a:spcPct val="120000"/>
-              </a:lnSpc>
-              <a:spcBef>
-                <a:spcPts val="0"/>
+          <a:p>
+            <a:pPr algn="ctr">
+              <a:lnSpc>
+                <a:spcPct val="112000"/>
+              </a:lnSpc>
+              <a:spcBef>
+                <a:spcPts val="200"/>
               </a:spcBef>
               <a:spcAft>
                 <a:spcPts val="0"/>
@@ -16410,12 +16387,12 @@
             </a:r>
           </a:p>
           <a:p>
-            <a:pPr algn="l">
-              <a:lnSpc>
-                <a:spcPct val="120000"/>
-              </a:lnSpc>
-              <a:spcBef>
-                <a:spcPts val="0"/>
+            <a:pPr algn="ctr">
+              <a:lnSpc>
+                <a:spcPct val="112000"/>
+              </a:lnSpc>
+              <a:spcBef>
+                <a:spcPts val="100"/>
               </a:spcBef>
               <a:spcAft>
                 <a:spcPts val="0"/>
@@ -16434,6 +16411,29 @@
           </a:p>
         </p:txBody>
       </p:sp>
+      <p:cxnSp>
+        <p:nvCxnSpPr>
+          <p:cNvPr id="30" name="Connector 29"/>
+          <p:cNvCxnSpPr/>
+          <p:nvPr/>
+        </p:nvCxnSpPr>
+        <p:spPr>
+          <a:xfrm>
+            <a:off x="3035808" y="1984248"/>
+            <a:ext cx="146304" cy="0"/>
+          </a:xfrm>
+          <a:prstGeom prst="line">
+            <a:avLst/>
+          </a:prstGeom>
+          <a:ln w="22860">
+            <a:solidFill>
+              <a:srgbClr val="0891B2"/>
+            </a:solidFill>
+            <a:tailEnd type="triangle" w="med" len="med"/>
+          </a:ln>
+          <a:effectLst/>
+        </p:spPr>
+      </p:cxnSp>
       <p:sp>
         <p:nvSpPr>
           <p:cNvPr id="31" name="Rounded Rectangle 30"/>

--- a/report/方案B_B2_架构图集.pptx
+++ b/report/方案B_B2_架构图集.pptx
@@ -3980,7 +3980,7 @@
                 <a:latin typeface="Segoe UI"/>
                 <a:ea typeface="Microsoft YaHei"/>
               </a:rPr>
-              <a:t>RIMS 退役归档平台 · 方案 B / B2</a:t>
+              <a:t>RIMS 退役归档平台 · 方案 B2</a:t>
             </a:r>
           </a:p>
         </p:txBody>
@@ -5610,7 +5610,7 @@
                 <a:latin typeface="Segoe UI"/>
                 <a:ea typeface="Microsoft YaHei"/>
               </a:rPr>
-              <a:t>引擎 · Databricks SQL Serverless</a:t>
+              <a:t>引擎 · Databricks Serverless（读写）</a:t>
             </a:r>
           </a:p>
         </p:txBody>
@@ -11055,7 +11055,7 @@
                 <a:latin typeface="Segoe UI"/>
                 <a:ea typeface="Microsoft YaHei"/>
               </a:rPr>
-              <a:t>Databricks 工作区私有端点</a:t>
+              <a:t>Databricks 工作区端点</a:t>
             </a:r>
           </a:p>
         </p:txBody>
@@ -11872,11 +11872,11 @@
             </a:avLst>
           </a:prstGeom>
           <a:solidFill>
-            <a:srgbClr val="EFF6FF"/>
+            <a:srgbClr val="F1F5F9"/>
           </a:solidFill>
           <a:ln w="11430">
             <a:solidFill>
-              <a:srgbClr val="BFDBFE"/>
+              <a:srgbClr val="CBD5E1"/>
             </a:solidFill>
           </a:ln>
           <a:effectLst/>
@@ -11939,12 +11939,12 @@
             <a:r>
               <a:rPr sz="580" b="0" i="0">
                 <a:solidFill>
-                  <a:srgbClr val="1E40AF"/>
-                </a:solidFill>
-                <a:latin typeface="Segoe UI"/>
-                <a:ea typeface="Microsoft YaHei"/>
-              </a:rPr>
-              <a:t>Private Endpoint</a:t>
+                  <a:srgbClr val="475569"/>
+                </a:solidFill>
+                <a:latin typeface="Segoe UI"/>
+                <a:ea typeface="Microsoft YaHei"/>
+              </a:rPr>
+              <a:t>全局服务 · 443</a:t>
             </a:r>
           </a:p>
         </p:txBody>
@@ -11985,12 +11985,12 @@
             <a:r>
               <a:rPr sz="600" b="1" i="0">
                 <a:solidFill>
-                  <a:srgbClr val="DC2626"/>
-                </a:solidFill>
-                <a:latin typeface="Segoe UI"/>
-                <a:ea typeface="Microsoft YaHei"/>
-              </a:rPr>
-              <a:t>公网访问：已禁用</a:t>
+                  <a:srgbClr val="64748B"/>
+                </a:solidFill>
+                <a:latin typeface="Segoe UI"/>
+                <a:ea typeface="Microsoft YaHei"/>
+              </a:rPr>
+              <a:t>认证走 443 · 无私有端点</a:t>
             </a:r>
           </a:p>
         </p:txBody>
@@ -14309,7 +14309,7 @@
                 <a:latin typeface="Segoe UI"/>
                 <a:ea typeface="Microsoft YaHei"/>
               </a:rPr>
-              <a:t>全部 PaaS 私有端点接入，流量不出 Azure 骨干网；入口 WAF + App Gateway 收敛</a:t>
+              <a:t>除 Entra ID（全局认证）外，PaaS 全部私有端点接入，流量不出骨干网；入口 WAF + AppGW 收敛</a:t>
             </a:r>
           </a:p>
         </p:txBody>
@@ -15072,7 +15072,7 @@
                 <a:latin typeface="Segoe UI"/>
                 <a:ea typeface="Microsoft YaHei"/>
               </a:rPr>
-              <a:t>应用逻辑分层视角 · 读侧 SQL Warehouse · 与基础设施部署拓扑互补</a:t>
+              <a:t>应用逻辑分层视角 · 读侧 Serverless SQL Warehouse · 与基础设施拓扑互补</a:t>
             </a:r>
           </a:p>
         </p:txBody>
@@ -16050,7 +16050,53 @@
       </p:cxnSp>
       <p:sp>
         <p:nvSpPr>
-          <p:cNvPr id="24" name="Rounded Rectangle 23"/>
+          <p:cNvPr id="24" name="TextBox 23"/>
+          <p:cNvSpPr txBox="1"/>
+          <p:nvPr/>
+        </p:nvSpPr>
+        <p:spPr>
+          <a:xfrm>
+            <a:off x="4087368" y="1321308"/>
+            <a:ext cx="1097280" cy="100584"/>
+          </a:xfrm>
+          <a:prstGeom prst="rect">
+            <a:avLst/>
+          </a:prstGeom>
+          <a:noFill/>
+        </p:spPr>
+        <p:txBody>
+          <a:bodyPr wrap="square" lIns="0" rIns="0" tIns="0" bIns="0" anchor="t">
+            <a:noAutofit/>
+          </a:bodyPr>
+          <a:lstStyle/>
+          <a:p>
+            <a:pPr algn="l">
+              <a:lnSpc>
+                <a:spcPct val="112000"/>
+              </a:lnSpc>
+              <a:spcBef>
+                <a:spcPts val="0"/>
+              </a:spcBef>
+              <a:spcAft>
+                <a:spcPts val="0"/>
+              </a:spcAft>
+            </a:pPr>
+            <a:r>
+              <a:rPr sz="580" b="1" i="0">
+                <a:solidFill>
+                  <a:srgbClr val="0891B2"/>
+                </a:solidFill>
+                <a:latin typeface="Segoe UI"/>
+                <a:ea typeface="Microsoft YaHei"/>
+              </a:rPr>
+              <a:t>HTTPS 443 · SSO</a:t>
+            </a:r>
+          </a:p>
+        </p:txBody>
+      </p:sp>
+      <p:sp>
+        <p:nvSpPr>
+          <p:cNvPr id="25" name="Rounded Rectangle 24"/>
           <p:cNvSpPr/>
           <p:nvPr/>
         </p:nvSpPr>
@@ -16098,7 +16144,7 @@
       </p:sp>
       <p:sp>
         <p:nvSpPr>
-          <p:cNvPr id="25" name="TextBox 24"/>
+          <p:cNvPr id="26" name="TextBox 25"/>
           <p:cNvSpPr txBox="1"/>
           <p:nvPr/>
         </p:nvSpPr>
@@ -16144,7 +16190,7 @@
       </p:sp>
       <p:sp>
         <p:nvSpPr>
-          <p:cNvPr id="26" name="Rounded Rectangle 25"/>
+          <p:cNvPr id="27" name="Rounded Rectangle 26"/>
           <p:cNvSpPr/>
           <p:nvPr/>
         </p:nvSpPr>
@@ -16198,7 +16244,7 @@
       </p:sp>
       <p:sp>
         <p:nvSpPr>
-          <p:cNvPr id="27" name="TextBox 26"/>
+          <p:cNvPr id="28" name="TextBox 27"/>
           <p:cNvSpPr txBox="1"/>
           <p:nvPr/>
         </p:nvSpPr>
@@ -16267,7 +16313,7 @@
       </p:sp>
       <p:sp>
         <p:nvSpPr>
-          <p:cNvPr id="28" name="Rounded Rectangle 27"/>
+          <p:cNvPr id="29" name="Rounded Rectangle 28"/>
           <p:cNvSpPr/>
           <p:nvPr/>
         </p:nvSpPr>
@@ -16321,7 +16367,7 @@
       </p:sp>
       <p:sp>
         <p:nvSpPr>
-          <p:cNvPr id="29" name="TextBox 28"/>
+          <p:cNvPr id="30" name="TextBox 29"/>
           <p:cNvSpPr txBox="1"/>
           <p:nvPr/>
         </p:nvSpPr>
@@ -16413,7 +16459,7 @@
       </p:sp>
       <p:cxnSp>
         <p:nvCxnSpPr>
-          <p:cNvPr id="30" name="Connector 29"/>
+          <p:cNvPr id="31" name="Connector 30"/>
           <p:cNvCxnSpPr/>
           <p:nvPr/>
         </p:nvCxnSpPr>
@@ -16436,7 +16482,7 @@
       </p:cxnSp>
       <p:sp>
         <p:nvSpPr>
-          <p:cNvPr id="31" name="Rounded Rectangle 30"/>
+          <p:cNvPr id="32" name="Rounded Rectangle 31"/>
           <p:cNvSpPr/>
           <p:nvPr/>
         </p:nvSpPr>
@@ -16490,7 +16536,7 @@
       </p:sp>
       <p:sp>
         <p:nvSpPr>
-          <p:cNvPr id="32" name="TextBox 31"/>
+          <p:cNvPr id="33" name="TextBox 32"/>
           <p:cNvSpPr txBox="1"/>
           <p:nvPr/>
         </p:nvSpPr>
@@ -16559,7 +16605,7 @@
       </p:sp>
       <p:cxnSp>
         <p:nvCxnSpPr>
-          <p:cNvPr id="33" name="Connector 32"/>
+          <p:cNvPr id="34" name="Connector 33"/>
           <p:cNvCxnSpPr/>
           <p:nvPr/>
         </p:nvCxnSpPr>
@@ -16582,7 +16628,7 @@
       </p:cxnSp>
       <p:sp>
         <p:nvSpPr>
-          <p:cNvPr id="34" name="TextBox 33"/>
+          <p:cNvPr id="35" name="TextBox 34"/>
           <p:cNvSpPr txBox="1"/>
           <p:nvPr/>
         </p:nvSpPr>
@@ -16628,7 +16674,7 @@
       </p:sp>
       <p:sp>
         <p:nvSpPr>
-          <p:cNvPr id="35" name="Rounded Rectangle 34"/>
+          <p:cNvPr id="36" name="Rounded Rectangle 35"/>
           <p:cNvSpPr/>
           <p:nvPr/>
         </p:nvSpPr>
@@ -16676,7 +16722,7 @@
       </p:sp>
       <p:sp>
         <p:nvSpPr>
-          <p:cNvPr id="36" name="TextBox 35"/>
+          <p:cNvPr id="37" name="TextBox 36"/>
           <p:cNvSpPr txBox="1"/>
           <p:nvPr/>
         </p:nvSpPr>
@@ -16722,7 +16768,7 @@
       </p:sp>
       <p:sp>
         <p:nvSpPr>
-          <p:cNvPr id="37" name="Rounded Rectangle 36"/>
+          <p:cNvPr id="38" name="Rounded Rectangle 37"/>
           <p:cNvSpPr/>
           <p:nvPr/>
         </p:nvSpPr>
@@ -16770,7 +16816,7 @@
       </p:sp>
       <p:sp>
         <p:nvSpPr>
-          <p:cNvPr id="38" name="TextBox 37"/>
+          <p:cNvPr id="39" name="TextBox 38"/>
           <p:cNvSpPr txBox="1"/>
           <p:nvPr/>
         </p:nvSpPr>
@@ -16816,7 +16862,7 @@
       </p:sp>
       <p:sp>
         <p:nvSpPr>
-          <p:cNvPr id="39" name="TextBox 38"/>
+          <p:cNvPr id="40" name="TextBox 39"/>
           <p:cNvSpPr txBox="1"/>
           <p:nvPr/>
         </p:nvSpPr>
@@ -16862,7 +16908,7 @@
       </p:sp>
       <p:sp>
         <p:nvSpPr>
-          <p:cNvPr id="40" name="Rounded Rectangle 39"/>
+          <p:cNvPr id="41" name="Rounded Rectangle 40"/>
           <p:cNvSpPr/>
           <p:nvPr/>
         </p:nvSpPr>
@@ -16916,7 +16962,7 @@
       </p:sp>
       <p:sp>
         <p:nvSpPr>
-          <p:cNvPr id="41" name="TextBox 40"/>
+          <p:cNvPr id="42" name="TextBox 41"/>
           <p:cNvSpPr txBox="1"/>
           <p:nvPr/>
         </p:nvSpPr>
@@ -16985,7 +17031,7 @@
       </p:sp>
       <p:sp>
         <p:nvSpPr>
-          <p:cNvPr id="42" name="Rounded Rectangle 41"/>
+          <p:cNvPr id="43" name="Rounded Rectangle 42"/>
           <p:cNvSpPr/>
           <p:nvPr/>
         </p:nvSpPr>
@@ -17039,7 +17085,7 @@
       </p:sp>
       <p:sp>
         <p:nvSpPr>
-          <p:cNvPr id="43" name="TextBox 42"/>
+          <p:cNvPr id="44" name="TextBox 43"/>
           <p:cNvSpPr txBox="1"/>
           <p:nvPr/>
         </p:nvSpPr>
@@ -17108,7 +17154,7 @@
       </p:sp>
       <p:cxnSp>
         <p:nvCxnSpPr>
-          <p:cNvPr id="44" name="Connector 43"/>
+          <p:cNvPr id="45" name="Connector 44"/>
           <p:cNvCxnSpPr/>
           <p:nvPr/>
         </p:nvCxnSpPr>
@@ -17131,7 +17177,7 @@
       </p:cxnSp>
       <p:sp>
         <p:nvSpPr>
-          <p:cNvPr id="45" name="Rounded Rectangle 44"/>
+          <p:cNvPr id="46" name="Rounded Rectangle 45"/>
           <p:cNvSpPr/>
           <p:nvPr/>
         </p:nvSpPr>
@@ -17179,7 +17225,7 @@
       </p:sp>
       <p:sp>
         <p:nvSpPr>
-          <p:cNvPr id="46" name="TextBox 45"/>
+          <p:cNvPr id="47" name="TextBox 46"/>
           <p:cNvSpPr txBox="1"/>
           <p:nvPr/>
         </p:nvSpPr>
@@ -17225,7 +17271,7 @@
       </p:sp>
       <p:sp>
         <p:nvSpPr>
-          <p:cNvPr id="47" name="Rounded Rectangle 46"/>
+          <p:cNvPr id="48" name="Rounded Rectangle 47"/>
           <p:cNvSpPr/>
           <p:nvPr/>
         </p:nvSpPr>
@@ -17273,7 +17319,7 @@
       </p:sp>
       <p:sp>
         <p:nvSpPr>
-          <p:cNvPr id="48" name="TextBox 47"/>
+          <p:cNvPr id="49" name="TextBox 48"/>
           <p:cNvSpPr txBox="1"/>
           <p:nvPr/>
         </p:nvSpPr>
@@ -17319,7 +17365,7 @@
       </p:sp>
       <p:sp>
         <p:nvSpPr>
-          <p:cNvPr id="49" name="TextBox 48"/>
+          <p:cNvPr id="50" name="TextBox 49"/>
           <p:cNvSpPr txBox="1"/>
           <p:nvPr/>
         </p:nvSpPr>
@@ -17365,7 +17411,7 @@
       </p:sp>
       <p:sp>
         <p:nvSpPr>
-          <p:cNvPr id="50" name="Rounded Rectangle 49"/>
+          <p:cNvPr id="51" name="Rounded Rectangle 50"/>
           <p:cNvSpPr/>
           <p:nvPr/>
         </p:nvSpPr>
@@ -17419,7 +17465,7 @@
       </p:sp>
       <p:sp>
         <p:nvSpPr>
-          <p:cNvPr id="51" name="TextBox 50"/>
+          <p:cNvPr id="52" name="TextBox 51"/>
           <p:cNvSpPr txBox="1"/>
           <p:nvPr/>
         </p:nvSpPr>
@@ -17488,7 +17534,7 @@
       </p:sp>
       <p:sp>
         <p:nvSpPr>
-          <p:cNvPr id="52" name="Rounded Rectangle 51"/>
+          <p:cNvPr id="53" name="Rounded Rectangle 52"/>
           <p:cNvSpPr/>
           <p:nvPr/>
         </p:nvSpPr>
@@ -17542,7 +17588,7 @@
       </p:sp>
       <p:sp>
         <p:nvSpPr>
-          <p:cNvPr id="53" name="TextBox 52"/>
+          <p:cNvPr id="54" name="TextBox 53"/>
           <p:cNvSpPr txBox="1"/>
           <p:nvPr/>
         </p:nvSpPr>
@@ -17611,7 +17657,7 @@
       </p:sp>
       <p:cxnSp>
         <p:nvCxnSpPr>
-          <p:cNvPr id="54" name="Connector 53"/>
+          <p:cNvPr id="55" name="Connector 54"/>
           <p:cNvCxnSpPr/>
           <p:nvPr/>
         </p:nvCxnSpPr>
@@ -17634,7 +17680,7 @@
       </p:cxnSp>
       <p:sp>
         <p:nvSpPr>
-          <p:cNvPr id="55" name="Rounded Rectangle 54"/>
+          <p:cNvPr id="56" name="Rounded Rectangle 55"/>
           <p:cNvSpPr/>
           <p:nvPr/>
         </p:nvSpPr>
@@ -17682,7 +17728,7 @@
       </p:sp>
       <p:sp>
         <p:nvSpPr>
-          <p:cNvPr id="56" name="TextBox 55"/>
+          <p:cNvPr id="57" name="TextBox 56"/>
           <p:cNvSpPr txBox="1"/>
           <p:nvPr/>
         </p:nvSpPr>
@@ -17728,7 +17774,7 @@
       </p:sp>
       <p:sp>
         <p:nvSpPr>
-          <p:cNvPr id="57" name="Rounded Rectangle 56"/>
+          <p:cNvPr id="58" name="Rounded Rectangle 57"/>
           <p:cNvSpPr/>
           <p:nvPr/>
         </p:nvSpPr>
@@ -17776,7 +17822,7 @@
       </p:sp>
       <p:sp>
         <p:nvSpPr>
-          <p:cNvPr id="58" name="TextBox 57"/>
+          <p:cNvPr id="59" name="TextBox 58"/>
           <p:cNvSpPr txBox="1"/>
           <p:nvPr/>
         </p:nvSpPr>
@@ -17822,7 +17868,7 @@
       </p:sp>
       <p:sp>
         <p:nvSpPr>
-          <p:cNvPr id="59" name="TextBox 58"/>
+          <p:cNvPr id="60" name="TextBox 59"/>
           <p:cNvSpPr txBox="1"/>
           <p:nvPr/>
         </p:nvSpPr>
@@ -17868,7 +17914,7 @@
       </p:sp>
       <p:sp>
         <p:nvSpPr>
-          <p:cNvPr id="60" name="Rounded Rectangle 59"/>
+          <p:cNvPr id="61" name="Rounded Rectangle 60"/>
           <p:cNvSpPr/>
           <p:nvPr/>
         </p:nvSpPr>
@@ -17922,7 +17968,7 @@
       </p:sp>
       <p:sp>
         <p:nvSpPr>
-          <p:cNvPr id="61" name="TextBox 60"/>
+          <p:cNvPr id="62" name="TextBox 61"/>
           <p:cNvSpPr txBox="1"/>
           <p:nvPr/>
         </p:nvSpPr>
@@ -17991,7 +18037,7 @@
       </p:sp>
       <p:sp>
         <p:nvSpPr>
-          <p:cNvPr id="62" name="Rounded Rectangle 61"/>
+          <p:cNvPr id="63" name="Rounded Rectangle 62"/>
           <p:cNvSpPr/>
           <p:nvPr/>
         </p:nvSpPr>
@@ -18045,7 +18091,7 @@
       </p:sp>
       <p:sp>
         <p:nvSpPr>
-          <p:cNvPr id="63" name="TextBox 62"/>
+          <p:cNvPr id="64" name="TextBox 63"/>
           <p:cNvSpPr txBox="1"/>
           <p:nvPr/>
         </p:nvSpPr>
@@ -18114,7 +18160,7 @@
       </p:sp>
       <p:cxnSp>
         <p:nvCxnSpPr>
-          <p:cNvPr id="64" name="Connector 63"/>
+          <p:cNvPr id="65" name="Connector 64"/>
           <p:cNvCxnSpPr/>
           <p:nvPr/>
         </p:nvCxnSpPr>
@@ -18137,7 +18183,7 @@
       </p:cxnSp>
       <p:sp>
         <p:nvSpPr>
-          <p:cNvPr id="65" name="Rounded Rectangle 64"/>
+          <p:cNvPr id="66" name="Rounded Rectangle 65"/>
           <p:cNvSpPr/>
           <p:nvPr/>
         </p:nvSpPr>
@@ -18185,7 +18231,7 @@
       </p:sp>
       <p:sp>
         <p:nvSpPr>
-          <p:cNvPr id="66" name="TextBox 65"/>
+          <p:cNvPr id="67" name="TextBox 66"/>
           <p:cNvSpPr txBox="1"/>
           <p:nvPr/>
         </p:nvSpPr>
@@ -18231,7 +18277,7 @@
       </p:sp>
       <p:cxnSp>
         <p:nvCxnSpPr>
-          <p:cNvPr id="67" name="Connector 66"/>
+          <p:cNvPr id="68" name="Connector 67"/>
           <p:cNvCxnSpPr/>
           <p:nvPr/>
         </p:nvCxnSpPr>
@@ -18253,7 +18299,7 @@
       </p:cxnSp>
       <p:cxnSp>
         <p:nvCxnSpPr>
-          <p:cNvPr id="68" name="Connector 67"/>
+          <p:cNvPr id="69" name="Connector 68"/>
           <p:cNvCxnSpPr/>
           <p:nvPr/>
         </p:nvCxnSpPr>
@@ -18275,7 +18321,7 @@
       </p:cxnSp>
       <p:cxnSp>
         <p:nvCxnSpPr>
-          <p:cNvPr id="69" name="Connector 68"/>
+          <p:cNvPr id="70" name="Connector 69"/>
           <p:cNvCxnSpPr/>
           <p:nvPr/>
         </p:nvCxnSpPr>
@@ -18298,7 +18344,7 @@
       </p:cxnSp>
       <p:sp>
         <p:nvSpPr>
-          <p:cNvPr id="70" name="TextBox 69"/>
+          <p:cNvPr id="71" name="TextBox 70"/>
           <p:cNvSpPr txBox="1"/>
           <p:nvPr/>
         </p:nvSpPr>
@@ -18344,7 +18390,7 @@
       </p:sp>
       <p:cxnSp>
         <p:nvCxnSpPr>
-          <p:cNvPr id="71" name="Connector 70"/>
+          <p:cNvPr id="72" name="Connector 71"/>
           <p:cNvCxnSpPr/>
           <p:nvPr/>
         </p:nvCxnSpPr>
@@ -18367,7 +18413,7 @@
       </p:cxnSp>
       <p:sp>
         <p:nvSpPr>
-          <p:cNvPr id="72" name="TextBox 71"/>
+          <p:cNvPr id="73" name="TextBox 72"/>
           <p:cNvSpPr txBox="1"/>
           <p:nvPr/>
         </p:nvSpPr>
@@ -18413,7 +18459,7 @@
       </p:sp>
       <p:cxnSp>
         <p:nvCxnSpPr>
-          <p:cNvPr id="73" name="Connector 72"/>
+          <p:cNvPr id="74" name="Connector 73"/>
           <p:cNvCxnSpPr/>
           <p:nvPr/>
         </p:nvCxnSpPr>
@@ -18435,7 +18481,7 @@
       </p:cxnSp>
       <p:cxnSp>
         <p:nvCxnSpPr>
-          <p:cNvPr id="74" name="Connector 73"/>
+          <p:cNvPr id="75" name="Connector 74"/>
           <p:cNvCxnSpPr/>
           <p:nvPr/>
         </p:nvCxnSpPr>
@@ -18457,7 +18503,7 @@
       </p:cxnSp>
       <p:cxnSp>
         <p:nvCxnSpPr>
-          <p:cNvPr id="75" name="Connector 74"/>
+          <p:cNvPr id="76" name="Connector 75"/>
           <p:cNvCxnSpPr/>
           <p:nvPr/>
         </p:nvCxnSpPr>
@@ -18480,7 +18526,7 @@
       </p:cxnSp>
       <p:sp>
         <p:nvSpPr>
-          <p:cNvPr id="76" name="TextBox 75"/>
+          <p:cNvPr id="77" name="TextBox 76"/>
           <p:cNvSpPr txBox="1"/>
           <p:nvPr/>
         </p:nvSpPr>
@@ -18526,7 +18572,7 @@
       </p:sp>
       <p:sp>
         <p:nvSpPr>
-          <p:cNvPr id="77" name="Rounded Rectangle 76"/>
+          <p:cNvPr id="78" name="Rounded Rectangle 77"/>
           <p:cNvSpPr/>
           <p:nvPr/>
         </p:nvSpPr>
@@ -18574,7 +18620,7 @@
       </p:sp>
       <p:sp>
         <p:nvSpPr>
-          <p:cNvPr id="78" name="TextBox 77"/>
+          <p:cNvPr id="79" name="TextBox 78"/>
           <p:cNvSpPr txBox="1"/>
           <p:nvPr/>
         </p:nvSpPr>
@@ -18620,7 +18666,7 @@
       </p:sp>
       <p:sp>
         <p:nvSpPr>
-          <p:cNvPr id="79" name="Rounded Rectangle 78"/>
+          <p:cNvPr id="80" name="Rounded Rectangle 79"/>
           <p:cNvSpPr/>
           <p:nvPr/>
         </p:nvSpPr>
@@ -18674,7 +18720,7 @@
       </p:sp>
       <p:sp>
         <p:nvSpPr>
-          <p:cNvPr id="80" name="TextBox 79"/>
+          <p:cNvPr id="81" name="TextBox 80"/>
           <p:cNvSpPr txBox="1"/>
           <p:nvPr/>
         </p:nvSpPr>
@@ -18743,7 +18789,7 @@
       </p:sp>
       <p:sp>
         <p:nvSpPr>
-          <p:cNvPr id="81" name="Rounded Rectangle 80"/>
+          <p:cNvPr id="82" name="Rounded Rectangle 81"/>
           <p:cNvSpPr/>
           <p:nvPr/>
         </p:nvSpPr>
@@ -18797,7 +18843,7 @@
       </p:sp>
       <p:sp>
         <p:nvSpPr>
-          <p:cNvPr id="82" name="TextBox 81"/>
+          <p:cNvPr id="83" name="TextBox 82"/>
           <p:cNvSpPr txBox="1"/>
           <p:nvPr/>
         </p:nvSpPr>
@@ -18866,7 +18912,7 @@
       </p:sp>
       <p:sp>
         <p:nvSpPr>
-          <p:cNvPr id="83" name="Rounded Rectangle 82"/>
+          <p:cNvPr id="84" name="Rounded Rectangle 83"/>
           <p:cNvSpPr/>
           <p:nvPr/>
         </p:nvSpPr>
@@ -18920,7 +18966,7 @@
       </p:sp>
       <p:sp>
         <p:nvSpPr>
-          <p:cNvPr id="84" name="TextBox 83"/>
+          <p:cNvPr id="85" name="TextBox 84"/>
           <p:cNvSpPr txBox="1"/>
           <p:nvPr/>
         </p:nvSpPr>
@@ -18989,7 +19035,7 @@
       </p:sp>
       <p:cxnSp>
         <p:nvCxnSpPr>
-          <p:cNvPr id="85" name="Connector 84"/>
+          <p:cNvPr id="86" name="Connector 85"/>
           <p:cNvCxnSpPr/>
           <p:nvPr/>
         </p:nvCxnSpPr>
@@ -19012,7 +19058,7 @@
       </p:cxnSp>
       <p:sp>
         <p:nvSpPr>
-          <p:cNvPr id="86" name="TextBox 85"/>
+          <p:cNvPr id="87" name="TextBox 86"/>
           <p:cNvSpPr txBox="1"/>
           <p:nvPr/>
         </p:nvSpPr>
@@ -19058,7 +19104,7 @@
       </p:sp>
       <p:cxnSp>
         <p:nvCxnSpPr>
-          <p:cNvPr id="87" name="Connector 86"/>
+          <p:cNvPr id="88" name="Connector 87"/>
           <p:cNvCxnSpPr/>
           <p:nvPr/>
         </p:nvCxnSpPr>
@@ -19080,7 +19126,7 @@
       </p:cxnSp>
       <p:cxnSp>
         <p:nvCxnSpPr>
-          <p:cNvPr id="88" name="Connector 87"/>
+          <p:cNvPr id="89" name="Connector 88"/>
           <p:cNvCxnSpPr/>
           <p:nvPr/>
         </p:nvCxnSpPr>
@@ -19102,7 +19148,7 @@
       </p:cxnSp>
       <p:cxnSp>
         <p:nvCxnSpPr>
-          <p:cNvPr id="89" name="Connector 88"/>
+          <p:cNvPr id="90" name="Connector 89"/>
           <p:cNvCxnSpPr/>
           <p:nvPr/>
         </p:nvCxnSpPr>
@@ -19125,7 +19171,7 @@
       </p:cxnSp>
       <p:sp>
         <p:nvSpPr>
-          <p:cNvPr id="90" name="TextBox 89"/>
+          <p:cNvPr id="91" name="TextBox 90"/>
           <p:cNvSpPr txBox="1"/>
           <p:nvPr/>
         </p:nvSpPr>
@@ -19171,7 +19217,7 @@
       </p:sp>
       <p:cxnSp>
         <p:nvCxnSpPr>
-          <p:cNvPr id="91" name="Connector 90"/>
+          <p:cNvPr id="92" name="Connector 91"/>
           <p:cNvCxnSpPr/>
           <p:nvPr/>
         </p:nvCxnSpPr>
@@ -19194,7 +19240,7 @@
       </p:cxnSp>
       <p:sp>
         <p:nvSpPr>
-          <p:cNvPr id="92" name="TextBox 91"/>
+          <p:cNvPr id="93" name="TextBox 92"/>
           <p:cNvSpPr txBox="1"/>
           <p:nvPr/>
         </p:nvSpPr>
@@ -19240,7 +19286,7 @@
       </p:sp>
       <p:sp>
         <p:nvSpPr>
-          <p:cNvPr id="93" name="Rounded Rectangle 92"/>
+          <p:cNvPr id="94" name="Rounded Rectangle 93"/>
           <p:cNvSpPr/>
           <p:nvPr/>
         </p:nvSpPr>
@@ -19288,7 +19334,7 @@
       </p:sp>
       <p:sp>
         <p:nvSpPr>
-          <p:cNvPr id="94" name="TextBox 93"/>
+          <p:cNvPr id="95" name="TextBox 94"/>
           <p:cNvSpPr txBox="1"/>
           <p:nvPr/>
         </p:nvSpPr>
@@ -19344,7 +19390,7 @@
       </p:sp>
       <p:sp>
         <p:nvSpPr>
-          <p:cNvPr id="95" name="Rounded Rectangle 94"/>
+          <p:cNvPr id="96" name="Rounded Rectangle 95"/>
           <p:cNvSpPr/>
           <p:nvPr/>
         </p:nvSpPr>
@@ -19392,7 +19438,7 @@
       </p:sp>
       <p:sp>
         <p:nvSpPr>
-          <p:cNvPr id="96" name="TextBox 95"/>
+          <p:cNvPr id="97" name="TextBox 96"/>
           <p:cNvSpPr txBox="1"/>
           <p:nvPr/>
         </p:nvSpPr>
@@ -19448,7 +19494,7 @@
       </p:sp>
       <p:sp>
         <p:nvSpPr>
-          <p:cNvPr id="97" name="Oval 96"/>
+          <p:cNvPr id="98" name="Oval 97"/>
           <p:cNvSpPr/>
           <p:nvPr/>
         </p:nvSpPr>
@@ -19492,7 +19538,7 @@
       </p:sp>
       <p:sp>
         <p:nvSpPr>
-          <p:cNvPr id="98" name="TextBox 97"/>
+          <p:cNvPr id="99" name="TextBox 98"/>
           <p:cNvSpPr txBox="1"/>
           <p:nvPr/>
         </p:nvSpPr>
@@ -19538,7 +19584,7 @@
       </p:sp>
       <p:sp>
         <p:nvSpPr>
-          <p:cNvPr id="99" name="Oval 98"/>
+          <p:cNvPr id="100" name="Oval 99"/>
           <p:cNvSpPr/>
           <p:nvPr/>
         </p:nvSpPr>
@@ -19582,7 +19628,7 @@
       </p:sp>
       <p:sp>
         <p:nvSpPr>
-          <p:cNvPr id="100" name="TextBox 99"/>
+          <p:cNvPr id="101" name="TextBox 100"/>
           <p:cNvSpPr txBox="1"/>
           <p:nvPr/>
         </p:nvSpPr>
@@ -19628,7 +19674,7 @@
       </p:sp>
       <p:sp>
         <p:nvSpPr>
-          <p:cNvPr id="101" name="Oval 100"/>
+          <p:cNvPr id="102" name="Oval 101"/>
           <p:cNvSpPr/>
           <p:nvPr/>
         </p:nvSpPr>
@@ -19672,7 +19718,7 @@
       </p:sp>
       <p:sp>
         <p:nvSpPr>
-          <p:cNvPr id="102" name="TextBox 101"/>
+          <p:cNvPr id="103" name="TextBox 102"/>
           <p:cNvSpPr txBox="1"/>
           <p:nvPr/>
         </p:nvSpPr>
@@ -19718,7 +19764,7 @@
       </p:sp>
       <p:sp>
         <p:nvSpPr>
-          <p:cNvPr id="103" name="Oval 102"/>
+          <p:cNvPr id="104" name="Oval 103"/>
           <p:cNvSpPr/>
           <p:nvPr/>
         </p:nvSpPr>
@@ -19762,7 +19808,7 @@
       </p:sp>
       <p:sp>
         <p:nvSpPr>
-          <p:cNvPr id="104" name="TextBox 103"/>
+          <p:cNvPr id="105" name="TextBox 104"/>
           <p:cNvSpPr txBox="1"/>
           <p:nvPr/>
         </p:nvSpPr>
@@ -19808,7 +19854,7 @@
       </p:sp>
       <p:sp>
         <p:nvSpPr>
-          <p:cNvPr id="105" name="Oval 104"/>
+          <p:cNvPr id="106" name="Oval 105"/>
           <p:cNvSpPr/>
           <p:nvPr/>
         </p:nvSpPr>
@@ -19852,7 +19898,7 @@
       </p:sp>
       <p:sp>
         <p:nvSpPr>
-          <p:cNvPr id="106" name="TextBox 105"/>
+          <p:cNvPr id="107" name="TextBox 106"/>
           <p:cNvSpPr txBox="1"/>
           <p:nvPr/>
         </p:nvSpPr>

--- a/report/方案B_B2_架构图集.pptx
+++ b/report/方案B_B2_架构图集.pptx
@@ -4550,7 +4550,7 @@
                 <a:latin typeface="Segoe UI"/>
                 <a:ea typeface="Microsoft YaHei"/>
               </a:rPr>
-              <a:t>应用架构图 · 方案 B2（湖仓一体 · Serverless SQL Warehouse 读）</a:t>
+              <a:t>应用架构图 · 方案 B2（湖仓一体 · Databricks SQL Serverless 读）</a:t>
             </a:r>
           </a:p>
         </p:txBody>
@@ -8680,7 +8680,7 @@
                 <a:latin typeface="Segoe UI"/>
                 <a:ea typeface="Microsoft YaHei"/>
               </a:rPr>
-              <a:t>Serverless SQL Warehouse</a:t>
+              <a:t>Databricks SQL Serverless</a:t>
             </a:r>
           </a:p>
         </p:txBody>
@@ -8998,7 +8998,7 @@
                 <a:latin typeface="Segoe UI"/>
                 <a:ea typeface="Microsoft YaHei"/>
               </a:rPr>
-              <a:t>Serverless Jobs</a:t>
+              <a:t>Databricks Serverless</a:t>
             </a:r>
           </a:p>
         </p:txBody>
@@ -15026,7 +15026,7 @@
                 <a:latin typeface="Segoe UI"/>
                 <a:ea typeface="Microsoft YaHei"/>
               </a:rPr>
-              <a:t>应用架构图 · 方案 B2（湖仓一体 · Serverless SQL Warehouse 读）</a:t>
+              <a:t>应用架构图 · 方案 B2（湖仓一体 · Databricks SQL Serverless 读）</a:t>
             </a:r>
           </a:p>
         </p:txBody>
@@ -15072,7 +15072,7 @@
                 <a:latin typeface="Segoe UI"/>
                 <a:ea typeface="Microsoft YaHei"/>
               </a:rPr>
-              <a:t>应用逻辑分层视角 · 读侧 Serverless SQL Warehouse · 与基础设施拓扑互补</a:t>
+              <a:t>应用逻辑分层视角 · 读侧 Databricks SQL Serverless · 与基础设施拓扑互补</a:t>
             </a:r>
           </a:p>
         </p:txBody>
@@ -17264,7 +17264,7 @@
                 <a:latin typeface="Segoe UI"/>
                 <a:ea typeface="Microsoft YaHei"/>
               </a:rPr>
-              <a:t>Databricks Jobs：ETL · Compaction · DROP PARTITION + VACUUM</a:t>
+              <a:t>Databricks Serverless：ETL · Compaction · DROP PARTITION + VACUUM</a:t>
             </a:r>
           </a:p>
         </p:txBody>
@@ -17627,7 +17627,7 @@
                 <a:latin typeface="Segoe UI"/>
                 <a:ea typeface="Microsoft YaHei"/>
               </a:rPr>
-              <a:t>Serverless SQL Warehouse</a:t>
+              <a:t>Databricks SQL Serverless</a:t>
             </a:r>
           </a:p>
           <a:p>
@@ -19487,7 +19487,7 @@
                 <a:latin typeface="Segoe UI"/>
                 <a:ea typeface="Microsoft YaHei"/>
               </a:rPr>
-              <a:t>Serverless SQL Warehouse 完全托管 · 空闲缩 0；代价是引擎绑定 + 需 Premium 层（NCC / PE）</a:t>
+              <a:t>Databricks SQL Serverless 完全托管 · 空闲缩 0；代价是引擎绑定 + 需 Premium 层（NCC / PE）</a:t>
             </a:r>
           </a:p>
         </p:txBody>
@@ -23436,7 +23436,7 @@
                 <a:latin typeface="Segoe UI"/>
                 <a:ea typeface="Microsoft YaHei"/>
               </a:rPr>
-              <a:t>　热表物化 · Z-Order · 供 SQL Warehouse 直接查询</a:t>
+              <a:t>　热表物化 · Z-Order · 供 Databricks SQL Serverless 直查</a:t>
             </a:r>
           </a:p>
         </p:txBody>
@@ -24387,7 +24387,7 @@
                 <a:latin typeface="Segoe UI"/>
                 <a:ea typeface="Microsoft YaHei"/>
               </a:rPr>
-              <a:t>Serverless SQL Warehouse</a:t>
+              <a:t>Databricks SQL Serverless</a:t>
             </a:r>
           </a:p>
         </p:txBody>
@@ -27223,7 +27223,7 @@
                 <a:latin typeface="Segoe UI"/>
                 <a:ea typeface="Microsoft YaHei"/>
               </a:rPr>
-              <a:t>写侧 Jobs ≈¥0.4–0.8 万/月 · 读侧 Warehouse ≈¥0.5–0.9 万/月</a:t>
+              <a:t>写侧 ETL ≈¥0.4–0.8 万/月 · 读侧查询 ≈¥0.5–0.9 万/月</a:t>
             </a:r>
           </a:p>
         </p:txBody>
@@ -27587,7 +27587,7 @@
                 <a:latin typeface="Segoe UI"/>
                 <a:ea typeface="Microsoft YaHei"/>
               </a:rPr>
-              <a:t>Serverless SQL Warehouse · 零集群运维 · UC 授权</a:t>
+              <a:t>Databricks SQL Serverless · 零集群运维 · UC 授权</a:t>
             </a:r>
           </a:p>
         </p:txBody>

--- a/report/方案B_B2_架构图集.pptx
+++ b/report/方案B_B2_架构图集.pptx
@@ -5051,99 +5051,7 @@
       </p:sp>
       <p:sp>
         <p:nvSpPr>
-          <p:cNvPr id="4" name="TextBox 3"/>
-          <p:cNvSpPr txBox="1"/>
-          <p:nvPr/>
-        </p:nvSpPr>
-        <p:spPr>
-          <a:xfrm>
-            <a:off x="8595360" y="54864"/>
-            <a:ext cx="2788920" cy="384048"/>
-          </a:xfrm>
-          <a:prstGeom prst="rect">
-            <a:avLst/>
-          </a:prstGeom>
-          <a:noFill/>
-        </p:spPr>
-        <p:txBody>
-          <a:bodyPr wrap="square" lIns="0" rIns="0" tIns="0" bIns="0" anchor="ctr">
-            <a:noAutofit/>
-          </a:bodyPr>
-          <a:lstStyle/>
-          <a:p>
-            <a:pPr algn="r">
-              <a:lnSpc>
-                <a:spcPct val="125000"/>
-              </a:lnSpc>
-              <a:spcBef>
-                <a:spcPts val="0"/>
-              </a:spcBef>
-              <a:spcAft>
-                <a:spcPts val="0"/>
-              </a:spcAft>
-            </a:pPr>
-            <a:r>
-              <a:rPr sz="750" b="0" i="0">
-                <a:solidFill>
-                  <a:srgbClr val="64748B"/>
-                </a:solidFill>
-                <a:latin typeface="Segoe UI"/>
-                <a:ea typeface="Microsoft YaHei"/>
-              </a:rPr>
-              <a:t>湖仓一体 · Databricks 读写 · 共 17 个组件 · 无 Trino 集群 / 无 PostgreSQL</a:t>
-            </a:r>
-          </a:p>
-        </p:txBody>
-      </p:sp>
-      <p:sp>
-        <p:nvSpPr>
-          <p:cNvPr id="5" name="TextBox 4"/>
-          <p:cNvSpPr txBox="1"/>
-          <p:nvPr/>
-        </p:nvSpPr>
-        <p:spPr>
-          <a:xfrm>
-            <a:off x="11448288" y="365760"/>
-            <a:ext cx="548640" cy="164592"/>
-          </a:xfrm>
-          <a:prstGeom prst="rect">
-            <a:avLst/>
-          </a:prstGeom>
-          <a:noFill/>
-        </p:spPr>
-        <p:txBody>
-          <a:bodyPr wrap="square" lIns="0" rIns="0" tIns="0" bIns="0" anchor="t">
-            <a:noAutofit/>
-          </a:bodyPr>
-          <a:lstStyle/>
-          <a:p>
-            <a:pPr algn="r">
-              <a:lnSpc>
-                <a:spcPct val="112000"/>
-              </a:lnSpc>
-              <a:spcBef>
-                <a:spcPts val="0"/>
-              </a:spcBef>
-              <a:spcAft>
-                <a:spcPts val="0"/>
-              </a:spcAft>
-            </a:pPr>
-            <a:r>
-              <a:rPr sz="700" b="0" i="0">
-                <a:solidFill>
-                  <a:srgbClr val="94A3B8"/>
-                </a:solidFill>
-                <a:latin typeface="Consolas"/>
-                <a:ea typeface="Microsoft YaHei"/>
-              </a:rPr>
-              <a:t>01 / 03</a:t>
-            </a:r>
-          </a:p>
-        </p:txBody>
-      </p:sp>
-      <p:sp>
-        <p:nvSpPr>
-          <p:cNvPr id="6" name="Rounded Rectangle 5"/>
+          <p:cNvPr id="4" name="Rounded Rectangle 3"/>
           <p:cNvSpPr/>
           <p:nvPr/>
         </p:nvSpPr>
@@ -5191,7 +5099,7 @@
       </p:sp>
       <p:sp>
         <p:nvSpPr>
-          <p:cNvPr id="7" name="TextBox 6"/>
+          <p:cNvPr id="5" name="TextBox 4"/>
           <p:cNvSpPr txBox="1"/>
           <p:nvPr/>
         </p:nvSpPr>
@@ -5237,7 +5145,7 @@
       </p:sp>
       <p:sp>
         <p:nvSpPr>
-          <p:cNvPr id="8" name="Rectangle 7"/>
+          <p:cNvPr id="6" name="Rectangle 5"/>
           <p:cNvSpPr/>
           <p:nvPr/>
         </p:nvSpPr>
@@ -5281,7 +5189,7 @@
       </p:sp>
       <p:sp>
         <p:nvSpPr>
-          <p:cNvPr id="9" name="TextBox 8"/>
+          <p:cNvPr id="7" name="TextBox 6"/>
           <p:cNvSpPr txBox="1"/>
           <p:nvPr/>
         </p:nvSpPr>
@@ -5337,7 +5245,7 @@
       </p:sp>
       <p:sp>
         <p:nvSpPr>
-          <p:cNvPr id="10" name="TextBox 9"/>
+          <p:cNvPr id="8" name="TextBox 7"/>
           <p:cNvSpPr txBox="1"/>
           <p:nvPr/>
         </p:nvSpPr>
@@ -5393,7 +5301,7 @@
       </p:sp>
       <p:sp>
         <p:nvSpPr>
-          <p:cNvPr id="11" name="TextBox 10"/>
+          <p:cNvPr id="9" name="TextBox 8"/>
           <p:cNvSpPr txBox="1"/>
           <p:nvPr/>
         </p:nvSpPr>
@@ -5449,7 +5357,7 @@
       </p:sp>
       <p:sp>
         <p:nvSpPr>
-          <p:cNvPr id="12" name="TextBox 11"/>
+          <p:cNvPr id="10" name="TextBox 9"/>
           <p:cNvSpPr txBox="1"/>
           <p:nvPr/>
         </p:nvSpPr>
@@ -5505,7 +5413,7 @@
       </p:sp>
       <p:sp>
         <p:nvSpPr>
-          <p:cNvPr id="13" name="TextBox 12"/>
+          <p:cNvPr id="11" name="TextBox 10"/>
           <p:cNvSpPr txBox="1"/>
           <p:nvPr/>
         </p:nvSpPr>
@@ -5561,7 +5469,7 @@
       </p:sp>
       <p:sp>
         <p:nvSpPr>
-          <p:cNvPr id="14" name="TextBox 13"/>
+          <p:cNvPr id="12" name="TextBox 11"/>
           <p:cNvSpPr txBox="1"/>
           <p:nvPr/>
         </p:nvSpPr>
@@ -5617,7 +5525,7 @@
       </p:sp>
       <p:sp>
         <p:nvSpPr>
-          <p:cNvPr id="15" name="TextBox 14"/>
+          <p:cNvPr id="13" name="TextBox 12"/>
           <p:cNvSpPr txBox="1"/>
           <p:nvPr/>
         </p:nvSpPr>
@@ -5673,7 +5581,7 @@
       </p:sp>
       <p:sp>
         <p:nvSpPr>
-          <p:cNvPr id="16" name="TextBox 15"/>
+          <p:cNvPr id="14" name="TextBox 13"/>
           <p:cNvSpPr txBox="1"/>
           <p:nvPr/>
         </p:nvSpPr>
@@ -5729,7 +5637,7 @@
       </p:sp>
       <p:sp>
         <p:nvSpPr>
-          <p:cNvPr id="17" name="Rounded Rectangle 16"/>
+          <p:cNvPr id="15" name="Rounded Rectangle 14"/>
           <p:cNvSpPr/>
           <p:nvPr/>
         </p:nvSpPr>
@@ -5777,7 +5685,7 @@
       </p:sp>
       <p:sp>
         <p:nvSpPr>
-          <p:cNvPr id="18" name="TextBox 17"/>
+          <p:cNvPr id="16" name="TextBox 15"/>
           <p:cNvSpPr txBox="1"/>
           <p:nvPr/>
         </p:nvSpPr>
@@ -5823,7 +5731,7 @@
       </p:sp>
       <p:sp>
         <p:nvSpPr>
-          <p:cNvPr id="19" name="Rounded Rectangle 18"/>
+          <p:cNvPr id="17" name="Rounded Rectangle 16"/>
           <p:cNvSpPr/>
           <p:nvPr/>
         </p:nvSpPr>
@@ -5871,7 +5779,7 @@
       </p:sp>
       <p:sp>
         <p:nvSpPr>
-          <p:cNvPr id="20" name="TextBox 19"/>
+          <p:cNvPr id="18" name="TextBox 17"/>
           <p:cNvSpPr txBox="1"/>
           <p:nvPr/>
         </p:nvSpPr>
@@ -5940,7 +5848,7 @@
       </p:sp>
       <p:sp>
         <p:nvSpPr>
-          <p:cNvPr id="21" name="Oval 20"/>
+          <p:cNvPr id="19" name="Oval 18"/>
           <p:cNvSpPr/>
           <p:nvPr/>
         </p:nvSpPr>
@@ -5984,7 +5892,7 @@
       </p:sp>
       <p:sp>
         <p:nvSpPr>
-          <p:cNvPr id="22" name="Rounded Rectangle 21"/>
+          <p:cNvPr id="20" name="Rounded Rectangle 19"/>
           <p:cNvSpPr/>
           <p:nvPr/>
         </p:nvSpPr>
@@ -6030,7 +5938,7 @@
       </p:sp>
       <p:sp>
         <p:nvSpPr>
-          <p:cNvPr id="23" name="Rounded Rectangle 22"/>
+          <p:cNvPr id="21" name="Rounded Rectangle 20"/>
           <p:cNvSpPr/>
           <p:nvPr/>
         </p:nvSpPr>
@@ -6078,7 +5986,7 @@
       </p:sp>
       <p:sp>
         <p:nvSpPr>
-          <p:cNvPr id="24" name="TextBox 23"/>
+          <p:cNvPr id="22" name="TextBox 21"/>
           <p:cNvSpPr txBox="1"/>
           <p:nvPr/>
         </p:nvSpPr>
@@ -6147,7 +6055,7 @@
       </p:sp>
       <p:sp>
         <p:nvSpPr>
-          <p:cNvPr id="25" name="Oval 24"/>
+          <p:cNvPr id="23" name="Oval 22"/>
           <p:cNvSpPr/>
           <p:nvPr/>
         </p:nvSpPr>
@@ -6191,7 +6099,7 @@
       </p:sp>
       <p:sp>
         <p:nvSpPr>
-          <p:cNvPr id="26" name="Rounded Rectangle 25"/>
+          <p:cNvPr id="24" name="Rounded Rectangle 23"/>
           <p:cNvSpPr/>
           <p:nvPr/>
         </p:nvSpPr>
@@ -6237,7 +6145,7 @@
       </p:sp>
       <p:sp>
         <p:nvSpPr>
-          <p:cNvPr id="27" name="Rounded Rectangle 26"/>
+          <p:cNvPr id="25" name="Rounded Rectangle 24"/>
           <p:cNvSpPr/>
           <p:nvPr/>
         </p:nvSpPr>
@@ -6285,7 +6193,7 @@
       </p:sp>
       <p:sp>
         <p:nvSpPr>
-          <p:cNvPr id="28" name="TextBox 27"/>
+          <p:cNvPr id="26" name="TextBox 25"/>
           <p:cNvSpPr txBox="1"/>
           <p:nvPr/>
         </p:nvSpPr>
@@ -6354,7 +6262,7 @@
       </p:sp>
       <p:sp>
         <p:nvSpPr>
-          <p:cNvPr id="29" name="Oval 28"/>
+          <p:cNvPr id="27" name="Oval 26"/>
           <p:cNvSpPr/>
           <p:nvPr/>
         </p:nvSpPr>
@@ -6398,7 +6306,7 @@
       </p:sp>
       <p:sp>
         <p:nvSpPr>
-          <p:cNvPr id="30" name="Rounded Rectangle 29"/>
+          <p:cNvPr id="28" name="Rounded Rectangle 27"/>
           <p:cNvSpPr/>
           <p:nvPr/>
         </p:nvSpPr>
@@ -6444,7 +6352,7 @@
       </p:sp>
       <p:sp>
         <p:nvSpPr>
-          <p:cNvPr id="31" name="TextBox 30"/>
+          <p:cNvPr id="29" name="TextBox 28"/>
           <p:cNvSpPr txBox="1"/>
           <p:nvPr/>
         </p:nvSpPr>
@@ -6490,7 +6398,7 @@
       </p:sp>
       <p:sp>
         <p:nvSpPr>
-          <p:cNvPr id="32" name="Rounded Rectangle 31"/>
+          <p:cNvPr id="30" name="Rounded Rectangle 29"/>
           <p:cNvSpPr/>
           <p:nvPr/>
         </p:nvSpPr>
@@ -6538,7 +6446,7 @@
       </p:sp>
       <p:sp>
         <p:nvSpPr>
-          <p:cNvPr id="33" name="TextBox 32"/>
+          <p:cNvPr id="31" name="TextBox 30"/>
           <p:cNvSpPr txBox="1"/>
           <p:nvPr/>
         </p:nvSpPr>
@@ -6584,7 +6492,7 @@
       </p:sp>
       <p:sp>
         <p:nvSpPr>
-          <p:cNvPr id="34" name="TextBox 33"/>
+          <p:cNvPr id="32" name="TextBox 31"/>
           <p:cNvSpPr txBox="1"/>
           <p:nvPr/>
         </p:nvSpPr>
@@ -6630,7 +6538,7 @@
       </p:sp>
       <p:sp>
         <p:nvSpPr>
-          <p:cNvPr id="35" name="Rounded Rectangle 34"/>
+          <p:cNvPr id="33" name="Rounded Rectangle 32"/>
           <p:cNvSpPr/>
           <p:nvPr/>
         </p:nvSpPr>
@@ -6678,7 +6586,7 @@
       </p:sp>
       <p:sp>
         <p:nvSpPr>
-          <p:cNvPr id="36" name="TextBox 35"/>
+          <p:cNvPr id="34" name="TextBox 33"/>
           <p:cNvSpPr txBox="1"/>
           <p:nvPr/>
         </p:nvSpPr>
@@ -6747,7 +6655,7 @@
       </p:sp>
       <p:sp>
         <p:nvSpPr>
-          <p:cNvPr id="37" name="Rectangle 36"/>
+          <p:cNvPr id="35" name="Rectangle 34"/>
           <p:cNvSpPr/>
           <p:nvPr/>
         </p:nvSpPr>
@@ -6791,7 +6699,7 @@
       </p:sp>
       <p:sp>
         <p:nvSpPr>
-          <p:cNvPr id="38" name="Oval 37"/>
+          <p:cNvPr id="36" name="Oval 35"/>
           <p:cNvSpPr/>
           <p:nvPr/>
         </p:nvSpPr>
@@ -6835,7 +6743,7 @@
       </p:sp>
       <p:sp>
         <p:nvSpPr>
-          <p:cNvPr id="39" name="Oval 38"/>
+          <p:cNvPr id="37" name="Oval 36"/>
           <p:cNvSpPr/>
           <p:nvPr/>
         </p:nvSpPr>
@@ -6881,7 +6789,7 @@
       </p:sp>
       <p:sp>
         <p:nvSpPr>
-          <p:cNvPr id="40" name="Rounded Rectangle 39"/>
+          <p:cNvPr id="38" name="Rounded Rectangle 37"/>
           <p:cNvSpPr/>
           <p:nvPr/>
         </p:nvSpPr>
@@ -6929,7 +6837,7 @@
       </p:sp>
       <p:sp>
         <p:nvSpPr>
-          <p:cNvPr id="41" name="TextBox 40"/>
+          <p:cNvPr id="39" name="TextBox 38"/>
           <p:cNvSpPr txBox="1"/>
           <p:nvPr/>
         </p:nvSpPr>
@@ -6998,7 +6906,7 @@
       </p:sp>
       <p:sp>
         <p:nvSpPr>
-          <p:cNvPr id="42" name="Rectangle 41"/>
+          <p:cNvPr id="40" name="Rectangle 39"/>
           <p:cNvSpPr/>
           <p:nvPr/>
         </p:nvSpPr>
@@ -7042,7 +6950,7 @@
       </p:sp>
       <p:sp>
         <p:nvSpPr>
-          <p:cNvPr id="43" name="Oval 42"/>
+          <p:cNvPr id="41" name="Oval 40"/>
           <p:cNvSpPr/>
           <p:nvPr/>
         </p:nvSpPr>
@@ -7086,7 +6994,7 @@
       </p:sp>
       <p:sp>
         <p:nvSpPr>
-          <p:cNvPr id="44" name="Oval 43"/>
+          <p:cNvPr id="42" name="Oval 41"/>
           <p:cNvSpPr/>
           <p:nvPr/>
         </p:nvSpPr>
@@ -7132,7 +7040,7 @@
       </p:sp>
       <p:sp>
         <p:nvSpPr>
-          <p:cNvPr id="45" name="Rounded Rectangle 44"/>
+          <p:cNvPr id="43" name="Rounded Rectangle 42"/>
           <p:cNvSpPr/>
           <p:nvPr/>
         </p:nvSpPr>
@@ -7180,7 +7088,7 @@
       </p:sp>
       <p:sp>
         <p:nvSpPr>
-          <p:cNvPr id="46" name="TextBox 45"/>
+          <p:cNvPr id="44" name="TextBox 43"/>
           <p:cNvSpPr txBox="1"/>
           <p:nvPr/>
         </p:nvSpPr>
@@ -7249,7 +7157,7 @@
       </p:sp>
       <p:sp>
         <p:nvSpPr>
-          <p:cNvPr id="47" name="Rectangle 46"/>
+          <p:cNvPr id="45" name="Rectangle 44"/>
           <p:cNvSpPr/>
           <p:nvPr/>
         </p:nvSpPr>
@@ -7293,7 +7201,7 @@
       </p:sp>
       <p:sp>
         <p:nvSpPr>
-          <p:cNvPr id="48" name="Oval 47"/>
+          <p:cNvPr id="46" name="Oval 45"/>
           <p:cNvSpPr/>
           <p:nvPr/>
         </p:nvSpPr>
@@ -7337,7 +7245,7 @@
       </p:sp>
       <p:sp>
         <p:nvSpPr>
-          <p:cNvPr id="49" name="Oval 48"/>
+          <p:cNvPr id="47" name="Oval 46"/>
           <p:cNvSpPr/>
           <p:nvPr/>
         </p:nvSpPr>
@@ -7383,7 +7291,7 @@
       </p:sp>
       <p:sp>
         <p:nvSpPr>
-          <p:cNvPr id="50" name="Rounded Rectangle 49"/>
+          <p:cNvPr id="48" name="Rounded Rectangle 47"/>
           <p:cNvSpPr/>
           <p:nvPr/>
         </p:nvSpPr>
@@ -7431,7 +7339,7 @@
       </p:sp>
       <p:sp>
         <p:nvSpPr>
-          <p:cNvPr id="51" name="TextBox 50"/>
+          <p:cNvPr id="49" name="TextBox 48"/>
           <p:cNvSpPr txBox="1"/>
           <p:nvPr/>
         </p:nvSpPr>
@@ -7510,7 +7418,7 @@
       </p:sp>
       <p:sp>
         <p:nvSpPr>
-          <p:cNvPr id="52" name="Rounded Rectangle 51"/>
+          <p:cNvPr id="50" name="Rounded Rectangle 49"/>
           <p:cNvSpPr/>
           <p:nvPr/>
         </p:nvSpPr>
@@ -7558,7 +7466,7 @@
       </p:sp>
       <p:sp>
         <p:nvSpPr>
-          <p:cNvPr id="53" name="TextBox 52"/>
+          <p:cNvPr id="51" name="TextBox 50"/>
           <p:cNvSpPr txBox="1"/>
           <p:nvPr/>
         </p:nvSpPr>
@@ -7637,7 +7545,7 @@
       </p:sp>
       <p:sp>
         <p:nvSpPr>
-          <p:cNvPr id="54" name="TextBox 53"/>
+          <p:cNvPr id="52" name="TextBox 51"/>
           <p:cNvSpPr txBox="1"/>
           <p:nvPr/>
         </p:nvSpPr>
@@ -7683,7 +7591,7 @@
       </p:sp>
       <p:sp>
         <p:nvSpPr>
-          <p:cNvPr id="55" name="Rounded Rectangle 54"/>
+          <p:cNvPr id="53" name="Rounded Rectangle 52"/>
           <p:cNvSpPr/>
           <p:nvPr/>
         </p:nvSpPr>
@@ -7732,7 +7640,7 @@
       </p:sp>
       <p:sp>
         <p:nvSpPr>
-          <p:cNvPr id="56" name="TextBox 55"/>
+          <p:cNvPr id="54" name="TextBox 53"/>
           <p:cNvSpPr txBox="1"/>
           <p:nvPr/>
         </p:nvSpPr>
@@ -7778,7 +7686,7 @@
       </p:sp>
       <p:sp>
         <p:nvSpPr>
-          <p:cNvPr id="57" name="TextBox 56"/>
+          <p:cNvPr id="55" name="TextBox 54"/>
           <p:cNvSpPr txBox="1"/>
           <p:nvPr/>
         </p:nvSpPr>
@@ -7834,7 +7742,7 @@
       </p:sp>
       <p:sp>
         <p:nvSpPr>
-          <p:cNvPr id="58" name="TextBox 57"/>
+          <p:cNvPr id="56" name="TextBox 55"/>
           <p:cNvSpPr txBox="1"/>
           <p:nvPr/>
         </p:nvSpPr>
@@ -7890,7 +7798,7 @@
       </p:sp>
       <p:sp>
         <p:nvSpPr>
-          <p:cNvPr id="59" name="TextBox 58"/>
+          <p:cNvPr id="57" name="TextBox 56"/>
           <p:cNvSpPr txBox="1"/>
           <p:nvPr/>
         </p:nvSpPr>
@@ -7946,7 +7854,7 @@
       </p:sp>
       <p:sp>
         <p:nvSpPr>
-          <p:cNvPr id="60" name="TextBox 59"/>
+          <p:cNvPr id="58" name="TextBox 57"/>
           <p:cNvSpPr txBox="1"/>
           <p:nvPr/>
         </p:nvSpPr>
@@ -8002,7 +7910,7 @@
       </p:sp>
       <p:sp>
         <p:nvSpPr>
-          <p:cNvPr id="61" name="Rounded Rectangle 60"/>
+          <p:cNvPr id="59" name="Rounded Rectangle 58"/>
           <p:cNvSpPr/>
           <p:nvPr/>
         </p:nvSpPr>
@@ -8051,7 +7959,7 @@
       </p:sp>
       <p:sp>
         <p:nvSpPr>
-          <p:cNvPr id="62" name="TextBox 61"/>
+          <p:cNvPr id="60" name="TextBox 59"/>
           <p:cNvSpPr txBox="1"/>
           <p:nvPr/>
         </p:nvSpPr>
@@ -8097,7 +8005,7 @@
       </p:sp>
       <p:sp>
         <p:nvSpPr>
-          <p:cNvPr id="63" name="TextBox 62"/>
+          <p:cNvPr id="61" name="TextBox 60"/>
           <p:cNvSpPr txBox="1"/>
           <p:nvPr/>
         </p:nvSpPr>
@@ -8143,7 +8051,7 @@
       </p:sp>
       <p:sp>
         <p:nvSpPr>
-          <p:cNvPr id="64" name="Rounded Rectangle 63"/>
+          <p:cNvPr id="62" name="Rounded Rectangle 61"/>
           <p:cNvSpPr/>
           <p:nvPr/>
         </p:nvSpPr>
@@ -8191,7 +8099,7 @@
       </p:sp>
       <p:sp>
         <p:nvSpPr>
-          <p:cNvPr id="65" name="Oval 64"/>
+          <p:cNvPr id="63" name="Oval 62"/>
           <p:cNvSpPr/>
           <p:nvPr/>
         </p:nvSpPr>
@@ -8235,7 +8143,7 @@
       </p:sp>
       <p:sp>
         <p:nvSpPr>
-          <p:cNvPr id="66" name="Oval 65"/>
+          <p:cNvPr id="64" name="Oval 63"/>
           <p:cNvSpPr/>
           <p:nvPr/>
         </p:nvSpPr>
@@ -8279,7 +8187,7 @@
       </p:sp>
       <p:sp>
         <p:nvSpPr>
-          <p:cNvPr id="67" name="Oval 66"/>
+          <p:cNvPr id="65" name="Oval 64"/>
           <p:cNvSpPr/>
           <p:nvPr/>
         </p:nvSpPr>
@@ -8323,7 +8231,7 @@
       </p:sp>
       <p:sp>
         <p:nvSpPr>
-          <p:cNvPr id="68" name="TextBox 67"/>
+          <p:cNvPr id="66" name="TextBox 65"/>
           <p:cNvSpPr txBox="1"/>
           <p:nvPr/>
         </p:nvSpPr>
@@ -8369,7 +8277,7 @@
       </p:sp>
       <p:sp>
         <p:nvSpPr>
-          <p:cNvPr id="69" name="TextBox 68"/>
+          <p:cNvPr id="67" name="TextBox 66"/>
           <p:cNvSpPr txBox="1"/>
           <p:nvPr/>
         </p:nvSpPr>
@@ -8415,7 +8323,7 @@
       </p:sp>
       <p:sp>
         <p:nvSpPr>
-          <p:cNvPr id="70" name="TextBox 69"/>
+          <p:cNvPr id="68" name="TextBox 67"/>
           <p:cNvSpPr txBox="1"/>
           <p:nvPr/>
         </p:nvSpPr>
@@ -8461,7 +8369,7 @@
       </p:sp>
       <p:sp>
         <p:nvSpPr>
-          <p:cNvPr id="71" name="Rounded Rectangle 70"/>
+          <p:cNvPr id="69" name="Rounded Rectangle 68"/>
           <p:cNvSpPr/>
           <p:nvPr/>
         </p:nvSpPr>
@@ -8509,7 +8417,7 @@
       </p:sp>
       <p:sp>
         <p:nvSpPr>
-          <p:cNvPr id="72" name="Oval 71"/>
+          <p:cNvPr id="70" name="Oval 69"/>
           <p:cNvSpPr/>
           <p:nvPr/>
         </p:nvSpPr>
@@ -8553,7 +8461,7 @@
       </p:sp>
       <p:sp>
         <p:nvSpPr>
-          <p:cNvPr id="73" name="Oval 72"/>
+          <p:cNvPr id="71" name="Oval 70"/>
           <p:cNvSpPr/>
           <p:nvPr/>
         </p:nvSpPr>
@@ -8597,7 +8505,7 @@
       </p:sp>
       <p:sp>
         <p:nvSpPr>
-          <p:cNvPr id="74" name="Oval 73"/>
+          <p:cNvPr id="72" name="Oval 71"/>
           <p:cNvSpPr/>
           <p:nvPr/>
         </p:nvSpPr>
@@ -8641,7 +8549,7 @@
       </p:sp>
       <p:sp>
         <p:nvSpPr>
-          <p:cNvPr id="75" name="TextBox 74"/>
+          <p:cNvPr id="73" name="TextBox 72"/>
           <p:cNvSpPr txBox="1"/>
           <p:nvPr/>
         </p:nvSpPr>
@@ -8687,7 +8595,7 @@
       </p:sp>
       <p:sp>
         <p:nvSpPr>
-          <p:cNvPr id="76" name="TextBox 75"/>
+          <p:cNvPr id="74" name="TextBox 73"/>
           <p:cNvSpPr txBox="1"/>
           <p:nvPr/>
         </p:nvSpPr>
@@ -8733,7 +8641,7 @@
       </p:sp>
       <p:sp>
         <p:nvSpPr>
-          <p:cNvPr id="77" name="TextBox 76"/>
+          <p:cNvPr id="75" name="TextBox 74"/>
           <p:cNvSpPr txBox="1"/>
           <p:nvPr/>
         </p:nvSpPr>
@@ -8779,7 +8687,7 @@
       </p:sp>
       <p:sp>
         <p:nvSpPr>
-          <p:cNvPr id="78" name="Rounded Rectangle 77"/>
+          <p:cNvPr id="76" name="Rounded Rectangle 75"/>
           <p:cNvSpPr/>
           <p:nvPr/>
         </p:nvSpPr>
@@ -8827,7 +8735,7 @@
       </p:sp>
       <p:sp>
         <p:nvSpPr>
-          <p:cNvPr id="79" name="Oval 78"/>
+          <p:cNvPr id="77" name="Oval 76"/>
           <p:cNvSpPr/>
           <p:nvPr/>
         </p:nvSpPr>
@@ -8871,7 +8779,7 @@
       </p:sp>
       <p:sp>
         <p:nvSpPr>
-          <p:cNvPr id="80" name="Oval 79"/>
+          <p:cNvPr id="78" name="Oval 77"/>
           <p:cNvSpPr/>
           <p:nvPr/>
         </p:nvSpPr>
@@ -8915,7 +8823,7 @@
       </p:sp>
       <p:sp>
         <p:nvSpPr>
-          <p:cNvPr id="81" name="Oval 80"/>
+          <p:cNvPr id="79" name="Oval 78"/>
           <p:cNvSpPr/>
           <p:nvPr/>
         </p:nvSpPr>
@@ -8959,7 +8867,7 @@
       </p:sp>
       <p:sp>
         <p:nvSpPr>
-          <p:cNvPr id="82" name="TextBox 81"/>
+          <p:cNvPr id="80" name="TextBox 79"/>
           <p:cNvSpPr txBox="1"/>
           <p:nvPr/>
         </p:nvSpPr>
@@ -9005,7 +8913,7 @@
       </p:sp>
       <p:sp>
         <p:nvSpPr>
-          <p:cNvPr id="83" name="TextBox 82"/>
+          <p:cNvPr id="81" name="TextBox 80"/>
           <p:cNvSpPr txBox="1"/>
           <p:nvPr/>
         </p:nvSpPr>
@@ -9051,7 +8959,7 @@
       </p:sp>
       <p:sp>
         <p:nvSpPr>
-          <p:cNvPr id="84" name="TextBox 83"/>
+          <p:cNvPr id="82" name="TextBox 81"/>
           <p:cNvSpPr txBox="1"/>
           <p:nvPr/>
         </p:nvSpPr>
@@ -9097,7 +9005,7 @@
       </p:sp>
       <p:sp>
         <p:nvSpPr>
-          <p:cNvPr id="85" name="Rounded Rectangle 84"/>
+          <p:cNvPr id="83" name="Rounded Rectangle 82"/>
           <p:cNvSpPr/>
           <p:nvPr/>
         </p:nvSpPr>
@@ -9145,7 +9053,7 @@
       </p:sp>
       <p:sp>
         <p:nvSpPr>
-          <p:cNvPr id="86" name="Oval 85"/>
+          <p:cNvPr id="84" name="Oval 83"/>
           <p:cNvSpPr/>
           <p:nvPr/>
         </p:nvSpPr>
@@ -9189,7 +9097,7 @@
       </p:sp>
       <p:sp>
         <p:nvSpPr>
-          <p:cNvPr id="87" name="Oval 86"/>
+          <p:cNvPr id="85" name="Oval 84"/>
           <p:cNvSpPr/>
           <p:nvPr/>
         </p:nvSpPr>
@@ -9233,7 +9141,7 @@
       </p:sp>
       <p:sp>
         <p:nvSpPr>
-          <p:cNvPr id="88" name="Oval 87"/>
+          <p:cNvPr id="86" name="Oval 85"/>
           <p:cNvSpPr/>
           <p:nvPr/>
         </p:nvSpPr>
@@ -9277,7 +9185,7 @@
       </p:sp>
       <p:sp>
         <p:nvSpPr>
-          <p:cNvPr id="89" name="TextBox 88"/>
+          <p:cNvPr id="87" name="TextBox 86"/>
           <p:cNvSpPr txBox="1"/>
           <p:nvPr/>
         </p:nvSpPr>
@@ -9323,7 +9231,7 @@
       </p:sp>
       <p:sp>
         <p:nvSpPr>
-          <p:cNvPr id="90" name="TextBox 89"/>
+          <p:cNvPr id="88" name="TextBox 87"/>
           <p:cNvSpPr txBox="1"/>
           <p:nvPr/>
         </p:nvSpPr>
@@ -9369,7 +9277,7 @@
       </p:sp>
       <p:sp>
         <p:nvSpPr>
-          <p:cNvPr id="91" name="TextBox 90"/>
+          <p:cNvPr id="89" name="TextBox 88"/>
           <p:cNvSpPr txBox="1"/>
           <p:nvPr/>
         </p:nvSpPr>
@@ -9415,7 +9323,7 @@
       </p:sp>
       <p:sp>
         <p:nvSpPr>
-          <p:cNvPr id="92" name="Rounded Rectangle 91"/>
+          <p:cNvPr id="90" name="Rounded Rectangle 89"/>
           <p:cNvSpPr/>
           <p:nvPr/>
         </p:nvSpPr>
@@ -9463,7 +9371,7 @@
       </p:sp>
       <p:sp>
         <p:nvSpPr>
-          <p:cNvPr id="93" name="TextBox 92"/>
+          <p:cNvPr id="91" name="TextBox 90"/>
           <p:cNvSpPr txBox="1"/>
           <p:nvPr/>
         </p:nvSpPr>
@@ -9509,7 +9417,7 @@
       </p:sp>
       <p:sp>
         <p:nvSpPr>
-          <p:cNvPr id="94" name="TextBox 93"/>
+          <p:cNvPr id="92" name="TextBox 91"/>
           <p:cNvSpPr txBox="1"/>
           <p:nvPr/>
         </p:nvSpPr>
@@ -9555,7 +9463,7 @@
       </p:sp>
       <p:sp>
         <p:nvSpPr>
-          <p:cNvPr id="95" name="Rounded Rectangle 94"/>
+          <p:cNvPr id="93" name="Rounded Rectangle 92"/>
           <p:cNvSpPr/>
           <p:nvPr/>
         </p:nvSpPr>
@@ -9603,7 +9511,7 @@
       </p:sp>
       <p:sp>
         <p:nvSpPr>
-          <p:cNvPr id="96" name="TextBox 95"/>
+          <p:cNvPr id="94" name="TextBox 93"/>
           <p:cNvSpPr txBox="1"/>
           <p:nvPr/>
         </p:nvSpPr>
@@ -9672,7 +9580,7 @@
       </p:sp>
       <p:sp>
         <p:nvSpPr>
-          <p:cNvPr id="97" name="Rounded Rectangle 96"/>
+          <p:cNvPr id="95" name="Rounded Rectangle 94"/>
           <p:cNvSpPr/>
           <p:nvPr/>
         </p:nvSpPr>
@@ -9720,7 +9628,7 @@
       </p:sp>
       <p:sp>
         <p:nvSpPr>
-          <p:cNvPr id="98" name="TextBox 97"/>
+          <p:cNvPr id="96" name="TextBox 95"/>
           <p:cNvSpPr txBox="1"/>
           <p:nvPr/>
         </p:nvSpPr>
@@ -9789,7 +9697,7 @@
       </p:sp>
       <p:sp>
         <p:nvSpPr>
-          <p:cNvPr id="99" name="Rounded Rectangle 98"/>
+          <p:cNvPr id="97" name="Rounded Rectangle 96"/>
           <p:cNvSpPr/>
           <p:nvPr/>
         </p:nvSpPr>
@@ -9837,7 +9745,7 @@
       </p:sp>
       <p:sp>
         <p:nvSpPr>
-          <p:cNvPr id="100" name="TextBox 99"/>
+          <p:cNvPr id="98" name="TextBox 97"/>
           <p:cNvSpPr txBox="1"/>
           <p:nvPr/>
         </p:nvSpPr>
@@ -9906,7 +9814,7 @@
       </p:sp>
       <p:cxnSp>
         <p:nvCxnSpPr>
-          <p:cNvPr id="101" name="Connector 100"/>
+          <p:cNvPr id="99" name="Connector 98"/>
           <p:cNvCxnSpPr/>
           <p:nvPr/>
         </p:nvCxnSpPr>
@@ -9929,7 +9837,7 @@
       </p:cxnSp>
       <p:cxnSp>
         <p:nvCxnSpPr>
-          <p:cNvPr id="102" name="Connector 101"/>
+          <p:cNvPr id="100" name="Connector 99"/>
           <p:cNvCxnSpPr/>
           <p:nvPr/>
         </p:nvCxnSpPr>
@@ -9952,7 +9860,7 @@
       </p:cxnSp>
       <p:cxnSp>
         <p:nvCxnSpPr>
-          <p:cNvPr id="103" name="Connector 102"/>
+          <p:cNvPr id="101" name="Connector 100"/>
           <p:cNvCxnSpPr/>
           <p:nvPr/>
         </p:nvCxnSpPr>
@@ -9975,7 +9883,7 @@
       </p:cxnSp>
       <p:sp>
         <p:nvSpPr>
-          <p:cNvPr id="104" name="TextBox 103"/>
+          <p:cNvPr id="102" name="TextBox 101"/>
           <p:cNvSpPr txBox="1"/>
           <p:nvPr/>
         </p:nvSpPr>
@@ -10031,7 +9939,7 @@
       </p:sp>
       <p:sp>
         <p:nvSpPr>
-          <p:cNvPr id="105" name="Rounded Rectangle 104"/>
+          <p:cNvPr id="103" name="Rounded Rectangle 102"/>
           <p:cNvSpPr/>
           <p:nvPr/>
         </p:nvSpPr>
@@ -10079,7 +9987,7 @@
       </p:sp>
       <p:sp>
         <p:nvSpPr>
-          <p:cNvPr id="106" name="TextBox 105"/>
+          <p:cNvPr id="104" name="TextBox 103"/>
           <p:cNvSpPr txBox="1"/>
           <p:nvPr/>
         </p:nvSpPr>
@@ -10125,7 +10033,7 @@
       </p:sp>
       <p:sp>
         <p:nvSpPr>
-          <p:cNvPr id="107" name="TextBox 106"/>
+          <p:cNvPr id="105" name="TextBox 104"/>
           <p:cNvSpPr txBox="1"/>
           <p:nvPr/>
         </p:nvSpPr>
@@ -10171,7 +10079,7 @@
       </p:sp>
       <p:sp>
         <p:nvSpPr>
-          <p:cNvPr id="108" name="Rounded Rectangle 107"/>
+          <p:cNvPr id="106" name="Rounded Rectangle 105"/>
           <p:cNvSpPr/>
           <p:nvPr/>
         </p:nvSpPr>
@@ -10218,7 +10126,7 @@
       </p:sp>
       <p:sp>
         <p:nvSpPr>
-          <p:cNvPr id="109" name="TextBox 108"/>
+          <p:cNvPr id="107" name="TextBox 106"/>
           <p:cNvSpPr txBox="1"/>
           <p:nvPr/>
         </p:nvSpPr>
@@ -10264,7 +10172,7 @@
       </p:sp>
       <p:sp>
         <p:nvSpPr>
-          <p:cNvPr id="110" name="Rounded Rectangle 109"/>
+          <p:cNvPr id="108" name="Rounded Rectangle 107"/>
           <p:cNvSpPr/>
           <p:nvPr/>
         </p:nvSpPr>
@@ -10312,7 +10220,7 @@
       </p:sp>
       <p:sp>
         <p:nvSpPr>
-          <p:cNvPr id="111" name="TextBox 110"/>
+          <p:cNvPr id="109" name="TextBox 108"/>
           <p:cNvSpPr txBox="1"/>
           <p:nvPr/>
         </p:nvSpPr>
@@ -10381,7 +10289,7 @@
       </p:sp>
       <p:sp>
         <p:nvSpPr>
-          <p:cNvPr id="112" name="Rounded Rectangle 111"/>
+          <p:cNvPr id="110" name="Rounded Rectangle 109"/>
           <p:cNvSpPr/>
           <p:nvPr/>
         </p:nvSpPr>
@@ -10429,7 +10337,7 @@
       </p:sp>
       <p:sp>
         <p:nvSpPr>
-          <p:cNvPr id="113" name="TextBox 112"/>
+          <p:cNvPr id="111" name="TextBox 110"/>
           <p:cNvSpPr txBox="1"/>
           <p:nvPr/>
         </p:nvSpPr>
@@ -10498,7 +10406,7 @@
       </p:sp>
       <p:sp>
         <p:nvSpPr>
-          <p:cNvPr id="114" name="Rounded Rectangle 113"/>
+          <p:cNvPr id="112" name="Rounded Rectangle 111"/>
           <p:cNvSpPr/>
           <p:nvPr/>
         </p:nvSpPr>
@@ -10546,7 +10454,7 @@
       </p:sp>
       <p:sp>
         <p:nvSpPr>
-          <p:cNvPr id="115" name="TextBox 114"/>
+          <p:cNvPr id="113" name="TextBox 112"/>
           <p:cNvSpPr txBox="1"/>
           <p:nvPr/>
         </p:nvSpPr>
@@ -10592,7 +10500,7 @@
       </p:sp>
       <p:sp>
         <p:nvSpPr>
-          <p:cNvPr id="116" name="Rounded Rectangle 115"/>
+          <p:cNvPr id="114" name="Rounded Rectangle 113"/>
           <p:cNvSpPr/>
           <p:nvPr/>
         </p:nvSpPr>
@@ -10640,7 +10548,7 @@
       </p:sp>
       <p:sp>
         <p:nvSpPr>
-          <p:cNvPr id="117" name="TextBox 116"/>
+          <p:cNvPr id="115" name="TextBox 114"/>
           <p:cNvSpPr txBox="1"/>
           <p:nvPr/>
         </p:nvSpPr>
@@ -10686,7 +10594,7 @@
       </p:sp>
       <p:sp>
         <p:nvSpPr>
-          <p:cNvPr id="118" name="Rounded Rectangle 117"/>
+          <p:cNvPr id="116" name="Rounded Rectangle 115"/>
           <p:cNvSpPr/>
           <p:nvPr/>
         </p:nvSpPr>
@@ -10734,7 +10642,7 @@
       </p:sp>
       <p:sp>
         <p:nvSpPr>
-          <p:cNvPr id="119" name="TextBox 118"/>
+          <p:cNvPr id="117" name="TextBox 116"/>
           <p:cNvSpPr txBox="1"/>
           <p:nvPr/>
         </p:nvSpPr>
@@ -10780,7 +10688,7 @@
       </p:sp>
       <p:sp>
         <p:nvSpPr>
-          <p:cNvPr id="120" name="Rounded Rectangle 119"/>
+          <p:cNvPr id="118" name="Rounded Rectangle 117"/>
           <p:cNvSpPr/>
           <p:nvPr/>
         </p:nvSpPr>
@@ -10828,7 +10736,7 @@
       </p:sp>
       <p:sp>
         <p:nvSpPr>
-          <p:cNvPr id="121" name="TextBox 120"/>
+          <p:cNvPr id="119" name="TextBox 118"/>
           <p:cNvSpPr txBox="1"/>
           <p:nvPr/>
         </p:nvSpPr>
@@ -10874,7 +10782,7 @@
       </p:sp>
       <p:sp>
         <p:nvSpPr>
-          <p:cNvPr id="122" name="Rounded Rectangle 121"/>
+          <p:cNvPr id="120" name="Rounded Rectangle 119"/>
           <p:cNvSpPr/>
           <p:nvPr/>
         </p:nvSpPr>
@@ -10922,7 +10830,7 @@
       </p:sp>
       <p:sp>
         <p:nvSpPr>
-          <p:cNvPr id="123" name="TextBox 122"/>
+          <p:cNvPr id="121" name="TextBox 120"/>
           <p:cNvSpPr txBox="1"/>
           <p:nvPr/>
         </p:nvSpPr>
@@ -10968,7 +10876,7 @@
       </p:sp>
       <p:sp>
         <p:nvSpPr>
-          <p:cNvPr id="124" name="Rounded Rectangle 123"/>
+          <p:cNvPr id="122" name="Rounded Rectangle 121"/>
           <p:cNvSpPr/>
           <p:nvPr/>
         </p:nvSpPr>
@@ -11016,7 +10924,7 @@
       </p:sp>
       <p:sp>
         <p:nvSpPr>
-          <p:cNvPr id="125" name="TextBox 124"/>
+          <p:cNvPr id="123" name="TextBox 122"/>
           <p:cNvSpPr txBox="1"/>
           <p:nvPr/>
         </p:nvSpPr>
@@ -11062,7 +10970,7 @@
       </p:sp>
       <p:sp>
         <p:nvSpPr>
-          <p:cNvPr id="126" name="TextBox 125"/>
+          <p:cNvPr id="124" name="TextBox 123"/>
           <p:cNvSpPr txBox="1"/>
           <p:nvPr/>
         </p:nvSpPr>
@@ -11108,7 +11016,7 @@
       </p:sp>
       <p:cxnSp>
         <p:nvCxnSpPr>
-          <p:cNvPr id="127" name="Connector 126"/>
+          <p:cNvPr id="125" name="Connector 124"/>
           <p:cNvCxnSpPr/>
           <p:nvPr/>
         </p:nvCxnSpPr>
@@ -11131,7 +11039,7 @@
       </p:cxnSp>
       <p:sp>
         <p:nvSpPr>
-          <p:cNvPr id="128" name="TextBox 127"/>
+          <p:cNvPr id="126" name="TextBox 125"/>
           <p:cNvSpPr txBox="1"/>
           <p:nvPr/>
         </p:nvSpPr>
@@ -11177,7 +11085,7 @@
       </p:sp>
       <p:sp>
         <p:nvSpPr>
-          <p:cNvPr id="129" name="TextBox 128"/>
+          <p:cNvPr id="127" name="TextBox 126"/>
           <p:cNvSpPr txBox="1"/>
           <p:nvPr/>
         </p:nvSpPr>
@@ -11223,7 +11131,7 @@
       </p:sp>
       <p:cxnSp>
         <p:nvCxnSpPr>
-          <p:cNvPr id="130" name="Connector 129"/>
+          <p:cNvPr id="128" name="Connector 127"/>
           <p:cNvCxnSpPr/>
           <p:nvPr/>
         </p:nvCxnSpPr>
@@ -11246,7 +11154,7 @@
       </p:cxnSp>
       <p:sp>
         <p:nvSpPr>
-          <p:cNvPr id="131" name="TextBox 130"/>
+          <p:cNvPr id="129" name="TextBox 128"/>
           <p:cNvSpPr txBox="1"/>
           <p:nvPr/>
         </p:nvSpPr>
@@ -11292,7 +11200,7 @@
       </p:sp>
       <p:cxnSp>
         <p:nvCxnSpPr>
-          <p:cNvPr id="132" name="Connector 131"/>
+          <p:cNvPr id="130" name="Connector 129"/>
           <p:cNvCxnSpPr/>
           <p:nvPr/>
         </p:nvCxnSpPr>
@@ -11316,7 +11224,7 @@
       </p:cxnSp>
       <p:sp>
         <p:nvSpPr>
-          <p:cNvPr id="133" name="TextBox 132"/>
+          <p:cNvPr id="131" name="TextBox 130"/>
           <p:cNvSpPr txBox="1"/>
           <p:nvPr/>
         </p:nvSpPr>
@@ -11362,7 +11270,7 @@
       </p:sp>
       <p:cxnSp>
         <p:nvCxnSpPr>
-          <p:cNvPr id="134" name="Connector 133"/>
+          <p:cNvPr id="132" name="Connector 131"/>
           <p:cNvCxnSpPr/>
           <p:nvPr/>
         </p:nvCxnSpPr>
@@ -11386,7 +11294,7 @@
       </p:cxnSp>
       <p:sp>
         <p:nvSpPr>
-          <p:cNvPr id="135" name="TextBox 134"/>
+          <p:cNvPr id="133" name="TextBox 132"/>
           <p:cNvSpPr txBox="1"/>
           <p:nvPr/>
         </p:nvSpPr>
@@ -11432,7 +11340,7 @@
       </p:sp>
       <p:cxnSp>
         <p:nvCxnSpPr>
-          <p:cNvPr id="136" name="Connector 135"/>
+          <p:cNvPr id="134" name="Connector 133"/>
           <p:cNvCxnSpPr/>
           <p:nvPr/>
         </p:nvCxnSpPr>
@@ -11455,7 +11363,7 @@
       </p:cxnSp>
       <p:cxnSp>
         <p:nvCxnSpPr>
-          <p:cNvPr id="137" name="Connector 136"/>
+          <p:cNvPr id="135" name="Connector 134"/>
           <p:cNvCxnSpPr/>
           <p:nvPr/>
         </p:nvCxnSpPr>
@@ -11479,7 +11387,7 @@
       </p:cxnSp>
       <p:sp>
         <p:nvSpPr>
-          <p:cNvPr id="138" name="TextBox 137"/>
+          <p:cNvPr id="136" name="TextBox 135"/>
           <p:cNvSpPr txBox="1"/>
           <p:nvPr/>
         </p:nvSpPr>
@@ -11525,7 +11433,7 @@
       </p:sp>
       <p:sp>
         <p:nvSpPr>
-          <p:cNvPr id="139" name="Rounded Rectangle 138"/>
+          <p:cNvPr id="137" name="Rounded Rectangle 136"/>
           <p:cNvSpPr/>
           <p:nvPr/>
         </p:nvSpPr>
@@ -11573,7 +11481,7 @@
       </p:sp>
       <p:sp>
         <p:nvSpPr>
-          <p:cNvPr id="140" name="TextBox 139"/>
+          <p:cNvPr id="138" name="TextBox 137"/>
           <p:cNvSpPr txBox="1"/>
           <p:nvPr/>
         </p:nvSpPr>
@@ -11619,7 +11527,7 @@
       </p:sp>
       <p:sp>
         <p:nvSpPr>
-          <p:cNvPr id="141" name="Rounded Rectangle 140"/>
+          <p:cNvPr id="139" name="Rounded Rectangle 138"/>
           <p:cNvSpPr/>
           <p:nvPr/>
         </p:nvSpPr>
@@ -11673,7 +11581,7 @@
       </p:sp>
       <p:sp>
         <p:nvSpPr>
-          <p:cNvPr id="142" name="Rounded Rectangle 141"/>
+          <p:cNvPr id="140" name="Rounded Rectangle 139"/>
           <p:cNvSpPr/>
           <p:nvPr/>
         </p:nvSpPr>
@@ -11719,7 +11627,7 @@
       </p:sp>
       <p:sp>
         <p:nvSpPr>
-          <p:cNvPr id="143" name="TextBox 142"/>
+          <p:cNvPr id="141" name="TextBox 140"/>
           <p:cNvSpPr txBox="1"/>
           <p:nvPr/>
         </p:nvSpPr>
@@ -11765,7 +11673,7 @@
       </p:sp>
       <p:sp>
         <p:nvSpPr>
-          <p:cNvPr id="144" name="TextBox 143"/>
+          <p:cNvPr id="142" name="TextBox 141"/>
           <p:cNvSpPr txBox="1"/>
           <p:nvPr/>
         </p:nvSpPr>
@@ -11811,7 +11719,7 @@
       </p:sp>
       <p:sp>
         <p:nvSpPr>
-          <p:cNvPr id="145" name="TextBox 144"/>
+          <p:cNvPr id="143" name="TextBox 142"/>
           <p:cNvSpPr txBox="1"/>
           <p:nvPr/>
         </p:nvSpPr>
@@ -11857,7 +11765,7 @@
       </p:sp>
       <p:sp>
         <p:nvSpPr>
-          <p:cNvPr id="146" name="Rounded Rectangle 145"/>
+          <p:cNvPr id="144" name="Rounded Rectangle 143"/>
           <p:cNvSpPr/>
           <p:nvPr/>
         </p:nvSpPr>
@@ -11905,7 +11813,7 @@
       </p:sp>
       <p:sp>
         <p:nvSpPr>
-          <p:cNvPr id="147" name="TextBox 146"/>
+          <p:cNvPr id="145" name="TextBox 144"/>
           <p:cNvSpPr txBox="1"/>
           <p:nvPr/>
         </p:nvSpPr>
@@ -11951,7 +11859,7 @@
       </p:sp>
       <p:sp>
         <p:nvSpPr>
-          <p:cNvPr id="148" name="TextBox 147"/>
+          <p:cNvPr id="146" name="TextBox 145"/>
           <p:cNvSpPr txBox="1"/>
           <p:nvPr/>
         </p:nvSpPr>
@@ -11997,7 +11905,7 @@
       </p:sp>
       <p:sp>
         <p:nvSpPr>
-          <p:cNvPr id="149" name="Rounded Rectangle 148"/>
+          <p:cNvPr id="147" name="Rounded Rectangle 146"/>
           <p:cNvSpPr/>
           <p:nvPr/>
         </p:nvSpPr>
@@ -12051,7 +11959,7 @@
       </p:sp>
       <p:sp>
         <p:nvSpPr>
-          <p:cNvPr id="150" name="Rounded Rectangle 149"/>
+          <p:cNvPr id="148" name="Rounded Rectangle 147"/>
           <p:cNvSpPr/>
           <p:nvPr/>
         </p:nvSpPr>
@@ -12097,7 +12005,7 @@
       </p:sp>
       <p:sp>
         <p:nvSpPr>
-          <p:cNvPr id="151" name="TextBox 150"/>
+          <p:cNvPr id="149" name="TextBox 148"/>
           <p:cNvSpPr txBox="1"/>
           <p:nvPr/>
         </p:nvSpPr>
@@ -12143,7 +12051,7 @@
       </p:sp>
       <p:sp>
         <p:nvSpPr>
-          <p:cNvPr id="152" name="TextBox 151"/>
+          <p:cNvPr id="150" name="TextBox 149"/>
           <p:cNvSpPr txBox="1"/>
           <p:nvPr/>
         </p:nvSpPr>
@@ -12189,7 +12097,7 @@
       </p:sp>
       <p:sp>
         <p:nvSpPr>
-          <p:cNvPr id="153" name="TextBox 152"/>
+          <p:cNvPr id="151" name="TextBox 150"/>
           <p:cNvSpPr txBox="1"/>
           <p:nvPr/>
         </p:nvSpPr>
@@ -12235,7 +12143,7 @@
       </p:sp>
       <p:sp>
         <p:nvSpPr>
-          <p:cNvPr id="154" name="Rounded Rectangle 153"/>
+          <p:cNvPr id="152" name="Rounded Rectangle 151"/>
           <p:cNvSpPr/>
           <p:nvPr/>
         </p:nvSpPr>
@@ -12283,7 +12191,7 @@
       </p:sp>
       <p:sp>
         <p:nvSpPr>
-          <p:cNvPr id="155" name="TextBox 154"/>
+          <p:cNvPr id="153" name="TextBox 152"/>
           <p:cNvSpPr txBox="1"/>
           <p:nvPr/>
         </p:nvSpPr>
@@ -12329,7 +12237,7 @@
       </p:sp>
       <p:sp>
         <p:nvSpPr>
-          <p:cNvPr id="156" name="TextBox 155"/>
+          <p:cNvPr id="154" name="TextBox 153"/>
           <p:cNvSpPr txBox="1"/>
           <p:nvPr/>
         </p:nvSpPr>
@@ -12375,7 +12283,7 @@
       </p:sp>
       <p:sp>
         <p:nvSpPr>
-          <p:cNvPr id="157" name="Rounded Rectangle 156"/>
+          <p:cNvPr id="155" name="Rounded Rectangle 154"/>
           <p:cNvSpPr/>
           <p:nvPr/>
         </p:nvSpPr>
@@ -12429,7 +12337,7 @@
       </p:sp>
       <p:sp>
         <p:nvSpPr>
-          <p:cNvPr id="158" name="Rounded Rectangle 157"/>
+          <p:cNvPr id="156" name="Rounded Rectangle 155"/>
           <p:cNvSpPr/>
           <p:nvPr/>
         </p:nvSpPr>
@@ -12475,7 +12383,7 @@
       </p:sp>
       <p:sp>
         <p:nvSpPr>
-          <p:cNvPr id="159" name="TextBox 158"/>
+          <p:cNvPr id="157" name="TextBox 156"/>
           <p:cNvSpPr txBox="1"/>
           <p:nvPr/>
         </p:nvSpPr>
@@ -12521,7 +12429,7 @@
       </p:sp>
       <p:sp>
         <p:nvSpPr>
-          <p:cNvPr id="160" name="TextBox 159"/>
+          <p:cNvPr id="158" name="TextBox 157"/>
           <p:cNvSpPr txBox="1"/>
           <p:nvPr/>
         </p:nvSpPr>
@@ -12567,7 +12475,7 @@
       </p:sp>
       <p:sp>
         <p:nvSpPr>
-          <p:cNvPr id="161" name="TextBox 160"/>
+          <p:cNvPr id="159" name="TextBox 158"/>
           <p:cNvSpPr txBox="1"/>
           <p:nvPr/>
         </p:nvSpPr>
@@ -12613,7 +12521,7 @@
       </p:sp>
       <p:sp>
         <p:nvSpPr>
-          <p:cNvPr id="162" name="Rounded Rectangle 161"/>
+          <p:cNvPr id="160" name="Rounded Rectangle 159"/>
           <p:cNvSpPr/>
           <p:nvPr/>
         </p:nvSpPr>
@@ -12661,7 +12569,7 @@
       </p:sp>
       <p:sp>
         <p:nvSpPr>
-          <p:cNvPr id="163" name="TextBox 162"/>
+          <p:cNvPr id="161" name="TextBox 160"/>
           <p:cNvSpPr txBox="1"/>
           <p:nvPr/>
         </p:nvSpPr>
@@ -12707,7 +12615,7 @@
       </p:sp>
       <p:sp>
         <p:nvSpPr>
-          <p:cNvPr id="164" name="TextBox 163"/>
+          <p:cNvPr id="162" name="TextBox 161"/>
           <p:cNvSpPr txBox="1"/>
           <p:nvPr/>
         </p:nvSpPr>
@@ -12753,7 +12661,7 @@
       </p:sp>
       <p:sp>
         <p:nvSpPr>
-          <p:cNvPr id="165" name="Rounded Rectangle 164"/>
+          <p:cNvPr id="163" name="Rounded Rectangle 162"/>
           <p:cNvSpPr/>
           <p:nvPr/>
         </p:nvSpPr>
@@ -12807,7 +12715,7 @@
       </p:sp>
       <p:sp>
         <p:nvSpPr>
-          <p:cNvPr id="166" name="Rounded Rectangle 165"/>
+          <p:cNvPr id="164" name="Rounded Rectangle 163"/>
           <p:cNvSpPr/>
           <p:nvPr/>
         </p:nvSpPr>
@@ -12853,7 +12761,7 @@
       </p:sp>
       <p:sp>
         <p:nvSpPr>
-          <p:cNvPr id="167" name="TextBox 166"/>
+          <p:cNvPr id="165" name="TextBox 164"/>
           <p:cNvSpPr txBox="1"/>
           <p:nvPr/>
         </p:nvSpPr>
@@ -12899,7 +12807,7 @@
       </p:sp>
       <p:sp>
         <p:nvSpPr>
-          <p:cNvPr id="168" name="TextBox 167"/>
+          <p:cNvPr id="166" name="TextBox 165"/>
           <p:cNvSpPr txBox="1"/>
           <p:nvPr/>
         </p:nvSpPr>
@@ -12945,7 +12853,7 @@
       </p:sp>
       <p:sp>
         <p:nvSpPr>
-          <p:cNvPr id="169" name="TextBox 168"/>
+          <p:cNvPr id="167" name="TextBox 166"/>
           <p:cNvSpPr txBox="1"/>
           <p:nvPr/>
         </p:nvSpPr>
@@ -12991,7 +12899,7 @@
       </p:sp>
       <p:sp>
         <p:nvSpPr>
-          <p:cNvPr id="170" name="Rounded Rectangle 169"/>
+          <p:cNvPr id="168" name="Rounded Rectangle 167"/>
           <p:cNvSpPr/>
           <p:nvPr/>
         </p:nvSpPr>
@@ -13039,7 +12947,7 @@
       </p:sp>
       <p:sp>
         <p:nvSpPr>
-          <p:cNvPr id="171" name="TextBox 170"/>
+          <p:cNvPr id="169" name="TextBox 168"/>
           <p:cNvSpPr txBox="1"/>
           <p:nvPr/>
         </p:nvSpPr>
@@ -13085,7 +12993,7 @@
       </p:sp>
       <p:sp>
         <p:nvSpPr>
-          <p:cNvPr id="172" name="TextBox 171"/>
+          <p:cNvPr id="170" name="TextBox 169"/>
           <p:cNvSpPr txBox="1"/>
           <p:nvPr/>
         </p:nvSpPr>
@@ -13131,7 +13039,7 @@
       </p:sp>
       <p:sp>
         <p:nvSpPr>
-          <p:cNvPr id="173" name="Rounded Rectangle 172"/>
+          <p:cNvPr id="171" name="Rounded Rectangle 170"/>
           <p:cNvSpPr/>
           <p:nvPr/>
         </p:nvSpPr>
@@ -13185,7 +13093,7 @@
       </p:sp>
       <p:sp>
         <p:nvSpPr>
-          <p:cNvPr id="174" name="Rounded Rectangle 173"/>
+          <p:cNvPr id="172" name="Rounded Rectangle 171"/>
           <p:cNvSpPr/>
           <p:nvPr/>
         </p:nvSpPr>
@@ -13231,7 +13139,7 @@
       </p:sp>
       <p:sp>
         <p:nvSpPr>
-          <p:cNvPr id="175" name="TextBox 174"/>
+          <p:cNvPr id="173" name="TextBox 172"/>
           <p:cNvSpPr txBox="1"/>
           <p:nvPr/>
         </p:nvSpPr>
@@ -13277,7 +13185,7 @@
       </p:sp>
       <p:sp>
         <p:nvSpPr>
-          <p:cNvPr id="176" name="TextBox 175"/>
+          <p:cNvPr id="174" name="TextBox 173"/>
           <p:cNvSpPr txBox="1"/>
           <p:nvPr/>
         </p:nvSpPr>
@@ -13323,7 +13231,7 @@
       </p:sp>
       <p:sp>
         <p:nvSpPr>
-          <p:cNvPr id="177" name="TextBox 176"/>
+          <p:cNvPr id="175" name="TextBox 174"/>
           <p:cNvSpPr txBox="1"/>
           <p:nvPr/>
         </p:nvSpPr>
@@ -13369,7 +13277,7 @@
       </p:sp>
       <p:sp>
         <p:nvSpPr>
-          <p:cNvPr id="178" name="Rounded Rectangle 177"/>
+          <p:cNvPr id="176" name="Rounded Rectangle 175"/>
           <p:cNvSpPr/>
           <p:nvPr/>
         </p:nvSpPr>
@@ -13417,7 +13325,7 @@
       </p:sp>
       <p:sp>
         <p:nvSpPr>
-          <p:cNvPr id="179" name="TextBox 178"/>
+          <p:cNvPr id="177" name="TextBox 176"/>
           <p:cNvSpPr txBox="1"/>
           <p:nvPr/>
         </p:nvSpPr>
@@ -13463,7 +13371,7 @@
       </p:sp>
       <p:sp>
         <p:nvSpPr>
-          <p:cNvPr id="180" name="TextBox 179"/>
+          <p:cNvPr id="178" name="TextBox 177"/>
           <p:cNvSpPr txBox="1"/>
           <p:nvPr/>
         </p:nvSpPr>
@@ -13509,7 +13417,7 @@
       </p:sp>
       <p:sp>
         <p:nvSpPr>
-          <p:cNvPr id="181" name="Rounded Rectangle 180"/>
+          <p:cNvPr id="179" name="Rounded Rectangle 178"/>
           <p:cNvSpPr/>
           <p:nvPr/>
         </p:nvSpPr>
@@ -13563,7 +13471,7 @@
       </p:sp>
       <p:sp>
         <p:nvSpPr>
-          <p:cNvPr id="182" name="Rounded Rectangle 181"/>
+          <p:cNvPr id="180" name="Rounded Rectangle 179"/>
           <p:cNvSpPr/>
           <p:nvPr/>
         </p:nvSpPr>
@@ -13609,7 +13517,7 @@
       </p:sp>
       <p:sp>
         <p:nvSpPr>
-          <p:cNvPr id="183" name="TextBox 182"/>
+          <p:cNvPr id="181" name="TextBox 180"/>
           <p:cNvSpPr txBox="1"/>
           <p:nvPr/>
         </p:nvSpPr>
@@ -13655,7 +13563,7 @@
       </p:sp>
       <p:sp>
         <p:nvSpPr>
-          <p:cNvPr id="184" name="TextBox 183"/>
+          <p:cNvPr id="182" name="TextBox 181"/>
           <p:cNvSpPr txBox="1"/>
           <p:nvPr/>
         </p:nvSpPr>
@@ -13724,7 +13632,7 @@
       </p:sp>
       <p:sp>
         <p:nvSpPr>
-          <p:cNvPr id="185" name="Rounded Rectangle 184"/>
+          <p:cNvPr id="183" name="Rounded Rectangle 182"/>
           <p:cNvSpPr/>
           <p:nvPr/>
         </p:nvSpPr>
@@ -13772,7 +13680,7 @@
       </p:sp>
       <p:sp>
         <p:nvSpPr>
-          <p:cNvPr id="186" name="TextBox 185"/>
+          <p:cNvPr id="184" name="TextBox 183"/>
           <p:cNvSpPr txBox="1"/>
           <p:nvPr/>
         </p:nvSpPr>
@@ -13818,7 +13726,7 @@
       </p:sp>
       <p:sp>
         <p:nvSpPr>
-          <p:cNvPr id="187" name="TextBox 186"/>
+          <p:cNvPr id="185" name="TextBox 184"/>
           <p:cNvSpPr txBox="1"/>
           <p:nvPr/>
         </p:nvSpPr>
@@ -13864,7 +13772,7 @@
       </p:sp>
       <p:cxnSp>
         <p:nvCxnSpPr>
-          <p:cNvPr id="188" name="Connector 187"/>
+          <p:cNvPr id="186" name="Connector 185"/>
           <p:cNvCxnSpPr/>
           <p:nvPr/>
         </p:nvCxnSpPr>
@@ -13888,7 +13796,7 @@
       </p:cxnSp>
       <p:cxnSp>
         <p:nvCxnSpPr>
-          <p:cNvPr id="189" name="Connector 188"/>
+          <p:cNvPr id="187" name="Connector 186"/>
           <p:cNvCxnSpPr/>
           <p:nvPr/>
         </p:nvCxnSpPr>
@@ -13912,7 +13820,7 @@
       </p:cxnSp>
       <p:cxnSp>
         <p:nvCxnSpPr>
-          <p:cNvPr id="190" name="Connector 189"/>
+          <p:cNvPr id="188" name="Connector 187"/>
           <p:cNvCxnSpPr/>
           <p:nvPr/>
         </p:nvCxnSpPr>
@@ -13935,7 +13843,7 @@
       </p:cxnSp>
       <p:cxnSp>
         <p:nvCxnSpPr>
-          <p:cNvPr id="191" name="Connector 190"/>
+          <p:cNvPr id="189" name="Connector 188"/>
           <p:cNvCxnSpPr/>
           <p:nvPr/>
         </p:nvCxnSpPr>
@@ -13958,7 +13866,7 @@
       </p:cxnSp>
       <p:cxnSp>
         <p:nvCxnSpPr>
-          <p:cNvPr id="192" name="Connector 191"/>
+          <p:cNvPr id="190" name="Connector 189"/>
           <p:cNvCxnSpPr/>
           <p:nvPr/>
         </p:nvCxnSpPr>
@@ -13982,7 +13890,7 @@
       </p:cxnSp>
       <p:sp>
         <p:nvSpPr>
-          <p:cNvPr id="193" name="TextBox 192"/>
+          <p:cNvPr id="191" name="TextBox 190"/>
           <p:cNvSpPr txBox="1"/>
           <p:nvPr/>
         </p:nvSpPr>
@@ -14028,7 +13936,7 @@
       </p:sp>
       <p:sp>
         <p:nvSpPr>
-          <p:cNvPr id="194" name="TextBox 193"/>
+          <p:cNvPr id="192" name="TextBox 191"/>
           <p:cNvSpPr txBox="1"/>
           <p:nvPr/>
         </p:nvSpPr>
@@ -14074,7 +13982,7 @@
       </p:sp>
       <p:cxnSp>
         <p:nvCxnSpPr>
-          <p:cNvPr id="195" name="Connector 194"/>
+          <p:cNvPr id="193" name="Connector 192"/>
           <p:cNvCxnSpPr/>
           <p:nvPr/>
         </p:nvCxnSpPr>
@@ -14097,7 +14005,7 @@
       </p:cxnSp>
       <p:sp>
         <p:nvSpPr>
-          <p:cNvPr id="196" name="TextBox 195"/>
+          <p:cNvPr id="194" name="TextBox 193"/>
           <p:cNvSpPr txBox="1"/>
           <p:nvPr/>
         </p:nvSpPr>
@@ -14166,7 +14074,7 @@
       </p:sp>
       <p:sp>
         <p:nvSpPr>
-          <p:cNvPr id="197" name="Rounded Rectangle 196"/>
+          <p:cNvPr id="195" name="Rounded Rectangle 194"/>
           <p:cNvSpPr/>
           <p:nvPr/>
         </p:nvSpPr>
@@ -14214,7 +14122,7 @@
       </p:sp>
       <p:sp>
         <p:nvSpPr>
-          <p:cNvPr id="198" name="TextBox 197"/>
+          <p:cNvPr id="196" name="TextBox 195"/>
           <p:cNvSpPr txBox="1"/>
           <p:nvPr/>
         </p:nvSpPr>
@@ -14260,7 +14168,7 @@
       </p:sp>
       <p:sp>
         <p:nvSpPr>
-          <p:cNvPr id="199" name="TextBox 198"/>
+          <p:cNvPr id="197" name="TextBox 196"/>
           <p:cNvSpPr txBox="1"/>
           <p:nvPr/>
         </p:nvSpPr>
@@ -14316,7 +14224,7 @@
       </p:sp>
       <p:sp>
         <p:nvSpPr>
-          <p:cNvPr id="200" name="TextBox 199"/>
+          <p:cNvPr id="198" name="TextBox 197"/>
           <p:cNvSpPr txBox="1"/>
           <p:nvPr/>
         </p:nvSpPr>
@@ -14372,7 +14280,7 @@
       </p:sp>
       <p:sp>
         <p:nvSpPr>
-          <p:cNvPr id="201" name="TextBox 200"/>
+          <p:cNvPr id="199" name="TextBox 198"/>
           <p:cNvSpPr txBox="1"/>
           <p:nvPr/>
         </p:nvSpPr>
@@ -14428,7 +14336,7 @@
       </p:sp>
       <p:sp>
         <p:nvSpPr>
-          <p:cNvPr id="202" name="TextBox 201"/>
+          <p:cNvPr id="200" name="TextBox 199"/>
           <p:cNvSpPr txBox="1"/>
           <p:nvPr/>
         </p:nvSpPr>
@@ -14484,7 +14392,7 @@
       </p:sp>
       <p:sp>
         <p:nvSpPr>
-          <p:cNvPr id="203" name="TextBox 202"/>
+          <p:cNvPr id="201" name="TextBox 200"/>
           <p:cNvSpPr txBox="1"/>
           <p:nvPr/>
         </p:nvSpPr>
@@ -14540,7 +14448,7 @@
       </p:sp>
       <p:sp>
         <p:nvSpPr>
-          <p:cNvPr id="204" name="TextBox 203"/>
+          <p:cNvPr id="202" name="TextBox 201"/>
           <p:cNvSpPr txBox="1"/>
           <p:nvPr/>
         </p:nvSpPr>
@@ -14596,7 +14504,7 @@
       </p:sp>
       <p:sp>
         <p:nvSpPr>
-          <p:cNvPr id="205" name="Rounded Rectangle 204"/>
+          <p:cNvPr id="203" name="Rounded Rectangle 202"/>
           <p:cNvSpPr/>
           <p:nvPr/>
         </p:nvSpPr>
@@ -14645,7 +14553,7 @@
       </p:sp>
       <p:sp>
         <p:nvSpPr>
-          <p:cNvPr id="206" name="TextBox 205"/>
+          <p:cNvPr id="204" name="TextBox 203"/>
           <p:cNvSpPr txBox="1"/>
           <p:nvPr/>
         </p:nvSpPr>
@@ -14691,7 +14599,7 @@
       </p:sp>
       <p:sp>
         <p:nvSpPr>
-          <p:cNvPr id="207" name="TextBox 206"/>
+          <p:cNvPr id="205" name="TextBox 204"/>
           <p:cNvSpPr txBox="1"/>
           <p:nvPr/>
         </p:nvSpPr>
@@ -14747,7 +14655,7 @@
       </p:sp>
       <p:sp>
         <p:nvSpPr>
-          <p:cNvPr id="208" name="TextBox 207"/>
+          <p:cNvPr id="206" name="TextBox 205"/>
           <p:cNvSpPr txBox="1"/>
           <p:nvPr/>
         </p:nvSpPr>
@@ -14803,7 +14711,7 @@
       </p:sp>
       <p:sp>
         <p:nvSpPr>
-          <p:cNvPr id="209" name="TextBox 208"/>
+          <p:cNvPr id="207" name="TextBox 206"/>
           <p:cNvSpPr txBox="1"/>
           <p:nvPr/>
         </p:nvSpPr>
@@ -14859,7 +14767,7 @@
       </p:sp>
       <p:sp>
         <p:nvSpPr>
-          <p:cNvPr id="210" name="TextBox 209"/>
+          <p:cNvPr id="208" name="TextBox 207"/>
           <p:cNvSpPr txBox="1"/>
           <p:nvPr/>
         </p:nvSpPr>
@@ -15033,99 +14941,7 @@
       </p:sp>
       <p:sp>
         <p:nvSpPr>
-          <p:cNvPr id="4" name="TextBox 3"/>
-          <p:cNvSpPr txBox="1"/>
-          <p:nvPr/>
-        </p:nvSpPr>
-        <p:spPr>
-          <a:xfrm>
-            <a:off x="8595360" y="54864"/>
-            <a:ext cx="2788920" cy="384048"/>
-          </a:xfrm>
-          <a:prstGeom prst="rect">
-            <a:avLst/>
-          </a:prstGeom>
-          <a:noFill/>
-        </p:spPr>
-        <p:txBody>
-          <a:bodyPr wrap="square" lIns="0" rIns="0" tIns="0" bIns="0" anchor="ctr">
-            <a:noAutofit/>
-          </a:bodyPr>
-          <a:lstStyle/>
-          <a:p>
-            <a:pPr algn="r">
-              <a:lnSpc>
-                <a:spcPct val="125000"/>
-              </a:lnSpc>
-              <a:spcBef>
-                <a:spcPts val="0"/>
-              </a:spcBef>
-              <a:spcAft>
-                <a:spcPts val="0"/>
-              </a:spcAft>
-            </a:pPr>
-            <a:r>
-              <a:rPr sz="750" b="0" i="0">
-                <a:solidFill>
-                  <a:srgbClr val="64748B"/>
-                </a:solidFill>
-                <a:latin typeface="Segoe UI"/>
-                <a:ea typeface="Microsoft YaHei"/>
-              </a:rPr>
-              <a:t>应用逻辑分层视角 · 读侧 Databricks SQL Serverless · 与基础设施拓扑互补</a:t>
-            </a:r>
-          </a:p>
-        </p:txBody>
-      </p:sp>
-      <p:sp>
-        <p:nvSpPr>
-          <p:cNvPr id="5" name="TextBox 4"/>
-          <p:cNvSpPr txBox="1"/>
-          <p:nvPr/>
-        </p:nvSpPr>
-        <p:spPr>
-          <a:xfrm>
-            <a:off x="11448288" y="365760"/>
-            <a:ext cx="548640" cy="164592"/>
-          </a:xfrm>
-          <a:prstGeom prst="rect">
-            <a:avLst/>
-          </a:prstGeom>
-          <a:noFill/>
-        </p:spPr>
-        <p:txBody>
-          <a:bodyPr wrap="square" lIns="0" rIns="0" tIns="0" bIns="0" anchor="t">
-            <a:noAutofit/>
-          </a:bodyPr>
-          <a:lstStyle/>
-          <a:p>
-            <a:pPr algn="r">
-              <a:lnSpc>
-                <a:spcPct val="112000"/>
-              </a:lnSpc>
-              <a:spcBef>
-                <a:spcPts val="0"/>
-              </a:spcBef>
-              <a:spcAft>
-                <a:spcPts val="0"/>
-              </a:spcAft>
-            </a:pPr>
-            <a:r>
-              <a:rPr sz="700" b="0" i="0">
-                <a:solidFill>
-                  <a:srgbClr val="94A3B8"/>
-                </a:solidFill>
-                <a:latin typeface="Consolas"/>
-                <a:ea typeface="Microsoft YaHei"/>
-              </a:rPr>
-              <a:t>02 / 03</a:t>
-            </a:r>
-          </a:p>
-        </p:txBody>
-      </p:sp>
-      <p:sp>
-        <p:nvSpPr>
-          <p:cNvPr id="6" name="Rounded Rectangle 5"/>
+          <p:cNvPr id="4" name="Rounded Rectangle 3"/>
           <p:cNvSpPr/>
           <p:nvPr/>
         </p:nvSpPr>
@@ -15173,7 +14989,7 @@
       </p:sp>
       <p:sp>
         <p:nvSpPr>
-          <p:cNvPr id="7" name="TextBox 6"/>
+          <p:cNvPr id="5" name="TextBox 4"/>
           <p:cNvSpPr txBox="1"/>
           <p:nvPr/>
         </p:nvSpPr>
@@ -15219,7 +15035,7 @@
       </p:sp>
       <p:sp>
         <p:nvSpPr>
-          <p:cNvPr id="8" name="Rounded Rectangle 7"/>
+          <p:cNvPr id="6" name="Rounded Rectangle 5"/>
           <p:cNvSpPr/>
           <p:nvPr/>
         </p:nvSpPr>
@@ -15273,7 +15089,7 @@
       </p:sp>
       <p:sp>
         <p:nvSpPr>
-          <p:cNvPr id="9" name="TextBox 8"/>
+          <p:cNvPr id="7" name="TextBox 6"/>
           <p:cNvSpPr txBox="1"/>
           <p:nvPr/>
         </p:nvSpPr>
@@ -15342,7 +15158,7 @@
       </p:sp>
       <p:sp>
         <p:nvSpPr>
-          <p:cNvPr id="10" name="Oval 9"/>
+          <p:cNvPr id="8" name="Oval 7"/>
           <p:cNvSpPr/>
           <p:nvPr/>
         </p:nvSpPr>
@@ -15386,7 +15202,7 @@
       </p:sp>
       <p:sp>
         <p:nvSpPr>
-          <p:cNvPr id="11" name="Rounded Rectangle 10"/>
+          <p:cNvPr id="9" name="Rounded Rectangle 8"/>
           <p:cNvSpPr/>
           <p:nvPr/>
         </p:nvSpPr>
@@ -15432,7 +15248,7 @@
       </p:sp>
       <p:sp>
         <p:nvSpPr>
-          <p:cNvPr id="12" name="Rounded Rectangle 11"/>
+          <p:cNvPr id="10" name="Rounded Rectangle 9"/>
           <p:cNvSpPr/>
           <p:nvPr/>
         </p:nvSpPr>
@@ -15486,7 +15302,7 @@
       </p:sp>
       <p:sp>
         <p:nvSpPr>
-          <p:cNvPr id="13" name="TextBox 12"/>
+          <p:cNvPr id="11" name="TextBox 10"/>
           <p:cNvSpPr txBox="1"/>
           <p:nvPr/>
         </p:nvSpPr>
@@ -15555,7 +15371,7 @@
       </p:sp>
       <p:sp>
         <p:nvSpPr>
-          <p:cNvPr id="14" name="Oval 13"/>
+          <p:cNvPr id="12" name="Oval 11"/>
           <p:cNvSpPr/>
           <p:nvPr/>
         </p:nvSpPr>
@@ -15599,7 +15415,7 @@
       </p:sp>
       <p:sp>
         <p:nvSpPr>
-          <p:cNvPr id="15" name="Rounded Rectangle 14"/>
+          <p:cNvPr id="13" name="Rounded Rectangle 12"/>
           <p:cNvSpPr/>
           <p:nvPr/>
         </p:nvSpPr>
@@ -15645,7 +15461,7 @@
       </p:sp>
       <p:sp>
         <p:nvSpPr>
-          <p:cNvPr id="16" name="Rounded Rectangle 15"/>
+          <p:cNvPr id="14" name="Rounded Rectangle 13"/>
           <p:cNvSpPr/>
           <p:nvPr/>
         </p:nvSpPr>
@@ -15699,7 +15515,7 @@
       </p:sp>
       <p:sp>
         <p:nvSpPr>
-          <p:cNvPr id="17" name="TextBox 16"/>
+          <p:cNvPr id="15" name="TextBox 14"/>
           <p:cNvSpPr txBox="1"/>
           <p:nvPr/>
         </p:nvSpPr>
@@ -15768,7 +15584,7 @@
       </p:sp>
       <p:sp>
         <p:nvSpPr>
-          <p:cNvPr id="18" name="Oval 17"/>
+          <p:cNvPr id="16" name="Oval 15"/>
           <p:cNvSpPr/>
           <p:nvPr/>
         </p:nvSpPr>
@@ -15812,7 +15628,7 @@
       </p:sp>
       <p:sp>
         <p:nvSpPr>
-          <p:cNvPr id="19" name="Rounded Rectangle 18"/>
+          <p:cNvPr id="17" name="Rounded Rectangle 16"/>
           <p:cNvSpPr/>
           <p:nvPr/>
         </p:nvSpPr>
@@ -15858,7 +15674,7 @@
       </p:sp>
       <p:sp>
         <p:nvSpPr>
-          <p:cNvPr id="20" name="Rounded Rectangle 19"/>
+          <p:cNvPr id="18" name="Rounded Rectangle 17"/>
           <p:cNvSpPr/>
           <p:nvPr/>
         </p:nvSpPr>
@@ -15912,7 +15728,7 @@
       </p:sp>
       <p:sp>
         <p:nvSpPr>
-          <p:cNvPr id="21" name="TextBox 20"/>
+          <p:cNvPr id="19" name="TextBox 18"/>
           <p:cNvSpPr txBox="1"/>
           <p:nvPr/>
         </p:nvSpPr>
@@ -15981,7 +15797,7 @@
       </p:sp>
       <p:sp>
         <p:nvSpPr>
-          <p:cNvPr id="22" name="TextBox 21"/>
+          <p:cNvPr id="20" name="TextBox 19"/>
           <p:cNvSpPr txBox="1"/>
           <p:nvPr/>
         </p:nvSpPr>
@@ -16027,7 +15843,7 @@
       </p:sp>
       <p:cxnSp>
         <p:nvCxnSpPr>
-          <p:cNvPr id="23" name="Connector 22"/>
+          <p:cNvPr id="21" name="Connector 20"/>
           <p:cNvCxnSpPr/>
           <p:nvPr/>
         </p:nvCxnSpPr>
@@ -16050,7 +15866,7 @@
       </p:cxnSp>
       <p:sp>
         <p:nvSpPr>
-          <p:cNvPr id="24" name="TextBox 23"/>
+          <p:cNvPr id="22" name="TextBox 21"/>
           <p:cNvSpPr txBox="1"/>
           <p:nvPr/>
         </p:nvSpPr>
@@ -16096,7 +15912,7 @@
       </p:sp>
       <p:sp>
         <p:nvSpPr>
-          <p:cNvPr id="25" name="Rounded Rectangle 24"/>
+          <p:cNvPr id="23" name="Rounded Rectangle 22"/>
           <p:cNvSpPr/>
           <p:nvPr/>
         </p:nvSpPr>
@@ -16144,7 +15960,7 @@
       </p:sp>
       <p:sp>
         <p:nvSpPr>
-          <p:cNvPr id="26" name="TextBox 25"/>
+          <p:cNvPr id="24" name="TextBox 23"/>
           <p:cNvSpPr txBox="1"/>
           <p:nvPr/>
         </p:nvSpPr>
@@ -16190,7 +16006,7 @@
       </p:sp>
       <p:sp>
         <p:nvSpPr>
-          <p:cNvPr id="27" name="Rounded Rectangle 26"/>
+          <p:cNvPr id="25" name="Rounded Rectangle 24"/>
           <p:cNvSpPr/>
           <p:nvPr/>
         </p:nvSpPr>
@@ -16244,7 +16060,7 @@
       </p:sp>
       <p:sp>
         <p:nvSpPr>
-          <p:cNvPr id="28" name="TextBox 27"/>
+          <p:cNvPr id="26" name="TextBox 25"/>
           <p:cNvSpPr txBox="1"/>
           <p:nvPr/>
         </p:nvSpPr>
@@ -16313,7 +16129,7 @@
       </p:sp>
       <p:sp>
         <p:nvSpPr>
-          <p:cNvPr id="29" name="Rounded Rectangle 28"/>
+          <p:cNvPr id="27" name="Rounded Rectangle 26"/>
           <p:cNvSpPr/>
           <p:nvPr/>
         </p:nvSpPr>
@@ -16367,7 +16183,7 @@
       </p:sp>
       <p:sp>
         <p:nvSpPr>
-          <p:cNvPr id="30" name="TextBox 29"/>
+          <p:cNvPr id="28" name="TextBox 27"/>
           <p:cNvSpPr txBox="1"/>
           <p:nvPr/>
         </p:nvSpPr>
@@ -16459,7 +16275,7 @@
       </p:sp>
       <p:cxnSp>
         <p:nvCxnSpPr>
-          <p:cNvPr id="31" name="Connector 30"/>
+          <p:cNvPr id="29" name="Connector 28"/>
           <p:cNvCxnSpPr/>
           <p:nvPr/>
         </p:nvCxnSpPr>
@@ -16482,7 +16298,7 @@
       </p:cxnSp>
       <p:sp>
         <p:nvSpPr>
-          <p:cNvPr id="32" name="Rounded Rectangle 31"/>
+          <p:cNvPr id="30" name="Rounded Rectangle 29"/>
           <p:cNvSpPr/>
           <p:nvPr/>
         </p:nvSpPr>
@@ -16536,7 +16352,7 @@
       </p:sp>
       <p:sp>
         <p:nvSpPr>
-          <p:cNvPr id="33" name="TextBox 32"/>
+          <p:cNvPr id="31" name="TextBox 30"/>
           <p:cNvSpPr txBox="1"/>
           <p:nvPr/>
         </p:nvSpPr>
@@ -16605,7 +16421,7 @@
       </p:sp>
       <p:cxnSp>
         <p:nvCxnSpPr>
-          <p:cNvPr id="34" name="Connector 33"/>
+          <p:cNvPr id="32" name="Connector 31"/>
           <p:cNvCxnSpPr/>
           <p:nvPr/>
         </p:nvCxnSpPr>
@@ -16628,7 +16444,7 @@
       </p:cxnSp>
       <p:sp>
         <p:nvSpPr>
-          <p:cNvPr id="35" name="TextBox 34"/>
+          <p:cNvPr id="33" name="TextBox 32"/>
           <p:cNvSpPr txBox="1"/>
           <p:nvPr/>
         </p:nvSpPr>
@@ -16674,7 +16490,7 @@
       </p:sp>
       <p:sp>
         <p:nvSpPr>
-          <p:cNvPr id="36" name="Rounded Rectangle 35"/>
+          <p:cNvPr id="34" name="Rounded Rectangle 33"/>
           <p:cNvSpPr/>
           <p:nvPr/>
         </p:nvSpPr>
@@ -16722,7 +16538,7 @@
       </p:sp>
       <p:sp>
         <p:nvSpPr>
-          <p:cNvPr id="37" name="TextBox 36"/>
+          <p:cNvPr id="35" name="TextBox 34"/>
           <p:cNvSpPr txBox="1"/>
           <p:nvPr/>
         </p:nvSpPr>
@@ -16768,7 +16584,7 @@
       </p:sp>
       <p:sp>
         <p:nvSpPr>
-          <p:cNvPr id="38" name="Rounded Rectangle 37"/>
+          <p:cNvPr id="36" name="Rounded Rectangle 35"/>
           <p:cNvSpPr/>
           <p:nvPr/>
         </p:nvSpPr>
@@ -16816,7 +16632,7 @@
       </p:sp>
       <p:sp>
         <p:nvSpPr>
-          <p:cNvPr id="39" name="TextBox 38"/>
+          <p:cNvPr id="37" name="TextBox 36"/>
           <p:cNvSpPr txBox="1"/>
           <p:nvPr/>
         </p:nvSpPr>
@@ -16862,7 +16678,7 @@
       </p:sp>
       <p:sp>
         <p:nvSpPr>
-          <p:cNvPr id="40" name="TextBox 39"/>
+          <p:cNvPr id="38" name="TextBox 37"/>
           <p:cNvSpPr txBox="1"/>
           <p:nvPr/>
         </p:nvSpPr>
@@ -16908,7 +16724,7 @@
       </p:sp>
       <p:sp>
         <p:nvSpPr>
-          <p:cNvPr id="41" name="Rounded Rectangle 40"/>
+          <p:cNvPr id="39" name="Rounded Rectangle 38"/>
           <p:cNvSpPr/>
           <p:nvPr/>
         </p:nvSpPr>
@@ -16962,7 +16778,7 @@
       </p:sp>
       <p:sp>
         <p:nvSpPr>
-          <p:cNvPr id="42" name="TextBox 41"/>
+          <p:cNvPr id="40" name="TextBox 39"/>
           <p:cNvSpPr txBox="1"/>
           <p:nvPr/>
         </p:nvSpPr>
@@ -17031,7 +16847,7 @@
       </p:sp>
       <p:sp>
         <p:nvSpPr>
-          <p:cNvPr id="43" name="Rounded Rectangle 42"/>
+          <p:cNvPr id="41" name="Rounded Rectangle 40"/>
           <p:cNvSpPr/>
           <p:nvPr/>
         </p:nvSpPr>
@@ -17085,7 +16901,7 @@
       </p:sp>
       <p:sp>
         <p:nvSpPr>
-          <p:cNvPr id="44" name="TextBox 43"/>
+          <p:cNvPr id="42" name="TextBox 41"/>
           <p:cNvSpPr txBox="1"/>
           <p:nvPr/>
         </p:nvSpPr>
@@ -17154,7 +16970,7 @@
       </p:sp>
       <p:cxnSp>
         <p:nvCxnSpPr>
-          <p:cNvPr id="45" name="Connector 44"/>
+          <p:cNvPr id="43" name="Connector 42"/>
           <p:cNvCxnSpPr/>
           <p:nvPr/>
         </p:nvCxnSpPr>
@@ -17177,7 +16993,7 @@
       </p:cxnSp>
       <p:sp>
         <p:nvSpPr>
-          <p:cNvPr id="46" name="Rounded Rectangle 45"/>
+          <p:cNvPr id="44" name="Rounded Rectangle 43"/>
           <p:cNvSpPr/>
           <p:nvPr/>
         </p:nvSpPr>
@@ -17225,7 +17041,7 @@
       </p:sp>
       <p:sp>
         <p:nvSpPr>
-          <p:cNvPr id="47" name="TextBox 46"/>
+          <p:cNvPr id="45" name="TextBox 44"/>
           <p:cNvSpPr txBox="1"/>
           <p:nvPr/>
         </p:nvSpPr>
@@ -17271,7 +17087,7 @@
       </p:sp>
       <p:sp>
         <p:nvSpPr>
-          <p:cNvPr id="48" name="Rounded Rectangle 47"/>
+          <p:cNvPr id="46" name="Rounded Rectangle 45"/>
           <p:cNvSpPr/>
           <p:nvPr/>
         </p:nvSpPr>
@@ -17319,7 +17135,7 @@
       </p:sp>
       <p:sp>
         <p:nvSpPr>
-          <p:cNvPr id="49" name="TextBox 48"/>
+          <p:cNvPr id="47" name="TextBox 46"/>
           <p:cNvSpPr txBox="1"/>
           <p:nvPr/>
         </p:nvSpPr>
@@ -17365,7 +17181,7 @@
       </p:sp>
       <p:sp>
         <p:nvSpPr>
-          <p:cNvPr id="50" name="TextBox 49"/>
+          <p:cNvPr id="48" name="TextBox 47"/>
           <p:cNvSpPr txBox="1"/>
           <p:nvPr/>
         </p:nvSpPr>
@@ -17411,7 +17227,7 @@
       </p:sp>
       <p:sp>
         <p:nvSpPr>
-          <p:cNvPr id="51" name="Rounded Rectangle 50"/>
+          <p:cNvPr id="49" name="Rounded Rectangle 48"/>
           <p:cNvSpPr/>
           <p:nvPr/>
         </p:nvSpPr>
@@ -17465,7 +17281,7 @@
       </p:sp>
       <p:sp>
         <p:nvSpPr>
-          <p:cNvPr id="52" name="TextBox 51"/>
+          <p:cNvPr id="50" name="TextBox 49"/>
           <p:cNvSpPr txBox="1"/>
           <p:nvPr/>
         </p:nvSpPr>
@@ -17534,7 +17350,7 @@
       </p:sp>
       <p:sp>
         <p:nvSpPr>
-          <p:cNvPr id="53" name="Rounded Rectangle 52"/>
+          <p:cNvPr id="51" name="Rounded Rectangle 50"/>
           <p:cNvSpPr/>
           <p:nvPr/>
         </p:nvSpPr>
@@ -17588,7 +17404,7 @@
       </p:sp>
       <p:sp>
         <p:nvSpPr>
-          <p:cNvPr id="54" name="TextBox 53"/>
+          <p:cNvPr id="52" name="TextBox 51"/>
           <p:cNvSpPr txBox="1"/>
           <p:nvPr/>
         </p:nvSpPr>
@@ -17657,7 +17473,7 @@
       </p:sp>
       <p:cxnSp>
         <p:nvCxnSpPr>
-          <p:cNvPr id="55" name="Connector 54"/>
+          <p:cNvPr id="53" name="Connector 52"/>
           <p:cNvCxnSpPr/>
           <p:nvPr/>
         </p:nvCxnSpPr>
@@ -17680,7 +17496,7 @@
       </p:cxnSp>
       <p:sp>
         <p:nvSpPr>
-          <p:cNvPr id="56" name="Rounded Rectangle 55"/>
+          <p:cNvPr id="54" name="Rounded Rectangle 53"/>
           <p:cNvSpPr/>
           <p:nvPr/>
         </p:nvSpPr>
@@ -17728,7 +17544,7 @@
       </p:sp>
       <p:sp>
         <p:nvSpPr>
-          <p:cNvPr id="57" name="TextBox 56"/>
+          <p:cNvPr id="55" name="TextBox 54"/>
           <p:cNvSpPr txBox="1"/>
           <p:nvPr/>
         </p:nvSpPr>
@@ -17774,7 +17590,7 @@
       </p:sp>
       <p:sp>
         <p:nvSpPr>
-          <p:cNvPr id="58" name="Rounded Rectangle 57"/>
+          <p:cNvPr id="56" name="Rounded Rectangle 55"/>
           <p:cNvSpPr/>
           <p:nvPr/>
         </p:nvSpPr>
@@ -17822,7 +17638,7 @@
       </p:sp>
       <p:sp>
         <p:nvSpPr>
-          <p:cNvPr id="59" name="TextBox 58"/>
+          <p:cNvPr id="57" name="TextBox 56"/>
           <p:cNvSpPr txBox="1"/>
           <p:nvPr/>
         </p:nvSpPr>
@@ -17868,7 +17684,7 @@
       </p:sp>
       <p:sp>
         <p:nvSpPr>
-          <p:cNvPr id="60" name="TextBox 59"/>
+          <p:cNvPr id="58" name="TextBox 57"/>
           <p:cNvSpPr txBox="1"/>
           <p:nvPr/>
         </p:nvSpPr>
@@ -17914,7 +17730,7 @@
       </p:sp>
       <p:sp>
         <p:nvSpPr>
-          <p:cNvPr id="61" name="Rounded Rectangle 60"/>
+          <p:cNvPr id="59" name="Rounded Rectangle 58"/>
           <p:cNvSpPr/>
           <p:nvPr/>
         </p:nvSpPr>
@@ -17968,7 +17784,7 @@
       </p:sp>
       <p:sp>
         <p:nvSpPr>
-          <p:cNvPr id="62" name="TextBox 61"/>
+          <p:cNvPr id="60" name="TextBox 59"/>
           <p:cNvSpPr txBox="1"/>
           <p:nvPr/>
         </p:nvSpPr>
@@ -18037,7 +17853,7 @@
       </p:sp>
       <p:sp>
         <p:nvSpPr>
-          <p:cNvPr id="63" name="Rounded Rectangle 62"/>
+          <p:cNvPr id="61" name="Rounded Rectangle 60"/>
           <p:cNvSpPr/>
           <p:nvPr/>
         </p:nvSpPr>
@@ -18091,7 +17907,7 @@
       </p:sp>
       <p:sp>
         <p:nvSpPr>
-          <p:cNvPr id="64" name="TextBox 63"/>
+          <p:cNvPr id="62" name="TextBox 61"/>
           <p:cNvSpPr txBox="1"/>
           <p:nvPr/>
         </p:nvSpPr>
@@ -18160,7 +17976,7 @@
       </p:sp>
       <p:cxnSp>
         <p:nvCxnSpPr>
-          <p:cNvPr id="65" name="Connector 64"/>
+          <p:cNvPr id="63" name="Connector 62"/>
           <p:cNvCxnSpPr/>
           <p:nvPr/>
         </p:nvCxnSpPr>
@@ -18183,7 +17999,7 @@
       </p:cxnSp>
       <p:sp>
         <p:nvSpPr>
-          <p:cNvPr id="66" name="Rounded Rectangle 65"/>
+          <p:cNvPr id="64" name="Rounded Rectangle 63"/>
           <p:cNvSpPr/>
           <p:nvPr/>
         </p:nvSpPr>
@@ -18231,7 +18047,7 @@
       </p:sp>
       <p:sp>
         <p:nvSpPr>
-          <p:cNvPr id="67" name="TextBox 66"/>
+          <p:cNvPr id="65" name="TextBox 64"/>
           <p:cNvSpPr txBox="1"/>
           <p:nvPr/>
         </p:nvSpPr>
@@ -18277,7 +18093,7 @@
       </p:sp>
       <p:cxnSp>
         <p:nvCxnSpPr>
-          <p:cNvPr id="68" name="Connector 67"/>
+          <p:cNvPr id="66" name="Connector 65"/>
           <p:cNvCxnSpPr/>
           <p:nvPr/>
         </p:nvCxnSpPr>
@@ -18299,7 +18115,7 @@
       </p:cxnSp>
       <p:cxnSp>
         <p:nvCxnSpPr>
-          <p:cNvPr id="69" name="Connector 68"/>
+          <p:cNvPr id="67" name="Connector 66"/>
           <p:cNvCxnSpPr/>
           <p:nvPr/>
         </p:nvCxnSpPr>
@@ -18321,7 +18137,7 @@
       </p:cxnSp>
       <p:cxnSp>
         <p:nvCxnSpPr>
-          <p:cNvPr id="70" name="Connector 69"/>
+          <p:cNvPr id="68" name="Connector 67"/>
           <p:cNvCxnSpPr/>
           <p:nvPr/>
         </p:nvCxnSpPr>
@@ -18344,7 +18160,7 @@
       </p:cxnSp>
       <p:sp>
         <p:nvSpPr>
-          <p:cNvPr id="71" name="TextBox 70"/>
+          <p:cNvPr id="69" name="TextBox 68"/>
           <p:cNvSpPr txBox="1"/>
           <p:nvPr/>
         </p:nvSpPr>
@@ -18390,7 +18206,7 @@
       </p:sp>
       <p:cxnSp>
         <p:nvCxnSpPr>
-          <p:cNvPr id="72" name="Connector 71"/>
+          <p:cNvPr id="70" name="Connector 69"/>
           <p:cNvCxnSpPr/>
           <p:nvPr/>
         </p:nvCxnSpPr>
@@ -18413,7 +18229,7 @@
       </p:cxnSp>
       <p:sp>
         <p:nvSpPr>
-          <p:cNvPr id="73" name="TextBox 72"/>
+          <p:cNvPr id="71" name="TextBox 70"/>
           <p:cNvSpPr txBox="1"/>
           <p:nvPr/>
         </p:nvSpPr>
@@ -18459,7 +18275,7 @@
       </p:sp>
       <p:cxnSp>
         <p:nvCxnSpPr>
-          <p:cNvPr id="74" name="Connector 73"/>
+          <p:cNvPr id="72" name="Connector 71"/>
           <p:cNvCxnSpPr/>
           <p:nvPr/>
         </p:nvCxnSpPr>
@@ -18481,7 +18297,7 @@
       </p:cxnSp>
       <p:cxnSp>
         <p:nvCxnSpPr>
-          <p:cNvPr id="75" name="Connector 74"/>
+          <p:cNvPr id="73" name="Connector 72"/>
           <p:cNvCxnSpPr/>
           <p:nvPr/>
         </p:nvCxnSpPr>
@@ -18503,7 +18319,7 @@
       </p:cxnSp>
       <p:cxnSp>
         <p:nvCxnSpPr>
-          <p:cNvPr id="76" name="Connector 75"/>
+          <p:cNvPr id="74" name="Connector 73"/>
           <p:cNvCxnSpPr/>
           <p:nvPr/>
         </p:nvCxnSpPr>
@@ -18526,7 +18342,7 @@
       </p:cxnSp>
       <p:sp>
         <p:nvSpPr>
-          <p:cNvPr id="77" name="TextBox 76"/>
+          <p:cNvPr id="75" name="TextBox 74"/>
           <p:cNvSpPr txBox="1"/>
           <p:nvPr/>
         </p:nvSpPr>
@@ -18572,7 +18388,7 @@
       </p:sp>
       <p:sp>
         <p:nvSpPr>
-          <p:cNvPr id="78" name="Rounded Rectangle 77"/>
+          <p:cNvPr id="76" name="Rounded Rectangle 75"/>
           <p:cNvSpPr/>
           <p:nvPr/>
         </p:nvSpPr>
@@ -18620,7 +18436,7 @@
       </p:sp>
       <p:sp>
         <p:nvSpPr>
-          <p:cNvPr id="79" name="TextBox 78"/>
+          <p:cNvPr id="77" name="TextBox 76"/>
           <p:cNvSpPr txBox="1"/>
           <p:nvPr/>
         </p:nvSpPr>
@@ -18666,7 +18482,7 @@
       </p:sp>
       <p:sp>
         <p:nvSpPr>
-          <p:cNvPr id="80" name="Rounded Rectangle 79"/>
+          <p:cNvPr id="78" name="Rounded Rectangle 77"/>
           <p:cNvSpPr/>
           <p:nvPr/>
         </p:nvSpPr>
@@ -18720,7 +18536,7 @@
       </p:sp>
       <p:sp>
         <p:nvSpPr>
-          <p:cNvPr id="81" name="TextBox 80"/>
+          <p:cNvPr id="79" name="TextBox 78"/>
           <p:cNvSpPr txBox="1"/>
           <p:nvPr/>
         </p:nvSpPr>
@@ -18789,7 +18605,7 @@
       </p:sp>
       <p:sp>
         <p:nvSpPr>
-          <p:cNvPr id="82" name="Rounded Rectangle 81"/>
+          <p:cNvPr id="80" name="Rounded Rectangle 79"/>
           <p:cNvSpPr/>
           <p:nvPr/>
         </p:nvSpPr>
@@ -18843,7 +18659,7 @@
       </p:sp>
       <p:sp>
         <p:nvSpPr>
-          <p:cNvPr id="83" name="TextBox 82"/>
+          <p:cNvPr id="81" name="TextBox 80"/>
           <p:cNvSpPr txBox="1"/>
           <p:nvPr/>
         </p:nvSpPr>
@@ -18912,7 +18728,7 @@
       </p:sp>
       <p:sp>
         <p:nvSpPr>
-          <p:cNvPr id="84" name="Rounded Rectangle 83"/>
+          <p:cNvPr id="82" name="Rounded Rectangle 81"/>
           <p:cNvSpPr/>
           <p:nvPr/>
         </p:nvSpPr>
@@ -18966,7 +18782,7 @@
       </p:sp>
       <p:sp>
         <p:nvSpPr>
-          <p:cNvPr id="85" name="TextBox 84"/>
+          <p:cNvPr id="83" name="TextBox 82"/>
           <p:cNvSpPr txBox="1"/>
           <p:nvPr/>
         </p:nvSpPr>
@@ -19035,7 +18851,7 @@
       </p:sp>
       <p:cxnSp>
         <p:nvCxnSpPr>
-          <p:cNvPr id="86" name="Connector 85"/>
+          <p:cNvPr id="84" name="Connector 83"/>
           <p:cNvCxnSpPr/>
           <p:nvPr/>
         </p:nvCxnSpPr>
@@ -19058,7 +18874,7 @@
       </p:cxnSp>
       <p:sp>
         <p:nvSpPr>
-          <p:cNvPr id="87" name="TextBox 86"/>
+          <p:cNvPr id="85" name="TextBox 84"/>
           <p:cNvSpPr txBox="1"/>
           <p:nvPr/>
         </p:nvSpPr>
@@ -19104,7 +18920,7 @@
       </p:sp>
       <p:cxnSp>
         <p:nvCxnSpPr>
-          <p:cNvPr id="88" name="Connector 87"/>
+          <p:cNvPr id="86" name="Connector 85"/>
           <p:cNvCxnSpPr/>
           <p:nvPr/>
         </p:nvCxnSpPr>
@@ -19126,7 +18942,7 @@
       </p:cxnSp>
       <p:cxnSp>
         <p:nvCxnSpPr>
-          <p:cNvPr id="89" name="Connector 88"/>
+          <p:cNvPr id="87" name="Connector 86"/>
           <p:cNvCxnSpPr/>
           <p:nvPr/>
         </p:nvCxnSpPr>
@@ -19148,7 +18964,7 @@
       </p:cxnSp>
       <p:cxnSp>
         <p:nvCxnSpPr>
-          <p:cNvPr id="90" name="Connector 89"/>
+          <p:cNvPr id="88" name="Connector 87"/>
           <p:cNvCxnSpPr/>
           <p:nvPr/>
         </p:nvCxnSpPr>
@@ -19171,7 +18987,7 @@
       </p:cxnSp>
       <p:sp>
         <p:nvSpPr>
-          <p:cNvPr id="91" name="TextBox 90"/>
+          <p:cNvPr id="89" name="TextBox 88"/>
           <p:cNvSpPr txBox="1"/>
           <p:nvPr/>
         </p:nvSpPr>
@@ -19217,7 +19033,7 @@
       </p:sp>
       <p:cxnSp>
         <p:nvCxnSpPr>
-          <p:cNvPr id="92" name="Connector 91"/>
+          <p:cNvPr id="90" name="Connector 89"/>
           <p:cNvCxnSpPr/>
           <p:nvPr/>
         </p:nvCxnSpPr>
@@ -19240,7 +19056,7 @@
       </p:cxnSp>
       <p:sp>
         <p:nvSpPr>
-          <p:cNvPr id="93" name="TextBox 92"/>
+          <p:cNvPr id="91" name="TextBox 90"/>
           <p:cNvSpPr txBox="1"/>
           <p:nvPr/>
         </p:nvSpPr>
@@ -19286,7 +19102,7 @@
       </p:sp>
       <p:sp>
         <p:nvSpPr>
-          <p:cNvPr id="94" name="Rounded Rectangle 93"/>
+          <p:cNvPr id="92" name="Rounded Rectangle 91"/>
           <p:cNvSpPr/>
           <p:nvPr/>
         </p:nvSpPr>
@@ -19334,7 +19150,7 @@
       </p:sp>
       <p:sp>
         <p:nvSpPr>
-          <p:cNvPr id="95" name="TextBox 94"/>
+          <p:cNvPr id="93" name="TextBox 92"/>
           <p:cNvSpPr txBox="1"/>
           <p:nvPr/>
         </p:nvSpPr>
@@ -19390,7 +19206,7 @@
       </p:sp>
       <p:sp>
         <p:nvSpPr>
-          <p:cNvPr id="96" name="Rounded Rectangle 95"/>
+          <p:cNvPr id="94" name="Rounded Rectangle 93"/>
           <p:cNvSpPr/>
           <p:nvPr/>
         </p:nvSpPr>
@@ -19438,7 +19254,7 @@
       </p:sp>
       <p:sp>
         <p:nvSpPr>
-          <p:cNvPr id="97" name="TextBox 96"/>
+          <p:cNvPr id="95" name="TextBox 94"/>
           <p:cNvSpPr txBox="1"/>
           <p:nvPr/>
         </p:nvSpPr>
@@ -19494,7 +19310,7 @@
       </p:sp>
       <p:sp>
         <p:nvSpPr>
-          <p:cNvPr id="98" name="Oval 97"/>
+          <p:cNvPr id="96" name="Oval 95"/>
           <p:cNvSpPr/>
           <p:nvPr/>
         </p:nvSpPr>
@@ -19538,7 +19354,7 @@
       </p:sp>
       <p:sp>
         <p:nvSpPr>
-          <p:cNvPr id="99" name="TextBox 98"/>
+          <p:cNvPr id="97" name="TextBox 96"/>
           <p:cNvSpPr txBox="1"/>
           <p:nvPr/>
         </p:nvSpPr>
@@ -19584,7 +19400,7 @@
       </p:sp>
       <p:sp>
         <p:nvSpPr>
-          <p:cNvPr id="100" name="Oval 99"/>
+          <p:cNvPr id="98" name="Oval 97"/>
           <p:cNvSpPr/>
           <p:nvPr/>
         </p:nvSpPr>
@@ -19628,7 +19444,7 @@
       </p:sp>
       <p:sp>
         <p:nvSpPr>
-          <p:cNvPr id="101" name="TextBox 100"/>
+          <p:cNvPr id="99" name="TextBox 98"/>
           <p:cNvSpPr txBox="1"/>
           <p:nvPr/>
         </p:nvSpPr>
@@ -19674,7 +19490,7 @@
       </p:sp>
       <p:sp>
         <p:nvSpPr>
-          <p:cNvPr id="102" name="Oval 101"/>
+          <p:cNvPr id="100" name="Oval 99"/>
           <p:cNvSpPr/>
           <p:nvPr/>
         </p:nvSpPr>
@@ -19718,7 +19534,7 @@
       </p:sp>
       <p:sp>
         <p:nvSpPr>
-          <p:cNvPr id="103" name="TextBox 102"/>
+          <p:cNvPr id="101" name="TextBox 100"/>
           <p:cNvSpPr txBox="1"/>
           <p:nvPr/>
         </p:nvSpPr>
@@ -19764,7 +19580,7 @@
       </p:sp>
       <p:sp>
         <p:nvSpPr>
-          <p:cNvPr id="104" name="Oval 103"/>
+          <p:cNvPr id="102" name="Oval 101"/>
           <p:cNvSpPr/>
           <p:nvPr/>
         </p:nvSpPr>
@@ -19808,7 +19624,7 @@
       </p:sp>
       <p:sp>
         <p:nvSpPr>
-          <p:cNvPr id="105" name="TextBox 104"/>
+          <p:cNvPr id="103" name="TextBox 102"/>
           <p:cNvSpPr txBox="1"/>
           <p:nvPr/>
         </p:nvSpPr>
@@ -19854,7 +19670,7 @@
       </p:sp>
       <p:sp>
         <p:nvSpPr>
-          <p:cNvPr id="106" name="Oval 105"/>
+          <p:cNvPr id="104" name="Oval 103"/>
           <p:cNvSpPr/>
           <p:nvPr/>
         </p:nvSpPr>
@@ -19898,7 +19714,7 @@
       </p:sp>
       <p:sp>
         <p:nvSpPr>
-          <p:cNvPr id="107" name="TextBox 106"/>
+          <p:cNvPr id="105" name="TextBox 104"/>
           <p:cNvSpPr txBox="1"/>
           <p:nvPr/>
         </p:nvSpPr>
@@ -20060,101 +19876,9 @@
           </a:p>
         </p:txBody>
       </p:sp>
-      <p:sp>
-        <p:nvSpPr>
-          <p:cNvPr id="4" name="TextBox 3"/>
-          <p:cNvSpPr txBox="1"/>
-          <p:nvPr/>
-        </p:nvSpPr>
-        <p:spPr>
-          <a:xfrm>
-            <a:off x="8595360" y="54864"/>
-            <a:ext cx="2788920" cy="384048"/>
-          </a:xfrm>
-          <a:prstGeom prst="rect">
-            <a:avLst/>
-          </a:prstGeom>
-          <a:noFill/>
-        </p:spPr>
-        <p:txBody>
-          <a:bodyPr wrap="square" lIns="0" rIns="0" tIns="0" bIns="0" anchor="ctr">
-            <a:noAutofit/>
-          </a:bodyPr>
-          <a:lstStyle/>
-          <a:p>
-            <a:pPr algn="r">
-              <a:lnSpc>
-                <a:spcPct val="125000"/>
-              </a:lnSpc>
-              <a:spcBef>
-                <a:spcPts val="0"/>
-              </a:spcBef>
-              <a:spcAft>
-                <a:spcPts val="0"/>
-              </a:spcAft>
-            </a:pPr>
-            <a:r>
-              <a:rPr sz="750" b="0" i="0">
-                <a:solidFill>
-                  <a:srgbClr val="64748B"/>
-                </a:solidFill>
-                <a:latin typeface="Segoe UI"/>
-                <a:ea typeface="Microsoft YaHei"/>
-              </a:rPr>
-              <a:t>对象存储冷湖（Iceberg）· Databricks 写读一体（Serverless）· PB 级从容</a:t>
-            </a:r>
-          </a:p>
-        </p:txBody>
-      </p:sp>
-      <p:sp>
-        <p:nvSpPr>
-          <p:cNvPr id="5" name="TextBox 4"/>
-          <p:cNvSpPr txBox="1"/>
-          <p:nvPr/>
-        </p:nvSpPr>
-        <p:spPr>
-          <a:xfrm>
-            <a:off x="11448288" y="365760"/>
-            <a:ext cx="548640" cy="164592"/>
-          </a:xfrm>
-          <a:prstGeom prst="rect">
-            <a:avLst/>
-          </a:prstGeom>
-          <a:noFill/>
-        </p:spPr>
-        <p:txBody>
-          <a:bodyPr wrap="square" lIns="0" rIns="0" tIns="0" bIns="0" anchor="t">
-            <a:noAutofit/>
-          </a:bodyPr>
-          <a:lstStyle/>
-          <a:p>
-            <a:pPr algn="r">
-              <a:lnSpc>
-                <a:spcPct val="112000"/>
-              </a:lnSpc>
-              <a:spcBef>
-                <a:spcPts val="0"/>
-              </a:spcBef>
-              <a:spcAft>
-                <a:spcPts val="0"/>
-              </a:spcAft>
-            </a:pPr>
-            <a:r>
-              <a:rPr sz="700" b="0" i="0">
-                <a:solidFill>
-                  <a:srgbClr val="94A3B8"/>
-                </a:solidFill>
-                <a:latin typeface="Consolas"/>
-                <a:ea typeface="Microsoft YaHei"/>
-              </a:rPr>
-              <a:t>03 / 03</a:t>
-            </a:r>
-          </a:p>
-        </p:txBody>
-      </p:sp>
       <p:cxnSp>
         <p:nvCxnSpPr>
-          <p:cNvPr id="6" name="Connector 5"/>
+          <p:cNvPr id="4" name="Connector 3"/>
           <p:cNvCxnSpPr/>
           <p:nvPr/>
         </p:nvCxnSpPr>
@@ -20176,7 +19900,7 @@
       </p:cxnSp>
       <p:sp>
         <p:nvSpPr>
-          <p:cNvPr id="7" name="Rounded Rectangle 6"/>
+          <p:cNvPr id="5" name="Rounded Rectangle 4"/>
           <p:cNvSpPr/>
           <p:nvPr/>
         </p:nvSpPr>
@@ -20224,7 +19948,7 @@
       </p:sp>
       <p:sp>
         <p:nvSpPr>
-          <p:cNvPr id="8" name="Oval 7"/>
+          <p:cNvPr id="6" name="Oval 5"/>
           <p:cNvSpPr/>
           <p:nvPr/>
         </p:nvSpPr>
@@ -20270,7 +19994,7 @@
       </p:sp>
       <p:sp>
         <p:nvSpPr>
-          <p:cNvPr id="9" name="TextBox 8"/>
+          <p:cNvPr id="7" name="TextBox 6"/>
           <p:cNvSpPr txBox="1"/>
           <p:nvPr/>
         </p:nvSpPr>
@@ -20316,7 +20040,7 @@
       </p:sp>
       <p:sp>
         <p:nvSpPr>
-          <p:cNvPr id="10" name="TextBox 9"/>
+          <p:cNvPr id="8" name="TextBox 7"/>
           <p:cNvSpPr txBox="1"/>
           <p:nvPr/>
         </p:nvSpPr>
@@ -20362,7 +20086,7 @@
       </p:sp>
       <p:sp>
         <p:nvSpPr>
-          <p:cNvPr id="11" name="TextBox 10"/>
+          <p:cNvPr id="9" name="TextBox 8"/>
           <p:cNvSpPr txBox="1"/>
           <p:nvPr/>
         </p:nvSpPr>
@@ -20408,7 +20132,7 @@
       </p:sp>
       <p:sp>
         <p:nvSpPr>
-          <p:cNvPr id="12" name="TextBox 11"/>
+          <p:cNvPr id="10" name="TextBox 9"/>
           <p:cNvSpPr txBox="1"/>
           <p:nvPr/>
         </p:nvSpPr>
@@ -20454,7 +20178,7 @@
       </p:sp>
       <p:sp>
         <p:nvSpPr>
-          <p:cNvPr id="13" name="TextBox 12"/>
+          <p:cNvPr id="11" name="TextBox 10"/>
           <p:cNvSpPr txBox="1"/>
           <p:nvPr/>
         </p:nvSpPr>
@@ -20500,7 +20224,7 @@
       </p:sp>
       <p:sp>
         <p:nvSpPr>
-          <p:cNvPr id="14" name="Rounded Rectangle 13"/>
+          <p:cNvPr id="12" name="Rounded Rectangle 11"/>
           <p:cNvSpPr/>
           <p:nvPr/>
         </p:nvSpPr>
@@ -20548,7 +20272,7 @@
       </p:sp>
       <p:sp>
         <p:nvSpPr>
-          <p:cNvPr id="15" name="TextBox 14"/>
+          <p:cNvPr id="13" name="TextBox 12"/>
           <p:cNvSpPr txBox="1"/>
           <p:nvPr/>
         </p:nvSpPr>
@@ -20617,7 +20341,7 @@
       </p:sp>
       <p:sp>
         <p:nvSpPr>
-          <p:cNvPr id="16" name="Rounded Rectangle 15"/>
+          <p:cNvPr id="14" name="Rounded Rectangle 13"/>
           <p:cNvSpPr/>
           <p:nvPr/>
         </p:nvSpPr>
@@ -20665,7 +20389,7 @@
       </p:sp>
       <p:sp>
         <p:nvSpPr>
-          <p:cNvPr id="17" name="TextBox 16"/>
+          <p:cNvPr id="15" name="TextBox 14"/>
           <p:cNvSpPr txBox="1"/>
           <p:nvPr/>
         </p:nvSpPr>
@@ -20734,7 +20458,7 @@
       </p:sp>
       <p:cxnSp>
         <p:nvCxnSpPr>
-          <p:cNvPr id="18" name="Connector 17"/>
+          <p:cNvPr id="16" name="Connector 15"/>
           <p:cNvCxnSpPr/>
           <p:nvPr/>
         </p:nvCxnSpPr>
@@ -20757,7 +20481,7 @@
       </p:cxnSp>
       <p:sp>
         <p:nvSpPr>
-          <p:cNvPr id="19" name="Rounded Rectangle 18"/>
+          <p:cNvPr id="17" name="Rounded Rectangle 16"/>
           <p:cNvSpPr/>
           <p:nvPr/>
         </p:nvSpPr>
@@ -20805,7 +20529,7 @@
       </p:sp>
       <p:sp>
         <p:nvSpPr>
-          <p:cNvPr id="20" name="Oval 19"/>
+          <p:cNvPr id="18" name="Oval 17"/>
           <p:cNvSpPr/>
           <p:nvPr/>
         </p:nvSpPr>
@@ -20851,7 +20575,7 @@
       </p:sp>
       <p:sp>
         <p:nvSpPr>
-          <p:cNvPr id="21" name="TextBox 20"/>
+          <p:cNvPr id="19" name="TextBox 18"/>
           <p:cNvSpPr txBox="1"/>
           <p:nvPr/>
         </p:nvSpPr>
@@ -20897,7 +20621,7 @@
       </p:sp>
       <p:sp>
         <p:nvSpPr>
-          <p:cNvPr id="22" name="TextBox 21"/>
+          <p:cNvPr id="20" name="TextBox 19"/>
           <p:cNvSpPr txBox="1"/>
           <p:nvPr/>
         </p:nvSpPr>
@@ -20943,7 +20667,7 @@
       </p:sp>
       <p:sp>
         <p:nvSpPr>
-          <p:cNvPr id="23" name="TextBox 22"/>
+          <p:cNvPr id="21" name="TextBox 20"/>
           <p:cNvSpPr txBox="1"/>
           <p:nvPr/>
         </p:nvSpPr>
@@ -20989,7 +20713,7 @@
       </p:sp>
       <p:sp>
         <p:nvSpPr>
-          <p:cNvPr id="24" name="TextBox 23"/>
+          <p:cNvPr id="22" name="TextBox 21"/>
           <p:cNvSpPr txBox="1"/>
           <p:nvPr/>
         </p:nvSpPr>
@@ -21035,7 +20759,7 @@
       </p:sp>
       <p:sp>
         <p:nvSpPr>
-          <p:cNvPr id="25" name="TextBox 24"/>
+          <p:cNvPr id="23" name="TextBox 22"/>
           <p:cNvSpPr txBox="1"/>
           <p:nvPr/>
         </p:nvSpPr>
@@ -21081,7 +20805,7 @@
       </p:sp>
       <p:sp>
         <p:nvSpPr>
-          <p:cNvPr id="26" name="TextBox 25"/>
+          <p:cNvPr id="24" name="TextBox 23"/>
           <p:cNvSpPr txBox="1"/>
           <p:nvPr/>
         </p:nvSpPr>
@@ -21127,7 +20851,7 @@
       </p:sp>
       <p:sp>
         <p:nvSpPr>
-          <p:cNvPr id="27" name="Rounded Rectangle 26"/>
+          <p:cNvPr id="25" name="Rounded Rectangle 24"/>
           <p:cNvSpPr/>
           <p:nvPr/>
         </p:nvSpPr>
@@ -21175,7 +20899,7 @@
       </p:sp>
       <p:sp>
         <p:nvSpPr>
-          <p:cNvPr id="28" name="TextBox 27"/>
+          <p:cNvPr id="26" name="TextBox 25"/>
           <p:cNvSpPr txBox="1"/>
           <p:nvPr/>
         </p:nvSpPr>
@@ -21221,7 +20945,7 @@
       </p:sp>
       <p:sp>
         <p:nvSpPr>
-          <p:cNvPr id="29" name="TextBox 28"/>
+          <p:cNvPr id="27" name="TextBox 26"/>
           <p:cNvSpPr txBox="1"/>
           <p:nvPr/>
         </p:nvSpPr>
@@ -21267,7 +20991,7 @@
       </p:sp>
       <p:sp>
         <p:nvSpPr>
-          <p:cNvPr id="30" name="TextBox 29"/>
+          <p:cNvPr id="28" name="TextBox 27"/>
           <p:cNvSpPr txBox="1"/>
           <p:nvPr/>
         </p:nvSpPr>
@@ -21313,7 +21037,7 @@
       </p:sp>
       <p:sp>
         <p:nvSpPr>
-          <p:cNvPr id="31" name="Rounded Rectangle 30"/>
+          <p:cNvPr id="29" name="Rounded Rectangle 28"/>
           <p:cNvSpPr/>
           <p:nvPr/>
         </p:nvSpPr>
@@ -21361,7 +21085,7 @@
       </p:sp>
       <p:sp>
         <p:nvSpPr>
-          <p:cNvPr id="32" name="TextBox 31"/>
+          <p:cNvPr id="30" name="TextBox 29"/>
           <p:cNvSpPr txBox="1"/>
           <p:nvPr/>
         </p:nvSpPr>
@@ -21407,7 +21131,7 @@
       </p:sp>
       <p:sp>
         <p:nvSpPr>
-          <p:cNvPr id="33" name="TextBox 32"/>
+          <p:cNvPr id="31" name="TextBox 30"/>
           <p:cNvSpPr txBox="1"/>
           <p:nvPr/>
         </p:nvSpPr>
@@ -21453,7 +21177,7 @@
       </p:sp>
       <p:sp>
         <p:nvSpPr>
-          <p:cNvPr id="34" name="TextBox 33"/>
+          <p:cNvPr id="32" name="TextBox 31"/>
           <p:cNvSpPr txBox="1"/>
           <p:nvPr/>
         </p:nvSpPr>
@@ -21499,7 +21223,7 @@
       </p:sp>
       <p:sp>
         <p:nvSpPr>
-          <p:cNvPr id="35" name="Rounded Rectangle 34"/>
+          <p:cNvPr id="33" name="Rounded Rectangle 32"/>
           <p:cNvSpPr/>
           <p:nvPr/>
         </p:nvSpPr>
@@ -21547,7 +21271,7 @@
       </p:sp>
       <p:sp>
         <p:nvSpPr>
-          <p:cNvPr id="36" name="TextBox 35"/>
+          <p:cNvPr id="34" name="TextBox 33"/>
           <p:cNvSpPr txBox="1"/>
           <p:nvPr/>
         </p:nvSpPr>
@@ -21593,7 +21317,7 @@
       </p:sp>
       <p:sp>
         <p:nvSpPr>
-          <p:cNvPr id="37" name="TextBox 36"/>
+          <p:cNvPr id="35" name="TextBox 34"/>
           <p:cNvSpPr txBox="1"/>
           <p:nvPr/>
         </p:nvSpPr>
@@ -21639,7 +21363,7 @@
       </p:sp>
       <p:sp>
         <p:nvSpPr>
-          <p:cNvPr id="38" name="TextBox 37"/>
+          <p:cNvPr id="36" name="TextBox 35"/>
           <p:cNvSpPr txBox="1"/>
           <p:nvPr/>
         </p:nvSpPr>
@@ -21685,7 +21409,7 @@
       </p:sp>
       <p:cxnSp>
         <p:nvCxnSpPr>
-          <p:cNvPr id="39" name="Connector 38"/>
+          <p:cNvPr id="37" name="Connector 36"/>
           <p:cNvCxnSpPr/>
           <p:nvPr/>
         </p:nvCxnSpPr>
@@ -21708,7 +21432,7 @@
       </p:cxnSp>
       <p:cxnSp>
         <p:nvCxnSpPr>
-          <p:cNvPr id="40" name="Connector 39"/>
+          <p:cNvPr id="38" name="Connector 37"/>
           <p:cNvCxnSpPr/>
           <p:nvPr/>
         </p:nvCxnSpPr>
@@ -21731,7 +21455,7 @@
       </p:cxnSp>
       <p:sp>
         <p:nvSpPr>
-          <p:cNvPr id="41" name="TextBox 40"/>
+          <p:cNvPr id="39" name="TextBox 38"/>
           <p:cNvSpPr txBox="1"/>
           <p:nvPr/>
         </p:nvSpPr>
@@ -21777,7 +21501,7 @@
       </p:sp>
       <p:cxnSp>
         <p:nvCxnSpPr>
-          <p:cNvPr id="42" name="Connector 41"/>
+          <p:cNvPr id="40" name="Connector 39"/>
           <p:cNvCxnSpPr/>
           <p:nvPr/>
         </p:nvCxnSpPr>
@@ -21800,7 +21524,7 @@
       </p:cxnSp>
       <p:sp>
         <p:nvSpPr>
-          <p:cNvPr id="43" name="Rounded Rectangle 42"/>
+          <p:cNvPr id="41" name="Rounded Rectangle 40"/>
           <p:cNvSpPr/>
           <p:nvPr/>
         </p:nvSpPr>
@@ -21848,7 +21572,7 @@
       </p:sp>
       <p:sp>
         <p:nvSpPr>
-          <p:cNvPr id="44" name="Oval 43"/>
+          <p:cNvPr id="42" name="Oval 41"/>
           <p:cNvSpPr/>
           <p:nvPr/>
         </p:nvSpPr>
@@ -21894,7 +21618,7 @@
       </p:sp>
       <p:sp>
         <p:nvSpPr>
-          <p:cNvPr id="45" name="TextBox 44"/>
+          <p:cNvPr id="43" name="TextBox 42"/>
           <p:cNvSpPr txBox="1"/>
           <p:nvPr/>
         </p:nvSpPr>
@@ -21940,7 +21664,7 @@
       </p:sp>
       <p:sp>
         <p:nvSpPr>
-          <p:cNvPr id="46" name="TextBox 45"/>
+          <p:cNvPr id="44" name="TextBox 43"/>
           <p:cNvSpPr txBox="1"/>
           <p:nvPr/>
         </p:nvSpPr>
@@ -21986,7 +21710,7 @@
       </p:sp>
       <p:sp>
         <p:nvSpPr>
-          <p:cNvPr id="47" name="TextBox 46"/>
+          <p:cNvPr id="45" name="TextBox 44"/>
           <p:cNvSpPr txBox="1"/>
           <p:nvPr/>
         </p:nvSpPr>
@@ -22032,7 +21756,7 @@
       </p:sp>
       <p:sp>
         <p:nvSpPr>
-          <p:cNvPr id="48" name="TextBox 47"/>
+          <p:cNvPr id="46" name="TextBox 45"/>
           <p:cNvSpPr txBox="1"/>
           <p:nvPr/>
         </p:nvSpPr>
@@ -22078,7 +21802,7 @@
       </p:sp>
       <p:sp>
         <p:nvSpPr>
-          <p:cNvPr id="49" name="TextBox 48"/>
+          <p:cNvPr id="47" name="TextBox 46"/>
           <p:cNvSpPr txBox="1"/>
           <p:nvPr/>
         </p:nvSpPr>
@@ -22124,7 +21848,7 @@
       </p:sp>
       <p:sp>
         <p:nvSpPr>
-          <p:cNvPr id="50" name="Rounded Rectangle 49"/>
+          <p:cNvPr id="48" name="Rounded Rectangle 47"/>
           <p:cNvSpPr/>
           <p:nvPr/>
         </p:nvSpPr>
@@ -22172,7 +21896,7 @@
       </p:sp>
       <p:sp>
         <p:nvSpPr>
-          <p:cNvPr id="51" name="TextBox 50"/>
+          <p:cNvPr id="49" name="TextBox 48"/>
           <p:cNvSpPr txBox="1"/>
           <p:nvPr/>
         </p:nvSpPr>
@@ -22241,7 +21965,7 @@
       </p:sp>
       <p:sp>
         <p:nvSpPr>
-          <p:cNvPr id="52" name="Rounded Rectangle 51"/>
+          <p:cNvPr id="50" name="Rounded Rectangle 49"/>
           <p:cNvSpPr/>
           <p:nvPr/>
         </p:nvSpPr>
@@ -22289,7 +22013,7 @@
       </p:sp>
       <p:sp>
         <p:nvSpPr>
-          <p:cNvPr id="53" name="TextBox 52"/>
+          <p:cNvPr id="51" name="TextBox 50"/>
           <p:cNvSpPr txBox="1"/>
           <p:nvPr/>
         </p:nvSpPr>
@@ -22358,7 +22082,7 @@
       </p:sp>
       <p:cxnSp>
         <p:nvCxnSpPr>
-          <p:cNvPr id="54" name="Connector 53"/>
+          <p:cNvPr id="52" name="Connector 51"/>
           <p:cNvCxnSpPr/>
           <p:nvPr/>
         </p:nvCxnSpPr>
@@ -22381,7 +22105,7 @@
       </p:cxnSp>
       <p:sp>
         <p:nvSpPr>
-          <p:cNvPr id="55" name="Rounded Rectangle 54"/>
+          <p:cNvPr id="53" name="Rounded Rectangle 52"/>
           <p:cNvSpPr/>
           <p:nvPr/>
         </p:nvSpPr>
@@ -22429,7 +22153,7 @@
       </p:sp>
       <p:sp>
         <p:nvSpPr>
-          <p:cNvPr id="56" name="Oval 55"/>
+          <p:cNvPr id="54" name="Oval 53"/>
           <p:cNvSpPr/>
           <p:nvPr/>
         </p:nvSpPr>
@@ -22475,7 +22199,7 @@
       </p:sp>
       <p:sp>
         <p:nvSpPr>
-          <p:cNvPr id="57" name="TextBox 56"/>
+          <p:cNvPr id="55" name="TextBox 54"/>
           <p:cNvSpPr txBox="1"/>
           <p:nvPr/>
         </p:nvSpPr>
@@ -22521,7 +22245,7 @@
       </p:sp>
       <p:sp>
         <p:nvSpPr>
-          <p:cNvPr id="58" name="TextBox 57"/>
+          <p:cNvPr id="56" name="TextBox 55"/>
           <p:cNvSpPr txBox="1"/>
           <p:nvPr/>
         </p:nvSpPr>
@@ -22567,7 +22291,7 @@
       </p:sp>
       <p:sp>
         <p:nvSpPr>
-          <p:cNvPr id="59" name="TextBox 58"/>
+          <p:cNvPr id="57" name="TextBox 56"/>
           <p:cNvSpPr txBox="1"/>
           <p:nvPr/>
         </p:nvSpPr>
@@ -22613,7 +22337,7 @@
       </p:sp>
       <p:sp>
         <p:nvSpPr>
-          <p:cNvPr id="60" name="TextBox 59"/>
+          <p:cNvPr id="58" name="TextBox 57"/>
           <p:cNvSpPr txBox="1"/>
           <p:nvPr/>
         </p:nvSpPr>
@@ -22659,7 +22383,7 @@
       </p:sp>
       <p:sp>
         <p:nvSpPr>
-          <p:cNvPr id="61" name="TextBox 60"/>
+          <p:cNvPr id="59" name="TextBox 58"/>
           <p:cNvSpPr txBox="1"/>
           <p:nvPr/>
         </p:nvSpPr>
@@ -22705,7 +22429,7 @@
       </p:sp>
       <p:sp>
         <p:nvSpPr>
-          <p:cNvPr id="62" name="TextBox 61"/>
+          <p:cNvPr id="60" name="TextBox 59"/>
           <p:cNvSpPr txBox="1"/>
           <p:nvPr/>
         </p:nvSpPr>
@@ -22751,7 +22475,7 @@
       </p:sp>
       <p:sp>
         <p:nvSpPr>
-          <p:cNvPr id="63" name="TextBox 62"/>
+          <p:cNvPr id="61" name="TextBox 60"/>
           <p:cNvSpPr txBox="1"/>
           <p:nvPr/>
         </p:nvSpPr>
@@ -22797,7 +22521,7 @@
       </p:sp>
       <p:sp>
         <p:nvSpPr>
-          <p:cNvPr id="64" name="TextBox 63"/>
+          <p:cNvPr id="62" name="TextBox 61"/>
           <p:cNvSpPr txBox="1"/>
           <p:nvPr/>
         </p:nvSpPr>
@@ -22843,7 +22567,7 @@
       </p:sp>
       <p:sp>
         <p:nvSpPr>
-          <p:cNvPr id="65" name="Rounded Rectangle 64"/>
+          <p:cNvPr id="63" name="Rounded Rectangle 62"/>
           <p:cNvSpPr/>
           <p:nvPr/>
         </p:nvSpPr>
@@ -22891,7 +22615,7 @@
       </p:sp>
       <p:sp>
         <p:nvSpPr>
-          <p:cNvPr id="66" name="Rounded Rectangle 65"/>
+          <p:cNvPr id="64" name="Rounded Rectangle 63"/>
           <p:cNvSpPr/>
           <p:nvPr/>
         </p:nvSpPr>
@@ -22937,7 +22661,7 @@
       </p:sp>
       <p:sp>
         <p:nvSpPr>
-          <p:cNvPr id="67" name="TextBox 66"/>
+          <p:cNvPr id="65" name="TextBox 64"/>
           <p:cNvSpPr txBox="1"/>
           <p:nvPr/>
         </p:nvSpPr>
@@ -22993,7 +22717,7 @@
       </p:sp>
       <p:sp>
         <p:nvSpPr>
-          <p:cNvPr id="68" name="Rounded Rectangle 67"/>
+          <p:cNvPr id="66" name="Rounded Rectangle 65"/>
           <p:cNvSpPr/>
           <p:nvPr/>
         </p:nvSpPr>
@@ -23041,7 +22765,7 @@
       </p:sp>
       <p:sp>
         <p:nvSpPr>
-          <p:cNvPr id="69" name="Rounded Rectangle 68"/>
+          <p:cNvPr id="67" name="Rounded Rectangle 66"/>
           <p:cNvSpPr/>
           <p:nvPr/>
         </p:nvSpPr>
@@ -23087,7 +22811,7 @@
       </p:sp>
       <p:sp>
         <p:nvSpPr>
-          <p:cNvPr id="70" name="TextBox 69"/>
+          <p:cNvPr id="68" name="TextBox 67"/>
           <p:cNvSpPr txBox="1"/>
           <p:nvPr/>
         </p:nvSpPr>
@@ -23143,7 +22867,7 @@
       </p:sp>
       <p:sp>
         <p:nvSpPr>
-          <p:cNvPr id="71" name="Rounded Rectangle 70"/>
+          <p:cNvPr id="69" name="Rounded Rectangle 68"/>
           <p:cNvSpPr/>
           <p:nvPr/>
         </p:nvSpPr>
@@ -23191,7 +22915,7 @@
       </p:sp>
       <p:sp>
         <p:nvSpPr>
-          <p:cNvPr id="72" name="Rounded Rectangle 71"/>
+          <p:cNvPr id="70" name="Rounded Rectangle 69"/>
           <p:cNvSpPr/>
           <p:nvPr/>
         </p:nvSpPr>
@@ -23237,7 +22961,7 @@
       </p:sp>
       <p:sp>
         <p:nvSpPr>
-          <p:cNvPr id="73" name="TextBox 72"/>
+          <p:cNvPr id="71" name="TextBox 70"/>
           <p:cNvSpPr txBox="1"/>
           <p:nvPr/>
         </p:nvSpPr>
@@ -23293,7 +23017,7 @@
       </p:sp>
       <p:sp>
         <p:nvSpPr>
-          <p:cNvPr id="74" name="Rounded Rectangle 73"/>
+          <p:cNvPr id="72" name="Rounded Rectangle 71"/>
           <p:cNvSpPr/>
           <p:nvPr/>
         </p:nvSpPr>
@@ -23341,7 +23065,7 @@
       </p:sp>
       <p:sp>
         <p:nvSpPr>
-          <p:cNvPr id="75" name="Rounded Rectangle 74"/>
+          <p:cNvPr id="73" name="Rounded Rectangle 72"/>
           <p:cNvSpPr/>
           <p:nvPr/>
         </p:nvSpPr>
@@ -23387,7 +23111,7 @@
       </p:sp>
       <p:sp>
         <p:nvSpPr>
-          <p:cNvPr id="76" name="TextBox 75"/>
+          <p:cNvPr id="74" name="TextBox 73"/>
           <p:cNvSpPr txBox="1"/>
           <p:nvPr/>
         </p:nvSpPr>
@@ -23443,7 +23167,7 @@
       </p:sp>
       <p:cxnSp>
         <p:nvCxnSpPr>
-          <p:cNvPr id="77" name="Connector 76"/>
+          <p:cNvPr id="75" name="Connector 74"/>
           <p:cNvCxnSpPr/>
           <p:nvPr/>
         </p:nvCxnSpPr>
@@ -23466,7 +23190,7 @@
       </p:cxnSp>
       <p:sp>
         <p:nvSpPr>
-          <p:cNvPr id="78" name="Rounded Rectangle 77"/>
+          <p:cNvPr id="76" name="Rounded Rectangle 75"/>
           <p:cNvSpPr/>
           <p:nvPr/>
         </p:nvSpPr>
@@ -23514,7 +23238,7 @@
       </p:sp>
       <p:sp>
         <p:nvSpPr>
-          <p:cNvPr id="79" name="TextBox 78"/>
+          <p:cNvPr id="77" name="TextBox 76"/>
           <p:cNvSpPr txBox="1"/>
           <p:nvPr/>
         </p:nvSpPr>
@@ -23560,7 +23284,7 @@
       </p:sp>
       <p:cxnSp>
         <p:nvCxnSpPr>
-          <p:cNvPr id="80" name="Connector 79"/>
+          <p:cNvPr id="78" name="Connector 77"/>
           <p:cNvCxnSpPr/>
           <p:nvPr/>
         </p:nvCxnSpPr>
@@ -23583,7 +23307,7 @@
       </p:cxnSp>
       <p:sp>
         <p:nvSpPr>
-          <p:cNvPr id="81" name="TextBox 80"/>
+          <p:cNvPr id="79" name="TextBox 78"/>
           <p:cNvSpPr txBox="1"/>
           <p:nvPr/>
         </p:nvSpPr>
@@ -23629,7 +23353,7 @@
       </p:sp>
       <p:cxnSp>
         <p:nvCxnSpPr>
-          <p:cNvPr id="82" name="Connector 81"/>
+          <p:cNvPr id="80" name="Connector 79"/>
           <p:cNvCxnSpPr/>
           <p:nvPr/>
         </p:nvCxnSpPr>
@@ -23652,7 +23376,7 @@
       </p:cxnSp>
       <p:sp>
         <p:nvSpPr>
-          <p:cNvPr id="83" name="TextBox 82"/>
+          <p:cNvPr id="81" name="TextBox 80"/>
           <p:cNvSpPr txBox="1"/>
           <p:nvPr/>
         </p:nvSpPr>
@@ -23698,7 +23422,7 @@
       </p:sp>
       <p:sp>
         <p:nvSpPr>
-          <p:cNvPr id="84" name="Rounded Rectangle 83"/>
+          <p:cNvPr id="82" name="Rounded Rectangle 81"/>
           <p:cNvSpPr/>
           <p:nvPr/>
         </p:nvSpPr>
@@ -23746,7 +23470,7 @@
       </p:sp>
       <p:sp>
         <p:nvSpPr>
-          <p:cNvPr id="85" name="Oval 84"/>
+          <p:cNvPr id="83" name="Oval 82"/>
           <p:cNvSpPr/>
           <p:nvPr/>
         </p:nvSpPr>
@@ -23792,7 +23516,7 @@
       </p:sp>
       <p:sp>
         <p:nvSpPr>
-          <p:cNvPr id="86" name="TextBox 85"/>
+          <p:cNvPr id="84" name="TextBox 83"/>
           <p:cNvSpPr txBox="1"/>
           <p:nvPr/>
         </p:nvSpPr>
@@ -23838,7 +23562,7 @@
       </p:sp>
       <p:sp>
         <p:nvSpPr>
-          <p:cNvPr id="87" name="TextBox 86"/>
+          <p:cNvPr id="85" name="TextBox 84"/>
           <p:cNvSpPr txBox="1"/>
           <p:nvPr/>
         </p:nvSpPr>
@@ -23884,7 +23608,7 @@
       </p:sp>
       <p:sp>
         <p:nvSpPr>
-          <p:cNvPr id="88" name="TextBox 87"/>
+          <p:cNvPr id="86" name="TextBox 85"/>
           <p:cNvSpPr txBox="1"/>
           <p:nvPr/>
         </p:nvSpPr>
@@ -23930,7 +23654,7 @@
       </p:sp>
       <p:sp>
         <p:nvSpPr>
-          <p:cNvPr id="89" name="TextBox 88"/>
+          <p:cNvPr id="87" name="TextBox 86"/>
           <p:cNvSpPr txBox="1"/>
           <p:nvPr/>
         </p:nvSpPr>
@@ -23976,7 +23700,7 @@
       </p:sp>
       <p:sp>
         <p:nvSpPr>
-          <p:cNvPr id="90" name="TextBox 89"/>
+          <p:cNvPr id="88" name="TextBox 87"/>
           <p:cNvSpPr txBox="1"/>
           <p:nvPr/>
         </p:nvSpPr>
@@ -24022,7 +23746,7 @@
       </p:sp>
       <p:sp>
         <p:nvSpPr>
-          <p:cNvPr id="91" name="Rounded Rectangle 90"/>
+          <p:cNvPr id="89" name="Rounded Rectangle 88"/>
           <p:cNvSpPr/>
           <p:nvPr/>
         </p:nvSpPr>
@@ -24070,7 +23794,7 @@
       </p:sp>
       <p:sp>
         <p:nvSpPr>
-          <p:cNvPr id="92" name="TextBox 91"/>
+          <p:cNvPr id="90" name="TextBox 89"/>
           <p:cNvSpPr txBox="1"/>
           <p:nvPr/>
         </p:nvSpPr>
@@ -24116,7 +23840,7 @@
       </p:sp>
       <p:sp>
         <p:nvSpPr>
-          <p:cNvPr id="93" name="TextBox 92"/>
+          <p:cNvPr id="91" name="TextBox 90"/>
           <p:cNvSpPr txBox="1"/>
           <p:nvPr/>
         </p:nvSpPr>
@@ -24162,7 +23886,7 @@
       </p:sp>
       <p:sp>
         <p:nvSpPr>
-          <p:cNvPr id="94" name="TextBox 93"/>
+          <p:cNvPr id="92" name="TextBox 91"/>
           <p:cNvSpPr txBox="1"/>
           <p:nvPr/>
         </p:nvSpPr>
@@ -24208,7 +23932,7 @@
       </p:sp>
       <p:sp>
         <p:nvSpPr>
-          <p:cNvPr id="95" name="TextBox 94"/>
+          <p:cNvPr id="93" name="TextBox 92"/>
           <p:cNvSpPr txBox="1"/>
           <p:nvPr/>
         </p:nvSpPr>
@@ -24254,7 +23978,7 @@
       </p:sp>
       <p:sp>
         <p:nvSpPr>
-          <p:cNvPr id="96" name="TextBox 95"/>
+          <p:cNvPr id="94" name="TextBox 93"/>
           <p:cNvSpPr txBox="1"/>
           <p:nvPr/>
         </p:nvSpPr>
@@ -24300,7 +24024,7 @@
       </p:sp>
       <p:sp>
         <p:nvSpPr>
-          <p:cNvPr id="97" name="Rounded Rectangle 96"/>
+          <p:cNvPr id="95" name="Rounded Rectangle 94"/>
           <p:cNvSpPr/>
           <p:nvPr/>
         </p:nvSpPr>
@@ -24348,7 +24072,7 @@
       </p:sp>
       <p:sp>
         <p:nvSpPr>
-          <p:cNvPr id="98" name="TextBox 97"/>
+          <p:cNvPr id="96" name="TextBox 95"/>
           <p:cNvSpPr txBox="1"/>
           <p:nvPr/>
         </p:nvSpPr>
@@ -24394,7 +24118,7 @@
       </p:sp>
       <p:sp>
         <p:nvSpPr>
-          <p:cNvPr id="99" name="TextBox 98"/>
+          <p:cNvPr id="97" name="TextBox 96"/>
           <p:cNvSpPr txBox="1"/>
           <p:nvPr/>
         </p:nvSpPr>
@@ -24440,7 +24164,7 @@
       </p:sp>
       <p:sp>
         <p:nvSpPr>
-          <p:cNvPr id="100" name="TextBox 99"/>
+          <p:cNvPr id="98" name="TextBox 97"/>
           <p:cNvSpPr txBox="1"/>
           <p:nvPr/>
         </p:nvSpPr>
@@ -24486,7 +24210,7 @@
       </p:sp>
       <p:sp>
         <p:nvSpPr>
-          <p:cNvPr id="101" name="TextBox 100"/>
+          <p:cNvPr id="99" name="TextBox 98"/>
           <p:cNvSpPr txBox="1"/>
           <p:nvPr/>
         </p:nvSpPr>
@@ -24532,7 +24256,7 @@
       </p:sp>
       <p:sp>
         <p:nvSpPr>
-          <p:cNvPr id="102" name="TextBox 101"/>
+          <p:cNvPr id="100" name="TextBox 99"/>
           <p:cNvSpPr txBox="1"/>
           <p:nvPr/>
         </p:nvSpPr>
@@ -24578,7 +24302,7 @@
       </p:sp>
       <p:cxnSp>
         <p:nvCxnSpPr>
-          <p:cNvPr id="103" name="Connector 102"/>
+          <p:cNvPr id="101" name="Connector 100"/>
           <p:cNvCxnSpPr/>
           <p:nvPr/>
         </p:nvCxnSpPr>
@@ -24601,7 +24325,7 @@
       </p:cxnSp>
       <p:sp>
         <p:nvSpPr>
-          <p:cNvPr id="104" name="Rounded Rectangle 103"/>
+          <p:cNvPr id="102" name="Rounded Rectangle 101"/>
           <p:cNvSpPr/>
           <p:nvPr/>
         </p:nvSpPr>
@@ -24649,7 +24373,7 @@
       </p:sp>
       <p:sp>
         <p:nvSpPr>
-          <p:cNvPr id="105" name="Oval 104"/>
+          <p:cNvPr id="103" name="Oval 102"/>
           <p:cNvSpPr/>
           <p:nvPr/>
         </p:nvSpPr>
@@ -24695,7 +24419,7 @@
       </p:sp>
       <p:sp>
         <p:nvSpPr>
-          <p:cNvPr id="106" name="TextBox 105"/>
+          <p:cNvPr id="104" name="TextBox 103"/>
           <p:cNvSpPr txBox="1"/>
           <p:nvPr/>
         </p:nvSpPr>
@@ -24741,7 +24465,7 @@
       </p:sp>
       <p:sp>
         <p:nvSpPr>
-          <p:cNvPr id="107" name="TextBox 106"/>
+          <p:cNvPr id="105" name="TextBox 104"/>
           <p:cNvSpPr txBox="1"/>
           <p:nvPr/>
         </p:nvSpPr>
@@ -24787,7 +24511,7 @@
       </p:sp>
       <p:sp>
         <p:nvSpPr>
-          <p:cNvPr id="108" name="TextBox 107"/>
+          <p:cNvPr id="106" name="TextBox 105"/>
           <p:cNvSpPr txBox="1"/>
           <p:nvPr/>
         </p:nvSpPr>
@@ -24833,7 +24557,7 @@
       </p:sp>
       <p:sp>
         <p:nvSpPr>
-          <p:cNvPr id="109" name="TextBox 108"/>
+          <p:cNvPr id="107" name="TextBox 106"/>
           <p:cNvSpPr txBox="1"/>
           <p:nvPr/>
         </p:nvSpPr>
@@ -24879,7 +24603,7 @@
       </p:sp>
       <p:sp>
         <p:nvSpPr>
-          <p:cNvPr id="110" name="TextBox 109"/>
+          <p:cNvPr id="108" name="TextBox 107"/>
           <p:cNvSpPr txBox="1"/>
           <p:nvPr/>
         </p:nvSpPr>
@@ -24925,7 +24649,7 @@
       </p:sp>
       <p:sp>
         <p:nvSpPr>
-          <p:cNvPr id="111" name="Rounded Rectangle 110"/>
+          <p:cNvPr id="109" name="Rounded Rectangle 108"/>
           <p:cNvSpPr/>
           <p:nvPr/>
         </p:nvSpPr>
@@ -24979,7 +24703,7 @@
       </p:sp>
       <p:sp>
         <p:nvSpPr>
-          <p:cNvPr id="112" name="TextBox 111"/>
+          <p:cNvPr id="110" name="TextBox 109"/>
           <p:cNvSpPr txBox="1"/>
           <p:nvPr/>
         </p:nvSpPr>
@@ -25071,7 +24795,7 @@
       </p:sp>
       <p:sp>
         <p:nvSpPr>
-          <p:cNvPr id="113" name="Rounded Rectangle 112"/>
+          <p:cNvPr id="111" name="Rounded Rectangle 110"/>
           <p:cNvSpPr/>
           <p:nvPr/>
         </p:nvSpPr>
@@ -25120,7 +24844,7 @@
       </p:sp>
       <p:sp>
         <p:nvSpPr>
-          <p:cNvPr id="114" name="Oval 113"/>
+          <p:cNvPr id="112" name="Oval 111"/>
           <p:cNvSpPr/>
           <p:nvPr/>
         </p:nvSpPr>
@@ -25166,7 +24890,7 @@
       </p:sp>
       <p:sp>
         <p:nvSpPr>
-          <p:cNvPr id="115" name="TextBox 114"/>
+          <p:cNvPr id="113" name="TextBox 112"/>
           <p:cNvSpPr txBox="1"/>
           <p:nvPr/>
         </p:nvSpPr>
@@ -25212,7 +24936,7 @@
       </p:sp>
       <p:sp>
         <p:nvSpPr>
-          <p:cNvPr id="116" name="TextBox 115"/>
+          <p:cNvPr id="114" name="TextBox 113"/>
           <p:cNvSpPr txBox="1"/>
           <p:nvPr/>
         </p:nvSpPr>
@@ -25258,7 +24982,7 @@
       </p:sp>
       <p:sp>
         <p:nvSpPr>
-          <p:cNvPr id="117" name="TextBox 116"/>
+          <p:cNvPr id="115" name="TextBox 114"/>
           <p:cNvSpPr txBox="1"/>
           <p:nvPr/>
         </p:nvSpPr>
@@ -25304,7 +25028,7 @@
       </p:sp>
       <p:sp>
         <p:nvSpPr>
-          <p:cNvPr id="118" name="TextBox 117"/>
+          <p:cNvPr id="116" name="TextBox 115"/>
           <p:cNvSpPr txBox="1"/>
           <p:nvPr/>
         </p:nvSpPr>
@@ -25351,7 +25075,7 @@
       </p:sp>
       <p:sp>
         <p:nvSpPr>
-          <p:cNvPr id="119" name="Rounded Rectangle 118"/>
+          <p:cNvPr id="117" name="Rounded Rectangle 116"/>
           <p:cNvSpPr/>
           <p:nvPr/>
         </p:nvSpPr>
@@ -25399,7 +25123,7 @@
       </p:sp>
       <p:sp>
         <p:nvSpPr>
-          <p:cNvPr id="120" name="TextBox 119"/>
+          <p:cNvPr id="118" name="TextBox 117"/>
           <p:cNvSpPr txBox="1"/>
           <p:nvPr/>
         </p:nvSpPr>
@@ -25468,7 +25192,7 @@
       </p:sp>
       <p:sp>
         <p:nvSpPr>
-          <p:cNvPr id="121" name="Rounded Rectangle 120"/>
+          <p:cNvPr id="119" name="Rounded Rectangle 118"/>
           <p:cNvSpPr/>
           <p:nvPr/>
         </p:nvSpPr>
@@ -25516,7 +25240,7 @@
       </p:sp>
       <p:sp>
         <p:nvSpPr>
-          <p:cNvPr id="122" name="TextBox 121"/>
+          <p:cNvPr id="120" name="TextBox 119"/>
           <p:cNvSpPr txBox="1"/>
           <p:nvPr/>
         </p:nvSpPr>
@@ -25585,7 +25309,7 @@
       </p:sp>
       <p:sp>
         <p:nvSpPr>
-          <p:cNvPr id="123" name="Rounded Rectangle 122"/>
+          <p:cNvPr id="121" name="Rounded Rectangle 120"/>
           <p:cNvSpPr/>
           <p:nvPr/>
         </p:nvSpPr>
@@ -25633,7 +25357,7 @@
       </p:sp>
       <p:sp>
         <p:nvSpPr>
-          <p:cNvPr id="124" name="TextBox 123"/>
+          <p:cNvPr id="122" name="TextBox 121"/>
           <p:cNvSpPr txBox="1"/>
           <p:nvPr/>
         </p:nvSpPr>
@@ -25702,7 +25426,7 @@
       </p:sp>
       <p:sp>
         <p:nvSpPr>
-          <p:cNvPr id="125" name="Rounded Rectangle 124"/>
+          <p:cNvPr id="123" name="Rounded Rectangle 122"/>
           <p:cNvSpPr/>
           <p:nvPr/>
         </p:nvSpPr>
@@ -25750,7 +25474,7 @@
       </p:sp>
       <p:sp>
         <p:nvSpPr>
-          <p:cNvPr id="126" name="TextBox 125"/>
+          <p:cNvPr id="124" name="TextBox 123"/>
           <p:cNvSpPr txBox="1"/>
           <p:nvPr/>
         </p:nvSpPr>
@@ -25819,7 +25543,7 @@
       </p:sp>
       <p:cxnSp>
         <p:nvCxnSpPr>
-          <p:cNvPr id="127" name="Connector 126"/>
+          <p:cNvPr id="125" name="Connector 124"/>
           <p:cNvCxnSpPr/>
           <p:nvPr/>
         </p:nvCxnSpPr>
@@ -25842,7 +25566,7 @@
       </p:cxnSp>
       <p:cxnSp>
         <p:nvCxnSpPr>
-          <p:cNvPr id="128" name="Connector 127"/>
+          <p:cNvPr id="126" name="Connector 125"/>
           <p:cNvCxnSpPr/>
           <p:nvPr/>
         </p:nvCxnSpPr>
@@ -25865,7 +25589,7 @@
       </p:cxnSp>
       <p:cxnSp>
         <p:nvCxnSpPr>
-          <p:cNvPr id="129" name="Connector 128"/>
+          <p:cNvPr id="127" name="Connector 126"/>
           <p:cNvCxnSpPr/>
           <p:nvPr/>
         </p:nvCxnSpPr>
@@ -25888,7 +25612,7 @@
       </p:cxnSp>
       <p:sp>
         <p:nvSpPr>
-          <p:cNvPr id="130" name="TextBox 129"/>
+          <p:cNvPr id="128" name="TextBox 127"/>
           <p:cNvSpPr txBox="1"/>
           <p:nvPr/>
         </p:nvSpPr>
@@ -25934,7 +25658,7 @@
       </p:sp>
       <p:cxnSp>
         <p:nvCxnSpPr>
-          <p:cNvPr id="131" name="Connector 130"/>
+          <p:cNvPr id="129" name="Connector 128"/>
           <p:cNvCxnSpPr/>
           <p:nvPr/>
         </p:nvCxnSpPr>
@@ -25957,7 +25681,7 @@
       </p:cxnSp>
       <p:cxnSp>
         <p:nvCxnSpPr>
-          <p:cNvPr id="132" name="Connector 131"/>
+          <p:cNvPr id="130" name="Connector 129"/>
           <p:cNvCxnSpPr/>
           <p:nvPr/>
         </p:nvCxnSpPr>
@@ -25980,7 +25704,7 @@
       </p:cxnSp>
       <p:cxnSp>
         <p:nvCxnSpPr>
-          <p:cNvPr id="133" name="Connector 132"/>
+          <p:cNvPr id="131" name="Connector 130"/>
           <p:cNvCxnSpPr/>
           <p:nvPr/>
         </p:nvCxnSpPr>
@@ -26004,7 +25728,7 @@
       </p:cxnSp>
       <p:sp>
         <p:nvSpPr>
-          <p:cNvPr id="134" name="TextBox 133"/>
+          <p:cNvPr id="132" name="TextBox 131"/>
           <p:cNvSpPr txBox="1"/>
           <p:nvPr/>
         </p:nvSpPr>
@@ -26050,7 +25774,7 @@
       </p:sp>
       <p:sp>
         <p:nvSpPr>
-          <p:cNvPr id="135" name="Rounded Rectangle 134"/>
+          <p:cNvPr id="133" name="Rounded Rectangle 132"/>
           <p:cNvSpPr/>
           <p:nvPr/>
         </p:nvSpPr>
@@ -26099,7 +25823,7 @@
       </p:sp>
       <p:sp>
         <p:nvSpPr>
-          <p:cNvPr id="136" name="TextBox 135"/>
+          <p:cNvPr id="134" name="TextBox 133"/>
           <p:cNvSpPr txBox="1"/>
           <p:nvPr/>
         </p:nvSpPr>
@@ -26155,7 +25879,7 @@
       </p:sp>
       <p:sp>
         <p:nvSpPr>
-          <p:cNvPr id="137" name="TextBox 136"/>
+          <p:cNvPr id="135" name="TextBox 134"/>
           <p:cNvSpPr txBox="1"/>
           <p:nvPr/>
         </p:nvSpPr>
@@ -26201,7 +25925,7 @@
       </p:sp>
       <p:sp>
         <p:nvSpPr>
-          <p:cNvPr id="138" name="Rounded Rectangle 137"/>
+          <p:cNvPr id="136" name="Rounded Rectangle 135"/>
           <p:cNvSpPr/>
           <p:nvPr/>
         </p:nvSpPr>
@@ -26249,7 +25973,7 @@
       </p:sp>
       <p:sp>
         <p:nvSpPr>
-          <p:cNvPr id="139" name="TextBox 138"/>
+          <p:cNvPr id="137" name="TextBox 136"/>
           <p:cNvSpPr txBox="1"/>
           <p:nvPr/>
         </p:nvSpPr>
@@ -26318,7 +26042,7 @@
       </p:sp>
       <p:sp>
         <p:nvSpPr>
-          <p:cNvPr id="140" name="Rounded Rectangle 139"/>
+          <p:cNvPr id="138" name="Rounded Rectangle 137"/>
           <p:cNvSpPr/>
           <p:nvPr/>
         </p:nvSpPr>
@@ -26366,7 +26090,7 @@
       </p:sp>
       <p:sp>
         <p:nvSpPr>
-          <p:cNvPr id="141" name="TextBox 140"/>
+          <p:cNvPr id="139" name="TextBox 138"/>
           <p:cNvSpPr txBox="1"/>
           <p:nvPr/>
         </p:nvSpPr>
@@ -26435,7 +26159,7 @@
       </p:sp>
       <p:sp>
         <p:nvSpPr>
-          <p:cNvPr id="142" name="Rounded Rectangle 141"/>
+          <p:cNvPr id="140" name="Rounded Rectangle 139"/>
           <p:cNvSpPr/>
           <p:nvPr/>
         </p:nvSpPr>
@@ -26483,7 +26207,7 @@
       </p:sp>
       <p:sp>
         <p:nvSpPr>
-          <p:cNvPr id="143" name="TextBox 142"/>
+          <p:cNvPr id="141" name="TextBox 140"/>
           <p:cNvSpPr txBox="1"/>
           <p:nvPr/>
         </p:nvSpPr>
@@ -26552,7 +26276,7 @@
       </p:sp>
       <p:sp>
         <p:nvSpPr>
-          <p:cNvPr id="144" name="Rounded Rectangle 143"/>
+          <p:cNvPr id="142" name="Rounded Rectangle 141"/>
           <p:cNvSpPr/>
           <p:nvPr/>
         </p:nvSpPr>
@@ -26600,7 +26324,7 @@
       </p:sp>
       <p:sp>
         <p:nvSpPr>
-          <p:cNvPr id="145" name="TextBox 144"/>
+          <p:cNvPr id="143" name="TextBox 142"/>
           <p:cNvSpPr txBox="1"/>
           <p:nvPr/>
         </p:nvSpPr>
@@ -26669,7 +26393,7 @@
       </p:sp>
       <p:cxnSp>
         <p:nvCxnSpPr>
-          <p:cNvPr id="146" name="Connector 145"/>
+          <p:cNvPr id="144" name="Connector 143"/>
           <p:cNvCxnSpPr/>
           <p:nvPr/>
         </p:nvCxnSpPr>
@@ -26693,7 +26417,7 @@
       </p:cxnSp>
       <p:cxnSp>
         <p:nvCxnSpPr>
-          <p:cNvPr id="147" name="Connector 146"/>
+          <p:cNvPr id="145" name="Connector 144"/>
           <p:cNvCxnSpPr/>
           <p:nvPr/>
         </p:nvCxnSpPr>
@@ -26717,7 +26441,7 @@
       </p:cxnSp>
       <p:cxnSp>
         <p:nvCxnSpPr>
-          <p:cNvPr id="148" name="Connector 147"/>
+          <p:cNvPr id="146" name="Connector 145"/>
           <p:cNvCxnSpPr/>
           <p:nvPr/>
         </p:nvCxnSpPr>
@@ -26740,7 +26464,7 @@
       </p:cxnSp>
       <p:cxnSp>
         <p:nvCxnSpPr>
-          <p:cNvPr id="149" name="Connector 148"/>
+          <p:cNvPr id="147" name="Connector 146"/>
           <p:cNvCxnSpPr/>
           <p:nvPr/>
         </p:nvCxnSpPr>
@@ -26763,7 +26487,7 @@
       </p:cxnSp>
       <p:cxnSp>
         <p:nvCxnSpPr>
-          <p:cNvPr id="150" name="Connector 149"/>
+          <p:cNvPr id="148" name="Connector 147"/>
           <p:cNvCxnSpPr/>
           <p:nvPr/>
         </p:nvCxnSpPr>
@@ -26786,7 +26510,7 @@
       </p:cxnSp>
       <p:cxnSp>
         <p:nvCxnSpPr>
-          <p:cNvPr id="151" name="Connector 150"/>
+          <p:cNvPr id="149" name="Connector 148"/>
           <p:cNvCxnSpPr/>
           <p:nvPr/>
         </p:nvCxnSpPr>
@@ -26810,7 +26534,7 @@
       </p:cxnSp>
       <p:sp>
         <p:nvSpPr>
-          <p:cNvPr id="152" name="TextBox 151"/>
+          <p:cNvPr id="150" name="TextBox 149"/>
           <p:cNvSpPr txBox="1"/>
           <p:nvPr/>
         </p:nvSpPr>
@@ -26856,7 +26580,7 @@
       </p:sp>
       <p:sp>
         <p:nvSpPr>
-          <p:cNvPr id="153" name="Rounded Rectangle 152"/>
+          <p:cNvPr id="151" name="Rounded Rectangle 150"/>
           <p:cNvSpPr/>
           <p:nvPr/>
         </p:nvSpPr>
@@ -26904,7 +26628,7 @@
       </p:sp>
       <p:sp>
         <p:nvSpPr>
-          <p:cNvPr id="154" name="TextBox 153"/>
+          <p:cNvPr id="152" name="TextBox 151"/>
           <p:cNvSpPr txBox="1"/>
           <p:nvPr/>
         </p:nvSpPr>
@@ -26950,7 +26674,7 @@
       </p:sp>
       <p:sp>
         <p:nvSpPr>
-          <p:cNvPr id="155" name="Rounded Rectangle 154"/>
+          <p:cNvPr id="153" name="Rounded Rectangle 152"/>
           <p:cNvSpPr/>
           <p:nvPr/>
         </p:nvSpPr>
@@ -26998,7 +26722,7 @@
       </p:sp>
       <p:sp>
         <p:nvSpPr>
-          <p:cNvPr id="156" name="TextBox 155"/>
+          <p:cNvPr id="154" name="TextBox 153"/>
           <p:cNvSpPr txBox="1"/>
           <p:nvPr/>
         </p:nvSpPr>
@@ -27044,7 +26768,7 @@
       </p:sp>
       <p:sp>
         <p:nvSpPr>
-          <p:cNvPr id="157" name="TextBox 156"/>
+          <p:cNvPr id="155" name="TextBox 154"/>
           <p:cNvSpPr txBox="1"/>
           <p:nvPr/>
         </p:nvSpPr>
@@ -27090,7 +26814,7 @@
       </p:sp>
       <p:sp>
         <p:nvSpPr>
-          <p:cNvPr id="158" name="Rounded Rectangle 157"/>
+          <p:cNvPr id="156" name="Rounded Rectangle 155"/>
           <p:cNvSpPr/>
           <p:nvPr/>
         </p:nvSpPr>
@@ -27138,7 +26862,7 @@
       </p:sp>
       <p:sp>
         <p:nvSpPr>
-          <p:cNvPr id="159" name="TextBox 158"/>
+          <p:cNvPr id="157" name="TextBox 156"/>
           <p:cNvSpPr txBox="1"/>
           <p:nvPr/>
         </p:nvSpPr>
@@ -27184,7 +26908,7 @@
       </p:sp>
       <p:sp>
         <p:nvSpPr>
-          <p:cNvPr id="160" name="TextBox 159"/>
+          <p:cNvPr id="158" name="TextBox 157"/>
           <p:cNvSpPr txBox="1"/>
           <p:nvPr/>
         </p:nvSpPr>
@@ -27230,7 +26954,7 @@
       </p:sp>
       <p:sp>
         <p:nvSpPr>
-          <p:cNvPr id="161" name="TextBox 160"/>
+          <p:cNvPr id="159" name="TextBox 158"/>
           <p:cNvSpPr txBox="1"/>
           <p:nvPr/>
         </p:nvSpPr>
@@ -27276,7 +27000,7 @@
       </p:sp>
       <p:sp>
         <p:nvSpPr>
-          <p:cNvPr id="162" name="Rounded Rectangle 161"/>
+          <p:cNvPr id="160" name="Rounded Rectangle 159"/>
           <p:cNvSpPr/>
           <p:nvPr/>
         </p:nvSpPr>
@@ -27324,7 +27048,7 @@
       </p:sp>
       <p:sp>
         <p:nvSpPr>
-          <p:cNvPr id="163" name="TextBox 162"/>
+          <p:cNvPr id="161" name="TextBox 160"/>
           <p:cNvSpPr txBox="1"/>
           <p:nvPr/>
         </p:nvSpPr>
@@ -27370,7 +27094,7 @@
       </p:sp>
       <p:sp>
         <p:nvSpPr>
-          <p:cNvPr id="164" name="TextBox 163"/>
+          <p:cNvPr id="162" name="TextBox 161"/>
           <p:cNvSpPr txBox="1"/>
           <p:nvPr/>
         </p:nvSpPr>
@@ -27426,7 +27150,7 @@
       </p:sp>
       <p:sp>
         <p:nvSpPr>
-          <p:cNvPr id="165" name="TextBox 164"/>
+          <p:cNvPr id="163" name="TextBox 162"/>
           <p:cNvSpPr txBox="1"/>
           <p:nvPr/>
         </p:nvSpPr>
@@ -27482,7 +27206,7 @@
       </p:sp>
       <p:sp>
         <p:nvSpPr>
-          <p:cNvPr id="166" name="TextBox 165"/>
+          <p:cNvPr id="164" name="TextBox 163"/>
           <p:cNvSpPr txBox="1"/>
           <p:nvPr/>
         </p:nvSpPr>
@@ -27538,7 +27262,7 @@
       </p:sp>
       <p:sp>
         <p:nvSpPr>
-          <p:cNvPr id="167" name="TextBox 166"/>
+          <p:cNvPr id="165" name="TextBox 164"/>
           <p:cNvSpPr txBox="1"/>
           <p:nvPr/>
         </p:nvSpPr>
@@ -27594,7 +27318,7 @@
       </p:sp>
       <p:sp>
         <p:nvSpPr>
-          <p:cNvPr id="168" name="TextBox 167"/>
+          <p:cNvPr id="166" name="TextBox 165"/>
           <p:cNvSpPr txBox="1"/>
           <p:nvPr/>
         </p:nvSpPr>
@@ -27650,7 +27374,7 @@
       </p:sp>
       <p:sp>
         <p:nvSpPr>
-          <p:cNvPr id="169" name="Rounded Rectangle 168"/>
+          <p:cNvPr id="167" name="Rounded Rectangle 166"/>
           <p:cNvSpPr/>
           <p:nvPr/>
         </p:nvSpPr>
@@ -27698,7 +27422,7 @@
       </p:sp>
       <p:sp>
         <p:nvSpPr>
-          <p:cNvPr id="170" name="TextBox 169"/>
+          <p:cNvPr id="168" name="TextBox 167"/>
           <p:cNvSpPr txBox="1"/>
           <p:nvPr/>
         </p:nvSpPr>
@@ -27744,7 +27468,7 @@
       </p:sp>
       <p:sp>
         <p:nvSpPr>
-          <p:cNvPr id="171" name="TextBox 170"/>
+          <p:cNvPr id="169" name="TextBox 168"/>
           <p:cNvSpPr txBox="1"/>
           <p:nvPr/>
         </p:nvSpPr>
@@ -27784,52 +27508,6 @@
                 <a:ea typeface="Microsoft YaHei"/>
               </a:rPr>
               <a:t>读侧完全托管、UC 治理原生；代价是计算引擎绑定 Databricks（数据仍为开放 Iceberg，随时可换引擎），且 Serverless / NCC 需 Premium 层。</a:t>
-            </a:r>
-          </a:p>
-        </p:txBody>
-      </p:sp>
-      <p:sp>
-        <p:nvSpPr>
-          <p:cNvPr id="172" name="TextBox 171"/>
-          <p:cNvSpPr txBox="1"/>
-          <p:nvPr/>
-        </p:nvSpPr>
-        <p:spPr>
-          <a:xfrm>
-            <a:off x="8001000" y="6254496"/>
-            <a:ext cx="3986784" cy="219456"/>
-          </a:xfrm>
-          <a:prstGeom prst="rect">
-            <a:avLst/>
-          </a:prstGeom>
-          <a:noFill/>
-        </p:spPr>
-        <p:txBody>
-          <a:bodyPr wrap="square" lIns="0" rIns="0" tIns="0" bIns="0" anchor="ctr">
-            <a:noAutofit/>
-          </a:bodyPr>
-          <a:lstStyle/>
-          <a:p>
-            <a:pPr algn="ctr">
-              <a:lnSpc>
-                <a:spcPct val="112000"/>
-              </a:lnSpc>
-              <a:spcBef>
-                <a:spcPts val="0"/>
-              </a:spcBef>
-              <a:spcAft>
-                <a:spcPts val="0"/>
-              </a:spcAft>
-            </a:pPr>
-            <a:r>
-              <a:rPr sz="580" b="0" i="0">
-                <a:solidFill>
-                  <a:srgbClr val="94A3B8"/>
-                </a:solidFill>
-                <a:latin typeface="Segoe UI"/>
-                <a:ea typeface="Microsoft YaHei"/>
-              </a:rPr>
-              <a:t>编号沿用 Architecture.html 原图（B-00 / B-03 / B-04 / B-05）</a:t>
             </a:r>
           </a:p>
         </p:txBody>

--- a/report/方案B_B2_架构图集.pptx
+++ b/report/方案B_B2_架构图集.pptx
@@ -25082,7 +25082,7 @@
         <p:spPr>
           <a:xfrm>
             <a:off x="2231136" y="6108192"/>
-            <a:ext cx="1188720" cy="384048"/>
+            <a:ext cx="1225296" cy="384048"/>
           </a:xfrm>
           <a:prstGeom prst="roundRect">
             <a:avLst>
@@ -25130,7 +25130,7 @@
         <p:spPr>
           <a:xfrm>
             <a:off x="2258568" y="6108192"/>
-            <a:ext cx="1133856" cy="384048"/>
+            <a:ext cx="1170432" cy="384048"/>
           </a:xfrm>
           <a:prstGeom prst="rect">
             <a:avLst/>
@@ -25198,8 +25198,8 @@
         </p:nvSpPr>
         <p:spPr>
           <a:xfrm>
-            <a:off x="3474720" y="6108192"/>
-            <a:ext cx="1188720" cy="384048"/>
+            <a:off x="3657600" y="6108192"/>
+            <a:ext cx="1225296" cy="384048"/>
           </a:xfrm>
           <a:prstGeom prst="roundRect">
             <a:avLst>
@@ -25246,8 +25246,8 @@
         </p:nvSpPr>
         <p:spPr>
           <a:xfrm>
-            <a:off x="3502151" y="6108192"/>
-            <a:ext cx="1133856" cy="384048"/>
+            <a:off x="3685032" y="6108192"/>
+            <a:ext cx="1170432" cy="384048"/>
           </a:xfrm>
           <a:prstGeom prst="rect">
             <a:avLst/>
@@ -25315,8 +25315,8 @@
         </p:nvSpPr>
         <p:spPr>
           <a:xfrm>
-            <a:off x="4718304" y="6108192"/>
-            <a:ext cx="1188720" cy="384048"/>
+            <a:off x="5084064" y="6108192"/>
+            <a:ext cx="1225296" cy="384048"/>
           </a:xfrm>
           <a:prstGeom prst="roundRect">
             <a:avLst>
@@ -25363,8 +25363,8 @@
         </p:nvSpPr>
         <p:spPr>
           <a:xfrm>
-            <a:off x="4745736" y="6108192"/>
-            <a:ext cx="1133856" cy="384048"/>
+            <a:off x="5111496" y="6108192"/>
+            <a:ext cx="1170432" cy="384048"/>
           </a:xfrm>
           <a:prstGeom prst="rect">
             <a:avLst/>
@@ -25432,8 +25432,8 @@
         </p:nvSpPr>
         <p:spPr>
           <a:xfrm>
-            <a:off x="5961888" y="6108192"/>
-            <a:ext cx="1188720" cy="384048"/>
+            <a:off x="6510528" y="6108192"/>
+            <a:ext cx="1225296" cy="384048"/>
           </a:xfrm>
           <a:prstGeom prst="roundRect">
             <a:avLst>
@@ -25480,8 +25480,8 @@
         </p:nvSpPr>
         <p:spPr>
           <a:xfrm>
-            <a:off x="5989320" y="6108192"/>
-            <a:ext cx="1133856" cy="384048"/>
+            <a:off x="6537960" y="6108192"/>
+            <a:ext cx="1170432" cy="384048"/>
           </a:xfrm>
           <a:prstGeom prst="rect">
             <a:avLst/>
@@ -25549,8 +25549,8 @@
         </p:nvCxnSpPr>
         <p:spPr>
           <a:xfrm>
-            <a:off x="3438144" y="6300216"/>
-            <a:ext cx="91440" cy="0"/>
+            <a:off x="3483864" y="6300216"/>
+            <a:ext cx="146304" cy="0"/>
           </a:xfrm>
           <a:prstGeom prst="line">
             <a:avLst/>
@@ -25572,8 +25572,8 @@
         </p:nvCxnSpPr>
         <p:spPr>
           <a:xfrm>
-            <a:off x="4681728" y="6300216"/>
-            <a:ext cx="91440" cy="0"/>
+            <a:off x="4910328" y="6300216"/>
+            <a:ext cx="146304" cy="0"/>
           </a:xfrm>
           <a:prstGeom prst="line">
             <a:avLst/>
@@ -25595,8 +25595,8 @@
         </p:nvCxnSpPr>
         <p:spPr>
           <a:xfrm>
-            <a:off x="5925312" y="6300216"/>
-            <a:ext cx="91440" cy="0"/>
+            <a:off x="6336792" y="6300216"/>
+            <a:ext cx="146304" cy="0"/>
           </a:xfrm>
           <a:prstGeom prst="line">
             <a:avLst/>

--- a/report/方案B_B2_架构图集.pptx
+++ b/report/方案B_B2_架构图集.pptx
@@ -14995,7 +14995,7 @@
         </p:nvSpPr>
         <p:spPr>
           <a:xfrm>
-            <a:off x="347472" y="630936"/>
+            <a:off x="365760" y="630936"/>
             <a:ext cx="1828800" cy="155448"/>
           </a:xfrm>
           <a:prstGeom prst="rect">
@@ -15041,7 +15041,7 @@
         </p:nvSpPr>
         <p:spPr>
           <a:xfrm>
-            <a:off x="548640" y="841248"/>
+            <a:off x="365760" y="841248"/>
             <a:ext cx="1828800" cy="384048"/>
           </a:xfrm>
           <a:prstGeom prst="roundRect">
@@ -15095,7 +15095,7 @@
         </p:nvSpPr>
         <p:spPr>
           <a:xfrm>
-            <a:off x="576072" y="841248"/>
+            <a:off x="393192" y="841248"/>
             <a:ext cx="1773936" cy="384048"/>
           </a:xfrm>
           <a:prstGeom prst="rect">
@@ -15164,7 +15164,7 @@
         </p:nvSpPr>
         <p:spPr>
           <a:xfrm>
-            <a:off x="721141" y="959434"/>
+            <a:off x="538261" y="959434"/>
             <a:ext cx="57332" cy="57332"/>
           </a:xfrm>
           <a:prstGeom prst="ellipse">
@@ -15208,7 +15208,7 @@
         </p:nvSpPr>
         <p:spPr>
           <a:xfrm>
-            <a:off x="699858" y="1026322"/>
+            <a:off x="516978" y="1026322"/>
             <a:ext cx="99898" cy="65150"/>
           </a:xfrm>
           <a:prstGeom prst="roundRect">
@@ -15254,7 +15254,7 @@
         </p:nvSpPr>
         <p:spPr>
           <a:xfrm>
-            <a:off x="2523744" y="841248"/>
+            <a:off x="2340864" y="841248"/>
             <a:ext cx="1828800" cy="384048"/>
           </a:xfrm>
           <a:prstGeom prst="roundRect">
@@ -15308,7 +15308,7 @@
         </p:nvSpPr>
         <p:spPr>
           <a:xfrm>
-            <a:off x="2551176" y="841248"/>
+            <a:off x="2368296" y="841248"/>
             <a:ext cx="1773936" cy="384048"/>
           </a:xfrm>
           <a:prstGeom prst="rect">
@@ -15377,7 +15377,7 @@
         </p:nvSpPr>
         <p:spPr>
           <a:xfrm>
-            <a:off x="2696245" y="959434"/>
+            <a:off x="2513365" y="959434"/>
             <a:ext cx="57332" cy="57332"/>
           </a:xfrm>
           <a:prstGeom prst="ellipse">
@@ -15421,7 +15421,7 @@
         </p:nvSpPr>
         <p:spPr>
           <a:xfrm>
-            <a:off x="2674962" y="1026322"/>
+            <a:off x="2492082" y="1026322"/>
             <a:ext cx="99898" cy="65150"/>
           </a:xfrm>
           <a:prstGeom prst="roundRect">
@@ -15467,7 +15467,7 @@
         </p:nvSpPr>
         <p:spPr>
           <a:xfrm>
-            <a:off x="4498848" y="841248"/>
+            <a:off x="4315968" y="841248"/>
             <a:ext cx="1828800" cy="384048"/>
           </a:xfrm>
           <a:prstGeom prst="roundRect">
@@ -15521,7 +15521,7 @@
         </p:nvSpPr>
         <p:spPr>
           <a:xfrm>
-            <a:off x="4526280" y="841248"/>
+            <a:off x="4343400" y="841248"/>
             <a:ext cx="1773936" cy="384048"/>
           </a:xfrm>
           <a:prstGeom prst="rect">
@@ -15590,7 +15590,7 @@
         </p:nvSpPr>
         <p:spPr>
           <a:xfrm>
-            <a:off x="4671349" y="959434"/>
+            <a:off x="4488469" y="959434"/>
             <a:ext cx="57332" cy="57332"/>
           </a:xfrm>
           <a:prstGeom prst="ellipse">
@@ -15634,7 +15634,7 @@
         </p:nvSpPr>
         <p:spPr>
           <a:xfrm>
-            <a:off x="4650066" y="1026322"/>
+            <a:off x="4467186" y="1026322"/>
             <a:ext cx="99898" cy="65150"/>
           </a:xfrm>
           <a:prstGeom prst="roundRect">
@@ -15680,7 +15680,7 @@
         </p:nvSpPr>
         <p:spPr>
           <a:xfrm>
-            <a:off x="9646920" y="822960"/>
+            <a:off x="9546336" y="822960"/>
             <a:ext cx="2212848" cy="420624"/>
           </a:xfrm>
           <a:prstGeom prst="roundRect">
@@ -15734,7 +15734,7 @@
         </p:nvSpPr>
         <p:spPr>
           <a:xfrm>
-            <a:off x="9674352" y="822960"/>
+            <a:off x="9573767" y="822960"/>
             <a:ext cx="2157984" cy="420624"/>
           </a:xfrm>
           <a:prstGeom prst="rect">
@@ -15966,7 +15966,7 @@
         </p:nvSpPr>
         <p:spPr>
           <a:xfrm>
-            <a:off x="347472" y="1490472"/>
+            <a:off x="365760" y="1490472"/>
             <a:ext cx="2743200" cy="155448"/>
           </a:xfrm>
           <a:prstGeom prst="rect">
@@ -16012,7 +16012,7 @@
         </p:nvSpPr>
         <p:spPr>
           <a:xfrm>
-            <a:off x="548640" y="1700784"/>
+            <a:off x="365760" y="1700784"/>
             <a:ext cx="2468880" cy="566928"/>
           </a:xfrm>
           <a:prstGeom prst="roundRect">
@@ -16066,7 +16066,7 @@
         </p:nvSpPr>
         <p:spPr>
           <a:xfrm>
-            <a:off x="576072" y="1700784"/>
+            <a:off x="393192" y="1700784"/>
             <a:ext cx="2414016" cy="566928"/>
           </a:xfrm>
           <a:prstGeom prst="rect">
@@ -16135,7 +16135,7 @@
         </p:nvSpPr>
         <p:spPr>
           <a:xfrm>
-            <a:off x="3200400" y="1700784"/>
+            <a:off x="3017520" y="1700784"/>
             <a:ext cx="4846320" cy="566928"/>
           </a:xfrm>
           <a:prstGeom prst="roundRect">
@@ -16189,7 +16189,7 @@
         </p:nvSpPr>
         <p:spPr>
           <a:xfrm>
-            <a:off x="3255264" y="1700784"/>
+            <a:off x="3072384" y="1700784"/>
             <a:ext cx="4736592" cy="566928"/>
           </a:xfrm>
           <a:prstGeom prst="rect">
@@ -16281,7 +16281,7 @@
         </p:nvCxnSpPr>
         <p:spPr>
           <a:xfrm>
-            <a:off x="3035808" y="1984248"/>
+            <a:off x="2852928" y="1984248"/>
             <a:ext cx="146304" cy="0"/>
           </a:xfrm>
           <a:prstGeom prst="line">
@@ -16304,7 +16304,7 @@
         </p:nvSpPr>
         <p:spPr>
           <a:xfrm>
-            <a:off x="9646920" y="1700784"/>
+            <a:off x="9546336" y="1700784"/>
             <a:ext cx="2212848" cy="566928"/>
           </a:xfrm>
           <a:prstGeom prst="roundRect">
@@ -16358,7 +16358,7 @@
         </p:nvSpPr>
         <p:spPr>
           <a:xfrm>
-            <a:off x="9674352" y="1700784"/>
+            <a:off x="9573767" y="1700784"/>
             <a:ext cx="2157984" cy="566928"/>
           </a:xfrm>
           <a:prstGeom prst="rect">
@@ -16427,8 +16427,8 @@
         </p:nvCxnSpPr>
         <p:spPr>
           <a:xfrm>
-            <a:off x="8046720" y="1984248"/>
-            <a:ext cx="1581912" cy="0"/>
+            <a:off x="7882127" y="1984248"/>
+            <a:ext cx="1636777" cy="0"/>
           </a:xfrm>
           <a:prstGeom prst="line">
             <a:avLst/>
@@ -16450,7 +16450,7 @@
         </p:nvSpPr>
         <p:spPr>
           <a:xfrm>
-            <a:off x="8138160" y="1828800"/>
+            <a:off x="7973568" y="1828800"/>
             <a:ext cx="1463040" cy="128016"/>
           </a:xfrm>
           <a:prstGeom prst="rect">
@@ -16544,7 +16544,7 @@
         </p:nvSpPr>
         <p:spPr>
           <a:xfrm>
-            <a:off x="347472" y="2569464"/>
+            <a:off x="365760" y="2569464"/>
             <a:ext cx="3108960" cy="155448"/>
           </a:xfrm>
           <a:prstGeom prst="rect">
@@ -18442,7 +18442,7 @@
         </p:nvSpPr>
         <p:spPr>
           <a:xfrm>
-            <a:off x="347472" y="4892040"/>
+            <a:off x="365760" y="4892040"/>
             <a:ext cx="3657600" cy="155448"/>
           </a:xfrm>
           <a:prstGeom prst="rect">
@@ -18488,8 +18488,8 @@
         </p:nvSpPr>
         <p:spPr>
           <a:xfrm>
-            <a:off x="548640" y="5084064"/>
-            <a:ext cx="3474720" cy="420624"/>
+            <a:off x="365760" y="5084064"/>
+            <a:ext cx="3566160" cy="420624"/>
           </a:xfrm>
           <a:prstGeom prst="roundRect">
             <a:avLst>
@@ -18542,8 +18542,8 @@
         </p:nvSpPr>
         <p:spPr>
           <a:xfrm>
-            <a:off x="576072" y="5084064"/>
-            <a:ext cx="3419856" cy="420624"/>
+            <a:off x="393192" y="5084064"/>
+            <a:ext cx="3511296" cy="420624"/>
           </a:xfrm>
           <a:prstGeom prst="rect">
             <a:avLst/>
@@ -18611,7 +18611,7 @@
         </p:nvSpPr>
         <p:spPr>
           <a:xfrm>
-            <a:off x="4206240" y="5084064"/>
+            <a:off x="4114800" y="5084064"/>
             <a:ext cx="3291840" cy="420624"/>
           </a:xfrm>
           <a:prstGeom prst="roundRect">
@@ -18665,7 +18665,7 @@
         </p:nvSpPr>
         <p:spPr>
           <a:xfrm>
-            <a:off x="4233672" y="5084064"/>
+            <a:off x="4142232" y="5084064"/>
             <a:ext cx="3236976" cy="420624"/>
           </a:xfrm>
           <a:prstGeom prst="rect">
@@ -18734,8 +18734,8 @@
         </p:nvSpPr>
         <p:spPr>
           <a:xfrm>
-            <a:off x="7680960" y="5084064"/>
-            <a:ext cx="3886200" cy="420624"/>
+            <a:off x="7589520" y="5084064"/>
+            <a:ext cx="4169663" cy="420624"/>
           </a:xfrm>
           <a:prstGeom prst="roundRect">
             <a:avLst>
@@ -18788,8 +18788,8 @@
         </p:nvSpPr>
         <p:spPr>
           <a:xfrm>
-            <a:off x="7708392" y="5084064"/>
-            <a:ext cx="3831336" cy="420624"/>
+            <a:off x="7616952" y="5084064"/>
+            <a:ext cx="4114800" cy="420624"/>
           </a:xfrm>
           <a:prstGeom prst="rect">
             <a:avLst/>
@@ -19108,8 +19108,8 @@
         </p:nvSpPr>
         <p:spPr>
           <a:xfrm>
-            <a:off x="201168" y="5705856"/>
-            <a:ext cx="7498079" cy="365760"/>
+            <a:off x="365760" y="5705856"/>
+            <a:ext cx="7333488" cy="365760"/>
           </a:xfrm>
           <a:prstGeom prst="roundRect">
             <a:avLst>
@@ -19156,8 +19156,8 @@
         </p:nvSpPr>
         <p:spPr>
           <a:xfrm>
-            <a:off x="365760" y="5705856"/>
-            <a:ext cx="7223760" cy="365760"/>
+            <a:off x="512064" y="5705856"/>
+            <a:ext cx="7040880" cy="365760"/>
           </a:xfrm>
           <a:prstGeom prst="rect">
             <a:avLst/>
@@ -19212,8 +19212,8 @@
         </p:nvSpPr>
         <p:spPr>
           <a:xfrm>
-            <a:off x="7827264" y="5705856"/>
-            <a:ext cx="4169663" cy="365760"/>
+            <a:off x="7900416" y="5705856"/>
+            <a:ext cx="3858768" cy="365760"/>
           </a:xfrm>
           <a:prstGeom prst="roundRect">
             <a:avLst>
@@ -19260,8 +19260,8 @@
         </p:nvSpPr>
         <p:spPr>
           <a:xfrm>
-            <a:off x="7991856" y="5705856"/>
-            <a:ext cx="3840480" cy="365760"/>
+            <a:off x="8065008" y="5705856"/>
+            <a:ext cx="3529584" cy="365760"/>
           </a:xfrm>
           <a:prstGeom prst="rect">
             <a:avLst/>
@@ -19316,7 +19316,7 @@
         </p:nvSpPr>
         <p:spPr>
           <a:xfrm>
-            <a:off x="548640" y="6245352"/>
+            <a:off x="365760" y="6245352"/>
             <a:ext cx="82296" cy="82296"/>
           </a:xfrm>
           <a:prstGeom prst="ellipse">
@@ -19360,7 +19360,7 @@
         </p:nvSpPr>
         <p:spPr>
           <a:xfrm>
-            <a:off x="676656" y="6199632"/>
+            <a:off x="493776" y="6199632"/>
             <a:ext cx="1737360" cy="146304"/>
           </a:xfrm>
           <a:prstGeom prst="rect">
@@ -19406,7 +19406,7 @@
         </p:nvSpPr>
         <p:spPr>
           <a:xfrm>
-            <a:off x="2123236" y="6245352"/>
+            <a:off x="1940356" y="6245352"/>
             <a:ext cx="82296" cy="82296"/>
           </a:xfrm>
           <a:prstGeom prst="ellipse">
@@ -19450,7 +19450,7 @@
         </p:nvSpPr>
         <p:spPr>
           <a:xfrm>
-            <a:off x="2251252" y="6199632"/>
+            <a:off x="2068372" y="6199632"/>
             <a:ext cx="1737360" cy="146304"/>
           </a:xfrm>
           <a:prstGeom prst="rect">
@@ -19496,7 +19496,7 @@
         </p:nvSpPr>
         <p:spPr>
           <a:xfrm>
-            <a:off x="3322929" y="6245352"/>
+            <a:off x="3140049" y="6245352"/>
             <a:ext cx="82296" cy="82296"/>
           </a:xfrm>
           <a:prstGeom prst="ellipse">
@@ -19540,7 +19540,7 @@
         </p:nvSpPr>
         <p:spPr>
           <a:xfrm>
-            <a:off x="3450945" y="6199632"/>
+            <a:off x="3268065" y="6199632"/>
             <a:ext cx="1737360" cy="146304"/>
           </a:xfrm>
           <a:prstGeom prst="rect">
@@ -19586,7 +19586,7 @@
         </p:nvSpPr>
         <p:spPr>
           <a:xfrm>
-            <a:off x="4522622" y="6245352"/>
+            <a:off x="4339742" y="6245352"/>
             <a:ext cx="82296" cy="82296"/>
           </a:xfrm>
           <a:prstGeom prst="ellipse">
@@ -19630,7 +19630,7 @@
         </p:nvSpPr>
         <p:spPr>
           <a:xfrm>
-            <a:off x="4650638" y="6199632"/>
+            <a:off x="4467758" y="6199632"/>
             <a:ext cx="1737360" cy="146304"/>
           </a:xfrm>
           <a:prstGeom prst="rect">
@@ -19676,7 +19676,7 @@
         </p:nvSpPr>
         <p:spPr>
           <a:xfrm>
-            <a:off x="5797296" y="6245352"/>
+            <a:off x="5614416" y="6245352"/>
             <a:ext cx="82296" cy="82296"/>
           </a:xfrm>
           <a:prstGeom prst="ellipse">
@@ -19720,7 +19720,7 @@
         </p:nvSpPr>
         <p:spPr>
           <a:xfrm>
-            <a:off x="5925312" y="6199632"/>
+            <a:off x="5742432" y="6199632"/>
             <a:ext cx="1737360" cy="146304"/>
           </a:xfrm>
           <a:prstGeom prst="rect">

--- a/report/方案B_B2_架构图集.pptx
+++ b/report/方案B_B2_架构图集.pptx
@@ -16013,7 +16013,7 @@
         <p:spPr>
           <a:xfrm>
             <a:off x="365760" y="1700784"/>
-            <a:ext cx="2468880" cy="566928"/>
+            <a:ext cx="2688336" cy="566928"/>
           </a:xfrm>
           <a:prstGeom prst="roundRect">
             <a:avLst>
@@ -16067,7 +16067,7 @@
         <p:spPr>
           <a:xfrm>
             <a:off x="393192" y="1700784"/>
-            <a:ext cx="2414016" cy="566928"/>
+            <a:ext cx="2633472" cy="566928"/>
           </a:xfrm>
           <a:prstGeom prst="rect">
             <a:avLst/>
@@ -16135,8 +16135,8 @@
         </p:nvSpPr>
         <p:spPr>
           <a:xfrm>
-            <a:off x="3017520" y="1700784"/>
-            <a:ext cx="4846320" cy="566928"/>
+            <a:off x="3557016" y="1700784"/>
+            <a:ext cx="5285232" cy="566928"/>
           </a:xfrm>
           <a:prstGeom prst="roundRect">
             <a:avLst>
@@ -16189,8 +16189,8 @@
         </p:nvSpPr>
         <p:spPr>
           <a:xfrm>
-            <a:off x="3072384" y="1700784"/>
-            <a:ext cx="4736592" cy="566928"/>
+            <a:off x="3611880" y="1700784"/>
+            <a:ext cx="5175504" cy="566928"/>
           </a:xfrm>
           <a:prstGeom prst="rect">
             <a:avLst/>
@@ -16281,8 +16281,8 @@
         </p:nvCxnSpPr>
         <p:spPr>
           <a:xfrm>
-            <a:off x="2852928" y="1984248"/>
-            <a:ext cx="146304" cy="0"/>
+            <a:off x="3108960" y="1984248"/>
+            <a:ext cx="393192" cy="0"/>
           </a:xfrm>
           <a:prstGeom prst="line">
             <a:avLst/>
@@ -16304,8 +16304,8 @@
         </p:nvSpPr>
         <p:spPr>
           <a:xfrm>
-            <a:off x="9546336" y="1700784"/>
-            <a:ext cx="2212848" cy="566928"/>
+            <a:off x="9345168" y="1700784"/>
+            <a:ext cx="2414016" cy="566928"/>
           </a:xfrm>
           <a:prstGeom prst="roundRect">
             <a:avLst>
@@ -16358,8 +16358,8 @@
         </p:nvSpPr>
         <p:spPr>
           <a:xfrm>
-            <a:off x="9573767" y="1700784"/>
-            <a:ext cx="2157984" cy="566928"/>
+            <a:off x="9372600" y="1700784"/>
+            <a:ext cx="2359152" cy="566928"/>
           </a:xfrm>
           <a:prstGeom prst="rect">
             <a:avLst/>
@@ -16427,8 +16427,8 @@
         </p:nvCxnSpPr>
         <p:spPr>
           <a:xfrm>
-            <a:off x="7882127" y="1984248"/>
-            <a:ext cx="1636777" cy="0"/>
+            <a:off x="8897112" y="1984248"/>
+            <a:ext cx="393192" cy="0"/>
           </a:xfrm>
           <a:prstGeom prst="line">
             <a:avLst/>
@@ -16450,7 +16450,7 @@
         </p:nvSpPr>
         <p:spPr>
           <a:xfrm>
-            <a:off x="7973568" y="1828800"/>
+            <a:off x="8357616" y="1828800"/>
             <a:ext cx="1463040" cy="128016"/>
           </a:xfrm>
           <a:prstGeom prst="rect">

--- a/report/方案B_B2_架构图集.pptx
+++ b/report/方案B_B2_架构图集.pptx
@@ -9,6 +9,7 @@
     <p:sldId id="257" r:id="rId8"/>
     <p:sldId id="258" r:id="rId9"/>
     <p:sldId id="259" r:id="rId10"/>
+    <p:sldId id="260" r:id="rId11"/>
   </p:sldIdLst>
   <p:sldSz cx="12191695" cy="6858000" type="screen4x3"/>
   <p:notesSz cx="6858000" cy="9144000"/>
@@ -4116,7 +4117,7 @@
                 <a:latin typeface="Segoe UI"/>
                 <a:ea typeface="Microsoft YaHei"/>
               </a:rPr>
-              <a:t>三张核心架构图 · 全部以 PPT 原生形状绘制，文字 / 颜色 / 位置均可直接编辑</a:t>
+              <a:t>三张架构图 + 一页数据加密设计 · 全部以 PPT 原生形状绘制，可直接编辑</a:t>
             </a:r>
           </a:p>
         </p:txBody>
@@ -4129,12 +4130,12 @@
         </p:nvSpPr>
         <p:spPr>
           <a:xfrm>
-            <a:off x="841248" y="3310128"/>
-            <a:ext cx="5806440" cy="713232"/>
+            <a:off x="841248" y="3163824"/>
+            <a:ext cx="5806440" cy="658368"/>
           </a:xfrm>
           <a:prstGeom prst="roundRect">
             <a:avLst>
-              <a:gd name="adj" fmla="val 11538"/>
+              <a:gd name="adj" fmla="val 12500"/>
             </a:avLst>
           </a:prstGeom>
           <a:solidFill>
@@ -4183,7 +4184,7 @@
         </p:nvSpPr>
         <p:spPr>
           <a:xfrm>
-            <a:off x="969264" y="3438144"/>
+            <a:off x="969264" y="3264408"/>
             <a:ext cx="457200" cy="457200"/>
           </a:xfrm>
           <a:prstGeom prst="roundRect">
@@ -4231,7 +4232,7 @@
         </p:nvSpPr>
         <p:spPr>
           <a:xfrm>
-            <a:off x="969264" y="3438144"/>
+            <a:off x="969264" y="3264408"/>
             <a:ext cx="457200" cy="457200"/>
           </a:xfrm>
           <a:prstGeom prst="rect">
@@ -4277,7 +4278,7 @@
         </p:nvSpPr>
         <p:spPr>
           <a:xfrm>
-            <a:off x="1572768" y="3429000"/>
+            <a:off x="1572768" y="3255264"/>
             <a:ext cx="4937760" cy="237744"/>
           </a:xfrm>
           <a:prstGeom prst="rect">
@@ -4323,7 +4324,7 @@
         </p:nvSpPr>
         <p:spPr>
           <a:xfrm>
-            <a:off x="1572768" y="3694176"/>
+            <a:off x="1572768" y="3520440"/>
             <a:ext cx="4937760" cy="219456"/>
           </a:xfrm>
           <a:prstGeom prst="rect">
@@ -4369,12 +4370,12 @@
         </p:nvSpPr>
         <p:spPr>
           <a:xfrm>
-            <a:off x="841248" y="4169664"/>
-            <a:ext cx="5806440" cy="713232"/>
+            <a:off x="841248" y="3931920"/>
+            <a:ext cx="5806440" cy="658368"/>
           </a:xfrm>
           <a:prstGeom prst="roundRect">
             <a:avLst>
-              <a:gd name="adj" fmla="val 11538"/>
+              <a:gd name="adj" fmla="val 12500"/>
             </a:avLst>
           </a:prstGeom>
           <a:solidFill>
@@ -4423,7 +4424,7 @@
         </p:nvSpPr>
         <p:spPr>
           <a:xfrm>
-            <a:off x="969264" y="4297680"/>
+            <a:off x="969264" y="4032504"/>
             <a:ext cx="457200" cy="457200"/>
           </a:xfrm>
           <a:prstGeom prst="roundRect">
@@ -4471,7 +4472,7 @@
         </p:nvSpPr>
         <p:spPr>
           <a:xfrm>
-            <a:off x="969264" y="4297680"/>
+            <a:off x="969264" y="4032504"/>
             <a:ext cx="457200" cy="457200"/>
           </a:xfrm>
           <a:prstGeom prst="rect">
@@ -4517,53 +4518,53 @@
         </p:nvSpPr>
         <p:spPr>
           <a:xfrm>
+            <a:off x="1572768" y="4023359"/>
+            <a:ext cx="4937760" cy="237744"/>
+          </a:xfrm>
+          <a:prstGeom prst="rect">
+            <a:avLst/>
+          </a:prstGeom>
+          <a:noFill/>
+        </p:spPr>
+        <p:txBody>
+          <a:bodyPr wrap="square" lIns="0" rIns="0" tIns="0" bIns="0" anchor="t">
+            <a:noAutofit/>
+          </a:bodyPr>
+          <a:lstStyle/>
+          <a:p>
+            <a:pPr algn="l">
+              <a:lnSpc>
+                <a:spcPct val="112000"/>
+              </a:lnSpc>
+              <a:spcBef>
+                <a:spcPts val="0"/>
+              </a:spcBef>
+              <a:spcAft>
+                <a:spcPts val="0"/>
+              </a:spcAft>
+            </a:pPr>
+            <a:r>
+              <a:rPr sz="1050" b="1" i="0">
+                <a:solidFill>
+                  <a:srgbClr val="0F172A"/>
+                </a:solidFill>
+                <a:latin typeface="Segoe UI"/>
+                <a:ea typeface="Microsoft YaHei"/>
+              </a:rPr>
+              <a:t>应用架构图 · 方案 B2（湖仓一体 · Databricks SQL Serverless 读）</a:t>
+            </a:r>
+          </a:p>
+        </p:txBody>
+      </p:sp>
+      <p:sp>
+        <p:nvSpPr>
+          <p:cNvPr id="35" name="TextBox 34"/>
+          <p:cNvSpPr txBox="1"/>
+          <p:nvPr/>
+        </p:nvSpPr>
+        <p:spPr>
+          <a:xfrm>
             <a:off x="1572768" y="4288536"/>
-            <a:ext cx="4937760" cy="237744"/>
-          </a:xfrm>
-          <a:prstGeom prst="rect">
-            <a:avLst/>
-          </a:prstGeom>
-          <a:noFill/>
-        </p:spPr>
-        <p:txBody>
-          <a:bodyPr wrap="square" lIns="0" rIns="0" tIns="0" bIns="0" anchor="t">
-            <a:noAutofit/>
-          </a:bodyPr>
-          <a:lstStyle/>
-          <a:p>
-            <a:pPr algn="l">
-              <a:lnSpc>
-                <a:spcPct val="112000"/>
-              </a:lnSpc>
-              <a:spcBef>
-                <a:spcPts val="0"/>
-              </a:spcBef>
-              <a:spcAft>
-                <a:spcPts val="0"/>
-              </a:spcAft>
-            </a:pPr>
-            <a:r>
-              <a:rPr sz="1050" b="1" i="0">
-                <a:solidFill>
-                  <a:srgbClr val="0F172A"/>
-                </a:solidFill>
-                <a:latin typeface="Segoe UI"/>
-                <a:ea typeface="Microsoft YaHei"/>
-              </a:rPr>
-              <a:t>应用架构图 · 方案 B2（湖仓一体 · Databricks SQL Serverless 读）</a:t>
-            </a:r>
-          </a:p>
-        </p:txBody>
-      </p:sp>
-      <p:sp>
-        <p:nvSpPr>
-          <p:cNvPr id="35" name="TextBox 34"/>
-          <p:cNvSpPr txBox="1"/>
-          <p:nvPr/>
-        </p:nvSpPr>
-        <p:spPr>
-          <a:xfrm>
-            <a:off x="1572768" y="4553712"/>
             <a:ext cx="4937760" cy="219456"/>
           </a:xfrm>
           <a:prstGeom prst="rect">
@@ -4609,12 +4610,12 @@
         </p:nvSpPr>
         <p:spPr>
           <a:xfrm>
-            <a:off x="841248" y="5029200"/>
-            <a:ext cx="5806440" cy="713232"/>
+            <a:off x="841248" y="4700016"/>
+            <a:ext cx="5806440" cy="658368"/>
           </a:xfrm>
           <a:prstGeom prst="roundRect">
             <a:avLst>
-              <a:gd name="adj" fmla="val 11538"/>
+              <a:gd name="adj" fmla="val 12500"/>
             </a:avLst>
           </a:prstGeom>
           <a:solidFill>
@@ -4663,7 +4664,7 @@
         </p:nvSpPr>
         <p:spPr>
           <a:xfrm>
-            <a:off x="969264" y="5157216"/>
+            <a:off x="969264" y="4800600"/>
             <a:ext cx="457200" cy="457200"/>
           </a:xfrm>
           <a:prstGeom prst="roundRect">
@@ -4711,7 +4712,7 @@
         </p:nvSpPr>
         <p:spPr>
           <a:xfrm>
-            <a:off x="969264" y="5157216"/>
+            <a:off x="969264" y="4800600"/>
             <a:ext cx="457200" cy="457200"/>
           </a:xfrm>
           <a:prstGeom prst="rect">
@@ -4757,7 +4758,7 @@
         </p:nvSpPr>
         <p:spPr>
           <a:xfrm>
-            <a:off x="1572768" y="5148072"/>
+            <a:off x="1572768" y="4791455"/>
             <a:ext cx="4937760" cy="237744"/>
           </a:xfrm>
           <a:prstGeom prst="rect">
@@ -4803,7 +4804,7 @@
         </p:nvSpPr>
         <p:spPr>
           <a:xfrm>
-            <a:off x="1572768" y="5413248"/>
+            <a:off x="1572768" y="5056631"/>
             <a:ext cx="4937760" cy="219456"/>
           </a:xfrm>
           <a:prstGeom prst="rect">
@@ -4843,13 +4844,253 @@
       </p:sp>
       <p:sp>
         <p:nvSpPr>
-          <p:cNvPr id="41" name="Rectangle 40"/>
+          <p:cNvPr id="41" name="Rounded Rectangle 40"/>
           <p:cNvSpPr/>
           <p:nvPr/>
         </p:nvSpPr>
         <p:spPr>
           <a:xfrm>
-            <a:off x="841248" y="6053328"/>
+            <a:off x="841248" y="5468112"/>
+            <a:ext cx="5806440" cy="658368"/>
+          </a:xfrm>
+          <a:prstGeom prst="roundRect">
+            <a:avLst>
+              <a:gd name="adj" fmla="val 12500"/>
+            </a:avLst>
+          </a:prstGeom>
+          <a:solidFill>
+            <a:srgbClr val="FFFFFF"/>
+          </a:solidFill>
+          <a:ln w="15240">
+            <a:solidFill>
+              <a:srgbClr val="E2E8F0"/>
+            </a:solidFill>
+          </a:ln>
+          <a:effectLst>
+            <a:outerShdw blurRad="55000" dist="22000" dir="5400000" rotWithShape="0">
+              <a:srgbClr val="0F172A">
+                <a:alpha val="12000"/>
+              </a:srgbClr>
+            </a:outerShdw>
+          </a:effectLst>
+        </p:spPr>
+        <p:style>
+          <a:lnRef idx="1">
+            <a:schemeClr val="accent1"/>
+          </a:lnRef>
+          <a:fillRef idx="3">
+            <a:schemeClr val="accent1"/>
+          </a:fillRef>
+          <a:effectRef idx="2">
+            <a:schemeClr val="accent1"/>
+          </a:effectRef>
+          <a:fontRef idx="minor">
+            <a:schemeClr val="lt1"/>
+          </a:fontRef>
+        </p:style>
+        <p:txBody>
+          <a:bodyPr rtlCol="0" anchor="ctr"/>
+          <a:lstStyle/>
+          <a:p>
+            <a:pPr algn="ctr"/>
+          </a:p>
+        </p:txBody>
+      </p:sp>
+      <p:sp>
+        <p:nvSpPr>
+          <p:cNvPr id="42" name="Rounded Rectangle 41"/>
+          <p:cNvSpPr/>
+          <p:nvPr/>
+        </p:nvSpPr>
+        <p:spPr>
+          <a:xfrm>
+            <a:off x="969264" y="5568696"/>
+            <a:ext cx="457200" cy="457200"/>
+          </a:xfrm>
+          <a:prstGeom prst="roundRect">
+            <a:avLst>
+              <a:gd name="adj" fmla="val 16000"/>
+            </a:avLst>
+          </a:prstGeom>
+          <a:solidFill>
+            <a:srgbClr val="EFF6FF"/>
+          </a:solidFill>
+          <a:ln w="15240">
+            <a:solidFill>
+              <a:srgbClr val="BFDBFE"/>
+            </a:solidFill>
+          </a:ln>
+          <a:effectLst/>
+        </p:spPr>
+        <p:style>
+          <a:lnRef idx="1">
+            <a:schemeClr val="accent1"/>
+          </a:lnRef>
+          <a:fillRef idx="3">
+            <a:schemeClr val="accent1"/>
+          </a:fillRef>
+          <a:effectRef idx="2">
+            <a:schemeClr val="accent1"/>
+          </a:effectRef>
+          <a:fontRef idx="minor">
+            <a:schemeClr val="lt1"/>
+          </a:fontRef>
+        </p:style>
+        <p:txBody>
+          <a:bodyPr rtlCol="0" anchor="ctr"/>
+          <a:lstStyle/>
+          <a:p>
+            <a:pPr algn="ctr"/>
+          </a:p>
+        </p:txBody>
+      </p:sp>
+      <p:sp>
+        <p:nvSpPr>
+          <p:cNvPr id="43" name="TextBox 42"/>
+          <p:cNvSpPr txBox="1"/>
+          <p:nvPr/>
+        </p:nvSpPr>
+        <p:spPr>
+          <a:xfrm>
+            <a:off x="969264" y="5568696"/>
+            <a:ext cx="457200" cy="457200"/>
+          </a:xfrm>
+          <a:prstGeom prst="rect">
+            <a:avLst/>
+          </a:prstGeom>
+          <a:noFill/>
+        </p:spPr>
+        <p:txBody>
+          <a:bodyPr wrap="square" lIns="0" rIns="0" tIns="0" bIns="0" anchor="ctr">
+            <a:noAutofit/>
+          </a:bodyPr>
+          <a:lstStyle/>
+          <a:p>
+            <a:pPr algn="ctr">
+              <a:lnSpc>
+                <a:spcPct val="112000"/>
+              </a:lnSpc>
+              <a:spcBef>
+                <a:spcPts val="0"/>
+              </a:spcBef>
+              <a:spcAft>
+                <a:spcPts val="0"/>
+              </a:spcAft>
+            </a:pPr>
+            <a:r>
+              <a:rPr sz="1300" b="1" i="0">
+                <a:solidFill>
+                  <a:srgbClr val="0078D4"/>
+                </a:solidFill>
+                <a:latin typeface="Consolas"/>
+                <a:ea typeface="Microsoft YaHei"/>
+              </a:rPr>
+              <a:t>04</a:t>
+            </a:r>
+          </a:p>
+        </p:txBody>
+      </p:sp>
+      <p:sp>
+        <p:nvSpPr>
+          <p:cNvPr id="44" name="TextBox 43"/>
+          <p:cNvSpPr txBox="1"/>
+          <p:nvPr/>
+        </p:nvSpPr>
+        <p:spPr>
+          <a:xfrm>
+            <a:off x="1572768" y="5559551"/>
+            <a:ext cx="4937760" cy="237744"/>
+          </a:xfrm>
+          <a:prstGeom prst="rect">
+            <a:avLst/>
+          </a:prstGeom>
+          <a:noFill/>
+        </p:spPr>
+        <p:txBody>
+          <a:bodyPr wrap="square" lIns="0" rIns="0" tIns="0" bIns="0" anchor="t">
+            <a:noAutofit/>
+          </a:bodyPr>
+          <a:lstStyle/>
+          <a:p>
+            <a:pPr algn="l">
+              <a:lnSpc>
+                <a:spcPct val="112000"/>
+              </a:lnSpc>
+              <a:spcBef>
+                <a:spcPts val="0"/>
+              </a:spcBef>
+              <a:spcAft>
+                <a:spcPts val="0"/>
+              </a:spcAft>
+            </a:pPr>
+            <a:r>
+              <a:rPr sz="1050" b="1" i="0">
+                <a:solidFill>
+                  <a:srgbClr val="0F172A"/>
+                </a:solidFill>
+                <a:latin typeface="Segoe UI"/>
+                <a:ea typeface="Microsoft YaHei"/>
+              </a:rPr>
+              <a:t>方案 B2 · 数据加密设计</a:t>
+            </a:r>
+          </a:p>
+        </p:txBody>
+      </p:sp>
+      <p:sp>
+        <p:nvSpPr>
+          <p:cNvPr id="45" name="TextBox 44"/>
+          <p:cNvSpPr txBox="1"/>
+          <p:nvPr/>
+        </p:nvSpPr>
+        <p:spPr>
+          <a:xfrm>
+            <a:off x="1572768" y="5824727"/>
+            <a:ext cx="4937760" cy="219456"/>
+          </a:xfrm>
+          <a:prstGeom prst="rect">
+            <a:avLst/>
+          </a:prstGeom>
+          <a:noFill/>
+        </p:spPr>
+        <p:txBody>
+          <a:bodyPr wrap="square" lIns="0" rIns="0" tIns="0" bIns="0" anchor="t">
+            <a:noAutofit/>
+          </a:bodyPr>
+          <a:lstStyle/>
+          <a:p>
+            <a:pPr algn="l">
+              <a:lnSpc>
+                <a:spcPct val="112000"/>
+              </a:lnSpc>
+              <a:spcBef>
+                <a:spcPts val="0"/>
+              </a:spcBef>
+              <a:spcAft>
+                <a:spcPts val="0"/>
+              </a:spcAft>
+            </a:pPr>
+            <a:r>
+              <a:rPr sz="750" b="0" i="0">
+                <a:solidFill>
+                  <a:srgbClr val="64748B"/>
+                </a:solidFill>
+                <a:latin typeface="Segoe UI"/>
+                <a:ea typeface="Microsoft YaHei"/>
+              </a:rPr>
+              <a:t>四层加密模型 · aes_encrypt + UC 列掩码 · 信封加密 / Crypto-Shredding</a:t>
+            </a:r>
+          </a:p>
+        </p:txBody>
+      </p:sp>
+      <p:sp>
+        <p:nvSpPr>
+          <p:cNvPr id="46" name="Rectangle 45"/>
+          <p:cNvSpPr/>
+          <p:nvPr/>
+        </p:nvSpPr>
+        <p:spPr>
+          <a:xfrm>
+            <a:off x="841248" y="6217920"/>
             <a:ext cx="5806440" cy="32004"/>
           </a:xfrm>
           <a:prstGeom prst="rect">
@@ -4887,13 +5128,13 @@
       </p:sp>
       <p:sp>
         <p:nvSpPr>
-          <p:cNvPr id="42" name="TextBox 41"/>
-          <p:cNvSpPr txBox="1"/>
-          <p:nvPr/>
-        </p:nvSpPr>
-        <p:spPr>
-          <a:xfrm>
-            <a:off x="841248" y="6163056"/>
+          <p:cNvPr id="47" name="TextBox 46"/>
+          <p:cNvSpPr txBox="1"/>
+          <p:nvPr/>
+        </p:nvSpPr>
+        <p:spPr>
+          <a:xfrm>
+            <a:off x="841248" y="6327648"/>
             <a:ext cx="5852160" cy="228600"/>
           </a:xfrm>
           <a:prstGeom prst="rect">
@@ -27508,6 +27749,4796 @@
                 <a:ea typeface="Microsoft YaHei"/>
               </a:rPr>
               <a:t>读侧完全托管、UC 治理原生；代价是计算引擎绑定 Databricks（数据仍为开放 Iceberg，随时可换引擎），且 Serverless / NCC 需 Premium 层。</a:t>
+            </a:r>
+          </a:p>
+        </p:txBody>
+      </p:sp>
+    </p:spTree>
+  </p:cSld>
+  <p:clrMapOvr>
+    <a:masterClrMapping/>
+  </p:clrMapOvr>
+</p:sld>
+</file>
+
+<file path=ppt/slides/slide5.xml><?xml version="1.0" encoding="utf-8"?>
+<p:sld xmlns:a="http://schemas.openxmlformats.org/drawingml/2006/main" xmlns:p="http://schemas.openxmlformats.org/presentationml/2006/main" xmlns:r="http://schemas.openxmlformats.org/officeDocument/2006/relationships">
+  <p:cSld>
+    <p:bg>
+      <p:bgPr>
+        <a:solidFill>
+          <a:srgbClr val="F8FAFC"/>
+        </a:solidFill>
+        <a:effectLst/>
+      </p:bgPr>
+    </p:bg>
+    <p:spTree>
+      <p:nvGrpSpPr>
+        <p:cNvPr id="1" name=""/>
+        <p:cNvGrpSpPr/>
+        <p:nvPr/>
+      </p:nvGrpSpPr>
+      <p:grpSpPr/>
+      <p:sp>
+        <p:nvSpPr>
+          <p:cNvPr id="2" name="Rounded Rectangle 1"/>
+          <p:cNvSpPr/>
+          <p:nvPr/>
+        </p:nvSpPr>
+        <p:spPr>
+          <a:xfrm>
+            <a:off x="201168" y="155448"/>
+            <a:ext cx="50292" cy="365760"/>
+          </a:xfrm>
+          <a:prstGeom prst="roundRect">
+            <a:avLst>
+              <a:gd name="adj" fmla="val 49090"/>
+            </a:avLst>
+          </a:prstGeom>
+          <a:solidFill>
+            <a:srgbClr val="0078D4"/>
+          </a:solidFill>
+          <a:ln>
+            <a:noFill/>
+          </a:ln>
+          <a:effectLst/>
+        </p:spPr>
+        <p:style>
+          <a:lnRef idx="1">
+            <a:schemeClr val="accent1"/>
+          </a:lnRef>
+          <a:fillRef idx="3">
+            <a:schemeClr val="accent1"/>
+          </a:fillRef>
+          <a:effectRef idx="2">
+            <a:schemeClr val="accent1"/>
+          </a:effectRef>
+          <a:fontRef idx="minor">
+            <a:schemeClr val="lt1"/>
+          </a:fontRef>
+        </p:style>
+        <p:txBody>
+          <a:bodyPr rtlCol="0" anchor="ctr"/>
+          <a:lstStyle/>
+          <a:p>
+            <a:pPr algn="ctr"/>
+          </a:p>
+        </p:txBody>
+      </p:sp>
+      <p:sp>
+        <p:nvSpPr>
+          <p:cNvPr id="3" name="TextBox 2"/>
+          <p:cNvSpPr txBox="1"/>
+          <p:nvPr/>
+        </p:nvSpPr>
+        <p:spPr>
+          <a:xfrm>
+            <a:off x="347472" y="118872"/>
+            <a:ext cx="8229600" cy="310896"/>
+          </a:xfrm>
+          <a:prstGeom prst="rect">
+            <a:avLst/>
+          </a:prstGeom>
+          <a:noFill/>
+        </p:spPr>
+        <p:txBody>
+          <a:bodyPr wrap="square" lIns="0" rIns="0" tIns="0" bIns="0" anchor="ctr">
+            <a:noAutofit/>
+          </a:bodyPr>
+          <a:lstStyle/>
+          <a:p>
+            <a:pPr algn="l">
+              <a:lnSpc>
+                <a:spcPct val="112000"/>
+              </a:lnSpc>
+              <a:spcBef>
+                <a:spcPts val="0"/>
+              </a:spcBef>
+              <a:spcAft>
+                <a:spcPts val="0"/>
+              </a:spcAft>
+            </a:pPr>
+            <a:r>
+              <a:rPr sz="1850" b="1" i="0">
+                <a:solidFill>
+                  <a:srgbClr val="0F172A"/>
+                </a:solidFill>
+                <a:latin typeface="Segoe UI"/>
+                <a:ea typeface="Microsoft YaHei"/>
+              </a:rPr>
+              <a:t>方案 B2 · 数据加密设计</a:t>
+            </a:r>
+          </a:p>
+        </p:txBody>
+      </p:sp>
+      <p:sp>
+        <p:nvSpPr>
+          <p:cNvPr id="4" name="Rounded Rectangle 3"/>
+          <p:cNvSpPr/>
+          <p:nvPr/>
+        </p:nvSpPr>
+        <p:spPr>
+          <a:xfrm>
+            <a:off x="201168" y="566928"/>
+            <a:ext cx="3931920" cy="274320"/>
+          </a:xfrm>
+          <a:prstGeom prst="roundRect">
+            <a:avLst>
+              <a:gd name="adj" fmla="val 20000"/>
+            </a:avLst>
+          </a:prstGeom>
+          <a:solidFill>
+            <a:srgbClr val="FFFFFF"/>
+          </a:solidFill>
+          <a:ln w="13970">
+            <a:solidFill>
+              <a:srgbClr val="E2E8F0"/>
+            </a:solidFill>
+          </a:ln>
+          <a:effectLst/>
+        </p:spPr>
+        <p:style>
+          <a:lnRef idx="1">
+            <a:schemeClr val="accent1"/>
+          </a:lnRef>
+          <a:fillRef idx="3">
+            <a:schemeClr val="accent1"/>
+          </a:fillRef>
+          <a:effectRef idx="2">
+            <a:schemeClr val="accent1"/>
+          </a:effectRef>
+          <a:fontRef idx="minor">
+            <a:schemeClr val="lt1"/>
+          </a:fontRef>
+        </p:style>
+        <p:txBody>
+          <a:bodyPr rtlCol="0" anchor="ctr"/>
+          <a:lstStyle/>
+          <a:p>
+            <a:pPr algn="ctr"/>
+          </a:p>
+        </p:txBody>
+      </p:sp>
+      <p:sp>
+        <p:nvSpPr>
+          <p:cNvPr id="5" name="TextBox 4"/>
+          <p:cNvSpPr txBox="1"/>
+          <p:nvPr/>
+        </p:nvSpPr>
+        <p:spPr>
+          <a:xfrm>
+            <a:off x="329184" y="566928"/>
+            <a:ext cx="3675887" cy="274320"/>
+          </a:xfrm>
+          <a:prstGeom prst="rect">
+            <a:avLst/>
+          </a:prstGeom>
+          <a:noFill/>
+        </p:spPr>
+        <p:txBody>
+          <a:bodyPr wrap="square" lIns="0" rIns="0" tIns="0" bIns="0" anchor="ctr">
+            <a:noAutofit/>
+          </a:bodyPr>
+          <a:lstStyle/>
+          <a:p>
+            <a:pPr algn="l">
+              <a:lnSpc>
+                <a:spcPct val="112000"/>
+              </a:lnSpc>
+              <a:spcBef>
+                <a:spcPts val="0"/>
+              </a:spcBef>
+              <a:spcAft>
+                <a:spcPts val="0"/>
+              </a:spcAft>
+            </a:pPr>
+            <a:r>
+              <a:rPr sz="850" b="1" i="0">
+                <a:solidFill>
+                  <a:srgbClr val="0F172A"/>
+                </a:solidFill>
+                <a:latin typeface="Segoe UI"/>
+                <a:ea typeface="Microsoft YaHei"/>
+              </a:rPr>
+              <a:t>四层加密模型 + 密钥管理（L1 → L5）</a:t>
+            </a:r>
+          </a:p>
+        </p:txBody>
+      </p:sp>
+      <p:sp>
+        <p:nvSpPr>
+          <p:cNvPr id="6" name="Rounded Rectangle 5"/>
+          <p:cNvSpPr/>
+          <p:nvPr/>
+        </p:nvSpPr>
+        <p:spPr>
+          <a:xfrm>
+            <a:off x="201168" y="914400"/>
+            <a:ext cx="3931920" cy="749808"/>
+          </a:xfrm>
+          <a:prstGeom prst="roundRect">
+            <a:avLst>
+              <a:gd name="adj" fmla="val 7317"/>
+            </a:avLst>
+          </a:prstGeom>
+          <a:solidFill>
+            <a:srgbClr val="FFFFFF"/>
+          </a:solidFill>
+          <a:ln w="15240">
+            <a:solidFill>
+              <a:srgbClr val="BFDBFE"/>
+            </a:solidFill>
+          </a:ln>
+          <a:effectLst/>
+        </p:spPr>
+        <p:style>
+          <a:lnRef idx="1">
+            <a:schemeClr val="accent1"/>
+          </a:lnRef>
+          <a:fillRef idx="3">
+            <a:schemeClr val="accent1"/>
+          </a:fillRef>
+          <a:effectRef idx="2">
+            <a:schemeClr val="accent1"/>
+          </a:effectRef>
+          <a:fontRef idx="minor">
+            <a:schemeClr val="lt1"/>
+          </a:fontRef>
+        </p:style>
+        <p:txBody>
+          <a:bodyPr rtlCol="0" anchor="ctr"/>
+          <a:lstStyle/>
+          <a:p>
+            <a:pPr algn="ctr"/>
+          </a:p>
+        </p:txBody>
+      </p:sp>
+      <p:sp>
+        <p:nvSpPr>
+          <p:cNvPr id="7" name="Rounded Rectangle 6"/>
+          <p:cNvSpPr/>
+          <p:nvPr/>
+        </p:nvSpPr>
+        <p:spPr>
+          <a:xfrm>
+            <a:off x="329184" y="1042416"/>
+            <a:ext cx="457200" cy="237744"/>
+          </a:xfrm>
+          <a:prstGeom prst="roundRect">
+            <a:avLst>
+              <a:gd name="adj" fmla="val 19230"/>
+            </a:avLst>
+          </a:prstGeom>
+          <a:solidFill>
+            <a:srgbClr val="EFF6FF"/>
+          </a:solidFill>
+          <a:ln w="12700">
+            <a:solidFill>
+              <a:srgbClr val="BFDBFE"/>
+            </a:solidFill>
+          </a:ln>
+          <a:effectLst/>
+        </p:spPr>
+        <p:style>
+          <a:lnRef idx="1">
+            <a:schemeClr val="accent1"/>
+          </a:lnRef>
+          <a:fillRef idx="3">
+            <a:schemeClr val="accent1"/>
+          </a:fillRef>
+          <a:effectRef idx="2">
+            <a:schemeClr val="accent1"/>
+          </a:effectRef>
+          <a:fontRef idx="minor">
+            <a:schemeClr val="lt1"/>
+          </a:fontRef>
+        </p:style>
+        <p:txBody>
+          <a:bodyPr rtlCol="0" anchor="ctr"/>
+          <a:lstStyle/>
+          <a:p>
+            <a:pPr algn="ctr"/>
+          </a:p>
+        </p:txBody>
+      </p:sp>
+      <p:sp>
+        <p:nvSpPr>
+          <p:cNvPr id="8" name="TextBox 7"/>
+          <p:cNvSpPr txBox="1"/>
+          <p:nvPr/>
+        </p:nvSpPr>
+        <p:spPr>
+          <a:xfrm>
+            <a:off x="329184" y="1042416"/>
+            <a:ext cx="457200" cy="237744"/>
+          </a:xfrm>
+          <a:prstGeom prst="rect">
+            <a:avLst/>
+          </a:prstGeom>
+          <a:noFill/>
+        </p:spPr>
+        <p:txBody>
+          <a:bodyPr wrap="square" lIns="0" rIns="0" tIns="0" bIns="0" anchor="ctr">
+            <a:noAutofit/>
+          </a:bodyPr>
+          <a:lstStyle/>
+          <a:p>
+            <a:pPr algn="ctr">
+              <a:lnSpc>
+                <a:spcPct val="112000"/>
+              </a:lnSpc>
+              <a:spcBef>
+                <a:spcPts val="0"/>
+              </a:spcBef>
+              <a:spcAft>
+                <a:spcPts val="0"/>
+              </a:spcAft>
+            </a:pPr>
+            <a:r>
+              <a:rPr sz="750" b="1" i="0">
+                <a:solidFill>
+                  <a:srgbClr val="0078D4"/>
+                </a:solidFill>
+                <a:latin typeface="Consolas"/>
+                <a:ea typeface="Microsoft YaHei"/>
+              </a:rPr>
+              <a:t>L1</a:t>
+            </a:r>
+          </a:p>
+        </p:txBody>
+      </p:sp>
+      <p:sp>
+        <p:nvSpPr>
+          <p:cNvPr id="9" name="TextBox 8"/>
+          <p:cNvSpPr txBox="1"/>
+          <p:nvPr/>
+        </p:nvSpPr>
+        <p:spPr>
+          <a:xfrm>
+            <a:off x="896112" y="996696"/>
+            <a:ext cx="3127248" cy="137160"/>
+          </a:xfrm>
+          <a:prstGeom prst="rect">
+            <a:avLst/>
+          </a:prstGeom>
+          <a:noFill/>
+        </p:spPr>
+        <p:txBody>
+          <a:bodyPr wrap="square" lIns="0" rIns="0" tIns="0" bIns="0" anchor="t">
+            <a:noAutofit/>
+          </a:bodyPr>
+          <a:lstStyle/>
+          <a:p>
+            <a:pPr algn="l">
+              <a:lnSpc>
+                <a:spcPct val="112000"/>
+              </a:lnSpc>
+              <a:spcBef>
+                <a:spcPts val="0"/>
+              </a:spcBef>
+              <a:spcAft>
+                <a:spcPts val="0"/>
+              </a:spcAft>
+            </a:pPr>
+            <a:r>
+              <a:rPr sz="780" b="1" i="0">
+                <a:solidFill>
+                  <a:srgbClr val="0F172A"/>
+                </a:solidFill>
+                <a:latin typeface="Segoe UI"/>
+                <a:ea typeface="Microsoft YaHei"/>
+              </a:rPr>
+              <a:t>存储层 · 防磁盘 / 桶泄露</a:t>
+            </a:r>
+          </a:p>
+        </p:txBody>
+      </p:sp>
+      <p:sp>
+        <p:nvSpPr>
+          <p:cNvPr id="10" name="TextBox 9"/>
+          <p:cNvSpPr txBox="1"/>
+          <p:nvPr/>
+        </p:nvSpPr>
+        <p:spPr>
+          <a:xfrm>
+            <a:off x="896112" y="1170432"/>
+            <a:ext cx="3127248" cy="438912"/>
+          </a:xfrm>
+          <a:prstGeom prst="rect">
+            <a:avLst/>
+          </a:prstGeom>
+          <a:noFill/>
+        </p:spPr>
+        <p:txBody>
+          <a:bodyPr wrap="square" lIns="0" rIns="0" tIns="0" bIns="0" anchor="t">
+            <a:noAutofit/>
+          </a:bodyPr>
+          <a:lstStyle/>
+          <a:p>
+            <a:pPr algn="l">
+              <a:lnSpc>
+                <a:spcPct val="122000"/>
+              </a:lnSpc>
+              <a:spcBef>
+                <a:spcPts val="0"/>
+              </a:spcBef>
+              <a:spcAft>
+                <a:spcPts val="0"/>
+              </a:spcAft>
+            </a:pPr>
+            <a:r>
+              <a:rPr sz="590" b="0" i="0">
+                <a:solidFill>
+                  <a:srgbClr val="64748B"/>
+                </a:solidFill>
+                <a:latin typeface="Segoe UI"/>
+                <a:ea typeface="Microsoft YaHei"/>
+              </a:rPr>
+              <a:t>ADLS 账户级 SSE（AES-256）+ Key Vault CMK；数据 / 元数据 / 附件一套密钥策略，可选基础设施双重加密</a:t>
+            </a:r>
+          </a:p>
+        </p:txBody>
+      </p:sp>
+      <p:sp>
+        <p:nvSpPr>
+          <p:cNvPr id="11" name="Rounded Rectangle 10"/>
+          <p:cNvSpPr/>
+          <p:nvPr/>
+        </p:nvSpPr>
+        <p:spPr>
+          <a:xfrm>
+            <a:off x="201168" y="1737360"/>
+            <a:ext cx="3931920" cy="749808"/>
+          </a:xfrm>
+          <a:prstGeom prst="roundRect">
+            <a:avLst>
+              <a:gd name="adj" fmla="val 7317"/>
+            </a:avLst>
+          </a:prstGeom>
+          <a:solidFill>
+            <a:srgbClr val="FFFFFF"/>
+          </a:solidFill>
+          <a:ln w="15240">
+            <a:solidFill>
+              <a:srgbClr val="A7F3D0"/>
+            </a:solidFill>
+          </a:ln>
+          <a:effectLst/>
+        </p:spPr>
+        <p:style>
+          <a:lnRef idx="1">
+            <a:schemeClr val="accent1"/>
+          </a:lnRef>
+          <a:fillRef idx="3">
+            <a:schemeClr val="accent1"/>
+          </a:fillRef>
+          <a:effectRef idx="2">
+            <a:schemeClr val="accent1"/>
+          </a:effectRef>
+          <a:fontRef idx="minor">
+            <a:schemeClr val="lt1"/>
+          </a:fontRef>
+        </p:style>
+        <p:txBody>
+          <a:bodyPr rtlCol="0" anchor="ctr"/>
+          <a:lstStyle/>
+          <a:p>
+            <a:pPr algn="ctr"/>
+          </a:p>
+        </p:txBody>
+      </p:sp>
+      <p:sp>
+        <p:nvSpPr>
+          <p:cNvPr id="12" name="Rounded Rectangle 11"/>
+          <p:cNvSpPr/>
+          <p:nvPr/>
+        </p:nvSpPr>
+        <p:spPr>
+          <a:xfrm>
+            <a:off x="329184" y="1865376"/>
+            <a:ext cx="457200" cy="237744"/>
+          </a:xfrm>
+          <a:prstGeom prst="roundRect">
+            <a:avLst>
+              <a:gd name="adj" fmla="val 19230"/>
+            </a:avLst>
+          </a:prstGeom>
+          <a:solidFill>
+            <a:srgbClr val="ECFDF5"/>
+          </a:solidFill>
+          <a:ln w="12700">
+            <a:solidFill>
+              <a:srgbClr val="A7F3D0"/>
+            </a:solidFill>
+          </a:ln>
+          <a:effectLst/>
+        </p:spPr>
+        <p:style>
+          <a:lnRef idx="1">
+            <a:schemeClr val="accent1"/>
+          </a:lnRef>
+          <a:fillRef idx="3">
+            <a:schemeClr val="accent1"/>
+          </a:fillRef>
+          <a:effectRef idx="2">
+            <a:schemeClr val="accent1"/>
+          </a:effectRef>
+          <a:fontRef idx="minor">
+            <a:schemeClr val="lt1"/>
+          </a:fontRef>
+        </p:style>
+        <p:txBody>
+          <a:bodyPr rtlCol="0" anchor="ctr"/>
+          <a:lstStyle/>
+          <a:p>
+            <a:pPr algn="ctr"/>
+          </a:p>
+        </p:txBody>
+      </p:sp>
+      <p:sp>
+        <p:nvSpPr>
+          <p:cNvPr id="13" name="TextBox 12"/>
+          <p:cNvSpPr txBox="1"/>
+          <p:nvPr/>
+        </p:nvSpPr>
+        <p:spPr>
+          <a:xfrm>
+            <a:off x="329184" y="1865376"/>
+            <a:ext cx="457200" cy="237744"/>
+          </a:xfrm>
+          <a:prstGeom prst="rect">
+            <a:avLst/>
+          </a:prstGeom>
+          <a:noFill/>
+        </p:spPr>
+        <p:txBody>
+          <a:bodyPr wrap="square" lIns="0" rIns="0" tIns="0" bIns="0" anchor="ctr">
+            <a:noAutofit/>
+          </a:bodyPr>
+          <a:lstStyle/>
+          <a:p>
+            <a:pPr algn="ctr">
+              <a:lnSpc>
+                <a:spcPct val="112000"/>
+              </a:lnSpc>
+              <a:spcBef>
+                <a:spcPts val="0"/>
+              </a:spcBef>
+              <a:spcAft>
+                <a:spcPts val="0"/>
+              </a:spcAft>
+            </a:pPr>
+            <a:r>
+              <a:rPr sz="750" b="1" i="0">
+                <a:solidFill>
+                  <a:srgbClr val="059669"/>
+                </a:solidFill>
+                <a:latin typeface="Consolas"/>
+                <a:ea typeface="Microsoft YaHei"/>
+              </a:rPr>
+              <a:t>L2</a:t>
+            </a:r>
+          </a:p>
+        </p:txBody>
+      </p:sp>
+      <p:sp>
+        <p:nvSpPr>
+          <p:cNvPr id="14" name="TextBox 13"/>
+          <p:cNvSpPr txBox="1"/>
+          <p:nvPr/>
+        </p:nvSpPr>
+        <p:spPr>
+          <a:xfrm>
+            <a:off x="896112" y="1819656"/>
+            <a:ext cx="3127248" cy="137160"/>
+          </a:xfrm>
+          <a:prstGeom prst="rect">
+            <a:avLst/>
+          </a:prstGeom>
+          <a:noFill/>
+        </p:spPr>
+        <p:txBody>
+          <a:bodyPr wrap="square" lIns="0" rIns="0" tIns="0" bIns="0" anchor="t">
+            <a:noAutofit/>
+          </a:bodyPr>
+          <a:lstStyle/>
+          <a:p>
+            <a:pPr algn="l">
+              <a:lnSpc>
+                <a:spcPct val="112000"/>
+              </a:lnSpc>
+              <a:spcBef>
+                <a:spcPts val="0"/>
+              </a:spcBef>
+              <a:spcAft>
+                <a:spcPts val="0"/>
+              </a:spcAft>
+            </a:pPr>
+            <a:r>
+              <a:rPr sz="780" b="1" i="0">
+                <a:solidFill>
+                  <a:srgbClr val="0F172A"/>
+                </a:solidFill>
+                <a:latin typeface="Segoe UI"/>
+                <a:ea typeface="Microsoft YaHei"/>
+              </a:rPr>
+              <a:t>传输层 · 防链路窃听</a:t>
+            </a:r>
+          </a:p>
+        </p:txBody>
+      </p:sp>
+      <p:sp>
+        <p:nvSpPr>
+          <p:cNvPr id="15" name="TextBox 14"/>
+          <p:cNvSpPr txBox="1"/>
+          <p:nvPr/>
+        </p:nvSpPr>
+        <p:spPr>
+          <a:xfrm>
+            <a:off x="896112" y="1993391"/>
+            <a:ext cx="3127248" cy="438912"/>
+          </a:xfrm>
+          <a:prstGeom prst="rect">
+            <a:avLst/>
+          </a:prstGeom>
+          <a:noFill/>
+        </p:spPr>
+        <p:txBody>
+          <a:bodyPr wrap="square" lIns="0" rIns="0" tIns="0" bIns="0" anchor="t">
+            <a:noAutofit/>
+          </a:bodyPr>
+          <a:lstStyle/>
+          <a:p>
+            <a:pPr algn="l">
+              <a:lnSpc>
+                <a:spcPct val="122000"/>
+              </a:lnSpc>
+              <a:spcBef>
+                <a:spcPts val="0"/>
+              </a:spcBef>
+              <a:spcAft>
+                <a:spcPts val="0"/>
+              </a:spcAft>
+            </a:pPr>
+            <a:r>
+              <a:rPr sz="590" b="0" i="0">
+                <a:solidFill>
+                  <a:srgbClr val="64748B"/>
+                </a:solidFill>
+                <a:latin typeface="Segoe UI"/>
+                <a:ea typeface="Microsoft YaHei"/>
+              </a:rPr>
+              <a:t>全链路 TLS 1.2+：HTTPS 443 入口 · 私有端点私网 · JDBC / ODBC；流量不出 Azure 骨干网</a:t>
+            </a:r>
+          </a:p>
+        </p:txBody>
+      </p:sp>
+      <p:sp>
+        <p:nvSpPr>
+          <p:cNvPr id="16" name="Rounded Rectangle 15"/>
+          <p:cNvSpPr/>
+          <p:nvPr/>
+        </p:nvSpPr>
+        <p:spPr>
+          <a:xfrm>
+            <a:off x="201168" y="2560320"/>
+            <a:ext cx="3931920" cy="749808"/>
+          </a:xfrm>
+          <a:prstGeom prst="roundRect">
+            <a:avLst>
+              <a:gd name="adj" fmla="val 7317"/>
+            </a:avLst>
+          </a:prstGeom>
+          <a:solidFill>
+            <a:srgbClr val="FFFFFF"/>
+          </a:solidFill>
+          <a:ln w="15240">
+            <a:solidFill>
+              <a:srgbClr val="FECDD3"/>
+            </a:solidFill>
+          </a:ln>
+          <a:effectLst/>
+        </p:spPr>
+        <p:style>
+          <a:lnRef idx="1">
+            <a:schemeClr val="accent1"/>
+          </a:lnRef>
+          <a:fillRef idx="3">
+            <a:schemeClr val="accent1"/>
+          </a:fillRef>
+          <a:effectRef idx="2">
+            <a:schemeClr val="accent1"/>
+          </a:effectRef>
+          <a:fontRef idx="minor">
+            <a:schemeClr val="lt1"/>
+          </a:fontRef>
+        </p:style>
+        <p:txBody>
+          <a:bodyPr rtlCol="0" anchor="ctr"/>
+          <a:lstStyle/>
+          <a:p>
+            <a:pPr algn="ctr"/>
+          </a:p>
+        </p:txBody>
+      </p:sp>
+      <p:sp>
+        <p:nvSpPr>
+          <p:cNvPr id="17" name="Rounded Rectangle 16"/>
+          <p:cNvSpPr/>
+          <p:nvPr/>
+        </p:nvSpPr>
+        <p:spPr>
+          <a:xfrm>
+            <a:off x="329184" y="2688336"/>
+            <a:ext cx="457200" cy="237744"/>
+          </a:xfrm>
+          <a:prstGeom prst="roundRect">
+            <a:avLst>
+              <a:gd name="adj" fmla="val 19230"/>
+            </a:avLst>
+          </a:prstGeom>
+          <a:solidFill>
+            <a:srgbClr val="FFF1F2"/>
+          </a:solidFill>
+          <a:ln w="12700">
+            <a:solidFill>
+              <a:srgbClr val="FECDD3"/>
+            </a:solidFill>
+          </a:ln>
+          <a:effectLst/>
+        </p:spPr>
+        <p:style>
+          <a:lnRef idx="1">
+            <a:schemeClr val="accent1"/>
+          </a:lnRef>
+          <a:fillRef idx="3">
+            <a:schemeClr val="accent1"/>
+          </a:fillRef>
+          <a:effectRef idx="2">
+            <a:schemeClr val="accent1"/>
+          </a:effectRef>
+          <a:fontRef idx="minor">
+            <a:schemeClr val="lt1"/>
+          </a:fontRef>
+        </p:style>
+        <p:txBody>
+          <a:bodyPr rtlCol="0" anchor="ctr"/>
+          <a:lstStyle/>
+          <a:p>
+            <a:pPr algn="ctr"/>
+          </a:p>
+        </p:txBody>
+      </p:sp>
+      <p:sp>
+        <p:nvSpPr>
+          <p:cNvPr id="18" name="TextBox 17"/>
+          <p:cNvSpPr txBox="1"/>
+          <p:nvPr/>
+        </p:nvSpPr>
+        <p:spPr>
+          <a:xfrm>
+            <a:off x="329184" y="2688336"/>
+            <a:ext cx="457200" cy="237744"/>
+          </a:xfrm>
+          <a:prstGeom prst="rect">
+            <a:avLst/>
+          </a:prstGeom>
+          <a:noFill/>
+        </p:spPr>
+        <p:txBody>
+          <a:bodyPr wrap="square" lIns="0" rIns="0" tIns="0" bIns="0" anchor="ctr">
+            <a:noAutofit/>
+          </a:bodyPr>
+          <a:lstStyle/>
+          <a:p>
+            <a:pPr algn="ctr">
+              <a:lnSpc>
+                <a:spcPct val="112000"/>
+              </a:lnSpc>
+              <a:spcBef>
+                <a:spcPts val="0"/>
+              </a:spcBef>
+              <a:spcAft>
+                <a:spcPts val="0"/>
+              </a:spcAft>
+            </a:pPr>
+            <a:r>
+              <a:rPr sz="750" b="1" i="0">
+                <a:solidFill>
+                  <a:srgbClr val="E11D48"/>
+                </a:solidFill>
+                <a:latin typeface="Consolas"/>
+                <a:ea typeface="Microsoft YaHei"/>
+              </a:rPr>
+              <a:t>L3</a:t>
+            </a:r>
+          </a:p>
+        </p:txBody>
+      </p:sp>
+      <p:sp>
+        <p:nvSpPr>
+          <p:cNvPr id="19" name="TextBox 18"/>
+          <p:cNvSpPr txBox="1"/>
+          <p:nvPr/>
+        </p:nvSpPr>
+        <p:spPr>
+          <a:xfrm>
+            <a:off x="896112" y="2642615"/>
+            <a:ext cx="3127248" cy="137160"/>
+          </a:xfrm>
+          <a:prstGeom prst="rect">
+            <a:avLst/>
+          </a:prstGeom>
+          <a:noFill/>
+        </p:spPr>
+        <p:txBody>
+          <a:bodyPr wrap="square" lIns="0" rIns="0" tIns="0" bIns="0" anchor="t">
+            <a:noAutofit/>
+          </a:bodyPr>
+          <a:lstStyle/>
+          <a:p>
+            <a:pPr algn="l">
+              <a:lnSpc>
+                <a:spcPct val="112000"/>
+              </a:lnSpc>
+              <a:spcBef>
+                <a:spcPts val="0"/>
+              </a:spcBef>
+              <a:spcAft>
+                <a:spcPts val="0"/>
+              </a:spcAft>
+            </a:pPr>
+            <a:r>
+              <a:rPr sz="780" b="1" i="0">
+                <a:solidFill>
+                  <a:srgbClr val="E11D48"/>
+                </a:solidFill>
+                <a:latin typeface="Segoe UI"/>
+                <a:ea typeface="Microsoft YaHei"/>
+              </a:rPr>
+              <a:t>字段层 · 防 DBA / 运维内鬼（合规核心）</a:t>
+            </a:r>
+          </a:p>
+        </p:txBody>
+      </p:sp>
+      <p:sp>
+        <p:nvSpPr>
+          <p:cNvPr id="20" name="TextBox 19"/>
+          <p:cNvSpPr txBox="1"/>
+          <p:nvPr/>
+        </p:nvSpPr>
+        <p:spPr>
+          <a:xfrm>
+            <a:off x="896112" y="2816352"/>
+            <a:ext cx="3127248" cy="438912"/>
+          </a:xfrm>
+          <a:prstGeom prst="rect">
+            <a:avLst/>
+          </a:prstGeom>
+          <a:noFill/>
+        </p:spPr>
+        <p:txBody>
+          <a:bodyPr wrap="square" lIns="0" rIns="0" tIns="0" bIns="0" anchor="t">
+            <a:noAutofit/>
+          </a:bodyPr>
+          <a:lstStyle/>
+          <a:p>
+            <a:pPr algn="l">
+              <a:lnSpc>
+                <a:spcPct val="122000"/>
+              </a:lnSpc>
+              <a:spcBef>
+                <a:spcPts val="0"/>
+              </a:spcBef>
+              <a:spcAft>
+                <a:spcPts val="0"/>
+              </a:spcAft>
+            </a:pPr>
+            <a:r>
+              <a:rPr sz="590" b="0" i="0">
+                <a:solidFill>
+                  <a:srgbClr val="64748B"/>
+                </a:solidFill>
+                <a:latin typeface="Segoe UI"/>
+                <a:ea typeface="Microsoft YaHei"/>
+              </a:rPr>
+              <a:t>aes_encrypt() 落盘即密文 + UC 列掩码查询遮蔽——两者必须组合；GCM 每次随机 IV</a:t>
+            </a:r>
+          </a:p>
+        </p:txBody>
+      </p:sp>
+      <p:sp>
+        <p:nvSpPr>
+          <p:cNvPr id="21" name="Rounded Rectangle 20"/>
+          <p:cNvSpPr/>
+          <p:nvPr/>
+        </p:nvSpPr>
+        <p:spPr>
+          <a:xfrm>
+            <a:off x="201168" y="3383279"/>
+            <a:ext cx="3931920" cy="749808"/>
+          </a:xfrm>
+          <a:prstGeom prst="roundRect">
+            <a:avLst>
+              <a:gd name="adj" fmla="val 7317"/>
+            </a:avLst>
+          </a:prstGeom>
+          <a:solidFill>
+            <a:srgbClr val="FFFFFF"/>
+          </a:solidFill>
+          <a:ln w="15240">
+            <a:solidFill>
+              <a:srgbClr val="DDD6FE"/>
+            </a:solidFill>
+          </a:ln>
+          <a:effectLst/>
+        </p:spPr>
+        <p:style>
+          <a:lnRef idx="1">
+            <a:schemeClr val="accent1"/>
+          </a:lnRef>
+          <a:fillRef idx="3">
+            <a:schemeClr val="accent1"/>
+          </a:fillRef>
+          <a:effectRef idx="2">
+            <a:schemeClr val="accent1"/>
+          </a:effectRef>
+          <a:fontRef idx="minor">
+            <a:schemeClr val="lt1"/>
+          </a:fontRef>
+        </p:style>
+        <p:txBody>
+          <a:bodyPr rtlCol="0" anchor="ctr"/>
+          <a:lstStyle/>
+          <a:p>
+            <a:pPr algn="ctr"/>
+          </a:p>
+        </p:txBody>
+      </p:sp>
+      <p:sp>
+        <p:nvSpPr>
+          <p:cNvPr id="22" name="Rounded Rectangle 21"/>
+          <p:cNvSpPr/>
+          <p:nvPr/>
+        </p:nvSpPr>
+        <p:spPr>
+          <a:xfrm>
+            <a:off x="329184" y="3511296"/>
+            <a:ext cx="457200" cy="237744"/>
+          </a:xfrm>
+          <a:prstGeom prst="roundRect">
+            <a:avLst>
+              <a:gd name="adj" fmla="val 19230"/>
+            </a:avLst>
+          </a:prstGeom>
+          <a:solidFill>
+            <a:srgbClr val="F5F3FF"/>
+          </a:solidFill>
+          <a:ln w="12700">
+            <a:solidFill>
+              <a:srgbClr val="DDD6FE"/>
+            </a:solidFill>
+          </a:ln>
+          <a:effectLst/>
+        </p:spPr>
+        <p:style>
+          <a:lnRef idx="1">
+            <a:schemeClr val="accent1"/>
+          </a:lnRef>
+          <a:fillRef idx="3">
+            <a:schemeClr val="accent1"/>
+          </a:fillRef>
+          <a:effectRef idx="2">
+            <a:schemeClr val="accent1"/>
+          </a:effectRef>
+          <a:fontRef idx="minor">
+            <a:schemeClr val="lt1"/>
+          </a:fontRef>
+        </p:style>
+        <p:txBody>
+          <a:bodyPr rtlCol="0" anchor="ctr"/>
+          <a:lstStyle/>
+          <a:p>
+            <a:pPr algn="ctr"/>
+          </a:p>
+        </p:txBody>
+      </p:sp>
+      <p:sp>
+        <p:nvSpPr>
+          <p:cNvPr id="23" name="TextBox 22"/>
+          <p:cNvSpPr txBox="1"/>
+          <p:nvPr/>
+        </p:nvSpPr>
+        <p:spPr>
+          <a:xfrm>
+            <a:off x="329184" y="3511296"/>
+            <a:ext cx="457200" cy="237744"/>
+          </a:xfrm>
+          <a:prstGeom prst="rect">
+            <a:avLst/>
+          </a:prstGeom>
+          <a:noFill/>
+        </p:spPr>
+        <p:txBody>
+          <a:bodyPr wrap="square" lIns="0" rIns="0" tIns="0" bIns="0" anchor="ctr">
+            <a:noAutofit/>
+          </a:bodyPr>
+          <a:lstStyle/>
+          <a:p>
+            <a:pPr algn="ctr">
+              <a:lnSpc>
+                <a:spcPct val="112000"/>
+              </a:lnSpc>
+              <a:spcBef>
+                <a:spcPts val="0"/>
+              </a:spcBef>
+              <a:spcAft>
+                <a:spcPts val="0"/>
+              </a:spcAft>
+            </a:pPr>
+            <a:r>
+              <a:rPr sz="750" b="1" i="0">
+                <a:solidFill>
+                  <a:srgbClr val="7C3AED"/>
+                </a:solidFill>
+                <a:latin typeface="Consolas"/>
+                <a:ea typeface="Microsoft YaHei"/>
+              </a:rPr>
+              <a:t>L4</a:t>
+            </a:r>
+          </a:p>
+        </p:txBody>
+      </p:sp>
+      <p:sp>
+        <p:nvSpPr>
+          <p:cNvPr id="24" name="TextBox 23"/>
+          <p:cNvSpPr txBox="1"/>
+          <p:nvPr/>
+        </p:nvSpPr>
+        <p:spPr>
+          <a:xfrm>
+            <a:off x="896112" y="3465575"/>
+            <a:ext cx="3127248" cy="137160"/>
+          </a:xfrm>
+          <a:prstGeom prst="rect">
+            <a:avLst/>
+          </a:prstGeom>
+          <a:noFill/>
+        </p:spPr>
+        <p:txBody>
+          <a:bodyPr wrap="square" lIns="0" rIns="0" tIns="0" bIns="0" anchor="t">
+            <a:noAutofit/>
+          </a:bodyPr>
+          <a:lstStyle/>
+          <a:p>
+            <a:pPr algn="l">
+              <a:lnSpc>
+                <a:spcPct val="112000"/>
+              </a:lnSpc>
+              <a:spcBef>
+                <a:spcPts val="0"/>
+              </a:spcBef>
+              <a:spcAft>
+                <a:spcPts val="0"/>
+              </a:spcAft>
+            </a:pPr>
+            <a:r>
+              <a:rPr sz="780" b="1" i="0">
+                <a:solidFill>
+                  <a:srgbClr val="0F172A"/>
+                </a:solidFill>
+                <a:latin typeface="Segoe UI"/>
+                <a:ea typeface="Microsoft YaHei"/>
+              </a:rPr>
+              <a:t>展示层 · 防越权查看</a:t>
+            </a:r>
+          </a:p>
+        </p:txBody>
+      </p:sp>
+      <p:sp>
+        <p:nvSpPr>
+          <p:cNvPr id="25" name="TextBox 24"/>
+          <p:cNvSpPr txBox="1"/>
+          <p:nvPr/>
+        </p:nvSpPr>
+        <p:spPr>
+          <a:xfrm>
+            <a:off x="896112" y="3639311"/>
+            <a:ext cx="3127248" cy="438912"/>
+          </a:xfrm>
+          <a:prstGeom prst="rect">
+            <a:avLst/>
+          </a:prstGeom>
+          <a:noFill/>
+        </p:spPr>
+        <p:txBody>
+          <a:bodyPr wrap="square" lIns="0" rIns="0" tIns="0" bIns="0" anchor="t">
+            <a:noAutofit/>
+          </a:bodyPr>
+          <a:lstStyle/>
+          <a:p>
+            <a:pPr algn="l">
+              <a:lnSpc>
+                <a:spcPct val="122000"/>
+              </a:lnSpc>
+              <a:spcBef>
+                <a:spcPts val="0"/>
+              </a:spcBef>
+              <a:spcAft>
+                <a:spcPts val="0"/>
+              </a:spcAft>
+            </a:pPr>
+            <a:r>
+              <a:rPr sz="590" b="0" i="0">
+                <a:solidFill>
+                  <a:srgbClr val="64748B"/>
+                </a:solidFill>
+                <a:latin typeface="Segoe UI"/>
+                <a:ea typeface="Microsoft YaHei"/>
+              </a:rPr>
+              <a:t>UC COLUMN MASK / ROW FILTER 绑定基表，任何访问路径强制生效；B2 原生，Trino 读完全不可用</a:t>
+            </a:r>
+          </a:p>
+        </p:txBody>
+      </p:sp>
+      <p:sp>
+        <p:nvSpPr>
+          <p:cNvPr id="26" name="Rounded Rectangle 25"/>
+          <p:cNvSpPr/>
+          <p:nvPr/>
+        </p:nvSpPr>
+        <p:spPr>
+          <a:xfrm>
+            <a:off x="201168" y="4206240"/>
+            <a:ext cx="3931920" cy="749808"/>
+          </a:xfrm>
+          <a:prstGeom prst="roundRect">
+            <a:avLst>
+              <a:gd name="adj" fmla="val 7317"/>
+            </a:avLst>
+          </a:prstGeom>
+          <a:solidFill>
+            <a:srgbClr val="FFFFFF"/>
+          </a:solidFill>
+          <a:ln w="15240">
+            <a:solidFill>
+              <a:srgbClr val="FDE68A"/>
+            </a:solidFill>
+          </a:ln>
+          <a:effectLst/>
+        </p:spPr>
+        <p:style>
+          <a:lnRef idx="1">
+            <a:schemeClr val="accent1"/>
+          </a:lnRef>
+          <a:fillRef idx="3">
+            <a:schemeClr val="accent1"/>
+          </a:fillRef>
+          <a:effectRef idx="2">
+            <a:schemeClr val="accent1"/>
+          </a:effectRef>
+          <a:fontRef idx="minor">
+            <a:schemeClr val="lt1"/>
+          </a:fontRef>
+        </p:style>
+        <p:txBody>
+          <a:bodyPr rtlCol="0" anchor="ctr"/>
+          <a:lstStyle/>
+          <a:p>
+            <a:pPr algn="ctr"/>
+          </a:p>
+        </p:txBody>
+      </p:sp>
+      <p:sp>
+        <p:nvSpPr>
+          <p:cNvPr id="27" name="Rounded Rectangle 26"/>
+          <p:cNvSpPr/>
+          <p:nvPr/>
+        </p:nvSpPr>
+        <p:spPr>
+          <a:xfrm>
+            <a:off x="329184" y="4334255"/>
+            <a:ext cx="457200" cy="237744"/>
+          </a:xfrm>
+          <a:prstGeom prst="roundRect">
+            <a:avLst>
+              <a:gd name="adj" fmla="val 19230"/>
+            </a:avLst>
+          </a:prstGeom>
+          <a:solidFill>
+            <a:srgbClr val="FFFBEB"/>
+          </a:solidFill>
+          <a:ln w="12700">
+            <a:solidFill>
+              <a:srgbClr val="FDE68A"/>
+            </a:solidFill>
+          </a:ln>
+          <a:effectLst/>
+        </p:spPr>
+        <p:style>
+          <a:lnRef idx="1">
+            <a:schemeClr val="accent1"/>
+          </a:lnRef>
+          <a:fillRef idx="3">
+            <a:schemeClr val="accent1"/>
+          </a:fillRef>
+          <a:effectRef idx="2">
+            <a:schemeClr val="accent1"/>
+          </a:effectRef>
+          <a:fontRef idx="minor">
+            <a:schemeClr val="lt1"/>
+          </a:fontRef>
+        </p:style>
+        <p:txBody>
+          <a:bodyPr rtlCol="0" anchor="ctr"/>
+          <a:lstStyle/>
+          <a:p>
+            <a:pPr algn="ctr"/>
+          </a:p>
+        </p:txBody>
+      </p:sp>
+      <p:sp>
+        <p:nvSpPr>
+          <p:cNvPr id="28" name="TextBox 27"/>
+          <p:cNvSpPr txBox="1"/>
+          <p:nvPr/>
+        </p:nvSpPr>
+        <p:spPr>
+          <a:xfrm>
+            <a:off x="329184" y="4334255"/>
+            <a:ext cx="457200" cy="237744"/>
+          </a:xfrm>
+          <a:prstGeom prst="rect">
+            <a:avLst/>
+          </a:prstGeom>
+          <a:noFill/>
+        </p:spPr>
+        <p:txBody>
+          <a:bodyPr wrap="square" lIns="0" rIns="0" tIns="0" bIns="0" anchor="ctr">
+            <a:noAutofit/>
+          </a:bodyPr>
+          <a:lstStyle/>
+          <a:p>
+            <a:pPr algn="ctr">
+              <a:lnSpc>
+                <a:spcPct val="112000"/>
+              </a:lnSpc>
+              <a:spcBef>
+                <a:spcPts val="0"/>
+              </a:spcBef>
+              <a:spcAft>
+                <a:spcPts val="0"/>
+              </a:spcAft>
+            </a:pPr>
+            <a:r>
+              <a:rPr sz="750" b="1" i="0">
+                <a:solidFill>
+                  <a:srgbClr val="D97706"/>
+                </a:solidFill>
+                <a:latin typeface="Consolas"/>
+                <a:ea typeface="Microsoft YaHei"/>
+              </a:rPr>
+              <a:t>L5</a:t>
+            </a:r>
+          </a:p>
+        </p:txBody>
+      </p:sp>
+      <p:sp>
+        <p:nvSpPr>
+          <p:cNvPr id="29" name="TextBox 28"/>
+          <p:cNvSpPr txBox="1"/>
+          <p:nvPr/>
+        </p:nvSpPr>
+        <p:spPr>
+          <a:xfrm>
+            <a:off x="896112" y="4288536"/>
+            <a:ext cx="3127248" cy="137160"/>
+          </a:xfrm>
+          <a:prstGeom prst="rect">
+            <a:avLst/>
+          </a:prstGeom>
+          <a:noFill/>
+        </p:spPr>
+        <p:txBody>
+          <a:bodyPr wrap="square" lIns="0" rIns="0" tIns="0" bIns="0" anchor="t">
+            <a:noAutofit/>
+          </a:bodyPr>
+          <a:lstStyle/>
+          <a:p>
+            <a:pPr algn="l">
+              <a:lnSpc>
+                <a:spcPct val="112000"/>
+              </a:lnSpc>
+              <a:spcBef>
+                <a:spcPts val="0"/>
+              </a:spcBef>
+              <a:spcAft>
+                <a:spcPts val="0"/>
+              </a:spcAft>
+            </a:pPr>
+            <a:r>
+              <a:rPr sz="780" b="1" i="0">
+                <a:solidFill>
+                  <a:srgbClr val="0F172A"/>
+                </a:solidFill>
+                <a:latin typeface="Segoe UI"/>
+                <a:ea typeface="Microsoft YaHei"/>
+              </a:rPr>
+              <a:t>密钥层 · 防泄露无法止损</a:t>
+            </a:r>
+          </a:p>
+        </p:txBody>
+      </p:sp>
+      <p:sp>
+        <p:nvSpPr>
+          <p:cNvPr id="30" name="TextBox 29"/>
+          <p:cNvSpPr txBox="1"/>
+          <p:nvPr/>
+        </p:nvSpPr>
+        <p:spPr>
+          <a:xfrm>
+            <a:off x="896112" y="4462272"/>
+            <a:ext cx="3127248" cy="438912"/>
+          </a:xfrm>
+          <a:prstGeom prst="rect">
+            <a:avLst/>
+          </a:prstGeom>
+          <a:noFill/>
+        </p:spPr>
+        <p:txBody>
+          <a:bodyPr wrap="square" lIns="0" rIns="0" tIns="0" bIns="0" anchor="t">
+            <a:noAutofit/>
+          </a:bodyPr>
+          <a:lstStyle/>
+          <a:p>
+            <a:pPr algn="l">
+              <a:lnSpc>
+                <a:spcPct val="122000"/>
+              </a:lnSpc>
+              <a:spcBef>
+                <a:spcPts val="0"/>
+              </a:spcBef>
+              <a:spcAft>
+                <a:spcPts val="0"/>
+              </a:spcAft>
+            </a:pPr>
+            <a:r>
+              <a:rPr sz="590" b="0" i="0">
+                <a:solidFill>
+                  <a:srgbClr val="64748B"/>
+                </a:solidFill>
+                <a:latin typeface="Segoe UI"/>
+                <a:ea typeface="Microsoft YaHei"/>
+              </a:rPr>
+              <a:t>Key Vault CMK 自动轮转；信封加密——轮主密钥只重包装 KEK、零数据重写；密文自带 key_version</a:t>
+            </a:r>
+          </a:p>
+        </p:txBody>
+      </p:sp>
+      <p:sp>
+        <p:nvSpPr>
+          <p:cNvPr id="31" name="Rounded Rectangle 30"/>
+          <p:cNvSpPr/>
+          <p:nvPr/>
+        </p:nvSpPr>
+        <p:spPr>
+          <a:xfrm>
+            <a:off x="4261104" y="566928"/>
+            <a:ext cx="4114800" cy="274320"/>
+          </a:xfrm>
+          <a:prstGeom prst="roundRect">
+            <a:avLst>
+              <a:gd name="adj" fmla="val 20000"/>
+            </a:avLst>
+          </a:prstGeom>
+          <a:solidFill>
+            <a:srgbClr val="FFFFFF"/>
+          </a:solidFill>
+          <a:ln w="13970">
+            <a:solidFill>
+              <a:srgbClr val="E2E8F0"/>
+            </a:solidFill>
+          </a:ln>
+          <a:effectLst/>
+        </p:spPr>
+        <p:style>
+          <a:lnRef idx="1">
+            <a:schemeClr val="accent1"/>
+          </a:lnRef>
+          <a:fillRef idx="3">
+            <a:schemeClr val="accent1"/>
+          </a:fillRef>
+          <a:effectRef idx="2">
+            <a:schemeClr val="accent1"/>
+          </a:effectRef>
+          <a:fontRef idx="minor">
+            <a:schemeClr val="lt1"/>
+          </a:fontRef>
+        </p:style>
+        <p:txBody>
+          <a:bodyPr rtlCol="0" anchor="ctr"/>
+          <a:lstStyle/>
+          <a:p>
+            <a:pPr algn="ctr"/>
+          </a:p>
+        </p:txBody>
+      </p:sp>
+      <p:sp>
+        <p:nvSpPr>
+          <p:cNvPr id="32" name="TextBox 31"/>
+          <p:cNvSpPr txBox="1"/>
+          <p:nvPr/>
+        </p:nvSpPr>
+        <p:spPr>
+          <a:xfrm>
+            <a:off x="4389120" y="566928"/>
+            <a:ext cx="3858768" cy="274320"/>
+          </a:xfrm>
+          <a:prstGeom prst="rect">
+            <a:avLst/>
+          </a:prstGeom>
+          <a:noFill/>
+        </p:spPr>
+        <p:txBody>
+          <a:bodyPr wrap="square" lIns="0" rIns="0" tIns="0" bIns="0" anchor="ctr">
+            <a:noAutofit/>
+          </a:bodyPr>
+          <a:lstStyle/>
+          <a:p>
+            <a:pPr algn="l">
+              <a:lnSpc>
+                <a:spcPct val="112000"/>
+              </a:lnSpc>
+              <a:spcBef>
+                <a:spcPts val="0"/>
+              </a:spcBef>
+              <a:spcAft>
+                <a:spcPts val="0"/>
+              </a:spcAft>
+            </a:pPr>
+            <a:r>
+              <a:rPr sz="850" b="1" i="0">
+                <a:solidFill>
+                  <a:srgbClr val="0F172A"/>
+                </a:solidFill>
+                <a:latin typeface="Segoe UI"/>
+                <a:ea typeface="Microsoft YaHei"/>
+              </a:rPr>
+              <a:t>字段级加密 · 推荐路线：aes_encrypt + UC 列掩码</a:t>
+            </a:r>
+          </a:p>
+        </p:txBody>
+      </p:sp>
+      <p:sp>
+        <p:nvSpPr>
+          <p:cNvPr id="33" name="Rounded Rectangle 32"/>
+          <p:cNvSpPr/>
+          <p:nvPr/>
+        </p:nvSpPr>
+        <p:spPr>
+          <a:xfrm>
+            <a:off x="4261104" y="896112"/>
+            <a:ext cx="4114800" cy="548640"/>
+          </a:xfrm>
+          <a:prstGeom prst="roundRect">
+            <a:avLst>
+              <a:gd name="adj" fmla="val 10000"/>
+            </a:avLst>
+          </a:prstGeom>
+          <a:solidFill>
+            <a:srgbClr val="FFFFFF"/>
+          </a:solidFill>
+          <a:ln w="15240">
+            <a:solidFill>
+              <a:srgbClr val="A7F3D0"/>
+            </a:solidFill>
+          </a:ln>
+          <a:effectLst/>
+        </p:spPr>
+        <p:style>
+          <a:lnRef idx="1">
+            <a:schemeClr val="accent1"/>
+          </a:lnRef>
+          <a:fillRef idx="3">
+            <a:schemeClr val="accent1"/>
+          </a:fillRef>
+          <a:effectRef idx="2">
+            <a:schemeClr val="accent1"/>
+          </a:effectRef>
+          <a:fontRef idx="minor">
+            <a:schemeClr val="lt1"/>
+          </a:fontRef>
+        </p:style>
+        <p:txBody>
+          <a:bodyPr rtlCol="0" anchor="ctr"/>
+          <a:lstStyle/>
+          <a:p>
+            <a:pPr algn="ctr"/>
+          </a:p>
+        </p:txBody>
+      </p:sp>
+      <p:sp>
+        <p:nvSpPr>
+          <p:cNvPr id="34" name="Rounded Rectangle 33"/>
+          <p:cNvSpPr/>
+          <p:nvPr/>
+        </p:nvSpPr>
+        <p:spPr>
+          <a:xfrm>
+            <a:off x="4370832" y="996696"/>
+            <a:ext cx="512064" cy="201168"/>
+          </a:xfrm>
+          <a:prstGeom prst="roundRect">
+            <a:avLst>
+              <a:gd name="adj" fmla="val 18181"/>
+            </a:avLst>
+          </a:prstGeom>
+          <a:solidFill>
+            <a:srgbClr val="ECFDF5"/>
+          </a:solidFill>
+          <a:ln w="12700">
+            <a:solidFill>
+              <a:srgbClr val="A7F3D0"/>
+            </a:solidFill>
+          </a:ln>
+          <a:effectLst/>
+        </p:spPr>
+        <p:style>
+          <a:lnRef idx="1">
+            <a:schemeClr val="accent1"/>
+          </a:lnRef>
+          <a:fillRef idx="3">
+            <a:schemeClr val="accent1"/>
+          </a:fillRef>
+          <a:effectRef idx="2">
+            <a:schemeClr val="accent1"/>
+          </a:effectRef>
+          <a:fontRef idx="minor">
+            <a:schemeClr val="lt1"/>
+          </a:fontRef>
+        </p:style>
+        <p:txBody>
+          <a:bodyPr rtlCol="0" anchor="ctr"/>
+          <a:lstStyle/>
+          <a:p>
+            <a:pPr algn="ctr"/>
+          </a:p>
+        </p:txBody>
+      </p:sp>
+      <p:sp>
+        <p:nvSpPr>
+          <p:cNvPr id="35" name="TextBox 34"/>
+          <p:cNvSpPr txBox="1"/>
+          <p:nvPr/>
+        </p:nvSpPr>
+        <p:spPr>
+          <a:xfrm>
+            <a:off x="4370832" y="996696"/>
+            <a:ext cx="512064" cy="201168"/>
+          </a:xfrm>
+          <a:prstGeom prst="rect">
+            <a:avLst/>
+          </a:prstGeom>
+          <a:noFill/>
+        </p:spPr>
+        <p:txBody>
+          <a:bodyPr wrap="square" lIns="0" rIns="0" tIns="0" bIns="0" anchor="ctr">
+            <a:noAutofit/>
+          </a:bodyPr>
+          <a:lstStyle/>
+          <a:p>
+            <a:pPr algn="ctr">
+              <a:lnSpc>
+                <a:spcPct val="112000"/>
+              </a:lnSpc>
+              <a:spcBef>
+                <a:spcPts val="0"/>
+              </a:spcBef>
+              <a:spcAft>
+                <a:spcPts val="0"/>
+              </a:spcAft>
+            </a:pPr>
+            <a:r>
+              <a:rPr sz="580" b="1" i="0">
+                <a:solidFill>
+                  <a:srgbClr val="047857"/>
+                </a:solidFill>
+                <a:latin typeface="Consolas"/>
+                <a:ea typeface="Microsoft YaHei"/>
+              </a:rPr>
+              <a:t>STEP 1</a:t>
+            </a:r>
+          </a:p>
+        </p:txBody>
+      </p:sp>
+      <p:sp>
+        <p:nvSpPr>
+          <p:cNvPr id="36" name="TextBox 35"/>
+          <p:cNvSpPr txBox="1"/>
+          <p:nvPr/>
+        </p:nvSpPr>
+        <p:spPr>
+          <a:xfrm>
+            <a:off x="4992624" y="969264"/>
+            <a:ext cx="3291840" cy="137160"/>
+          </a:xfrm>
+          <a:prstGeom prst="rect">
+            <a:avLst/>
+          </a:prstGeom>
+          <a:noFill/>
+        </p:spPr>
+        <p:txBody>
+          <a:bodyPr wrap="square" lIns="0" rIns="0" tIns="0" bIns="0" anchor="t">
+            <a:noAutofit/>
+          </a:bodyPr>
+          <a:lstStyle/>
+          <a:p>
+            <a:pPr algn="l">
+              <a:lnSpc>
+                <a:spcPct val="112000"/>
+              </a:lnSpc>
+              <a:spcBef>
+                <a:spcPts val="0"/>
+              </a:spcBef>
+              <a:spcAft>
+                <a:spcPts val="0"/>
+              </a:spcAft>
+            </a:pPr>
+            <a:r>
+              <a:rPr sz="760" b="1" i="0">
+                <a:solidFill>
+                  <a:srgbClr val="0F172A"/>
+                </a:solidFill>
+                <a:latin typeface="Segoe UI"/>
+                <a:ea typeface="Microsoft YaHei"/>
+              </a:rPr>
+              <a:t>密钥入 Secret Scope</a:t>
+            </a:r>
+          </a:p>
+        </p:txBody>
+      </p:sp>
+      <p:sp>
+        <p:nvSpPr>
+          <p:cNvPr id="37" name="TextBox 36"/>
+          <p:cNvSpPr txBox="1"/>
+          <p:nvPr/>
+        </p:nvSpPr>
+        <p:spPr>
+          <a:xfrm>
+            <a:off x="4992624" y="1152144"/>
+            <a:ext cx="3291840" cy="237744"/>
+          </a:xfrm>
+          <a:prstGeom prst="rect">
+            <a:avLst/>
+          </a:prstGeom>
+          <a:noFill/>
+        </p:spPr>
+        <p:txBody>
+          <a:bodyPr wrap="square" lIns="0" rIns="0" tIns="0" bIns="0" anchor="t">
+            <a:noAutofit/>
+          </a:bodyPr>
+          <a:lstStyle/>
+          <a:p>
+            <a:pPr algn="l">
+              <a:lnSpc>
+                <a:spcPct val="120000"/>
+              </a:lnSpc>
+              <a:spcBef>
+                <a:spcPts val="0"/>
+              </a:spcBef>
+              <a:spcAft>
+                <a:spcPts val="0"/>
+              </a:spcAft>
+            </a:pPr>
+            <a:r>
+              <a:rPr sz="590" b="0" i="0">
+                <a:solidFill>
+                  <a:srgbClr val="64748B"/>
+                </a:solidFill>
+                <a:latin typeface="Segoe UI"/>
+                <a:ea typeface="Microsoft YaHei"/>
+              </a:rPr>
+              <a:t>Key Vault 撑腰 · 托管标识免密拉取，密钥不进代码 / 日志</a:t>
+            </a:r>
+          </a:p>
+        </p:txBody>
+      </p:sp>
+      <p:cxnSp>
+        <p:nvCxnSpPr>
+          <p:cNvPr id="38" name="Connector 37"/>
+          <p:cNvCxnSpPr/>
+          <p:nvPr/>
+        </p:nvCxnSpPr>
+        <p:spPr>
+          <a:xfrm>
+            <a:off x="6309360" y="1453895"/>
+            <a:ext cx="0" cy="73153"/>
+          </a:xfrm>
+          <a:prstGeom prst="line">
+            <a:avLst/>
+          </a:prstGeom>
+          <a:ln w="17780">
+            <a:solidFill>
+              <a:srgbClr val="059669"/>
+            </a:solidFill>
+            <a:tailEnd type="triangle" w="med" len="med"/>
+          </a:ln>
+          <a:effectLst/>
+        </p:spPr>
+      </p:cxnSp>
+      <p:sp>
+        <p:nvSpPr>
+          <p:cNvPr id="39" name="Rounded Rectangle 38"/>
+          <p:cNvSpPr/>
+          <p:nvPr/>
+        </p:nvSpPr>
+        <p:spPr>
+          <a:xfrm>
+            <a:off x="4261104" y="1536192"/>
+            <a:ext cx="4114800" cy="548640"/>
+          </a:xfrm>
+          <a:prstGeom prst="roundRect">
+            <a:avLst>
+              <a:gd name="adj" fmla="val 10000"/>
+            </a:avLst>
+          </a:prstGeom>
+          <a:solidFill>
+            <a:srgbClr val="FFFFFF"/>
+          </a:solidFill>
+          <a:ln w="15240">
+            <a:solidFill>
+              <a:srgbClr val="A7F3D0"/>
+            </a:solidFill>
+          </a:ln>
+          <a:effectLst/>
+        </p:spPr>
+        <p:style>
+          <a:lnRef idx="1">
+            <a:schemeClr val="accent1"/>
+          </a:lnRef>
+          <a:fillRef idx="3">
+            <a:schemeClr val="accent1"/>
+          </a:fillRef>
+          <a:effectRef idx="2">
+            <a:schemeClr val="accent1"/>
+          </a:effectRef>
+          <a:fontRef idx="minor">
+            <a:schemeClr val="lt1"/>
+          </a:fontRef>
+        </p:style>
+        <p:txBody>
+          <a:bodyPr rtlCol="0" anchor="ctr"/>
+          <a:lstStyle/>
+          <a:p>
+            <a:pPr algn="ctr"/>
+          </a:p>
+        </p:txBody>
+      </p:sp>
+      <p:sp>
+        <p:nvSpPr>
+          <p:cNvPr id="40" name="Rounded Rectangle 39"/>
+          <p:cNvSpPr/>
+          <p:nvPr/>
+        </p:nvSpPr>
+        <p:spPr>
+          <a:xfrm>
+            <a:off x="4370832" y="1636776"/>
+            <a:ext cx="512064" cy="201168"/>
+          </a:xfrm>
+          <a:prstGeom prst="roundRect">
+            <a:avLst>
+              <a:gd name="adj" fmla="val 18181"/>
+            </a:avLst>
+          </a:prstGeom>
+          <a:solidFill>
+            <a:srgbClr val="ECFDF5"/>
+          </a:solidFill>
+          <a:ln w="12700">
+            <a:solidFill>
+              <a:srgbClr val="A7F3D0"/>
+            </a:solidFill>
+          </a:ln>
+          <a:effectLst/>
+        </p:spPr>
+        <p:style>
+          <a:lnRef idx="1">
+            <a:schemeClr val="accent1"/>
+          </a:lnRef>
+          <a:fillRef idx="3">
+            <a:schemeClr val="accent1"/>
+          </a:fillRef>
+          <a:effectRef idx="2">
+            <a:schemeClr val="accent1"/>
+          </a:effectRef>
+          <a:fontRef idx="minor">
+            <a:schemeClr val="lt1"/>
+          </a:fontRef>
+        </p:style>
+        <p:txBody>
+          <a:bodyPr rtlCol="0" anchor="ctr"/>
+          <a:lstStyle/>
+          <a:p>
+            <a:pPr algn="ctr"/>
+          </a:p>
+        </p:txBody>
+      </p:sp>
+      <p:sp>
+        <p:nvSpPr>
+          <p:cNvPr id="41" name="TextBox 40"/>
+          <p:cNvSpPr txBox="1"/>
+          <p:nvPr/>
+        </p:nvSpPr>
+        <p:spPr>
+          <a:xfrm>
+            <a:off x="4370832" y="1636776"/>
+            <a:ext cx="512064" cy="201168"/>
+          </a:xfrm>
+          <a:prstGeom prst="rect">
+            <a:avLst/>
+          </a:prstGeom>
+          <a:noFill/>
+        </p:spPr>
+        <p:txBody>
+          <a:bodyPr wrap="square" lIns="0" rIns="0" tIns="0" bIns="0" anchor="ctr">
+            <a:noAutofit/>
+          </a:bodyPr>
+          <a:lstStyle/>
+          <a:p>
+            <a:pPr algn="ctr">
+              <a:lnSpc>
+                <a:spcPct val="112000"/>
+              </a:lnSpc>
+              <a:spcBef>
+                <a:spcPts val="0"/>
+              </a:spcBef>
+              <a:spcAft>
+                <a:spcPts val="0"/>
+              </a:spcAft>
+            </a:pPr>
+            <a:r>
+              <a:rPr sz="580" b="1" i="0">
+                <a:solidFill>
+                  <a:srgbClr val="047857"/>
+                </a:solidFill>
+                <a:latin typeface="Consolas"/>
+                <a:ea typeface="Microsoft YaHei"/>
+              </a:rPr>
+              <a:t>STEP 2</a:t>
+            </a:r>
+          </a:p>
+        </p:txBody>
+      </p:sp>
+      <p:sp>
+        <p:nvSpPr>
+          <p:cNvPr id="42" name="TextBox 41"/>
+          <p:cNvSpPr txBox="1"/>
+          <p:nvPr/>
+        </p:nvSpPr>
+        <p:spPr>
+          <a:xfrm>
+            <a:off x="4992624" y="1609344"/>
+            <a:ext cx="3291840" cy="137160"/>
+          </a:xfrm>
+          <a:prstGeom prst="rect">
+            <a:avLst/>
+          </a:prstGeom>
+          <a:noFill/>
+        </p:spPr>
+        <p:txBody>
+          <a:bodyPr wrap="square" lIns="0" rIns="0" tIns="0" bIns="0" anchor="t">
+            <a:noAutofit/>
+          </a:bodyPr>
+          <a:lstStyle/>
+          <a:p>
+            <a:pPr algn="l">
+              <a:lnSpc>
+                <a:spcPct val="112000"/>
+              </a:lnSpc>
+              <a:spcBef>
+                <a:spcPts val="0"/>
+              </a:spcBef>
+              <a:spcAft>
+                <a:spcPts val="0"/>
+              </a:spcAft>
+            </a:pPr>
+            <a:r>
+              <a:rPr sz="760" b="1" i="0">
+                <a:solidFill>
+                  <a:srgbClr val="0F172A"/>
+                </a:solidFill>
+                <a:latin typeface="Segoe UI"/>
+                <a:ea typeface="Microsoft YaHei"/>
+              </a:rPr>
+              <a:t>ETL 写侧加密</a:t>
+            </a:r>
+          </a:p>
+        </p:txBody>
+      </p:sp>
+      <p:sp>
+        <p:nvSpPr>
+          <p:cNvPr id="43" name="TextBox 42"/>
+          <p:cNvSpPr txBox="1"/>
+          <p:nvPr/>
+        </p:nvSpPr>
+        <p:spPr>
+          <a:xfrm>
+            <a:off x="4992624" y="1792224"/>
+            <a:ext cx="3291840" cy="237744"/>
+          </a:xfrm>
+          <a:prstGeom prst="rect">
+            <a:avLst/>
+          </a:prstGeom>
+          <a:noFill/>
+        </p:spPr>
+        <p:txBody>
+          <a:bodyPr wrap="square" lIns="0" rIns="0" tIns="0" bIns="0" anchor="t">
+            <a:noAutofit/>
+          </a:bodyPr>
+          <a:lstStyle/>
+          <a:p>
+            <a:pPr algn="l">
+              <a:lnSpc>
+                <a:spcPct val="120000"/>
+              </a:lnSpc>
+              <a:spcBef>
+                <a:spcPts val="0"/>
+              </a:spcBef>
+              <a:spcAft>
+                <a:spcPts val="0"/>
+              </a:spcAft>
+            </a:pPr>
+            <a:r>
+              <a:rPr sz="590" b="0" i="0">
+                <a:solidFill>
+                  <a:srgbClr val="0E7490"/>
+                </a:solidFill>
+                <a:latin typeface="Consolas"/>
+                <a:ea typeface="Microsoft YaHei"/>
+              </a:rPr>
+              <a:t>aes_encrypt(col, secret(...))</a:t>
+            </a:r>
+            <a:r>
+              <a:rPr sz="590" b="0" i="0">
+                <a:solidFill>
+                  <a:srgbClr val="64748B"/>
+                </a:solidFill>
+                <a:latin typeface="Segoe UI"/>
+                <a:ea typeface="Microsoft YaHei"/>
+              </a:rPr>
+              <a:t> · 默认 GCM 随机 IV，绝不能用 ECB</a:t>
+            </a:r>
+          </a:p>
+        </p:txBody>
+      </p:sp>
+      <p:cxnSp>
+        <p:nvCxnSpPr>
+          <p:cNvPr id="44" name="Connector 43"/>
+          <p:cNvCxnSpPr/>
+          <p:nvPr/>
+        </p:nvCxnSpPr>
+        <p:spPr>
+          <a:xfrm>
+            <a:off x="6309360" y="2093976"/>
+            <a:ext cx="0" cy="73152"/>
+          </a:xfrm>
+          <a:prstGeom prst="line">
+            <a:avLst/>
+          </a:prstGeom>
+          <a:ln w="17780">
+            <a:solidFill>
+              <a:srgbClr val="059669"/>
+            </a:solidFill>
+            <a:tailEnd type="triangle" w="med" len="med"/>
+          </a:ln>
+          <a:effectLst/>
+        </p:spPr>
+      </p:cxnSp>
+      <p:sp>
+        <p:nvSpPr>
+          <p:cNvPr id="45" name="Rounded Rectangle 44"/>
+          <p:cNvSpPr/>
+          <p:nvPr/>
+        </p:nvSpPr>
+        <p:spPr>
+          <a:xfrm>
+            <a:off x="4261104" y="2176272"/>
+            <a:ext cx="4114800" cy="548640"/>
+          </a:xfrm>
+          <a:prstGeom prst="roundRect">
+            <a:avLst>
+              <a:gd name="adj" fmla="val 10000"/>
+            </a:avLst>
+          </a:prstGeom>
+          <a:solidFill>
+            <a:srgbClr val="FFFFFF"/>
+          </a:solidFill>
+          <a:ln w="15240">
+            <a:solidFill>
+              <a:srgbClr val="A7F3D0"/>
+            </a:solidFill>
+          </a:ln>
+          <a:effectLst/>
+        </p:spPr>
+        <p:style>
+          <a:lnRef idx="1">
+            <a:schemeClr val="accent1"/>
+          </a:lnRef>
+          <a:fillRef idx="3">
+            <a:schemeClr val="accent1"/>
+          </a:fillRef>
+          <a:effectRef idx="2">
+            <a:schemeClr val="accent1"/>
+          </a:effectRef>
+          <a:fontRef idx="minor">
+            <a:schemeClr val="lt1"/>
+          </a:fontRef>
+        </p:style>
+        <p:txBody>
+          <a:bodyPr rtlCol="0" anchor="ctr"/>
+          <a:lstStyle/>
+          <a:p>
+            <a:pPr algn="ctr"/>
+          </a:p>
+        </p:txBody>
+      </p:sp>
+      <p:sp>
+        <p:nvSpPr>
+          <p:cNvPr id="46" name="Rounded Rectangle 45"/>
+          <p:cNvSpPr/>
+          <p:nvPr/>
+        </p:nvSpPr>
+        <p:spPr>
+          <a:xfrm>
+            <a:off x="4370832" y="2276856"/>
+            <a:ext cx="512064" cy="201168"/>
+          </a:xfrm>
+          <a:prstGeom prst="roundRect">
+            <a:avLst>
+              <a:gd name="adj" fmla="val 18181"/>
+            </a:avLst>
+          </a:prstGeom>
+          <a:solidFill>
+            <a:srgbClr val="ECFDF5"/>
+          </a:solidFill>
+          <a:ln w="12700">
+            <a:solidFill>
+              <a:srgbClr val="A7F3D0"/>
+            </a:solidFill>
+          </a:ln>
+          <a:effectLst/>
+        </p:spPr>
+        <p:style>
+          <a:lnRef idx="1">
+            <a:schemeClr val="accent1"/>
+          </a:lnRef>
+          <a:fillRef idx="3">
+            <a:schemeClr val="accent1"/>
+          </a:fillRef>
+          <a:effectRef idx="2">
+            <a:schemeClr val="accent1"/>
+          </a:effectRef>
+          <a:fontRef idx="minor">
+            <a:schemeClr val="lt1"/>
+          </a:fontRef>
+        </p:style>
+        <p:txBody>
+          <a:bodyPr rtlCol="0" anchor="ctr"/>
+          <a:lstStyle/>
+          <a:p>
+            <a:pPr algn="ctr"/>
+          </a:p>
+        </p:txBody>
+      </p:sp>
+      <p:sp>
+        <p:nvSpPr>
+          <p:cNvPr id="47" name="TextBox 46"/>
+          <p:cNvSpPr txBox="1"/>
+          <p:nvPr/>
+        </p:nvSpPr>
+        <p:spPr>
+          <a:xfrm>
+            <a:off x="4370832" y="2276856"/>
+            <a:ext cx="512064" cy="201168"/>
+          </a:xfrm>
+          <a:prstGeom prst="rect">
+            <a:avLst/>
+          </a:prstGeom>
+          <a:noFill/>
+        </p:spPr>
+        <p:txBody>
+          <a:bodyPr wrap="square" lIns="0" rIns="0" tIns="0" bIns="0" anchor="ctr">
+            <a:noAutofit/>
+          </a:bodyPr>
+          <a:lstStyle/>
+          <a:p>
+            <a:pPr algn="ctr">
+              <a:lnSpc>
+                <a:spcPct val="112000"/>
+              </a:lnSpc>
+              <a:spcBef>
+                <a:spcPts val="0"/>
+              </a:spcBef>
+              <a:spcAft>
+                <a:spcPts val="0"/>
+              </a:spcAft>
+            </a:pPr>
+            <a:r>
+              <a:rPr sz="580" b="1" i="0">
+                <a:solidFill>
+                  <a:srgbClr val="047857"/>
+                </a:solidFill>
+                <a:latin typeface="Consolas"/>
+                <a:ea typeface="Microsoft YaHei"/>
+              </a:rPr>
+              <a:t>STEP 3</a:t>
+            </a:r>
+          </a:p>
+        </p:txBody>
+      </p:sp>
+      <p:sp>
+        <p:nvSpPr>
+          <p:cNvPr id="48" name="TextBox 47"/>
+          <p:cNvSpPr txBox="1"/>
+          <p:nvPr/>
+        </p:nvSpPr>
+        <p:spPr>
+          <a:xfrm>
+            <a:off x="4992624" y="2249424"/>
+            <a:ext cx="3291840" cy="137160"/>
+          </a:xfrm>
+          <a:prstGeom prst="rect">
+            <a:avLst/>
+          </a:prstGeom>
+          <a:noFill/>
+        </p:spPr>
+        <p:txBody>
+          <a:bodyPr wrap="square" lIns="0" rIns="0" tIns="0" bIns="0" anchor="t">
+            <a:noAutofit/>
+          </a:bodyPr>
+          <a:lstStyle/>
+          <a:p>
+            <a:pPr algn="l">
+              <a:lnSpc>
+                <a:spcPct val="112000"/>
+              </a:lnSpc>
+              <a:spcBef>
+                <a:spcPts val="0"/>
+              </a:spcBef>
+              <a:spcAft>
+                <a:spcPts val="0"/>
+              </a:spcAft>
+            </a:pPr>
+            <a:r>
+              <a:rPr sz="760" b="1" i="0">
+                <a:solidFill>
+                  <a:srgbClr val="0F172A"/>
+                </a:solidFill>
+                <a:latin typeface="Segoe UI"/>
+                <a:ea typeface="Microsoft YaHei"/>
+              </a:rPr>
+              <a:t>定义掩码函数</a:t>
+            </a:r>
+          </a:p>
+        </p:txBody>
+      </p:sp>
+      <p:sp>
+        <p:nvSpPr>
+          <p:cNvPr id="49" name="TextBox 48"/>
+          <p:cNvSpPr txBox="1"/>
+          <p:nvPr/>
+        </p:nvSpPr>
+        <p:spPr>
+          <a:xfrm>
+            <a:off x="4992624" y="2432304"/>
+            <a:ext cx="3291840" cy="237744"/>
+          </a:xfrm>
+          <a:prstGeom prst="rect">
+            <a:avLst/>
+          </a:prstGeom>
+          <a:noFill/>
+        </p:spPr>
+        <p:txBody>
+          <a:bodyPr wrap="square" lIns="0" rIns="0" tIns="0" bIns="0" anchor="t">
+            <a:noAutofit/>
+          </a:bodyPr>
+          <a:lstStyle/>
+          <a:p>
+            <a:pPr algn="l">
+              <a:lnSpc>
+                <a:spcPct val="120000"/>
+              </a:lnSpc>
+              <a:spcBef>
+                <a:spcPts val="0"/>
+              </a:spcBef>
+              <a:spcAft>
+                <a:spcPts val="0"/>
+              </a:spcAft>
+            </a:pPr>
+            <a:r>
+              <a:rPr sz="590" b="0" i="0">
+                <a:solidFill>
+                  <a:srgbClr val="0E7490"/>
+                </a:solidFill>
+                <a:latin typeface="Consolas"/>
+                <a:ea typeface="Microsoft YaHei"/>
+              </a:rPr>
+              <a:t>is_account_group_member()</a:t>
+            </a:r>
+            <a:r>
+              <a:rPr sz="590" b="0" i="0">
+                <a:solidFill>
+                  <a:srgbClr val="64748B"/>
+                </a:solidFill>
+                <a:latin typeface="Consolas"/>
+                <a:ea typeface="Microsoft YaHei"/>
+              </a:rPr>
+              <a:t> ? try_aes_decrypt : ***</a:t>
+            </a:r>
+          </a:p>
+        </p:txBody>
+      </p:sp>
+      <p:cxnSp>
+        <p:nvCxnSpPr>
+          <p:cNvPr id="50" name="Connector 49"/>
+          <p:cNvCxnSpPr/>
+          <p:nvPr/>
+        </p:nvCxnSpPr>
+        <p:spPr>
+          <a:xfrm>
+            <a:off x="6309360" y="2734056"/>
+            <a:ext cx="0" cy="73152"/>
+          </a:xfrm>
+          <a:prstGeom prst="line">
+            <a:avLst/>
+          </a:prstGeom>
+          <a:ln w="17780">
+            <a:solidFill>
+              <a:srgbClr val="059669"/>
+            </a:solidFill>
+            <a:tailEnd type="triangle" w="med" len="med"/>
+          </a:ln>
+          <a:effectLst/>
+        </p:spPr>
+      </p:cxnSp>
+      <p:sp>
+        <p:nvSpPr>
+          <p:cNvPr id="51" name="Rounded Rectangle 50"/>
+          <p:cNvSpPr/>
+          <p:nvPr/>
+        </p:nvSpPr>
+        <p:spPr>
+          <a:xfrm>
+            <a:off x="4261104" y="2816352"/>
+            <a:ext cx="4114800" cy="548640"/>
+          </a:xfrm>
+          <a:prstGeom prst="roundRect">
+            <a:avLst>
+              <a:gd name="adj" fmla="val 10000"/>
+            </a:avLst>
+          </a:prstGeom>
+          <a:solidFill>
+            <a:srgbClr val="FFFFFF"/>
+          </a:solidFill>
+          <a:ln w="15240">
+            <a:solidFill>
+              <a:srgbClr val="A7F3D0"/>
+            </a:solidFill>
+          </a:ln>
+          <a:effectLst/>
+        </p:spPr>
+        <p:style>
+          <a:lnRef idx="1">
+            <a:schemeClr val="accent1"/>
+          </a:lnRef>
+          <a:fillRef idx="3">
+            <a:schemeClr val="accent1"/>
+          </a:fillRef>
+          <a:effectRef idx="2">
+            <a:schemeClr val="accent1"/>
+          </a:effectRef>
+          <a:fontRef idx="minor">
+            <a:schemeClr val="lt1"/>
+          </a:fontRef>
+        </p:style>
+        <p:txBody>
+          <a:bodyPr rtlCol="0" anchor="ctr"/>
+          <a:lstStyle/>
+          <a:p>
+            <a:pPr algn="ctr"/>
+          </a:p>
+        </p:txBody>
+      </p:sp>
+      <p:sp>
+        <p:nvSpPr>
+          <p:cNvPr id="52" name="Rounded Rectangle 51"/>
+          <p:cNvSpPr/>
+          <p:nvPr/>
+        </p:nvSpPr>
+        <p:spPr>
+          <a:xfrm>
+            <a:off x="4370832" y="2916936"/>
+            <a:ext cx="512064" cy="201168"/>
+          </a:xfrm>
+          <a:prstGeom prst="roundRect">
+            <a:avLst>
+              <a:gd name="adj" fmla="val 18181"/>
+            </a:avLst>
+          </a:prstGeom>
+          <a:solidFill>
+            <a:srgbClr val="ECFDF5"/>
+          </a:solidFill>
+          <a:ln w="12700">
+            <a:solidFill>
+              <a:srgbClr val="A7F3D0"/>
+            </a:solidFill>
+          </a:ln>
+          <a:effectLst/>
+        </p:spPr>
+        <p:style>
+          <a:lnRef idx="1">
+            <a:schemeClr val="accent1"/>
+          </a:lnRef>
+          <a:fillRef idx="3">
+            <a:schemeClr val="accent1"/>
+          </a:fillRef>
+          <a:effectRef idx="2">
+            <a:schemeClr val="accent1"/>
+          </a:effectRef>
+          <a:fontRef idx="minor">
+            <a:schemeClr val="lt1"/>
+          </a:fontRef>
+        </p:style>
+        <p:txBody>
+          <a:bodyPr rtlCol="0" anchor="ctr"/>
+          <a:lstStyle/>
+          <a:p>
+            <a:pPr algn="ctr"/>
+          </a:p>
+        </p:txBody>
+      </p:sp>
+      <p:sp>
+        <p:nvSpPr>
+          <p:cNvPr id="53" name="TextBox 52"/>
+          <p:cNvSpPr txBox="1"/>
+          <p:nvPr/>
+        </p:nvSpPr>
+        <p:spPr>
+          <a:xfrm>
+            <a:off x="4370832" y="2916936"/>
+            <a:ext cx="512064" cy="201168"/>
+          </a:xfrm>
+          <a:prstGeom prst="rect">
+            <a:avLst/>
+          </a:prstGeom>
+          <a:noFill/>
+        </p:spPr>
+        <p:txBody>
+          <a:bodyPr wrap="square" lIns="0" rIns="0" tIns="0" bIns="0" anchor="ctr">
+            <a:noAutofit/>
+          </a:bodyPr>
+          <a:lstStyle/>
+          <a:p>
+            <a:pPr algn="ctr">
+              <a:lnSpc>
+                <a:spcPct val="112000"/>
+              </a:lnSpc>
+              <a:spcBef>
+                <a:spcPts val="0"/>
+              </a:spcBef>
+              <a:spcAft>
+                <a:spcPts val="0"/>
+              </a:spcAft>
+            </a:pPr>
+            <a:r>
+              <a:rPr sz="580" b="1" i="0">
+                <a:solidFill>
+                  <a:srgbClr val="047857"/>
+                </a:solidFill>
+                <a:latin typeface="Consolas"/>
+                <a:ea typeface="Microsoft YaHei"/>
+              </a:rPr>
+              <a:t>STEP 4</a:t>
+            </a:r>
+          </a:p>
+        </p:txBody>
+      </p:sp>
+      <p:sp>
+        <p:nvSpPr>
+          <p:cNvPr id="54" name="TextBox 53"/>
+          <p:cNvSpPr txBox="1"/>
+          <p:nvPr/>
+        </p:nvSpPr>
+        <p:spPr>
+          <a:xfrm>
+            <a:off x="4992624" y="2889504"/>
+            <a:ext cx="3291840" cy="137160"/>
+          </a:xfrm>
+          <a:prstGeom prst="rect">
+            <a:avLst/>
+          </a:prstGeom>
+          <a:noFill/>
+        </p:spPr>
+        <p:txBody>
+          <a:bodyPr wrap="square" lIns="0" rIns="0" tIns="0" bIns="0" anchor="t">
+            <a:noAutofit/>
+          </a:bodyPr>
+          <a:lstStyle/>
+          <a:p>
+            <a:pPr algn="l">
+              <a:lnSpc>
+                <a:spcPct val="112000"/>
+              </a:lnSpc>
+              <a:spcBef>
+                <a:spcPts val="0"/>
+              </a:spcBef>
+              <a:spcAft>
+                <a:spcPts val="0"/>
+              </a:spcAft>
+            </a:pPr>
+            <a:r>
+              <a:rPr sz="760" b="1" i="0">
+                <a:solidFill>
+                  <a:srgbClr val="0F172A"/>
+                </a:solidFill>
+                <a:latin typeface="Segoe UI"/>
+                <a:ea typeface="Microsoft YaHei"/>
+              </a:rPr>
+              <a:t>挂载到列</a:t>
+            </a:r>
+          </a:p>
+        </p:txBody>
+      </p:sp>
+      <p:sp>
+        <p:nvSpPr>
+          <p:cNvPr id="55" name="TextBox 54"/>
+          <p:cNvSpPr txBox="1"/>
+          <p:nvPr/>
+        </p:nvSpPr>
+        <p:spPr>
+          <a:xfrm>
+            <a:off x="4992624" y="3072384"/>
+            <a:ext cx="3291840" cy="237744"/>
+          </a:xfrm>
+          <a:prstGeom prst="rect">
+            <a:avLst/>
+          </a:prstGeom>
+          <a:noFill/>
+        </p:spPr>
+        <p:txBody>
+          <a:bodyPr wrap="square" lIns="0" rIns="0" tIns="0" bIns="0" anchor="t">
+            <a:noAutofit/>
+          </a:bodyPr>
+          <a:lstStyle/>
+          <a:p>
+            <a:pPr algn="l">
+              <a:lnSpc>
+                <a:spcPct val="120000"/>
+              </a:lnSpc>
+              <a:spcBef>
+                <a:spcPts val="0"/>
+              </a:spcBef>
+              <a:spcAft>
+                <a:spcPts val="0"/>
+              </a:spcAft>
+            </a:pPr>
+            <a:r>
+              <a:rPr sz="590" b="0" i="0">
+                <a:solidFill>
+                  <a:srgbClr val="0E7490"/>
+                </a:solidFill>
+                <a:latin typeface="Consolas"/>
+                <a:ea typeface="Microsoft YaHei"/>
+              </a:rPr>
+              <a:t>ALTER TABLE … SET MASK</a:t>
+            </a:r>
+            <a:r>
+              <a:rPr sz="590" b="0" i="0">
+                <a:solidFill>
+                  <a:srgbClr val="64748B"/>
+                </a:solidFill>
+                <a:latin typeface="Segoe UI"/>
+                <a:ea typeface="Microsoft YaHei"/>
+              </a:rPr>
+              <a:t>（必须打在基表，不支持视图）</a:t>
+            </a:r>
+          </a:p>
+        </p:txBody>
+      </p:sp>
+      <p:sp>
+        <p:nvSpPr>
+          <p:cNvPr id="56" name="Rounded Rectangle 55"/>
+          <p:cNvSpPr/>
+          <p:nvPr/>
+        </p:nvSpPr>
+        <p:spPr>
+          <a:xfrm>
+            <a:off x="4261104" y="3474720"/>
+            <a:ext cx="4114800" cy="365760"/>
+          </a:xfrm>
+          <a:prstGeom prst="roundRect">
+            <a:avLst>
+              <a:gd name="adj" fmla="val 15000"/>
+            </a:avLst>
+          </a:prstGeom>
+          <a:solidFill>
+            <a:srgbClr val="DCFCE7"/>
+          </a:solidFill>
+          <a:ln w="13970">
+            <a:solidFill>
+              <a:srgbClr val="A7F3D0"/>
+            </a:solidFill>
+          </a:ln>
+          <a:effectLst/>
+        </p:spPr>
+        <p:style>
+          <a:lnRef idx="1">
+            <a:schemeClr val="accent1"/>
+          </a:lnRef>
+          <a:fillRef idx="3">
+            <a:schemeClr val="accent1"/>
+          </a:fillRef>
+          <a:effectRef idx="2">
+            <a:schemeClr val="accent1"/>
+          </a:effectRef>
+          <a:fontRef idx="minor">
+            <a:schemeClr val="lt1"/>
+          </a:fontRef>
+        </p:style>
+        <p:txBody>
+          <a:bodyPr rtlCol="0" anchor="ctr"/>
+          <a:lstStyle/>
+          <a:p>
+            <a:pPr algn="ctr"/>
+          </a:p>
+        </p:txBody>
+      </p:sp>
+      <p:sp>
+        <p:nvSpPr>
+          <p:cNvPr id="57" name="TextBox 56"/>
+          <p:cNvSpPr txBox="1"/>
+          <p:nvPr/>
+        </p:nvSpPr>
+        <p:spPr>
+          <a:xfrm>
+            <a:off x="4352544" y="3474720"/>
+            <a:ext cx="3931920" cy="365760"/>
+          </a:xfrm>
+          <a:prstGeom prst="rect">
+            <a:avLst/>
+          </a:prstGeom>
+          <a:noFill/>
+        </p:spPr>
+        <p:txBody>
+          <a:bodyPr wrap="square" lIns="0" rIns="0" tIns="0" bIns="0" anchor="ctr">
+            <a:noAutofit/>
+          </a:bodyPr>
+          <a:lstStyle/>
+          <a:p>
+            <a:pPr algn="ctr">
+              <a:lnSpc>
+                <a:spcPct val="112000"/>
+              </a:lnSpc>
+              <a:spcBef>
+                <a:spcPts val="0"/>
+              </a:spcBef>
+              <a:spcAft>
+                <a:spcPts val="0"/>
+              </a:spcAft>
+            </a:pPr>
+            <a:r>
+              <a:rPr sz="680" b="1" i="0">
+                <a:solidFill>
+                  <a:srgbClr val="047857"/>
+                </a:solidFill>
+                <a:latin typeface="Segoe UI"/>
+                <a:ea typeface="Microsoft YaHei"/>
+              </a:rPr>
+              <a:t>同一条 SQL：授权者见明文 · 其他人见 *** · 直读 Parquet 只见密文</a:t>
+            </a:r>
+          </a:p>
+        </p:txBody>
+      </p:sp>
+      <p:sp>
+        <p:nvSpPr>
+          <p:cNvPr id="58" name="TextBox 57"/>
+          <p:cNvSpPr txBox="1"/>
+          <p:nvPr/>
+        </p:nvSpPr>
+        <p:spPr>
+          <a:xfrm>
+            <a:off x="4315968" y="3913632"/>
+            <a:ext cx="4023360" cy="274320"/>
+          </a:xfrm>
+          <a:prstGeom prst="rect">
+            <a:avLst/>
+          </a:prstGeom>
+          <a:noFill/>
+        </p:spPr>
+        <p:txBody>
+          <a:bodyPr wrap="square" lIns="0" rIns="0" tIns="0" bIns="0" anchor="t">
+            <a:noAutofit/>
+          </a:bodyPr>
+          <a:lstStyle/>
+          <a:p>
+            <a:pPr algn="l">
+              <a:lnSpc>
+                <a:spcPct val="120000"/>
+              </a:lnSpc>
+              <a:spcBef>
+                <a:spcPts val="0"/>
+              </a:spcBef>
+              <a:spcAft>
+                <a:spcPts val="0"/>
+              </a:spcAft>
+            </a:pPr>
+            <a:r>
+              <a:rPr sz="590" b="1" i="0">
+                <a:solidFill>
+                  <a:srgbClr val="0F172A"/>
+                </a:solidFill>
+                <a:latin typeface="Segoe UI"/>
+                <a:ea typeface="Microsoft YaHei"/>
+              </a:rPr>
+              <a:t>为何安全：</a:t>
+            </a:r>
+            <a:r>
+              <a:rPr sz="590" b="0" i="0">
+                <a:solidFill>
+                  <a:srgbClr val="64748B"/>
+                </a:solidFill>
+                <a:latin typeface="Segoe UI"/>
+                <a:ea typeface="Microsoft YaHei"/>
+              </a:rPr>
+              <a:t>掩码函数以定义者权限取密钥，分析师自己写 aes_decrypt 也拿不到 key</a:t>
+            </a:r>
+          </a:p>
+        </p:txBody>
+      </p:sp>
+      <p:sp>
+        <p:nvSpPr>
+          <p:cNvPr id="59" name="Rounded Rectangle 58"/>
+          <p:cNvSpPr/>
+          <p:nvPr/>
+        </p:nvSpPr>
+        <p:spPr>
+          <a:xfrm>
+            <a:off x="4261104" y="4224528"/>
+            <a:ext cx="4114800" cy="731520"/>
+          </a:xfrm>
+          <a:prstGeom prst="roundRect">
+            <a:avLst>
+              <a:gd name="adj" fmla="val 7500"/>
+            </a:avLst>
+          </a:prstGeom>
+          <a:solidFill>
+            <a:srgbClr val="FFF7ED"/>
+          </a:solidFill>
+          <a:ln w="13970">
+            <a:solidFill>
+              <a:srgbClr val="FDBA74"/>
+            </a:solidFill>
+          </a:ln>
+          <a:effectLst/>
+        </p:spPr>
+        <p:style>
+          <a:lnRef idx="1">
+            <a:schemeClr val="accent1"/>
+          </a:lnRef>
+          <a:fillRef idx="3">
+            <a:schemeClr val="accent1"/>
+          </a:fillRef>
+          <a:effectRef idx="2">
+            <a:schemeClr val="accent1"/>
+          </a:effectRef>
+          <a:fontRef idx="minor">
+            <a:schemeClr val="lt1"/>
+          </a:fontRef>
+        </p:style>
+        <p:txBody>
+          <a:bodyPr rtlCol="0" anchor="ctr"/>
+          <a:lstStyle/>
+          <a:p>
+            <a:pPr algn="ctr"/>
+          </a:p>
+        </p:txBody>
+      </p:sp>
+      <p:sp>
+        <p:nvSpPr>
+          <p:cNvPr id="60" name="TextBox 59"/>
+          <p:cNvSpPr txBox="1"/>
+          <p:nvPr/>
+        </p:nvSpPr>
+        <p:spPr>
+          <a:xfrm>
+            <a:off x="4370832" y="4279392"/>
+            <a:ext cx="3931920" cy="128016"/>
+          </a:xfrm>
+          <a:prstGeom prst="rect">
+            <a:avLst/>
+          </a:prstGeom>
+          <a:noFill/>
+        </p:spPr>
+        <p:txBody>
+          <a:bodyPr wrap="square" lIns="0" rIns="0" tIns="0" bIns="0" anchor="t">
+            <a:noAutofit/>
+          </a:bodyPr>
+          <a:lstStyle/>
+          <a:p>
+            <a:pPr algn="l">
+              <a:lnSpc>
+                <a:spcPct val="112000"/>
+              </a:lnSpc>
+              <a:spcBef>
+                <a:spcPts val="0"/>
+              </a:spcBef>
+              <a:spcAft>
+                <a:spcPts val="0"/>
+              </a:spcAft>
+            </a:pPr>
+            <a:r>
+              <a:rPr sz="720" b="1" i="0">
+                <a:solidFill>
+                  <a:srgbClr val="B45309"/>
+                </a:solidFill>
+                <a:latin typeface="Segoe UI"/>
+                <a:ea typeface="Microsoft YaHei"/>
+              </a:rPr>
+              <a:t>三个必守约束</a:t>
+            </a:r>
+          </a:p>
+        </p:txBody>
+      </p:sp>
+      <p:sp>
+        <p:nvSpPr>
+          <p:cNvPr id="61" name="TextBox 60"/>
+          <p:cNvSpPr txBox="1"/>
+          <p:nvPr/>
+        </p:nvSpPr>
+        <p:spPr>
+          <a:xfrm>
+            <a:off x="4370832" y="4443984"/>
+            <a:ext cx="3913632" cy="475488"/>
+          </a:xfrm>
+          <a:prstGeom prst="rect">
+            <a:avLst/>
+          </a:prstGeom>
+          <a:noFill/>
+        </p:spPr>
+        <p:txBody>
+          <a:bodyPr wrap="square" lIns="0" rIns="0" tIns="0" bIns="0" anchor="t">
+            <a:noAutofit/>
+          </a:bodyPr>
+          <a:lstStyle/>
+          <a:p>
+            <a:pPr algn="l">
+              <a:lnSpc>
+                <a:spcPct val="125000"/>
+              </a:lnSpc>
+              <a:spcBef>
+                <a:spcPts val="0"/>
+              </a:spcBef>
+              <a:spcAft>
+                <a:spcPts val="0"/>
+              </a:spcAft>
+            </a:pPr>
+            <a:r>
+              <a:rPr sz="580" b="0" i="0">
+                <a:solidFill>
+                  <a:srgbClr val="92400E"/>
+                </a:solidFill>
+                <a:latin typeface="Segoe UI"/>
+                <a:ea typeface="Microsoft YaHei"/>
+              </a:rPr>
+              <a:t>❶ 绝不能改成 ECB（暴露频率分布）　❷ 业务用户对 Secret Scope 必须无 READ 权限，否则防线归零</a:t>
+            </a:r>
+          </a:p>
+          <a:p>
+            <a:pPr algn="l">
+              <a:lnSpc>
+                <a:spcPct val="125000"/>
+              </a:lnSpc>
+              <a:spcBef>
+                <a:spcPts val="0"/>
+              </a:spcBef>
+              <a:spcAft>
+                <a:spcPts val="0"/>
+              </a:spcAft>
+            </a:pPr>
+            <a:r>
+              <a:rPr sz="580" b="0" i="0">
+                <a:solidFill>
+                  <a:srgbClr val="92400E"/>
+                </a:solidFill>
+                <a:latin typeface="Segoe UI"/>
+                <a:ea typeface="Microsoft YaHei"/>
+              </a:rPr>
+              <a:t>❸ 掩码不支持视图须挂基表；卸载顺序：先 DROP MASK 再 DROP FUNCTION</a:t>
+            </a:r>
+          </a:p>
+        </p:txBody>
+      </p:sp>
+      <p:sp>
+        <p:nvSpPr>
+          <p:cNvPr id="62" name="Rounded Rectangle 61"/>
+          <p:cNvSpPr/>
+          <p:nvPr/>
+        </p:nvSpPr>
+        <p:spPr>
+          <a:xfrm>
+            <a:off x="8522208" y="566928"/>
+            <a:ext cx="3474720" cy="274320"/>
+          </a:xfrm>
+          <a:prstGeom prst="roundRect">
+            <a:avLst>
+              <a:gd name="adj" fmla="val 20000"/>
+            </a:avLst>
+          </a:prstGeom>
+          <a:solidFill>
+            <a:srgbClr val="FFFFFF"/>
+          </a:solidFill>
+          <a:ln w="13970">
+            <a:solidFill>
+              <a:srgbClr val="E2E8F0"/>
+            </a:solidFill>
+          </a:ln>
+          <a:effectLst/>
+        </p:spPr>
+        <p:style>
+          <a:lnRef idx="1">
+            <a:schemeClr val="accent1"/>
+          </a:lnRef>
+          <a:fillRef idx="3">
+            <a:schemeClr val="accent1"/>
+          </a:fillRef>
+          <a:effectRef idx="2">
+            <a:schemeClr val="accent1"/>
+          </a:effectRef>
+          <a:fontRef idx="minor">
+            <a:schemeClr val="lt1"/>
+          </a:fontRef>
+        </p:style>
+        <p:txBody>
+          <a:bodyPr rtlCol="0" anchor="ctr"/>
+          <a:lstStyle/>
+          <a:p>
+            <a:pPr algn="ctr"/>
+          </a:p>
+        </p:txBody>
+      </p:sp>
+      <p:sp>
+        <p:nvSpPr>
+          <p:cNvPr id="63" name="TextBox 62"/>
+          <p:cNvSpPr txBox="1"/>
+          <p:nvPr/>
+        </p:nvSpPr>
+        <p:spPr>
+          <a:xfrm>
+            <a:off x="8650224" y="566928"/>
+            <a:ext cx="3218687" cy="274320"/>
+          </a:xfrm>
+          <a:prstGeom prst="rect">
+            <a:avLst/>
+          </a:prstGeom>
+          <a:noFill/>
+        </p:spPr>
+        <p:txBody>
+          <a:bodyPr wrap="square" lIns="0" rIns="0" tIns="0" bIns="0" anchor="ctr">
+            <a:noAutofit/>
+          </a:bodyPr>
+          <a:lstStyle/>
+          <a:p>
+            <a:pPr algn="l">
+              <a:lnSpc>
+                <a:spcPct val="112000"/>
+              </a:lnSpc>
+              <a:spcBef>
+                <a:spcPts val="0"/>
+              </a:spcBef>
+              <a:spcAft>
+                <a:spcPts val="0"/>
+              </a:spcAft>
+            </a:pPr>
+            <a:r>
+              <a:rPr sz="850" b="1" i="0">
+                <a:solidFill>
+                  <a:srgbClr val="0F172A"/>
+                </a:solidFill>
+                <a:latin typeface="Segoe UI"/>
+                <a:ea typeface="Microsoft YaHei"/>
+              </a:rPr>
+              <a:t>密钥体系 · 合规与销毁</a:t>
+            </a:r>
+          </a:p>
+        </p:txBody>
+      </p:sp>
+      <p:sp>
+        <p:nvSpPr>
+          <p:cNvPr id="64" name="Rounded Rectangle 63"/>
+          <p:cNvSpPr/>
+          <p:nvPr/>
+        </p:nvSpPr>
+        <p:spPr>
+          <a:xfrm>
+            <a:off x="8522208" y="896112"/>
+            <a:ext cx="3474720" cy="1572768"/>
+          </a:xfrm>
+          <a:prstGeom prst="roundRect">
+            <a:avLst>
+              <a:gd name="adj" fmla="val 3488"/>
+            </a:avLst>
+          </a:prstGeom>
+          <a:solidFill>
+            <a:srgbClr val="FFFFFF"/>
+          </a:solidFill>
+          <a:ln w="15240">
+            <a:solidFill>
+              <a:srgbClr val="0078D4"/>
+            </a:solidFill>
+          </a:ln>
+          <a:effectLst/>
+        </p:spPr>
+        <p:style>
+          <a:lnRef idx="1">
+            <a:schemeClr val="accent1"/>
+          </a:lnRef>
+          <a:fillRef idx="3">
+            <a:schemeClr val="accent1"/>
+          </a:fillRef>
+          <a:effectRef idx="2">
+            <a:schemeClr val="accent1"/>
+          </a:effectRef>
+          <a:fontRef idx="minor">
+            <a:schemeClr val="lt1"/>
+          </a:fontRef>
+        </p:style>
+        <p:txBody>
+          <a:bodyPr rtlCol="0" anchor="ctr"/>
+          <a:lstStyle/>
+          <a:p>
+            <a:pPr algn="ctr"/>
+          </a:p>
+        </p:txBody>
+      </p:sp>
+      <p:sp>
+        <p:nvSpPr>
+          <p:cNvPr id="65" name="Rounded Rectangle 64"/>
+          <p:cNvSpPr/>
+          <p:nvPr/>
+        </p:nvSpPr>
+        <p:spPr>
+          <a:xfrm>
+            <a:off x="8650224" y="987552"/>
+            <a:ext cx="3218688" cy="310896"/>
+          </a:xfrm>
+          <a:prstGeom prst="roundRect">
+            <a:avLst>
+              <a:gd name="adj" fmla="val 14705"/>
+            </a:avLst>
+          </a:prstGeom>
+          <a:solidFill>
+            <a:srgbClr val="EFF6FF"/>
+          </a:solidFill>
+          <a:ln w="13970">
+            <a:solidFill>
+              <a:srgbClr val="BFDBFE"/>
+            </a:solidFill>
+          </a:ln>
+          <a:effectLst/>
+        </p:spPr>
+        <p:style>
+          <a:lnRef idx="1">
+            <a:schemeClr val="accent1"/>
+          </a:lnRef>
+          <a:fillRef idx="3">
+            <a:schemeClr val="accent1"/>
+          </a:fillRef>
+          <a:effectRef idx="2">
+            <a:schemeClr val="accent1"/>
+          </a:effectRef>
+          <a:fontRef idx="minor">
+            <a:schemeClr val="lt1"/>
+          </a:fontRef>
+        </p:style>
+        <p:txBody>
+          <a:bodyPr rtlCol="0" anchor="ctr"/>
+          <a:lstStyle/>
+          <a:p>
+            <a:pPr algn="ctr"/>
+          </a:p>
+        </p:txBody>
+      </p:sp>
+      <p:sp>
+        <p:nvSpPr>
+          <p:cNvPr id="66" name="TextBox 65"/>
+          <p:cNvSpPr txBox="1"/>
+          <p:nvPr/>
+        </p:nvSpPr>
+        <p:spPr>
+          <a:xfrm>
+            <a:off x="8677656" y="987552"/>
+            <a:ext cx="3163824" cy="310896"/>
+          </a:xfrm>
+          <a:prstGeom prst="rect">
+            <a:avLst/>
+          </a:prstGeom>
+          <a:noFill/>
+        </p:spPr>
+        <p:txBody>
+          <a:bodyPr wrap="square" lIns="0" rIns="0" tIns="0" bIns="0" anchor="ctr">
+            <a:noAutofit/>
+          </a:bodyPr>
+          <a:lstStyle/>
+          <a:p>
+            <a:pPr algn="ctr">
+              <a:lnSpc>
+                <a:spcPct val="108000"/>
+              </a:lnSpc>
+              <a:spcBef>
+                <a:spcPts val="0"/>
+              </a:spcBef>
+              <a:spcAft>
+                <a:spcPts val="0"/>
+              </a:spcAft>
+            </a:pPr>
+            <a:r>
+              <a:rPr sz="680" b="0" i="0">
+                <a:solidFill>
+                  <a:srgbClr val="1E40AF"/>
+                </a:solidFill>
+                <a:latin typeface="Segoe UI"/>
+                <a:ea typeface="Microsoft YaHei"/>
+              </a:rPr>
+              <a:t>Key Vault · CMK / KEK 主密钥</a:t>
+            </a:r>
+          </a:p>
+        </p:txBody>
+      </p:sp>
+      <p:cxnSp>
+        <p:nvCxnSpPr>
+          <p:cNvPr id="67" name="Connector 66"/>
+          <p:cNvCxnSpPr/>
+          <p:nvPr/>
+        </p:nvCxnSpPr>
+        <p:spPr>
+          <a:xfrm>
+            <a:off x="10259568" y="1307592"/>
+            <a:ext cx="0" cy="109728"/>
+          </a:xfrm>
+          <a:prstGeom prst="line">
+            <a:avLst/>
+          </a:prstGeom>
+          <a:ln w="16510">
+            <a:solidFill>
+              <a:srgbClr val="0078D4"/>
+            </a:solidFill>
+            <a:tailEnd type="triangle" w="med" len="med"/>
+          </a:ln>
+          <a:effectLst/>
+        </p:spPr>
+      </p:cxnSp>
+      <p:sp>
+        <p:nvSpPr>
+          <p:cNvPr id="68" name="TextBox 67"/>
+          <p:cNvSpPr txBox="1"/>
+          <p:nvPr/>
+        </p:nvSpPr>
+        <p:spPr>
+          <a:xfrm>
+            <a:off x="10351008" y="1298448"/>
+            <a:ext cx="914400" cy="109728"/>
+          </a:xfrm>
+          <a:prstGeom prst="rect">
+            <a:avLst/>
+          </a:prstGeom>
+          <a:noFill/>
+        </p:spPr>
+        <p:txBody>
+          <a:bodyPr wrap="square" lIns="0" rIns="0" tIns="0" bIns="0" anchor="t">
+            <a:noAutofit/>
+          </a:bodyPr>
+          <a:lstStyle/>
+          <a:p>
+            <a:pPr algn="l">
+              <a:lnSpc>
+                <a:spcPct val="112000"/>
+              </a:lnSpc>
+              <a:spcBef>
+                <a:spcPts val="0"/>
+              </a:spcBef>
+              <a:spcAft>
+                <a:spcPts val="0"/>
+              </a:spcAft>
+            </a:pPr>
+            <a:r>
+              <a:rPr sz="540" b="1" i="0">
+                <a:solidFill>
+                  <a:srgbClr val="0078D4"/>
+                </a:solidFill>
+                <a:latin typeface="Segoe UI"/>
+                <a:ea typeface="Microsoft YaHei"/>
+              </a:rPr>
+              <a:t>包装 / 解包</a:t>
+            </a:r>
+          </a:p>
+        </p:txBody>
+      </p:sp>
+      <p:sp>
+        <p:nvSpPr>
+          <p:cNvPr id="69" name="Rounded Rectangle 68"/>
+          <p:cNvSpPr/>
+          <p:nvPr/>
+        </p:nvSpPr>
+        <p:spPr>
+          <a:xfrm>
+            <a:off x="8650224" y="1426464"/>
+            <a:ext cx="3218688" cy="310896"/>
+          </a:xfrm>
+          <a:prstGeom prst="roundRect">
+            <a:avLst>
+              <a:gd name="adj" fmla="val 14705"/>
+            </a:avLst>
+          </a:prstGeom>
+          <a:solidFill>
+            <a:srgbClr val="F5F3FF"/>
+          </a:solidFill>
+          <a:ln w="13970">
+            <a:solidFill>
+              <a:srgbClr val="DDD6FE"/>
+            </a:solidFill>
+          </a:ln>
+          <a:effectLst/>
+        </p:spPr>
+        <p:style>
+          <a:lnRef idx="1">
+            <a:schemeClr val="accent1"/>
+          </a:lnRef>
+          <a:fillRef idx="3">
+            <a:schemeClr val="accent1"/>
+          </a:fillRef>
+          <a:effectRef idx="2">
+            <a:schemeClr val="accent1"/>
+          </a:effectRef>
+          <a:fontRef idx="minor">
+            <a:schemeClr val="lt1"/>
+          </a:fontRef>
+        </p:style>
+        <p:txBody>
+          <a:bodyPr rtlCol="0" anchor="ctr"/>
+          <a:lstStyle/>
+          <a:p>
+            <a:pPr algn="ctr"/>
+          </a:p>
+        </p:txBody>
+      </p:sp>
+      <p:sp>
+        <p:nvSpPr>
+          <p:cNvPr id="70" name="TextBox 69"/>
+          <p:cNvSpPr txBox="1"/>
+          <p:nvPr/>
+        </p:nvSpPr>
+        <p:spPr>
+          <a:xfrm>
+            <a:off x="8677656" y="1426464"/>
+            <a:ext cx="3163824" cy="310896"/>
+          </a:xfrm>
+          <a:prstGeom prst="rect">
+            <a:avLst/>
+          </a:prstGeom>
+          <a:noFill/>
+        </p:spPr>
+        <p:txBody>
+          <a:bodyPr wrap="square" lIns="0" rIns="0" tIns="0" bIns="0" anchor="ctr">
+            <a:noAutofit/>
+          </a:bodyPr>
+          <a:lstStyle/>
+          <a:p>
+            <a:pPr algn="ctr">
+              <a:lnSpc>
+                <a:spcPct val="108000"/>
+              </a:lnSpc>
+              <a:spcBef>
+                <a:spcPts val="0"/>
+              </a:spcBef>
+              <a:spcAft>
+                <a:spcPts val="0"/>
+              </a:spcAft>
+            </a:pPr>
+            <a:r>
+              <a:rPr sz="680" b="0" i="0">
+                <a:solidFill>
+                  <a:srgbClr val="6D28D9"/>
+                </a:solidFill>
+                <a:latin typeface="Segoe UI"/>
+                <a:ea typeface="Microsoft YaHei"/>
+              </a:rPr>
+              <a:t>DEK 数据密钥（带 key_version）</a:t>
+            </a:r>
+          </a:p>
+        </p:txBody>
+      </p:sp>
+      <p:cxnSp>
+        <p:nvCxnSpPr>
+          <p:cNvPr id="71" name="Connector 70"/>
+          <p:cNvCxnSpPr/>
+          <p:nvPr/>
+        </p:nvCxnSpPr>
+        <p:spPr>
+          <a:xfrm>
+            <a:off x="10259568" y="1746504"/>
+            <a:ext cx="0" cy="109727"/>
+          </a:xfrm>
+          <a:prstGeom prst="line">
+            <a:avLst/>
+          </a:prstGeom>
+          <a:ln w="16510">
+            <a:solidFill>
+              <a:srgbClr val="7C3AED"/>
+            </a:solidFill>
+            <a:tailEnd type="triangle" w="med" len="med"/>
+          </a:ln>
+          <a:effectLst/>
+        </p:spPr>
+      </p:cxnSp>
+      <p:sp>
+        <p:nvSpPr>
+          <p:cNvPr id="72" name="TextBox 71"/>
+          <p:cNvSpPr txBox="1"/>
+          <p:nvPr/>
+        </p:nvSpPr>
+        <p:spPr>
+          <a:xfrm>
+            <a:off x="10351008" y="1737360"/>
+            <a:ext cx="914400" cy="109728"/>
+          </a:xfrm>
+          <a:prstGeom prst="rect">
+            <a:avLst/>
+          </a:prstGeom>
+          <a:noFill/>
+        </p:spPr>
+        <p:txBody>
+          <a:bodyPr wrap="square" lIns="0" rIns="0" tIns="0" bIns="0" anchor="t">
+            <a:noAutofit/>
+          </a:bodyPr>
+          <a:lstStyle/>
+          <a:p>
+            <a:pPr algn="l">
+              <a:lnSpc>
+                <a:spcPct val="112000"/>
+              </a:lnSpc>
+              <a:spcBef>
+                <a:spcPts val="0"/>
+              </a:spcBef>
+              <a:spcAft>
+                <a:spcPts val="0"/>
+              </a:spcAft>
+            </a:pPr>
+            <a:r>
+              <a:rPr sz="540" b="1" i="0">
+                <a:solidFill>
+                  <a:srgbClr val="7C3AED"/>
+                </a:solidFill>
+                <a:latin typeface="Segoe UI"/>
+                <a:ea typeface="Microsoft YaHei"/>
+              </a:rPr>
+              <a:t>加密 / 解密</a:t>
+            </a:r>
+          </a:p>
+        </p:txBody>
+      </p:sp>
+      <p:sp>
+        <p:nvSpPr>
+          <p:cNvPr id="73" name="Rounded Rectangle 72"/>
+          <p:cNvSpPr/>
+          <p:nvPr/>
+        </p:nvSpPr>
+        <p:spPr>
+          <a:xfrm>
+            <a:off x="8650224" y="1865376"/>
+            <a:ext cx="3218688" cy="310896"/>
+          </a:xfrm>
+          <a:prstGeom prst="roundRect">
+            <a:avLst>
+              <a:gd name="adj" fmla="val 14705"/>
+            </a:avLst>
+          </a:prstGeom>
+          <a:solidFill>
+            <a:srgbClr val="ECFDF5"/>
+          </a:solidFill>
+          <a:ln w="13970">
+            <a:solidFill>
+              <a:srgbClr val="A7F3D0"/>
+            </a:solidFill>
+          </a:ln>
+          <a:effectLst/>
+        </p:spPr>
+        <p:style>
+          <a:lnRef idx="1">
+            <a:schemeClr val="accent1"/>
+          </a:lnRef>
+          <a:fillRef idx="3">
+            <a:schemeClr val="accent1"/>
+          </a:fillRef>
+          <a:effectRef idx="2">
+            <a:schemeClr val="accent1"/>
+          </a:effectRef>
+          <a:fontRef idx="minor">
+            <a:schemeClr val="lt1"/>
+          </a:fontRef>
+        </p:style>
+        <p:txBody>
+          <a:bodyPr rtlCol="0" anchor="ctr"/>
+          <a:lstStyle/>
+          <a:p>
+            <a:pPr algn="ctr"/>
+          </a:p>
+        </p:txBody>
+      </p:sp>
+      <p:sp>
+        <p:nvSpPr>
+          <p:cNvPr id="74" name="TextBox 73"/>
+          <p:cNvSpPr txBox="1"/>
+          <p:nvPr/>
+        </p:nvSpPr>
+        <p:spPr>
+          <a:xfrm>
+            <a:off x="8677656" y="1865376"/>
+            <a:ext cx="3163824" cy="310896"/>
+          </a:xfrm>
+          <a:prstGeom prst="rect">
+            <a:avLst/>
+          </a:prstGeom>
+          <a:noFill/>
+        </p:spPr>
+        <p:txBody>
+          <a:bodyPr wrap="square" lIns="0" rIns="0" tIns="0" bIns="0" anchor="ctr">
+            <a:noAutofit/>
+          </a:bodyPr>
+          <a:lstStyle/>
+          <a:p>
+            <a:pPr algn="ctr">
+              <a:lnSpc>
+                <a:spcPct val="108000"/>
+              </a:lnSpc>
+              <a:spcBef>
+                <a:spcPts val="0"/>
+              </a:spcBef>
+              <a:spcAft>
+                <a:spcPts val="0"/>
+              </a:spcAft>
+            </a:pPr>
+            <a:r>
+              <a:rPr sz="680" b="0" i="0">
+                <a:solidFill>
+                  <a:srgbClr val="047857"/>
+                </a:solidFill>
+                <a:latin typeface="Segoe UI"/>
+                <a:ea typeface="Microsoft YaHei"/>
+              </a:rPr>
+              <a:t>Iceberg 密文 + UC 列掩码</a:t>
+            </a:r>
+          </a:p>
+        </p:txBody>
+      </p:sp>
+      <p:sp>
+        <p:nvSpPr>
+          <p:cNvPr id="75" name="TextBox 74"/>
+          <p:cNvSpPr txBox="1"/>
+          <p:nvPr/>
+        </p:nvSpPr>
+        <p:spPr>
+          <a:xfrm>
+            <a:off x="8613648" y="2231136"/>
+            <a:ext cx="3291840" cy="201168"/>
+          </a:xfrm>
+          <a:prstGeom prst="rect">
+            <a:avLst/>
+          </a:prstGeom>
+          <a:noFill/>
+        </p:spPr>
+        <p:txBody>
+          <a:bodyPr wrap="square" lIns="0" rIns="0" tIns="0" bIns="0" anchor="t">
+            <a:noAutofit/>
+          </a:bodyPr>
+          <a:lstStyle/>
+          <a:p>
+            <a:pPr algn="ctr">
+              <a:lnSpc>
+                <a:spcPct val="112000"/>
+              </a:lnSpc>
+              <a:spcBef>
+                <a:spcPts val="0"/>
+              </a:spcBef>
+              <a:spcAft>
+                <a:spcPts val="0"/>
+              </a:spcAft>
+            </a:pPr>
+            <a:r>
+              <a:rPr sz="580" b="1" i="0">
+                <a:solidFill>
+                  <a:srgbClr val="0078D4"/>
+                </a:solidFill>
+                <a:latin typeface="Segoe UI"/>
+                <a:ea typeface="Microsoft YaHei"/>
+              </a:rPr>
+              <a:t>信封加密：轮转主密钥只重新包装 DEK，数据文件一个字节不动</a:t>
+            </a:r>
+          </a:p>
+        </p:txBody>
+      </p:sp>
+      <p:sp>
+        <p:nvSpPr>
+          <p:cNvPr id="76" name="Rounded Rectangle 75"/>
+          <p:cNvSpPr/>
+          <p:nvPr/>
+        </p:nvSpPr>
+        <p:spPr>
+          <a:xfrm>
+            <a:off x="8522208" y="2560320"/>
+            <a:ext cx="3474720" cy="859536"/>
+          </a:xfrm>
+          <a:prstGeom prst="roundRect">
+            <a:avLst>
+              <a:gd name="adj" fmla="val 6382"/>
+            </a:avLst>
+          </a:prstGeom>
+          <a:solidFill>
+            <a:srgbClr val="FFF1F2"/>
+          </a:solidFill>
+          <a:ln w="15240">
+            <a:solidFill>
+              <a:srgbClr val="E11D48"/>
+            </a:solidFill>
+            <a:prstDash val="dash"/>
+          </a:ln>
+          <a:effectLst/>
+        </p:spPr>
+        <p:style>
+          <a:lnRef idx="1">
+            <a:schemeClr val="accent1"/>
+          </a:lnRef>
+          <a:fillRef idx="3">
+            <a:schemeClr val="accent1"/>
+          </a:fillRef>
+          <a:effectRef idx="2">
+            <a:schemeClr val="accent1"/>
+          </a:effectRef>
+          <a:fontRef idx="minor">
+            <a:schemeClr val="lt1"/>
+          </a:fontRef>
+        </p:style>
+        <p:txBody>
+          <a:bodyPr rtlCol="0" anchor="ctr"/>
+          <a:lstStyle/>
+          <a:p>
+            <a:pPr algn="ctr"/>
+          </a:p>
+        </p:txBody>
+      </p:sp>
+      <p:sp>
+        <p:nvSpPr>
+          <p:cNvPr id="77" name="TextBox 76"/>
+          <p:cNvSpPr txBox="1"/>
+          <p:nvPr/>
+        </p:nvSpPr>
+        <p:spPr>
+          <a:xfrm>
+            <a:off x="8650224" y="2624328"/>
+            <a:ext cx="3200400" cy="137160"/>
+          </a:xfrm>
+          <a:prstGeom prst="rect">
+            <a:avLst/>
+          </a:prstGeom>
+          <a:noFill/>
+        </p:spPr>
+        <p:txBody>
+          <a:bodyPr wrap="square" lIns="0" rIns="0" tIns="0" bIns="0" anchor="t">
+            <a:noAutofit/>
+          </a:bodyPr>
+          <a:lstStyle/>
+          <a:p>
+            <a:pPr algn="l">
+              <a:lnSpc>
+                <a:spcPct val="112000"/>
+              </a:lnSpc>
+              <a:spcBef>
+                <a:spcPts val="0"/>
+              </a:spcBef>
+              <a:spcAft>
+                <a:spcPts val="0"/>
+              </a:spcAft>
+            </a:pPr>
+            <a:r>
+              <a:rPr sz="760" b="1" i="0">
+                <a:solidFill>
+                  <a:srgbClr val="E11D48"/>
+                </a:solidFill>
+                <a:latin typeface="Segoe UI"/>
+                <a:ea typeface="Microsoft YaHei"/>
+              </a:rPr>
+              <a:t>Crypto-Shredding · 被遗忘权</a:t>
+            </a:r>
+          </a:p>
+        </p:txBody>
+      </p:sp>
+      <p:sp>
+        <p:nvSpPr>
+          <p:cNvPr id="78" name="TextBox 77"/>
+          <p:cNvSpPr txBox="1"/>
+          <p:nvPr/>
+        </p:nvSpPr>
+        <p:spPr>
+          <a:xfrm>
+            <a:off x="8650224" y="2798064"/>
+            <a:ext cx="3236976" cy="548640"/>
+          </a:xfrm>
+          <a:prstGeom prst="rect">
+            <a:avLst/>
+          </a:prstGeom>
+          <a:noFill/>
+        </p:spPr>
+        <p:txBody>
+          <a:bodyPr wrap="square" lIns="0" rIns="0" tIns="0" bIns="0" anchor="t">
+            <a:noAutofit/>
+          </a:bodyPr>
+          <a:lstStyle/>
+          <a:p>
+            <a:pPr algn="l">
+              <a:lnSpc>
+                <a:spcPct val="125000"/>
+              </a:lnSpc>
+              <a:spcBef>
+                <a:spcPts val="0"/>
+              </a:spcBef>
+              <a:spcAft>
+                <a:spcPts val="0"/>
+              </a:spcAft>
+            </a:pPr>
+            <a:r>
+              <a:rPr sz="590" b="0" i="0">
+                <a:solidFill>
+                  <a:srgbClr val="475569"/>
+                </a:solidFill>
+                <a:latin typeface="Segoe UI"/>
+                <a:ea typeface="Microsoft YaHei"/>
+              </a:rPr>
+              <a:t>按数据主体分配独立 DEK——「删除」= 销毁该 DEK，密文永久不可读，无需重写 PB 级文件</a:t>
+            </a:r>
+          </a:p>
+          <a:p>
+            <a:pPr algn="l">
+              <a:lnSpc>
+                <a:spcPct val="125000"/>
+              </a:lnSpc>
+              <a:spcBef>
+                <a:spcPts val="0"/>
+              </a:spcBef>
+              <a:spcAft>
+                <a:spcPts val="0"/>
+              </a:spcAft>
+            </a:pPr>
+            <a:r>
+              <a:rPr sz="590" b="1" i="0">
+                <a:solidFill>
+                  <a:srgbClr val="E11D48"/>
+                </a:solidFill>
+                <a:latin typeface="Segoe UI"/>
+                <a:ea typeface="Microsoft YaHei"/>
+              </a:rPr>
+              <a:t>归档场景性价比最高的合规设计，建议第一版纳入</a:t>
+            </a:r>
+          </a:p>
+        </p:txBody>
+      </p:sp>
+      <p:sp>
+        <p:nvSpPr>
+          <p:cNvPr id="79" name="Rounded Rectangle 78"/>
+          <p:cNvSpPr/>
+          <p:nvPr/>
+        </p:nvSpPr>
+        <p:spPr>
+          <a:xfrm>
+            <a:off x="8522208" y="3511296"/>
+            <a:ext cx="3474720" cy="1444752"/>
+          </a:xfrm>
+          <a:prstGeom prst="roundRect">
+            <a:avLst>
+              <a:gd name="adj" fmla="val 3797"/>
+            </a:avLst>
+          </a:prstGeom>
+          <a:solidFill>
+            <a:srgbClr val="FFFFFF"/>
+          </a:solidFill>
+          <a:ln w="15240">
+            <a:solidFill>
+              <a:srgbClr val="E2E8F0"/>
+            </a:solidFill>
+          </a:ln>
+          <a:effectLst/>
+        </p:spPr>
+        <p:style>
+          <a:lnRef idx="1">
+            <a:schemeClr val="accent1"/>
+          </a:lnRef>
+          <a:fillRef idx="3">
+            <a:schemeClr val="accent1"/>
+          </a:fillRef>
+          <a:effectRef idx="2">
+            <a:schemeClr val="accent1"/>
+          </a:effectRef>
+          <a:fontRef idx="minor">
+            <a:schemeClr val="lt1"/>
+          </a:fontRef>
+        </p:style>
+        <p:txBody>
+          <a:bodyPr rtlCol="0" anchor="ctr"/>
+          <a:lstStyle/>
+          <a:p>
+            <a:pPr algn="ctr"/>
+          </a:p>
+        </p:txBody>
+      </p:sp>
+      <p:sp>
+        <p:nvSpPr>
+          <p:cNvPr id="80" name="TextBox 79"/>
+          <p:cNvSpPr txBox="1"/>
+          <p:nvPr/>
+        </p:nvSpPr>
+        <p:spPr>
+          <a:xfrm>
+            <a:off x="8650224" y="3575304"/>
+            <a:ext cx="3200400" cy="137160"/>
+          </a:xfrm>
+          <a:prstGeom prst="rect">
+            <a:avLst/>
+          </a:prstGeom>
+          <a:noFill/>
+        </p:spPr>
+        <p:txBody>
+          <a:bodyPr wrap="square" lIns="0" rIns="0" tIns="0" bIns="0" anchor="t">
+            <a:noAutofit/>
+          </a:bodyPr>
+          <a:lstStyle/>
+          <a:p>
+            <a:pPr algn="l">
+              <a:lnSpc>
+                <a:spcPct val="112000"/>
+              </a:lnSpc>
+              <a:spcBef>
+                <a:spcPts val="0"/>
+              </a:spcBef>
+              <a:spcAft>
+                <a:spcPts val="0"/>
+              </a:spcAft>
+            </a:pPr>
+            <a:r>
+              <a:rPr sz="760" b="1" i="0">
+                <a:solidFill>
+                  <a:srgbClr val="0F172A"/>
+                </a:solidFill>
+                <a:latin typeface="Segoe UI"/>
+                <a:ea typeface="Microsoft YaHei"/>
+              </a:rPr>
+              <a:t>合规映射</a:t>
+            </a:r>
+          </a:p>
+        </p:txBody>
+      </p:sp>
+      <p:sp>
+        <p:nvSpPr>
+          <p:cNvPr id="81" name="Rounded Rectangle 80"/>
+          <p:cNvSpPr/>
+          <p:nvPr/>
+        </p:nvSpPr>
+        <p:spPr>
+          <a:xfrm>
+            <a:off x="8650224" y="3767328"/>
+            <a:ext cx="969264" cy="219456"/>
+          </a:xfrm>
+          <a:prstGeom prst="roundRect">
+            <a:avLst>
+              <a:gd name="adj" fmla="val 16666"/>
+            </a:avLst>
+          </a:prstGeom>
+          <a:solidFill>
+            <a:srgbClr val="ECFDF5"/>
+          </a:solidFill>
+          <a:ln w="12700">
+            <a:solidFill>
+              <a:srgbClr val="A7F3D0"/>
+            </a:solidFill>
+          </a:ln>
+          <a:effectLst/>
+        </p:spPr>
+        <p:style>
+          <a:lnRef idx="1">
+            <a:schemeClr val="accent1"/>
+          </a:lnRef>
+          <a:fillRef idx="3">
+            <a:schemeClr val="accent1"/>
+          </a:fillRef>
+          <a:effectRef idx="2">
+            <a:schemeClr val="accent1"/>
+          </a:effectRef>
+          <a:fontRef idx="minor">
+            <a:schemeClr val="lt1"/>
+          </a:fontRef>
+        </p:style>
+        <p:txBody>
+          <a:bodyPr rtlCol="0" anchor="ctr"/>
+          <a:lstStyle/>
+          <a:p>
+            <a:pPr algn="ctr"/>
+          </a:p>
+        </p:txBody>
+      </p:sp>
+      <p:sp>
+        <p:nvSpPr>
+          <p:cNvPr id="82" name="TextBox 81"/>
+          <p:cNvSpPr txBox="1"/>
+          <p:nvPr/>
+        </p:nvSpPr>
+        <p:spPr>
+          <a:xfrm>
+            <a:off x="8677656" y="3767328"/>
+            <a:ext cx="914400" cy="219456"/>
+          </a:xfrm>
+          <a:prstGeom prst="rect">
+            <a:avLst/>
+          </a:prstGeom>
+          <a:noFill/>
+        </p:spPr>
+        <p:txBody>
+          <a:bodyPr wrap="square" lIns="0" rIns="0" tIns="0" bIns="0" anchor="ctr">
+            <a:noAutofit/>
+          </a:bodyPr>
+          <a:lstStyle/>
+          <a:p>
+            <a:pPr algn="ctr">
+              <a:lnSpc>
+                <a:spcPct val="108000"/>
+              </a:lnSpc>
+              <a:spcBef>
+                <a:spcPts val="0"/>
+              </a:spcBef>
+              <a:spcAft>
+                <a:spcPts val="0"/>
+              </a:spcAft>
+            </a:pPr>
+            <a:r>
+              <a:rPr sz="590" b="0" i="0">
+                <a:solidFill>
+                  <a:srgbClr val="047857"/>
+                </a:solidFill>
+                <a:latin typeface="Segoe UI"/>
+                <a:ea typeface="Microsoft YaHei"/>
+              </a:rPr>
+              <a:t>等保 2.0 三级</a:t>
+            </a:r>
+          </a:p>
+        </p:txBody>
+      </p:sp>
+      <p:sp>
+        <p:nvSpPr>
+          <p:cNvPr id="83" name="TextBox 82"/>
+          <p:cNvSpPr txBox="1"/>
+          <p:nvPr/>
+        </p:nvSpPr>
+        <p:spPr>
+          <a:xfrm>
+            <a:off x="9710928" y="3758184"/>
+            <a:ext cx="2212848" cy="384048"/>
+          </a:xfrm>
+          <a:prstGeom prst="rect">
+            <a:avLst/>
+          </a:prstGeom>
+          <a:noFill/>
+        </p:spPr>
+        <p:txBody>
+          <a:bodyPr wrap="square" lIns="0" rIns="0" tIns="0" bIns="0" anchor="t">
+            <a:noAutofit/>
+          </a:bodyPr>
+          <a:lstStyle/>
+          <a:p>
+            <a:pPr algn="l">
+              <a:lnSpc>
+                <a:spcPct val="120000"/>
+              </a:lnSpc>
+              <a:spcBef>
+                <a:spcPts val="0"/>
+              </a:spcBef>
+              <a:spcAft>
+                <a:spcPts val="0"/>
+              </a:spcAft>
+            </a:pPr>
+            <a:r>
+              <a:rPr sz="570" b="0" i="0">
+                <a:solidFill>
+                  <a:srgbClr val="64748B"/>
+                </a:solidFill>
+                <a:latin typeface="Segoe UI"/>
+                <a:ea typeface="Microsoft YaHei"/>
+              </a:rPr>
+              <a:t>存储 / 传输保密达标；策略在引擎内、审计落表，举证材料天然齐备</a:t>
+            </a:r>
+          </a:p>
+        </p:txBody>
+      </p:sp>
+      <p:sp>
+        <p:nvSpPr>
+          <p:cNvPr id="84" name="Rounded Rectangle 83"/>
+          <p:cNvSpPr/>
+          <p:nvPr/>
+        </p:nvSpPr>
+        <p:spPr>
+          <a:xfrm>
+            <a:off x="8650224" y="4169664"/>
+            <a:ext cx="969264" cy="219456"/>
+          </a:xfrm>
+          <a:prstGeom prst="roundRect">
+            <a:avLst>
+              <a:gd name="adj" fmla="val 16666"/>
+            </a:avLst>
+          </a:prstGeom>
+          <a:solidFill>
+            <a:srgbClr val="FFFBEB"/>
+          </a:solidFill>
+          <a:ln w="12700">
+            <a:solidFill>
+              <a:srgbClr val="FDE68A"/>
+            </a:solidFill>
+          </a:ln>
+          <a:effectLst/>
+        </p:spPr>
+        <p:style>
+          <a:lnRef idx="1">
+            <a:schemeClr val="accent1"/>
+          </a:lnRef>
+          <a:fillRef idx="3">
+            <a:schemeClr val="accent1"/>
+          </a:fillRef>
+          <a:effectRef idx="2">
+            <a:schemeClr val="accent1"/>
+          </a:effectRef>
+          <a:fontRef idx="minor">
+            <a:schemeClr val="lt1"/>
+          </a:fontRef>
+        </p:style>
+        <p:txBody>
+          <a:bodyPr rtlCol="0" anchor="ctr"/>
+          <a:lstStyle/>
+          <a:p>
+            <a:pPr algn="ctr"/>
+          </a:p>
+        </p:txBody>
+      </p:sp>
+      <p:sp>
+        <p:nvSpPr>
+          <p:cNvPr id="85" name="TextBox 84"/>
+          <p:cNvSpPr txBox="1"/>
+          <p:nvPr/>
+        </p:nvSpPr>
+        <p:spPr>
+          <a:xfrm>
+            <a:off x="8677656" y="4169664"/>
+            <a:ext cx="914400" cy="219456"/>
+          </a:xfrm>
+          <a:prstGeom prst="rect">
+            <a:avLst/>
+          </a:prstGeom>
+          <a:noFill/>
+        </p:spPr>
+        <p:txBody>
+          <a:bodyPr wrap="square" lIns="0" rIns="0" tIns="0" bIns="0" anchor="ctr">
+            <a:noAutofit/>
+          </a:bodyPr>
+          <a:lstStyle/>
+          <a:p>
+            <a:pPr algn="ctr">
+              <a:lnSpc>
+                <a:spcPct val="108000"/>
+              </a:lnSpc>
+              <a:spcBef>
+                <a:spcPts val="0"/>
+              </a:spcBef>
+              <a:spcAft>
+                <a:spcPts val="0"/>
+              </a:spcAft>
+            </a:pPr>
+            <a:r>
+              <a:rPr sz="590" b="0" i="0">
+                <a:solidFill>
+                  <a:srgbClr val="B45309"/>
+                </a:solidFill>
+                <a:latin typeface="Segoe UI"/>
+                <a:ea typeface="Microsoft YaHei"/>
+              </a:rPr>
+              <a:t>个保法第 51 条</a:t>
+            </a:r>
+          </a:p>
+        </p:txBody>
+      </p:sp>
+      <p:sp>
+        <p:nvSpPr>
+          <p:cNvPr id="86" name="TextBox 85"/>
+          <p:cNvSpPr txBox="1"/>
+          <p:nvPr/>
+        </p:nvSpPr>
+        <p:spPr>
+          <a:xfrm>
+            <a:off x="9710928" y="4160520"/>
+            <a:ext cx="2212848" cy="384048"/>
+          </a:xfrm>
+          <a:prstGeom prst="rect">
+            <a:avLst/>
+          </a:prstGeom>
+          <a:noFill/>
+        </p:spPr>
+        <p:txBody>
+          <a:bodyPr wrap="square" lIns="0" rIns="0" tIns="0" bIns="0" anchor="t">
+            <a:noAutofit/>
+          </a:bodyPr>
+          <a:lstStyle/>
+          <a:p>
+            <a:pPr algn="l">
+              <a:lnSpc>
+                <a:spcPct val="120000"/>
+              </a:lnSpc>
+              <a:spcBef>
+                <a:spcPts val="0"/>
+              </a:spcBef>
+              <a:spcAft>
+                <a:spcPts val="0"/>
+              </a:spcAft>
+            </a:pPr>
+            <a:r>
+              <a:rPr sz="570" b="0" i="0">
+                <a:solidFill>
+                  <a:srgbClr val="64748B"/>
+                </a:solidFill>
+                <a:latin typeface="Segoe UI"/>
+                <a:ea typeface="Microsoft YaHei"/>
+              </a:rPr>
+              <a:t>SSE ≠ 去标识化——必须 L3 字段级加密 + L4 强制脱敏，只做 L1 不满足</a:t>
+            </a:r>
+          </a:p>
+        </p:txBody>
+      </p:sp>
+      <p:sp>
+        <p:nvSpPr>
+          <p:cNvPr id="87" name="Rounded Rectangle 86"/>
+          <p:cNvSpPr/>
+          <p:nvPr/>
+        </p:nvSpPr>
+        <p:spPr>
+          <a:xfrm>
+            <a:off x="8650224" y="4572000"/>
+            <a:ext cx="969264" cy="219456"/>
+          </a:xfrm>
+          <a:prstGeom prst="roundRect">
+            <a:avLst>
+              <a:gd name="adj" fmla="val 16666"/>
+            </a:avLst>
+          </a:prstGeom>
+          <a:solidFill>
+            <a:srgbClr val="FFF1F2"/>
+          </a:solidFill>
+          <a:ln w="12700">
+            <a:solidFill>
+              <a:srgbClr val="FECDD3"/>
+            </a:solidFill>
+          </a:ln>
+          <a:effectLst/>
+        </p:spPr>
+        <p:style>
+          <a:lnRef idx="1">
+            <a:schemeClr val="accent1"/>
+          </a:lnRef>
+          <a:fillRef idx="3">
+            <a:schemeClr val="accent1"/>
+          </a:fillRef>
+          <a:effectRef idx="2">
+            <a:schemeClr val="accent1"/>
+          </a:effectRef>
+          <a:fontRef idx="minor">
+            <a:schemeClr val="lt1"/>
+          </a:fontRef>
+        </p:style>
+        <p:txBody>
+          <a:bodyPr rtlCol="0" anchor="ctr"/>
+          <a:lstStyle/>
+          <a:p>
+            <a:pPr algn="ctr"/>
+          </a:p>
+        </p:txBody>
+      </p:sp>
+      <p:sp>
+        <p:nvSpPr>
+          <p:cNvPr id="88" name="TextBox 87"/>
+          <p:cNvSpPr txBox="1"/>
+          <p:nvPr/>
+        </p:nvSpPr>
+        <p:spPr>
+          <a:xfrm>
+            <a:off x="8677656" y="4572000"/>
+            <a:ext cx="914400" cy="219456"/>
+          </a:xfrm>
+          <a:prstGeom prst="rect">
+            <a:avLst/>
+          </a:prstGeom>
+          <a:noFill/>
+        </p:spPr>
+        <p:txBody>
+          <a:bodyPr wrap="square" lIns="0" rIns="0" tIns="0" bIns="0" anchor="ctr">
+            <a:noAutofit/>
+          </a:bodyPr>
+          <a:lstStyle/>
+          <a:p>
+            <a:pPr algn="ctr">
+              <a:lnSpc>
+                <a:spcPct val="108000"/>
+              </a:lnSpc>
+              <a:spcBef>
+                <a:spcPts val="0"/>
+              </a:spcBef>
+              <a:spcAft>
+                <a:spcPts val="0"/>
+              </a:spcAft>
+            </a:pPr>
+            <a:r>
+              <a:rPr sz="590" b="0" i="0">
+                <a:solidFill>
+                  <a:srgbClr val="E11D48"/>
+                </a:solidFill>
+                <a:latin typeface="Segoe UI"/>
+                <a:ea typeface="Microsoft YaHei"/>
+              </a:rPr>
+              <a:t>GDPR 被遗忘权</a:t>
+            </a:r>
+          </a:p>
+        </p:txBody>
+      </p:sp>
+      <p:sp>
+        <p:nvSpPr>
+          <p:cNvPr id="89" name="TextBox 88"/>
+          <p:cNvSpPr txBox="1"/>
+          <p:nvPr/>
+        </p:nvSpPr>
+        <p:spPr>
+          <a:xfrm>
+            <a:off x="9710928" y="4562856"/>
+            <a:ext cx="2212848" cy="384048"/>
+          </a:xfrm>
+          <a:prstGeom prst="rect">
+            <a:avLst/>
+          </a:prstGeom>
+          <a:noFill/>
+        </p:spPr>
+        <p:txBody>
+          <a:bodyPr wrap="square" lIns="0" rIns="0" tIns="0" bIns="0" anchor="t">
+            <a:noAutofit/>
+          </a:bodyPr>
+          <a:lstStyle/>
+          <a:p>
+            <a:pPr algn="l">
+              <a:lnSpc>
+                <a:spcPct val="120000"/>
+              </a:lnSpc>
+              <a:spcBef>
+                <a:spcPts val="0"/>
+              </a:spcBef>
+              <a:spcAft>
+                <a:spcPts val="0"/>
+              </a:spcAft>
+            </a:pPr>
+            <a:r>
+              <a:rPr sz="570" b="0" i="0">
+                <a:solidFill>
+                  <a:srgbClr val="64748B"/>
+                </a:solidFill>
+                <a:latin typeface="Segoe UI"/>
+                <a:ea typeface="Microsoft YaHei"/>
+              </a:rPr>
+              <a:t>Crypto-Shredding：销毁主体 DEK 即永久不可读</a:t>
+            </a:r>
+          </a:p>
+        </p:txBody>
+      </p:sp>
+      <p:sp>
+        <p:nvSpPr>
+          <p:cNvPr id="90" name="Rounded Rectangle 89"/>
+          <p:cNvSpPr/>
+          <p:nvPr/>
+        </p:nvSpPr>
+        <p:spPr>
+          <a:xfrm>
+            <a:off x="201168" y="5084064"/>
+            <a:ext cx="3840480" cy="896112"/>
+          </a:xfrm>
+          <a:prstGeom prst="roundRect">
+            <a:avLst>
+              <a:gd name="adj" fmla="val 6122"/>
+            </a:avLst>
+          </a:prstGeom>
+          <a:solidFill>
+            <a:srgbClr val="FFFFFF"/>
+          </a:solidFill>
+          <a:ln w="15240">
+            <a:solidFill>
+              <a:srgbClr val="E2E8F0"/>
+            </a:solidFill>
+          </a:ln>
+          <a:effectLst>
+            <a:outerShdw blurRad="55000" dist="22000" dir="5400000" rotWithShape="0">
+              <a:srgbClr val="0F172A">
+                <a:alpha val="12000"/>
+              </a:srgbClr>
+            </a:outerShdw>
+          </a:effectLst>
+        </p:spPr>
+        <p:style>
+          <a:lnRef idx="1">
+            <a:schemeClr val="accent1"/>
+          </a:lnRef>
+          <a:fillRef idx="3">
+            <a:schemeClr val="accent1"/>
+          </a:fillRef>
+          <a:effectRef idx="2">
+            <a:schemeClr val="accent1"/>
+          </a:effectRef>
+          <a:fontRef idx="minor">
+            <a:schemeClr val="lt1"/>
+          </a:fontRef>
+        </p:style>
+        <p:txBody>
+          <a:bodyPr rtlCol="0" anchor="ctr"/>
+          <a:lstStyle/>
+          <a:p>
+            <a:pPr algn="ctr"/>
+          </a:p>
+        </p:txBody>
+      </p:sp>
+      <p:sp>
+        <p:nvSpPr>
+          <p:cNvPr id="91" name="Rounded Rectangle 90"/>
+          <p:cNvSpPr/>
+          <p:nvPr/>
+        </p:nvSpPr>
+        <p:spPr>
+          <a:xfrm>
+            <a:off x="201168" y="5138928"/>
+            <a:ext cx="41148" cy="786384"/>
+          </a:xfrm>
+          <a:prstGeom prst="roundRect">
+            <a:avLst>
+              <a:gd name="adj" fmla="val 44444"/>
+            </a:avLst>
+          </a:prstGeom>
+          <a:solidFill>
+            <a:srgbClr val="0078D4"/>
+          </a:solidFill>
+          <a:ln>
+            <a:noFill/>
+          </a:ln>
+          <a:effectLst/>
+        </p:spPr>
+        <p:style>
+          <a:lnRef idx="1">
+            <a:schemeClr val="accent1"/>
+          </a:lnRef>
+          <a:fillRef idx="3">
+            <a:schemeClr val="accent1"/>
+          </a:fillRef>
+          <a:effectRef idx="2">
+            <a:schemeClr val="accent1"/>
+          </a:effectRef>
+          <a:fontRef idx="minor">
+            <a:schemeClr val="lt1"/>
+          </a:fontRef>
+        </p:style>
+        <p:txBody>
+          <a:bodyPr rtlCol="0" anchor="ctr"/>
+          <a:lstStyle/>
+          <a:p>
+            <a:pPr algn="ctr"/>
+          </a:p>
+        </p:txBody>
+      </p:sp>
+      <p:sp>
+        <p:nvSpPr>
+          <p:cNvPr id="92" name="TextBox 91"/>
+          <p:cNvSpPr txBox="1"/>
+          <p:nvPr/>
+        </p:nvSpPr>
+        <p:spPr>
+          <a:xfrm>
+            <a:off x="347472" y="5175504"/>
+            <a:ext cx="3566160" cy="137160"/>
+          </a:xfrm>
+          <a:prstGeom prst="rect">
+            <a:avLst/>
+          </a:prstGeom>
+          <a:noFill/>
+        </p:spPr>
+        <p:txBody>
+          <a:bodyPr wrap="square" lIns="0" rIns="0" tIns="0" bIns="0" anchor="t">
+            <a:noAutofit/>
+          </a:bodyPr>
+          <a:lstStyle/>
+          <a:p>
+            <a:pPr algn="l">
+              <a:lnSpc>
+                <a:spcPct val="112000"/>
+              </a:lnSpc>
+              <a:spcBef>
+                <a:spcPts val="0"/>
+              </a:spcBef>
+              <a:spcAft>
+                <a:spcPts val="0"/>
+              </a:spcAft>
+            </a:pPr>
+            <a:r>
+              <a:rPr sz="780" b="1" i="0">
+                <a:solidFill>
+                  <a:srgbClr val="0078D4"/>
+                </a:solidFill>
+                <a:latin typeface="Segoe UI"/>
+                <a:ea typeface="Microsoft YaHei"/>
+              </a:rPr>
+              <a:t>① 授权强制力</a:t>
+            </a:r>
+          </a:p>
+        </p:txBody>
+      </p:sp>
+      <p:sp>
+        <p:nvSpPr>
+          <p:cNvPr id="93" name="TextBox 92"/>
+          <p:cNvSpPr txBox="1"/>
+          <p:nvPr/>
+        </p:nvSpPr>
+        <p:spPr>
+          <a:xfrm>
+            <a:off x="347472" y="5367528"/>
+            <a:ext cx="3584448" cy="530352"/>
+          </a:xfrm>
+          <a:prstGeom prst="rect">
+            <a:avLst/>
+          </a:prstGeom>
+          <a:noFill/>
+        </p:spPr>
+        <p:txBody>
+          <a:bodyPr wrap="square" lIns="0" rIns="0" tIns="0" bIns="0" anchor="t">
+            <a:noAutofit/>
+          </a:bodyPr>
+          <a:lstStyle/>
+          <a:p>
+            <a:pPr algn="l">
+              <a:lnSpc>
+                <a:spcPct val="125000"/>
+              </a:lnSpc>
+              <a:spcBef>
+                <a:spcPts val="0"/>
+              </a:spcBef>
+              <a:spcAft>
+                <a:spcPts val="0"/>
+              </a:spcAft>
+            </a:pPr>
+            <a:r>
+              <a:rPr sz="600" b="0" i="0">
+                <a:solidFill>
+                  <a:srgbClr val="64748B"/>
+                </a:solidFill>
+                <a:latin typeface="Segoe UI"/>
+                <a:ea typeface="Microsoft YaHei"/>
+              </a:rPr>
+              <a:t>掩码 / 行过滤绑定引擎元数据，任何客户端绕不过；应用层脱敏绕过 API 即失效</a:t>
+            </a:r>
+          </a:p>
+        </p:txBody>
+      </p:sp>
+      <p:sp>
+        <p:nvSpPr>
+          <p:cNvPr id="94" name="Rounded Rectangle 93"/>
+          <p:cNvSpPr/>
+          <p:nvPr/>
+        </p:nvSpPr>
+        <p:spPr>
+          <a:xfrm>
+            <a:off x="4178807" y="5084064"/>
+            <a:ext cx="3840480" cy="896112"/>
+          </a:xfrm>
+          <a:prstGeom prst="roundRect">
+            <a:avLst>
+              <a:gd name="adj" fmla="val 6122"/>
+            </a:avLst>
+          </a:prstGeom>
+          <a:solidFill>
+            <a:srgbClr val="FFFFFF"/>
+          </a:solidFill>
+          <a:ln w="15240">
+            <a:solidFill>
+              <a:srgbClr val="E2E8F0"/>
+            </a:solidFill>
+          </a:ln>
+          <a:effectLst>
+            <a:outerShdw blurRad="55000" dist="22000" dir="5400000" rotWithShape="0">
+              <a:srgbClr val="0F172A">
+                <a:alpha val="12000"/>
+              </a:srgbClr>
+            </a:outerShdw>
+          </a:effectLst>
+        </p:spPr>
+        <p:style>
+          <a:lnRef idx="1">
+            <a:schemeClr val="accent1"/>
+          </a:lnRef>
+          <a:fillRef idx="3">
+            <a:schemeClr val="accent1"/>
+          </a:fillRef>
+          <a:effectRef idx="2">
+            <a:schemeClr val="accent1"/>
+          </a:effectRef>
+          <a:fontRef idx="minor">
+            <a:schemeClr val="lt1"/>
+          </a:fontRef>
+        </p:style>
+        <p:txBody>
+          <a:bodyPr rtlCol="0" anchor="ctr"/>
+          <a:lstStyle/>
+          <a:p>
+            <a:pPr algn="ctr"/>
+          </a:p>
+        </p:txBody>
+      </p:sp>
+      <p:sp>
+        <p:nvSpPr>
+          <p:cNvPr id="95" name="Rounded Rectangle 94"/>
+          <p:cNvSpPr/>
+          <p:nvPr/>
+        </p:nvSpPr>
+        <p:spPr>
+          <a:xfrm>
+            <a:off x="4178807" y="5138928"/>
+            <a:ext cx="41148" cy="786384"/>
+          </a:xfrm>
+          <a:prstGeom prst="roundRect">
+            <a:avLst>
+              <a:gd name="adj" fmla="val 44444"/>
+            </a:avLst>
+          </a:prstGeom>
+          <a:solidFill>
+            <a:srgbClr val="059669"/>
+          </a:solidFill>
+          <a:ln>
+            <a:noFill/>
+          </a:ln>
+          <a:effectLst/>
+        </p:spPr>
+        <p:style>
+          <a:lnRef idx="1">
+            <a:schemeClr val="accent1"/>
+          </a:lnRef>
+          <a:fillRef idx="3">
+            <a:schemeClr val="accent1"/>
+          </a:fillRef>
+          <a:effectRef idx="2">
+            <a:schemeClr val="accent1"/>
+          </a:effectRef>
+          <a:fontRef idx="minor">
+            <a:schemeClr val="lt1"/>
+          </a:fontRef>
+        </p:style>
+        <p:txBody>
+          <a:bodyPr rtlCol="0" anchor="ctr"/>
+          <a:lstStyle/>
+          <a:p>
+            <a:pPr algn="ctr"/>
+          </a:p>
+        </p:txBody>
+      </p:sp>
+      <p:sp>
+        <p:nvSpPr>
+          <p:cNvPr id="96" name="TextBox 95"/>
+          <p:cNvSpPr txBox="1"/>
+          <p:nvPr/>
+        </p:nvSpPr>
+        <p:spPr>
+          <a:xfrm>
+            <a:off x="4325112" y="5175504"/>
+            <a:ext cx="3566160" cy="137160"/>
+          </a:xfrm>
+          <a:prstGeom prst="rect">
+            <a:avLst/>
+          </a:prstGeom>
+          <a:noFill/>
+        </p:spPr>
+        <p:txBody>
+          <a:bodyPr wrap="square" lIns="0" rIns="0" tIns="0" bIns="0" anchor="t">
+            <a:noAutofit/>
+          </a:bodyPr>
+          <a:lstStyle/>
+          <a:p>
+            <a:pPr algn="l">
+              <a:lnSpc>
+                <a:spcPct val="112000"/>
+              </a:lnSpc>
+              <a:spcBef>
+                <a:spcPts val="0"/>
+              </a:spcBef>
+              <a:spcAft>
+                <a:spcPts val="0"/>
+              </a:spcAft>
+            </a:pPr>
+            <a:r>
+              <a:rPr sz="780" b="1" i="0">
+                <a:solidFill>
+                  <a:srgbClr val="059669"/>
+                </a:solidFill>
+                <a:latin typeface="Segoe UI"/>
+                <a:ea typeface="Microsoft YaHei"/>
+              </a:rPr>
+              <a:t>② 轮转成本</a:t>
+            </a:r>
+          </a:p>
+        </p:txBody>
+      </p:sp>
+      <p:sp>
+        <p:nvSpPr>
+          <p:cNvPr id="97" name="TextBox 96"/>
+          <p:cNvSpPr txBox="1"/>
+          <p:nvPr/>
+        </p:nvSpPr>
+        <p:spPr>
+          <a:xfrm>
+            <a:off x="4325112" y="5367528"/>
+            <a:ext cx="3584448" cy="530352"/>
+          </a:xfrm>
+          <a:prstGeom prst="rect">
+            <a:avLst/>
+          </a:prstGeom>
+          <a:noFill/>
+        </p:spPr>
+        <p:txBody>
+          <a:bodyPr wrap="square" lIns="0" rIns="0" tIns="0" bIns="0" anchor="t">
+            <a:noAutofit/>
+          </a:bodyPr>
+          <a:lstStyle/>
+          <a:p>
+            <a:pPr algn="l">
+              <a:lnSpc>
+                <a:spcPct val="125000"/>
+              </a:lnSpc>
+              <a:spcBef>
+                <a:spcPts val="0"/>
+              </a:spcBef>
+              <a:spcAft>
+                <a:spcPts val="0"/>
+              </a:spcAft>
+            </a:pPr>
+            <a:r>
+              <a:rPr sz="600" b="0" i="0">
+                <a:solidFill>
+                  <a:srgbClr val="64748B"/>
+                </a:solidFill>
+                <a:latin typeface="Segoe UI"/>
+                <a:ea typeface="Microsoft YaHei"/>
+              </a:rPr>
+              <a:t>信封加密只重包装 KEK、零数据重写；应用层方案轮转需重刷数十 TB 存量</a:t>
+            </a:r>
+          </a:p>
+        </p:txBody>
+      </p:sp>
+      <p:sp>
+        <p:nvSpPr>
+          <p:cNvPr id="98" name="Rounded Rectangle 97"/>
+          <p:cNvSpPr/>
+          <p:nvPr/>
+        </p:nvSpPr>
+        <p:spPr>
+          <a:xfrm>
+            <a:off x="8156447" y="5084064"/>
+            <a:ext cx="3840480" cy="896112"/>
+          </a:xfrm>
+          <a:prstGeom prst="roundRect">
+            <a:avLst>
+              <a:gd name="adj" fmla="val 6122"/>
+            </a:avLst>
+          </a:prstGeom>
+          <a:solidFill>
+            <a:srgbClr val="FFFFFF"/>
+          </a:solidFill>
+          <a:ln w="15240">
+            <a:solidFill>
+              <a:srgbClr val="E2E8F0"/>
+            </a:solidFill>
+          </a:ln>
+          <a:effectLst>
+            <a:outerShdw blurRad="55000" dist="22000" dir="5400000" rotWithShape="0">
+              <a:srgbClr val="0F172A">
+                <a:alpha val="12000"/>
+              </a:srgbClr>
+            </a:outerShdw>
+          </a:effectLst>
+        </p:spPr>
+        <p:style>
+          <a:lnRef idx="1">
+            <a:schemeClr val="accent1"/>
+          </a:lnRef>
+          <a:fillRef idx="3">
+            <a:schemeClr val="accent1"/>
+          </a:fillRef>
+          <a:effectRef idx="2">
+            <a:schemeClr val="accent1"/>
+          </a:effectRef>
+          <a:fontRef idx="minor">
+            <a:schemeClr val="lt1"/>
+          </a:fontRef>
+        </p:style>
+        <p:txBody>
+          <a:bodyPr rtlCol="0" anchor="ctr"/>
+          <a:lstStyle/>
+          <a:p>
+            <a:pPr algn="ctr"/>
+          </a:p>
+        </p:txBody>
+      </p:sp>
+      <p:sp>
+        <p:nvSpPr>
+          <p:cNvPr id="99" name="Rounded Rectangle 98"/>
+          <p:cNvSpPr/>
+          <p:nvPr/>
+        </p:nvSpPr>
+        <p:spPr>
+          <a:xfrm>
+            <a:off x="8156447" y="5138928"/>
+            <a:ext cx="41148" cy="786384"/>
+          </a:xfrm>
+          <a:prstGeom prst="roundRect">
+            <a:avLst>
+              <a:gd name="adj" fmla="val 44444"/>
+            </a:avLst>
+          </a:prstGeom>
+          <a:solidFill>
+            <a:srgbClr val="7C3AED"/>
+          </a:solidFill>
+          <a:ln>
+            <a:noFill/>
+          </a:ln>
+          <a:effectLst/>
+        </p:spPr>
+        <p:style>
+          <a:lnRef idx="1">
+            <a:schemeClr val="accent1"/>
+          </a:lnRef>
+          <a:fillRef idx="3">
+            <a:schemeClr val="accent1"/>
+          </a:fillRef>
+          <a:effectRef idx="2">
+            <a:schemeClr val="accent1"/>
+          </a:effectRef>
+          <a:fontRef idx="minor">
+            <a:schemeClr val="lt1"/>
+          </a:fontRef>
+        </p:style>
+        <p:txBody>
+          <a:bodyPr rtlCol="0" anchor="ctr"/>
+          <a:lstStyle/>
+          <a:p>
+            <a:pPr algn="ctr"/>
+          </a:p>
+        </p:txBody>
+      </p:sp>
+      <p:sp>
+        <p:nvSpPr>
+          <p:cNvPr id="100" name="TextBox 99"/>
+          <p:cNvSpPr txBox="1"/>
+          <p:nvPr/>
+        </p:nvSpPr>
+        <p:spPr>
+          <a:xfrm>
+            <a:off x="8302751" y="5175504"/>
+            <a:ext cx="3566160" cy="137160"/>
+          </a:xfrm>
+          <a:prstGeom prst="rect">
+            <a:avLst/>
+          </a:prstGeom>
+          <a:noFill/>
+        </p:spPr>
+        <p:txBody>
+          <a:bodyPr wrap="square" lIns="0" rIns="0" tIns="0" bIns="0" anchor="t">
+            <a:noAutofit/>
+          </a:bodyPr>
+          <a:lstStyle/>
+          <a:p>
+            <a:pPr algn="l">
+              <a:lnSpc>
+                <a:spcPct val="112000"/>
+              </a:lnSpc>
+              <a:spcBef>
+                <a:spcPts val="0"/>
+              </a:spcBef>
+              <a:spcAft>
+                <a:spcPts val="0"/>
+              </a:spcAft>
+            </a:pPr>
+            <a:r>
+              <a:rPr sz="780" b="1" i="0">
+                <a:solidFill>
+                  <a:srgbClr val="7C3AED"/>
+                </a:solidFill>
+                <a:latin typeface="Segoe UI"/>
+                <a:ea typeface="Microsoft YaHei"/>
+              </a:rPr>
+              <a:t>③ 实施成本</a:t>
+            </a:r>
+          </a:p>
+        </p:txBody>
+      </p:sp>
+      <p:sp>
+        <p:nvSpPr>
+          <p:cNvPr id="101" name="TextBox 100"/>
+          <p:cNvSpPr txBox="1"/>
+          <p:nvPr/>
+        </p:nvSpPr>
+        <p:spPr>
+          <a:xfrm>
+            <a:off x="8302751" y="5367528"/>
+            <a:ext cx="3584448" cy="530352"/>
+          </a:xfrm>
+          <a:prstGeom prst="rect">
+            <a:avLst/>
+          </a:prstGeom>
+          <a:noFill/>
+        </p:spPr>
+        <p:txBody>
+          <a:bodyPr wrap="square" lIns="0" rIns="0" tIns="0" bIns="0" anchor="t">
+            <a:noAutofit/>
+          </a:bodyPr>
+          <a:lstStyle/>
+          <a:p>
+            <a:pPr algn="l">
+              <a:lnSpc>
+                <a:spcPct val="125000"/>
+              </a:lnSpc>
+              <a:spcBef>
+                <a:spcPts val="0"/>
+              </a:spcBef>
+              <a:spcAft>
+                <a:spcPts val="0"/>
+              </a:spcAft>
+            </a:pPr>
+            <a:r>
+              <a:rPr sz="600" b="0" i="0">
+                <a:solidFill>
+                  <a:srgbClr val="64748B"/>
+                </a:solidFill>
+                <a:latin typeface="Segoe UI"/>
+                <a:ea typeface="Microsoft YaHei"/>
+              </a:rPr>
+              <a:t>约 2~3 人天（应用层方案 8~12 人天）· 加密字段仍可检索 · 审计平台原生</a:t>
+            </a:r>
+          </a:p>
+        </p:txBody>
+      </p:sp>
+      <p:sp>
+        <p:nvSpPr>
+          <p:cNvPr id="102" name="Rounded Rectangle 101"/>
+          <p:cNvSpPr/>
+          <p:nvPr/>
+        </p:nvSpPr>
+        <p:spPr>
+          <a:xfrm>
+            <a:off x="201168" y="6108192"/>
+            <a:ext cx="11795760" cy="475488"/>
+          </a:xfrm>
+          <a:prstGeom prst="roundRect">
+            <a:avLst>
+              <a:gd name="adj" fmla="val 13461"/>
+            </a:avLst>
+          </a:prstGeom>
+          <a:solidFill>
+            <a:srgbClr val="F5F3FF"/>
+          </a:solidFill>
+          <a:ln w="15240">
+            <a:solidFill>
+              <a:srgbClr val="DDD6FE"/>
+            </a:solidFill>
+          </a:ln>
+          <a:effectLst/>
+        </p:spPr>
+        <p:style>
+          <a:lnRef idx="1">
+            <a:schemeClr val="accent1"/>
+          </a:lnRef>
+          <a:fillRef idx="3">
+            <a:schemeClr val="accent1"/>
+          </a:fillRef>
+          <a:effectRef idx="2">
+            <a:schemeClr val="accent1"/>
+          </a:effectRef>
+          <a:fontRef idx="minor">
+            <a:schemeClr val="lt1"/>
+          </a:fontRef>
+        </p:style>
+        <p:txBody>
+          <a:bodyPr rtlCol="0" anchor="ctr"/>
+          <a:lstStyle/>
+          <a:p>
+            <a:pPr algn="ctr"/>
+          </a:p>
+        </p:txBody>
+      </p:sp>
+      <p:sp>
+        <p:nvSpPr>
+          <p:cNvPr id="103" name="TextBox 102"/>
+          <p:cNvSpPr txBox="1"/>
+          <p:nvPr/>
+        </p:nvSpPr>
+        <p:spPr>
+          <a:xfrm>
+            <a:off x="365760" y="6108192"/>
+            <a:ext cx="11466576" cy="475488"/>
+          </a:xfrm>
+          <a:prstGeom prst="rect">
+            <a:avLst/>
+          </a:prstGeom>
+          <a:noFill/>
+        </p:spPr>
+        <p:txBody>
+          <a:bodyPr wrap="square" lIns="0" rIns="0" tIns="0" bIns="0" anchor="ctr">
+            <a:noAutofit/>
+          </a:bodyPr>
+          <a:lstStyle/>
+          <a:p>
+            <a:pPr algn="l">
+              <a:lnSpc>
+                <a:spcPct val="112000"/>
+              </a:lnSpc>
+              <a:spcBef>
+                <a:spcPts val="0"/>
+              </a:spcBef>
+              <a:spcAft>
+                <a:spcPts val="0"/>
+              </a:spcAft>
+            </a:pPr>
+            <a:r>
+              <a:rPr sz="720" b="1" i="0">
+                <a:solidFill>
+                  <a:srgbClr val="6D28D9"/>
+                </a:solidFill>
+                <a:latin typeface="Segoe UI"/>
+                <a:ea typeface="Microsoft YaHei"/>
+              </a:rPr>
+              <a:t>★ 若列级脱敏是硬需求：</a:t>
+            </a:r>
+            <a:r>
+              <a:rPr sz="720" b="0" i="0">
+                <a:solidFill>
+                  <a:srgbClr val="4C1D95"/>
+                </a:solidFill>
+                <a:latin typeface="Segoe UI"/>
+                <a:ea typeface="Microsoft YaHei"/>
+              </a:rPr>
+              <a:t>B（Trino 读）的 UC 列掩码完全不可用（Iceberg REST Catalog 不支持），B2 原生生效、任何路径强制遮蔽——这一条基本决定必须选 B2</a:t>
             </a:r>
           </a:p>
         </p:txBody>

--- a/report/方案B_B2_架构图集.pptx
+++ b/report/方案B_B2_架构图集.pptx
@@ -27982,9 +27982,9 @@
             </a:avLst>
           </a:prstGeom>
           <a:solidFill>
-            <a:srgbClr val="FFFFFF"/>
+            <a:srgbClr val="EFF6FF"/>
           </a:solidFill>
-          <a:ln w="15240">
+          <a:ln w="13970">
             <a:solidFill>
               <a:srgbClr val="BFDBFE"/>
             </a:solidFill>
@@ -28021,18 +28021,18 @@
         </p:nvSpPr>
         <p:spPr>
           <a:xfrm>
-            <a:off x="329184" y="1042416"/>
-            <a:ext cx="457200" cy="237744"/>
+            <a:off x="329184" y="1033271"/>
+            <a:ext cx="475488" cy="256032"/>
           </a:xfrm>
           <a:prstGeom prst="roundRect">
             <a:avLst>
-              <a:gd name="adj" fmla="val 19230"/>
+              <a:gd name="adj" fmla="val 17857"/>
             </a:avLst>
           </a:prstGeom>
           <a:solidFill>
-            <a:srgbClr val="EFF6FF"/>
+            <a:srgbClr val="FFFFFF"/>
           </a:solidFill>
-          <a:ln w="12700">
+          <a:ln w="13970">
             <a:solidFill>
               <a:srgbClr val="BFDBFE"/>
             </a:solidFill>
@@ -28069,8 +28069,8 @@
         </p:nvSpPr>
         <p:spPr>
           <a:xfrm>
-            <a:off x="329184" y="1042416"/>
-            <a:ext cx="457200" cy="237744"/>
+            <a:off x="329184" y="1033271"/>
+            <a:ext cx="475488" cy="256032"/>
           </a:xfrm>
           <a:prstGeom prst="rect">
             <a:avLst/>
@@ -28115,8 +28115,8 @@
         </p:nvSpPr>
         <p:spPr>
           <a:xfrm>
-            <a:off x="896112" y="996696"/>
-            <a:ext cx="3127248" cy="137160"/>
+            <a:off x="932688" y="996696"/>
+            <a:ext cx="3108960" cy="137160"/>
           </a:xfrm>
           <a:prstGeom prst="rect">
             <a:avLst/>
@@ -28141,14 +28141,24 @@
               </a:spcAft>
             </a:pPr>
             <a:r>
-              <a:rPr sz="780" b="1" i="0">
+              <a:rPr sz="790" b="1" i="0">
                 <a:solidFill>
                   <a:srgbClr val="0F172A"/>
                 </a:solidFill>
                 <a:latin typeface="Segoe UI"/>
                 <a:ea typeface="Microsoft YaHei"/>
               </a:rPr>
-              <a:t>存储层 · 防磁盘 / 桶泄露</a:t>
+              <a:t>存储层</a:t>
+            </a:r>
+            <a:r>
+              <a:rPr sz="590" b="0" i="0">
+                <a:solidFill>
+                  <a:srgbClr val="64748B"/>
+                </a:solidFill>
+                <a:latin typeface="Segoe UI"/>
+                <a:ea typeface="Microsoft YaHei"/>
+              </a:rPr>
+              <a:t> · 防磁盘 / 桶泄露</a:t>
             </a:r>
           </a:p>
         </p:txBody>
@@ -28161,8 +28171,8 @@
         </p:nvSpPr>
         <p:spPr>
           <a:xfrm>
-            <a:off x="896112" y="1170432"/>
-            <a:ext cx="3127248" cy="438912"/>
+            <a:off x="932688" y="1170432"/>
+            <a:ext cx="3090672" cy="438912"/>
           </a:xfrm>
           <a:prstGeom prst="rect">
             <a:avLst/>
@@ -28189,7 +28199,7 @@
             <a:r>
               <a:rPr sz="590" b="0" i="0">
                 <a:solidFill>
-                  <a:srgbClr val="64748B"/>
+                  <a:srgbClr val="475569"/>
                 </a:solidFill>
                 <a:latin typeface="Segoe UI"/>
                 <a:ea typeface="Microsoft YaHei"/>
@@ -28216,9 +28226,9 @@
             </a:avLst>
           </a:prstGeom>
           <a:solidFill>
-            <a:srgbClr val="FFFFFF"/>
+            <a:srgbClr val="ECFDF5"/>
           </a:solidFill>
-          <a:ln w="15240">
+          <a:ln w="13970">
             <a:solidFill>
               <a:srgbClr val="A7F3D0"/>
             </a:solidFill>
@@ -28255,18 +28265,18 @@
         </p:nvSpPr>
         <p:spPr>
           <a:xfrm>
-            <a:off x="329184" y="1865376"/>
-            <a:ext cx="457200" cy="237744"/>
+            <a:off x="329184" y="1856231"/>
+            <a:ext cx="475488" cy="256032"/>
           </a:xfrm>
           <a:prstGeom prst="roundRect">
             <a:avLst>
-              <a:gd name="adj" fmla="val 19230"/>
+              <a:gd name="adj" fmla="val 17857"/>
             </a:avLst>
           </a:prstGeom>
           <a:solidFill>
-            <a:srgbClr val="ECFDF5"/>
+            <a:srgbClr val="FFFFFF"/>
           </a:solidFill>
-          <a:ln w="12700">
+          <a:ln w="13970">
             <a:solidFill>
               <a:srgbClr val="A7F3D0"/>
             </a:solidFill>
@@ -28303,8 +28313,8 @@
         </p:nvSpPr>
         <p:spPr>
           <a:xfrm>
-            <a:off x="329184" y="1865376"/>
-            <a:ext cx="457200" cy="237744"/>
+            <a:off x="329184" y="1856231"/>
+            <a:ext cx="475488" cy="256032"/>
           </a:xfrm>
           <a:prstGeom prst="rect">
             <a:avLst/>
@@ -28349,8 +28359,8 @@
         </p:nvSpPr>
         <p:spPr>
           <a:xfrm>
-            <a:off x="896112" y="1819656"/>
-            <a:ext cx="3127248" cy="137160"/>
+            <a:off x="932688" y="1819656"/>
+            <a:ext cx="3108960" cy="137160"/>
           </a:xfrm>
           <a:prstGeom prst="rect">
             <a:avLst/>
@@ -28375,14 +28385,24 @@
               </a:spcAft>
             </a:pPr>
             <a:r>
-              <a:rPr sz="780" b="1" i="0">
+              <a:rPr sz="790" b="1" i="0">
                 <a:solidFill>
                   <a:srgbClr val="0F172A"/>
                 </a:solidFill>
                 <a:latin typeface="Segoe UI"/>
                 <a:ea typeface="Microsoft YaHei"/>
               </a:rPr>
-              <a:t>传输层 · 防链路窃听</a:t>
+              <a:t>传输层</a:t>
+            </a:r>
+            <a:r>
+              <a:rPr sz="590" b="0" i="0">
+                <a:solidFill>
+                  <a:srgbClr val="64748B"/>
+                </a:solidFill>
+                <a:latin typeface="Segoe UI"/>
+                <a:ea typeface="Microsoft YaHei"/>
+              </a:rPr>
+              <a:t> · 防链路窃听</a:t>
             </a:r>
           </a:p>
         </p:txBody>
@@ -28395,8 +28415,8 @@
         </p:nvSpPr>
         <p:spPr>
           <a:xfrm>
-            <a:off x="896112" y="1993391"/>
-            <a:ext cx="3127248" cy="438912"/>
+            <a:off x="932688" y="1993391"/>
+            <a:ext cx="3090672" cy="438912"/>
           </a:xfrm>
           <a:prstGeom prst="rect">
             <a:avLst/>
@@ -28423,7 +28443,7 @@
             <a:r>
               <a:rPr sz="590" b="0" i="0">
                 <a:solidFill>
-                  <a:srgbClr val="64748B"/>
+                  <a:srgbClr val="475569"/>
                 </a:solidFill>
                 <a:latin typeface="Segoe UI"/>
                 <a:ea typeface="Microsoft YaHei"/>
@@ -28450,9 +28470,9 @@
             </a:avLst>
           </a:prstGeom>
           <a:solidFill>
-            <a:srgbClr val="FFFFFF"/>
+            <a:srgbClr val="FFF1F2"/>
           </a:solidFill>
-          <a:ln w="15240">
+          <a:ln w="20320">
             <a:solidFill>
               <a:srgbClr val="FECDD3"/>
             </a:solidFill>
@@ -28489,18 +28509,18 @@
         </p:nvSpPr>
         <p:spPr>
           <a:xfrm>
-            <a:off x="329184" y="2688336"/>
-            <a:ext cx="457200" cy="237744"/>
+            <a:off x="329184" y="2679191"/>
+            <a:ext cx="475488" cy="256032"/>
           </a:xfrm>
           <a:prstGeom prst="roundRect">
             <a:avLst>
-              <a:gd name="adj" fmla="val 19230"/>
+              <a:gd name="adj" fmla="val 17857"/>
             </a:avLst>
           </a:prstGeom>
           <a:solidFill>
-            <a:srgbClr val="FFF1F2"/>
+            <a:srgbClr val="FFFFFF"/>
           </a:solidFill>
-          <a:ln w="12700">
+          <a:ln w="13970">
             <a:solidFill>
               <a:srgbClr val="FECDD3"/>
             </a:solidFill>
@@ -28537,8 +28557,8 @@
         </p:nvSpPr>
         <p:spPr>
           <a:xfrm>
-            <a:off x="329184" y="2688336"/>
-            <a:ext cx="457200" cy="237744"/>
+            <a:off x="329184" y="2679191"/>
+            <a:ext cx="475488" cy="256032"/>
           </a:xfrm>
           <a:prstGeom prst="rect">
             <a:avLst/>
@@ -28583,8 +28603,8 @@
         </p:nvSpPr>
         <p:spPr>
           <a:xfrm>
-            <a:off x="896112" y="2642615"/>
-            <a:ext cx="3127248" cy="137160"/>
+            <a:off x="932688" y="2642615"/>
+            <a:ext cx="3108960" cy="137160"/>
           </a:xfrm>
           <a:prstGeom prst="rect">
             <a:avLst/>
@@ -28609,14 +28629,24 @@
               </a:spcAft>
             </a:pPr>
             <a:r>
-              <a:rPr sz="780" b="1" i="0">
+              <a:rPr sz="790" b="1" i="0">
                 <a:solidFill>
                   <a:srgbClr val="E11D48"/>
                 </a:solidFill>
                 <a:latin typeface="Segoe UI"/>
                 <a:ea typeface="Microsoft YaHei"/>
               </a:rPr>
-              <a:t>字段层 · 防 DBA / 运维内鬼（合规核心）</a:t>
+              <a:t>字段层</a:t>
+            </a:r>
+            <a:r>
+              <a:rPr sz="590" b="0" i="0">
+                <a:solidFill>
+                  <a:srgbClr val="64748B"/>
+                </a:solidFill>
+                <a:latin typeface="Segoe UI"/>
+                <a:ea typeface="Microsoft YaHei"/>
+              </a:rPr>
+              <a:t> · 防 DBA / 运维内鬼 ★ 合规核心</a:t>
             </a:r>
           </a:p>
         </p:txBody>
@@ -28629,8 +28659,8 @@
         </p:nvSpPr>
         <p:spPr>
           <a:xfrm>
-            <a:off x="896112" y="2816352"/>
-            <a:ext cx="3127248" cy="438912"/>
+            <a:off x="932688" y="2816352"/>
+            <a:ext cx="3090672" cy="438912"/>
           </a:xfrm>
           <a:prstGeom prst="rect">
             <a:avLst/>
@@ -28657,7 +28687,7 @@
             <a:r>
               <a:rPr sz="590" b="0" i="0">
                 <a:solidFill>
-                  <a:srgbClr val="64748B"/>
+                  <a:srgbClr val="475569"/>
                 </a:solidFill>
                 <a:latin typeface="Segoe UI"/>
                 <a:ea typeface="Microsoft YaHei"/>
@@ -28684,9 +28714,9 @@
             </a:avLst>
           </a:prstGeom>
           <a:solidFill>
-            <a:srgbClr val="FFFFFF"/>
+            <a:srgbClr val="F5F3FF"/>
           </a:solidFill>
-          <a:ln w="15240">
+          <a:ln w="13970">
             <a:solidFill>
               <a:srgbClr val="DDD6FE"/>
             </a:solidFill>
@@ -28723,18 +28753,18 @@
         </p:nvSpPr>
         <p:spPr>
           <a:xfrm>
-            <a:off x="329184" y="3511296"/>
-            <a:ext cx="457200" cy="237744"/>
+            <a:off x="329184" y="3502151"/>
+            <a:ext cx="475488" cy="256032"/>
           </a:xfrm>
           <a:prstGeom prst="roundRect">
             <a:avLst>
-              <a:gd name="adj" fmla="val 19230"/>
+              <a:gd name="adj" fmla="val 17857"/>
             </a:avLst>
           </a:prstGeom>
           <a:solidFill>
-            <a:srgbClr val="F5F3FF"/>
+            <a:srgbClr val="FFFFFF"/>
           </a:solidFill>
-          <a:ln w="12700">
+          <a:ln w="13970">
             <a:solidFill>
               <a:srgbClr val="DDD6FE"/>
             </a:solidFill>
@@ -28771,8 +28801,8 @@
         </p:nvSpPr>
         <p:spPr>
           <a:xfrm>
-            <a:off x="329184" y="3511296"/>
-            <a:ext cx="457200" cy="237744"/>
+            <a:off x="329184" y="3502151"/>
+            <a:ext cx="475488" cy="256032"/>
           </a:xfrm>
           <a:prstGeom prst="rect">
             <a:avLst/>
@@ -28817,8 +28847,8 @@
         </p:nvSpPr>
         <p:spPr>
           <a:xfrm>
-            <a:off x="896112" y="3465575"/>
-            <a:ext cx="3127248" cy="137160"/>
+            <a:off x="932688" y="3465575"/>
+            <a:ext cx="3108960" cy="137160"/>
           </a:xfrm>
           <a:prstGeom prst="rect">
             <a:avLst/>
@@ -28843,14 +28873,24 @@
               </a:spcAft>
             </a:pPr>
             <a:r>
-              <a:rPr sz="780" b="1" i="0">
+              <a:rPr sz="790" b="1" i="0">
                 <a:solidFill>
                   <a:srgbClr val="0F172A"/>
                 </a:solidFill>
                 <a:latin typeface="Segoe UI"/>
                 <a:ea typeface="Microsoft YaHei"/>
               </a:rPr>
-              <a:t>展示层 · 防越权查看</a:t>
+              <a:t>展示层</a:t>
+            </a:r>
+            <a:r>
+              <a:rPr sz="590" b="0" i="0">
+                <a:solidFill>
+                  <a:srgbClr val="64748B"/>
+                </a:solidFill>
+                <a:latin typeface="Segoe UI"/>
+                <a:ea typeface="Microsoft YaHei"/>
+              </a:rPr>
+              <a:t> · 防越权查看</a:t>
             </a:r>
           </a:p>
         </p:txBody>
@@ -28863,8 +28903,8 @@
         </p:nvSpPr>
         <p:spPr>
           <a:xfrm>
-            <a:off x="896112" y="3639311"/>
-            <a:ext cx="3127248" cy="438912"/>
+            <a:off x="932688" y="3639311"/>
+            <a:ext cx="3090672" cy="438912"/>
           </a:xfrm>
           <a:prstGeom prst="rect">
             <a:avLst/>
@@ -28891,7 +28931,7 @@
             <a:r>
               <a:rPr sz="590" b="0" i="0">
                 <a:solidFill>
-                  <a:srgbClr val="64748B"/>
+                  <a:srgbClr val="475569"/>
                 </a:solidFill>
                 <a:latin typeface="Segoe UI"/>
                 <a:ea typeface="Microsoft YaHei"/>
@@ -28918,9 +28958,9 @@
             </a:avLst>
           </a:prstGeom>
           <a:solidFill>
-            <a:srgbClr val="FFFFFF"/>
+            <a:srgbClr val="FFFBEB"/>
           </a:solidFill>
-          <a:ln w="15240">
+          <a:ln w="13970">
             <a:solidFill>
               <a:srgbClr val="FDE68A"/>
             </a:solidFill>
@@ -28957,18 +28997,18 @@
         </p:nvSpPr>
         <p:spPr>
           <a:xfrm>
-            <a:off x="329184" y="4334255"/>
-            <a:ext cx="457200" cy="237744"/>
+            <a:off x="329184" y="4325112"/>
+            <a:ext cx="475488" cy="256032"/>
           </a:xfrm>
           <a:prstGeom prst="roundRect">
             <a:avLst>
-              <a:gd name="adj" fmla="val 19230"/>
+              <a:gd name="adj" fmla="val 17857"/>
             </a:avLst>
           </a:prstGeom>
           <a:solidFill>
-            <a:srgbClr val="FFFBEB"/>
+            <a:srgbClr val="FFFFFF"/>
           </a:solidFill>
-          <a:ln w="12700">
+          <a:ln w="13970">
             <a:solidFill>
               <a:srgbClr val="FDE68A"/>
             </a:solidFill>
@@ -29005,8 +29045,8 @@
         </p:nvSpPr>
         <p:spPr>
           <a:xfrm>
-            <a:off x="329184" y="4334255"/>
-            <a:ext cx="457200" cy="237744"/>
+            <a:off x="329184" y="4325112"/>
+            <a:ext cx="475488" cy="256032"/>
           </a:xfrm>
           <a:prstGeom prst="rect">
             <a:avLst/>
@@ -29051,8 +29091,8 @@
         </p:nvSpPr>
         <p:spPr>
           <a:xfrm>
-            <a:off x="896112" y="4288536"/>
-            <a:ext cx="3127248" cy="137160"/>
+            <a:off x="932688" y="4288536"/>
+            <a:ext cx="3108960" cy="137160"/>
           </a:xfrm>
           <a:prstGeom prst="rect">
             <a:avLst/>
@@ -29077,14 +29117,24 @@
               </a:spcAft>
             </a:pPr>
             <a:r>
-              <a:rPr sz="780" b="1" i="0">
+              <a:rPr sz="790" b="1" i="0">
                 <a:solidFill>
                   <a:srgbClr val="0F172A"/>
                 </a:solidFill>
                 <a:latin typeface="Segoe UI"/>
                 <a:ea typeface="Microsoft YaHei"/>
               </a:rPr>
-              <a:t>密钥层 · 防泄露无法止损</a:t>
+              <a:t>密钥层</a:t>
+            </a:r>
+            <a:r>
+              <a:rPr sz="590" b="0" i="0">
+                <a:solidFill>
+                  <a:srgbClr val="64748B"/>
+                </a:solidFill>
+                <a:latin typeface="Segoe UI"/>
+                <a:ea typeface="Microsoft YaHei"/>
+              </a:rPr>
+              <a:t> · 防泄露无法止损</a:t>
             </a:r>
           </a:p>
         </p:txBody>
@@ -29097,8 +29147,8 @@
         </p:nvSpPr>
         <p:spPr>
           <a:xfrm>
-            <a:off x="896112" y="4462272"/>
-            <a:ext cx="3127248" cy="438912"/>
+            <a:off x="932688" y="4462272"/>
+            <a:ext cx="3090672" cy="438912"/>
           </a:xfrm>
           <a:prstGeom prst="rect">
             <a:avLst/>
@@ -29125,7 +29175,7 @@
             <a:r>
               <a:rPr sz="590" b="0" i="0">
                 <a:solidFill>
-                  <a:srgbClr val="64748B"/>
+                  <a:srgbClr val="475569"/>
                 </a:solidFill>
                 <a:latin typeface="Segoe UI"/>
                 <a:ea typeface="Microsoft YaHei"/>
@@ -29253,7 +29303,13 @@
               <a:srgbClr val="A7F3D0"/>
             </a:solidFill>
           </a:ln>
-          <a:effectLst/>
+          <a:effectLst>
+            <a:outerShdw blurRad="55000" dist="22000" dir="5400000" rotWithShape="0">
+              <a:srgbClr val="0F172A">
+                <a:alpha val="12000"/>
+              </a:srgbClr>
+            </a:outerShdw>
+          </a:effectLst>
         </p:spPr>
         <p:style>
           <a:lnRef idx="1">
@@ -29279,26 +29335,24 @@
       </p:sp>
       <p:sp>
         <p:nvSpPr>
-          <p:cNvPr id="34" name="Rounded Rectangle 33"/>
+          <p:cNvPr id="34" name="Oval 33"/>
           <p:cNvSpPr/>
           <p:nvPr/>
         </p:nvSpPr>
         <p:spPr>
           <a:xfrm>
-            <a:off x="4370832" y="996696"/>
-            <a:ext cx="512064" cy="201168"/>
-          </a:xfrm>
-          <a:prstGeom prst="roundRect">
-            <a:avLst>
-              <a:gd name="adj" fmla="val 18181"/>
-            </a:avLst>
+            <a:off x="4370832" y="1033271"/>
+            <a:ext cx="274320" cy="274320"/>
+          </a:xfrm>
+          <a:prstGeom prst="ellipse">
+            <a:avLst/>
           </a:prstGeom>
           <a:solidFill>
-            <a:srgbClr val="ECFDF5"/>
+            <a:srgbClr val="FFFFFF"/>
           </a:solidFill>
-          <a:ln w="12700">
+          <a:ln w="20320">
             <a:solidFill>
-              <a:srgbClr val="A7F3D0"/>
+              <a:srgbClr val="059669"/>
             </a:solidFill>
           </a:ln>
           <a:effectLst/>
@@ -29333,8 +29387,8 @@
         </p:nvSpPr>
         <p:spPr>
           <a:xfrm>
-            <a:off x="4370832" y="996696"/>
-            <a:ext cx="512064" cy="201168"/>
+            <a:off x="4370832" y="1033271"/>
+            <a:ext cx="274320" cy="274320"/>
           </a:xfrm>
           <a:prstGeom prst="rect">
             <a:avLst/>
@@ -29359,14 +29413,14 @@
               </a:spcAft>
             </a:pPr>
             <a:r>
-              <a:rPr sz="580" b="1" i="0">
+              <a:rPr sz="800" b="1" i="0">
                 <a:solidFill>
                   <a:srgbClr val="047857"/>
                 </a:solidFill>
                 <a:latin typeface="Consolas"/>
                 <a:ea typeface="Microsoft YaHei"/>
               </a:rPr>
-              <a:t>STEP 1</a:t>
+              <a:t>1</a:t>
             </a:r>
           </a:p>
         </p:txBody>
@@ -29379,8 +29433,8 @@
         </p:nvSpPr>
         <p:spPr>
           <a:xfrm>
-            <a:off x="4992624" y="969264"/>
-            <a:ext cx="3291840" cy="137160"/>
+            <a:off x="4754880" y="969264"/>
+            <a:ext cx="3529584" cy="137160"/>
           </a:xfrm>
           <a:prstGeom prst="rect">
             <a:avLst/>
@@ -29425,8 +29479,8 @@
         </p:nvSpPr>
         <p:spPr>
           <a:xfrm>
-            <a:off x="4992624" y="1152144"/>
-            <a:ext cx="3291840" cy="237744"/>
+            <a:off x="4754880" y="1152144"/>
+            <a:ext cx="3529584" cy="237744"/>
           </a:xfrm>
           <a:prstGeom prst="rect">
             <a:avLst/>
@@ -29510,7 +29564,13 @@
               <a:srgbClr val="A7F3D0"/>
             </a:solidFill>
           </a:ln>
-          <a:effectLst/>
+          <a:effectLst>
+            <a:outerShdw blurRad="55000" dist="22000" dir="5400000" rotWithShape="0">
+              <a:srgbClr val="0F172A">
+                <a:alpha val="12000"/>
+              </a:srgbClr>
+            </a:outerShdw>
+          </a:effectLst>
         </p:spPr>
         <p:style>
           <a:lnRef idx="1">
@@ -29536,26 +29596,24 @@
       </p:sp>
       <p:sp>
         <p:nvSpPr>
-          <p:cNvPr id="40" name="Rounded Rectangle 39"/>
+          <p:cNvPr id="40" name="Oval 39"/>
           <p:cNvSpPr/>
           <p:nvPr/>
         </p:nvSpPr>
         <p:spPr>
           <a:xfrm>
-            <a:off x="4370832" y="1636776"/>
-            <a:ext cx="512064" cy="201168"/>
-          </a:xfrm>
-          <a:prstGeom prst="roundRect">
-            <a:avLst>
-              <a:gd name="adj" fmla="val 18181"/>
-            </a:avLst>
+            <a:off x="4370832" y="1673351"/>
+            <a:ext cx="274320" cy="274320"/>
+          </a:xfrm>
+          <a:prstGeom prst="ellipse">
+            <a:avLst/>
           </a:prstGeom>
           <a:solidFill>
-            <a:srgbClr val="ECFDF5"/>
+            <a:srgbClr val="FFFFFF"/>
           </a:solidFill>
-          <a:ln w="12700">
+          <a:ln w="20320">
             <a:solidFill>
-              <a:srgbClr val="A7F3D0"/>
+              <a:srgbClr val="059669"/>
             </a:solidFill>
           </a:ln>
           <a:effectLst/>
@@ -29590,8 +29648,8 @@
         </p:nvSpPr>
         <p:spPr>
           <a:xfrm>
-            <a:off x="4370832" y="1636776"/>
-            <a:ext cx="512064" cy="201168"/>
+            <a:off x="4370832" y="1673351"/>
+            <a:ext cx="274320" cy="274320"/>
           </a:xfrm>
           <a:prstGeom prst="rect">
             <a:avLst/>
@@ -29616,14 +29674,14 @@
               </a:spcAft>
             </a:pPr>
             <a:r>
-              <a:rPr sz="580" b="1" i="0">
+              <a:rPr sz="800" b="1" i="0">
                 <a:solidFill>
                   <a:srgbClr val="047857"/>
                 </a:solidFill>
                 <a:latin typeface="Consolas"/>
                 <a:ea typeface="Microsoft YaHei"/>
               </a:rPr>
-              <a:t>STEP 2</a:t>
+              <a:t>2</a:t>
             </a:r>
           </a:p>
         </p:txBody>
@@ -29636,8 +29694,8 @@
         </p:nvSpPr>
         <p:spPr>
           <a:xfrm>
-            <a:off x="4992624" y="1609344"/>
-            <a:ext cx="3291840" cy="137160"/>
+            <a:off x="4754880" y="1609344"/>
+            <a:ext cx="3529584" cy="137160"/>
           </a:xfrm>
           <a:prstGeom prst="rect">
             <a:avLst/>
@@ -29682,8 +29740,8 @@
         </p:nvSpPr>
         <p:spPr>
           <a:xfrm>
-            <a:off x="4992624" y="1792224"/>
-            <a:ext cx="3291840" cy="237744"/>
+            <a:off x="4754880" y="1792224"/>
+            <a:ext cx="3529584" cy="237744"/>
           </a:xfrm>
           <a:prstGeom prst="rect">
             <a:avLst/>
@@ -29777,7 +29835,13 @@
               <a:srgbClr val="A7F3D0"/>
             </a:solidFill>
           </a:ln>
-          <a:effectLst/>
+          <a:effectLst>
+            <a:outerShdw blurRad="55000" dist="22000" dir="5400000" rotWithShape="0">
+              <a:srgbClr val="0F172A">
+                <a:alpha val="12000"/>
+              </a:srgbClr>
+            </a:outerShdw>
+          </a:effectLst>
         </p:spPr>
         <p:style>
           <a:lnRef idx="1">
@@ -29803,26 +29867,24 @@
       </p:sp>
       <p:sp>
         <p:nvSpPr>
-          <p:cNvPr id="46" name="Rounded Rectangle 45"/>
+          <p:cNvPr id="46" name="Oval 45"/>
           <p:cNvSpPr/>
           <p:nvPr/>
         </p:nvSpPr>
         <p:spPr>
           <a:xfrm>
-            <a:off x="4370832" y="2276856"/>
-            <a:ext cx="512064" cy="201168"/>
-          </a:xfrm>
-          <a:prstGeom prst="roundRect">
-            <a:avLst>
-              <a:gd name="adj" fmla="val 18181"/>
-            </a:avLst>
+            <a:off x="4370832" y="2313432"/>
+            <a:ext cx="274320" cy="274320"/>
+          </a:xfrm>
+          <a:prstGeom prst="ellipse">
+            <a:avLst/>
           </a:prstGeom>
           <a:solidFill>
-            <a:srgbClr val="ECFDF5"/>
+            <a:srgbClr val="FFFFFF"/>
           </a:solidFill>
-          <a:ln w="12700">
+          <a:ln w="20320">
             <a:solidFill>
-              <a:srgbClr val="A7F3D0"/>
+              <a:srgbClr val="059669"/>
             </a:solidFill>
           </a:ln>
           <a:effectLst/>
@@ -29857,8 +29919,8 @@
         </p:nvSpPr>
         <p:spPr>
           <a:xfrm>
-            <a:off x="4370832" y="2276856"/>
-            <a:ext cx="512064" cy="201168"/>
+            <a:off x="4370832" y="2313432"/>
+            <a:ext cx="274320" cy="274320"/>
           </a:xfrm>
           <a:prstGeom prst="rect">
             <a:avLst/>
@@ -29883,14 +29945,14 @@
               </a:spcAft>
             </a:pPr>
             <a:r>
-              <a:rPr sz="580" b="1" i="0">
+              <a:rPr sz="800" b="1" i="0">
                 <a:solidFill>
                   <a:srgbClr val="047857"/>
                 </a:solidFill>
                 <a:latin typeface="Consolas"/>
                 <a:ea typeface="Microsoft YaHei"/>
               </a:rPr>
-              <a:t>STEP 3</a:t>
+              <a:t>3</a:t>
             </a:r>
           </a:p>
         </p:txBody>
@@ -29903,8 +29965,8 @@
         </p:nvSpPr>
         <p:spPr>
           <a:xfrm>
-            <a:off x="4992624" y="2249424"/>
-            <a:ext cx="3291840" cy="137160"/>
+            <a:off x="4754880" y="2249424"/>
+            <a:ext cx="3529584" cy="137160"/>
           </a:xfrm>
           <a:prstGeom prst="rect">
             <a:avLst/>
@@ -29949,8 +30011,8 @@
         </p:nvSpPr>
         <p:spPr>
           <a:xfrm>
-            <a:off x="4992624" y="2432304"/>
-            <a:ext cx="3291840" cy="237744"/>
+            <a:off x="4754880" y="2432304"/>
+            <a:ext cx="3529584" cy="237744"/>
           </a:xfrm>
           <a:prstGeom prst="rect">
             <a:avLst/>
@@ -30044,7 +30106,13 @@
               <a:srgbClr val="A7F3D0"/>
             </a:solidFill>
           </a:ln>
-          <a:effectLst/>
+          <a:effectLst>
+            <a:outerShdw blurRad="55000" dist="22000" dir="5400000" rotWithShape="0">
+              <a:srgbClr val="0F172A">
+                <a:alpha val="12000"/>
+              </a:srgbClr>
+            </a:outerShdw>
+          </a:effectLst>
         </p:spPr>
         <p:style>
           <a:lnRef idx="1">
@@ -30070,26 +30138,24 @@
       </p:sp>
       <p:sp>
         <p:nvSpPr>
-          <p:cNvPr id="52" name="Rounded Rectangle 51"/>
+          <p:cNvPr id="52" name="Oval 51"/>
           <p:cNvSpPr/>
           <p:nvPr/>
         </p:nvSpPr>
         <p:spPr>
           <a:xfrm>
-            <a:off x="4370832" y="2916936"/>
-            <a:ext cx="512064" cy="201168"/>
-          </a:xfrm>
-          <a:prstGeom prst="roundRect">
-            <a:avLst>
-              <a:gd name="adj" fmla="val 18181"/>
-            </a:avLst>
+            <a:off x="4370832" y="2953512"/>
+            <a:ext cx="274320" cy="274320"/>
+          </a:xfrm>
+          <a:prstGeom prst="ellipse">
+            <a:avLst/>
           </a:prstGeom>
           <a:solidFill>
-            <a:srgbClr val="ECFDF5"/>
+            <a:srgbClr val="FFFFFF"/>
           </a:solidFill>
-          <a:ln w="12700">
+          <a:ln w="20320">
             <a:solidFill>
-              <a:srgbClr val="A7F3D0"/>
+              <a:srgbClr val="059669"/>
             </a:solidFill>
           </a:ln>
           <a:effectLst/>
@@ -30124,8 +30190,8 @@
         </p:nvSpPr>
         <p:spPr>
           <a:xfrm>
-            <a:off x="4370832" y="2916936"/>
-            <a:ext cx="512064" cy="201168"/>
+            <a:off x="4370832" y="2953512"/>
+            <a:ext cx="274320" cy="274320"/>
           </a:xfrm>
           <a:prstGeom prst="rect">
             <a:avLst/>
@@ -30150,14 +30216,14 @@
               </a:spcAft>
             </a:pPr>
             <a:r>
-              <a:rPr sz="580" b="1" i="0">
+              <a:rPr sz="800" b="1" i="0">
                 <a:solidFill>
                   <a:srgbClr val="047857"/>
                 </a:solidFill>
                 <a:latin typeface="Consolas"/>
                 <a:ea typeface="Microsoft YaHei"/>
               </a:rPr>
-              <a:t>STEP 4</a:t>
+              <a:t>4</a:t>
             </a:r>
           </a:p>
         </p:txBody>
@@ -30170,8 +30236,8 @@
         </p:nvSpPr>
         <p:spPr>
           <a:xfrm>
-            <a:off x="4992624" y="2889504"/>
-            <a:ext cx="3291840" cy="137160"/>
+            <a:off x="4754880" y="2889504"/>
+            <a:ext cx="3529584" cy="137160"/>
           </a:xfrm>
           <a:prstGeom prst="rect">
             <a:avLst/>
@@ -30216,8 +30282,8 @@
         </p:nvSpPr>
         <p:spPr>
           <a:xfrm>
-            <a:off x="4992624" y="3072384"/>
-            <a:ext cx="3291840" cy="237744"/>
+            <a:off x="4754880" y="3072384"/>
+            <a:ext cx="3529584" cy="237744"/>
           </a:xfrm>
           <a:prstGeom prst="rect">
             <a:avLst/>
@@ -30360,29 +30426,77 @@
       </p:sp>
       <p:sp>
         <p:nvSpPr>
-          <p:cNvPr id="58" name="TextBox 57"/>
-          <p:cNvSpPr txBox="1"/>
-          <p:nvPr/>
-        </p:nvSpPr>
-        <p:spPr>
-          <a:xfrm>
-            <a:off x="4315968" y="3913632"/>
-            <a:ext cx="4023360" cy="274320"/>
-          </a:xfrm>
-          <a:prstGeom prst="rect">
-            <a:avLst/>
-          </a:prstGeom>
-          <a:noFill/>
-        </p:spPr>
-        <p:txBody>
-          <a:bodyPr wrap="square" lIns="0" rIns="0" tIns="0" bIns="0" anchor="t">
+          <p:cNvPr id="58" name="Rounded Rectangle 57"/>
+          <p:cNvSpPr/>
+          <p:nvPr/>
+        </p:nvSpPr>
+        <p:spPr>
+          <a:xfrm>
+            <a:off x="4261104" y="3895344"/>
+            <a:ext cx="4114800" cy="256032"/>
+          </a:xfrm>
+          <a:prstGeom prst="roundRect">
+            <a:avLst>
+              <a:gd name="adj" fmla="val 17857"/>
+            </a:avLst>
+          </a:prstGeom>
+          <a:solidFill>
+            <a:srgbClr val="F8FAFC"/>
+          </a:solidFill>
+          <a:ln w="12700">
+            <a:solidFill>
+              <a:srgbClr val="E2E8F0"/>
+            </a:solidFill>
+          </a:ln>
+          <a:effectLst/>
+        </p:spPr>
+        <p:style>
+          <a:lnRef idx="1">
+            <a:schemeClr val="accent1"/>
+          </a:lnRef>
+          <a:fillRef idx="3">
+            <a:schemeClr val="accent1"/>
+          </a:fillRef>
+          <a:effectRef idx="2">
+            <a:schemeClr val="accent1"/>
+          </a:effectRef>
+          <a:fontRef idx="minor">
+            <a:schemeClr val="lt1"/>
+          </a:fontRef>
+        </p:style>
+        <p:txBody>
+          <a:bodyPr rtlCol="0" anchor="ctr"/>
+          <a:lstStyle/>
+          <a:p>
+            <a:pPr algn="ctr"/>
+          </a:p>
+        </p:txBody>
+      </p:sp>
+      <p:sp>
+        <p:nvSpPr>
+          <p:cNvPr id="59" name="TextBox 58"/>
+          <p:cNvSpPr txBox="1"/>
+          <p:nvPr/>
+        </p:nvSpPr>
+        <p:spPr>
+          <a:xfrm>
+            <a:off x="4370832" y="3895344"/>
+            <a:ext cx="3913632" cy="256032"/>
+          </a:xfrm>
+          <a:prstGeom prst="rect">
+            <a:avLst/>
+          </a:prstGeom>
+          <a:noFill/>
+        </p:spPr>
+        <p:txBody>
+          <a:bodyPr wrap="square" lIns="0" rIns="0" tIns="0" bIns="0" anchor="ctr">
             <a:noAutofit/>
           </a:bodyPr>
           <a:lstStyle/>
           <a:p>
             <a:pPr algn="l">
               <a:lnSpc>
-                <a:spcPct val="120000"/>
+                <a:spcPct val="112000"/>
               </a:lnSpc>
               <a:spcBef>
                 <a:spcPts val="0"/>
@@ -30416,7 +30530,7 @@
       </p:sp>
       <p:sp>
         <p:nvSpPr>
-          <p:cNvPr id="59" name="Rounded Rectangle 58"/>
+          <p:cNvPr id="60" name="Rounded Rectangle 59"/>
           <p:cNvSpPr/>
           <p:nvPr/>
         </p:nvSpPr>
@@ -30464,7 +30578,7 @@
       </p:sp>
       <p:sp>
         <p:nvSpPr>
-          <p:cNvPr id="60" name="TextBox 59"/>
+          <p:cNvPr id="61" name="TextBox 60"/>
           <p:cNvSpPr txBox="1"/>
           <p:nvPr/>
         </p:nvSpPr>
@@ -30510,7 +30624,7 @@
       </p:sp>
       <p:sp>
         <p:nvSpPr>
-          <p:cNvPr id="61" name="TextBox 60"/>
+          <p:cNvPr id="62" name="TextBox 61"/>
           <p:cNvSpPr txBox="1"/>
           <p:nvPr/>
         </p:nvSpPr>
@@ -30579,7 +30693,7 @@
       </p:sp>
       <p:sp>
         <p:nvSpPr>
-          <p:cNvPr id="62" name="Rounded Rectangle 61"/>
+          <p:cNvPr id="63" name="Rounded Rectangle 62"/>
           <p:cNvSpPr/>
           <p:nvPr/>
         </p:nvSpPr>
@@ -30627,7 +30741,7 @@
       </p:sp>
       <p:sp>
         <p:nvSpPr>
-          <p:cNvPr id="63" name="TextBox 62"/>
+          <p:cNvPr id="64" name="TextBox 63"/>
           <p:cNvSpPr txBox="1"/>
           <p:nvPr/>
         </p:nvSpPr>
@@ -30673,7 +30787,7 @@
       </p:sp>
       <p:sp>
         <p:nvSpPr>
-          <p:cNvPr id="64" name="Rounded Rectangle 63"/>
+          <p:cNvPr id="65" name="Rounded Rectangle 64"/>
           <p:cNvSpPr/>
           <p:nvPr/>
         </p:nvSpPr>
@@ -30721,7 +30835,7 @@
       </p:sp>
       <p:sp>
         <p:nvSpPr>
-          <p:cNvPr id="65" name="Rounded Rectangle 64"/>
+          <p:cNvPr id="66" name="Rounded Rectangle 65"/>
           <p:cNvSpPr/>
           <p:nvPr/>
         </p:nvSpPr>
@@ -30743,7 +30857,13 @@
               <a:srgbClr val="BFDBFE"/>
             </a:solidFill>
           </a:ln>
-          <a:effectLst/>
+          <a:effectLst>
+            <a:outerShdw blurRad="55000" dist="22000" dir="5400000" rotWithShape="0">
+              <a:srgbClr val="0F172A">
+                <a:alpha val="12000"/>
+              </a:srgbClr>
+            </a:outerShdw>
+          </a:effectLst>
         </p:spPr>
         <p:style>
           <a:lnRef idx="1">
@@ -30769,7 +30889,7 @@
       </p:sp>
       <p:sp>
         <p:nvSpPr>
-          <p:cNvPr id="66" name="TextBox 65"/>
+          <p:cNvPr id="67" name="TextBox 66"/>
           <p:cNvSpPr txBox="1"/>
           <p:nvPr/>
         </p:nvSpPr>
@@ -30815,7 +30935,7 @@
       </p:sp>
       <p:cxnSp>
         <p:nvCxnSpPr>
-          <p:cNvPr id="67" name="Connector 66"/>
+          <p:cNvPr id="68" name="Connector 67"/>
           <p:cNvCxnSpPr/>
           <p:nvPr/>
         </p:nvCxnSpPr>
@@ -30838,7 +30958,7 @@
       </p:cxnSp>
       <p:sp>
         <p:nvSpPr>
-          <p:cNvPr id="68" name="TextBox 67"/>
+          <p:cNvPr id="69" name="TextBox 68"/>
           <p:cNvSpPr txBox="1"/>
           <p:nvPr/>
         </p:nvSpPr>
@@ -30884,7 +31004,7 @@
       </p:sp>
       <p:sp>
         <p:nvSpPr>
-          <p:cNvPr id="69" name="Rounded Rectangle 68"/>
+          <p:cNvPr id="70" name="Rounded Rectangle 69"/>
           <p:cNvSpPr/>
           <p:nvPr/>
         </p:nvSpPr>
@@ -30906,7 +31026,13 @@
               <a:srgbClr val="DDD6FE"/>
             </a:solidFill>
           </a:ln>
-          <a:effectLst/>
+          <a:effectLst>
+            <a:outerShdw blurRad="55000" dist="22000" dir="5400000" rotWithShape="0">
+              <a:srgbClr val="0F172A">
+                <a:alpha val="12000"/>
+              </a:srgbClr>
+            </a:outerShdw>
+          </a:effectLst>
         </p:spPr>
         <p:style>
           <a:lnRef idx="1">
@@ -30932,7 +31058,7 @@
       </p:sp>
       <p:sp>
         <p:nvSpPr>
-          <p:cNvPr id="70" name="TextBox 69"/>
+          <p:cNvPr id="71" name="TextBox 70"/>
           <p:cNvSpPr txBox="1"/>
           <p:nvPr/>
         </p:nvSpPr>
@@ -30978,7 +31104,7 @@
       </p:sp>
       <p:cxnSp>
         <p:nvCxnSpPr>
-          <p:cNvPr id="71" name="Connector 70"/>
+          <p:cNvPr id="72" name="Connector 71"/>
           <p:cNvCxnSpPr/>
           <p:nvPr/>
         </p:nvCxnSpPr>
@@ -31001,7 +31127,7 @@
       </p:cxnSp>
       <p:sp>
         <p:nvSpPr>
-          <p:cNvPr id="72" name="TextBox 71"/>
+          <p:cNvPr id="73" name="TextBox 72"/>
           <p:cNvSpPr txBox="1"/>
           <p:nvPr/>
         </p:nvSpPr>
@@ -31047,7 +31173,7 @@
       </p:sp>
       <p:sp>
         <p:nvSpPr>
-          <p:cNvPr id="73" name="Rounded Rectangle 72"/>
+          <p:cNvPr id="74" name="Rounded Rectangle 73"/>
           <p:cNvSpPr/>
           <p:nvPr/>
         </p:nvSpPr>
@@ -31069,7 +31195,13 @@
               <a:srgbClr val="A7F3D0"/>
             </a:solidFill>
           </a:ln>
-          <a:effectLst/>
+          <a:effectLst>
+            <a:outerShdw blurRad="55000" dist="22000" dir="5400000" rotWithShape="0">
+              <a:srgbClr val="0F172A">
+                <a:alpha val="12000"/>
+              </a:srgbClr>
+            </a:outerShdw>
+          </a:effectLst>
         </p:spPr>
         <p:style>
           <a:lnRef idx="1">
@@ -31095,7 +31227,7 @@
       </p:sp>
       <p:sp>
         <p:nvSpPr>
-          <p:cNvPr id="74" name="TextBox 73"/>
+          <p:cNvPr id="75" name="TextBox 74"/>
           <p:cNvSpPr txBox="1"/>
           <p:nvPr/>
         </p:nvSpPr>
@@ -31141,7 +31273,7 @@
       </p:sp>
       <p:sp>
         <p:nvSpPr>
-          <p:cNvPr id="75" name="TextBox 74"/>
+          <p:cNvPr id="76" name="TextBox 75"/>
           <p:cNvSpPr txBox="1"/>
           <p:nvPr/>
         </p:nvSpPr>
@@ -31187,7 +31319,7 @@
       </p:sp>
       <p:sp>
         <p:nvSpPr>
-          <p:cNvPr id="76" name="Rounded Rectangle 75"/>
+          <p:cNvPr id="77" name="Rounded Rectangle 76"/>
           <p:cNvSpPr/>
           <p:nvPr/>
         </p:nvSpPr>
@@ -31236,7 +31368,7 @@
       </p:sp>
       <p:sp>
         <p:nvSpPr>
-          <p:cNvPr id="77" name="TextBox 76"/>
+          <p:cNvPr id="78" name="TextBox 77"/>
           <p:cNvSpPr txBox="1"/>
           <p:nvPr/>
         </p:nvSpPr>
@@ -31282,7 +31414,7 @@
       </p:sp>
       <p:sp>
         <p:nvSpPr>
-          <p:cNvPr id="78" name="TextBox 77"/>
+          <p:cNvPr id="79" name="TextBox 78"/>
           <p:cNvSpPr txBox="1"/>
           <p:nvPr/>
         </p:nvSpPr>
@@ -31351,7 +31483,7 @@
       </p:sp>
       <p:sp>
         <p:nvSpPr>
-          <p:cNvPr id="79" name="Rounded Rectangle 78"/>
+          <p:cNvPr id="80" name="Rounded Rectangle 79"/>
           <p:cNvSpPr/>
           <p:nvPr/>
         </p:nvSpPr>
@@ -31399,7 +31531,7 @@
       </p:sp>
       <p:sp>
         <p:nvSpPr>
-          <p:cNvPr id="80" name="TextBox 79"/>
+          <p:cNvPr id="81" name="TextBox 80"/>
           <p:cNvSpPr txBox="1"/>
           <p:nvPr/>
         </p:nvSpPr>
@@ -31445,7 +31577,7 @@
       </p:sp>
       <p:sp>
         <p:nvSpPr>
-          <p:cNvPr id="81" name="Rounded Rectangle 80"/>
+          <p:cNvPr id="82" name="Rounded Rectangle 81"/>
           <p:cNvSpPr/>
           <p:nvPr/>
         </p:nvSpPr>
@@ -31493,7 +31625,7 @@
       </p:sp>
       <p:sp>
         <p:nvSpPr>
-          <p:cNvPr id="82" name="TextBox 81"/>
+          <p:cNvPr id="83" name="TextBox 82"/>
           <p:cNvSpPr txBox="1"/>
           <p:nvPr/>
         </p:nvSpPr>
@@ -31539,7 +31671,7 @@
       </p:sp>
       <p:sp>
         <p:nvSpPr>
-          <p:cNvPr id="83" name="TextBox 82"/>
+          <p:cNvPr id="84" name="TextBox 83"/>
           <p:cNvSpPr txBox="1"/>
           <p:nvPr/>
         </p:nvSpPr>
@@ -31585,7 +31717,7 @@
       </p:sp>
       <p:sp>
         <p:nvSpPr>
-          <p:cNvPr id="84" name="Rounded Rectangle 83"/>
+          <p:cNvPr id="85" name="Rounded Rectangle 84"/>
           <p:cNvSpPr/>
           <p:nvPr/>
         </p:nvSpPr>
@@ -31633,7 +31765,7 @@
       </p:sp>
       <p:sp>
         <p:nvSpPr>
-          <p:cNvPr id="85" name="TextBox 84"/>
+          <p:cNvPr id="86" name="TextBox 85"/>
           <p:cNvSpPr txBox="1"/>
           <p:nvPr/>
         </p:nvSpPr>
@@ -31679,7 +31811,7 @@
       </p:sp>
       <p:sp>
         <p:nvSpPr>
-          <p:cNvPr id="86" name="TextBox 85"/>
+          <p:cNvPr id="87" name="TextBox 86"/>
           <p:cNvSpPr txBox="1"/>
           <p:nvPr/>
         </p:nvSpPr>
@@ -31725,7 +31857,7 @@
       </p:sp>
       <p:sp>
         <p:nvSpPr>
-          <p:cNvPr id="87" name="Rounded Rectangle 86"/>
+          <p:cNvPr id="88" name="Rounded Rectangle 87"/>
           <p:cNvSpPr/>
           <p:nvPr/>
         </p:nvSpPr>
@@ -31773,7 +31905,7 @@
       </p:sp>
       <p:sp>
         <p:nvSpPr>
-          <p:cNvPr id="88" name="TextBox 87"/>
+          <p:cNvPr id="89" name="TextBox 88"/>
           <p:cNvSpPr txBox="1"/>
           <p:nvPr/>
         </p:nvSpPr>
@@ -31819,7 +31951,7 @@
       </p:sp>
       <p:sp>
         <p:nvSpPr>
-          <p:cNvPr id="89" name="TextBox 88"/>
+          <p:cNvPr id="90" name="TextBox 89"/>
           <p:cNvSpPr txBox="1"/>
           <p:nvPr/>
         </p:nvSpPr>
@@ -31865,7 +31997,7 @@
       </p:sp>
       <p:sp>
         <p:nvSpPr>
-          <p:cNvPr id="90" name="Rounded Rectangle 89"/>
+          <p:cNvPr id="91" name="Rounded Rectangle 90"/>
           <p:cNvSpPr/>
           <p:nvPr/>
         </p:nvSpPr>
@@ -31880,11 +32012,11 @@
             </a:avLst>
           </a:prstGeom>
           <a:solidFill>
-            <a:srgbClr val="FFFFFF"/>
+            <a:srgbClr val="EFF6FF"/>
           </a:solidFill>
           <a:ln w="15240">
             <a:solidFill>
-              <a:srgbClr val="E2E8F0"/>
+              <a:srgbClr val="BFDBFE"/>
             </a:solidFill>
           </a:ln>
           <a:effectLst>
@@ -31919,59 +32051,13 @@
       </p:sp>
       <p:sp>
         <p:nvSpPr>
-          <p:cNvPr id="91" name="Rounded Rectangle 90"/>
-          <p:cNvSpPr/>
-          <p:nvPr/>
-        </p:nvSpPr>
-        <p:spPr>
-          <a:xfrm>
-            <a:off x="201168" y="5138928"/>
-            <a:ext cx="41148" cy="786384"/>
-          </a:xfrm>
-          <a:prstGeom prst="roundRect">
-            <a:avLst>
-              <a:gd name="adj" fmla="val 44444"/>
-            </a:avLst>
-          </a:prstGeom>
-          <a:solidFill>
-            <a:srgbClr val="0078D4"/>
-          </a:solidFill>
-          <a:ln>
-            <a:noFill/>
-          </a:ln>
-          <a:effectLst/>
-        </p:spPr>
-        <p:style>
-          <a:lnRef idx="1">
-            <a:schemeClr val="accent1"/>
-          </a:lnRef>
-          <a:fillRef idx="3">
-            <a:schemeClr val="accent1"/>
-          </a:fillRef>
-          <a:effectRef idx="2">
-            <a:schemeClr val="accent1"/>
-          </a:effectRef>
-          <a:fontRef idx="minor">
-            <a:schemeClr val="lt1"/>
-          </a:fontRef>
-        </p:style>
-        <p:txBody>
-          <a:bodyPr rtlCol="0" anchor="ctr"/>
-          <a:lstStyle/>
-          <a:p>
-            <a:pPr algn="ctr"/>
-          </a:p>
-        </p:txBody>
-      </p:sp>
-      <p:sp>
-        <p:nvSpPr>
           <p:cNvPr id="92" name="TextBox 91"/>
           <p:cNvSpPr txBox="1"/>
           <p:nvPr/>
         </p:nvSpPr>
         <p:spPr>
           <a:xfrm>
-            <a:off x="347472" y="5175504"/>
+            <a:off x="347472" y="5193792"/>
             <a:ext cx="3566160" cy="137160"/>
           </a:xfrm>
           <a:prstGeom prst="rect">
@@ -31999,7 +32085,7 @@
             <a:r>
               <a:rPr sz="780" b="1" i="0">
                 <a:solidFill>
-                  <a:srgbClr val="0078D4"/>
+                  <a:srgbClr val="059669"/>
                 </a:solidFill>
                 <a:latin typeface="Segoe UI"/>
                 <a:ea typeface="Microsoft YaHei"/>
@@ -32017,7 +32103,7 @@
         </p:nvSpPr>
         <p:spPr>
           <a:xfrm>
-            <a:off x="347472" y="5367528"/>
+            <a:off x="347472" y="5394960"/>
             <a:ext cx="3584448" cy="530352"/>
           </a:xfrm>
           <a:prstGeom prst="rect">
@@ -32045,7 +32131,7 @@
             <a:r>
               <a:rPr sz="600" b="0" i="0">
                 <a:solidFill>
-                  <a:srgbClr val="64748B"/>
+                  <a:srgbClr val="475569"/>
                 </a:solidFill>
                 <a:latin typeface="Segoe UI"/>
                 <a:ea typeface="Microsoft YaHei"/>
@@ -32072,11 +32158,11 @@
             </a:avLst>
           </a:prstGeom>
           <a:solidFill>
-            <a:srgbClr val="FFFFFF"/>
+            <a:srgbClr val="ECFDF5"/>
           </a:solidFill>
           <a:ln w="15240">
             <a:solidFill>
-              <a:srgbClr val="E2E8F0"/>
+              <a:srgbClr val="A7F3D0"/>
             </a:solidFill>
           </a:ln>
           <a:effectLst>
@@ -32111,47 +32197,47 @@
       </p:sp>
       <p:sp>
         <p:nvSpPr>
-          <p:cNvPr id="95" name="Rounded Rectangle 94"/>
-          <p:cNvSpPr/>
-          <p:nvPr/>
-        </p:nvSpPr>
-        <p:spPr>
-          <a:xfrm>
-            <a:off x="4178807" y="5138928"/>
-            <a:ext cx="41148" cy="786384"/>
-          </a:xfrm>
-          <a:prstGeom prst="roundRect">
-            <a:avLst>
-              <a:gd name="adj" fmla="val 44444"/>
-            </a:avLst>
-          </a:prstGeom>
-          <a:solidFill>
-            <a:srgbClr val="059669"/>
-          </a:solidFill>
-          <a:ln>
-            <a:noFill/>
-          </a:ln>
-          <a:effectLst/>
-        </p:spPr>
-        <p:style>
-          <a:lnRef idx="1">
-            <a:schemeClr val="accent1"/>
-          </a:lnRef>
-          <a:fillRef idx="3">
-            <a:schemeClr val="accent1"/>
-          </a:fillRef>
-          <a:effectRef idx="2">
-            <a:schemeClr val="accent1"/>
-          </a:effectRef>
-          <a:fontRef idx="minor">
-            <a:schemeClr val="lt1"/>
-          </a:fontRef>
-        </p:style>
-        <p:txBody>
-          <a:bodyPr rtlCol="0" anchor="ctr"/>
-          <a:lstStyle/>
-          <a:p>
-            <a:pPr algn="ctr"/>
+          <p:cNvPr id="95" name="TextBox 94"/>
+          <p:cNvSpPr txBox="1"/>
+          <p:nvPr/>
+        </p:nvSpPr>
+        <p:spPr>
+          <a:xfrm>
+            <a:off x="4325112" y="5193792"/>
+            <a:ext cx="3566160" cy="137160"/>
+          </a:xfrm>
+          <a:prstGeom prst="rect">
+            <a:avLst/>
+          </a:prstGeom>
+          <a:noFill/>
+        </p:spPr>
+        <p:txBody>
+          <a:bodyPr wrap="square" lIns="0" rIns="0" tIns="0" bIns="0" anchor="t">
+            <a:noAutofit/>
+          </a:bodyPr>
+          <a:lstStyle/>
+          <a:p>
+            <a:pPr algn="l">
+              <a:lnSpc>
+                <a:spcPct val="112000"/>
+              </a:lnSpc>
+              <a:spcBef>
+                <a:spcPts val="0"/>
+              </a:spcBef>
+              <a:spcAft>
+                <a:spcPts val="0"/>
+              </a:spcAft>
+            </a:pPr>
+            <a:r>
+              <a:rPr sz="780" b="1" i="0">
+                <a:solidFill>
+                  <a:srgbClr val="059669"/>
+                </a:solidFill>
+                <a:latin typeface="Segoe UI"/>
+                <a:ea typeface="Microsoft YaHei"/>
+              </a:rPr>
+              <a:t>② 轮转成本</a:t>
+            </a:r>
           </a:p>
         </p:txBody>
       </p:sp>
@@ -32163,8 +32249,8 @@
         </p:nvSpPr>
         <p:spPr>
           <a:xfrm>
-            <a:off x="4325112" y="5175504"/>
-            <a:ext cx="3566160" cy="137160"/>
+            <a:off x="4325112" y="5394960"/>
+            <a:ext cx="3584448" cy="530352"/>
           </a:xfrm>
           <a:prstGeom prst="rect">
             <a:avLst/>
@@ -32179,52 +32265,6 @@
           <a:p>
             <a:pPr algn="l">
               <a:lnSpc>
-                <a:spcPct val="112000"/>
-              </a:lnSpc>
-              <a:spcBef>
-                <a:spcPts val="0"/>
-              </a:spcBef>
-              <a:spcAft>
-                <a:spcPts val="0"/>
-              </a:spcAft>
-            </a:pPr>
-            <a:r>
-              <a:rPr sz="780" b="1" i="0">
-                <a:solidFill>
-                  <a:srgbClr val="059669"/>
-                </a:solidFill>
-                <a:latin typeface="Segoe UI"/>
-                <a:ea typeface="Microsoft YaHei"/>
-              </a:rPr>
-              <a:t>② 轮转成本</a:t>
-            </a:r>
-          </a:p>
-        </p:txBody>
-      </p:sp>
-      <p:sp>
-        <p:nvSpPr>
-          <p:cNvPr id="97" name="TextBox 96"/>
-          <p:cNvSpPr txBox="1"/>
-          <p:nvPr/>
-        </p:nvSpPr>
-        <p:spPr>
-          <a:xfrm>
-            <a:off x="4325112" y="5367528"/>
-            <a:ext cx="3584448" cy="530352"/>
-          </a:xfrm>
-          <a:prstGeom prst="rect">
-            <a:avLst/>
-          </a:prstGeom>
-          <a:noFill/>
-        </p:spPr>
-        <p:txBody>
-          <a:bodyPr wrap="square" lIns="0" rIns="0" tIns="0" bIns="0" anchor="t">
-            <a:noAutofit/>
-          </a:bodyPr>
-          <a:lstStyle/>
-          <a:p>
-            <a:pPr algn="l">
-              <a:lnSpc>
                 <a:spcPct val="125000"/>
               </a:lnSpc>
               <a:spcBef>
@@ -32237,7 +32277,7 @@
             <a:r>
               <a:rPr sz="600" b="0" i="0">
                 <a:solidFill>
-                  <a:srgbClr val="64748B"/>
+                  <a:srgbClr val="475569"/>
                 </a:solidFill>
                 <a:latin typeface="Segoe UI"/>
                 <a:ea typeface="Microsoft YaHei"/>
@@ -32249,7 +32289,7 @@
       </p:sp>
       <p:sp>
         <p:nvSpPr>
-          <p:cNvPr id="98" name="Rounded Rectangle 97"/>
+          <p:cNvPr id="97" name="Rounded Rectangle 96"/>
           <p:cNvSpPr/>
           <p:nvPr/>
         </p:nvSpPr>
@@ -32264,11 +32304,11 @@
             </a:avLst>
           </a:prstGeom>
           <a:solidFill>
-            <a:srgbClr val="FFFFFF"/>
+            <a:srgbClr val="F5F3FF"/>
           </a:solidFill>
           <a:ln w="15240">
             <a:solidFill>
-              <a:srgbClr val="E2E8F0"/>
+              <a:srgbClr val="DDD6FE"/>
             </a:solidFill>
           </a:ln>
           <a:effectLst>
@@ -32303,59 +32343,13 @@
       </p:sp>
       <p:sp>
         <p:nvSpPr>
-          <p:cNvPr id="99" name="Rounded Rectangle 98"/>
-          <p:cNvSpPr/>
-          <p:nvPr/>
-        </p:nvSpPr>
-        <p:spPr>
-          <a:xfrm>
-            <a:off x="8156447" y="5138928"/>
-            <a:ext cx="41148" cy="786384"/>
-          </a:xfrm>
-          <a:prstGeom prst="roundRect">
-            <a:avLst>
-              <a:gd name="adj" fmla="val 44444"/>
-            </a:avLst>
-          </a:prstGeom>
-          <a:solidFill>
-            <a:srgbClr val="7C3AED"/>
-          </a:solidFill>
-          <a:ln>
-            <a:noFill/>
-          </a:ln>
-          <a:effectLst/>
-        </p:spPr>
-        <p:style>
-          <a:lnRef idx="1">
-            <a:schemeClr val="accent1"/>
-          </a:lnRef>
-          <a:fillRef idx="3">
-            <a:schemeClr val="accent1"/>
-          </a:fillRef>
-          <a:effectRef idx="2">
-            <a:schemeClr val="accent1"/>
-          </a:effectRef>
-          <a:fontRef idx="minor">
-            <a:schemeClr val="lt1"/>
-          </a:fontRef>
-        </p:style>
-        <p:txBody>
-          <a:bodyPr rtlCol="0" anchor="ctr"/>
-          <a:lstStyle/>
-          <a:p>
-            <a:pPr algn="ctr"/>
-          </a:p>
-        </p:txBody>
-      </p:sp>
-      <p:sp>
-        <p:nvSpPr>
-          <p:cNvPr id="100" name="TextBox 99"/>
-          <p:cNvSpPr txBox="1"/>
-          <p:nvPr/>
-        </p:nvSpPr>
-        <p:spPr>
-          <a:xfrm>
-            <a:off x="8302751" y="5175504"/>
+          <p:cNvPr id="98" name="TextBox 97"/>
+          <p:cNvSpPr txBox="1"/>
+          <p:nvPr/>
+        </p:nvSpPr>
+        <p:spPr>
+          <a:xfrm>
+            <a:off x="8302751" y="5193792"/>
             <a:ext cx="3566160" cy="137160"/>
           </a:xfrm>
           <a:prstGeom prst="rect">
@@ -32395,13 +32389,13 @@
       </p:sp>
       <p:sp>
         <p:nvSpPr>
-          <p:cNvPr id="101" name="TextBox 100"/>
-          <p:cNvSpPr txBox="1"/>
-          <p:nvPr/>
-        </p:nvSpPr>
-        <p:spPr>
-          <a:xfrm>
-            <a:off x="8302751" y="5367528"/>
+          <p:cNvPr id="99" name="TextBox 98"/>
+          <p:cNvSpPr txBox="1"/>
+          <p:nvPr/>
+        </p:nvSpPr>
+        <p:spPr>
+          <a:xfrm>
+            <a:off x="8302751" y="5394960"/>
             <a:ext cx="3584448" cy="530352"/>
           </a:xfrm>
           <a:prstGeom prst="rect">
@@ -32429,7 +32423,7 @@
             <a:r>
               <a:rPr sz="600" b="0" i="0">
                 <a:solidFill>
-                  <a:srgbClr val="64748B"/>
+                  <a:srgbClr val="475569"/>
                 </a:solidFill>
                 <a:latin typeface="Segoe UI"/>
                 <a:ea typeface="Microsoft YaHei"/>
@@ -32441,7 +32435,7 @@
       </p:sp>
       <p:sp>
         <p:nvSpPr>
-          <p:cNvPr id="102" name="Rounded Rectangle 101"/>
+          <p:cNvPr id="100" name="Rounded Rectangle 99"/>
           <p:cNvSpPr/>
           <p:nvPr/>
         </p:nvSpPr>
@@ -32489,7 +32483,7 @@
       </p:sp>
       <p:sp>
         <p:nvSpPr>
-          <p:cNvPr id="103" name="TextBox 102"/>
+          <p:cNvPr id="101" name="TextBox 100"/>
           <p:cNvSpPr txBox="1"/>
           <p:nvPr/>
         </p:nvSpPr>

--- a/report/方案B_B2_架构图集.pptx
+++ b/report/方案B_B2_架构图集.pptx
@@ -33045,7 +33045,7 @@
         </p:nvSpPr>
         <p:spPr>
           <a:xfrm>
-            <a:off x="5760720" y="2395728"/>
+            <a:off x="5760720" y="2066543"/>
             <a:ext cx="4160520" cy="237744"/>
           </a:xfrm>
           <a:prstGeom prst="roundRect">
@@ -33093,7 +33093,7 @@
         </p:nvSpPr>
         <p:spPr>
           <a:xfrm>
-            <a:off x="5852159" y="2395728"/>
+            <a:off x="5852159" y="2066543"/>
             <a:ext cx="3977639" cy="237744"/>
           </a:xfrm>
           <a:prstGeom prst="rect">
@@ -33139,7 +33139,7 @@
         </p:nvSpPr>
         <p:spPr>
           <a:xfrm>
-            <a:off x="10149840" y="2395728"/>
+            <a:off x="10149840" y="2066543"/>
             <a:ext cx="1783080" cy="237744"/>
           </a:xfrm>
           <a:prstGeom prst="roundRect">
@@ -33187,7 +33187,7 @@
         </p:nvSpPr>
         <p:spPr>
           <a:xfrm>
-            <a:off x="10241280" y="2395728"/>
+            <a:off x="10241280" y="2066543"/>
             <a:ext cx="1600200" cy="237744"/>
           </a:xfrm>
           <a:prstGeom prst="rect">
@@ -33233,7 +33233,7 @@
         </p:nvSpPr>
         <p:spPr>
           <a:xfrm>
-            <a:off x="2651760" y="3950208"/>
+            <a:off x="2651760" y="3383280"/>
             <a:ext cx="2651760" cy="237744"/>
           </a:xfrm>
           <a:prstGeom prst="roundRect">
@@ -33281,7 +33281,7 @@
         </p:nvSpPr>
         <p:spPr>
           <a:xfrm>
-            <a:off x="2743200" y="3950208"/>
+            <a:off x="2743200" y="3383280"/>
             <a:ext cx="2468879" cy="237744"/>
           </a:xfrm>
           <a:prstGeom prst="rect">
@@ -33327,7 +33327,7 @@
         </p:nvSpPr>
         <p:spPr>
           <a:xfrm>
-            <a:off x="5760720" y="5559552"/>
+            <a:off x="5760720" y="4974336"/>
             <a:ext cx="6172200" cy="237744"/>
           </a:xfrm>
           <a:prstGeom prst="roundRect">
@@ -33375,7 +33375,7 @@
         </p:nvSpPr>
         <p:spPr>
           <a:xfrm>
-            <a:off x="5852159" y="5559552"/>
+            <a:off x="5852159" y="4974336"/>
             <a:ext cx="5989320" cy="237744"/>
           </a:xfrm>
           <a:prstGeom prst="rect">
@@ -33422,11 +33422,11 @@
         <p:spPr>
           <a:xfrm>
             <a:off x="274320" y="914400"/>
-            <a:ext cx="1920240" cy="1280160"/>
+            <a:ext cx="1920240" cy="1115568"/>
           </a:xfrm>
           <a:prstGeom prst="roundRect">
             <a:avLst>
-              <a:gd name="adj" fmla="val 2500"/>
+              <a:gd name="adj" fmla="val 2868"/>
             </a:avLst>
           </a:prstGeom>
           <a:solidFill>
@@ -33568,11 +33568,11 @@
         <p:spPr>
           <a:xfrm>
             <a:off x="285292" y="1152144"/>
-            <a:ext cx="1898294" cy="1024127"/>
+            <a:ext cx="1898294" cy="859536"/>
           </a:xfrm>
           <a:prstGeom prst="roundRect">
             <a:avLst>
-              <a:gd name="adj" fmla="val 1785"/>
+              <a:gd name="adj" fmla="val 2127"/>
             </a:avLst>
           </a:prstGeom>
           <a:solidFill>
@@ -33613,8 +33613,8 @@
         </p:nvSpPr>
         <p:spPr>
           <a:xfrm>
-            <a:off x="365760" y="1179576"/>
-            <a:ext cx="1773936" cy="1005839"/>
+            <a:off x="365760" y="1175004"/>
+            <a:ext cx="1773936" cy="841247"/>
           </a:xfrm>
           <a:prstGeom prst="rect">
             <a:avLst/>
@@ -33895,11 +33895,11 @@
         <p:spPr>
           <a:xfrm>
             <a:off x="2423160" y="1188720"/>
-            <a:ext cx="1691640" cy="676656"/>
+            <a:ext cx="1691640" cy="566928"/>
           </a:xfrm>
           <a:prstGeom prst="roundRect">
             <a:avLst>
-              <a:gd name="adj" fmla="val 4729"/>
+              <a:gd name="adj" fmla="val 5645"/>
             </a:avLst>
           </a:prstGeom>
           <a:solidFill>
@@ -34041,11 +34041,11 @@
         <p:spPr>
           <a:xfrm>
             <a:off x="2434132" y="1426464"/>
-            <a:ext cx="1669694" cy="420623"/>
+            <a:ext cx="1669694" cy="310896"/>
           </a:xfrm>
           <a:prstGeom prst="roundRect">
             <a:avLst>
-              <a:gd name="adj" fmla="val 4347"/>
+              <a:gd name="adj" fmla="val 5882"/>
             </a:avLst>
           </a:prstGeom>
           <a:solidFill>
@@ -34086,8 +34086,8 @@
         </p:nvSpPr>
         <p:spPr>
           <a:xfrm>
-            <a:off x="2514600" y="1453896"/>
-            <a:ext cx="1545336" cy="402336"/>
+            <a:off x="2514600" y="1449324"/>
+            <a:ext cx="1545336" cy="292608"/>
           </a:xfrm>
           <a:prstGeom prst="rect">
             <a:avLst/>
@@ -34196,11 +34196,11 @@
         <p:spPr>
           <a:xfrm>
             <a:off x="4343400" y="914400"/>
-            <a:ext cx="1920240" cy="950976"/>
+            <a:ext cx="1920240" cy="841248"/>
           </a:xfrm>
           <a:prstGeom prst="roundRect">
             <a:avLst>
-              <a:gd name="adj" fmla="val 3365"/>
+              <a:gd name="adj" fmla="val 3804"/>
             </a:avLst>
           </a:prstGeom>
           <a:solidFill>
@@ -34342,11 +34342,11 @@
         <p:spPr>
           <a:xfrm>
             <a:off x="4354372" y="1152144"/>
-            <a:ext cx="1898294" cy="694944"/>
+            <a:ext cx="1898294" cy="585216"/>
           </a:xfrm>
           <a:prstGeom prst="roundRect">
             <a:avLst>
-              <a:gd name="adj" fmla="val 2631"/>
+              <a:gd name="adj" fmla="val 3125"/>
             </a:avLst>
           </a:prstGeom>
           <a:solidFill>
@@ -34387,8 +34387,8 @@
         </p:nvSpPr>
         <p:spPr>
           <a:xfrm>
-            <a:off x="4434840" y="1179576"/>
-            <a:ext cx="1773936" cy="676656"/>
+            <a:off x="4434840" y="1175004"/>
+            <a:ext cx="1773936" cy="566928"/>
           </a:xfrm>
           <a:prstGeom prst="rect">
             <a:avLst/>
@@ -34583,11 +34583,11 @@
         <p:spPr>
           <a:xfrm>
             <a:off x="6492240" y="1188720"/>
-            <a:ext cx="1783080" cy="676656"/>
+            <a:ext cx="1783080" cy="566928"/>
           </a:xfrm>
           <a:prstGeom prst="roundRect">
             <a:avLst>
-              <a:gd name="adj" fmla="val 4729"/>
+              <a:gd name="adj" fmla="val 5645"/>
             </a:avLst>
           </a:prstGeom>
           <a:solidFill>
@@ -34729,11 +34729,11 @@
         <p:spPr>
           <a:xfrm>
             <a:off x="6503212" y="1426464"/>
-            <a:ext cx="1761134" cy="420623"/>
+            <a:ext cx="1761134" cy="310896"/>
           </a:xfrm>
           <a:prstGeom prst="roundRect">
             <a:avLst>
-              <a:gd name="adj" fmla="val 4347"/>
+              <a:gd name="adj" fmla="val 5882"/>
             </a:avLst>
           </a:prstGeom>
           <a:solidFill>
@@ -34774,8 +34774,8 @@
         </p:nvSpPr>
         <p:spPr>
           <a:xfrm>
-            <a:off x="6583679" y="1453896"/>
-            <a:ext cx="1636776" cy="402336"/>
+            <a:off x="6583679" y="1449324"/>
+            <a:ext cx="1636776" cy="292608"/>
           </a:xfrm>
           <a:prstGeom prst="rect">
             <a:avLst/>
@@ -34884,11 +34884,11 @@
         <p:spPr>
           <a:xfrm>
             <a:off x="8503920" y="914400"/>
-            <a:ext cx="2011680" cy="950976"/>
+            <a:ext cx="2011680" cy="841248"/>
           </a:xfrm>
           <a:prstGeom prst="roundRect">
             <a:avLst>
-              <a:gd name="adj" fmla="val 3365"/>
+              <a:gd name="adj" fmla="val 3804"/>
             </a:avLst>
           </a:prstGeom>
           <a:solidFill>
@@ -35030,11 +35030,11 @@
         <p:spPr>
           <a:xfrm>
             <a:off x="8514892" y="1152144"/>
-            <a:ext cx="1989734" cy="694944"/>
+            <a:ext cx="1989734" cy="585216"/>
           </a:xfrm>
           <a:prstGeom prst="roundRect">
             <a:avLst>
-              <a:gd name="adj" fmla="val 2631"/>
+              <a:gd name="adj" fmla="val 3125"/>
             </a:avLst>
           </a:prstGeom>
           <a:solidFill>
@@ -35075,8 +35075,8 @@
         </p:nvSpPr>
         <p:spPr>
           <a:xfrm>
-            <a:off x="8595360" y="1179576"/>
-            <a:ext cx="1865376" cy="676656"/>
+            <a:off x="8595360" y="1175004"/>
+            <a:ext cx="1865376" cy="566928"/>
           </a:xfrm>
           <a:prstGeom prst="rect">
             <a:avLst/>
@@ -35270,12 +35270,12 @@
         </p:nvSpPr>
         <p:spPr>
           <a:xfrm>
-            <a:off x="274320" y="2651760"/>
-            <a:ext cx="1920240" cy="950976"/>
+            <a:off x="274320" y="2286000"/>
+            <a:ext cx="1920240" cy="841248"/>
           </a:xfrm>
           <a:prstGeom prst="roundRect">
             <a:avLst>
-              <a:gd name="adj" fmla="val 3365"/>
+              <a:gd name="adj" fmla="val 3804"/>
             </a:avLst>
           </a:prstGeom>
           <a:solidFill>
@@ -35324,7 +35324,7 @@
         </p:nvSpPr>
         <p:spPr>
           <a:xfrm>
-            <a:off x="285292" y="2662732"/>
+            <a:off x="285292" y="2296972"/>
             <a:ext cx="1898294" cy="214884"/>
           </a:xfrm>
           <a:prstGeom prst="roundRect">
@@ -35370,7 +35370,7 @@
         </p:nvSpPr>
         <p:spPr>
           <a:xfrm>
-            <a:off x="310896" y="2683764"/>
+            <a:off x="310896" y="2318004"/>
             <a:ext cx="1847088" cy="173736"/>
           </a:xfrm>
           <a:prstGeom prst="rect">
@@ -35416,12 +35416,12 @@
         </p:nvSpPr>
         <p:spPr>
           <a:xfrm>
-            <a:off x="285292" y="2889504"/>
-            <a:ext cx="1898294" cy="694944"/>
+            <a:off x="285292" y="2523744"/>
+            <a:ext cx="1898294" cy="585216"/>
           </a:xfrm>
           <a:prstGeom prst="roundRect">
             <a:avLst>
-              <a:gd name="adj" fmla="val 2631"/>
+              <a:gd name="adj" fmla="val 3125"/>
             </a:avLst>
           </a:prstGeom>
           <a:solidFill>
@@ -35462,8 +35462,8 @@
         </p:nvSpPr>
         <p:spPr>
           <a:xfrm>
-            <a:off x="365760" y="2916936"/>
-            <a:ext cx="1773936" cy="676656"/>
+            <a:off x="365760" y="2546604"/>
+            <a:ext cx="1773936" cy="566928"/>
           </a:xfrm>
           <a:prstGeom prst="rect">
             <a:avLst/>
@@ -35657,12 +35657,12 @@
         </p:nvSpPr>
         <p:spPr>
           <a:xfrm>
-            <a:off x="2423160" y="2798064"/>
-            <a:ext cx="1691640" cy="676656"/>
+            <a:off x="2423160" y="2432304"/>
+            <a:ext cx="1691640" cy="566928"/>
           </a:xfrm>
           <a:prstGeom prst="roundRect">
             <a:avLst>
-              <a:gd name="adj" fmla="val 4729"/>
+              <a:gd name="adj" fmla="val 5645"/>
             </a:avLst>
           </a:prstGeom>
           <a:solidFill>
@@ -35711,7 +35711,7 @@
         </p:nvSpPr>
         <p:spPr>
           <a:xfrm>
-            <a:off x="2434132" y="2809036"/>
+            <a:off x="2434132" y="2443276"/>
             <a:ext cx="1669694" cy="214884"/>
           </a:xfrm>
           <a:prstGeom prst="roundRect">
@@ -35757,7 +35757,7 @@
         </p:nvSpPr>
         <p:spPr>
           <a:xfrm>
-            <a:off x="2459736" y="2830068"/>
+            <a:off x="2459736" y="2464308"/>
             <a:ext cx="1618488" cy="173736"/>
           </a:xfrm>
           <a:prstGeom prst="rect">
@@ -35803,12 +35803,12 @@
         </p:nvSpPr>
         <p:spPr>
           <a:xfrm>
-            <a:off x="2434132" y="3035808"/>
-            <a:ext cx="1669694" cy="420623"/>
+            <a:off x="2434132" y="2670048"/>
+            <a:ext cx="1669694" cy="310896"/>
           </a:xfrm>
           <a:prstGeom prst="roundRect">
             <a:avLst>
-              <a:gd name="adj" fmla="val 4347"/>
+              <a:gd name="adj" fmla="val 5882"/>
             </a:avLst>
           </a:prstGeom>
           <a:solidFill>
@@ -35849,8 +35849,8 @@
         </p:nvSpPr>
         <p:spPr>
           <a:xfrm>
-            <a:off x="2514600" y="3063240"/>
-            <a:ext cx="1545336" cy="402336"/>
+            <a:off x="2514600" y="2692908"/>
+            <a:ext cx="1545336" cy="292608"/>
           </a:xfrm>
           <a:prstGeom prst="rect">
             <a:avLst/>
@@ -35958,12 +35958,12 @@
         </p:nvSpPr>
         <p:spPr>
           <a:xfrm>
-            <a:off x="2651760" y="4206240"/>
-            <a:ext cx="2651760" cy="1280160"/>
+            <a:off x="2651760" y="3675887"/>
+            <a:ext cx="2651760" cy="1115568"/>
           </a:xfrm>
           <a:prstGeom prst="roundRect">
             <a:avLst>
-              <a:gd name="adj" fmla="val 2500"/>
+              <a:gd name="adj" fmla="val 2868"/>
             </a:avLst>
           </a:prstGeom>
           <a:solidFill>
@@ -36012,7 +36012,7 @@
         </p:nvSpPr>
         <p:spPr>
           <a:xfrm>
-            <a:off x="2662732" y="4217212"/>
+            <a:off x="2662732" y="3686860"/>
             <a:ext cx="2629814" cy="214884"/>
           </a:xfrm>
           <a:prstGeom prst="roundRect">
@@ -36058,7 +36058,7 @@
         </p:nvSpPr>
         <p:spPr>
           <a:xfrm>
-            <a:off x="2688336" y="4238244"/>
+            <a:off x="2688336" y="3707891"/>
             <a:ext cx="2578608" cy="173736"/>
           </a:xfrm>
           <a:prstGeom prst="rect">
@@ -36104,12 +36104,12 @@
         </p:nvSpPr>
         <p:spPr>
           <a:xfrm>
-            <a:off x="2662732" y="4443983"/>
-            <a:ext cx="2629814" cy="1024127"/>
+            <a:off x="2662732" y="3913631"/>
+            <a:ext cx="2629814" cy="859536"/>
           </a:xfrm>
           <a:prstGeom prst="roundRect">
             <a:avLst>
-              <a:gd name="adj" fmla="val 1785"/>
+              <a:gd name="adj" fmla="val 2127"/>
             </a:avLst>
           </a:prstGeom>
           <a:solidFill>
@@ -36150,8 +36150,8 @@
         </p:nvSpPr>
         <p:spPr>
           <a:xfrm>
-            <a:off x="2743200" y="4471416"/>
-            <a:ext cx="2505456" cy="1005839"/>
+            <a:off x="2743200" y="3936491"/>
+            <a:ext cx="2505456" cy="841247"/>
           </a:xfrm>
           <a:prstGeom prst="rect">
             <a:avLst/>
@@ -36431,12 +36431,12 @@
         </p:nvSpPr>
         <p:spPr>
           <a:xfrm>
-            <a:off x="2926080" y="5760720"/>
-            <a:ext cx="1645920" cy="676656"/>
+            <a:off x="2926080" y="5029200"/>
+            <a:ext cx="1645920" cy="566928"/>
           </a:xfrm>
           <a:prstGeom prst="roundRect">
             <a:avLst>
-              <a:gd name="adj" fmla="val 4729"/>
+              <a:gd name="adj" fmla="val 5645"/>
             </a:avLst>
           </a:prstGeom>
           <a:solidFill>
@@ -36485,7 +36485,7 @@
         </p:nvSpPr>
         <p:spPr>
           <a:xfrm>
-            <a:off x="2937052" y="5771692"/>
+            <a:off x="2937052" y="5040172"/>
             <a:ext cx="1623974" cy="214884"/>
           </a:xfrm>
           <a:prstGeom prst="roundRect">
@@ -36531,7 +36531,7 @@
         </p:nvSpPr>
         <p:spPr>
           <a:xfrm>
-            <a:off x="2962656" y="5792724"/>
+            <a:off x="2962656" y="5061204"/>
             <a:ext cx="1572768" cy="173736"/>
           </a:xfrm>
           <a:prstGeom prst="rect">
@@ -36577,12 +36577,12 @@
         </p:nvSpPr>
         <p:spPr>
           <a:xfrm>
-            <a:off x="2937052" y="5998464"/>
-            <a:ext cx="1623974" cy="420623"/>
+            <a:off x="2937052" y="5266944"/>
+            <a:ext cx="1623974" cy="310896"/>
           </a:xfrm>
           <a:prstGeom prst="roundRect">
             <a:avLst>
-              <a:gd name="adj" fmla="val 4347"/>
+              <a:gd name="adj" fmla="val 5882"/>
             </a:avLst>
           </a:prstGeom>
           <a:solidFill>
@@ -36623,8 +36623,8 @@
         </p:nvSpPr>
         <p:spPr>
           <a:xfrm>
-            <a:off x="3017520" y="6025896"/>
-            <a:ext cx="1499616" cy="402336"/>
+            <a:off x="3017520" y="5289804"/>
+            <a:ext cx="1499616" cy="292608"/>
           </a:xfrm>
           <a:prstGeom prst="rect">
             <a:avLst/>
@@ -36732,12 +36732,12 @@
         </p:nvSpPr>
         <p:spPr>
           <a:xfrm>
-            <a:off x="5760720" y="2651760"/>
-            <a:ext cx="1965960" cy="1115568"/>
+            <a:off x="5760720" y="2359152"/>
+            <a:ext cx="1965960" cy="978408"/>
           </a:xfrm>
           <a:prstGeom prst="roundRect">
             <a:avLst>
-              <a:gd name="adj" fmla="val 2868"/>
+              <a:gd name="adj" fmla="val 3271"/>
             </a:avLst>
           </a:prstGeom>
           <a:solidFill>
@@ -36786,7 +36786,7 @@
         </p:nvSpPr>
         <p:spPr>
           <a:xfrm>
-            <a:off x="5771692" y="2662732"/>
+            <a:off x="5771692" y="2370124"/>
             <a:ext cx="1944014" cy="214884"/>
           </a:xfrm>
           <a:prstGeom prst="roundRect">
@@ -36832,7 +36832,7 @@
         </p:nvSpPr>
         <p:spPr>
           <a:xfrm>
-            <a:off x="5797296" y="2683764"/>
+            <a:off x="5797296" y="2391156"/>
             <a:ext cx="1892807" cy="173736"/>
           </a:xfrm>
           <a:prstGeom prst="rect">
@@ -36878,12 +36878,12 @@
         </p:nvSpPr>
         <p:spPr>
           <a:xfrm>
-            <a:off x="5771692" y="2889504"/>
-            <a:ext cx="1944014" cy="859536"/>
+            <a:off x="5771692" y="2596896"/>
+            <a:ext cx="1944014" cy="722376"/>
           </a:xfrm>
           <a:prstGeom prst="roundRect">
             <a:avLst>
-              <a:gd name="adj" fmla="val 2127"/>
+              <a:gd name="adj" fmla="val 2531"/>
             </a:avLst>
           </a:prstGeom>
           <a:solidFill>
@@ -36924,8 +36924,8 @@
         </p:nvSpPr>
         <p:spPr>
           <a:xfrm>
-            <a:off x="5852159" y="2916936"/>
-            <a:ext cx="1819656" cy="841247"/>
+            <a:off x="5852159" y="2619756"/>
+            <a:ext cx="1819656" cy="704088"/>
           </a:xfrm>
           <a:prstGeom prst="rect">
             <a:avLst/>
@@ -37162,12 +37162,12 @@
         </p:nvSpPr>
         <p:spPr>
           <a:xfrm>
-            <a:off x="7955279" y="2651760"/>
-            <a:ext cx="1965960" cy="1115568"/>
+            <a:off x="7955279" y="2359152"/>
+            <a:ext cx="1965960" cy="978408"/>
           </a:xfrm>
           <a:prstGeom prst="roundRect">
             <a:avLst>
-              <a:gd name="adj" fmla="val 2868"/>
+              <a:gd name="adj" fmla="val 3271"/>
             </a:avLst>
           </a:prstGeom>
           <a:solidFill>
@@ -37216,7 +37216,7 @@
         </p:nvSpPr>
         <p:spPr>
           <a:xfrm>
-            <a:off x="7966252" y="2662732"/>
+            <a:off x="7966252" y="2370124"/>
             <a:ext cx="1944014" cy="214884"/>
           </a:xfrm>
           <a:prstGeom prst="roundRect">
@@ -37262,7 +37262,7 @@
         </p:nvSpPr>
         <p:spPr>
           <a:xfrm>
-            <a:off x="7991855" y="2683764"/>
+            <a:off x="7991855" y="2391156"/>
             <a:ext cx="1892807" cy="173736"/>
           </a:xfrm>
           <a:prstGeom prst="rect">
@@ -37308,12 +37308,12 @@
         </p:nvSpPr>
         <p:spPr>
           <a:xfrm>
-            <a:off x="7966252" y="2889504"/>
-            <a:ext cx="1944014" cy="859536"/>
+            <a:off x="7966252" y="2596896"/>
+            <a:ext cx="1944014" cy="722376"/>
           </a:xfrm>
           <a:prstGeom prst="roundRect">
             <a:avLst>
-              <a:gd name="adj" fmla="val 2127"/>
+              <a:gd name="adj" fmla="val 2531"/>
             </a:avLst>
           </a:prstGeom>
           <a:solidFill>
@@ -37354,8 +37354,8 @@
         </p:nvSpPr>
         <p:spPr>
           <a:xfrm>
-            <a:off x="8046719" y="2916936"/>
-            <a:ext cx="1819656" cy="841247"/>
+            <a:off x="8046719" y="2619756"/>
+            <a:ext cx="1819656" cy="704088"/>
           </a:xfrm>
           <a:prstGeom prst="rect">
             <a:avLst/>
@@ -37592,12 +37592,12 @@
         </p:nvSpPr>
         <p:spPr>
           <a:xfrm>
-            <a:off x="5760720" y="4206240"/>
-            <a:ext cx="1965960" cy="950976"/>
+            <a:off x="5760720" y="3584448"/>
+            <a:ext cx="1965960" cy="841248"/>
           </a:xfrm>
           <a:prstGeom prst="roundRect">
             <a:avLst>
-              <a:gd name="adj" fmla="val 3365"/>
+              <a:gd name="adj" fmla="val 3804"/>
             </a:avLst>
           </a:prstGeom>
           <a:solidFill>
@@ -37646,7 +37646,7 @@
         </p:nvSpPr>
         <p:spPr>
           <a:xfrm>
-            <a:off x="5771692" y="4217212"/>
+            <a:off x="5771692" y="3595420"/>
             <a:ext cx="1944014" cy="214884"/>
           </a:xfrm>
           <a:prstGeom prst="roundRect">
@@ -37692,7 +37692,7 @@
         </p:nvSpPr>
         <p:spPr>
           <a:xfrm>
-            <a:off x="5797296" y="4238244"/>
+            <a:off x="5797296" y="3616452"/>
             <a:ext cx="1892807" cy="173736"/>
           </a:xfrm>
           <a:prstGeom prst="rect">
@@ -37738,12 +37738,12 @@
         </p:nvSpPr>
         <p:spPr>
           <a:xfrm>
-            <a:off x="5771692" y="4443983"/>
-            <a:ext cx="1944014" cy="694944"/>
+            <a:off x="5771692" y="3822191"/>
+            <a:ext cx="1944014" cy="585216"/>
           </a:xfrm>
           <a:prstGeom prst="roundRect">
             <a:avLst>
-              <a:gd name="adj" fmla="val 2631"/>
+              <a:gd name="adj" fmla="val 3125"/>
             </a:avLst>
           </a:prstGeom>
           <a:solidFill>
@@ -37784,8 +37784,8 @@
         </p:nvSpPr>
         <p:spPr>
           <a:xfrm>
-            <a:off x="5852159" y="4471416"/>
-            <a:ext cx="1819656" cy="676656"/>
+            <a:off x="5852159" y="3845052"/>
+            <a:ext cx="1819656" cy="566928"/>
           </a:xfrm>
           <a:prstGeom prst="rect">
             <a:avLst/>
@@ -37979,12 +37979,12 @@
         </p:nvSpPr>
         <p:spPr>
           <a:xfrm>
-            <a:off x="7955279" y="4206240"/>
-            <a:ext cx="1965960" cy="950976"/>
+            <a:off x="7955279" y="3584448"/>
+            <a:ext cx="1965960" cy="841248"/>
           </a:xfrm>
           <a:prstGeom prst="roundRect">
             <a:avLst>
-              <a:gd name="adj" fmla="val 3365"/>
+              <a:gd name="adj" fmla="val 3804"/>
             </a:avLst>
           </a:prstGeom>
           <a:solidFill>
@@ -38033,7 +38033,7 @@
         </p:nvSpPr>
         <p:spPr>
           <a:xfrm>
-            <a:off x="7966252" y="4217212"/>
+            <a:off x="7966252" y="3595420"/>
             <a:ext cx="1944014" cy="214884"/>
           </a:xfrm>
           <a:prstGeom prst="roundRect">
@@ -38079,7 +38079,7 @@
         </p:nvSpPr>
         <p:spPr>
           <a:xfrm>
-            <a:off x="7991855" y="4238244"/>
+            <a:off x="7991855" y="3616452"/>
             <a:ext cx="1892807" cy="173736"/>
           </a:xfrm>
           <a:prstGeom prst="rect">
@@ -38125,12 +38125,12 @@
         </p:nvSpPr>
         <p:spPr>
           <a:xfrm>
-            <a:off x="7966252" y="4443983"/>
-            <a:ext cx="1944014" cy="694944"/>
+            <a:off x="7966252" y="3822191"/>
+            <a:ext cx="1944014" cy="585216"/>
           </a:xfrm>
           <a:prstGeom prst="roundRect">
             <a:avLst>
-              <a:gd name="adj" fmla="val 2631"/>
+              <a:gd name="adj" fmla="val 3125"/>
             </a:avLst>
           </a:prstGeom>
           <a:solidFill>
@@ -38171,8 +38171,8 @@
         </p:nvSpPr>
         <p:spPr>
           <a:xfrm>
-            <a:off x="8046719" y="4471416"/>
-            <a:ext cx="1819656" cy="676656"/>
+            <a:off x="8046719" y="3845052"/>
+            <a:ext cx="1819656" cy="566928"/>
           </a:xfrm>
           <a:prstGeom prst="rect">
             <a:avLst/>
@@ -38366,12 +38366,12 @@
         </p:nvSpPr>
         <p:spPr>
           <a:xfrm>
-            <a:off x="10149840" y="2651760"/>
-            <a:ext cx="1783080" cy="950976"/>
+            <a:off x="10149840" y="2359152"/>
+            <a:ext cx="1783080" cy="841248"/>
           </a:xfrm>
           <a:prstGeom prst="roundRect">
             <a:avLst>
-              <a:gd name="adj" fmla="val 3365"/>
+              <a:gd name="adj" fmla="val 3804"/>
             </a:avLst>
           </a:prstGeom>
           <a:solidFill>
@@ -38420,7 +38420,7 @@
         </p:nvSpPr>
         <p:spPr>
           <a:xfrm>
-            <a:off x="10160812" y="2662732"/>
+            <a:off x="10160812" y="2370124"/>
             <a:ext cx="1761134" cy="214884"/>
           </a:xfrm>
           <a:prstGeom prst="roundRect">
@@ -38466,7 +38466,7 @@
         </p:nvSpPr>
         <p:spPr>
           <a:xfrm>
-            <a:off x="10186415" y="2683764"/>
+            <a:off x="10186415" y="2391156"/>
             <a:ext cx="1709928" cy="173736"/>
           </a:xfrm>
           <a:prstGeom prst="rect">
@@ -38512,12 +38512,12 @@
         </p:nvSpPr>
         <p:spPr>
           <a:xfrm>
-            <a:off x="10160812" y="2889504"/>
-            <a:ext cx="1761134" cy="694944"/>
+            <a:off x="10160812" y="2596896"/>
+            <a:ext cx="1761134" cy="585216"/>
           </a:xfrm>
           <a:prstGeom prst="roundRect">
             <a:avLst>
-              <a:gd name="adj" fmla="val 2631"/>
+              <a:gd name="adj" fmla="val 3125"/>
             </a:avLst>
           </a:prstGeom>
           <a:solidFill>
@@ -38558,8 +38558,8 @@
         </p:nvSpPr>
         <p:spPr>
           <a:xfrm>
-            <a:off x="10241280" y="2916936"/>
-            <a:ext cx="1636776" cy="676656"/>
+            <a:off x="10241280" y="2619756"/>
+            <a:ext cx="1636776" cy="566928"/>
           </a:xfrm>
           <a:prstGeom prst="rect">
             <a:avLst/>
@@ -38753,12 +38753,12 @@
         </p:nvSpPr>
         <p:spPr>
           <a:xfrm>
-            <a:off x="10149840" y="4206240"/>
-            <a:ext cx="1783080" cy="950976"/>
+            <a:off x="10149840" y="3584448"/>
+            <a:ext cx="1783080" cy="841248"/>
           </a:xfrm>
           <a:prstGeom prst="roundRect">
             <a:avLst>
-              <a:gd name="adj" fmla="val 3365"/>
+              <a:gd name="adj" fmla="val 3804"/>
             </a:avLst>
           </a:prstGeom>
           <a:solidFill>
@@ -38807,7 +38807,7 @@
         </p:nvSpPr>
         <p:spPr>
           <a:xfrm>
-            <a:off x="10160812" y="4217212"/>
+            <a:off x="10160812" y="3595420"/>
             <a:ext cx="1761134" cy="214884"/>
           </a:xfrm>
           <a:prstGeom prst="roundRect">
@@ -38853,7 +38853,7 @@
         </p:nvSpPr>
         <p:spPr>
           <a:xfrm>
-            <a:off x="10186415" y="4238244"/>
+            <a:off x="10186415" y="3616452"/>
             <a:ext cx="1709928" cy="173736"/>
           </a:xfrm>
           <a:prstGeom prst="rect">
@@ -38899,12 +38899,12 @@
         </p:nvSpPr>
         <p:spPr>
           <a:xfrm>
-            <a:off x="10160812" y="4443983"/>
-            <a:ext cx="1761134" cy="694944"/>
+            <a:off x="10160812" y="3822191"/>
+            <a:ext cx="1761134" cy="585216"/>
           </a:xfrm>
           <a:prstGeom prst="roundRect">
             <a:avLst>
-              <a:gd name="adj" fmla="val 2631"/>
+              <a:gd name="adj" fmla="val 3125"/>
             </a:avLst>
           </a:prstGeom>
           <a:solidFill>
@@ -38945,8 +38945,8 @@
         </p:nvSpPr>
         <p:spPr>
           <a:xfrm>
-            <a:off x="10241280" y="4471416"/>
-            <a:ext cx="1636776" cy="676656"/>
+            <a:off x="10241280" y="3845052"/>
+            <a:ext cx="1636776" cy="566928"/>
           </a:xfrm>
           <a:prstGeom prst="rect">
             <a:avLst/>
@@ -39140,12 +39140,12 @@
         </p:nvSpPr>
         <p:spPr>
           <a:xfrm>
-            <a:off x="5760720" y="5806440"/>
-            <a:ext cx="1965960" cy="877824"/>
+            <a:off x="5760720" y="5230368"/>
+            <a:ext cx="1965960" cy="841248"/>
           </a:xfrm>
           <a:prstGeom prst="roundRect">
             <a:avLst>
-              <a:gd name="adj" fmla="val 3645"/>
+              <a:gd name="adj" fmla="val 3804"/>
             </a:avLst>
           </a:prstGeom>
           <a:solidFill>
@@ -39194,7 +39194,7 @@
         </p:nvSpPr>
         <p:spPr>
           <a:xfrm>
-            <a:off x="5771692" y="5817412"/>
+            <a:off x="5771692" y="5241340"/>
             <a:ext cx="1944014" cy="214884"/>
           </a:xfrm>
           <a:prstGeom prst="roundRect">
@@ -39240,7 +39240,7 @@
         </p:nvSpPr>
         <p:spPr>
           <a:xfrm>
-            <a:off x="5797296" y="5838444"/>
+            <a:off x="5797296" y="5262372"/>
             <a:ext cx="1892807" cy="173736"/>
           </a:xfrm>
           <a:prstGeom prst="rect">
@@ -39286,12 +39286,12 @@
         </p:nvSpPr>
         <p:spPr>
           <a:xfrm>
-            <a:off x="5771692" y="6044183"/>
-            <a:ext cx="1944014" cy="621792"/>
+            <a:off x="5771692" y="5468112"/>
+            <a:ext cx="1944014" cy="585216"/>
           </a:xfrm>
           <a:prstGeom prst="roundRect">
             <a:avLst>
-              <a:gd name="adj" fmla="val 2941"/>
+              <a:gd name="adj" fmla="val 3125"/>
             </a:avLst>
           </a:prstGeom>
           <a:solidFill>
@@ -39332,8 +39332,8 @@
         </p:nvSpPr>
         <p:spPr>
           <a:xfrm>
-            <a:off x="5852159" y="6071616"/>
-            <a:ext cx="1819656" cy="603503"/>
+            <a:off x="5852159" y="5490972"/>
+            <a:ext cx="1819656" cy="566928"/>
           </a:xfrm>
           <a:prstGeom prst="rect">
             <a:avLst/>
@@ -39527,12 +39527,12 @@
         </p:nvSpPr>
         <p:spPr>
           <a:xfrm>
-            <a:off x="7955279" y="5806440"/>
-            <a:ext cx="1965960" cy="731520"/>
+            <a:off x="7955279" y="5230368"/>
+            <a:ext cx="1965960" cy="704088"/>
           </a:xfrm>
           <a:prstGeom prst="roundRect">
             <a:avLst>
-              <a:gd name="adj" fmla="val 4375"/>
+              <a:gd name="adj" fmla="val 4545"/>
             </a:avLst>
           </a:prstGeom>
           <a:solidFill>
@@ -39581,7 +39581,7 @@
         </p:nvSpPr>
         <p:spPr>
           <a:xfrm>
-            <a:off x="7966252" y="5817412"/>
+            <a:off x="7966252" y="5241340"/>
             <a:ext cx="1944014" cy="214884"/>
           </a:xfrm>
           <a:prstGeom prst="roundRect">
@@ -39627,7 +39627,7 @@
         </p:nvSpPr>
         <p:spPr>
           <a:xfrm>
-            <a:off x="7991855" y="5838444"/>
+            <a:off x="7991855" y="5262372"/>
             <a:ext cx="1892807" cy="173736"/>
           </a:xfrm>
           <a:prstGeom prst="rect">
@@ -39673,12 +39673,12 @@
         </p:nvSpPr>
         <p:spPr>
           <a:xfrm>
-            <a:off x="7966252" y="6044183"/>
-            <a:ext cx="1944014" cy="475488"/>
+            <a:off x="7966252" y="5468112"/>
+            <a:ext cx="1944014" cy="448056"/>
           </a:xfrm>
           <a:prstGeom prst="roundRect">
             <a:avLst>
-              <a:gd name="adj" fmla="val 3846"/>
+              <a:gd name="adj" fmla="val 4081"/>
             </a:avLst>
           </a:prstGeom>
           <a:solidFill>
@@ -39719,8 +39719,8 @@
         </p:nvSpPr>
         <p:spPr>
           <a:xfrm>
-            <a:off x="8046719" y="6071616"/>
-            <a:ext cx="1819656" cy="457200"/>
+            <a:off x="8046719" y="5490972"/>
+            <a:ext cx="1819656" cy="429768"/>
           </a:xfrm>
           <a:prstGeom prst="rect">
             <a:avLst/>
@@ -39871,12 +39871,12 @@
         </p:nvSpPr>
         <p:spPr>
           <a:xfrm>
-            <a:off x="10149840" y="5806440"/>
-            <a:ext cx="1783080" cy="731520"/>
+            <a:off x="10149840" y="5230368"/>
+            <a:ext cx="1783080" cy="704088"/>
           </a:xfrm>
           <a:prstGeom prst="roundRect">
             <a:avLst>
-              <a:gd name="adj" fmla="val 4375"/>
+              <a:gd name="adj" fmla="val 4545"/>
             </a:avLst>
           </a:prstGeom>
           <a:solidFill>
@@ -39925,7 +39925,7 @@
         </p:nvSpPr>
         <p:spPr>
           <a:xfrm>
-            <a:off x="10160812" y="5817412"/>
+            <a:off x="10160812" y="5241340"/>
             <a:ext cx="1761134" cy="214884"/>
           </a:xfrm>
           <a:prstGeom prst="roundRect">
@@ -39971,7 +39971,7 @@
         </p:nvSpPr>
         <p:spPr>
           <a:xfrm>
-            <a:off x="10186415" y="5838444"/>
+            <a:off x="10186415" y="5262372"/>
             <a:ext cx="1709928" cy="173736"/>
           </a:xfrm>
           <a:prstGeom prst="rect">
@@ -40017,12 +40017,12 @@
         </p:nvSpPr>
         <p:spPr>
           <a:xfrm>
-            <a:off x="10160812" y="6044183"/>
-            <a:ext cx="1761134" cy="475488"/>
+            <a:off x="10160812" y="5468112"/>
+            <a:ext cx="1761134" cy="448056"/>
           </a:xfrm>
           <a:prstGeom prst="roundRect">
             <a:avLst>
-              <a:gd name="adj" fmla="val 3846"/>
+              <a:gd name="adj" fmla="val 4081"/>
             </a:avLst>
           </a:prstGeom>
           <a:solidFill>
@@ -40063,8 +40063,8 @@
         </p:nvSpPr>
         <p:spPr>
           <a:xfrm>
-            <a:off x="10241280" y="6071616"/>
-            <a:ext cx="1636776" cy="457200"/>
+            <a:off x="10241280" y="5490972"/>
+            <a:ext cx="1636776" cy="429768"/>
           </a:xfrm>
           <a:prstGeom prst="rect">
             <a:avLst/>
@@ -40215,7 +40215,7 @@
         </p:nvCxnSpPr>
         <p:spPr>
           <a:xfrm>
-            <a:off x="2194560" y="1298448"/>
+            <a:off x="2194560" y="1417320"/>
             <a:ext cx="228600" cy="0"/>
           </a:xfrm>
           <a:prstGeom prst="line">
@@ -40238,7 +40238,7 @@
         </p:nvSpPr>
         <p:spPr>
           <a:xfrm>
-            <a:off x="2276856" y="1357884"/>
+            <a:off x="2276856" y="1476756"/>
             <a:ext cx="109728" cy="118872"/>
           </a:xfrm>
           <a:prstGeom prst="rect">
@@ -40284,7 +40284,7 @@
         </p:nvSpPr>
         <p:spPr>
           <a:xfrm>
-            <a:off x="2231136" y="1120140"/>
+            <a:off x="2231136" y="1239012"/>
             <a:ext cx="109728" cy="118872"/>
           </a:xfrm>
           <a:prstGeom prst="rect">
@@ -40330,7 +40330,7 @@
         </p:nvCxnSpPr>
         <p:spPr>
           <a:xfrm flipH="1">
-            <a:off x="4114800" y="1298448"/>
+            <a:off x="4114800" y="1417320"/>
             <a:ext cx="228600" cy="0"/>
           </a:xfrm>
           <a:prstGeom prst="line">
@@ -40353,7 +40353,7 @@
         </p:nvSpPr>
         <p:spPr>
           <a:xfrm>
-            <a:off x="4151376" y="1120140"/>
+            <a:off x="4151376" y="1239012"/>
             <a:ext cx="109728" cy="118872"/>
           </a:xfrm>
           <a:prstGeom prst="rect">
@@ -40399,7 +40399,7 @@
         </p:nvSpPr>
         <p:spPr>
           <a:xfrm>
-            <a:off x="4197096" y="1357884"/>
+            <a:off x="4197096" y="1476756"/>
             <a:ext cx="109728" cy="118872"/>
           </a:xfrm>
           <a:prstGeom prst="rect">
@@ -40445,7 +40445,7 @@
         </p:nvCxnSpPr>
         <p:spPr>
           <a:xfrm>
-            <a:off x="6263640" y="1298448"/>
+            <a:off x="6263640" y="1417320"/>
             <a:ext cx="228600" cy="0"/>
           </a:xfrm>
           <a:prstGeom prst="line">
@@ -40468,7 +40468,7 @@
         </p:nvSpPr>
         <p:spPr>
           <a:xfrm>
-            <a:off x="6345936" y="1357884"/>
+            <a:off x="6345936" y="1476756"/>
             <a:ext cx="109728" cy="118872"/>
           </a:xfrm>
           <a:prstGeom prst="rect">
@@ -40514,7 +40514,7 @@
         </p:nvSpPr>
         <p:spPr>
           <a:xfrm>
-            <a:off x="6300216" y="1120140"/>
+            <a:off x="6300216" y="1239012"/>
             <a:ext cx="109728" cy="118872"/>
           </a:xfrm>
           <a:prstGeom prst="rect">
@@ -40560,7 +40560,7 @@
         </p:nvCxnSpPr>
         <p:spPr>
           <a:xfrm flipH="1">
-            <a:off x="8275320" y="1298448"/>
+            <a:off x="8275320" y="1417320"/>
             <a:ext cx="228600" cy="0"/>
           </a:xfrm>
           <a:prstGeom prst="line">
@@ -40583,7 +40583,7 @@
         </p:nvSpPr>
         <p:spPr>
           <a:xfrm>
-            <a:off x="8311896" y="1120140"/>
+            <a:off x="8311896" y="1239012"/>
             <a:ext cx="109728" cy="118872"/>
           </a:xfrm>
           <a:prstGeom prst="rect">
@@ -40629,7 +40629,7 @@
         </p:nvSpPr>
         <p:spPr>
           <a:xfrm>
-            <a:off x="8357616" y="1357884"/>
+            <a:off x="8357616" y="1476756"/>
             <a:ext cx="109728" cy="118872"/>
           </a:xfrm>
           <a:prstGeom prst="rect">
@@ -40675,7 +40675,7 @@
         </p:nvCxnSpPr>
         <p:spPr>
           <a:xfrm>
-            <a:off x="2194560" y="3136392"/>
+            <a:off x="2194560" y="2743200"/>
             <a:ext cx="228600" cy="0"/>
           </a:xfrm>
           <a:prstGeom prst="line">
@@ -40698,7 +40698,7 @@
         </p:nvSpPr>
         <p:spPr>
           <a:xfrm>
-            <a:off x="2276856" y="3195828"/>
+            <a:off x="2276856" y="2802636"/>
             <a:ext cx="109728" cy="118872"/>
           </a:xfrm>
           <a:prstGeom prst="rect">
@@ -40744,7 +40744,7 @@
         </p:nvSpPr>
         <p:spPr>
           <a:xfrm>
-            <a:off x="2231136" y="2958084"/>
+            <a:off x="2231136" y="2564892"/>
             <a:ext cx="109728" cy="118872"/>
           </a:xfrm>
           <a:prstGeom prst="rect">
@@ -40790,8 +40790,8 @@
         </p:nvCxnSpPr>
         <p:spPr>
           <a:xfrm>
-            <a:off x="4754880" y="1865376"/>
-            <a:ext cx="0" cy="530352"/>
+            <a:off x="4754880" y="1755648"/>
+            <a:ext cx="0" cy="347472"/>
           </a:xfrm>
           <a:prstGeom prst="line">
             <a:avLst/>
@@ -40812,7 +40812,7 @@
         </p:nvCxnSpPr>
         <p:spPr>
           <a:xfrm flipH="1">
-            <a:off x="3264408" y="2395728"/>
+            <a:off x="3264408" y="2103120"/>
             <a:ext cx="1490472" cy="0"/>
           </a:xfrm>
           <a:prstGeom prst="line">
@@ -40834,8 +40834,8 @@
         </p:nvCxnSpPr>
         <p:spPr>
           <a:xfrm>
-            <a:off x="3264408" y="2395728"/>
-            <a:ext cx="0" cy="402336"/>
+            <a:off x="3264408" y="2103120"/>
+            <a:ext cx="0" cy="329184"/>
           </a:xfrm>
           <a:prstGeom prst="line">
             <a:avLst/>
@@ -40857,7 +40857,7 @@
         </p:nvSpPr>
         <p:spPr>
           <a:xfrm>
-            <a:off x="4581144" y="1943100"/>
+            <a:off x="4581144" y="1833372"/>
             <a:ext cx="109728" cy="118872"/>
           </a:xfrm>
           <a:prstGeom prst="rect">
@@ -40903,7 +40903,7 @@
         </p:nvSpPr>
         <p:spPr>
           <a:xfrm>
-            <a:off x="3328415" y="2601468"/>
+            <a:off x="3328415" y="2235708"/>
             <a:ext cx="109728" cy="118872"/>
           </a:xfrm>
           <a:prstGeom prst="rect">
@@ -40949,7 +40949,7 @@
         </p:nvCxnSpPr>
         <p:spPr>
           <a:xfrm>
-            <a:off x="2194560" y="1691640"/>
+            <a:off x="2194560" y="1645920"/>
             <a:ext cx="137160" cy="0"/>
           </a:xfrm>
           <a:prstGeom prst="line">
@@ -40971,8 +40971,8 @@
         </p:nvCxnSpPr>
         <p:spPr>
           <a:xfrm>
-            <a:off x="2331720" y="1691640"/>
-            <a:ext cx="0" cy="4407408"/>
+            <a:off x="2331720" y="1645920"/>
+            <a:ext cx="0" cy="3666744"/>
           </a:xfrm>
           <a:prstGeom prst="line">
             <a:avLst/>
@@ -40993,7 +40993,7 @@
         </p:nvCxnSpPr>
         <p:spPr>
           <a:xfrm>
-            <a:off x="2331720" y="6099048"/>
+            <a:off x="2331720" y="5312664"/>
             <a:ext cx="594360" cy="0"/>
           </a:xfrm>
           <a:prstGeom prst="line">
@@ -41016,7 +41016,7 @@
         </p:nvSpPr>
         <p:spPr>
           <a:xfrm>
-            <a:off x="2276856" y="1751076"/>
+            <a:off x="2276856" y="1705356"/>
             <a:ext cx="109728" cy="118872"/>
           </a:xfrm>
           <a:prstGeom prst="rect">
@@ -41062,7 +41062,7 @@
         </p:nvSpPr>
         <p:spPr>
           <a:xfrm>
-            <a:off x="2734056" y="5920740"/>
+            <a:off x="2734056" y="5134355"/>
             <a:ext cx="109728" cy="118872"/>
           </a:xfrm>
           <a:prstGeom prst="rect">
@@ -41108,8 +41108,8 @@
         </p:nvCxnSpPr>
         <p:spPr>
           <a:xfrm>
-            <a:off x="3977639" y="5486400"/>
-            <a:ext cx="0" cy="274320"/>
+            <a:off x="3977639" y="4791456"/>
+            <a:ext cx="0" cy="237744"/>
           </a:xfrm>
           <a:prstGeom prst="line">
             <a:avLst/>
@@ -41131,7 +41131,7 @@
         </p:nvSpPr>
         <p:spPr>
           <a:xfrm>
-            <a:off x="3803904" y="5564124"/>
+            <a:off x="3803904" y="4869180"/>
             <a:ext cx="109728" cy="118872"/>
           </a:xfrm>
           <a:prstGeom prst="rect">
@@ -41177,7 +41177,7 @@
         </p:nvSpPr>
         <p:spPr>
           <a:xfrm>
-            <a:off x="4041648" y="5564123"/>
+            <a:off x="4041648" y="4832603"/>
             <a:ext cx="109728" cy="118872"/>
           </a:xfrm>
           <a:prstGeom prst="rect">
@@ -41223,7 +41223,7 @@
         </p:nvCxnSpPr>
         <p:spPr>
           <a:xfrm>
-            <a:off x="5303520" y="4480560"/>
+            <a:off x="5303520" y="3931920"/>
             <a:ext cx="228600" cy="0"/>
           </a:xfrm>
           <a:prstGeom prst="line">
@@ -41245,8 +41245,8 @@
         </p:nvCxnSpPr>
         <p:spPr>
           <a:xfrm flipV="1">
-            <a:off x="5532120" y="3246120"/>
-            <a:ext cx="0" cy="1234440"/>
+            <a:off x="5532120" y="2852928"/>
+            <a:ext cx="0" cy="1078992"/>
           </a:xfrm>
           <a:prstGeom prst="line">
             <a:avLst/>
@@ -41267,7 +41267,7 @@
         </p:nvCxnSpPr>
         <p:spPr>
           <a:xfrm>
-            <a:off x="5532120" y="3246120"/>
+            <a:off x="5532120" y="2852928"/>
             <a:ext cx="228600" cy="0"/>
           </a:xfrm>
           <a:prstGeom prst="line">
@@ -41290,7 +41290,7 @@
         </p:nvSpPr>
         <p:spPr>
           <a:xfrm>
-            <a:off x="5385816" y="4539996"/>
+            <a:off x="5385816" y="3991355"/>
             <a:ext cx="109728" cy="118872"/>
           </a:xfrm>
           <a:prstGeom prst="rect">
@@ -41336,7 +41336,7 @@
         </p:nvSpPr>
         <p:spPr>
           <a:xfrm>
-            <a:off x="5568696" y="3067812"/>
+            <a:off x="5568696" y="2674620"/>
             <a:ext cx="109728" cy="118872"/>
           </a:xfrm>
           <a:prstGeom prst="rect">
@@ -41382,7 +41382,7 @@
         </p:nvCxnSpPr>
         <p:spPr>
           <a:xfrm>
-            <a:off x="5303520" y="4846320"/>
+            <a:off x="5303520" y="4005072"/>
             <a:ext cx="457200" cy="0"/>
           </a:xfrm>
           <a:prstGeom prst="line">
@@ -41405,7 +41405,7 @@
         </p:nvSpPr>
         <p:spPr>
           <a:xfrm>
-            <a:off x="5385816" y="4905755"/>
+            <a:off x="5385816" y="4064507"/>
             <a:ext cx="109728" cy="118872"/>
           </a:xfrm>
           <a:prstGeom prst="rect">
@@ -41451,7 +41451,7 @@
         </p:nvSpPr>
         <p:spPr>
           <a:xfrm>
-            <a:off x="5568696" y="4668012"/>
+            <a:off x="5568696" y="3826763"/>
             <a:ext cx="109728" cy="118872"/>
           </a:xfrm>
           <a:prstGeom prst="rect">
@@ -41497,7 +41497,7 @@
         </p:nvCxnSpPr>
         <p:spPr>
           <a:xfrm>
-            <a:off x="7726679" y="3154680"/>
+            <a:off x="7726679" y="2852928"/>
             <a:ext cx="228600" cy="0"/>
           </a:xfrm>
           <a:prstGeom prst="line">
@@ -41520,7 +41520,7 @@
         </p:nvSpPr>
         <p:spPr>
           <a:xfrm>
-            <a:off x="7808975" y="3214116"/>
+            <a:off x="7808975" y="2912364"/>
             <a:ext cx="109728" cy="118872"/>
           </a:xfrm>
           <a:prstGeom prst="rect">
@@ -41566,7 +41566,7 @@
         </p:nvSpPr>
         <p:spPr>
           <a:xfrm>
-            <a:off x="7763255" y="2976372"/>
+            <a:off x="7763255" y="2674620"/>
             <a:ext cx="109728" cy="118872"/>
           </a:xfrm>
           <a:prstGeom prst="rect">
@@ -41612,7 +41612,7 @@
         </p:nvCxnSpPr>
         <p:spPr>
           <a:xfrm>
-            <a:off x="7726679" y="4681728"/>
+            <a:off x="7726679" y="4005072"/>
             <a:ext cx="228600" cy="0"/>
           </a:xfrm>
           <a:prstGeom prst="line">
@@ -41635,7 +41635,7 @@
         </p:nvSpPr>
         <p:spPr>
           <a:xfrm>
-            <a:off x="7808975" y="4741164"/>
+            <a:off x="7808975" y="4064507"/>
             <a:ext cx="109728" cy="118872"/>
           </a:xfrm>
           <a:prstGeom prst="rect">
@@ -41681,7 +41681,7 @@
         </p:nvSpPr>
         <p:spPr>
           <a:xfrm>
-            <a:off x="7763255" y="4503420"/>
+            <a:off x="7763255" y="3826763"/>
             <a:ext cx="109728" cy="118872"/>
           </a:xfrm>
           <a:prstGeom prst="rect">
@@ -41727,8 +41727,8 @@
         </p:nvCxnSpPr>
         <p:spPr>
           <a:xfrm>
-            <a:off x="5303520" y="4343400"/>
-            <a:ext cx="228600" cy="0"/>
+            <a:off x="5303520" y="3785615"/>
+            <a:ext cx="320040" cy="0"/>
           </a:xfrm>
           <a:prstGeom prst="line">
             <a:avLst/>
@@ -41749,8 +41749,8 @@
         </p:nvCxnSpPr>
         <p:spPr>
           <a:xfrm flipV="1">
-            <a:off x="5532120" y="2286000"/>
-            <a:ext cx="0" cy="2057400"/>
+            <a:off x="5623560" y="3456432"/>
+            <a:ext cx="0" cy="329183"/>
           </a:xfrm>
           <a:prstGeom prst="line">
             <a:avLst/>
@@ -41771,8 +41771,8 @@
         </p:nvCxnSpPr>
         <p:spPr>
           <a:xfrm>
-            <a:off x="5532120" y="2286000"/>
-            <a:ext cx="4480560" cy="0"/>
+            <a:off x="5623560" y="3456432"/>
+            <a:ext cx="4416552" cy="0"/>
           </a:xfrm>
           <a:prstGeom prst="line">
             <a:avLst/>
@@ -41792,9 +41792,9 @@
           <p:nvPr/>
         </p:nvCxnSpPr>
         <p:spPr>
-          <a:xfrm>
-            <a:off x="10012680" y="2286000"/>
-            <a:ext cx="0" cy="841248"/>
+          <a:xfrm flipV="1">
+            <a:off x="10040112" y="2999232"/>
+            <a:ext cx="0" cy="457200"/>
           </a:xfrm>
           <a:prstGeom prst="line">
             <a:avLst/>
@@ -41815,8 +41815,8 @@
         </p:nvCxnSpPr>
         <p:spPr>
           <a:xfrm>
-            <a:off x="10012680" y="3127248"/>
-            <a:ext cx="137160" cy="0"/>
+            <a:off x="10040112" y="2999232"/>
+            <a:ext cx="109728" cy="0"/>
           </a:xfrm>
           <a:prstGeom prst="line">
             <a:avLst/>
@@ -41838,7 +41838,7 @@
         </p:nvSpPr>
         <p:spPr>
           <a:xfrm>
-            <a:off x="5385816" y="4402836"/>
+            <a:off x="5385816" y="3845051"/>
             <a:ext cx="109728" cy="118872"/>
           </a:xfrm>
           <a:prstGeom prst="rect">
@@ -41884,7 +41884,7 @@
         </p:nvSpPr>
         <p:spPr>
           <a:xfrm>
-            <a:off x="9957815" y="2948940"/>
+            <a:off x="9957815" y="2820924"/>
             <a:ext cx="109728" cy="118872"/>
           </a:xfrm>
           <a:prstGeom prst="rect">
@@ -41930,7 +41930,7 @@
         </p:nvCxnSpPr>
         <p:spPr>
           <a:xfrm>
-            <a:off x="5303520" y="5120640"/>
+            <a:off x="5303520" y="4480560"/>
             <a:ext cx="137160" cy="0"/>
           </a:xfrm>
           <a:prstGeom prst="line">
@@ -41951,9 +41951,9 @@
           <p:nvPr/>
         </p:nvCxnSpPr>
         <p:spPr>
-          <a:xfrm flipV="1">
-            <a:off x="5440680" y="3986784"/>
-            <a:ext cx="0" cy="1133856"/>
+          <a:xfrm>
+            <a:off x="5440680" y="4480560"/>
+            <a:ext cx="0" cy="164592"/>
           </a:xfrm>
           <a:prstGeom prst="line">
             <a:avLst/>
@@ -41974,7 +41974,7 @@
         </p:nvCxnSpPr>
         <p:spPr>
           <a:xfrm>
-            <a:off x="5440680" y="3986784"/>
+            <a:off x="5440680" y="4645152"/>
             <a:ext cx="4599432" cy="0"/>
           </a:xfrm>
           <a:prstGeom prst="line">
@@ -41995,9 +41995,9 @@
           <p:nvPr/>
         </p:nvCxnSpPr>
         <p:spPr>
-          <a:xfrm>
-            <a:off x="10040112" y="3986784"/>
-            <a:ext cx="0" cy="548640"/>
+          <a:xfrm flipV="1">
+            <a:off x="10040112" y="4005072"/>
+            <a:ext cx="0" cy="640080"/>
           </a:xfrm>
           <a:prstGeom prst="line">
             <a:avLst/>
@@ -42018,7 +42018,7 @@
         </p:nvCxnSpPr>
         <p:spPr>
           <a:xfrm>
-            <a:off x="10040112" y="4535424"/>
+            <a:off x="10040112" y="4005072"/>
             <a:ext cx="109728" cy="0"/>
           </a:xfrm>
           <a:prstGeom prst="line">
@@ -42041,7 +42041,7 @@
         </p:nvSpPr>
         <p:spPr>
           <a:xfrm>
-            <a:off x="5385816" y="5180075"/>
+            <a:off x="5385816" y="4539996"/>
             <a:ext cx="109728" cy="118872"/>
           </a:xfrm>
           <a:prstGeom prst="rect">
@@ -42087,7 +42087,7 @@
         </p:nvSpPr>
         <p:spPr>
           <a:xfrm>
-            <a:off x="9957815" y="4357116"/>
+            <a:off x="9957815" y="3826763"/>
             <a:ext cx="109728" cy="118872"/>
           </a:xfrm>
           <a:prstGeom prst="rect">
@@ -42133,7 +42133,7 @@
         </p:nvCxnSpPr>
         <p:spPr>
           <a:xfrm flipH="1">
-            <a:off x="5623560" y="6263640"/>
+            <a:off x="5623560" y="5614416"/>
             <a:ext cx="137160" cy="0"/>
           </a:xfrm>
           <a:prstGeom prst="line">
@@ -42157,8 +42157,8 @@
         </p:nvCxnSpPr>
         <p:spPr>
           <a:xfrm>
-            <a:off x="5623560" y="6263640"/>
-            <a:ext cx="0" cy="338328"/>
+            <a:off x="5623560" y="5614416"/>
+            <a:ext cx="0" cy="832104"/>
           </a:xfrm>
           <a:prstGeom prst="line">
             <a:avLst/>
@@ -42181,7 +42181,7 @@
         </p:nvCxnSpPr>
         <p:spPr>
           <a:xfrm flipH="1">
-            <a:off x="164592" y="6601968"/>
+            <a:off x="164592" y="6446520"/>
             <a:ext cx="5458968" cy="0"/>
           </a:xfrm>
           <a:prstGeom prst="line">
@@ -42205,8 +42205,8 @@
         </p:nvCxnSpPr>
         <p:spPr>
           <a:xfrm flipV="1">
-            <a:off x="164592" y="1691640"/>
-            <a:ext cx="0" cy="4910328"/>
+            <a:off x="164592" y="1645920"/>
+            <a:ext cx="0" cy="4800600"/>
           </a:xfrm>
           <a:prstGeom prst="line">
             <a:avLst/>
@@ -42229,7 +42229,7 @@
         </p:nvCxnSpPr>
         <p:spPr>
           <a:xfrm>
-            <a:off x="164592" y="1691640"/>
+            <a:off x="164592" y="1645920"/>
             <a:ext cx="109728" cy="0"/>
           </a:xfrm>
           <a:prstGeom prst="line">
@@ -42253,7 +42253,7 @@
         </p:nvSpPr>
         <p:spPr>
           <a:xfrm>
-            <a:off x="5568696" y="6085331"/>
+            <a:off x="5568696" y="5436107"/>
             <a:ext cx="109728" cy="118872"/>
           </a:xfrm>
           <a:prstGeom prst="rect">
@@ -42299,7 +42299,7 @@
         </p:nvSpPr>
         <p:spPr>
           <a:xfrm>
-            <a:off x="82296" y="1513332"/>
+            <a:off x="82296" y="1467612"/>
             <a:ext cx="109728" cy="118872"/>
           </a:xfrm>
           <a:prstGeom prst="rect">
@@ -42345,7 +42345,7 @@
         </p:nvSpPr>
         <p:spPr>
           <a:xfrm>
-            <a:off x="2286000" y="6455664"/>
+            <a:off x="2286000" y="6291072"/>
             <a:ext cx="1554480" cy="109728"/>
           </a:xfrm>
           <a:prstGeom prst="rect">
@@ -42391,7 +42391,7 @@
         </p:nvSpPr>
         <p:spPr>
           <a:xfrm>
-            <a:off x="4343400" y="3017520"/>
+            <a:off x="4434840" y="2697480"/>
             <a:ext cx="1078992" cy="475488"/>
           </a:xfrm>
           <a:prstGeom prst="roundRect">
@@ -42440,7 +42440,7 @@
         </p:nvSpPr>
         <p:spPr>
           <a:xfrm>
-            <a:off x="4370832" y="3017520"/>
+            <a:off x="4462272" y="2697480"/>
             <a:ext cx="1024127" cy="475488"/>
           </a:xfrm>
           <a:prstGeom prst="rect">
@@ -42840,7 +42840,7 @@
         </p:nvSpPr>
         <p:spPr>
           <a:xfrm>
-            <a:off x="274320" y="4992624"/>
+            <a:off x="274320" y="4846320"/>
             <a:ext cx="9326880" cy="237744"/>
           </a:xfrm>
           <a:prstGeom prst="roundRect">
@@ -42888,7 +42888,7 @@
         </p:nvSpPr>
         <p:spPr>
           <a:xfrm>
-            <a:off x="365760" y="4992624"/>
+            <a:off x="365760" y="4846320"/>
             <a:ext cx="9144000" cy="237744"/>
           </a:xfrm>
           <a:prstGeom prst="rect">
@@ -42935,11 +42935,11 @@
         <p:spPr>
           <a:xfrm>
             <a:off x="274320" y="896112"/>
-            <a:ext cx="2103120" cy="877824"/>
+            <a:ext cx="2103120" cy="566928"/>
           </a:xfrm>
           <a:prstGeom prst="roundRect">
             <a:avLst>
-              <a:gd name="adj" fmla="val 3645"/>
+              <a:gd name="adj" fmla="val 5645"/>
             </a:avLst>
           </a:prstGeom>
           <a:solidFill>
@@ -43076,11 +43076,11 @@
         <p:spPr>
           <a:xfrm>
             <a:off x="285292" y="1133856"/>
-            <a:ext cx="2081174" cy="621792"/>
+            <a:ext cx="2081174" cy="310896"/>
           </a:xfrm>
           <a:prstGeom prst="roundRect">
             <a:avLst>
-              <a:gd name="adj" fmla="val 2941"/>
+              <a:gd name="adj" fmla="val 5882"/>
             </a:avLst>
           </a:prstGeom>
           <a:solidFill>
@@ -43121,8 +43121,8 @@
         </p:nvSpPr>
         <p:spPr>
           <a:xfrm>
-            <a:off x="365760" y="1161288"/>
-            <a:ext cx="1956815" cy="603503"/>
+            <a:off x="365760" y="1156716"/>
+            <a:ext cx="1956815" cy="292608"/>
           </a:xfrm>
           <a:prstGeom prst="rect">
             <a:avLst/>
@@ -43231,11 +43231,11 @@
         <p:spPr>
           <a:xfrm>
             <a:off x="3017520" y="896112"/>
-            <a:ext cx="2194560" cy="1280160"/>
+            <a:ext cx="2194560" cy="978408"/>
           </a:xfrm>
           <a:prstGeom prst="roundRect">
             <a:avLst>
-              <a:gd name="adj" fmla="val 2500"/>
+              <a:gd name="adj" fmla="val 3271"/>
             </a:avLst>
           </a:prstGeom>
           <a:solidFill>
@@ -43377,11 +43377,11 @@
         <p:spPr>
           <a:xfrm>
             <a:off x="3028492" y="1133856"/>
-            <a:ext cx="2172614" cy="1024127"/>
+            <a:ext cx="2172614" cy="722376"/>
           </a:xfrm>
           <a:prstGeom prst="roundRect">
             <a:avLst>
-              <a:gd name="adj" fmla="val 1785"/>
+              <a:gd name="adj" fmla="val 2531"/>
             </a:avLst>
           </a:prstGeom>
           <a:solidFill>
@@ -43422,8 +43422,8 @@
         </p:nvSpPr>
         <p:spPr>
           <a:xfrm>
-            <a:off x="3108960" y="1161288"/>
-            <a:ext cx="2048255" cy="1005839"/>
+            <a:off x="3108960" y="1156716"/>
+            <a:ext cx="2048255" cy="704088"/>
           </a:xfrm>
           <a:prstGeom prst="rect">
             <a:avLst/>
@@ -43661,11 +43661,11 @@
         <p:spPr>
           <a:xfrm>
             <a:off x="5577840" y="896112"/>
-            <a:ext cx="1874519" cy="950976"/>
+            <a:ext cx="1874519" cy="841248"/>
           </a:xfrm>
           <a:prstGeom prst="roundRect">
             <a:avLst>
-              <a:gd name="adj" fmla="val 3365"/>
+              <a:gd name="adj" fmla="val 3804"/>
             </a:avLst>
           </a:prstGeom>
           <a:solidFill>
@@ -43807,11 +43807,11 @@
         <p:spPr>
           <a:xfrm>
             <a:off x="5588812" y="1133856"/>
-            <a:ext cx="1852574" cy="694944"/>
+            <a:ext cx="1852574" cy="585216"/>
           </a:xfrm>
           <a:prstGeom prst="roundRect">
             <a:avLst>
-              <a:gd name="adj" fmla="val 2631"/>
+              <a:gd name="adj" fmla="val 3125"/>
             </a:avLst>
           </a:prstGeom>
           <a:solidFill>
@@ -43852,8 +43852,8 @@
         </p:nvSpPr>
         <p:spPr>
           <a:xfrm>
-            <a:off x="5669279" y="1161288"/>
-            <a:ext cx="1728216" cy="676656"/>
+            <a:off x="5669279" y="1156716"/>
+            <a:ext cx="1728216" cy="566928"/>
           </a:xfrm>
           <a:prstGeom prst="rect">
             <a:avLst/>
@@ -44048,11 +44048,11 @@
         <p:spPr>
           <a:xfrm>
             <a:off x="9646920" y="896112"/>
-            <a:ext cx="1920240" cy="950976"/>
+            <a:ext cx="1920240" cy="841248"/>
           </a:xfrm>
           <a:prstGeom prst="roundRect">
             <a:avLst>
-              <a:gd name="adj" fmla="val 3365"/>
+              <a:gd name="adj" fmla="val 3804"/>
             </a:avLst>
           </a:prstGeom>
           <a:solidFill>
@@ -44194,11 +44194,11 @@
         <p:spPr>
           <a:xfrm>
             <a:off x="9657892" y="1133856"/>
-            <a:ext cx="1898294" cy="694944"/>
+            <a:ext cx="1898294" cy="585216"/>
           </a:xfrm>
           <a:prstGeom prst="roundRect">
             <a:avLst>
-              <a:gd name="adj" fmla="val 2631"/>
+              <a:gd name="adj" fmla="val 3125"/>
             </a:avLst>
           </a:prstGeom>
           <a:solidFill>
@@ -44239,8 +44239,8 @@
         </p:nvSpPr>
         <p:spPr>
           <a:xfrm>
-            <a:off x="9738360" y="1161288"/>
-            <a:ext cx="1773936" cy="676656"/>
+            <a:off x="9738360" y="1156716"/>
+            <a:ext cx="1773936" cy="566928"/>
           </a:xfrm>
           <a:prstGeom prst="rect">
             <a:avLst/>
@@ -44434,12 +44434,12 @@
         </p:nvSpPr>
         <p:spPr>
           <a:xfrm>
-            <a:off x="274320" y="2468880"/>
-            <a:ext cx="1965960" cy="950976"/>
+            <a:off x="274320" y="2331720"/>
+            <a:ext cx="1965960" cy="841248"/>
           </a:xfrm>
           <a:prstGeom prst="roundRect">
             <a:avLst>
-              <a:gd name="adj" fmla="val 3365"/>
+              <a:gd name="adj" fmla="val 3804"/>
             </a:avLst>
           </a:prstGeom>
           <a:solidFill>
@@ -44488,7 +44488,7 @@
         </p:nvSpPr>
         <p:spPr>
           <a:xfrm>
-            <a:off x="285292" y="2479852"/>
+            <a:off x="285292" y="2342692"/>
             <a:ext cx="1944014" cy="214884"/>
           </a:xfrm>
           <a:prstGeom prst="roundRect">
@@ -44534,7 +44534,7 @@
         </p:nvSpPr>
         <p:spPr>
           <a:xfrm>
-            <a:off x="310896" y="2500884"/>
+            <a:off x="310896" y="2363724"/>
             <a:ext cx="1892807" cy="173736"/>
           </a:xfrm>
           <a:prstGeom prst="rect">
@@ -44580,12 +44580,12 @@
         </p:nvSpPr>
         <p:spPr>
           <a:xfrm>
-            <a:off x="285292" y="2706624"/>
-            <a:ext cx="1944014" cy="694944"/>
+            <a:off x="285292" y="2569463"/>
+            <a:ext cx="1944014" cy="585216"/>
           </a:xfrm>
           <a:prstGeom prst="roundRect">
             <a:avLst>
-              <a:gd name="adj" fmla="val 2631"/>
+              <a:gd name="adj" fmla="val 3125"/>
             </a:avLst>
           </a:prstGeom>
           <a:solidFill>
@@ -44626,8 +44626,8 @@
         </p:nvSpPr>
         <p:spPr>
           <a:xfrm>
-            <a:off x="365760" y="2734056"/>
-            <a:ext cx="1819656" cy="676656"/>
+            <a:off x="365760" y="2592324"/>
+            <a:ext cx="1819656" cy="566928"/>
           </a:xfrm>
           <a:prstGeom prst="rect">
             <a:avLst/>
@@ -44821,12 +44821,12 @@
         </p:nvSpPr>
         <p:spPr>
           <a:xfrm>
-            <a:off x="2514600" y="2468880"/>
-            <a:ext cx="1965960" cy="950976"/>
+            <a:off x="2514600" y="2331720"/>
+            <a:ext cx="1965960" cy="841248"/>
           </a:xfrm>
           <a:prstGeom prst="roundRect">
             <a:avLst>
-              <a:gd name="adj" fmla="val 3365"/>
+              <a:gd name="adj" fmla="val 3804"/>
             </a:avLst>
           </a:prstGeom>
           <a:solidFill>
@@ -44875,7 +44875,7 @@
         </p:nvSpPr>
         <p:spPr>
           <a:xfrm>
-            <a:off x="2525572" y="2479852"/>
+            <a:off x="2525572" y="2342692"/>
             <a:ext cx="1944014" cy="214884"/>
           </a:xfrm>
           <a:prstGeom prst="roundRect">
@@ -44921,7 +44921,7 @@
         </p:nvSpPr>
         <p:spPr>
           <a:xfrm>
-            <a:off x="2551176" y="2500884"/>
+            <a:off x="2551176" y="2363724"/>
             <a:ext cx="1892807" cy="173736"/>
           </a:xfrm>
           <a:prstGeom prst="rect">
@@ -44967,12 +44967,12 @@
         </p:nvSpPr>
         <p:spPr>
           <a:xfrm>
-            <a:off x="2525572" y="2706624"/>
-            <a:ext cx="1944014" cy="694944"/>
+            <a:off x="2525572" y="2569463"/>
+            <a:ext cx="1944014" cy="585216"/>
           </a:xfrm>
           <a:prstGeom prst="roundRect">
             <a:avLst>
-              <a:gd name="adj" fmla="val 2631"/>
+              <a:gd name="adj" fmla="val 3125"/>
             </a:avLst>
           </a:prstGeom>
           <a:solidFill>
@@ -45013,8 +45013,8 @@
         </p:nvSpPr>
         <p:spPr>
           <a:xfrm>
-            <a:off x="2606040" y="2734056"/>
-            <a:ext cx="1819656" cy="676656"/>
+            <a:off x="2606040" y="2592324"/>
+            <a:ext cx="1819656" cy="566928"/>
           </a:xfrm>
           <a:prstGeom prst="rect">
             <a:avLst/>
@@ -45208,12 +45208,12 @@
         </p:nvSpPr>
         <p:spPr>
           <a:xfrm>
-            <a:off x="4754880" y="2468880"/>
-            <a:ext cx="1965960" cy="950976"/>
+            <a:off x="4754880" y="2331720"/>
+            <a:ext cx="1965960" cy="841248"/>
           </a:xfrm>
           <a:prstGeom prst="roundRect">
             <a:avLst>
-              <a:gd name="adj" fmla="val 3365"/>
+              <a:gd name="adj" fmla="val 3804"/>
             </a:avLst>
           </a:prstGeom>
           <a:solidFill>
@@ -45262,7 +45262,7 @@
         </p:nvSpPr>
         <p:spPr>
           <a:xfrm>
-            <a:off x="4765852" y="2479852"/>
+            <a:off x="4765852" y="2342692"/>
             <a:ext cx="1944014" cy="214884"/>
           </a:xfrm>
           <a:prstGeom prst="roundRect">
@@ -45308,7 +45308,7 @@
         </p:nvSpPr>
         <p:spPr>
           <a:xfrm>
-            <a:off x="4791456" y="2500884"/>
+            <a:off x="4791456" y="2363724"/>
             <a:ext cx="1892807" cy="173736"/>
           </a:xfrm>
           <a:prstGeom prst="rect">
@@ -45354,12 +45354,12 @@
         </p:nvSpPr>
         <p:spPr>
           <a:xfrm>
-            <a:off x="4765852" y="2706624"/>
-            <a:ext cx="1944014" cy="694944"/>
+            <a:off x="4765852" y="2569463"/>
+            <a:ext cx="1944014" cy="585216"/>
           </a:xfrm>
           <a:prstGeom prst="roundRect">
             <a:avLst>
-              <a:gd name="adj" fmla="val 2631"/>
+              <a:gd name="adj" fmla="val 3125"/>
             </a:avLst>
           </a:prstGeom>
           <a:solidFill>
@@ -45400,8 +45400,8 @@
         </p:nvSpPr>
         <p:spPr>
           <a:xfrm>
-            <a:off x="4846320" y="2734056"/>
-            <a:ext cx="1819656" cy="676656"/>
+            <a:off x="4846320" y="2592324"/>
+            <a:ext cx="1819656" cy="566928"/>
           </a:xfrm>
           <a:prstGeom prst="rect">
             <a:avLst/>
@@ -45595,12 +45595,12 @@
         </p:nvSpPr>
         <p:spPr>
           <a:xfrm>
-            <a:off x="6995160" y="2468880"/>
-            <a:ext cx="2103120" cy="1115568"/>
+            <a:off x="6995160" y="2331720"/>
+            <a:ext cx="2103120" cy="978408"/>
           </a:xfrm>
           <a:prstGeom prst="roundRect">
             <a:avLst>
-              <a:gd name="adj" fmla="val 2868"/>
+              <a:gd name="adj" fmla="val 3271"/>
             </a:avLst>
           </a:prstGeom>
           <a:solidFill>
@@ -45649,7 +45649,7 @@
         </p:nvSpPr>
         <p:spPr>
           <a:xfrm>
-            <a:off x="7006132" y="2479852"/>
+            <a:off x="7006132" y="2342692"/>
             <a:ext cx="2081174" cy="214884"/>
           </a:xfrm>
           <a:prstGeom prst="roundRect">
@@ -45695,7 +45695,7 @@
         </p:nvSpPr>
         <p:spPr>
           <a:xfrm>
-            <a:off x="7031736" y="2500884"/>
+            <a:off x="7031736" y="2363724"/>
             <a:ext cx="2029967" cy="173736"/>
           </a:xfrm>
           <a:prstGeom prst="rect">
@@ -45741,12 +45741,12 @@
         </p:nvSpPr>
         <p:spPr>
           <a:xfrm>
-            <a:off x="7006132" y="2706624"/>
-            <a:ext cx="2081174" cy="859536"/>
+            <a:off x="7006132" y="2569463"/>
+            <a:ext cx="2081174" cy="722376"/>
           </a:xfrm>
           <a:prstGeom prst="roundRect">
             <a:avLst>
-              <a:gd name="adj" fmla="val 2127"/>
+              <a:gd name="adj" fmla="val 2531"/>
             </a:avLst>
           </a:prstGeom>
           <a:solidFill>
@@ -45787,8 +45787,8 @@
         </p:nvSpPr>
         <p:spPr>
           <a:xfrm>
-            <a:off x="7086600" y="2734056"/>
-            <a:ext cx="1956815" cy="841247"/>
+            <a:off x="7086600" y="2592324"/>
+            <a:ext cx="1956815" cy="704088"/>
           </a:xfrm>
           <a:prstGeom prst="rect">
             <a:avLst/>
@@ -46025,12 +46025,12 @@
         </p:nvSpPr>
         <p:spPr>
           <a:xfrm>
-            <a:off x="9646920" y="2468880"/>
-            <a:ext cx="1920240" cy="1115568"/>
+            <a:off x="9646920" y="2331720"/>
+            <a:ext cx="1920240" cy="978408"/>
           </a:xfrm>
           <a:prstGeom prst="roundRect">
             <a:avLst>
-              <a:gd name="adj" fmla="val 2868"/>
+              <a:gd name="adj" fmla="val 3271"/>
             </a:avLst>
           </a:prstGeom>
           <a:solidFill>
@@ -46079,7 +46079,7 @@
         </p:nvSpPr>
         <p:spPr>
           <a:xfrm>
-            <a:off x="9657892" y="2479852"/>
+            <a:off x="9657892" y="2342692"/>
             <a:ext cx="1898294" cy="214884"/>
           </a:xfrm>
           <a:prstGeom prst="roundRect">
@@ -46125,7 +46125,7 @@
         </p:nvSpPr>
         <p:spPr>
           <a:xfrm>
-            <a:off x="9683496" y="2500884"/>
+            <a:off x="9683496" y="2363724"/>
             <a:ext cx="1847088" cy="173736"/>
           </a:xfrm>
           <a:prstGeom prst="rect">
@@ -46171,12 +46171,12 @@
         </p:nvSpPr>
         <p:spPr>
           <a:xfrm>
-            <a:off x="9657892" y="2706624"/>
-            <a:ext cx="1898294" cy="859536"/>
+            <a:off x="9657892" y="2569463"/>
+            <a:ext cx="1898294" cy="722376"/>
           </a:xfrm>
           <a:prstGeom prst="roundRect">
             <a:avLst>
-              <a:gd name="adj" fmla="val 2127"/>
+              <a:gd name="adj" fmla="val 2531"/>
             </a:avLst>
           </a:prstGeom>
           <a:solidFill>
@@ -46217,8 +46217,8 @@
         </p:nvSpPr>
         <p:spPr>
           <a:xfrm>
-            <a:off x="9738360" y="2734056"/>
-            <a:ext cx="1773936" cy="841247"/>
+            <a:off x="9738360" y="2592324"/>
+            <a:ext cx="1773936" cy="704088"/>
           </a:xfrm>
           <a:prstGeom prst="rect">
             <a:avLst/>
@@ -46455,12 +46455,12 @@
         </p:nvSpPr>
         <p:spPr>
           <a:xfrm>
-            <a:off x="3017520" y="3840480"/>
-            <a:ext cx="1965960" cy="950976"/>
+            <a:off x="3017520" y="3703320"/>
+            <a:ext cx="1965960" cy="841248"/>
           </a:xfrm>
           <a:prstGeom prst="roundRect">
             <a:avLst>
-              <a:gd name="adj" fmla="val 3365"/>
+              <a:gd name="adj" fmla="val 3804"/>
             </a:avLst>
           </a:prstGeom>
           <a:solidFill>
@@ -46509,7 +46509,7 @@
         </p:nvSpPr>
         <p:spPr>
           <a:xfrm>
-            <a:off x="3028492" y="3851452"/>
+            <a:off x="3028492" y="3714292"/>
             <a:ext cx="1944014" cy="214884"/>
           </a:xfrm>
           <a:prstGeom prst="roundRect">
@@ -46555,7 +46555,7 @@
         </p:nvSpPr>
         <p:spPr>
           <a:xfrm>
-            <a:off x="3054096" y="3872484"/>
+            <a:off x="3054096" y="3735324"/>
             <a:ext cx="1892807" cy="173736"/>
           </a:xfrm>
           <a:prstGeom prst="rect">
@@ -46601,12 +46601,12 @@
         </p:nvSpPr>
         <p:spPr>
           <a:xfrm>
-            <a:off x="3028492" y="4078224"/>
-            <a:ext cx="1944014" cy="694944"/>
+            <a:off x="3028492" y="3941063"/>
+            <a:ext cx="1944014" cy="585216"/>
           </a:xfrm>
           <a:prstGeom prst="roundRect">
             <a:avLst>
-              <a:gd name="adj" fmla="val 2631"/>
+              <a:gd name="adj" fmla="val 3125"/>
             </a:avLst>
           </a:prstGeom>
           <a:solidFill>
@@ -46647,8 +46647,8 @@
         </p:nvSpPr>
         <p:spPr>
           <a:xfrm>
-            <a:off x="3108960" y="4105656"/>
-            <a:ext cx="1819656" cy="676656"/>
+            <a:off x="3108960" y="3963924"/>
+            <a:ext cx="1819656" cy="566928"/>
           </a:xfrm>
           <a:prstGeom prst="rect">
             <a:avLst/>
@@ -46842,12 +46842,12 @@
         </p:nvSpPr>
         <p:spPr>
           <a:xfrm>
-            <a:off x="5257800" y="3840480"/>
-            <a:ext cx="1965960" cy="950976"/>
+            <a:off x="5257800" y="3703320"/>
+            <a:ext cx="1965960" cy="841248"/>
           </a:xfrm>
           <a:prstGeom prst="roundRect">
             <a:avLst>
-              <a:gd name="adj" fmla="val 3365"/>
+              <a:gd name="adj" fmla="val 3804"/>
             </a:avLst>
           </a:prstGeom>
           <a:solidFill>
@@ -46896,7 +46896,7 @@
         </p:nvSpPr>
         <p:spPr>
           <a:xfrm>
-            <a:off x="5268772" y="3851452"/>
+            <a:off x="5268772" y="3714292"/>
             <a:ext cx="1944014" cy="214884"/>
           </a:xfrm>
           <a:prstGeom prst="roundRect">
@@ -46942,7 +46942,7 @@
         </p:nvSpPr>
         <p:spPr>
           <a:xfrm>
-            <a:off x="5294376" y="3872484"/>
+            <a:off x="5294376" y="3735324"/>
             <a:ext cx="1892807" cy="173736"/>
           </a:xfrm>
           <a:prstGeom prst="rect">
@@ -46988,12 +46988,12 @@
         </p:nvSpPr>
         <p:spPr>
           <a:xfrm>
-            <a:off x="5268772" y="4078224"/>
-            <a:ext cx="1944014" cy="694944"/>
+            <a:off x="5268772" y="3941063"/>
+            <a:ext cx="1944014" cy="585216"/>
           </a:xfrm>
           <a:prstGeom prst="roundRect">
             <a:avLst>
-              <a:gd name="adj" fmla="val 2631"/>
+              <a:gd name="adj" fmla="val 3125"/>
             </a:avLst>
           </a:prstGeom>
           <a:solidFill>
@@ -47034,8 +47034,8 @@
         </p:nvSpPr>
         <p:spPr>
           <a:xfrm>
-            <a:off x="5349240" y="4105656"/>
-            <a:ext cx="1819656" cy="676656"/>
+            <a:off x="5349240" y="3963924"/>
+            <a:ext cx="1819656" cy="566928"/>
           </a:xfrm>
           <a:prstGeom prst="rect">
             <a:avLst/>
@@ -47229,12 +47229,12 @@
         </p:nvSpPr>
         <p:spPr>
           <a:xfrm>
-            <a:off x="7498079" y="3840480"/>
-            <a:ext cx="2103120" cy="950976"/>
+            <a:off x="7498079" y="3703320"/>
+            <a:ext cx="2103120" cy="841248"/>
           </a:xfrm>
           <a:prstGeom prst="roundRect">
             <a:avLst>
-              <a:gd name="adj" fmla="val 3365"/>
+              <a:gd name="adj" fmla="val 3804"/>
             </a:avLst>
           </a:prstGeom>
           <a:solidFill>
@@ -47283,7 +47283,7 @@
         </p:nvSpPr>
         <p:spPr>
           <a:xfrm>
-            <a:off x="7509052" y="3851452"/>
+            <a:off x="7509052" y="3714292"/>
             <a:ext cx="2081174" cy="214884"/>
           </a:xfrm>
           <a:prstGeom prst="roundRect">
@@ -47329,7 +47329,7 @@
         </p:nvSpPr>
         <p:spPr>
           <a:xfrm>
-            <a:off x="7534655" y="3872484"/>
+            <a:off x="7534655" y="3735324"/>
             <a:ext cx="2029967" cy="173736"/>
           </a:xfrm>
           <a:prstGeom prst="rect">
@@ -47375,12 +47375,12 @@
         </p:nvSpPr>
         <p:spPr>
           <a:xfrm>
-            <a:off x="7509052" y="4078224"/>
-            <a:ext cx="2081174" cy="694944"/>
+            <a:off x="7509052" y="3941063"/>
+            <a:ext cx="2081174" cy="585216"/>
           </a:xfrm>
           <a:prstGeom prst="roundRect">
             <a:avLst>
-              <a:gd name="adj" fmla="val 2631"/>
+              <a:gd name="adj" fmla="val 3125"/>
             </a:avLst>
           </a:prstGeom>
           <a:solidFill>
@@ -47421,8 +47421,8 @@
         </p:nvSpPr>
         <p:spPr>
           <a:xfrm>
-            <a:off x="7589519" y="4105656"/>
-            <a:ext cx="1956815" cy="676656"/>
+            <a:off x="7589519" y="3963924"/>
+            <a:ext cx="1956815" cy="566928"/>
           </a:xfrm>
           <a:prstGeom prst="rect">
             <a:avLst/>
@@ -47616,12 +47616,12 @@
         </p:nvSpPr>
         <p:spPr>
           <a:xfrm>
-            <a:off x="9875520" y="3840480"/>
-            <a:ext cx="1691640" cy="950976"/>
+            <a:off x="9875520" y="3703320"/>
+            <a:ext cx="1691640" cy="841248"/>
           </a:xfrm>
           <a:prstGeom prst="roundRect">
             <a:avLst>
-              <a:gd name="adj" fmla="val 3365"/>
+              <a:gd name="adj" fmla="val 3804"/>
             </a:avLst>
           </a:prstGeom>
           <a:solidFill>
@@ -47670,7 +47670,7 @@
         </p:nvSpPr>
         <p:spPr>
           <a:xfrm>
-            <a:off x="9886492" y="3851452"/>
+            <a:off x="9886492" y="3714292"/>
             <a:ext cx="1669694" cy="214884"/>
           </a:xfrm>
           <a:prstGeom prst="roundRect">
@@ -47716,7 +47716,7 @@
         </p:nvSpPr>
         <p:spPr>
           <a:xfrm>
-            <a:off x="9912096" y="3872484"/>
+            <a:off x="9912096" y="3735324"/>
             <a:ext cx="1618488" cy="173736"/>
           </a:xfrm>
           <a:prstGeom prst="rect">
@@ -47762,12 +47762,12 @@
         </p:nvSpPr>
         <p:spPr>
           <a:xfrm>
-            <a:off x="9886492" y="4078224"/>
-            <a:ext cx="1669694" cy="694944"/>
+            <a:off x="9886492" y="3941063"/>
+            <a:ext cx="1669694" cy="585216"/>
           </a:xfrm>
           <a:prstGeom prst="roundRect">
             <a:avLst>
-              <a:gd name="adj" fmla="val 2631"/>
+              <a:gd name="adj" fmla="val 3125"/>
             </a:avLst>
           </a:prstGeom>
           <a:solidFill>
@@ -47808,8 +47808,8 @@
         </p:nvSpPr>
         <p:spPr>
           <a:xfrm>
-            <a:off x="9966960" y="4105656"/>
-            <a:ext cx="1545336" cy="676656"/>
+            <a:off x="9966960" y="3963924"/>
+            <a:ext cx="1545336" cy="566928"/>
           </a:xfrm>
           <a:prstGeom prst="rect">
             <a:avLst/>
@@ -48003,12 +48003,12 @@
         </p:nvSpPr>
         <p:spPr>
           <a:xfrm>
-            <a:off x="274320" y="5285232"/>
-            <a:ext cx="2194560" cy="1115568"/>
+            <a:off x="274320" y="5138928"/>
+            <a:ext cx="2194560" cy="978408"/>
           </a:xfrm>
           <a:prstGeom prst="roundRect">
             <a:avLst>
-              <a:gd name="adj" fmla="val 2868"/>
+              <a:gd name="adj" fmla="val 3271"/>
             </a:avLst>
           </a:prstGeom>
           <a:solidFill>
@@ -48057,7 +48057,7 @@
         </p:nvSpPr>
         <p:spPr>
           <a:xfrm>
-            <a:off x="285292" y="5296204"/>
+            <a:off x="285292" y="5149900"/>
             <a:ext cx="2172614" cy="214884"/>
           </a:xfrm>
           <a:prstGeom prst="roundRect">
@@ -48103,7 +48103,7 @@
         </p:nvSpPr>
         <p:spPr>
           <a:xfrm>
-            <a:off x="310896" y="5317236"/>
+            <a:off x="310896" y="5170932"/>
             <a:ext cx="2121408" cy="173736"/>
           </a:xfrm>
           <a:prstGeom prst="rect">
@@ -48149,12 +48149,12 @@
         </p:nvSpPr>
         <p:spPr>
           <a:xfrm>
-            <a:off x="285292" y="5522976"/>
-            <a:ext cx="2172614" cy="859536"/>
+            <a:off x="285292" y="5376672"/>
+            <a:ext cx="2172614" cy="722376"/>
           </a:xfrm>
           <a:prstGeom prst="roundRect">
             <a:avLst>
-              <a:gd name="adj" fmla="val 2127"/>
+              <a:gd name="adj" fmla="val 2531"/>
             </a:avLst>
           </a:prstGeom>
           <a:solidFill>
@@ -48195,8 +48195,8 @@
         </p:nvSpPr>
         <p:spPr>
           <a:xfrm>
-            <a:off x="365760" y="5550408"/>
-            <a:ext cx="2048255" cy="841247"/>
+            <a:off x="365760" y="5399532"/>
+            <a:ext cx="2048255" cy="704088"/>
           </a:xfrm>
           <a:prstGeom prst="rect">
             <a:avLst/>
@@ -48433,12 +48433,12 @@
         </p:nvSpPr>
         <p:spPr>
           <a:xfrm>
-            <a:off x="3017520" y="5358384"/>
-            <a:ext cx="1965960" cy="950976"/>
+            <a:off x="3017520" y="5212080"/>
+            <a:ext cx="1965960" cy="841248"/>
           </a:xfrm>
           <a:prstGeom prst="roundRect">
             <a:avLst>
-              <a:gd name="adj" fmla="val 3365"/>
+              <a:gd name="adj" fmla="val 3804"/>
             </a:avLst>
           </a:prstGeom>
           <a:solidFill>
@@ -48487,7 +48487,7 @@
         </p:nvSpPr>
         <p:spPr>
           <a:xfrm>
-            <a:off x="3028492" y="5369356"/>
+            <a:off x="3028492" y="5223052"/>
             <a:ext cx="1944014" cy="214884"/>
           </a:xfrm>
           <a:prstGeom prst="roundRect">
@@ -48533,7 +48533,7 @@
         </p:nvSpPr>
         <p:spPr>
           <a:xfrm>
-            <a:off x="3054096" y="5390388"/>
+            <a:off x="3054096" y="5244084"/>
             <a:ext cx="1892807" cy="173736"/>
           </a:xfrm>
           <a:prstGeom prst="rect">
@@ -48579,12 +48579,12 @@
         </p:nvSpPr>
         <p:spPr>
           <a:xfrm>
-            <a:off x="3028492" y="5596128"/>
-            <a:ext cx="1944014" cy="694944"/>
+            <a:off x="3028492" y="5449824"/>
+            <a:ext cx="1944014" cy="585216"/>
           </a:xfrm>
           <a:prstGeom prst="roundRect">
             <a:avLst>
-              <a:gd name="adj" fmla="val 2631"/>
+              <a:gd name="adj" fmla="val 3125"/>
             </a:avLst>
           </a:prstGeom>
           <a:solidFill>
@@ -48625,8 +48625,8 @@
         </p:nvSpPr>
         <p:spPr>
           <a:xfrm>
-            <a:off x="3108960" y="5623560"/>
-            <a:ext cx="1819656" cy="676656"/>
+            <a:off x="3108960" y="5472684"/>
+            <a:ext cx="1819656" cy="566928"/>
           </a:xfrm>
           <a:prstGeom prst="rect">
             <a:avLst/>
@@ -48820,12 +48820,12 @@
         </p:nvSpPr>
         <p:spPr>
           <a:xfrm>
-            <a:off x="5257800" y="5358384"/>
-            <a:ext cx="1965960" cy="950976"/>
+            <a:off x="5257800" y="5212080"/>
+            <a:ext cx="1965960" cy="841248"/>
           </a:xfrm>
           <a:prstGeom prst="roundRect">
             <a:avLst>
-              <a:gd name="adj" fmla="val 3365"/>
+              <a:gd name="adj" fmla="val 3804"/>
             </a:avLst>
           </a:prstGeom>
           <a:solidFill>
@@ -48874,7 +48874,7 @@
         </p:nvSpPr>
         <p:spPr>
           <a:xfrm>
-            <a:off x="5268772" y="5369356"/>
+            <a:off x="5268772" y="5223052"/>
             <a:ext cx="1944014" cy="214884"/>
           </a:xfrm>
           <a:prstGeom prst="roundRect">
@@ -48920,7 +48920,7 @@
         </p:nvSpPr>
         <p:spPr>
           <a:xfrm>
-            <a:off x="5294376" y="5390388"/>
+            <a:off x="5294376" y="5244084"/>
             <a:ext cx="1892807" cy="173736"/>
           </a:xfrm>
           <a:prstGeom prst="rect">
@@ -48966,12 +48966,12 @@
         </p:nvSpPr>
         <p:spPr>
           <a:xfrm>
-            <a:off x="5268772" y="5596128"/>
-            <a:ext cx="1944014" cy="694944"/>
+            <a:off x="5268772" y="5449824"/>
+            <a:ext cx="1944014" cy="585216"/>
           </a:xfrm>
           <a:prstGeom prst="roundRect">
             <a:avLst>
-              <a:gd name="adj" fmla="val 2631"/>
+              <a:gd name="adj" fmla="val 3125"/>
             </a:avLst>
           </a:prstGeom>
           <a:solidFill>
@@ -49012,8 +49012,8 @@
         </p:nvSpPr>
         <p:spPr>
           <a:xfrm>
-            <a:off x="5349240" y="5623560"/>
-            <a:ext cx="1819656" cy="676656"/>
+            <a:off x="5349240" y="5472684"/>
+            <a:ext cx="1819656" cy="566928"/>
           </a:xfrm>
           <a:prstGeom prst="rect">
             <a:avLst/>
@@ -49207,12 +49207,12 @@
         </p:nvSpPr>
         <p:spPr>
           <a:xfrm>
-            <a:off x="7498079" y="5358384"/>
-            <a:ext cx="2103120" cy="950976"/>
+            <a:off x="7498079" y="5212080"/>
+            <a:ext cx="2103120" cy="841248"/>
           </a:xfrm>
           <a:prstGeom prst="roundRect">
             <a:avLst>
-              <a:gd name="adj" fmla="val 3365"/>
+              <a:gd name="adj" fmla="val 3804"/>
             </a:avLst>
           </a:prstGeom>
           <a:solidFill>
@@ -49261,7 +49261,7 @@
         </p:nvSpPr>
         <p:spPr>
           <a:xfrm>
-            <a:off x="7509052" y="5369356"/>
+            <a:off x="7509052" y="5223052"/>
             <a:ext cx="2081174" cy="214884"/>
           </a:xfrm>
           <a:prstGeom prst="roundRect">
@@ -49307,7 +49307,7 @@
         </p:nvSpPr>
         <p:spPr>
           <a:xfrm>
-            <a:off x="7534655" y="5390388"/>
+            <a:off x="7534655" y="5244084"/>
             <a:ext cx="2029967" cy="173736"/>
           </a:xfrm>
           <a:prstGeom prst="rect">
@@ -49353,12 +49353,12 @@
         </p:nvSpPr>
         <p:spPr>
           <a:xfrm>
-            <a:off x="7509052" y="5596128"/>
-            <a:ext cx="2081174" cy="694944"/>
+            <a:off x="7509052" y="5449824"/>
+            <a:ext cx="2081174" cy="585216"/>
           </a:xfrm>
           <a:prstGeom prst="roundRect">
             <a:avLst>
-              <a:gd name="adj" fmla="val 2631"/>
+              <a:gd name="adj" fmla="val 3125"/>
             </a:avLst>
           </a:prstGeom>
           <a:solidFill>
@@ -49399,8 +49399,8 @@
         </p:nvSpPr>
         <p:spPr>
           <a:xfrm>
-            <a:off x="7589519" y="5623560"/>
-            <a:ext cx="1956815" cy="676656"/>
+            <a:off x="7589519" y="5472684"/>
+            <a:ext cx="1956815" cy="566928"/>
           </a:xfrm>
           <a:prstGeom prst="rect">
             <a:avLst/>
@@ -49594,12 +49594,12 @@
         </p:nvSpPr>
         <p:spPr>
           <a:xfrm>
-            <a:off x="9646920" y="5285232"/>
-            <a:ext cx="1920240" cy="877824"/>
+            <a:off x="9646920" y="5138928"/>
+            <a:ext cx="1920240" cy="841248"/>
           </a:xfrm>
           <a:prstGeom prst="roundRect">
             <a:avLst>
-              <a:gd name="adj" fmla="val 3645"/>
+              <a:gd name="adj" fmla="val 3804"/>
             </a:avLst>
           </a:prstGeom>
           <a:solidFill>
@@ -49648,7 +49648,7 @@
         </p:nvSpPr>
         <p:spPr>
           <a:xfrm>
-            <a:off x="9657892" y="5296204"/>
+            <a:off x="9657892" y="5149900"/>
             <a:ext cx="1898294" cy="214884"/>
           </a:xfrm>
           <a:prstGeom prst="roundRect">
@@ -49694,7 +49694,7 @@
         </p:nvSpPr>
         <p:spPr>
           <a:xfrm>
-            <a:off x="9683496" y="5317236"/>
+            <a:off x="9683496" y="5170932"/>
             <a:ext cx="1847088" cy="173736"/>
           </a:xfrm>
           <a:prstGeom prst="rect">
@@ -49740,12 +49740,12 @@
         </p:nvSpPr>
         <p:spPr>
           <a:xfrm>
-            <a:off x="9657892" y="5522976"/>
-            <a:ext cx="1898294" cy="621792"/>
+            <a:off x="9657892" y="5376672"/>
+            <a:ext cx="1898294" cy="585216"/>
           </a:xfrm>
           <a:prstGeom prst="roundRect">
             <a:avLst>
-              <a:gd name="adj" fmla="val 2941"/>
+              <a:gd name="adj" fmla="val 3125"/>
             </a:avLst>
           </a:prstGeom>
           <a:solidFill>
@@ -49786,8 +49786,8 @@
         </p:nvSpPr>
         <p:spPr>
           <a:xfrm>
-            <a:off x="9738360" y="5550408"/>
-            <a:ext cx="1773936" cy="603503"/>
+            <a:off x="9738360" y="5399532"/>
+            <a:ext cx="1773936" cy="566928"/>
           </a:xfrm>
           <a:prstGeom prst="rect">
             <a:avLst/>
@@ -49981,7 +49981,7 @@
         </p:nvCxnSpPr>
         <p:spPr>
           <a:xfrm>
-            <a:off x="2377440" y="1335024"/>
+            <a:off x="2377440" y="1179576"/>
             <a:ext cx="640080" cy="0"/>
           </a:xfrm>
           <a:prstGeom prst="line">
@@ -50004,7 +50004,7 @@
         </p:nvSpPr>
         <p:spPr>
           <a:xfrm>
-            <a:off x="2459736" y="1394460"/>
+            <a:off x="2459736" y="1239012"/>
             <a:ext cx="109728" cy="118872"/>
           </a:xfrm>
           <a:prstGeom prst="rect">
@@ -50050,7 +50050,7 @@
         </p:nvSpPr>
         <p:spPr>
           <a:xfrm>
-            <a:off x="2825496" y="1156716"/>
+            <a:off x="2825496" y="1001268"/>
             <a:ext cx="109728" cy="118872"/>
           </a:xfrm>
           <a:prstGeom prst="rect">
@@ -50096,8 +50096,8 @@
         </p:nvCxnSpPr>
         <p:spPr>
           <a:xfrm>
-            <a:off x="1325880" y="1773936"/>
-            <a:ext cx="0" cy="694944"/>
+            <a:off x="1325880" y="1463040"/>
+            <a:ext cx="0" cy="868680"/>
           </a:xfrm>
           <a:prstGeom prst="line">
             <a:avLst/>
@@ -50119,7 +50119,7 @@
         </p:nvSpPr>
         <p:spPr>
           <a:xfrm>
-            <a:off x="1152143" y="1851660"/>
+            <a:off x="1152143" y="1540764"/>
             <a:ext cx="109728" cy="118872"/>
           </a:xfrm>
           <a:prstGeom prst="rect">
@@ -50165,7 +50165,7 @@
         </p:nvSpPr>
         <p:spPr>
           <a:xfrm>
-            <a:off x="1389888" y="2272284"/>
+            <a:off x="1389888" y="2135124"/>
             <a:ext cx="109728" cy="118872"/>
           </a:xfrm>
           <a:prstGeom prst="rect">
@@ -50211,7 +50211,7 @@
         </p:nvCxnSpPr>
         <p:spPr>
           <a:xfrm>
-            <a:off x="2377440" y="1152144"/>
+            <a:off x="2377440" y="1097280"/>
             <a:ext cx="274320" cy="0"/>
           </a:xfrm>
           <a:prstGeom prst="line">
@@ -50233,8 +50233,8 @@
         </p:nvCxnSpPr>
         <p:spPr>
           <a:xfrm>
-            <a:off x="2651760" y="1152144"/>
-            <a:ext cx="0" cy="1097280"/>
+            <a:off x="2651760" y="1097280"/>
+            <a:ext cx="0" cy="1024128"/>
           </a:xfrm>
           <a:prstGeom prst="line">
             <a:avLst/>
@@ -50255,7 +50255,7 @@
         </p:nvCxnSpPr>
         <p:spPr>
           <a:xfrm>
-            <a:off x="2651760" y="2249424"/>
+            <a:off x="2651760" y="2121408"/>
             <a:ext cx="5394960" cy="0"/>
           </a:xfrm>
           <a:prstGeom prst="line">
@@ -50277,8 +50277,8 @@
         </p:nvCxnSpPr>
         <p:spPr>
           <a:xfrm>
-            <a:off x="8046720" y="2249424"/>
-            <a:ext cx="0" cy="219456"/>
+            <a:off x="8046720" y="2121408"/>
+            <a:ext cx="0" cy="210312"/>
           </a:xfrm>
           <a:prstGeom prst="line">
             <a:avLst/>
@@ -50300,7 +50300,7 @@
         </p:nvSpPr>
         <p:spPr>
           <a:xfrm>
-            <a:off x="2459736" y="1211580"/>
+            <a:off x="2459736" y="1156716"/>
             <a:ext cx="109728" cy="118872"/>
           </a:xfrm>
           <a:prstGeom prst="rect">
@@ -50346,7 +50346,7 @@
         </p:nvSpPr>
         <p:spPr>
           <a:xfrm>
-            <a:off x="8110728" y="2272284"/>
+            <a:off x="8110728" y="2135124"/>
             <a:ext cx="109728" cy="118872"/>
           </a:xfrm>
           <a:prstGeom prst="rect">
@@ -50392,7 +50392,7 @@
         </p:nvCxnSpPr>
         <p:spPr>
           <a:xfrm flipH="1">
-            <a:off x="164592" y="1517904"/>
+            <a:off x="164592" y="1188720"/>
             <a:ext cx="109728" cy="0"/>
           </a:xfrm>
           <a:prstGeom prst="line">
@@ -50414,8 +50414,8 @@
         </p:nvCxnSpPr>
         <p:spPr>
           <a:xfrm>
-            <a:off x="164592" y="1517904"/>
-            <a:ext cx="0" cy="4325112"/>
+            <a:off x="164592" y="1188720"/>
+            <a:ext cx="0" cy="4434840"/>
           </a:xfrm>
           <a:prstGeom prst="line">
             <a:avLst/>
@@ -50436,7 +50436,7 @@
         </p:nvCxnSpPr>
         <p:spPr>
           <a:xfrm>
-            <a:off x="164592" y="5843016"/>
+            <a:off x="164592" y="5623560"/>
             <a:ext cx="109728" cy="0"/>
           </a:xfrm>
           <a:prstGeom prst="line">
@@ -50459,7 +50459,7 @@
         </p:nvSpPr>
         <p:spPr>
           <a:xfrm>
-            <a:off x="82296" y="1339595"/>
+            <a:off x="82296" y="1010412"/>
             <a:ext cx="109728" cy="118872"/>
           </a:xfrm>
           <a:prstGeom prst="rect">
@@ -50505,7 +50505,7 @@
         </p:nvSpPr>
         <p:spPr>
           <a:xfrm>
-            <a:off x="82296" y="5664707"/>
+            <a:off x="82296" y="5445252"/>
             <a:ext cx="109728" cy="118872"/>
           </a:xfrm>
           <a:prstGeom prst="rect">
@@ -50551,8 +50551,8 @@
         </p:nvCxnSpPr>
         <p:spPr>
           <a:xfrm>
-            <a:off x="3749039" y="2176272"/>
-            <a:ext cx="0" cy="146304"/>
+            <a:off x="3749039" y="1874519"/>
+            <a:ext cx="0" cy="173737"/>
           </a:xfrm>
           <a:prstGeom prst="line">
             <a:avLst/>
@@ -50573,7 +50573,7 @@
         </p:nvCxnSpPr>
         <p:spPr>
           <a:xfrm flipH="1">
-            <a:off x="3493008" y="2322576"/>
+            <a:off x="3493008" y="2048256"/>
             <a:ext cx="256031" cy="0"/>
           </a:xfrm>
           <a:prstGeom prst="line">
@@ -50595,8 +50595,8 @@
         </p:nvCxnSpPr>
         <p:spPr>
           <a:xfrm>
-            <a:off x="3493008" y="2322576"/>
-            <a:ext cx="0" cy="146304"/>
+            <a:off x="3493008" y="2048256"/>
+            <a:ext cx="0" cy="283464"/>
           </a:xfrm>
           <a:prstGeom prst="line">
             <a:avLst/>
@@ -50618,7 +50618,7 @@
         </p:nvSpPr>
         <p:spPr>
           <a:xfrm>
-            <a:off x="3575303" y="2253996"/>
+            <a:off x="3575303" y="1952243"/>
             <a:ext cx="109728" cy="118872"/>
           </a:xfrm>
           <a:prstGeom prst="rect">
@@ -50664,7 +50664,7 @@
         </p:nvSpPr>
         <p:spPr>
           <a:xfrm>
-            <a:off x="3557015" y="2272284"/>
+            <a:off x="3557015" y="2135124"/>
             <a:ext cx="109728" cy="118872"/>
           </a:xfrm>
           <a:prstGeom prst="rect">
@@ -50710,8 +50710,8 @@
         </p:nvCxnSpPr>
         <p:spPr>
           <a:xfrm>
-            <a:off x="4114800" y="2176272"/>
-            <a:ext cx="0" cy="201168"/>
+            <a:off x="4114800" y="1874519"/>
+            <a:ext cx="0" cy="320041"/>
           </a:xfrm>
           <a:prstGeom prst="line">
             <a:avLst/>
@@ -50732,7 +50732,7 @@
         </p:nvCxnSpPr>
         <p:spPr>
           <a:xfrm>
-            <a:off x="4114800" y="2377440"/>
+            <a:off x="4114800" y="2194560"/>
             <a:ext cx="1618488" cy="0"/>
           </a:xfrm>
           <a:prstGeom prst="line">
@@ -50754,8 +50754,8 @@
         </p:nvCxnSpPr>
         <p:spPr>
           <a:xfrm>
-            <a:off x="5733288" y="2377440"/>
-            <a:ext cx="0" cy="91440"/>
+            <a:off x="5733288" y="2194560"/>
+            <a:ext cx="0" cy="137160"/>
           </a:xfrm>
           <a:prstGeom prst="line">
             <a:avLst/>
@@ -50777,7 +50777,7 @@
         </p:nvSpPr>
         <p:spPr>
           <a:xfrm>
-            <a:off x="3941064" y="2253996"/>
+            <a:off x="3941064" y="1952243"/>
             <a:ext cx="109728" cy="118872"/>
           </a:xfrm>
           <a:prstGeom prst="rect">
@@ -50823,7 +50823,7 @@
         </p:nvSpPr>
         <p:spPr>
           <a:xfrm>
-            <a:off x="5797296" y="2272284"/>
+            <a:off x="5797296" y="2135124"/>
             <a:ext cx="109728" cy="118872"/>
           </a:xfrm>
           <a:prstGeom prst="rect">
@@ -50869,7 +50869,7 @@
         </p:nvCxnSpPr>
         <p:spPr>
           <a:xfrm flipH="1">
-            <a:off x="9418320" y="3017520"/>
+            <a:off x="9418320" y="2834640"/>
             <a:ext cx="228600" cy="0"/>
           </a:xfrm>
           <a:prstGeom prst="line">
@@ -50891,8 +50891,8 @@
         </p:nvCxnSpPr>
         <p:spPr>
           <a:xfrm flipV="1">
-            <a:off x="9418320" y="2286000"/>
-            <a:ext cx="0" cy="731520"/>
+            <a:off x="9418320" y="2249424"/>
+            <a:ext cx="0" cy="585216"/>
           </a:xfrm>
           <a:prstGeom prst="line">
             <a:avLst/>
@@ -50913,7 +50913,7 @@
         </p:nvCxnSpPr>
         <p:spPr>
           <a:xfrm flipH="1">
-            <a:off x="4846320" y="2286000"/>
+            <a:off x="4846320" y="2249424"/>
             <a:ext cx="4572000" cy="0"/>
           </a:xfrm>
           <a:prstGeom prst="line">
@@ -50935,8 +50935,8 @@
         </p:nvCxnSpPr>
         <p:spPr>
           <a:xfrm flipV="1">
-            <a:off x="4846320" y="2176272"/>
-            <a:ext cx="0" cy="109728"/>
+            <a:off x="4846320" y="1874519"/>
+            <a:ext cx="0" cy="374905"/>
           </a:xfrm>
           <a:prstGeom prst="line">
             <a:avLst/>
@@ -50958,7 +50958,7 @@
         </p:nvSpPr>
         <p:spPr>
           <a:xfrm>
-            <a:off x="9454896" y="2839212"/>
+            <a:off x="9454896" y="2656332"/>
             <a:ext cx="109728" cy="118872"/>
           </a:xfrm>
           <a:prstGeom prst="rect">
@@ -51004,7 +51004,7 @@
         </p:nvSpPr>
         <p:spPr>
           <a:xfrm>
-            <a:off x="4672584" y="2253996"/>
+            <a:off x="4672584" y="1952243"/>
             <a:ext cx="109728" cy="118872"/>
           </a:xfrm>
           <a:prstGeom prst="rect">
@@ -51042,55 +51042,9 @@
           </a:p>
         </p:txBody>
       </p:sp>
-      <p:sp>
-        <p:nvSpPr>
-          <p:cNvPr id="134" name="TextBox 133"/>
-          <p:cNvSpPr txBox="1"/>
-          <p:nvPr/>
-        </p:nvSpPr>
-        <p:spPr>
-          <a:xfrm>
-            <a:off x="6812280" y="2304288"/>
-            <a:ext cx="1554480" cy="109728"/>
-          </a:xfrm>
-          <a:prstGeom prst="rect">
-            <a:avLst/>
-          </a:prstGeom>
-          <a:noFill/>
-        </p:spPr>
-        <p:txBody>
-          <a:bodyPr wrap="square" lIns="0" rIns="0" tIns="0" bIns="0" anchor="t">
-            <a:noAutofit/>
-          </a:bodyPr>
-          <a:lstStyle/>
-          <a:p>
-            <a:pPr algn="l">
-              <a:lnSpc>
-                <a:spcPct val="112000"/>
-              </a:lnSpc>
-              <a:spcBef>
-                <a:spcPts val="0"/>
-              </a:spcBef>
-              <a:spcAft>
-                <a:spcPts val="0"/>
-              </a:spcAft>
-            </a:pPr>
-            <a:r>
-              <a:rPr sz="560" b="1" i="0">
-                <a:solidFill>
-                  <a:srgbClr val="64748B"/>
-                </a:solidFill>
-                <a:latin typeface="Segoe UI"/>
-                <a:ea typeface="Microsoft YaHei"/>
-              </a:rPr>
-              <a:t>到期触发 DESTROY</a:t>
-            </a:r>
-          </a:p>
-        </p:txBody>
-      </p:sp>
       <p:cxnSp>
         <p:nvCxnSpPr>
-          <p:cNvPr id="135" name="Connector 134"/>
+          <p:cNvPr id="134" name="Connector 133"/>
           <p:cNvCxnSpPr/>
           <p:nvPr/>
         </p:nvCxnSpPr>
@@ -51112,7 +51066,7 @@
       </p:cxnSp>
       <p:cxnSp>
         <p:nvCxnSpPr>
-          <p:cNvPr id="136" name="Connector 135"/>
+          <p:cNvPr id="135" name="Connector 134"/>
           <p:cNvCxnSpPr/>
           <p:nvPr/>
         </p:nvCxnSpPr>
@@ -51134,7 +51088,7 @@
       </p:cxnSp>
       <p:cxnSp>
         <p:nvCxnSpPr>
-          <p:cNvPr id="137" name="Connector 136"/>
+          <p:cNvPr id="136" name="Connector 135"/>
           <p:cNvCxnSpPr/>
           <p:nvPr/>
         </p:nvCxnSpPr>
@@ -51156,14 +51110,14 @@
       </p:cxnSp>
       <p:cxnSp>
         <p:nvCxnSpPr>
-          <p:cNvPr id="138" name="Connector 137"/>
+          <p:cNvPr id="137" name="Connector 136"/>
           <p:cNvCxnSpPr/>
           <p:nvPr/>
         </p:nvCxnSpPr>
         <p:spPr>
           <a:xfrm>
             <a:off x="11887200" y="841248"/>
-            <a:ext cx="0" cy="4882896"/>
+            <a:ext cx="0" cy="4782312"/>
           </a:xfrm>
           <a:prstGeom prst="line">
             <a:avLst/>
@@ -51178,13 +51132,13 @@
       </p:cxnSp>
       <p:cxnSp>
         <p:nvCxnSpPr>
-          <p:cNvPr id="139" name="Connector 138"/>
+          <p:cNvPr id="138" name="Connector 137"/>
           <p:cNvCxnSpPr/>
           <p:nvPr/>
         </p:nvCxnSpPr>
         <p:spPr>
           <a:xfrm flipH="1">
-            <a:off x="11567160" y="5724144"/>
+            <a:off x="11567160" y="5623560"/>
             <a:ext cx="320040" cy="0"/>
           </a:xfrm>
           <a:prstGeom prst="line">
@@ -51201,7 +51155,7 @@
       </p:cxnSp>
       <p:sp>
         <p:nvSpPr>
-          <p:cNvPr id="140" name="TextBox 139"/>
+          <p:cNvPr id="139" name="TextBox 138"/>
           <p:cNvSpPr txBox="1"/>
           <p:nvPr/>
         </p:nvSpPr>
@@ -51247,13 +51201,13 @@
       </p:sp>
       <p:sp>
         <p:nvSpPr>
-          <p:cNvPr id="141" name="TextBox 140"/>
+          <p:cNvPr id="140" name="TextBox 139"/>
           <p:cNvSpPr txBox="1"/>
           <p:nvPr/>
         </p:nvSpPr>
         <p:spPr>
           <a:xfrm>
-            <a:off x="11649456" y="5783579"/>
+            <a:off x="11649456" y="5682996"/>
             <a:ext cx="109728" cy="118872"/>
           </a:xfrm>
           <a:prstGeom prst="rect">
@@ -51293,14 +51247,14 @@
       </p:sp>
       <p:cxnSp>
         <p:nvCxnSpPr>
-          <p:cNvPr id="142" name="Connector 141"/>
+          <p:cNvPr id="141" name="Connector 140"/>
           <p:cNvCxnSpPr/>
           <p:nvPr/>
         </p:nvCxnSpPr>
         <p:spPr>
           <a:xfrm>
-            <a:off x="5120640" y="3419856"/>
-            <a:ext cx="0" cy="256031"/>
+            <a:off x="5120640" y="3172968"/>
+            <a:ext cx="0" cy="320040"/>
           </a:xfrm>
           <a:prstGeom prst="line">
             <a:avLst/>
@@ -51315,13 +51269,13 @@
       </p:cxnSp>
       <p:cxnSp>
         <p:nvCxnSpPr>
-          <p:cNvPr id="143" name="Connector 142"/>
+          <p:cNvPr id="142" name="Connector 141"/>
           <p:cNvCxnSpPr/>
           <p:nvPr/>
         </p:nvCxnSpPr>
         <p:spPr>
           <a:xfrm flipH="1">
-            <a:off x="3995928" y="3675887"/>
+            <a:off x="3995928" y="3493008"/>
             <a:ext cx="1124712" cy="0"/>
           </a:xfrm>
           <a:prstGeom prst="line">
@@ -51337,14 +51291,14 @@
       </p:cxnSp>
       <p:cxnSp>
         <p:nvCxnSpPr>
-          <p:cNvPr id="144" name="Connector 143"/>
+          <p:cNvPr id="143" name="Connector 142"/>
           <p:cNvCxnSpPr/>
           <p:nvPr/>
         </p:nvCxnSpPr>
         <p:spPr>
           <a:xfrm>
-            <a:off x="3995928" y="3675887"/>
-            <a:ext cx="0" cy="164593"/>
+            <a:off x="3995928" y="3493008"/>
+            <a:ext cx="0" cy="210312"/>
           </a:xfrm>
           <a:prstGeom prst="line">
             <a:avLst/>
@@ -51360,13 +51314,13 @@
       </p:cxnSp>
       <p:sp>
         <p:nvSpPr>
-          <p:cNvPr id="145" name="TextBox 144"/>
+          <p:cNvPr id="144" name="TextBox 143"/>
           <p:cNvSpPr txBox="1"/>
           <p:nvPr/>
         </p:nvSpPr>
         <p:spPr>
           <a:xfrm>
-            <a:off x="4946904" y="3497580"/>
+            <a:off x="4946904" y="3250692"/>
             <a:ext cx="109728" cy="118872"/>
           </a:xfrm>
           <a:prstGeom prst="rect">
@@ -51406,13 +51360,13 @@
       </p:sp>
       <p:sp>
         <p:nvSpPr>
-          <p:cNvPr id="146" name="TextBox 145"/>
+          <p:cNvPr id="145" name="TextBox 144"/>
           <p:cNvSpPr txBox="1"/>
           <p:nvPr/>
         </p:nvSpPr>
         <p:spPr>
           <a:xfrm>
-            <a:off x="4059936" y="3643884"/>
+            <a:off x="4059936" y="3506724"/>
             <a:ext cx="109728" cy="118872"/>
           </a:xfrm>
           <a:prstGeom prst="rect">
@@ -51452,13 +51406,13 @@
       </p:sp>
       <p:cxnSp>
         <p:nvCxnSpPr>
-          <p:cNvPr id="147" name="Connector 146"/>
+          <p:cNvPr id="146" name="Connector 145"/>
           <p:cNvCxnSpPr/>
           <p:nvPr/>
         </p:nvCxnSpPr>
         <p:spPr>
           <a:xfrm>
-            <a:off x="6720840" y="3017520"/>
+            <a:off x="6720840" y="2834640"/>
             <a:ext cx="137160" cy="0"/>
           </a:xfrm>
           <a:prstGeom prst="line">
@@ -51474,14 +51428,14 @@
       </p:cxnSp>
       <p:cxnSp>
         <p:nvCxnSpPr>
-          <p:cNvPr id="148" name="Connector 147"/>
+          <p:cNvPr id="147" name="Connector 146"/>
           <p:cNvCxnSpPr/>
           <p:nvPr/>
         </p:nvCxnSpPr>
         <p:spPr>
           <a:xfrm>
-            <a:off x="6858000" y="3017520"/>
-            <a:ext cx="0" cy="1298448"/>
+            <a:off x="6858000" y="2834640"/>
+            <a:ext cx="0" cy="1371600"/>
           </a:xfrm>
           <a:prstGeom prst="line">
             <a:avLst/>
@@ -51496,13 +51450,13 @@
       </p:cxnSp>
       <p:cxnSp>
         <p:nvCxnSpPr>
-          <p:cNvPr id="149" name="Connector 148"/>
+          <p:cNvPr id="148" name="Connector 147"/>
           <p:cNvCxnSpPr/>
           <p:nvPr/>
         </p:nvCxnSpPr>
         <p:spPr>
           <a:xfrm>
-            <a:off x="6858000" y="4315968"/>
+            <a:off x="6858000" y="4206240"/>
             <a:ext cx="365760" cy="0"/>
           </a:xfrm>
           <a:prstGeom prst="line">
@@ -51519,13 +51473,13 @@
       </p:cxnSp>
       <p:sp>
         <p:nvSpPr>
-          <p:cNvPr id="150" name="TextBox 149"/>
+          <p:cNvPr id="149" name="TextBox 148"/>
           <p:cNvSpPr txBox="1"/>
           <p:nvPr/>
         </p:nvSpPr>
         <p:spPr>
           <a:xfrm>
-            <a:off x="6803136" y="3076956"/>
+            <a:off x="6803136" y="2894076"/>
             <a:ext cx="109728" cy="118872"/>
           </a:xfrm>
           <a:prstGeom prst="rect">
@@ -51565,13 +51519,13 @@
       </p:sp>
       <p:sp>
         <p:nvSpPr>
-          <p:cNvPr id="151" name="TextBox 150"/>
+          <p:cNvPr id="150" name="TextBox 149"/>
           <p:cNvSpPr txBox="1"/>
           <p:nvPr/>
         </p:nvSpPr>
         <p:spPr>
           <a:xfrm>
-            <a:off x="7031736" y="4137659"/>
+            <a:off x="7031736" y="4027931"/>
             <a:ext cx="109728" cy="118872"/>
           </a:xfrm>
           <a:prstGeom prst="rect">
@@ -51611,13 +51565,13 @@
       </p:sp>
       <p:cxnSp>
         <p:nvCxnSpPr>
-          <p:cNvPr id="152" name="Connector 151"/>
+          <p:cNvPr id="151" name="Connector 150"/>
           <p:cNvCxnSpPr/>
           <p:nvPr/>
         </p:nvCxnSpPr>
         <p:spPr>
           <a:xfrm>
-            <a:off x="7223760" y="4626864"/>
+            <a:off x="7223760" y="4407408"/>
             <a:ext cx="274319" cy="0"/>
           </a:xfrm>
           <a:prstGeom prst="line">
@@ -51634,13 +51588,13 @@
       </p:cxnSp>
       <p:sp>
         <p:nvSpPr>
-          <p:cNvPr id="153" name="TextBox 152"/>
+          <p:cNvPr id="152" name="TextBox 151"/>
           <p:cNvSpPr txBox="1"/>
           <p:nvPr/>
         </p:nvSpPr>
         <p:spPr>
           <a:xfrm>
-            <a:off x="7306056" y="4686299"/>
+            <a:off x="7306056" y="4466844"/>
             <a:ext cx="109728" cy="118872"/>
           </a:xfrm>
           <a:prstGeom prst="rect">
@@ -51680,13 +51634,13 @@
       </p:sp>
       <p:sp>
         <p:nvSpPr>
-          <p:cNvPr id="154" name="TextBox 153"/>
+          <p:cNvPr id="153" name="TextBox 152"/>
           <p:cNvSpPr txBox="1"/>
           <p:nvPr/>
         </p:nvSpPr>
         <p:spPr>
           <a:xfrm>
-            <a:off x="7306055" y="4448555"/>
+            <a:off x="7306055" y="4229100"/>
             <a:ext cx="109728" cy="118872"/>
           </a:xfrm>
           <a:prstGeom prst="rect">
@@ -51726,14 +51680,14 @@
       </p:sp>
       <p:cxnSp>
         <p:nvCxnSpPr>
-          <p:cNvPr id="155" name="Connector 154"/>
+          <p:cNvPr id="154" name="Connector 153"/>
           <p:cNvCxnSpPr/>
           <p:nvPr/>
         </p:nvCxnSpPr>
         <p:spPr>
           <a:xfrm>
-            <a:off x="10607040" y="1847088"/>
-            <a:ext cx="0" cy="621792"/>
+            <a:off x="10607040" y="1737360"/>
+            <a:ext cx="0" cy="594360"/>
           </a:xfrm>
           <a:prstGeom prst="line">
             <a:avLst/>
@@ -51749,13 +51703,13 @@
       </p:cxnSp>
       <p:sp>
         <p:nvSpPr>
-          <p:cNvPr id="156" name="TextBox 155"/>
+          <p:cNvPr id="155" name="TextBox 154"/>
           <p:cNvSpPr txBox="1"/>
           <p:nvPr/>
         </p:nvSpPr>
         <p:spPr>
           <a:xfrm>
-            <a:off x="10433303" y="1924812"/>
+            <a:off x="10433303" y="1815084"/>
             <a:ext cx="109728" cy="118872"/>
           </a:xfrm>
           <a:prstGeom prst="rect">
@@ -51795,13 +51749,13 @@
       </p:sp>
       <p:sp>
         <p:nvSpPr>
-          <p:cNvPr id="157" name="TextBox 156"/>
+          <p:cNvPr id="156" name="TextBox 155"/>
           <p:cNvSpPr txBox="1"/>
           <p:nvPr/>
         </p:nvSpPr>
         <p:spPr>
           <a:xfrm>
-            <a:off x="10671048" y="2272284"/>
+            <a:off x="10671048" y="2135124"/>
             <a:ext cx="109728" cy="118872"/>
           </a:xfrm>
           <a:prstGeom prst="rect">
@@ -51841,14 +51795,14 @@
       </p:sp>
       <p:cxnSp>
         <p:nvCxnSpPr>
-          <p:cNvPr id="158" name="Connector 157"/>
+          <p:cNvPr id="157" name="Connector 156"/>
           <p:cNvCxnSpPr/>
           <p:nvPr/>
         </p:nvCxnSpPr>
         <p:spPr>
           <a:xfrm>
-            <a:off x="10716768" y="3584448"/>
-            <a:ext cx="0" cy="256032"/>
+            <a:off x="10716768" y="3310128"/>
+            <a:ext cx="0" cy="393192"/>
           </a:xfrm>
           <a:prstGeom prst="line">
             <a:avLst/>
@@ -51864,13 +51818,13 @@
       </p:cxnSp>
       <p:sp>
         <p:nvSpPr>
-          <p:cNvPr id="159" name="TextBox 158"/>
+          <p:cNvPr id="158" name="TextBox 157"/>
           <p:cNvSpPr txBox="1"/>
           <p:nvPr/>
         </p:nvSpPr>
         <p:spPr>
           <a:xfrm>
-            <a:off x="10543032" y="3662172"/>
+            <a:off x="10543032" y="3387852"/>
             <a:ext cx="109728" cy="118872"/>
           </a:xfrm>
           <a:prstGeom prst="rect">
@@ -51910,13 +51864,13 @@
       </p:sp>
       <p:sp>
         <p:nvSpPr>
-          <p:cNvPr id="160" name="TextBox 159"/>
+          <p:cNvPr id="159" name="TextBox 158"/>
           <p:cNvSpPr txBox="1"/>
           <p:nvPr/>
         </p:nvSpPr>
         <p:spPr>
           <a:xfrm>
-            <a:off x="10780776" y="3643884"/>
+            <a:off x="10780776" y="3506724"/>
             <a:ext cx="109728" cy="118872"/>
           </a:xfrm>
           <a:prstGeom prst="rect">
@@ -51956,13 +51910,13 @@
       </p:sp>
       <p:cxnSp>
         <p:nvCxnSpPr>
-          <p:cNvPr id="161" name="Connector 160"/>
+          <p:cNvPr id="160" name="Connector 159"/>
           <p:cNvCxnSpPr/>
           <p:nvPr/>
         </p:nvCxnSpPr>
         <p:spPr>
           <a:xfrm>
-            <a:off x="2468880" y="5760720"/>
+            <a:off x="2468880" y="5623560"/>
             <a:ext cx="548640" cy="0"/>
           </a:xfrm>
           <a:prstGeom prst="line">
@@ -51979,13 +51933,13 @@
       </p:cxnSp>
       <p:sp>
         <p:nvSpPr>
-          <p:cNvPr id="162" name="TextBox 161"/>
+          <p:cNvPr id="161" name="TextBox 160"/>
           <p:cNvSpPr txBox="1"/>
           <p:nvPr/>
         </p:nvSpPr>
         <p:spPr>
           <a:xfrm>
-            <a:off x="2551176" y="5820155"/>
+            <a:off x="2551176" y="5682996"/>
             <a:ext cx="109728" cy="118872"/>
           </a:xfrm>
           <a:prstGeom prst="rect">
@@ -52025,13 +51979,13 @@
       </p:sp>
       <p:sp>
         <p:nvSpPr>
-          <p:cNvPr id="163" name="TextBox 162"/>
+          <p:cNvPr id="162" name="TextBox 161"/>
           <p:cNvSpPr txBox="1"/>
           <p:nvPr/>
         </p:nvSpPr>
         <p:spPr>
           <a:xfrm>
-            <a:off x="2825496" y="5582412"/>
+            <a:off x="2825496" y="5445252"/>
             <a:ext cx="109728" cy="118872"/>
           </a:xfrm>
           <a:prstGeom prst="rect">
@@ -52071,14 +52025,14 @@
       </p:sp>
       <p:cxnSp>
         <p:nvCxnSpPr>
-          <p:cNvPr id="164" name="Connector 163"/>
+          <p:cNvPr id="163" name="Connector 162"/>
           <p:cNvCxnSpPr/>
           <p:nvPr/>
         </p:nvCxnSpPr>
         <p:spPr>
           <a:xfrm>
-            <a:off x="1252728" y="6400800"/>
-            <a:ext cx="0" cy="128016"/>
+            <a:off x="1252728" y="6117336"/>
+            <a:ext cx="0" cy="192024"/>
           </a:xfrm>
           <a:prstGeom prst="line">
             <a:avLst/>
@@ -52093,13 +52047,13 @@
       </p:cxnSp>
       <p:cxnSp>
         <p:nvCxnSpPr>
-          <p:cNvPr id="165" name="Connector 164"/>
+          <p:cNvPr id="164" name="Connector 163"/>
           <p:cNvCxnSpPr/>
           <p:nvPr/>
         </p:nvCxnSpPr>
         <p:spPr>
           <a:xfrm>
-            <a:off x="1252728" y="6528816"/>
+            <a:off x="1252728" y="6309360"/>
             <a:ext cx="4983480" cy="0"/>
           </a:xfrm>
           <a:prstGeom prst="line">
@@ -52115,14 +52069,14 @@
       </p:cxnSp>
       <p:cxnSp>
         <p:nvCxnSpPr>
-          <p:cNvPr id="166" name="Connector 165"/>
+          <p:cNvPr id="165" name="Connector 164"/>
           <p:cNvCxnSpPr/>
           <p:nvPr/>
         </p:nvCxnSpPr>
         <p:spPr>
           <a:xfrm flipV="1">
-            <a:off x="6236208" y="6309360"/>
-            <a:ext cx="0" cy="219456"/>
+            <a:off x="6236208" y="6053328"/>
+            <a:ext cx="0" cy="256032"/>
           </a:xfrm>
           <a:prstGeom prst="line">
             <a:avLst/>
@@ -52138,13 +52092,13 @@
       </p:cxnSp>
       <p:sp>
         <p:nvSpPr>
-          <p:cNvPr id="167" name="TextBox 166"/>
+          <p:cNvPr id="166" name="TextBox 165"/>
           <p:cNvSpPr txBox="1"/>
           <p:nvPr/>
         </p:nvSpPr>
         <p:spPr>
           <a:xfrm>
-            <a:off x="1078992" y="6478524"/>
+            <a:off x="1078992" y="6195060"/>
             <a:ext cx="109728" cy="118872"/>
           </a:xfrm>
           <a:prstGeom prst="rect">
@@ -52184,13 +52138,13 @@
       </p:sp>
       <p:sp>
         <p:nvSpPr>
-          <p:cNvPr id="168" name="TextBox 167"/>
+          <p:cNvPr id="167" name="TextBox 166"/>
           <p:cNvSpPr txBox="1"/>
           <p:nvPr/>
         </p:nvSpPr>
         <p:spPr>
           <a:xfrm>
-            <a:off x="6062472" y="6387084"/>
+            <a:off x="6062472" y="6131052"/>
             <a:ext cx="109728" cy="118872"/>
           </a:xfrm>
           <a:prstGeom prst="rect">
@@ -52230,14 +52184,14 @@
       </p:sp>
       <p:cxnSp>
         <p:nvCxnSpPr>
-          <p:cNvPr id="169" name="Connector 168"/>
+          <p:cNvPr id="168" name="Connector 167"/>
           <p:cNvCxnSpPr/>
           <p:nvPr/>
         </p:nvCxnSpPr>
         <p:spPr>
           <a:xfrm>
-            <a:off x="2011680" y="6400800"/>
-            <a:ext cx="0" cy="219456"/>
+            <a:off x="2011680" y="6117336"/>
+            <a:ext cx="0" cy="374904"/>
           </a:xfrm>
           <a:prstGeom prst="line">
             <a:avLst/>
@@ -52252,13 +52206,13 @@
       </p:cxnSp>
       <p:cxnSp>
         <p:nvCxnSpPr>
-          <p:cNvPr id="170" name="Connector 169"/>
+          <p:cNvPr id="169" name="Connector 168"/>
           <p:cNvCxnSpPr/>
           <p:nvPr/>
         </p:nvCxnSpPr>
         <p:spPr>
           <a:xfrm>
-            <a:off x="2011680" y="6620256"/>
+            <a:off x="2011680" y="6492240"/>
             <a:ext cx="6537960" cy="0"/>
           </a:xfrm>
           <a:prstGeom prst="line">
@@ -52274,14 +52228,14 @@
       </p:cxnSp>
       <p:cxnSp>
         <p:nvCxnSpPr>
-          <p:cNvPr id="171" name="Connector 170"/>
+          <p:cNvPr id="170" name="Connector 169"/>
           <p:cNvCxnSpPr/>
           <p:nvPr/>
         </p:nvCxnSpPr>
         <p:spPr>
           <a:xfrm flipV="1">
-            <a:off x="8549640" y="6309360"/>
-            <a:ext cx="0" cy="310896"/>
+            <a:off x="8549640" y="6053328"/>
+            <a:ext cx="0" cy="438912"/>
           </a:xfrm>
           <a:prstGeom prst="line">
             <a:avLst/>
@@ -52297,13 +52251,13 @@
       </p:cxnSp>
       <p:sp>
         <p:nvSpPr>
-          <p:cNvPr id="172" name="TextBox 171"/>
+          <p:cNvPr id="171" name="TextBox 170"/>
           <p:cNvSpPr txBox="1"/>
           <p:nvPr/>
         </p:nvSpPr>
         <p:spPr>
           <a:xfrm>
-            <a:off x="1837944" y="6478524"/>
+            <a:off x="1837944" y="6195060"/>
             <a:ext cx="109728" cy="118872"/>
           </a:xfrm>
           <a:prstGeom prst="rect">
@@ -52343,13 +52297,13 @@
       </p:sp>
       <p:sp>
         <p:nvSpPr>
-          <p:cNvPr id="173" name="TextBox 172"/>
+          <p:cNvPr id="172" name="TextBox 171"/>
           <p:cNvSpPr txBox="1"/>
           <p:nvPr/>
         </p:nvSpPr>
         <p:spPr>
           <a:xfrm>
-            <a:off x="8375903" y="6387084"/>
+            <a:off x="8375903" y="6131052"/>
             <a:ext cx="109728" cy="118872"/>
           </a:xfrm>
           <a:prstGeom prst="rect">
@@ -52383,6 +52337,52 @@
                 <a:ea typeface="Microsoft YaHei"/>
               </a:rPr>
               <a:t>N</a:t>
+            </a:r>
+          </a:p>
+        </p:txBody>
+      </p:sp>
+      <p:sp>
+        <p:nvSpPr>
+          <p:cNvPr id="173" name="TextBox 172"/>
+          <p:cNvSpPr txBox="1"/>
+          <p:nvPr/>
+        </p:nvSpPr>
+        <p:spPr>
+          <a:xfrm>
+            <a:off x="9445752" y="2304288"/>
+            <a:ext cx="164592" cy="512064"/>
+          </a:xfrm>
+          <a:prstGeom prst="rect">
+            <a:avLst/>
+          </a:prstGeom>
+          <a:noFill/>
+        </p:spPr>
+        <p:txBody>
+          <a:bodyPr wrap="square" lIns="0" rIns="0" tIns="0" bIns="0" anchor="ctr" vert="eaVert">
+            <a:noAutofit/>
+          </a:bodyPr>
+          <a:lstStyle/>
+          <a:p>
+            <a:pPr algn="ctr">
+              <a:lnSpc>
+                <a:spcPct val="112000"/>
+              </a:lnSpc>
+              <a:spcBef>
+                <a:spcPts val="0"/>
+              </a:spcBef>
+              <a:spcAft>
+                <a:spcPts val="0"/>
+              </a:spcAft>
+            </a:pPr>
+            <a:r>
+              <a:rPr sz="560" b="1" i="0">
+                <a:solidFill>
+                  <a:srgbClr val="E11D48"/>
+                </a:solidFill>
+                <a:latin typeface="Segoe UI"/>
+                <a:ea typeface="Microsoft YaHei"/>
+              </a:rPr>
+              <a:t>到期触发销毁</a:t>
             </a:r>
           </a:p>
         </p:txBody>

--- a/report/方案B_B2_架构图集.pptx
+++ b/report/方案B_B2_架构图集.pptx
@@ -33327,8 +33327,8 @@
         </p:nvSpPr>
         <p:spPr>
           <a:xfrm>
-            <a:off x="5760720" y="4974336"/>
-            <a:ext cx="6172200" cy="237744"/>
+            <a:off x="274320" y="5577840"/>
+            <a:ext cx="11658600" cy="237744"/>
           </a:xfrm>
           <a:prstGeom prst="roundRect">
             <a:avLst>
@@ -33375,8 +33375,8 @@
         </p:nvSpPr>
         <p:spPr>
           <a:xfrm>
-            <a:off x="5852159" y="4974336"/>
-            <a:ext cx="5989320" cy="237744"/>
+            <a:off x="365760" y="5577840"/>
+            <a:ext cx="11475720" cy="237744"/>
           </a:xfrm>
           <a:prstGeom prst="rect">
             <a:avLst/>
@@ -36431,7 +36431,7 @@
         </p:nvSpPr>
         <p:spPr>
           <a:xfrm>
-            <a:off x="2926080" y="5029200"/>
+            <a:off x="2926080" y="4937760"/>
             <a:ext cx="1645920" cy="566928"/>
           </a:xfrm>
           <a:prstGeom prst="roundRect">
@@ -36485,7 +36485,7 @@
         </p:nvSpPr>
         <p:spPr>
           <a:xfrm>
-            <a:off x="2937052" y="5040172"/>
+            <a:off x="2937052" y="4948732"/>
             <a:ext cx="1623974" cy="214884"/>
           </a:xfrm>
           <a:prstGeom prst="roundRect">
@@ -36531,7 +36531,7 @@
         </p:nvSpPr>
         <p:spPr>
           <a:xfrm>
-            <a:off x="2962656" y="5061204"/>
+            <a:off x="2962656" y="4969764"/>
             <a:ext cx="1572768" cy="173736"/>
           </a:xfrm>
           <a:prstGeom prst="rect">
@@ -36577,7 +36577,7 @@
         </p:nvSpPr>
         <p:spPr>
           <a:xfrm>
-            <a:off x="2937052" y="5266944"/>
+            <a:off x="2937052" y="5175504"/>
             <a:ext cx="1623974" cy="310896"/>
           </a:xfrm>
           <a:prstGeom prst="roundRect">
@@ -36623,7 +36623,7 @@
         </p:nvSpPr>
         <p:spPr>
           <a:xfrm>
-            <a:off x="3017520" y="5289804"/>
+            <a:off x="3017520" y="5198364"/>
             <a:ext cx="1499616" cy="292608"/>
           </a:xfrm>
           <a:prstGeom prst="rect">
@@ -39140,8 +39140,8 @@
         </p:nvSpPr>
         <p:spPr>
           <a:xfrm>
-            <a:off x="5760720" y="5230368"/>
-            <a:ext cx="1965960" cy="841248"/>
+            <a:off x="274320" y="5870448"/>
+            <a:ext cx="3703320" cy="841248"/>
           </a:xfrm>
           <a:prstGeom prst="roundRect">
             <a:avLst>
@@ -39194,8 +39194,8 @@
         </p:nvSpPr>
         <p:spPr>
           <a:xfrm>
-            <a:off x="5771692" y="5241340"/>
-            <a:ext cx="1944014" cy="214884"/>
+            <a:off x="285292" y="5881420"/>
+            <a:ext cx="3681374" cy="214884"/>
           </a:xfrm>
           <a:prstGeom prst="roundRect">
             <a:avLst>
@@ -39240,8 +39240,8 @@
         </p:nvSpPr>
         <p:spPr>
           <a:xfrm>
-            <a:off x="5797296" y="5262372"/>
-            <a:ext cx="1892807" cy="173736"/>
+            <a:off x="310896" y="5902452"/>
+            <a:ext cx="3630168" cy="173736"/>
           </a:xfrm>
           <a:prstGeom prst="rect">
             <a:avLst/>
@@ -39286,8 +39286,8 @@
         </p:nvSpPr>
         <p:spPr>
           <a:xfrm>
-            <a:off x="5771692" y="5468112"/>
-            <a:ext cx="1944014" cy="585216"/>
+            <a:off x="285292" y="6108192"/>
+            <a:ext cx="3681374" cy="585216"/>
           </a:xfrm>
           <a:prstGeom prst="roundRect">
             <a:avLst>
@@ -39332,8 +39332,8 @@
         </p:nvSpPr>
         <p:spPr>
           <a:xfrm>
-            <a:off x="5852159" y="5490972"/>
-            <a:ext cx="1819656" cy="566928"/>
+            <a:off x="365760" y="6131052"/>
+            <a:ext cx="3557015" cy="566928"/>
           </a:xfrm>
           <a:prstGeom prst="rect">
             <a:avLst/>
@@ -39527,8 +39527,8 @@
         </p:nvSpPr>
         <p:spPr>
           <a:xfrm>
-            <a:off x="7955279" y="5230368"/>
-            <a:ext cx="1965960" cy="704088"/>
+            <a:off x="4160520" y="5870448"/>
+            <a:ext cx="3703320" cy="704088"/>
           </a:xfrm>
           <a:prstGeom prst="roundRect">
             <a:avLst>
@@ -39581,8 +39581,8 @@
         </p:nvSpPr>
         <p:spPr>
           <a:xfrm>
-            <a:off x="7966252" y="5241340"/>
-            <a:ext cx="1944014" cy="214884"/>
+            <a:off x="4171492" y="5881420"/>
+            <a:ext cx="3681374" cy="214884"/>
           </a:xfrm>
           <a:prstGeom prst="roundRect">
             <a:avLst>
@@ -39627,8 +39627,8 @@
         </p:nvSpPr>
         <p:spPr>
           <a:xfrm>
-            <a:off x="7991855" y="5262372"/>
-            <a:ext cx="1892807" cy="173736"/>
+            <a:off x="4197096" y="5902452"/>
+            <a:ext cx="3630168" cy="173736"/>
           </a:xfrm>
           <a:prstGeom prst="rect">
             <a:avLst/>
@@ -39673,8 +39673,8 @@
         </p:nvSpPr>
         <p:spPr>
           <a:xfrm>
-            <a:off x="7966252" y="5468112"/>
-            <a:ext cx="1944014" cy="448056"/>
+            <a:off x="4171492" y="6108192"/>
+            <a:ext cx="3681374" cy="448056"/>
           </a:xfrm>
           <a:prstGeom prst="roundRect">
             <a:avLst>
@@ -39719,8 +39719,8 @@
         </p:nvSpPr>
         <p:spPr>
           <a:xfrm>
-            <a:off x="8046719" y="5490972"/>
-            <a:ext cx="1819656" cy="429768"/>
+            <a:off x="4251959" y="6131052"/>
+            <a:ext cx="3557015" cy="429768"/>
           </a:xfrm>
           <a:prstGeom prst="rect">
             <a:avLst/>
@@ -39871,8 +39871,8 @@
         </p:nvSpPr>
         <p:spPr>
           <a:xfrm>
-            <a:off x="10149840" y="5230368"/>
-            <a:ext cx="1783080" cy="704088"/>
+            <a:off x="8046720" y="5870448"/>
+            <a:ext cx="3886200" cy="704088"/>
           </a:xfrm>
           <a:prstGeom prst="roundRect">
             <a:avLst>
@@ -39925,8 +39925,8 @@
         </p:nvSpPr>
         <p:spPr>
           <a:xfrm>
-            <a:off x="10160812" y="5241340"/>
-            <a:ext cx="1761134" cy="214884"/>
+            <a:off x="8057692" y="5881420"/>
+            <a:ext cx="3864254" cy="214884"/>
           </a:xfrm>
           <a:prstGeom prst="roundRect">
             <a:avLst>
@@ -39971,8 +39971,8 @@
         </p:nvSpPr>
         <p:spPr>
           <a:xfrm>
-            <a:off x="10186415" y="5262372"/>
-            <a:ext cx="1709928" cy="173736"/>
+            <a:off x="8083296" y="5902452"/>
+            <a:ext cx="3813048" cy="173736"/>
           </a:xfrm>
           <a:prstGeom prst="rect">
             <a:avLst/>
@@ -40017,8 +40017,8 @@
         </p:nvSpPr>
         <p:spPr>
           <a:xfrm>
-            <a:off x="10160812" y="5468112"/>
-            <a:ext cx="1761134" cy="448056"/>
+            <a:off x="8057692" y="6108192"/>
+            <a:ext cx="3864254" cy="448056"/>
           </a:xfrm>
           <a:prstGeom prst="roundRect">
             <a:avLst>
@@ -40063,8 +40063,8 @@
         </p:nvSpPr>
         <p:spPr>
           <a:xfrm>
-            <a:off x="10241280" y="5490972"/>
-            <a:ext cx="1636776" cy="429768"/>
+            <a:off x="8138160" y="6131052"/>
+            <a:ext cx="3739896" cy="429768"/>
           </a:xfrm>
           <a:prstGeom prst="rect">
             <a:avLst/>
@@ -40972,7 +40972,7 @@
         <p:spPr>
           <a:xfrm>
             <a:off x="2331720" y="1645920"/>
-            <a:ext cx="0" cy="3666744"/>
+            <a:ext cx="0" cy="3575304"/>
           </a:xfrm>
           <a:prstGeom prst="line">
             <a:avLst/>
@@ -40993,7 +40993,7 @@
         </p:nvCxnSpPr>
         <p:spPr>
           <a:xfrm>
-            <a:off x="2331720" y="5312664"/>
+            <a:off x="2331720" y="5221224"/>
             <a:ext cx="594360" cy="0"/>
           </a:xfrm>
           <a:prstGeom prst="line">
@@ -41062,7 +41062,7 @@
         </p:nvSpPr>
         <p:spPr>
           <a:xfrm>
-            <a:off x="2734056" y="5134355"/>
+            <a:off x="2734056" y="5042916"/>
             <a:ext cx="109728" cy="118872"/>
           </a:xfrm>
           <a:prstGeom prst="rect">
@@ -41109,7 +41109,7 @@
         <p:spPr>
           <a:xfrm>
             <a:off x="3977639" y="4791456"/>
-            <a:ext cx="0" cy="237744"/>
+            <a:ext cx="0" cy="146304"/>
           </a:xfrm>
           <a:prstGeom prst="line">
             <a:avLst/>
@@ -41177,7 +41177,7 @@
         </p:nvSpPr>
         <p:spPr>
           <a:xfrm>
-            <a:off x="4041648" y="4832603"/>
+            <a:off x="4041648" y="4741164"/>
             <a:ext cx="109728" cy="118872"/>
           </a:xfrm>
           <a:prstGeom prst="rect">
@@ -42133,8 +42133,8 @@
         </p:nvCxnSpPr>
         <p:spPr>
           <a:xfrm flipH="1">
-            <a:off x="5623560" y="5614416"/>
-            <a:ext cx="137160" cy="0"/>
+            <a:off x="164592" y="6291072"/>
+            <a:ext cx="109728" cy="0"/>
           </a:xfrm>
           <a:prstGeom prst="line">
             <a:avLst/>
@@ -42156,9 +42156,9 @@
           <p:nvPr/>
         </p:nvCxnSpPr>
         <p:spPr>
-          <a:xfrm>
-            <a:off x="5623560" y="5614416"/>
-            <a:ext cx="0" cy="832104"/>
+          <a:xfrm flipV="1">
+            <a:off x="164592" y="1645920"/>
+            <a:ext cx="0" cy="4645152"/>
           </a:xfrm>
           <a:prstGeom prst="line">
             <a:avLst/>
@@ -42180,9 +42180,9 @@
           <p:nvPr/>
         </p:nvCxnSpPr>
         <p:spPr>
-          <a:xfrm flipH="1">
-            <a:off x="164592" y="6446520"/>
-            <a:ext cx="5458968" cy="0"/>
+          <a:xfrm>
+            <a:off x="164592" y="1645920"/>
+            <a:ext cx="109728" cy="0"/>
           </a:xfrm>
           <a:prstGeom prst="line">
             <a:avLst/>
@@ -42197,63 +42197,15 @@
           <a:effectLst/>
         </p:spPr>
       </p:cxnSp>
-      <p:cxnSp>
-        <p:nvCxnSpPr>
-          <p:cNvPr id="164" name="Connector 163"/>
-          <p:cNvCxnSpPr/>
-          <p:nvPr/>
-        </p:nvCxnSpPr>
-        <p:spPr>
-          <a:xfrm flipV="1">
-            <a:off x="164592" y="1645920"/>
-            <a:ext cx="0" cy="4800600"/>
-          </a:xfrm>
-          <a:prstGeom prst="line">
-            <a:avLst/>
-          </a:prstGeom>
-          <a:ln w="15240">
-            <a:solidFill>
-              <a:srgbClr val="666666"/>
-            </a:solidFill>
-            <a:prstDash val="dash"/>
-            <a:tailEnd type="triangle" w="med" len="med"/>
-          </a:ln>
-          <a:effectLst/>
-        </p:spPr>
-      </p:cxnSp>
-      <p:cxnSp>
-        <p:nvCxnSpPr>
-          <p:cNvPr id="165" name="Connector 164"/>
-          <p:cNvCxnSpPr/>
-          <p:nvPr/>
-        </p:nvCxnSpPr>
-        <p:spPr>
-          <a:xfrm>
-            <a:off x="164592" y="1645920"/>
-            <a:ext cx="109728" cy="0"/>
-          </a:xfrm>
-          <a:prstGeom prst="line">
-            <a:avLst/>
-          </a:prstGeom>
-          <a:ln w="15240">
-            <a:solidFill>
-              <a:srgbClr val="666666"/>
-            </a:solidFill>
-            <a:prstDash val="dash"/>
-            <a:tailEnd type="triangle" w="med" len="med"/>
-          </a:ln>
-          <a:effectLst/>
-        </p:spPr>
-      </p:cxnSp>
-      <p:sp>
-        <p:nvSpPr>
-          <p:cNvPr id="166" name="TextBox 165"/>
+      <p:sp>
+        <p:nvSpPr>
+          <p:cNvPr id="164" name="TextBox 163"/>
           <p:cNvSpPr txBox="1"/>
           <p:nvPr/>
         </p:nvSpPr>
         <p:spPr>
           <a:xfrm>
-            <a:off x="5568696" y="5436107"/>
+            <a:off x="82296" y="6112764"/>
             <a:ext cx="109728" cy="118872"/>
           </a:xfrm>
           <a:prstGeom prst="rect">
@@ -42293,7 +42245,7 @@
       </p:sp>
       <p:sp>
         <p:nvSpPr>
-          <p:cNvPr id="167" name="TextBox 166"/>
+          <p:cNvPr id="165" name="TextBox 164"/>
           <p:cNvSpPr txBox="1"/>
           <p:nvPr/>
         </p:nvSpPr>
@@ -42339,14 +42291,14 @@
       </p:sp>
       <p:sp>
         <p:nvSpPr>
-          <p:cNvPr id="168" name="TextBox 167"/>
+          <p:cNvPr id="166" name="TextBox 165"/>
           <p:cNvSpPr txBox="1"/>
           <p:nvPr/>
         </p:nvSpPr>
         <p:spPr>
           <a:xfrm>
-            <a:off x="2286000" y="6291072"/>
-            <a:ext cx="1554480" cy="109728"/>
+            <a:off x="27432" y="3246120"/>
+            <a:ext cx="146304" cy="566928"/>
           </a:xfrm>
           <a:prstGeom prst="rect">
             <a:avLst/>
@@ -42354,12 +42306,12 @@
           <a:noFill/>
         </p:spPr>
         <p:txBody>
-          <a:bodyPr wrap="square" lIns="0" rIns="0" tIns="0" bIns="0" anchor="t">
+          <a:bodyPr wrap="square" lIns="0" rIns="0" tIns="0" bIns="0" anchor="ctr" vert="eaVert">
             <a:noAutofit/>
           </a:bodyPr>
           <a:lstStyle/>
           <a:p>
-            <a:pPr algn="l">
+            <a:pPr algn="ctr">
               <a:lnSpc>
                 <a:spcPct val="112000"/>
               </a:lnSpc>
@@ -42385,7 +42337,7 @@
       </p:sp>
       <p:sp>
         <p:nvSpPr>
-          <p:cNvPr id="169" name="Rounded Rectangle 168"/>
+          <p:cNvPr id="167" name="Rounded Rectangle 166"/>
           <p:cNvSpPr/>
           <p:nvPr/>
         </p:nvSpPr>
@@ -42434,7 +42386,7 @@
       </p:sp>
       <p:sp>
         <p:nvSpPr>
-          <p:cNvPr id="170" name="TextBox 169"/>
+          <p:cNvPr id="168" name="TextBox 167"/>
           <p:cNvSpPr txBox="1"/>
           <p:nvPr/>
         </p:nvSpPr>
@@ -44822,6 +44774,436 @@
         <p:spPr>
           <a:xfrm>
             <a:off x="2514600" y="2331720"/>
+            <a:ext cx="2103120" cy="978408"/>
+          </a:xfrm>
+          <a:prstGeom prst="roundRect">
+            <a:avLst>
+              <a:gd name="adj" fmla="val 3271"/>
+            </a:avLst>
+          </a:prstGeom>
+          <a:solidFill>
+            <a:srgbClr val="FFFFFF"/>
+          </a:solidFill>
+          <a:ln w="15240">
+            <a:solidFill>
+              <a:srgbClr val="9BCB92"/>
+            </a:solidFill>
+          </a:ln>
+          <a:effectLst>
+            <a:outerShdw blurRad="55000" dist="22000" dir="5400000" rotWithShape="0">
+              <a:srgbClr val="0F172A">
+                <a:alpha val="12000"/>
+              </a:srgbClr>
+            </a:outerShdw>
+          </a:effectLst>
+        </p:spPr>
+        <p:style>
+          <a:lnRef idx="1">
+            <a:schemeClr val="accent1"/>
+          </a:lnRef>
+          <a:fillRef idx="3">
+            <a:schemeClr val="accent1"/>
+          </a:fillRef>
+          <a:effectRef idx="2">
+            <a:schemeClr val="accent1"/>
+          </a:effectRef>
+          <a:fontRef idx="minor">
+            <a:schemeClr val="lt1"/>
+          </a:fontRef>
+        </p:style>
+        <p:txBody>
+          <a:bodyPr rtlCol="0" anchor="ctr"/>
+          <a:lstStyle/>
+          <a:p>
+            <a:pPr algn="ctr"/>
+          </a:p>
+        </p:txBody>
+      </p:sp>
+      <p:sp>
+        <p:nvSpPr>
+          <p:cNvPr id="37" name="Rounded Rectangle 36"/>
+          <p:cNvSpPr/>
+          <p:nvPr/>
+        </p:nvSpPr>
+        <p:spPr>
+          <a:xfrm>
+            <a:off x="2525572" y="2342692"/>
+            <a:ext cx="2081174" cy="214884"/>
+          </a:xfrm>
+          <a:prstGeom prst="roundRect">
+            <a:avLst>
+              <a:gd name="adj" fmla="val 12765"/>
+            </a:avLst>
+          </a:prstGeom>
+          <a:solidFill>
+            <a:srgbClr val="D5E8D4"/>
+          </a:solidFill>
+          <a:ln>
+            <a:noFill/>
+          </a:ln>
+          <a:effectLst/>
+        </p:spPr>
+        <p:style>
+          <a:lnRef idx="1">
+            <a:schemeClr val="accent1"/>
+          </a:lnRef>
+          <a:fillRef idx="3">
+            <a:schemeClr val="accent1"/>
+          </a:fillRef>
+          <a:effectRef idx="2">
+            <a:schemeClr val="accent1"/>
+          </a:effectRef>
+          <a:fontRef idx="minor">
+            <a:schemeClr val="lt1"/>
+          </a:fontRef>
+        </p:style>
+        <p:txBody>
+          <a:bodyPr rtlCol="0" anchor="ctr"/>
+          <a:lstStyle/>
+          <a:p>
+            <a:pPr algn="ctr"/>
+          </a:p>
+        </p:txBody>
+      </p:sp>
+      <p:sp>
+        <p:nvSpPr>
+          <p:cNvPr id="38" name="TextBox 37"/>
+          <p:cNvSpPr txBox="1"/>
+          <p:nvPr/>
+        </p:nvSpPr>
+        <p:spPr>
+          <a:xfrm>
+            <a:off x="2551176" y="2363724"/>
+            <a:ext cx="2029967" cy="173736"/>
+          </a:xfrm>
+          <a:prstGeom prst="rect">
+            <a:avLst/>
+          </a:prstGeom>
+          <a:noFill/>
+        </p:spPr>
+        <p:txBody>
+          <a:bodyPr wrap="square" lIns="0" rIns="0" tIns="0" bIns="0" anchor="ctr">
+            <a:noAutofit/>
+          </a:bodyPr>
+          <a:lstStyle/>
+          <a:p>
+            <a:pPr algn="ctr">
+              <a:lnSpc>
+                <a:spcPct val="112000"/>
+              </a:lnSpc>
+              <a:spcBef>
+                <a:spcPts val="0"/>
+              </a:spcBef>
+              <a:spcAft>
+                <a:spcPts val="0"/>
+              </a:spcAft>
+            </a:pPr>
+            <a:r>
+              <a:rPr sz="800" b="1" i="0">
+                <a:solidFill>
+                  <a:srgbClr val="222222"/>
+                </a:solidFill>
+                <a:latin typeface="Segoe UI"/>
+                <a:ea typeface="Microsoft YaHei"/>
+              </a:rPr>
+              <a:t>attachment_index</a:t>
+            </a:r>
+          </a:p>
+        </p:txBody>
+      </p:sp>
+      <p:sp>
+        <p:nvSpPr>
+          <p:cNvPr id="39" name="Rounded Rectangle 38"/>
+          <p:cNvSpPr/>
+          <p:nvPr/>
+        </p:nvSpPr>
+        <p:spPr>
+          <a:xfrm>
+            <a:off x="2525572" y="2569463"/>
+            <a:ext cx="2081174" cy="722376"/>
+          </a:xfrm>
+          <a:prstGeom prst="roundRect">
+            <a:avLst>
+              <a:gd name="adj" fmla="val 2531"/>
+            </a:avLst>
+          </a:prstGeom>
+          <a:solidFill>
+            <a:srgbClr val="FAFAFA"/>
+          </a:solidFill>
+          <a:ln>
+            <a:noFill/>
+          </a:ln>
+          <a:effectLst/>
+        </p:spPr>
+        <p:style>
+          <a:lnRef idx="1">
+            <a:schemeClr val="accent1"/>
+          </a:lnRef>
+          <a:fillRef idx="3">
+            <a:schemeClr val="accent1"/>
+          </a:fillRef>
+          <a:effectRef idx="2">
+            <a:schemeClr val="accent1"/>
+          </a:effectRef>
+          <a:fontRef idx="minor">
+            <a:schemeClr val="lt1"/>
+          </a:fontRef>
+        </p:style>
+        <p:txBody>
+          <a:bodyPr rtlCol="0" anchor="ctr"/>
+          <a:lstStyle/>
+          <a:p>
+            <a:pPr algn="ctr"/>
+          </a:p>
+        </p:txBody>
+      </p:sp>
+      <p:sp>
+        <p:nvSpPr>
+          <p:cNvPr id="40" name="TextBox 39"/>
+          <p:cNvSpPr txBox="1"/>
+          <p:nvPr/>
+        </p:nvSpPr>
+        <p:spPr>
+          <a:xfrm>
+            <a:off x="2606040" y="2592324"/>
+            <a:ext cx="1956815" cy="704088"/>
+          </a:xfrm>
+          <a:prstGeom prst="rect">
+            <a:avLst/>
+          </a:prstGeom>
+          <a:noFill/>
+        </p:spPr>
+        <p:txBody>
+          <a:bodyPr wrap="square" lIns="0" rIns="0" tIns="0" bIns="0" anchor="t">
+            <a:noAutofit/>
+          </a:bodyPr>
+          <a:lstStyle/>
+          <a:p>
+            <a:pPr algn="l">
+              <a:lnSpc>
+                <a:spcPct val="100000"/>
+              </a:lnSpc>
+              <a:spcBef>
+                <a:spcPts val="0"/>
+              </a:spcBef>
+              <a:spcAft>
+                <a:spcPts val="0"/>
+              </a:spcAft>
+            </a:pPr>
+            <a:r>
+              <a:rPr sz="620" b="1" i="0">
+                <a:solidFill>
+                  <a:srgbClr val="D00000"/>
+                </a:solidFill>
+                <a:latin typeface="Segoe UI"/>
+                <a:ea typeface="Microsoft YaHei"/>
+              </a:rPr>
+              <a:t>PK   </a:t>
+            </a:r>
+            <a:r>
+              <a:rPr sz="630" b="0" i="0">
+                <a:solidFill>
+                  <a:srgbClr val="222222"/>
+                </a:solidFill>
+                <a:latin typeface="Segoe UI"/>
+                <a:ea typeface="Microsoft YaHei"/>
+              </a:rPr>
+              <a:t>id</a:t>
+            </a:r>
+            <a:r>
+              <a:rPr sz="590" b="0" i="0">
+                <a:solidFill>
+                  <a:srgbClr val="7A7A7A"/>
+                </a:solidFill>
+                <a:latin typeface="Segoe UI"/>
+                <a:ea typeface="Microsoft YaHei"/>
+              </a:rPr>
+              <a:t> (bigint)</a:t>
+            </a:r>
+          </a:p>
+          <a:p>
+            <a:pPr algn="l">
+              <a:lnSpc>
+                <a:spcPct val="100000"/>
+              </a:lnSpc>
+              <a:spcBef>
+                <a:spcPts val="0"/>
+              </a:spcBef>
+              <a:spcAft>
+                <a:spcPts val="0"/>
+              </a:spcAft>
+            </a:pPr>
+            <a:r>
+              <a:rPr sz="620" b="1" i="0">
+                <a:solidFill>
+                  <a:srgbClr val="0049C6"/>
+                </a:solidFill>
+                <a:latin typeface="Segoe UI"/>
+                <a:ea typeface="Microsoft YaHei"/>
+              </a:rPr>
+              <a:t>FK   </a:t>
+            </a:r>
+            <a:r>
+              <a:rPr sz="630" b="0" i="0">
+                <a:solidFill>
+                  <a:srgbClr val="222222"/>
+                </a:solidFill>
+                <a:latin typeface="Segoe UI"/>
+                <a:ea typeface="Microsoft YaHei"/>
+              </a:rPr>
+              <a:t>system_id</a:t>
+            </a:r>
+            <a:r>
+              <a:rPr sz="590" b="0" i="0">
+                <a:solidFill>
+                  <a:srgbClr val="7A7A7A"/>
+                </a:solidFill>
+                <a:latin typeface="Segoe UI"/>
+                <a:ea typeface="Microsoft YaHei"/>
+              </a:rPr>
+              <a:t> (bigint)</a:t>
+            </a:r>
+          </a:p>
+          <a:p>
+            <a:pPr algn="l">
+              <a:lnSpc>
+                <a:spcPct val="100000"/>
+              </a:lnSpc>
+              <a:spcBef>
+                <a:spcPts val="0"/>
+              </a:spcBef>
+              <a:spcAft>
+                <a:spcPts val="0"/>
+              </a:spcAft>
+            </a:pPr>
+            <a:r>
+              <a:rPr sz="620" b="0" i="0">
+                <a:solidFill>
+                  <a:srgbClr val="FAFAFA"/>
+                </a:solidFill>
+                <a:latin typeface="Segoe UI"/>
+                <a:ea typeface="Microsoft YaHei"/>
+              </a:rPr>
+              <a:t>     </a:t>
+            </a:r>
+            <a:r>
+              <a:rPr sz="630" b="0" i="0">
+                <a:solidFill>
+                  <a:srgbClr val="222222"/>
+                </a:solidFill>
+                <a:latin typeface="Segoe UI"/>
+                <a:ea typeface="Microsoft YaHei"/>
+              </a:rPr>
+              <a:t>table·business_key</a:t>
+            </a:r>
+            <a:r>
+              <a:rPr sz="590" b="0" i="0">
+                <a:solidFill>
+                  <a:srgbClr val="7A7A7A"/>
+                </a:solidFill>
+                <a:latin typeface="Segoe UI"/>
+                <a:ea typeface="Microsoft YaHei"/>
+              </a:rPr>
+              <a:t> (varchar)</a:t>
+            </a:r>
+          </a:p>
+          <a:p>
+            <a:pPr algn="l">
+              <a:lnSpc>
+                <a:spcPct val="100000"/>
+              </a:lnSpc>
+              <a:spcBef>
+                <a:spcPts val="0"/>
+              </a:spcBef>
+              <a:spcAft>
+                <a:spcPts val="0"/>
+              </a:spcAft>
+            </a:pPr>
+            <a:r>
+              <a:rPr sz="620" b="0" i="0">
+                <a:solidFill>
+                  <a:srgbClr val="FAFAFA"/>
+                </a:solidFill>
+                <a:latin typeface="Segoe UI"/>
+                <a:ea typeface="Microsoft YaHei"/>
+              </a:rPr>
+              <a:t>     </a:t>
+            </a:r>
+            <a:r>
+              <a:rPr sz="630" b="0" i="0">
+                <a:solidFill>
+                  <a:srgbClr val="222222"/>
+                </a:solidFill>
+                <a:latin typeface="Segoe UI"/>
+                <a:ea typeface="Microsoft YaHei"/>
+              </a:rPr>
+              <a:t>object_key</a:t>
+            </a:r>
+            <a:r>
+              <a:rPr sz="590" b="0" i="0">
+                <a:solidFill>
+                  <a:srgbClr val="7A7A7A"/>
+                </a:solidFill>
+                <a:latin typeface="Segoe UI"/>
+                <a:ea typeface="Microsoft YaHei"/>
+              </a:rPr>
+              <a:t> (varchar)</a:t>
+            </a:r>
+          </a:p>
+          <a:p>
+            <a:pPr algn="l">
+              <a:lnSpc>
+                <a:spcPct val="100000"/>
+              </a:lnSpc>
+              <a:spcBef>
+                <a:spcPts val="0"/>
+              </a:spcBef>
+              <a:spcAft>
+                <a:spcPts val="0"/>
+              </a:spcAft>
+            </a:pPr>
+            <a:r>
+              <a:rPr sz="620" b="0" i="0">
+                <a:solidFill>
+                  <a:srgbClr val="FAFAFA"/>
+                </a:solidFill>
+                <a:latin typeface="Segoe UI"/>
+                <a:ea typeface="Microsoft YaHei"/>
+              </a:rPr>
+              <a:t>     </a:t>
+            </a:r>
+            <a:r>
+              <a:rPr sz="630" b="0" i="0">
+                <a:solidFill>
+                  <a:srgbClr val="222222"/>
+                </a:solidFill>
+                <a:latin typeface="Segoe UI"/>
+                <a:ea typeface="Microsoft YaHei"/>
+              </a:rPr>
+              <a:t>sha256</a:t>
+            </a:r>
+            <a:r>
+              <a:rPr sz="590" b="0" i="0">
+                <a:solidFill>
+                  <a:srgbClr val="7A7A7A"/>
+                </a:solidFill>
+                <a:latin typeface="Segoe UI"/>
+                <a:ea typeface="Microsoft YaHei"/>
+              </a:rPr>
+              <a:t> (varchar)</a:t>
+            </a:r>
+          </a:p>
+        </p:txBody>
+      </p:sp>
+      <p:sp>
+        <p:nvSpPr>
+          <p:cNvPr id="41" name="Rounded Rectangle 40"/>
+          <p:cNvSpPr/>
+          <p:nvPr/>
+        </p:nvSpPr>
+        <p:spPr>
+          <a:xfrm>
+            <a:off x="4754880" y="2331720"/>
             <a:ext cx="1965960" cy="841248"/>
           </a:xfrm>
           <a:prstGeom prst="roundRect">
@@ -44869,13 +45251,13 @@
       </p:sp>
       <p:sp>
         <p:nvSpPr>
-          <p:cNvPr id="37" name="Rounded Rectangle 36"/>
+          <p:cNvPr id="42" name="Rounded Rectangle 41"/>
           <p:cNvSpPr/>
           <p:nvPr/>
         </p:nvSpPr>
         <p:spPr>
           <a:xfrm>
-            <a:off x="2525572" y="2342692"/>
+            <a:off x="4765852" y="2342692"/>
             <a:ext cx="1944014" cy="214884"/>
           </a:xfrm>
           <a:prstGeom prst="roundRect">
@@ -44915,13 +45297,13 @@
       </p:sp>
       <p:sp>
         <p:nvSpPr>
-          <p:cNvPr id="38" name="TextBox 37"/>
+          <p:cNvPr id="43" name="TextBox 42"/>
           <p:cNvSpPr txBox="1"/>
           <p:nvPr/>
         </p:nvSpPr>
         <p:spPr>
           <a:xfrm>
-            <a:off x="2551176" y="2363724"/>
+            <a:off x="4791456" y="2363724"/>
             <a:ext cx="1892807" cy="173736"/>
           </a:xfrm>
           <a:prstGeom prst="rect">
@@ -44961,13 +45343,13 @@
       </p:sp>
       <p:sp>
         <p:nvSpPr>
-          <p:cNvPr id="39" name="Rounded Rectangle 38"/>
+          <p:cNvPr id="44" name="Rounded Rectangle 43"/>
           <p:cNvSpPr/>
           <p:nvPr/>
         </p:nvSpPr>
         <p:spPr>
           <a:xfrm>
-            <a:off x="2525572" y="2569463"/>
+            <a:off x="4765852" y="2569463"/>
             <a:ext cx="1944014" cy="585216"/>
           </a:xfrm>
           <a:prstGeom prst="roundRect">
@@ -45007,13 +45389,13 @@
       </p:sp>
       <p:sp>
         <p:nvSpPr>
-          <p:cNvPr id="40" name="TextBox 39"/>
+          <p:cNvPr id="45" name="TextBox 44"/>
           <p:cNvSpPr txBox="1"/>
           <p:nvPr/>
         </p:nvSpPr>
         <p:spPr>
           <a:xfrm>
-            <a:off x="2606040" y="2592324"/>
+            <a:off x="4846320" y="2592324"/>
             <a:ext cx="1819656" cy="566928"/>
           </a:xfrm>
           <a:prstGeom prst="rect">
@@ -45202,13 +45584,13 @@
       </p:sp>
       <p:sp>
         <p:nvSpPr>
-          <p:cNvPr id="41" name="Rounded Rectangle 40"/>
+          <p:cNvPr id="46" name="Rounded Rectangle 45"/>
           <p:cNvSpPr/>
           <p:nvPr/>
         </p:nvSpPr>
         <p:spPr>
           <a:xfrm>
-            <a:off x="4754880" y="2331720"/>
+            <a:off x="6995160" y="2331720"/>
             <a:ext cx="1965960" cy="841248"/>
           </a:xfrm>
           <a:prstGeom prst="roundRect">
@@ -45256,13 +45638,13 @@
       </p:sp>
       <p:sp>
         <p:nvSpPr>
-          <p:cNvPr id="42" name="Rounded Rectangle 41"/>
+          <p:cNvPr id="47" name="Rounded Rectangle 46"/>
           <p:cNvSpPr/>
           <p:nvPr/>
         </p:nvSpPr>
         <p:spPr>
           <a:xfrm>
-            <a:off x="4765852" y="2342692"/>
+            <a:off x="7006132" y="2342692"/>
             <a:ext cx="1944014" cy="214884"/>
           </a:xfrm>
           <a:prstGeom prst="roundRect">
@@ -45302,13 +45684,13 @@
       </p:sp>
       <p:sp>
         <p:nvSpPr>
-          <p:cNvPr id="43" name="TextBox 42"/>
+          <p:cNvPr id="48" name="TextBox 47"/>
           <p:cNvSpPr txBox="1"/>
           <p:nvPr/>
         </p:nvSpPr>
         <p:spPr>
           <a:xfrm>
-            <a:off x="4791456" y="2363724"/>
+            <a:off x="7031736" y="2363724"/>
             <a:ext cx="1892807" cy="173736"/>
           </a:xfrm>
           <a:prstGeom prst="rect">
@@ -45348,13 +45730,13 @@
       </p:sp>
       <p:sp>
         <p:nvSpPr>
-          <p:cNvPr id="44" name="Rounded Rectangle 43"/>
+          <p:cNvPr id="49" name="Rounded Rectangle 48"/>
           <p:cNvSpPr/>
           <p:nvPr/>
         </p:nvSpPr>
         <p:spPr>
           <a:xfrm>
-            <a:off x="4765852" y="2569463"/>
+            <a:off x="7006132" y="2569463"/>
             <a:ext cx="1944014" cy="585216"/>
           </a:xfrm>
           <a:prstGeom prst="roundRect">
@@ -45394,13 +45776,13 @@
       </p:sp>
       <p:sp>
         <p:nvSpPr>
-          <p:cNvPr id="45" name="TextBox 44"/>
+          <p:cNvPr id="50" name="TextBox 49"/>
           <p:cNvSpPr txBox="1"/>
           <p:nvPr/>
         </p:nvSpPr>
         <p:spPr>
           <a:xfrm>
-            <a:off x="4846320" y="2592324"/>
+            <a:off x="7086600" y="2592324"/>
             <a:ext cx="1819656" cy="566928"/>
           </a:xfrm>
           <a:prstGeom prst="rect">
@@ -45583,436 +45965,6 @@
                 <a:ea typeface="Microsoft YaHei"/>
               </a:rPr>
               <a:t> (bigint)</a:t>
-            </a:r>
-          </a:p>
-        </p:txBody>
-      </p:sp>
-      <p:sp>
-        <p:nvSpPr>
-          <p:cNvPr id="46" name="Rounded Rectangle 45"/>
-          <p:cNvSpPr/>
-          <p:nvPr/>
-        </p:nvSpPr>
-        <p:spPr>
-          <a:xfrm>
-            <a:off x="6995160" y="2331720"/>
-            <a:ext cx="2103120" cy="978408"/>
-          </a:xfrm>
-          <a:prstGeom prst="roundRect">
-            <a:avLst>
-              <a:gd name="adj" fmla="val 3271"/>
-            </a:avLst>
-          </a:prstGeom>
-          <a:solidFill>
-            <a:srgbClr val="FFFFFF"/>
-          </a:solidFill>
-          <a:ln w="15240">
-            <a:solidFill>
-              <a:srgbClr val="9BCB92"/>
-            </a:solidFill>
-          </a:ln>
-          <a:effectLst>
-            <a:outerShdw blurRad="55000" dist="22000" dir="5400000" rotWithShape="0">
-              <a:srgbClr val="0F172A">
-                <a:alpha val="12000"/>
-              </a:srgbClr>
-            </a:outerShdw>
-          </a:effectLst>
-        </p:spPr>
-        <p:style>
-          <a:lnRef idx="1">
-            <a:schemeClr val="accent1"/>
-          </a:lnRef>
-          <a:fillRef idx="3">
-            <a:schemeClr val="accent1"/>
-          </a:fillRef>
-          <a:effectRef idx="2">
-            <a:schemeClr val="accent1"/>
-          </a:effectRef>
-          <a:fontRef idx="minor">
-            <a:schemeClr val="lt1"/>
-          </a:fontRef>
-        </p:style>
-        <p:txBody>
-          <a:bodyPr rtlCol="0" anchor="ctr"/>
-          <a:lstStyle/>
-          <a:p>
-            <a:pPr algn="ctr"/>
-          </a:p>
-        </p:txBody>
-      </p:sp>
-      <p:sp>
-        <p:nvSpPr>
-          <p:cNvPr id="47" name="Rounded Rectangle 46"/>
-          <p:cNvSpPr/>
-          <p:nvPr/>
-        </p:nvSpPr>
-        <p:spPr>
-          <a:xfrm>
-            <a:off x="7006132" y="2342692"/>
-            <a:ext cx="2081174" cy="214884"/>
-          </a:xfrm>
-          <a:prstGeom prst="roundRect">
-            <a:avLst>
-              <a:gd name="adj" fmla="val 12765"/>
-            </a:avLst>
-          </a:prstGeom>
-          <a:solidFill>
-            <a:srgbClr val="D5E8D4"/>
-          </a:solidFill>
-          <a:ln>
-            <a:noFill/>
-          </a:ln>
-          <a:effectLst/>
-        </p:spPr>
-        <p:style>
-          <a:lnRef idx="1">
-            <a:schemeClr val="accent1"/>
-          </a:lnRef>
-          <a:fillRef idx="3">
-            <a:schemeClr val="accent1"/>
-          </a:fillRef>
-          <a:effectRef idx="2">
-            <a:schemeClr val="accent1"/>
-          </a:effectRef>
-          <a:fontRef idx="minor">
-            <a:schemeClr val="lt1"/>
-          </a:fontRef>
-        </p:style>
-        <p:txBody>
-          <a:bodyPr rtlCol="0" anchor="ctr"/>
-          <a:lstStyle/>
-          <a:p>
-            <a:pPr algn="ctr"/>
-          </a:p>
-        </p:txBody>
-      </p:sp>
-      <p:sp>
-        <p:nvSpPr>
-          <p:cNvPr id="48" name="TextBox 47"/>
-          <p:cNvSpPr txBox="1"/>
-          <p:nvPr/>
-        </p:nvSpPr>
-        <p:spPr>
-          <a:xfrm>
-            <a:off x="7031736" y="2363724"/>
-            <a:ext cx="2029967" cy="173736"/>
-          </a:xfrm>
-          <a:prstGeom prst="rect">
-            <a:avLst/>
-          </a:prstGeom>
-          <a:noFill/>
-        </p:spPr>
-        <p:txBody>
-          <a:bodyPr wrap="square" lIns="0" rIns="0" tIns="0" bIns="0" anchor="ctr">
-            <a:noAutofit/>
-          </a:bodyPr>
-          <a:lstStyle/>
-          <a:p>
-            <a:pPr algn="ctr">
-              <a:lnSpc>
-                <a:spcPct val="112000"/>
-              </a:lnSpc>
-              <a:spcBef>
-                <a:spcPts val="0"/>
-              </a:spcBef>
-              <a:spcAft>
-                <a:spcPts val="0"/>
-              </a:spcAft>
-            </a:pPr>
-            <a:r>
-              <a:rPr sz="800" b="1" i="0">
-                <a:solidFill>
-                  <a:srgbClr val="222222"/>
-                </a:solidFill>
-                <a:latin typeface="Segoe UI"/>
-                <a:ea typeface="Microsoft YaHei"/>
-              </a:rPr>
-              <a:t>attachment_index</a:t>
-            </a:r>
-          </a:p>
-        </p:txBody>
-      </p:sp>
-      <p:sp>
-        <p:nvSpPr>
-          <p:cNvPr id="49" name="Rounded Rectangle 48"/>
-          <p:cNvSpPr/>
-          <p:nvPr/>
-        </p:nvSpPr>
-        <p:spPr>
-          <a:xfrm>
-            <a:off x="7006132" y="2569463"/>
-            <a:ext cx="2081174" cy="722376"/>
-          </a:xfrm>
-          <a:prstGeom prst="roundRect">
-            <a:avLst>
-              <a:gd name="adj" fmla="val 2531"/>
-            </a:avLst>
-          </a:prstGeom>
-          <a:solidFill>
-            <a:srgbClr val="FAFAFA"/>
-          </a:solidFill>
-          <a:ln>
-            <a:noFill/>
-          </a:ln>
-          <a:effectLst/>
-        </p:spPr>
-        <p:style>
-          <a:lnRef idx="1">
-            <a:schemeClr val="accent1"/>
-          </a:lnRef>
-          <a:fillRef idx="3">
-            <a:schemeClr val="accent1"/>
-          </a:fillRef>
-          <a:effectRef idx="2">
-            <a:schemeClr val="accent1"/>
-          </a:effectRef>
-          <a:fontRef idx="minor">
-            <a:schemeClr val="lt1"/>
-          </a:fontRef>
-        </p:style>
-        <p:txBody>
-          <a:bodyPr rtlCol="0" anchor="ctr"/>
-          <a:lstStyle/>
-          <a:p>
-            <a:pPr algn="ctr"/>
-          </a:p>
-        </p:txBody>
-      </p:sp>
-      <p:sp>
-        <p:nvSpPr>
-          <p:cNvPr id="50" name="TextBox 49"/>
-          <p:cNvSpPr txBox="1"/>
-          <p:nvPr/>
-        </p:nvSpPr>
-        <p:spPr>
-          <a:xfrm>
-            <a:off x="7086600" y="2592324"/>
-            <a:ext cx="1956815" cy="704088"/>
-          </a:xfrm>
-          <a:prstGeom prst="rect">
-            <a:avLst/>
-          </a:prstGeom>
-          <a:noFill/>
-        </p:spPr>
-        <p:txBody>
-          <a:bodyPr wrap="square" lIns="0" rIns="0" tIns="0" bIns="0" anchor="t">
-            <a:noAutofit/>
-          </a:bodyPr>
-          <a:lstStyle/>
-          <a:p>
-            <a:pPr algn="l">
-              <a:lnSpc>
-                <a:spcPct val="100000"/>
-              </a:lnSpc>
-              <a:spcBef>
-                <a:spcPts val="0"/>
-              </a:spcBef>
-              <a:spcAft>
-                <a:spcPts val="0"/>
-              </a:spcAft>
-            </a:pPr>
-            <a:r>
-              <a:rPr sz="620" b="1" i="0">
-                <a:solidFill>
-                  <a:srgbClr val="D00000"/>
-                </a:solidFill>
-                <a:latin typeface="Segoe UI"/>
-                <a:ea typeface="Microsoft YaHei"/>
-              </a:rPr>
-              <a:t>PK   </a:t>
-            </a:r>
-            <a:r>
-              <a:rPr sz="630" b="0" i="0">
-                <a:solidFill>
-                  <a:srgbClr val="222222"/>
-                </a:solidFill>
-                <a:latin typeface="Segoe UI"/>
-                <a:ea typeface="Microsoft YaHei"/>
-              </a:rPr>
-              <a:t>id</a:t>
-            </a:r>
-            <a:r>
-              <a:rPr sz="590" b="0" i="0">
-                <a:solidFill>
-                  <a:srgbClr val="7A7A7A"/>
-                </a:solidFill>
-                <a:latin typeface="Segoe UI"/>
-                <a:ea typeface="Microsoft YaHei"/>
-              </a:rPr>
-              <a:t> (bigint)</a:t>
-            </a:r>
-          </a:p>
-          <a:p>
-            <a:pPr algn="l">
-              <a:lnSpc>
-                <a:spcPct val="100000"/>
-              </a:lnSpc>
-              <a:spcBef>
-                <a:spcPts val="0"/>
-              </a:spcBef>
-              <a:spcAft>
-                <a:spcPts val="0"/>
-              </a:spcAft>
-            </a:pPr>
-            <a:r>
-              <a:rPr sz="620" b="1" i="0">
-                <a:solidFill>
-                  <a:srgbClr val="0049C6"/>
-                </a:solidFill>
-                <a:latin typeface="Segoe UI"/>
-                <a:ea typeface="Microsoft YaHei"/>
-              </a:rPr>
-              <a:t>FK   </a:t>
-            </a:r>
-            <a:r>
-              <a:rPr sz="630" b="0" i="0">
-                <a:solidFill>
-                  <a:srgbClr val="222222"/>
-                </a:solidFill>
-                <a:latin typeface="Segoe UI"/>
-                <a:ea typeface="Microsoft YaHei"/>
-              </a:rPr>
-              <a:t>system_id</a:t>
-            </a:r>
-            <a:r>
-              <a:rPr sz="590" b="0" i="0">
-                <a:solidFill>
-                  <a:srgbClr val="7A7A7A"/>
-                </a:solidFill>
-                <a:latin typeface="Segoe UI"/>
-                <a:ea typeface="Microsoft YaHei"/>
-              </a:rPr>
-              <a:t> (bigint)</a:t>
-            </a:r>
-          </a:p>
-          <a:p>
-            <a:pPr algn="l">
-              <a:lnSpc>
-                <a:spcPct val="100000"/>
-              </a:lnSpc>
-              <a:spcBef>
-                <a:spcPts val="0"/>
-              </a:spcBef>
-              <a:spcAft>
-                <a:spcPts val="0"/>
-              </a:spcAft>
-            </a:pPr>
-            <a:r>
-              <a:rPr sz="620" b="0" i="0">
-                <a:solidFill>
-                  <a:srgbClr val="FAFAFA"/>
-                </a:solidFill>
-                <a:latin typeface="Segoe UI"/>
-                <a:ea typeface="Microsoft YaHei"/>
-              </a:rPr>
-              <a:t>     </a:t>
-            </a:r>
-            <a:r>
-              <a:rPr sz="630" b="0" i="0">
-                <a:solidFill>
-                  <a:srgbClr val="222222"/>
-                </a:solidFill>
-                <a:latin typeface="Segoe UI"/>
-                <a:ea typeface="Microsoft YaHei"/>
-              </a:rPr>
-              <a:t>table·business_key</a:t>
-            </a:r>
-            <a:r>
-              <a:rPr sz="590" b="0" i="0">
-                <a:solidFill>
-                  <a:srgbClr val="7A7A7A"/>
-                </a:solidFill>
-                <a:latin typeface="Segoe UI"/>
-                <a:ea typeface="Microsoft YaHei"/>
-              </a:rPr>
-              <a:t> (varchar)</a:t>
-            </a:r>
-          </a:p>
-          <a:p>
-            <a:pPr algn="l">
-              <a:lnSpc>
-                <a:spcPct val="100000"/>
-              </a:lnSpc>
-              <a:spcBef>
-                <a:spcPts val="0"/>
-              </a:spcBef>
-              <a:spcAft>
-                <a:spcPts val="0"/>
-              </a:spcAft>
-            </a:pPr>
-            <a:r>
-              <a:rPr sz="620" b="0" i="0">
-                <a:solidFill>
-                  <a:srgbClr val="FAFAFA"/>
-                </a:solidFill>
-                <a:latin typeface="Segoe UI"/>
-                <a:ea typeface="Microsoft YaHei"/>
-              </a:rPr>
-              <a:t>     </a:t>
-            </a:r>
-            <a:r>
-              <a:rPr sz="630" b="0" i="0">
-                <a:solidFill>
-                  <a:srgbClr val="222222"/>
-                </a:solidFill>
-                <a:latin typeface="Segoe UI"/>
-                <a:ea typeface="Microsoft YaHei"/>
-              </a:rPr>
-              <a:t>object_key</a:t>
-            </a:r>
-            <a:r>
-              <a:rPr sz="590" b="0" i="0">
-                <a:solidFill>
-                  <a:srgbClr val="7A7A7A"/>
-                </a:solidFill>
-                <a:latin typeface="Segoe UI"/>
-                <a:ea typeface="Microsoft YaHei"/>
-              </a:rPr>
-              <a:t> (varchar)</a:t>
-            </a:r>
-          </a:p>
-          <a:p>
-            <a:pPr algn="l">
-              <a:lnSpc>
-                <a:spcPct val="100000"/>
-              </a:lnSpc>
-              <a:spcBef>
-                <a:spcPts val="0"/>
-              </a:spcBef>
-              <a:spcAft>
-                <a:spcPts val="0"/>
-              </a:spcAft>
-            </a:pPr>
-            <a:r>
-              <a:rPr sz="620" b="0" i="0">
-                <a:solidFill>
-                  <a:srgbClr val="FAFAFA"/>
-                </a:solidFill>
-                <a:latin typeface="Segoe UI"/>
-                <a:ea typeface="Microsoft YaHei"/>
-              </a:rPr>
-              <a:t>     </a:t>
-            </a:r>
-            <a:r>
-              <a:rPr sz="630" b="0" i="0">
-                <a:solidFill>
-                  <a:srgbClr val="222222"/>
-                </a:solidFill>
-                <a:latin typeface="Segoe UI"/>
-                <a:ea typeface="Microsoft YaHei"/>
-              </a:rPr>
-              <a:t>sha256</a:t>
-            </a:r>
-            <a:r>
-              <a:rPr sz="590" b="0" i="0">
-                <a:solidFill>
-                  <a:srgbClr val="7A7A7A"/>
-                </a:solidFill>
-                <a:latin typeface="Segoe UI"/>
-                <a:ea typeface="Microsoft YaHei"/>
-              </a:rPr>
-              <a:t> (varchar)</a:t>
             </a:r>
           </a:p>
         </p:txBody>
@@ -46455,8 +46407,8 @@
         </p:nvSpPr>
         <p:spPr>
           <a:xfrm>
-            <a:off x="3017520" y="3703320"/>
-            <a:ext cx="1965960" cy="841248"/>
+            <a:off x="2514600" y="3703320"/>
+            <a:ext cx="2103120" cy="841248"/>
           </a:xfrm>
           <a:prstGeom prst="roundRect">
             <a:avLst>
@@ -46509,8 +46461,8 @@
         </p:nvSpPr>
         <p:spPr>
           <a:xfrm>
-            <a:off x="3028492" y="3714292"/>
-            <a:ext cx="1944014" cy="214884"/>
+            <a:off x="2525572" y="3714292"/>
+            <a:ext cx="2081174" cy="214884"/>
           </a:xfrm>
           <a:prstGeom prst="roundRect">
             <a:avLst>
@@ -46555,8 +46507,8 @@
         </p:nvSpPr>
         <p:spPr>
           <a:xfrm>
-            <a:off x="3054096" y="3735324"/>
-            <a:ext cx="1892807" cy="173736"/>
+            <a:off x="2551176" y="3735324"/>
+            <a:ext cx="2029967" cy="173736"/>
           </a:xfrm>
           <a:prstGeom prst="rect">
             <a:avLst/>
@@ -46588,7 +46540,7 @@
                 <a:latin typeface="Segoe UI"/>
                 <a:ea typeface="Microsoft YaHei"/>
               </a:rPr>
-              <a:t>archive_file</a:t>
+              <a:t>archive_set_item</a:t>
             </a:r>
           </a:p>
         </p:txBody>
@@ -46601,8 +46553,8 @@
         </p:nvSpPr>
         <p:spPr>
           <a:xfrm>
-            <a:off x="3028492" y="3941063"/>
-            <a:ext cx="1944014" cy="585216"/>
+            <a:off x="2525572" y="3941063"/>
+            <a:ext cx="2081174" cy="585216"/>
           </a:xfrm>
           <a:prstGeom prst="roundRect">
             <a:avLst>
@@ -46647,8 +46599,8 @@
         </p:nvSpPr>
         <p:spPr>
           <a:xfrm>
-            <a:off x="3108960" y="3963924"/>
-            <a:ext cx="1819656" cy="566928"/>
+            <a:off x="2606040" y="3963924"/>
+            <a:ext cx="1956815" cy="566928"/>
           </a:xfrm>
           <a:prstGeom prst="rect">
             <a:avLst/>
@@ -46733,7 +46685,7 @@
                 <a:latin typeface="Segoe UI"/>
                 <a:ea typeface="Microsoft YaHei"/>
               </a:rPr>
-              <a:t>archive_batch_id</a:t>
+              <a:t>archive_set_id</a:t>
             </a:r>
             <a:r>
               <a:rPr sz="590" b="0" i="0">
@@ -46776,50 +46728,50 @@
                 <a:latin typeface="Segoe UI"/>
                 <a:ea typeface="Microsoft YaHei"/>
               </a:rPr>
+              <a:t>original_name</a:t>
+            </a:r>
+            <a:r>
+              <a:rPr sz="590" b="0" i="0">
+                <a:solidFill>
+                  <a:srgbClr val="7A7A7A"/>
+                </a:solidFill>
+                <a:latin typeface="Segoe UI"/>
+                <a:ea typeface="Microsoft YaHei"/>
+              </a:rPr>
+              <a:t> (varchar)</a:t>
+            </a:r>
+          </a:p>
+          <a:p>
+            <a:pPr algn="l">
+              <a:lnSpc>
+                <a:spcPct val="100000"/>
+              </a:lnSpc>
+              <a:spcBef>
+                <a:spcPts val="0"/>
+              </a:spcBef>
+              <a:spcAft>
+                <a:spcPts val="0"/>
+              </a:spcAft>
+            </a:pPr>
+            <a:r>
+              <a:rPr sz="620" b="0" i="0">
+                <a:solidFill>
+                  <a:srgbClr val="FAFAFA"/>
+                </a:solidFill>
+                <a:latin typeface="Segoe UI"/>
+                <a:ea typeface="Microsoft YaHei"/>
+              </a:rPr>
+              <a:t>     </a:t>
+            </a:r>
+            <a:r>
+              <a:rPr sz="630" b="0" i="0">
+                <a:solidFill>
+                  <a:srgbClr val="222222"/>
+                </a:solidFill>
+                <a:latin typeface="Segoe UI"/>
+                <a:ea typeface="Microsoft YaHei"/>
+              </a:rPr>
               <a:t>blob_url</a:t>
-            </a:r>
-            <a:r>
-              <a:rPr sz="590" b="0" i="0">
-                <a:solidFill>
-                  <a:srgbClr val="7A7A7A"/>
-                </a:solidFill>
-                <a:latin typeface="Segoe UI"/>
-                <a:ea typeface="Microsoft YaHei"/>
-              </a:rPr>
-              <a:t> (varchar)</a:t>
-            </a:r>
-          </a:p>
-          <a:p>
-            <a:pPr algn="l">
-              <a:lnSpc>
-                <a:spcPct val="100000"/>
-              </a:lnSpc>
-              <a:spcBef>
-                <a:spcPts val="0"/>
-              </a:spcBef>
-              <a:spcAft>
-                <a:spcPts val="0"/>
-              </a:spcAft>
-            </a:pPr>
-            <a:r>
-              <a:rPr sz="620" b="0" i="0">
-                <a:solidFill>
-                  <a:srgbClr val="FAFAFA"/>
-                </a:solidFill>
-                <a:latin typeface="Segoe UI"/>
-                <a:ea typeface="Microsoft YaHei"/>
-              </a:rPr>
-              <a:t>     </a:t>
-            </a:r>
-            <a:r>
-              <a:rPr sz="630" b="0" i="0">
-                <a:solidFill>
-                  <a:srgbClr val="222222"/>
-                </a:solidFill>
-                <a:latin typeface="Segoe UI"/>
-                <a:ea typeface="Microsoft YaHei"/>
-              </a:rPr>
-              <a:t>checksum</a:t>
             </a:r>
             <a:r>
               <a:rPr sz="590" b="0" i="0">
@@ -46842,7 +46794,7 @@
         </p:nvSpPr>
         <p:spPr>
           <a:xfrm>
-            <a:off x="5257800" y="3703320"/>
+            <a:off x="4754880" y="3703320"/>
             <a:ext cx="1965960" cy="841248"/>
           </a:xfrm>
           <a:prstGeom prst="roundRect">
@@ -46896,7 +46848,7 @@
         </p:nvSpPr>
         <p:spPr>
           <a:xfrm>
-            <a:off x="5268772" y="3714292"/>
+            <a:off x="4765852" y="3714292"/>
             <a:ext cx="1944014" cy="214884"/>
           </a:xfrm>
           <a:prstGeom prst="roundRect">
@@ -46942,7 +46894,7 @@
         </p:nvSpPr>
         <p:spPr>
           <a:xfrm>
-            <a:off x="5294376" y="3735324"/>
+            <a:off x="4791456" y="3735324"/>
             <a:ext cx="1892807" cy="173736"/>
           </a:xfrm>
           <a:prstGeom prst="rect">
@@ -46988,7 +46940,7 @@
         </p:nvSpPr>
         <p:spPr>
           <a:xfrm>
-            <a:off x="5268772" y="3941063"/>
+            <a:off x="4765852" y="3941063"/>
             <a:ext cx="1944014" cy="585216"/>
           </a:xfrm>
           <a:prstGeom prst="roundRect">
@@ -47034,7 +46986,7 @@
         </p:nvSpPr>
         <p:spPr>
           <a:xfrm>
-            <a:off x="5349240" y="3963924"/>
+            <a:off x="4846320" y="3963924"/>
             <a:ext cx="1819656" cy="566928"/>
           </a:xfrm>
           <a:prstGeom prst="rect">
@@ -47229,8 +47181,8 @@
         </p:nvSpPr>
         <p:spPr>
           <a:xfrm>
-            <a:off x="7498079" y="3703320"/>
-            <a:ext cx="2103120" cy="841248"/>
+            <a:off x="6995160" y="3703320"/>
+            <a:ext cx="1965960" cy="841248"/>
           </a:xfrm>
           <a:prstGeom prst="roundRect">
             <a:avLst>
@@ -47283,8 +47235,8 @@
         </p:nvSpPr>
         <p:spPr>
           <a:xfrm>
-            <a:off x="7509052" y="3714292"/>
-            <a:ext cx="2081174" cy="214884"/>
+            <a:off x="7006132" y="3714292"/>
+            <a:ext cx="1944014" cy="214884"/>
           </a:xfrm>
           <a:prstGeom prst="roundRect">
             <a:avLst>
@@ -47329,8 +47281,8 @@
         </p:nvSpPr>
         <p:spPr>
           <a:xfrm>
-            <a:off x="7534655" y="3735324"/>
-            <a:ext cx="2029967" cy="173736"/>
+            <a:off x="7031736" y="3735324"/>
+            <a:ext cx="1892807" cy="173736"/>
           </a:xfrm>
           <a:prstGeom prst="rect">
             <a:avLst/>
@@ -47362,7 +47314,7 @@
                 <a:latin typeface="Segoe UI"/>
                 <a:ea typeface="Microsoft YaHei"/>
               </a:rPr>
-              <a:t>archive_set_item</a:t>
+              <a:t>archive_file</a:t>
             </a:r>
           </a:p>
         </p:txBody>
@@ -47375,8 +47327,8 @@
         </p:nvSpPr>
         <p:spPr>
           <a:xfrm>
-            <a:off x="7509052" y="3941063"/>
-            <a:ext cx="2081174" cy="585216"/>
+            <a:off x="7006132" y="3941063"/>
+            <a:ext cx="1944014" cy="585216"/>
           </a:xfrm>
           <a:prstGeom prst="roundRect">
             <a:avLst>
@@ -47421,8 +47373,8 @@
         </p:nvSpPr>
         <p:spPr>
           <a:xfrm>
-            <a:off x="7589519" y="3963924"/>
-            <a:ext cx="1956815" cy="566928"/>
+            <a:off x="7086600" y="3963924"/>
+            <a:ext cx="1819656" cy="566928"/>
           </a:xfrm>
           <a:prstGeom prst="rect">
             <a:avLst/>
@@ -47507,7 +47459,7 @@
                 <a:latin typeface="Segoe UI"/>
                 <a:ea typeface="Microsoft YaHei"/>
               </a:rPr>
-              <a:t>archive_set_id</a:t>
+              <a:t>archive_batch_id</a:t>
             </a:r>
             <a:r>
               <a:rPr sz="590" b="0" i="0">
@@ -47550,7 +47502,7 @@
                 <a:latin typeface="Segoe UI"/>
                 <a:ea typeface="Microsoft YaHei"/>
               </a:rPr>
-              <a:t>original_name</a:t>
+              <a:t>blob_url</a:t>
             </a:r>
             <a:r>
               <a:rPr sz="590" b="0" i="0">
@@ -47593,7 +47545,7 @@
                 <a:latin typeface="Segoe UI"/>
                 <a:ea typeface="Microsoft YaHei"/>
               </a:rPr>
-              <a:t>blob_url</a:t>
+              <a:t>checksum</a:t>
             </a:r>
             <a:r>
               <a:rPr sz="590" b="0" i="0">
@@ -47616,8 +47568,8 @@
         </p:nvSpPr>
         <p:spPr>
           <a:xfrm>
-            <a:off x="9875520" y="3703320"/>
-            <a:ext cx="1691640" cy="841248"/>
+            <a:off x="9646920" y="3703320"/>
+            <a:ext cx="1920240" cy="841248"/>
           </a:xfrm>
           <a:prstGeom prst="roundRect">
             <a:avLst>
@@ -47670,8 +47622,8 @@
         </p:nvSpPr>
         <p:spPr>
           <a:xfrm>
-            <a:off x="9886492" y="3714292"/>
-            <a:ext cx="1669694" cy="214884"/>
+            <a:off x="9657892" y="3714292"/>
+            <a:ext cx="1898294" cy="214884"/>
           </a:xfrm>
           <a:prstGeom prst="roundRect">
             <a:avLst>
@@ -47716,8 +47668,8 @@
         </p:nvSpPr>
         <p:spPr>
           <a:xfrm>
-            <a:off x="9912096" y="3735324"/>
-            <a:ext cx="1618488" cy="173736"/>
+            <a:off x="9683496" y="3735324"/>
+            <a:ext cx="1847088" cy="173736"/>
           </a:xfrm>
           <a:prstGeom prst="rect">
             <a:avLst/>
@@ -47762,8 +47714,8 @@
         </p:nvSpPr>
         <p:spPr>
           <a:xfrm>
-            <a:off x="9886492" y="3941063"/>
-            <a:ext cx="1669694" cy="585216"/>
+            <a:off x="9657892" y="3941063"/>
+            <a:ext cx="1898294" cy="585216"/>
           </a:xfrm>
           <a:prstGeom prst="roundRect">
             <a:avLst>
@@ -47808,8 +47760,8 @@
         </p:nvSpPr>
         <p:spPr>
           <a:xfrm>
-            <a:off x="9966960" y="3963924"/>
-            <a:ext cx="1545336" cy="566928"/>
+            <a:off x="9738360" y="3963924"/>
+            <a:ext cx="1773936" cy="566928"/>
           </a:xfrm>
           <a:prstGeom prst="rect">
             <a:avLst/>
@@ -50211,8 +50163,8 @@
         </p:nvCxnSpPr>
         <p:spPr>
           <a:xfrm>
-            <a:off x="2377440" y="1097280"/>
-            <a:ext cx="274320" cy="0"/>
+            <a:off x="2377440" y="1298448"/>
+            <a:ext cx="64008" cy="0"/>
           </a:xfrm>
           <a:prstGeom prst="line">
             <a:avLst/>
@@ -50233,8 +50185,8 @@
         </p:nvCxnSpPr>
         <p:spPr>
           <a:xfrm>
-            <a:off x="2651760" y="1097280"/>
-            <a:ext cx="0" cy="1024128"/>
+            <a:off x="2441448" y="1298448"/>
+            <a:ext cx="0" cy="1517904"/>
           </a:xfrm>
           <a:prstGeom prst="line">
             <a:avLst/>
@@ -50255,30 +50207,8 @@
         </p:nvCxnSpPr>
         <p:spPr>
           <a:xfrm>
-            <a:off x="2651760" y="2121408"/>
-            <a:ext cx="5394960" cy="0"/>
-          </a:xfrm>
-          <a:prstGeom prst="line">
-            <a:avLst/>
-          </a:prstGeom>
-          <a:ln w="17780">
-            <a:solidFill>
-              <a:srgbClr val="82B366"/>
-            </a:solidFill>
-          </a:ln>
-          <a:effectLst/>
-        </p:spPr>
-      </p:cxnSp>
-      <p:cxnSp>
-        <p:nvCxnSpPr>
-          <p:cNvPr id="110" name="Connector 109"/>
-          <p:cNvCxnSpPr/>
-          <p:nvPr/>
-        </p:nvCxnSpPr>
-        <p:spPr>
-          <a:xfrm>
-            <a:off x="8046720" y="2121408"/>
-            <a:ext cx="0" cy="210312"/>
+            <a:off x="2441448" y="2816352"/>
+            <a:ext cx="73152" cy="0"/>
           </a:xfrm>
           <a:prstGeom prst="line">
             <a:avLst/>
@@ -50294,13 +50224,13 @@
       </p:cxnSp>
       <p:sp>
         <p:nvSpPr>
-          <p:cNvPr id="111" name="TextBox 110"/>
+          <p:cNvPr id="110" name="TextBox 109"/>
           <p:cNvSpPr txBox="1"/>
           <p:nvPr/>
         </p:nvSpPr>
         <p:spPr>
           <a:xfrm>
-            <a:off x="2459736" y="1156716"/>
+            <a:off x="2459736" y="1357884"/>
             <a:ext cx="109728" cy="118872"/>
           </a:xfrm>
           <a:prstGeom prst="rect">
@@ -50340,13 +50270,13 @@
       </p:sp>
       <p:sp>
         <p:nvSpPr>
-          <p:cNvPr id="112" name="TextBox 111"/>
+          <p:cNvPr id="111" name="TextBox 110"/>
           <p:cNvSpPr txBox="1"/>
           <p:nvPr/>
         </p:nvSpPr>
         <p:spPr>
           <a:xfrm>
-            <a:off x="8110728" y="2135124"/>
+            <a:off x="2322576" y="2638044"/>
             <a:ext cx="109728" cy="118872"/>
           </a:xfrm>
           <a:prstGeom prst="rect">
@@ -50386,7 +50316,7 @@
       </p:sp>
       <p:cxnSp>
         <p:nvCxnSpPr>
-          <p:cNvPr id="113" name="Connector 112"/>
+          <p:cNvPr id="112" name="Connector 111"/>
           <p:cNvCxnSpPr/>
           <p:nvPr/>
         </p:nvCxnSpPr>
@@ -50408,7 +50338,7 @@
       </p:cxnSp>
       <p:cxnSp>
         <p:nvCxnSpPr>
-          <p:cNvPr id="114" name="Connector 113"/>
+          <p:cNvPr id="113" name="Connector 112"/>
           <p:cNvCxnSpPr/>
           <p:nvPr/>
         </p:nvCxnSpPr>
@@ -50430,7 +50360,7 @@
       </p:cxnSp>
       <p:cxnSp>
         <p:nvCxnSpPr>
-          <p:cNvPr id="115" name="Connector 114"/>
+          <p:cNvPr id="114" name="Connector 113"/>
           <p:cNvCxnSpPr/>
           <p:nvPr/>
         </p:nvCxnSpPr>
@@ -50453,7 +50383,7 @@
       </p:cxnSp>
       <p:sp>
         <p:nvSpPr>
-          <p:cNvPr id="116" name="TextBox 115"/>
+          <p:cNvPr id="115" name="TextBox 114"/>
           <p:cNvSpPr txBox="1"/>
           <p:nvPr/>
         </p:nvSpPr>
@@ -50499,7 +50429,7 @@
       </p:sp>
       <p:sp>
         <p:nvSpPr>
-          <p:cNvPr id="117" name="TextBox 116"/>
+          <p:cNvPr id="116" name="TextBox 115"/>
           <p:cNvSpPr txBox="1"/>
           <p:nvPr/>
         </p:nvSpPr>
@@ -50545,58 +50475,14 @@
       </p:sp>
       <p:cxnSp>
         <p:nvCxnSpPr>
-          <p:cNvPr id="118" name="Connector 117"/>
+          <p:cNvPr id="117" name="Connector 116"/>
           <p:cNvCxnSpPr/>
           <p:nvPr/>
         </p:nvCxnSpPr>
         <p:spPr>
           <a:xfrm>
-            <a:off x="3749039" y="1874519"/>
-            <a:ext cx="0" cy="173737"/>
-          </a:xfrm>
-          <a:prstGeom prst="line">
-            <a:avLst/>
-          </a:prstGeom>
-          <a:ln w="17780">
-            <a:solidFill>
-              <a:srgbClr val="5B82B1"/>
-            </a:solidFill>
-          </a:ln>
-          <a:effectLst/>
-        </p:spPr>
-      </p:cxnSp>
-      <p:cxnSp>
-        <p:nvCxnSpPr>
-          <p:cNvPr id="119" name="Connector 118"/>
-          <p:cNvCxnSpPr/>
-          <p:nvPr/>
-        </p:nvCxnSpPr>
-        <p:spPr>
-          <a:xfrm flipH="1">
-            <a:off x="3493008" y="2048256"/>
-            <a:ext cx="256031" cy="0"/>
-          </a:xfrm>
-          <a:prstGeom prst="line">
-            <a:avLst/>
-          </a:prstGeom>
-          <a:ln w="17780">
-            <a:solidFill>
-              <a:srgbClr val="5B82B1"/>
-            </a:solidFill>
-          </a:ln>
-          <a:effectLst/>
-        </p:spPr>
-      </p:cxnSp>
-      <p:cxnSp>
-        <p:nvCxnSpPr>
-          <p:cNvPr id="120" name="Connector 119"/>
-          <p:cNvCxnSpPr/>
-          <p:nvPr/>
-        </p:nvCxnSpPr>
-        <p:spPr>
-          <a:xfrm>
-            <a:off x="3493008" y="2048256"/>
-            <a:ext cx="0" cy="283464"/>
+            <a:off x="4983480" y="1874519"/>
+            <a:ext cx="0" cy="457201"/>
           </a:xfrm>
           <a:prstGeom prst="line">
             <a:avLst/>
@@ -50612,13 +50498,13 @@
       </p:cxnSp>
       <p:sp>
         <p:nvSpPr>
-          <p:cNvPr id="121" name="TextBox 120"/>
+          <p:cNvPr id="118" name="TextBox 117"/>
           <p:cNvSpPr txBox="1"/>
           <p:nvPr/>
         </p:nvSpPr>
         <p:spPr>
           <a:xfrm>
-            <a:off x="3575303" y="1952243"/>
+            <a:off x="4809744" y="1952243"/>
             <a:ext cx="109728" cy="118872"/>
           </a:xfrm>
           <a:prstGeom prst="rect">
@@ -50658,13 +50544,13 @@
       </p:sp>
       <p:sp>
         <p:nvSpPr>
-          <p:cNvPr id="122" name="TextBox 121"/>
+          <p:cNvPr id="119" name="TextBox 118"/>
           <p:cNvSpPr txBox="1"/>
           <p:nvPr/>
         </p:nvSpPr>
         <p:spPr>
           <a:xfrm>
-            <a:off x="3557015" y="2135124"/>
+            <a:off x="5047488" y="2135124"/>
             <a:ext cx="109728" cy="118872"/>
           </a:xfrm>
           <a:prstGeom prst="rect">
@@ -50704,14 +50590,14 @@
       </p:sp>
       <p:cxnSp>
         <p:nvCxnSpPr>
-          <p:cNvPr id="123" name="Connector 122"/>
+          <p:cNvPr id="120" name="Connector 119"/>
           <p:cNvCxnSpPr/>
           <p:nvPr/>
         </p:nvCxnSpPr>
         <p:spPr>
           <a:xfrm>
-            <a:off x="4114800" y="1874519"/>
-            <a:ext cx="0" cy="320041"/>
+            <a:off x="5212080" y="1463040"/>
+            <a:ext cx="182880" cy="0"/>
           </a:xfrm>
           <a:prstGeom prst="line">
             <a:avLst/>
@@ -50726,14 +50612,14 @@
       </p:cxnSp>
       <p:cxnSp>
         <p:nvCxnSpPr>
-          <p:cNvPr id="124" name="Connector 123"/>
+          <p:cNvPr id="121" name="Connector 120"/>
           <p:cNvCxnSpPr/>
           <p:nvPr/>
         </p:nvCxnSpPr>
         <p:spPr>
           <a:xfrm>
-            <a:off x="4114800" y="2194560"/>
-            <a:ext cx="1618488" cy="0"/>
+            <a:off x="5394960" y="1463040"/>
+            <a:ext cx="0" cy="640080"/>
           </a:xfrm>
           <a:prstGeom prst="line">
             <a:avLst/>
@@ -50748,14 +50634,36 @@
       </p:cxnSp>
       <p:cxnSp>
         <p:nvCxnSpPr>
-          <p:cNvPr id="125" name="Connector 124"/>
+          <p:cNvPr id="122" name="Connector 121"/>
           <p:cNvCxnSpPr/>
           <p:nvPr/>
         </p:nvCxnSpPr>
         <p:spPr>
           <a:xfrm>
-            <a:off x="5733288" y="2194560"/>
-            <a:ext cx="0" cy="137160"/>
+            <a:off x="5394960" y="2103120"/>
+            <a:ext cx="2578608" cy="0"/>
+          </a:xfrm>
+          <a:prstGeom prst="line">
+            <a:avLst/>
+          </a:prstGeom>
+          <a:ln w="17780">
+            <a:solidFill>
+              <a:srgbClr val="5B82B1"/>
+            </a:solidFill>
+          </a:ln>
+          <a:effectLst/>
+        </p:spPr>
+      </p:cxnSp>
+      <p:cxnSp>
+        <p:nvCxnSpPr>
+          <p:cNvPr id="123" name="Connector 122"/>
+          <p:cNvCxnSpPr/>
+          <p:nvPr/>
+        </p:nvCxnSpPr>
+        <p:spPr>
+          <a:xfrm>
+            <a:off x="7973568" y="2103120"/>
+            <a:ext cx="0" cy="228600"/>
           </a:xfrm>
           <a:prstGeom prst="line">
             <a:avLst/>
@@ -50771,13 +50679,13 @@
       </p:cxnSp>
       <p:sp>
         <p:nvSpPr>
-          <p:cNvPr id="126" name="TextBox 125"/>
+          <p:cNvPr id="124" name="TextBox 123"/>
           <p:cNvSpPr txBox="1"/>
           <p:nvPr/>
         </p:nvSpPr>
         <p:spPr>
           <a:xfrm>
-            <a:off x="3941064" y="1952243"/>
+            <a:off x="5294376" y="1522476"/>
             <a:ext cx="109728" cy="118872"/>
           </a:xfrm>
           <a:prstGeom prst="rect">
@@ -50817,13 +50725,13 @@
       </p:sp>
       <p:sp>
         <p:nvSpPr>
-          <p:cNvPr id="127" name="TextBox 126"/>
+          <p:cNvPr id="125" name="TextBox 124"/>
           <p:cNvSpPr txBox="1"/>
           <p:nvPr/>
         </p:nvSpPr>
         <p:spPr>
           <a:xfrm>
-            <a:off x="5797296" y="2135124"/>
+            <a:off x="8037576" y="2135124"/>
             <a:ext cx="109728" cy="118872"/>
           </a:xfrm>
           <a:prstGeom prst="rect">
@@ -50863,7 +50771,7 @@
       </p:sp>
       <p:cxnSp>
         <p:nvCxnSpPr>
-          <p:cNvPr id="128" name="Connector 127"/>
+          <p:cNvPr id="126" name="Connector 125"/>
           <p:cNvCxnSpPr/>
           <p:nvPr/>
         </p:nvCxnSpPr>
@@ -50885,14 +50793,14 @@
       </p:cxnSp>
       <p:cxnSp>
         <p:nvCxnSpPr>
-          <p:cNvPr id="129" name="Connector 128"/>
+          <p:cNvPr id="127" name="Connector 126"/>
           <p:cNvCxnSpPr/>
           <p:nvPr/>
         </p:nvCxnSpPr>
         <p:spPr>
           <a:xfrm flipV="1">
-            <a:off x="9418320" y="2249424"/>
-            <a:ext cx="0" cy="585216"/>
+            <a:off x="9418320" y="2231136"/>
+            <a:ext cx="0" cy="603504"/>
           </a:xfrm>
           <a:prstGeom prst="line">
             <a:avLst/>
@@ -50907,14 +50815,14 @@
       </p:cxnSp>
       <p:cxnSp>
         <p:nvCxnSpPr>
-          <p:cNvPr id="130" name="Connector 129"/>
+          <p:cNvPr id="128" name="Connector 127"/>
           <p:cNvCxnSpPr/>
           <p:nvPr/>
         </p:nvCxnSpPr>
         <p:spPr>
           <a:xfrm flipH="1">
-            <a:off x="4846320" y="2249424"/>
-            <a:ext cx="4572000" cy="0"/>
+            <a:off x="5166360" y="2231136"/>
+            <a:ext cx="4251960" cy="0"/>
           </a:xfrm>
           <a:prstGeom prst="line">
             <a:avLst/>
@@ -50929,14 +50837,14 @@
       </p:cxnSp>
       <p:cxnSp>
         <p:nvCxnSpPr>
-          <p:cNvPr id="131" name="Connector 130"/>
+          <p:cNvPr id="129" name="Connector 128"/>
           <p:cNvCxnSpPr/>
           <p:nvPr/>
         </p:nvCxnSpPr>
         <p:spPr>
           <a:xfrm flipV="1">
-            <a:off x="4846320" y="1874519"/>
-            <a:ext cx="0" cy="374905"/>
+            <a:off x="5166360" y="1874519"/>
+            <a:ext cx="0" cy="356617"/>
           </a:xfrm>
           <a:prstGeom prst="line">
             <a:avLst/>
@@ -50952,7 +50860,7 @@
       </p:cxnSp>
       <p:sp>
         <p:nvSpPr>
-          <p:cNvPr id="132" name="TextBox 131"/>
+          <p:cNvPr id="130" name="TextBox 129"/>
           <p:cNvSpPr txBox="1"/>
           <p:nvPr/>
         </p:nvSpPr>
@@ -50998,13 +50906,13 @@
       </p:sp>
       <p:sp>
         <p:nvSpPr>
-          <p:cNvPr id="133" name="TextBox 132"/>
+          <p:cNvPr id="131" name="TextBox 130"/>
           <p:cNvSpPr txBox="1"/>
           <p:nvPr/>
         </p:nvSpPr>
         <p:spPr>
           <a:xfrm>
-            <a:off x="4672584" y="1952243"/>
+            <a:off x="4992624" y="1952243"/>
             <a:ext cx="109728" cy="118872"/>
           </a:xfrm>
           <a:prstGeom prst="rect">
@@ -51044,7 +50952,7 @@
       </p:sp>
       <p:cxnSp>
         <p:nvCxnSpPr>
-          <p:cNvPr id="134" name="Connector 133"/>
+          <p:cNvPr id="132" name="Connector 131"/>
           <p:cNvCxnSpPr/>
           <p:nvPr/>
         </p:nvCxnSpPr>
@@ -51066,7 +50974,7 @@
       </p:cxnSp>
       <p:cxnSp>
         <p:nvCxnSpPr>
-          <p:cNvPr id="135" name="Connector 134"/>
+          <p:cNvPr id="133" name="Connector 132"/>
           <p:cNvCxnSpPr/>
           <p:nvPr/>
         </p:nvCxnSpPr>
@@ -51088,7 +50996,7 @@
       </p:cxnSp>
       <p:cxnSp>
         <p:nvCxnSpPr>
-          <p:cNvPr id="136" name="Connector 135"/>
+          <p:cNvPr id="134" name="Connector 133"/>
           <p:cNvCxnSpPr/>
           <p:nvPr/>
         </p:nvCxnSpPr>
@@ -51110,7 +51018,7 @@
       </p:cxnSp>
       <p:cxnSp>
         <p:nvCxnSpPr>
-          <p:cNvPr id="137" name="Connector 136"/>
+          <p:cNvPr id="135" name="Connector 134"/>
           <p:cNvCxnSpPr/>
           <p:nvPr/>
         </p:nvCxnSpPr>
@@ -51132,7 +51040,7 @@
       </p:cxnSp>
       <p:cxnSp>
         <p:nvCxnSpPr>
-          <p:cNvPr id="138" name="Connector 137"/>
+          <p:cNvPr id="136" name="Connector 135"/>
           <p:cNvCxnSpPr/>
           <p:nvPr/>
         </p:nvCxnSpPr>
@@ -51155,7 +51063,7 @@
       </p:cxnSp>
       <p:sp>
         <p:nvSpPr>
-          <p:cNvPr id="139" name="TextBox 138"/>
+          <p:cNvPr id="137" name="TextBox 136"/>
           <p:cNvSpPr txBox="1"/>
           <p:nvPr/>
         </p:nvSpPr>
@@ -51201,7 +51109,7 @@
       </p:sp>
       <p:sp>
         <p:nvSpPr>
-          <p:cNvPr id="140" name="TextBox 139"/>
+          <p:cNvPr id="138" name="TextBox 137"/>
           <p:cNvSpPr txBox="1"/>
           <p:nvPr/>
         </p:nvSpPr>
@@ -51247,58 +51155,14 @@
       </p:sp>
       <p:cxnSp>
         <p:nvCxnSpPr>
-          <p:cNvPr id="141" name="Connector 140"/>
+          <p:cNvPr id="139" name="Connector 138"/>
           <p:cNvCxnSpPr/>
           <p:nvPr/>
         </p:nvCxnSpPr>
         <p:spPr>
           <a:xfrm>
-            <a:off x="5120640" y="3172968"/>
-            <a:ext cx="0" cy="320040"/>
-          </a:xfrm>
-          <a:prstGeom prst="line">
-            <a:avLst/>
-          </a:prstGeom>
-          <a:ln w="17780">
-            <a:solidFill>
-              <a:srgbClr val="5B82B1"/>
-            </a:solidFill>
-          </a:ln>
-          <a:effectLst/>
-        </p:spPr>
-      </p:cxnSp>
-      <p:cxnSp>
-        <p:nvCxnSpPr>
-          <p:cNvPr id="142" name="Connector 141"/>
-          <p:cNvCxnSpPr/>
-          <p:nvPr/>
-        </p:nvCxnSpPr>
-        <p:spPr>
-          <a:xfrm flipH="1">
-            <a:off x="3995928" y="3493008"/>
-            <a:ext cx="1124712" cy="0"/>
-          </a:xfrm>
-          <a:prstGeom prst="line">
-            <a:avLst/>
-          </a:prstGeom>
-          <a:ln w="17780">
-            <a:solidFill>
-              <a:srgbClr val="5B82B1"/>
-            </a:solidFill>
-          </a:ln>
-          <a:effectLst/>
-        </p:spPr>
-      </p:cxnSp>
-      <p:cxnSp>
-        <p:nvCxnSpPr>
-          <p:cNvPr id="143" name="Connector 142"/>
-          <p:cNvCxnSpPr/>
-          <p:nvPr/>
-        </p:nvCxnSpPr>
-        <p:spPr>
-          <a:xfrm>
-            <a:off x="3995928" y="3493008"/>
-            <a:ext cx="0" cy="210312"/>
+            <a:off x="7973568" y="3172968"/>
+            <a:ext cx="0" cy="530352"/>
           </a:xfrm>
           <a:prstGeom prst="line">
             <a:avLst/>
@@ -51314,13 +51178,13 @@
       </p:cxnSp>
       <p:sp>
         <p:nvSpPr>
-          <p:cNvPr id="144" name="TextBox 143"/>
+          <p:cNvPr id="140" name="TextBox 139"/>
           <p:cNvSpPr txBox="1"/>
           <p:nvPr/>
         </p:nvSpPr>
         <p:spPr>
           <a:xfrm>
-            <a:off x="4946904" y="3250692"/>
+            <a:off x="7799831" y="3250692"/>
             <a:ext cx="109728" cy="118872"/>
           </a:xfrm>
           <a:prstGeom prst="rect">
@@ -51360,13 +51224,13 @@
       </p:sp>
       <p:sp>
         <p:nvSpPr>
-          <p:cNvPr id="145" name="TextBox 144"/>
+          <p:cNvPr id="141" name="TextBox 140"/>
           <p:cNvSpPr txBox="1"/>
           <p:nvPr/>
         </p:nvSpPr>
         <p:spPr>
           <a:xfrm>
-            <a:off x="4059936" y="3506724"/>
+            <a:off x="8037576" y="3506724"/>
             <a:ext cx="109728" cy="118872"/>
           </a:xfrm>
           <a:prstGeom prst="rect">
@@ -51406,14 +51270,14 @@
       </p:sp>
       <p:cxnSp>
         <p:nvCxnSpPr>
-          <p:cNvPr id="146" name="Connector 145"/>
+          <p:cNvPr id="142" name="Connector 141"/>
           <p:cNvCxnSpPr/>
           <p:nvPr/>
         </p:nvCxnSpPr>
         <p:spPr>
           <a:xfrm>
-            <a:off x="6720840" y="2834640"/>
-            <a:ext cx="137160" cy="0"/>
+            <a:off x="7132320" y="3172968"/>
+            <a:ext cx="0" cy="265176"/>
           </a:xfrm>
           <a:prstGeom prst="line">
             <a:avLst/>
@@ -51428,14 +51292,14 @@
       </p:cxnSp>
       <p:cxnSp>
         <p:nvCxnSpPr>
-          <p:cNvPr id="147" name="Connector 146"/>
+          <p:cNvPr id="143" name="Connector 142"/>
           <p:cNvCxnSpPr/>
           <p:nvPr/>
         </p:nvCxnSpPr>
         <p:spPr>
-          <a:xfrm>
-            <a:off x="6858000" y="2834640"/>
-            <a:ext cx="0" cy="1371600"/>
+          <a:xfrm flipH="1">
+            <a:off x="5733288" y="3438144"/>
+            <a:ext cx="1399032" cy="0"/>
           </a:xfrm>
           <a:prstGeom prst="line">
             <a:avLst/>
@@ -51450,14 +51314,14 @@
       </p:cxnSp>
       <p:cxnSp>
         <p:nvCxnSpPr>
-          <p:cNvPr id="148" name="Connector 147"/>
+          <p:cNvPr id="144" name="Connector 143"/>
           <p:cNvCxnSpPr/>
           <p:nvPr/>
         </p:nvCxnSpPr>
         <p:spPr>
           <a:xfrm>
-            <a:off x="6858000" y="4206240"/>
-            <a:ext cx="365760" cy="0"/>
+            <a:off x="5733288" y="3438144"/>
+            <a:ext cx="0" cy="265176"/>
           </a:xfrm>
           <a:prstGeom prst="line">
             <a:avLst/>
@@ -51473,13 +51337,13 @@
       </p:cxnSp>
       <p:sp>
         <p:nvSpPr>
-          <p:cNvPr id="149" name="TextBox 148"/>
+          <p:cNvPr id="145" name="TextBox 144"/>
           <p:cNvSpPr txBox="1"/>
           <p:nvPr/>
         </p:nvSpPr>
         <p:spPr>
           <a:xfrm>
-            <a:off x="6803136" y="2894076"/>
+            <a:off x="6958584" y="3250692"/>
             <a:ext cx="109728" cy="118872"/>
           </a:xfrm>
           <a:prstGeom prst="rect">
@@ -51519,13 +51383,13 @@
       </p:sp>
       <p:sp>
         <p:nvSpPr>
-          <p:cNvPr id="150" name="TextBox 149"/>
+          <p:cNvPr id="146" name="TextBox 145"/>
           <p:cNvSpPr txBox="1"/>
           <p:nvPr/>
         </p:nvSpPr>
         <p:spPr>
           <a:xfrm>
-            <a:off x="7031736" y="4027931"/>
+            <a:off x="5797296" y="3506724"/>
             <a:ext cx="109728" cy="118872"/>
           </a:xfrm>
           <a:prstGeom prst="rect">
@@ -51565,14 +51429,14 @@
       </p:sp>
       <p:cxnSp>
         <p:nvCxnSpPr>
-          <p:cNvPr id="151" name="Connector 150"/>
+          <p:cNvPr id="147" name="Connector 146"/>
           <p:cNvCxnSpPr/>
           <p:nvPr/>
         </p:nvCxnSpPr>
         <p:spPr>
-          <a:xfrm>
-            <a:off x="7223760" y="4407408"/>
-            <a:ext cx="274319" cy="0"/>
+          <a:xfrm flipH="1">
+            <a:off x="4617720" y="4123944"/>
+            <a:ext cx="137160" cy="0"/>
           </a:xfrm>
           <a:prstGeom prst="line">
             <a:avLst/>
@@ -51588,13 +51452,13 @@
       </p:cxnSp>
       <p:sp>
         <p:nvSpPr>
-          <p:cNvPr id="152" name="TextBox 151"/>
+          <p:cNvPr id="148" name="TextBox 147"/>
           <p:cNvSpPr txBox="1"/>
           <p:nvPr/>
         </p:nvSpPr>
         <p:spPr>
           <a:xfrm>
-            <a:off x="7306056" y="4466844"/>
+            <a:off x="4562856" y="3945635"/>
             <a:ext cx="109728" cy="118872"/>
           </a:xfrm>
           <a:prstGeom prst="rect">
@@ -51634,13 +51498,13 @@
       </p:sp>
       <p:sp>
         <p:nvSpPr>
-          <p:cNvPr id="153" name="TextBox 152"/>
+          <p:cNvPr id="149" name="TextBox 148"/>
           <p:cNvSpPr txBox="1"/>
           <p:nvPr/>
         </p:nvSpPr>
         <p:spPr>
           <a:xfrm>
-            <a:off x="7306055" y="4229100"/>
+            <a:off x="4700016" y="4183379"/>
             <a:ext cx="109728" cy="118872"/>
           </a:xfrm>
           <a:prstGeom prst="rect">
@@ -51680,7 +51544,7 @@
       </p:sp>
       <p:cxnSp>
         <p:nvCxnSpPr>
-          <p:cNvPr id="154" name="Connector 153"/>
+          <p:cNvPr id="150" name="Connector 149"/>
           <p:cNvCxnSpPr/>
           <p:nvPr/>
         </p:nvCxnSpPr>
@@ -51703,7 +51567,7 @@
       </p:cxnSp>
       <p:sp>
         <p:nvSpPr>
-          <p:cNvPr id="155" name="TextBox 154"/>
+          <p:cNvPr id="151" name="TextBox 150"/>
           <p:cNvSpPr txBox="1"/>
           <p:nvPr/>
         </p:nvSpPr>
@@ -51749,7 +51613,7 @@
       </p:sp>
       <p:sp>
         <p:nvSpPr>
-          <p:cNvPr id="156" name="TextBox 155"/>
+          <p:cNvPr id="152" name="TextBox 151"/>
           <p:cNvSpPr txBox="1"/>
           <p:nvPr/>
         </p:nvSpPr>
@@ -51795,13 +51659,13 @@
       </p:sp>
       <p:cxnSp>
         <p:nvCxnSpPr>
-          <p:cNvPr id="157" name="Connector 156"/>
+          <p:cNvPr id="153" name="Connector 152"/>
           <p:cNvCxnSpPr/>
           <p:nvPr/>
         </p:nvCxnSpPr>
         <p:spPr>
           <a:xfrm>
-            <a:off x="10716768" y="3310128"/>
+            <a:off x="10607040" y="3310128"/>
             <a:ext cx="0" cy="393192"/>
           </a:xfrm>
           <a:prstGeom prst="line">
@@ -51818,13 +51682,13 @@
       </p:cxnSp>
       <p:sp>
         <p:nvSpPr>
-          <p:cNvPr id="158" name="TextBox 157"/>
+          <p:cNvPr id="154" name="TextBox 153"/>
           <p:cNvSpPr txBox="1"/>
           <p:nvPr/>
         </p:nvSpPr>
         <p:spPr>
           <a:xfrm>
-            <a:off x="10543032" y="3387852"/>
+            <a:off x="10433303" y="3387852"/>
             <a:ext cx="109728" cy="118872"/>
           </a:xfrm>
           <a:prstGeom prst="rect">
@@ -51864,13 +51728,13 @@
       </p:sp>
       <p:sp>
         <p:nvSpPr>
-          <p:cNvPr id="159" name="TextBox 158"/>
+          <p:cNvPr id="155" name="TextBox 154"/>
           <p:cNvSpPr txBox="1"/>
           <p:nvPr/>
         </p:nvSpPr>
         <p:spPr>
           <a:xfrm>
-            <a:off x="10780776" y="3506724"/>
+            <a:off x="10671048" y="3506724"/>
             <a:ext cx="109728" cy="118872"/>
           </a:xfrm>
           <a:prstGeom prst="rect">
@@ -51910,7 +51774,7 @@
       </p:sp>
       <p:cxnSp>
         <p:nvCxnSpPr>
-          <p:cNvPr id="160" name="Connector 159"/>
+          <p:cNvPr id="156" name="Connector 155"/>
           <p:cNvCxnSpPr/>
           <p:nvPr/>
         </p:nvCxnSpPr>
@@ -51933,7 +51797,7 @@
       </p:cxnSp>
       <p:sp>
         <p:nvSpPr>
-          <p:cNvPr id="161" name="TextBox 160"/>
+          <p:cNvPr id="157" name="TextBox 156"/>
           <p:cNvSpPr txBox="1"/>
           <p:nvPr/>
         </p:nvSpPr>
@@ -51979,7 +51843,7 @@
       </p:sp>
       <p:sp>
         <p:nvSpPr>
-          <p:cNvPr id="162" name="TextBox 161"/>
+          <p:cNvPr id="158" name="TextBox 157"/>
           <p:cNvSpPr txBox="1"/>
           <p:nvPr/>
         </p:nvSpPr>
@@ -52025,7 +51889,7 @@
       </p:sp>
       <p:cxnSp>
         <p:nvCxnSpPr>
-          <p:cNvPr id="163" name="Connector 162"/>
+          <p:cNvPr id="159" name="Connector 158"/>
           <p:cNvCxnSpPr/>
           <p:nvPr/>
         </p:nvCxnSpPr>
@@ -52047,7 +51911,7 @@
       </p:cxnSp>
       <p:cxnSp>
         <p:nvCxnSpPr>
-          <p:cNvPr id="164" name="Connector 163"/>
+          <p:cNvPr id="160" name="Connector 159"/>
           <p:cNvCxnSpPr/>
           <p:nvPr/>
         </p:nvCxnSpPr>
@@ -52069,7 +51933,7 @@
       </p:cxnSp>
       <p:cxnSp>
         <p:nvCxnSpPr>
-          <p:cNvPr id="165" name="Connector 164"/>
+          <p:cNvPr id="161" name="Connector 160"/>
           <p:cNvCxnSpPr/>
           <p:nvPr/>
         </p:nvCxnSpPr>
@@ -52092,7 +51956,7 @@
       </p:cxnSp>
       <p:sp>
         <p:nvSpPr>
-          <p:cNvPr id="166" name="TextBox 165"/>
+          <p:cNvPr id="162" name="TextBox 161"/>
           <p:cNvSpPr txBox="1"/>
           <p:nvPr/>
         </p:nvSpPr>
@@ -52138,7 +52002,7 @@
       </p:sp>
       <p:sp>
         <p:nvSpPr>
-          <p:cNvPr id="167" name="TextBox 166"/>
+          <p:cNvPr id="163" name="TextBox 162"/>
           <p:cNvSpPr txBox="1"/>
           <p:nvPr/>
         </p:nvSpPr>
@@ -52184,7 +52048,7 @@
       </p:sp>
       <p:cxnSp>
         <p:nvCxnSpPr>
-          <p:cNvPr id="168" name="Connector 167"/>
+          <p:cNvPr id="164" name="Connector 163"/>
           <p:cNvCxnSpPr/>
           <p:nvPr/>
         </p:nvCxnSpPr>
@@ -52206,7 +52070,7 @@
       </p:cxnSp>
       <p:cxnSp>
         <p:nvCxnSpPr>
-          <p:cNvPr id="169" name="Connector 168"/>
+          <p:cNvPr id="165" name="Connector 164"/>
           <p:cNvCxnSpPr/>
           <p:nvPr/>
         </p:nvCxnSpPr>
@@ -52228,7 +52092,7 @@
       </p:cxnSp>
       <p:cxnSp>
         <p:nvCxnSpPr>
-          <p:cNvPr id="170" name="Connector 169"/>
+          <p:cNvPr id="166" name="Connector 165"/>
           <p:cNvCxnSpPr/>
           <p:nvPr/>
         </p:nvCxnSpPr>
@@ -52251,7 +52115,7 @@
       </p:cxnSp>
       <p:sp>
         <p:nvSpPr>
-          <p:cNvPr id="171" name="TextBox 170"/>
+          <p:cNvPr id="167" name="TextBox 166"/>
           <p:cNvSpPr txBox="1"/>
           <p:nvPr/>
         </p:nvSpPr>
@@ -52297,7 +52161,7 @@
       </p:sp>
       <p:sp>
         <p:nvSpPr>
-          <p:cNvPr id="172" name="TextBox 171"/>
+          <p:cNvPr id="168" name="TextBox 167"/>
           <p:cNvSpPr txBox="1"/>
           <p:nvPr/>
         </p:nvSpPr>
@@ -52343,7 +52207,7 @@
       </p:sp>
       <p:sp>
         <p:nvSpPr>
-          <p:cNvPr id="173" name="TextBox 172"/>
+          <p:cNvPr id="169" name="TextBox 168"/>
           <p:cNvSpPr txBox="1"/>
           <p:nvPr/>
         </p:nvSpPr>

--- a/report/方案B_B2_架构图集.pptx
+++ b/report/方案B_B2_架构图集.pptx
@@ -39141,7 +39141,7 @@
         <p:spPr>
           <a:xfrm>
             <a:off x="274320" y="5870448"/>
-            <a:ext cx="3703320" cy="841248"/>
+            <a:ext cx="2377440" cy="841248"/>
           </a:xfrm>
           <a:prstGeom prst="roundRect">
             <a:avLst>
@@ -39195,7 +39195,7 @@
         <p:spPr>
           <a:xfrm>
             <a:off x="285292" y="5881420"/>
-            <a:ext cx="3681374" cy="214884"/>
+            <a:ext cx="2355494" cy="214884"/>
           </a:xfrm>
           <a:prstGeom prst="roundRect">
             <a:avLst>
@@ -39241,7 +39241,7 @@
         <p:spPr>
           <a:xfrm>
             <a:off x="310896" y="5902452"/>
-            <a:ext cx="3630168" cy="173736"/>
+            <a:ext cx="2304288" cy="173736"/>
           </a:xfrm>
           <a:prstGeom prst="rect">
             <a:avLst/>
@@ -39287,7 +39287,7 @@
         <p:spPr>
           <a:xfrm>
             <a:off x="285292" y="6108192"/>
-            <a:ext cx="3681374" cy="585216"/>
+            <a:ext cx="2355494" cy="585216"/>
           </a:xfrm>
           <a:prstGeom prst="roundRect">
             <a:avLst>
@@ -39333,7 +39333,7 @@
         <p:spPr>
           <a:xfrm>
             <a:off x="365760" y="6131052"/>
-            <a:ext cx="3557015" cy="566928"/>
+            <a:ext cx="2231136" cy="566928"/>
           </a:xfrm>
           <a:prstGeom prst="rect">
             <a:avLst/>
@@ -39527,12 +39527,12 @@
         </p:nvSpPr>
         <p:spPr>
           <a:xfrm>
-            <a:off x="4160520" y="5870448"/>
-            <a:ext cx="3703320" cy="704088"/>
+            <a:off x="2798064" y="5870448"/>
+            <a:ext cx="2615184" cy="841248"/>
           </a:xfrm>
           <a:prstGeom prst="roundRect">
             <a:avLst>
-              <a:gd name="adj" fmla="val 4545"/>
+              <a:gd name="adj" fmla="val 3804"/>
             </a:avLst>
           </a:prstGeom>
           <a:solidFill>
@@ -39581,8 +39581,8 @@
         </p:nvSpPr>
         <p:spPr>
           <a:xfrm>
-            <a:off x="4171492" y="5881420"/>
-            <a:ext cx="3681374" cy="214884"/>
+            <a:off x="2809036" y="5881420"/>
+            <a:ext cx="2593238" cy="214884"/>
           </a:xfrm>
           <a:prstGeom prst="roundRect">
             <a:avLst>
@@ -39627,8 +39627,8 @@
         </p:nvSpPr>
         <p:spPr>
           <a:xfrm>
-            <a:off x="4197096" y="5902452"/>
-            <a:ext cx="3630168" cy="173736"/>
+            <a:off x="2834640" y="5902452"/>
+            <a:ext cx="2542032" cy="173736"/>
           </a:xfrm>
           <a:prstGeom prst="rect">
             <a:avLst/>
@@ -39673,12 +39673,12 @@
         </p:nvSpPr>
         <p:spPr>
           <a:xfrm>
-            <a:off x="4171492" y="6108192"/>
-            <a:ext cx="3681374" cy="448056"/>
+            <a:off x="2809036" y="6108192"/>
+            <a:ext cx="2593238" cy="585216"/>
           </a:xfrm>
           <a:prstGeom prst="roundRect">
             <a:avLst>
-              <a:gd name="adj" fmla="val 4081"/>
+              <a:gd name="adj" fmla="val 3125"/>
             </a:avLst>
           </a:prstGeom>
           <a:solidFill>
@@ -39719,8 +39719,8 @@
         </p:nvSpPr>
         <p:spPr>
           <a:xfrm>
-            <a:off x="4251959" y="6131052"/>
-            <a:ext cx="3557015" cy="429768"/>
+            <a:off x="2889504" y="6131052"/>
+            <a:ext cx="2468879" cy="566928"/>
           </a:xfrm>
           <a:prstGeom prst="rect">
             <a:avLst/>
@@ -39861,6 +39861,39 @@
               <a:t> (int)</a:t>
             </a:r>
           </a:p>
+          <a:p>
+            <a:pPr algn="l">
+              <a:lnSpc>
+                <a:spcPct val="100000"/>
+              </a:lnSpc>
+              <a:spcBef>
+                <a:spcPts val="0"/>
+              </a:spcBef>
+              <a:spcAft>
+                <a:spcPts val="0"/>
+              </a:spcAft>
+            </a:pPr>
+            <a:r>
+              <a:rPr sz="620" b="0" i="0">
+                <a:solidFill>
+                  <a:srgbClr val="FAFAFA"/>
+                </a:solidFill>
+                <a:latin typeface="Segoe UI"/>
+                <a:ea typeface="Microsoft YaHei"/>
+              </a:rPr>
+              <a:t>     </a:t>
+            </a:r>
+            <a:r>
+              <a:rPr sz="630" b="0" i="0">
+                <a:solidFill>
+                  <a:srgbClr val="222222"/>
+                </a:solidFill>
+                <a:latin typeface="Segoe UI"/>
+                <a:ea typeface="Microsoft YaHei"/>
+              </a:rPr>
+              <a:t>sync_job 按天预聚合·派生</a:t>
+            </a:r>
+          </a:p>
         </p:txBody>
       </p:sp>
       <p:sp>
@@ -39871,8 +39904,8 @@
         </p:nvSpPr>
         <p:spPr>
           <a:xfrm>
-            <a:off x="8046720" y="5870448"/>
-            <a:ext cx="3886200" cy="704088"/>
+            <a:off x="5559552" y="5870448"/>
+            <a:ext cx="2377440" cy="704088"/>
           </a:xfrm>
           <a:prstGeom prst="roundRect">
             <a:avLst>
@@ -39925,8 +39958,8 @@
         </p:nvSpPr>
         <p:spPr>
           <a:xfrm>
-            <a:off x="8057692" y="5881420"/>
-            <a:ext cx="3864254" cy="214884"/>
+            <a:off x="5570524" y="5881420"/>
+            <a:ext cx="2355494" cy="214884"/>
           </a:xfrm>
           <a:prstGeom prst="roundRect">
             <a:avLst>
@@ -39971,8 +40004,8 @@
         </p:nvSpPr>
         <p:spPr>
           <a:xfrm>
-            <a:off x="8083296" y="5902452"/>
-            <a:ext cx="3813048" cy="173736"/>
+            <a:off x="5596128" y="5902452"/>
+            <a:ext cx="2304288" cy="173736"/>
           </a:xfrm>
           <a:prstGeom prst="rect">
             <a:avLst/>
@@ -40017,8 +40050,8 @@
         </p:nvSpPr>
         <p:spPr>
           <a:xfrm>
-            <a:off x="8057692" y="6108192"/>
-            <a:ext cx="3864254" cy="448056"/>
+            <a:off x="5570524" y="6108192"/>
+            <a:ext cx="2355494" cy="448056"/>
           </a:xfrm>
           <a:prstGeom prst="roundRect">
             <a:avLst>
@@ -40063,8 +40096,8 @@
         </p:nvSpPr>
         <p:spPr>
           <a:xfrm>
-            <a:off x="8138160" y="6131052"/>
-            <a:ext cx="3739896" cy="429768"/>
+            <a:off x="5650992" y="6131052"/>
+            <a:ext cx="2231136" cy="429768"/>
           </a:xfrm>
           <a:prstGeom prst="rect">
             <a:avLst/>
@@ -42291,7 +42324,171 @@
       </p:sp>
       <p:sp>
         <p:nvSpPr>
-          <p:cNvPr id="166" name="TextBox 165"/>
+          <p:cNvPr id="166" name="Rounded Rectangle 165"/>
+          <p:cNvSpPr/>
+          <p:nvPr/>
+        </p:nvSpPr>
+        <p:spPr>
+          <a:xfrm>
+            <a:off x="8083296" y="5870448"/>
+            <a:ext cx="3849624" cy="731520"/>
+          </a:xfrm>
+          <a:prstGeom prst="roundRect">
+            <a:avLst>
+              <a:gd name="adj" fmla="val 6250"/>
+            </a:avLst>
+          </a:prstGeom>
+          <a:solidFill>
+            <a:srgbClr val="FFFFFF"/>
+          </a:solidFill>
+          <a:ln w="12700">
+            <a:solidFill>
+              <a:srgbClr val="A8A8A8"/>
+            </a:solidFill>
+            <a:prstDash val="dash"/>
+          </a:ln>
+          <a:effectLst/>
+        </p:spPr>
+        <p:style>
+          <a:lnRef idx="1">
+            <a:schemeClr val="accent1"/>
+          </a:lnRef>
+          <a:fillRef idx="3">
+            <a:schemeClr val="accent1"/>
+          </a:fillRef>
+          <a:effectRef idx="2">
+            <a:schemeClr val="accent1"/>
+          </a:effectRef>
+          <a:fontRef idx="minor">
+            <a:schemeClr val="lt1"/>
+          </a:fontRef>
+        </p:style>
+        <p:txBody>
+          <a:bodyPr rtlCol="0" anchor="ctr"/>
+          <a:lstStyle/>
+          <a:p>
+            <a:pPr algn="ctr"/>
+          </a:p>
+        </p:txBody>
+      </p:sp>
+      <p:sp>
+        <p:nvSpPr>
+          <p:cNvPr id="167" name="TextBox 166"/>
+          <p:cNvSpPr txBox="1"/>
+          <p:nvPr/>
+        </p:nvSpPr>
+        <p:spPr>
+          <a:xfrm>
+            <a:off x="8193023" y="5925312"/>
+            <a:ext cx="3630168" cy="640080"/>
+          </a:xfrm>
+          <a:prstGeom prst="rect">
+            <a:avLst/>
+          </a:prstGeom>
+          <a:noFill/>
+        </p:spPr>
+        <p:txBody>
+          <a:bodyPr wrap="square" lIns="0" rIns="0" tIns="0" bIns="0" anchor="t">
+            <a:noAutofit/>
+          </a:bodyPr>
+          <a:lstStyle/>
+          <a:p>
+            <a:pPr algn="l">
+              <a:lnSpc>
+                <a:spcPct val="125000"/>
+              </a:lnSpc>
+              <a:spcBef>
+                <a:spcPts val="0"/>
+              </a:spcBef>
+              <a:spcAft>
+                <a:spcPts val="0"/>
+              </a:spcAft>
+            </a:pPr>
+            <a:r>
+              <a:rPr sz="580" b="1" i="0">
+                <a:solidFill>
+                  <a:srgbClr val="475569"/>
+                </a:solidFill>
+                <a:latin typeface="Segoe UI"/>
+                <a:ea typeface="Microsoft YaHei"/>
+              </a:rPr>
+              <a:t>跨页关联（详见卡内 FK 字段）：</a:t>
+            </a:r>
+          </a:p>
+          <a:p>
+            <a:pPr algn="l">
+              <a:lnSpc>
+                <a:spcPct val="125000"/>
+              </a:lnSpc>
+              <a:spcBef>
+                <a:spcPts val="0"/>
+              </a:spcBef>
+              <a:spcAft>
+                <a:spcPts val="0"/>
+              </a:spcAft>
+            </a:pPr>
+            <a:r>
+              <a:rPr sz="560" b="0" i="0">
+                <a:solidFill>
+                  <a:srgbClr val="64748B"/>
+                </a:solidFill>
+                <a:latin typeface="Segoe UI"/>
+                <a:ea typeface="Microsoft YaHei"/>
+              </a:rPr>
+              <a:t>source_table → sync_table_config · sync_table_stat · archive_file</a:t>
+            </a:r>
+          </a:p>
+          <a:p>
+            <a:pPr algn="l">
+              <a:lnSpc>
+                <a:spcPct val="125000"/>
+              </a:lnSpc>
+              <a:spcBef>
+                <a:spcPts val="0"/>
+              </a:spcBef>
+              <a:spcAft>
+                <a:spcPts val="0"/>
+              </a:spcAft>
+            </a:pPr>
+            <a:r>
+              <a:rPr sz="560" b="0" i="0">
+                <a:solidFill>
+                  <a:srgbClr val="64748B"/>
+                </a:solidFill>
+                <a:latin typeface="Segoe UI"/>
+                <a:ea typeface="Microsoft YaHei"/>
+              </a:rPr>
+              <a:t>schema → drill_config　·　user → destroy_approval</a:t>
+            </a:r>
+          </a:p>
+          <a:p>
+            <a:pPr algn="l">
+              <a:lnSpc>
+                <a:spcPct val="125000"/>
+              </a:lnSpc>
+              <a:spcBef>
+                <a:spcPts val="0"/>
+              </a:spcBef>
+              <a:spcAft>
+                <a:spcPts val="0"/>
+              </a:spcAft>
+            </a:pPr>
+            <a:r>
+              <a:rPr sz="560" b="0" i="0">
+                <a:solidFill>
+                  <a:srgbClr val="64748B"/>
+                </a:solidFill>
+                <a:latin typeface="Segoe UI"/>
+                <a:ea typeface="Microsoft YaHei"/>
+              </a:rPr>
+              <a:t>sync_job ⇢ sync_activity（按天预聚合，派生表无 FK）</a:t>
+            </a:r>
+          </a:p>
+        </p:txBody>
+      </p:sp>
+      <p:sp>
+        <p:nvSpPr>
+          <p:cNvPr id="168" name="TextBox 167"/>
           <p:cNvSpPr txBox="1"/>
           <p:nvPr/>
         </p:nvSpPr>
@@ -42337,7 +42534,7 @@
       </p:sp>
       <p:sp>
         <p:nvSpPr>
-          <p:cNvPr id="167" name="Rounded Rectangle 166"/>
+          <p:cNvPr id="169" name="Rounded Rectangle 168"/>
           <p:cNvSpPr/>
           <p:nvPr/>
         </p:nvSpPr>
@@ -42386,7 +42583,7 @@
       </p:sp>
       <p:sp>
         <p:nvSpPr>
-          <p:cNvPr id="168" name="TextBox 167"/>
+          <p:cNvPr id="170" name="TextBox 169"/>
           <p:cNvSpPr txBox="1"/>
           <p:nvPr/>
         </p:nvSpPr>
@@ -50163,6 +50360,187 @@
         </p:nvCxnSpPr>
         <p:spPr>
           <a:xfrm>
+            <a:off x="2377440" y="1417320"/>
+            <a:ext cx="274320" cy="0"/>
+          </a:xfrm>
+          <a:prstGeom prst="line">
+            <a:avLst/>
+          </a:prstGeom>
+          <a:ln w="17780">
+            <a:solidFill>
+              <a:srgbClr val="5B82B1"/>
+            </a:solidFill>
+          </a:ln>
+          <a:effectLst/>
+        </p:spPr>
+      </p:cxnSp>
+      <p:cxnSp>
+        <p:nvCxnSpPr>
+          <p:cNvPr id="108" name="Connector 107"/>
+          <p:cNvCxnSpPr/>
+          <p:nvPr/>
+        </p:nvCxnSpPr>
+        <p:spPr>
+          <a:xfrm>
+            <a:off x="2651760" y="1417320"/>
+            <a:ext cx="0" cy="576072"/>
+          </a:xfrm>
+          <a:prstGeom prst="line">
+            <a:avLst/>
+          </a:prstGeom>
+          <a:ln w="17780">
+            <a:solidFill>
+              <a:srgbClr val="5B82B1"/>
+            </a:solidFill>
+          </a:ln>
+          <a:effectLst/>
+        </p:spPr>
+      </p:cxnSp>
+      <p:cxnSp>
+        <p:nvCxnSpPr>
+          <p:cNvPr id="109" name="Connector 108"/>
+          <p:cNvCxnSpPr/>
+          <p:nvPr/>
+        </p:nvCxnSpPr>
+        <p:spPr>
+          <a:xfrm>
+            <a:off x="2651760" y="1993392"/>
+            <a:ext cx="3383280" cy="0"/>
+          </a:xfrm>
+          <a:prstGeom prst="line">
+            <a:avLst/>
+          </a:prstGeom>
+          <a:ln w="17780">
+            <a:solidFill>
+              <a:srgbClr val="5B82B1"/>
+            </a:solidFill>
+          </a:ln>
+          <a:effectLst/>
+        </p:spPr>
+      </p:cxnSp>
+      <p:cxnSp>
+        <p:nvCxnSpPr>
+          <p:cNvPr id="110" name="Connector 109"/>
+          <p:cNvCxnSpPr/>
+          <p:nvPr/>
+        </p:nvCxnSpPr>
+        <p:spPr>
+          <a:xfrm flipV="1">
+            <a:off x="6035040" y="1737360"/>
+            <a:ext cx="0" cy="256032"/>
+          </a:xfrm>
+          <a:prstGeom prst="line">
+            <a:avLst/>
+          </a:prstGeom>
+          <a:ln w="17780">
+            <a:solidFill>
+              <a:srgbClr val="5B82B1"/>
+            </a:solidFill>
+            <a:tailEnd type="triangle" w="med" len="med"/>
+          </a:ln>
+          <a:effectLst/>
+        </p:spPr>
+      </p:cxnSp>
+      <p:sp>
+        <p:nvSpPr>
+          <p:cNvPr id="111" name="TextBox 110"/>
+          <p:cNvSpPr txBox="1"/>
+          <p:nvPr/>
+        </p:nvSpPr>
+        <p:spPr>
+          <a:xfrm>
+            <a:off x="2459736" y="1476756"/>
+            <a:ext cx="109728" cy="118872"/>
+          </a:xfrm>
+          <a:prstGeom prst="rect">
+            <a:avLst/>
+          </a:prstGeom>
+          <a:noFill/>
+        </p:spPr>
+        <p:txBody>
+          <a:bodyPr wrap="square" lIns="0" rIns="0" tIns="0" bIns="0" anchor="ctr">
+            <a:noAutofit/>
+          </a:bodyPr>
+          <a:lstStyle/>
+          <a:p>
+            <a:pPr algn="ctr">
+              <a:lnSpc>
+                <a:spcPct val="112000"/>
+              </a:lnSpc>
+              <a:spcBef>
+                <a:spcPts val="0"/>
+              </a:spcBef>
+              <a:spcAft>
+                <a:spcPts val="0"/>
+              </a:spcAft>
+            </a:pPr>
+            <a:r>
+              <a:rPr sz="700" b="1" i="0">
+                <a:solidFill>
+                  <a:srgbClr val="222222"/>
+                </a:solidFill>
+                <a:latin typeface="Segoe UI"/>
+                <a:ea typeface="Microsoft YaHei"/>
+              </a:rPr>
+              <a:t>1</a:t>
+            </a:r>
+          </a:p>
+        </p:txBody>
+      </p:sp>
+      <p:sp>
+        <p:nvSpPr>
+          <p:cNvPr id="112" name="TextBox 111"/>
+          <p:cNvSpPr txBox="1"/>
+          <p:nvPr/>
+        </p:nvSpPr>
+        <p:spPr>
+          <a:xfrm>
+            <a:off x="5861304" y="1815084"/>
+            <a:ext cx="109728" cy="118872"/>
+          </a:xfrm>
+          <a:prstGeom prst="rect">
+            <a:avLst/>
+          </a:prstGeom>
+          <a:noFill/>
+        </p:spPr>
+        <p:txBody>
+          <a:bodyPr wrap="square" lIns="0" rIns="0" tIns="0" bIns="0" anchor="ctr">
+            <a:noAutofit/>
+          </a:bodyPr>
+          <a:lstStyle/>
+          <a:p>
+            <a:pPr algn="ctr">
+              <a:lnSpc>
+                <a:spcPct val="112000"/>
+              </a:lnSpc>
+              <a:spcBef>
+                <a:spcPts val="0"/>
+              </a:spcBef>
+              <a:spcAft>
+                <a:spcPts val="0"/>
+              </a:spcAft>
+            </a:pPr>
+            <a:r>
+              <a:rPr sz="700" b="1" i="0">
+                <a:solidFill>
+                  <a:srgbClr val="222222"/>
+                </a:solidFill>
+                <a:latin typeface="Segoe UI"/>
+                <a:ea typeface="Microsoft YaHei"/>
+              </a:rPr>
+              <a:t>N</a:t>
+            </a:r>
+          </a:p>
+        </p:txBody>
+      </p:sp>
+      <p:cxnSp>
+        <p:nvCxnSpPr>
+          <p:cNvPr id="113" name="Connector 112"/>
+          <p:cNvCxnSpPr/>
+          <p:nvPr/>
+        </p:nvCxnSpPr>
+        <p:spPr>
+          <a:xfrm>
             <a:off x="2377440" y="1298448"/>
             <a:ext cx="64008" cy="0"/>
           </a:xfrm>
@@ -50179,7 +50557,7 @@
       </p:cxnSp>
       <p:cxnSp>
         <p:nvCxnSpPr>
-          <p:cNvPr id="108" name="Connector 107"/>
+          <p:cNvPr id="114" name="Connector 113"/>
           <p:cNvCxnSpPr/>
           <p:nvPr/>
         </p:nvCxnSpPr>
@@ -50201,7 +50579,7 @@
       </p:cxnSp>
       <p:cxnSp>
         <p:nvCxnSpPr>
-          <p:cNvPr id="109" name="Connector 108"/>
+          <p:cNvPr id="115" name="Connector 114"/>
           <p:cNvCxnSpPr/>
           <p:nvPr/>
         </p:nvCxnSpPr>
@@ -50224,7 +50602,7 @@
       </p:cxnSp>
       <p:sp>
         <p:nvSpPr>
-          <p:cNvPr id="110" name="TextBox 109"/>
+          <p:cNvPr id="116" name="TextBox 115"/>
           <p:cNvSpPr txBox="1"/>
           <p:nvPr/>
         </p:nvSpPr>
@@ -50270,7 +50648,7 @@
       </p:sp>
       <p:sp>
         <p:nvSpPr>
-          <p:cNvPr id="111" name="TextBox 110"/>
+          <p:cNvPr id="117" name="TextBox 116"/>
           <p:cNvSpPr txBox="1"/>
           <p:nvPr/>
         </p:nvSpPr>
@@ -50316,7 +50694,7 @@
       </p:sp>
       <p:cxnSp>
         <p:nvCxnSpPr>
-          <p:cNvPr id="112" name="Connector 111"/>
+          <p:cNvPr id="118" name="Connector 117"/>
           <p:cNvCxnSpPr/>
           <p:nvPr/>
         </p:nvCxnSpPr>
@@ -50338,7 +50716,7 @@
       </p:cxnSp>
       <p:cxnSp>
         <p:nvCxnSpPr>
-          <p:cNvPr id="113" name="Connector 112"/>
+          <p:cNvPr id="119" name="Connector 118"/>
           <p:cNvCxnSpPr/>
           <p:nvPr/>
         </p:nvCxnSpPr>
@@ -50360,7 +50738,7 @@
       </p:cxnSp>
       <p:cxnSp>
         <p:nvCxnSpPr>
-          <p:cNvPr id="114" name="Connector 113"/>
+          <p:cNvPr id="120" name="Connector 119"/>
           <p:cNvCxnSpPr/>
           <p:nvPr/>
         </p:nvCxnSpPr>
@@ -50383,7 +50761,7 @@
       </p:cxnSp>
       <p:sp>
         <p:nvSpPr>
-          <p:cNvPr id="115" name="TextBox 114"/>
+          <p:cNvPr id="121" name="TextBox 120"/>
           <p:cNvSpPr txBox="1"/>
           <p:nvPr/>
         </p:nvSpPr>
@@ -50429,7 +50807,7 @@
       </p:sp>
       <p:sp>
         <p:nvSpPr>
-          <p:cNvPr id="116" name="TextBox 115"/>
+          <p:cNvPr id="122" name="TextBox 121"/>
           <p:cNvSpPr txBox="1"/>
           <p:nvPr/>
         </p:nvSpPr>
@@ -50475,7 +50853,7 @@
       </p:sp>
       <p:cxnSp>
         <p:nvCxnSpPr>
-          <p:cNvPr id="117" name="Connector 116"/>
+          <p:cNvPr id="123" name="Connector 122"/>
           <p:cNvCxnSpPr/>
           <p:nvPr/>
         </p:nvCxnSpPr>
@@ -50498,7 +50876,7 @@
       </p:cxnSp>
       <p:sp>
         <p:nvSpPr>
-          <p:cNvPr id="118" name="TextBox 117"/>
+          <p:cNvPr id="124" name="TextBox 123"/>
           <p:cNvSpPr txBox="1"/>
           <p:nvPr/>
         </p:nvSpPr>
@@ -50544,7 +50922,7 @@
       </p:sp>
       <p:sp>
         <p:nvSpPr>
-          <p:cNvPr id="119" name="TextBox 118"/>
+          <p:cNvPr id="125" name="TextBox 124"/>
           <p:cNvSpPr txBox="1"/>
           <p:nvPr/>
         </p:nvSpPr>
@@ -50590,7 +50968,7 @@
       </p:sp>
       <p:cxnSp>
         <p:nvCxnSpPr>
-          <p:cNvPr id="120" name="Connector 119"/>
+          <p:cNvPr id="126" name="Connector 125"/>
           <p:cNvCxnSpPr/>
           <p:nvPr/>
         </p:nvCxnSpPr>
@@ -50612,7 +50990,7 @@
       </p:cxnSp>
       <p:cxnSp>
         <p:nvCxnSpPr>
-          <p:cNvPr id="121" name="Connector 120"/>
+          <p:cNvPr id="127" name="Connector 126"/>
           <p:cNvCxnSpPr/>
           <p:nvPr/>
         </p:nvCxnSpPr>
@@ -50634,7 +51012,7 @@
       </p:cxnSp>
       <p:cxnSp>
         <p:nvCxnSpPr>
-          <p:cNvPr id="122" name="Connector 121"/>
+          <p:cNvPr id="128" name="Connector 127"/>
           <p:cNvCxnSpPr/>
           <p:nvPr/>
         </p:nvCxnSpPr>
@@ -50656,7 +51034,7 @@
       </p:cxnSp>
       <p:cxnSp>
         <p:nvCxnSpPr>
-          <p:cNvPr id="123" name="Connector 122"/>
+          <p:cNvPr id="129" name="Connector 128"/>
           <p:cNvCxnSpPr/>
           <p:nvPr/>
         </p:nvCxnSpPr>
@@ -50679,7 +51057,7 @@
       </p:cxnSp>
       <p:sp>
         <p:nvSpPr>
-          <p:cNvPr id="124" name="TextBox 123"/>
+          <p:cNvPr id="130" name="TextBox 129"/>
           <p:cNvSpPr txBox="1"/>
           <p:nvPr/>
         </p:nvSpPr>
@@ -50725,7 +51103,7 @@
       </p:sp>
       <p:sp>
         <p:nvSpPr>
-          <p:cNvPr id="125" name="TextBox 124"/>
+          <p:cNvPr id="131" name="TextBox 130"/>
           <p:cNvSpPr txBox="1"/>
           <p:nvPr/>
         </p:nvSpPr>
@@ -50771,7 +51149,7 @@
       </p:sp>
       <p:cxnSp>
         <p:nvCxnSpPr>
-          <p:cNvPr id="126" name="Connector 125"/>
+          <p:cNvPr id="132" name="Connector 131"/>
           <p:cNvCxnSpPr/>
           <p:nvPr/>
         </p:nvCxnSpPr>
@@ -50793,7 +51171,7 @@
       </p:cxnSp>
       <p:cxnSp>
         <p:nvCxnSpPr>
-          <p:cNvPr id="127" name="Connector 126"/>
+          <p:cNvPr id="133" name="Connector 132"/>
           <p:cNvCxnSpPr/>
           <p:nvPr/>
         </p:nvCxnSpPr>
@@ -50815,7 +51193,7 @@
       </p:cxnSp>
       <p:cxnSp>
         <p:nvCxnSpPr>
-          <p:cNvPr id="128" name="Connector 127"/>
+          <p:cNvPr id="134" name="Connector 133"/>
           <p:cNvCxnSpPr/>
           <p:nvPr/>
         </p:nvCxnSpPr>
@@ -50837,7 +51215,7 @@
       </p:cxnSp>
       <p:cxnSp>
         <p:nvCxnSpPr>
-          <p:cNvPr id="129" name="Connector 128"/>
+          <p:cNvPr id="135" name="Connector 134"/>
           <p:cNvCxnSpPr/>
           <p:nvPr/>
         </p:nvCxnSpPr>
@@ -50860,7 +51238,7 @@
       </p:cxnSp>
       <p:sp>
         <p:nvSpPr>
-          <p:cNvPr id="130" name="TextBox 129"/>
+          <p:cNvPr id="136" name="TextBox 135"/>
           <p:cNvSpPr txBox="1"/>
           <p:nvPr/>
         </p:nvSpPr>
@@ -50906,7 +51284,7 @@
       </p:sp>
       <p:sp>
         <p:nvSpPr>
-          <p:cNvPr id="131" name="TextBox 130"/>
+          <p:cNvPr id="137" name="TextBox 136"/>
           <p:cNvSpPr txBox="1"/>
           <p:nvPr/>
         </p:nvSpPr>
@@ -50952,7 +51330,7 @@
       </p:sp>
       <p:cxnSp>
         <p:nvCxnSpPr>
-          <p:cNvPr id="132" name="Connector 131"/>
+          <p:cNvPr id="138" name="Connector 137"/>
           <p:cNvCxnSpPr/>
           <p:nvPr/>
         </p:nvCxnSpPr>
@@ -50974,7 +51352,7 @@
       </p:cxnSp>
       <p:cxnSp>
         <p:nvCxnSpPr>
-          <p:cNvPr id="133" name="Connector 132"/>
+          <p:cNvPr id="139" name="Connector 138"/>
           <p:cNvCxnSpPr/>
           <p:nvPr/>
         </p:nvCxnSpPr>
@@ -50996,7 +51374,7 @@
       </p:cxnSp>
       <p:cxnSp>
         <p:nvCxnSpPr>
-          <p:cNvPr id="134" name="Connector 133"/>
+          <p:cNvPr id="140" name="Connector 139"/>
           <p:cNvCxnSpPr/>
           <p:nvPr/>
         </p:nvCxnSpPr>
@@ -51018,7 +51396,7 @@
       </p:cxnSp>
       <p:cxnSp>
         <p:nvCxnSpPr>
-          <p:cNvPr id="135" name="Connector 134"/>
+          <p:cNvPr id="141" name="Connector 140"/>
           <p:cNvCxnSpPr/>
           <p:nvPr/>
         </p:nvCxnSpPr>
@@ -51040,7 +51418,7 @@
       </p:cxnSp>
       <p:cxnSp>
         <p:nvCxnSpPr>
-          <p:cNvPr id="136" name="Connector 135"/>
+          <p:cNvPr id="142" name="Connector 141"/>
           <p:cNvCxnSpPr/>
           <p:nvPr/>
         </p:nvCxnSpPr>
@@ -51063,7 +51441,7 @@
       </p:cxnSp>
       <p:sp>
         <p:nvSpPr>
-          <p:cNvPr id="137" name="TextBox 136"/>
+          <p:cNvPr id="143" name="TextBox 142"/>
           <p:cNvSpPr txBox="1"/>
           <p:nvPr/>
         </p:nvSpPr>
@@ -51109,7 +51487,7 @@
       </p:sp>
       <p:sp>
         <p:nvSpPr>
-          <p:cNvPr id="138" name="TextBox 137"/>
+          <p:cNvPr id="144" name="TextBox 143"/>
           <p:cNvSpPr txBox="1"/>
           <p:nvPr/>
         </p:nvSpPr>
@@ -51155,7 +51533,7 @@
       </p:sp>
       <p:cxnSp>
         <p:nvCxnSpPr>
-          <p:cNvPr id="139" name="Connector 138"/>
+          <p:cNvPr id="145" name="Connector 144"/>
           <p:cNvCxnSpPr/>
           <p:nvPr/>
         </p:nvCxnSpPr>
@@ -51178,7 +51556,7 @@
       </p:cxnSp>
       <p:sp>
         <p:nvSpPr>
-          <p:cNvPr id="140" name="TextBox 139"/>
+          <p:cNvPr id="146" name="TextBox 145"/>
           <p:cNvSpPr txBox="1"/>
           <p:nvPr/>
         </p:nvSpPr>
@@ -51224,7 +51602,7 @@
       </p:sp>
       <p:sp>
         <p:nvSpPr>
-          <p:cNvPr id="141" name="TextBox 140"/>
+          <p:cNvPr id="147" name="TextBox 146"/>
           <p:cNvSpPr txBox="1"/>
           <p:nvPr/>
         </p:nvSpPr>
@@ -51270,7 +51648,7 @@
       </p:sp>
       <p:cxnSp>
         <p:nvCxnSpPr>
-          <p:cNvPr id="142" name="Connector 141"/>
+          <p:cNvPr id="148" name="Connector 147"/>
           <p:cNvCxnSpPr/>
           <p:nvPr/>
         </p:nvCxnSpPr>
@@ -51292,7 +51670,7 @@
       </p:cxnSp>
       <p:cxnSp>
         <p:nvCxnSpPr>
-          <p:cNvPr id="143" name="Connector 142"/>
+          <p:cNvPr id="149" name="Connector 148"/>
           <p:cNvCxnSpPr/>
           <p:nvPr/>
         </p:nvCxnSpPr>
@@ -51314,7 +51692,7 @@
       </p:cxnSp>
       <p:cxnSp>
         <p:nvCxnSpPr>
-          <p:cNvPr id="144" name="Connector 143"/>
+          <p:cNvPr id="150" name="Connector 149"/>
           <p:cNvCxnSpPr/>
           <p:nvPr/>
         </p:nvCxnSpPr>
@@ -51337,7 +51715,7 @@
       </p:cxnSp>
       <p:sp>
         <p:nvSpPr>
-          <p:cNvPr id="145" name="TextBox 144"/>
+          <p:cNvPr id="151" name="TextBox 150"/>
           <p:cNvSpPr txBox="1"/>
           <p:nvPr/>
         </p:nvSpPr>
@@ -51383,7 +51761,7 @@
       </p:sp>
       <p:sp>
         <p:nvSpPr>
-          <p:cNvPr id="146" name="TextBox 145"/>
+          <p:cNvPr id="152" name="TextBox 151"/>
           <p:cNvSpPr txBox="1"/>
           <p:nvPr/>
         </p:nvSpPr>
@@ -51429,7 +51807,7 @@
       </p:sp>
       <p:cxnSp>
         <p:nvCxnSpPr>
-          <p:cNvPr id="147" name="Connector 146"/>
+          <p:cNvPr id="153" name="Connector 152"/>
           <p:cNvCxnSpPr/>
           <p:nvPr/>
         </p:nvCxnSpPr>
@@ -51452,7 +51830,7 @@
       </p:cxnSp>
       <p:sp>
         <p:nvSpPr>
-          <p:cNvPr id="148" name="TextBox 147"/>
+          <p:cNvPr id="154" name="TextBox 153"/>
           <p:cNvSpPr txBox="1"/>
           <p:nvPr/>
         </p:nvSpPr>
@@ -51498,7 +51876,7 @@
       </p:sp>
       <p:sp>
         <p:nvSpPr>
-          <p:cNvPr id="149" name="TextBox 148"/>
+          <p:cNvPr id="155" name="TextBox 154"/>
           <p:cNvSpPr txBox="1"/>
           <p:nvPr/>
         </p:nvSpPr>
@@ -51544,7 +51922,7 @@
       </p:sp>
       <p:cxnSp>
         <p:nvCxnSpPr>
-          <p:cNvPr id="150" name="Connector 149"/>
+          <p:cNvPr id="156" name="Connector 155"/>
           <p:cNvCxnSpPr/>
           <p:nvPr/>
         </p:nvCxnSpPr>
@@ -51567,7 +51945,7 @@
       </p:cxnSp>
       <p:sp>
         <p:nvSpPr>
-          <p:cNvPr id="151" name="TextBox 150"/>
+          <p:cNvPr id="157" name="TextBox 156"/>
           <p:cNvSpPr txBox="1"/>
           <p:nvPr/>
         </p:nvSpPr>
@@ -51613,7 +51991,7 @@
       </p:sp>
       <p:sp>
         <p:nvSpPr>
-          <p:cNvPr id="152" name="TextBox 151"/>
+          <p:cNvPr id="158" name="TextBox 157"/>
           <p:cNvSpPr txBox="1"/>
           <p:nvPr/>
         </p:nvSpPr>
@@ -51659,7 +52037,7 @@
       </p:sp>
       <p:cxnSp>
         <p:nvCxnSpPr>
-          <p:cNvPr id="153" name="Connector 152"/>
+          <p:cNvPr id="159" name="Connector 158"/>
           <p:cNvCxnSpPr/>
           <p:nvPr/>
         </p:nvCxnSpPr>
@@ -51682,7 +52060,7 @@
       </p:cxnSp>
       <p:sp>
         <p:nvSpPr>
-          <p:cNvPr id="154" name="TextBox 153"/>
+          <p:cNvPr id="160" name="TextBox 159"/>
           <p:cNvSpPr txBox="1"/>
           <p:nvPr/>
         </p:nvSpPr>
@@ -51728,7 +52106,7 @@
       </p:sp>
       <p:sp>
         <p:nvSpPr>
-          <p:cNvPr id="155" name="TextBox 154"/>
+          <p:cNvPr id="161" name="TextBox 160"/>
           <p:cNvSpPr txBox="1"/>
           <p:nvPr/>
         </p:nvSpPr>
@@ -51774,7 +52152,7 @@
       </p:sp>
       <p:cxnSp>
         <p:nvCxnSpPr>
-          <p:cNvPr id="156" name="Connector 155"/>
+          <p:cNvPr id="162" name="Connector 161"/>
           <p:cNvCxnSpPr/>
           <p:nvPr/>
         </p:nvCxnSpPr>
@@ -51797,7 +52175,7 @@
       </p:cxnSp>
       <p:sp>
         <p:nvSpPr>
-          <p:cNvPr id="157" name="TextBox 156"/>
+          <p:cNvPr id="163" name="TextBox 162"/>
           <p:cNvSpPr txBox="1"/>
           <p:nvPr/>
         </p:nvSpPr>
@@ -51843,7 +52221,7 @@
       </p:sp>
       <p:sp>
         <p:nvSpPr>
-          <p:cNvPr id="158" name="TextBox 157"/>
+          <p:cNvPr id="164" name="TextBox 163"/>
           <p:cNvSpPr txBox="1"/>
           <p:nvPr/>
         </p:nvSpPr>
@@ -51889,7 +52267,7 @@
       </p:sp>
       <p:cxnSp>
         <p:nvCxnSpPr>
-          <p:cNvPr id="159" name="Connector 158"/>
+          <p:cNvPr id="165" name="Connector 164"/>
           <p:cNvCxnSpPr/>
           <p:nvPr/>
         </p:nvCxnSpPr>
@@ -51911,7 +52289,7 @@
       </p:cxnSp>
       <p:cxnSp>
         <p:nvCxnSpPr>
-          <p:cNvPr id="160" name="Connector 159"/>
+          <p:cNvPr id="166" name="Connector 165"/>
           <p:cNvCxnSpPr/>
           <p:nvPr/>
         </p:nvCxnSpPr>
@@ -51933,7 +52311,7 @@
       </p:cxnSp>
       <p:cxnSp>
         <p:nvCxnSpPr>
-          <p:cNvPr id="161" name="Connector 160"/>
+          <p:cNvPr id="167" name="Connector 166"/>
           <p:cNvCxnSpPr/>
           <p:nvPr/>
         </p:nvCxnSpPr>
@@ -51956,7 +52334,7 @@
       </p:cxnSp>
       <p:sp>
         <p:nvSpPr>
-          <p:cNvPr id="162" name="TextBox 161"/>
+          <p:cNvPr id="168" name="TextBox 167"/>
           <p:cNvSpPr txBox="1"/>
           <p:nvPr/>
         </p:nvSpPr>
@@ -52002,7 +52380,7 @@
       </p:sp>
       <p:sp>
         <p:nvSpPr>
-          <p:cNvPr id="163" name="TextBox 162"/>
+          <p:cNvPr id="169" name="TextBox 168"/>
           <p:cNvSpPr txBox="1"/>
           <p:nvPr/>
         </p:nvSpPr>
@@ -52048,7 +52426,7 @@
       </p:sp>
       <p:cxnSp>
         <p:nvCxnSpPr>
-          <p:cNvPr id="164" name="Connector 163"/>
+          <p:cNvPr id="170" name="Connector 169"/>
           <p:cNvCxnSpPr/>
           <p:nvPr/>
         </p:nvCxnSpPr>
@@ -52070,7 +52448,7 @@
       </p:cxnSp>
       <p:cxnSp>
         <p:nvCxnSpPr>
-          <p:cNvPr id="165" name="Connector 164"/>
+          <p:cNvPr id="171" name="Connector 170"/>
           <p:cNvCxnSpPr/>
           <p:nvPr/>
         </p:nvCxnSpPr>
@@ -52092,7 +52470,7 @@
       </p:cxnSp>
       <p:cxnSp>
         <p:nvCxnSpPr>
-          <p:cNvPr id="166" name="Connector 165"/>
+          <p:cNvPr id="172" name="Connector 171"/>
           <p:cNvCxnSpPr/>
           <p:nvPr/>
         </p:nvCxnSpPr>
@@ -52115,7 +52493,7 @@
       </p:cxnSp>
       <p:sp>
         <p:nvSpPr>
-          <p:cNvPr id="167" name="TextBox 166"/>
+          <p:cNvPr id="173" name="TextBox 172"/>
           <p:cNvSpPr txBox="1"/>
           <p:nvPr/>
         </p:nvSpPr>
@@ -52161,7 +52539,7 @@
       </p:sp>
       <p:sp>
         <p:nvSpPr>
-          <p:cNvPr id="168" name="TextBox 167"/>
+          <p:cNvPr id="174" name="TextBox 173"/>
           <p:cNvSpPr txBox="1"/>
           <p:nvPr/>
         </p:nvSpPr>
@@ -52207,7 +52585,7 @@
       </p:sp>
       <p:sp>
         <p:nvSpPr>
-          <p:cNvPr id="169" name="TextBox 168"/>
+          <p:cNvPr id="175" name="TextBox 174"/>
           <p:cNvSpPr txBox="1"/>
           <p:nvPr/>
         </p:nvSpPr>

--- a/report/方案B_B2_架构图集.pptx
+++ b/report/方案B_B2_架构图集.pptx
@@ -10290,7 +10290,7 @@
                 <a:latin typeface="Segoe UI"/>
                 <a:ea typeface="微软雅黑"/>
               </a:rPr>
-              <a:t>Premium 层特性 · NCC 需 Account Admin 配置</a:t>
+              <a:t>Premium 档（新建唯一档）· NCC 需 Account Admin</a:t>
             </a:r>
             <a:endParaRPr sz="600" b="1" i="0">
               <a:solidFill>
@@ -15968,7 +15968,7 @@
                 <a:latin typeface="Segoe UI"/>
                 <a:ea typeface="微软雅黑"/>
               </a:rPr>
-              <a:t>需 Databricks Premium 层（PE / NCC 均为 Premium 特性）；NCC 需 Account Admin</a:t>
+              <a:t>新建工作区仅 Premium 档可选（Azure 现行政策），UC / PE / NCC 默认可用；NCC 需 Account Admin</a:t>
             </a:r>
             <a:endParaRPr sz="620" b="0" i="0">
               <a:solidFill>
@@ -21215,7 +21215,7 @@
                 <a:latin typeface="Segoe UI"/>
                 <a:ea typeface="微软雅黑"/>
               </a:rPr>
-              <a:t>Databricks SQL Serverless 完全托管 · 空闲缩 0；代价是引擎绑定 + 需 Premium 层（NCC / PE）</a:t>
+              <a:t>Databricks SQL Serverless 完全托管 · 空闲缩 0；代价是引擎绑定（数据仍为开放 Iceberg 可迁移）</a:t>
             </a:r>
             <a:endParaRPr sz="680" b="0" i="0">
               <a:solidFill>
@@ -30238,7 +30238,7 @@
                 <a:latin typeface="Segoe UI"/>
                 <a:ea typeface="微软雅黑"/>
               </a:rPr>
-              <a:t>读侧完全托管、UC 治理原生；代价是计算引擎绑定 Databricks（数据仍为开放 Iceberg，随时可换引擎），且 Serverless / NCC 需 Premium 层。</a:t>
+              <a:t>读侧完全托管、UC 治理原生；代价是计算引擎绑定 Databricks（数据仍为开放 Iceberg，随时可换引擎）。Premium 为新建工作区唯一档（Azure 现行政策）。</a:t>
             </a:r>
             <a:endParaRPr sz="610" b="0" i="0">
               <a:solidFill>

--- a/report/方案B_B2_架构图集.pptx
+++ b/report/方案B_B2_架构图集.pptx
@@ -13,6 +13,7 @@
     <p:sldId id="261" r:id="rId12"/>
     <p:sldId id="262" r:id="rId13"/>
     <p:sldId id="263" r:id="rId14"/>
+    <p:sldId id="264" r:id="rId15"/>
   </p:sldIdLst>
   <p:sldSz cx="12191695" cy="6858000" type="screen4x3"/>
   <p:notesSz cx="6858000" cy="9144000"/>
@@ -5320,7 +5321,7 @@
                 <a:latin typeface="Segoe UI"/>
                 <a:ea typeface="Microsoft YaHei"/>
               </a:rPr>
-              <a:t>抽取入湖分工：普通数据走 SeaTunnel · 敏感 / 加密数据走 Databricks 写侧</a:t>
+              <a:t>抽取入湖分工 + SeaTunnel 约 200 原生连接器生态 · 敏感数据走 Databricks 写侧</a:t>
             </a:r>
           </a:p>
         </p:txBody>
@@ -58715,6 +58716,3562 @@
                 <a:ea typeface="Microsoft YaHei"/>
               </a:rPr>
               <a:t>→ Iceberg 冷湖 · SQL Serverless</a:t>
+            </a:r>
+          </a:p>
+        </p:txBody>
+      </p:sp>
+    </p:spTree>
+  </p:cSld>
+  <p:clrMapOvr>
+    <a:masterClrMapping/>
+  </p:clrMapOvr>
+</p:sld>
+</file>
+
+<file path=ppt/slides/slide9.xml><?xml version="1.0" encoding="utf-8"?>
+<p:sld xmlns:a="http://schemas.openxmlformats.org/drawingml/2006/main" xmlns:p="http://schemas.openxmlformats.org/presentationml/2006/main" xmlns:r="http://schemas.openxmlformats.org/officeDocument/2006/relationships">
+  <p:cSld>
+    <p:bg>
+      <p:bgPr>
+        <a:solidFill>
+          <a:srgbClr val="F8FAFC"/>
+        </a:solidFill>
+        <a:effectLst/>
+      </p:bgPr>
+    </p:bg>
+    <p:spTree>
+      <p:nvGrpSpPr>
+        <p:cNvPr id="1" name=""/>
+        <p:cNvGrpSpPr/>
+        <p:nvPr/>
+      </p:nvGrpSpPr>
+      <p:grpSpPr/>
+      <p:sp>
+        <p:nvSpPr>
+          <p:cNvPr id="2" name="Rounded Rectangle 1"/>
+          <p:cNvSpPr/>
+          <p:nvPr/>
+        </p:nvSpPr>
+        <p:spPr>
+          <a:xfrm>
+            <a:off x="201168" y="155448"/>
+            <a:ext cx="50292" cy="365760"/>
+          </a:xfrm>
+          <a:prstGeom prst="roundRect">
+            <a:avLst>
+              <a:gd name="adj" fmla="val 49090"/>
+            </a:avLst>
+          </a:prstGeom>
+          <a:solidFill>
+            <a:srgbClr val="EA580C"/>
+          </a:solidFill>
+          <a:ln>
+            <a:noFill/>
+          </a:ln>
+          <a:effectLst/>
+        </p:spPr>
+        <p:style>
+          <a:lnRef idx="1">
+            <a:schemeClr val="accent1"/>
+          </a:lnRef>
+          <a:fillRef idx="3">
+            <a:schemeClr val="accent1"/>
+          </a:fillRef>
+          <a:effectRef idx="2">
+            <a:schemeClr val="accent1"/>
+          </a:effectRef>
+          <a:fontRef idx="minor">
+            <a:schemeClr val="lt1"/>
+          </a:fontRef>
+        </p:style>
+        <p:txBody>
+          <a:bodyPr rtlCol="0" anchor="ctr"/>
+          <a:lstStyle/>
+          <a:p>
+            <a:pPr algn="ctr"/>
+          </a:p>
+        </p:txBody>
+      </p:sp>
+      <p:sp>
+        <p:nvSpPr>
+          <p:cNvPr id="3" name="TextBox 2"/>
+          <p:cNvSpPr txBox="1"/>
+          <p:nvPr/>
+        </p:nvSpPr>
+        <p:spPr>
+          <a:xfrm>
+            <a:off x="347472" y="118872"/>
+            <a:ext cx="8229600" cy="310896"/>
+          </a:xfrm>
+          <a:prstGeom prst="rect">
+            <a:avLst/>
+          </a:prstGeom>
+          <a:noFill/>
+        </p:spPr>
+        <p:txBody>
+          <a:bodyPr wrap="square" lIns="0" rIns="0" tIns="0" bIns="0" anchor="ctr">
+            <a:noAutofit/>
+          </a:bodyPr>
+          <a:lstStyle/>
+          <a:p>
+            <a:pPr algn="l">
+              <a:lnSpc>
+                <a:spcPct val="112000"/>
+              </a:lnSpc>
+              <a:spcBef>
+                <a:spcPts val="0"/>
+              </a:spcBef>
+              <a:spcAft>
+                <a:spcPts val="0"/>
+              </a:spcAft>
+            </a:pPr>
+            <a:r>
+              <a:rPr sz="1850" b="1" i="0">
+                <a:solidFill>
+                  <a:srgbClr val="0F172A"/>
+                </a:solidFill>
+                <a:latin typeface="Segoe UI"/>
+                <a:ea typeface="Microsoft YaHei"/>
+              </a:rPr>
+              <a:t>Apache SeaTunnel · 约 200 个原生连接器</a:t>
+            </a:r>
+          </a:p>
+        </p:txBody>
+      </p:sp>
+      <p:sp>
+        <p:nvSpPr>
+          <p:cNvPr id="4" name="TextBox 3"/>
+          <p:cNvSpPr txBox="1"/>
+          <p:nvPr/>
+        </p:nvSpPr>
+        <p:spPr>
+          <a:xfrm>
+            <a:off x="8595360" y="54864"/>
+            <a:ext cx="2788920" cy="384048"/>
+          </a:xfrm>
+          <a:prstGeom prst="rect">
+            <a:avLst/>
+          </a:prstGeom>
+          <a:noFill/>
+        </p:spPr>
+        <p:txBody>
+          <a:bodyPr wrap="square" lIns="0" rIns="0" tIns="0" bIns="0" anchor="ctr">
+            <a:noAutofit/>
+          </a:bodyPr>
+          <a:lstStyle/>
+          <a:p>
+            <a:pPr algn="r">
+              <a:lnSpc>
+                <a:spcPct val="125000"/>
+              </a:lnSpc>
+              <a:spcBef>
+                <a:spcPts val="0"/>
+              </a:spcBef>
+              <a:spcAft>
+                <a:spcPts val="0"/>
+              </a:spcAft>
+            </a:pPr>
+            <a:r>
+              <a:rPr sz="750" b="0" i="0">
+                <a:solidFill>
+                  <a:srgbClr val="64748B"/>
+                </a:solidFill>
+                <a:latin typeface="Segoe UI"/>
+                <a:ea typeface="Microsoft YaHei"/>
+              </a:rPr>
+              <a:t>数据集成引擎 · 来源 seatunnel.apache.org/zh-CN</a:t>
+            </a:r>
+          </a:p>
+        </p:txBody>
+      </p:sp>
+      <p:sp>
+        <p:nvSpPr>
+          <p:cNvPr id="5" name="Rounded Rectangle 4"/>
+          <p:cNvSpPr/>
+          <p:nvPr/>
+        </p:nvSpPr>
+        <p:spPr>
+          <a:xfrm>
+            <a:off x="201168" y="530352"/>
+            <a:ext cx="11786616" cy="384048"/>
+          </a:xfrm>
+          <a:prstGeom prst="roundRect">
+            <a:avLst>
+              <a:gd name="adj" fmla="val 14285"/>
+            </a:avLst>
+          </a:prstGeom>
+          <a:solidFill>
+            <a:srgbClr val="FFF7ED"/>
+          </a:solidFill>
+          <a:ln w="15240">
+            <a:solidFill>
+              <a:srgbClr val="FDBA74"/>
+            </a:solidFill>
+          </a:ln>
+          <a:effectLst/>
+        </p:spPr>
+        <p:style>
+          <a:lnRef idx="1">
+            <a:schemeClr val="accent1"/>
+          </a:lnRef>
+          <a:fillRef idx="3">
+            <a:schemeClr val="accent1"/>
+          </a:fillRef>
+          <a:effectRef idx="2">
+            <a:schemeClr val="accent1"/>
+          </a:effectRef>
+          <a:fontRef idx="minor">
+            <a:schemeClr val="lt1"/>
+          </a:fontRef>
+        </p:style>
+        <p:txBody>
+          <a:bodyPr rtlCol="0" anchor="ctr"/>
+          <a:lstStyle/>
+          <a:p>
+            <a:pPr algn="ctr"/>
+          </a:p>
+        </p:txBody>
+      </p:sp>
+      <p:sp>
+        <p:nvSpPr>
+          <p:cNvPr id="6" name="TextBox 5"/>
+          <p:cNvSpPr txBox="1"/>
+          <p:nvPr/>
+        </p:nvSpPr>
+        <p:spPr>
+          <a:xfrm>
+            <a:off x="201168" y="530352"/>
+            <a:ext cx="11786616" cy="384048"/>
+          </a:xfrm>
+          <a:prstGeom prst="rect">
+            <a:avLst/>
+          </a:prstGeom>
+          <a:noFill/>
+        </p:spPr>
+        <p:txBody>
+          <a:bodyPr wrap="square" lIns="0" rIns="0" tIns="0" bIns="0" anchor="ctr">
+            <a:noAutofit/>
+          </a:bodyPr>
+          <a:lstStyle/>
+          <a:p>
+            <a:pPr algn="ctr">
+              <a:lnSpc>
+                <a:spcPct val="112000"/>
+              </a:lnSpc>
+              <a:spcBef>
+                <a:spcPts val="0"/>
+              </a:spcBef>
+              <a:spcAft>
+                <a:spcPts val="0"/>
+              </a:spcAft>
+            </a:pPr>
+            <a:r>
+              <a:rPr sz="819" b="1" i="0">
+                <a:solidFill>
+                  <a:srgbClr val="C2410C"/>
+                </a:solidFill>
+                <a:latin typeface="Segoe UI"/>
+                <a:ea typeface="Microsoft YaHei"/>
+              </a:rPr>
+              <a:t>只要你的数据在那里，SeaTunnel 就能连接 —— 覆盖数据库 · 消息系统 · 湖仓 · 搜索系统 · 对象存储等主流数据系统</a:t>
+            </a:r>
+          </a:p>
+        </p:txBody>
+      </p:sp>
+      <p:sp>
+        <p:nvSpPr>
+          <p:cNvPr id="7" name="Rounded Rectangle 6"/>
+          <p:cNvSpPr/>
+          <p:nvPr/>
+        </p:nvSpPr>
+        <p:spPr>
+          <a:xfrm>
+            <a:off x="201168" y="1005840"/>
+            <a:ext cx="5760720" cy="1572768"/>
+          </a:xfrm>
+          <a:prstGeom prst="roundRect">
+            <a:avLst>
+              <a:gd name="adj" fmla="val 4069"/>
+            </a:avLst>
+          </a:prstGeom>
+          <a:solidFill>
+            <a:srgbClr val="EFF6FF"/>
+          </a:solidFill>
+          <a:ln w="15240">
+            <a:solidFill>
+              <a:srgbClr val="BFDBFE"/>
+            </a:solidFill>
+          </a:ln>
+          <a:effectLst/>
+        </p:spPr>
+        <p:style>
+          <a:lnRef idx="1">
+            <a:schemeClr val="accent1"/>
+          </a:lnRef>
+          <a:fillRef idx="3">
+            <a:schemeClr val="accent1"/>
+          </a:fillRef>
+          <a:effectRef idx="2">
+            <a:schemeClr val="accent1"/>
+          </a:effectRef>
+          <a:fontRef idx="minor">
+            <a:schemeClr val="lt1"/>
+          </a:fontRef>
+        </p:style>
+        <p:txBody>
+          <a:bodyPr rtlCol="0" anchor="ctr"/>
+          <a:lstStyle/>
+          <a:p>
+            <a:pPr algn="ctr"/>
+          </a:p>
+        </p:txBody>
+      </p:sp>
+      <p:sp>
+        <p:nvSpPr>
+          <p:cNvPr id="8" name="Rounded Rectangle 7"/>
+          <p:cNvSpPr/>
+          <p:nvPr/>
+        </p:nvSpPr>
+        <p:spPr>
+          <a:xfrm>
+            <a:off x="201168" y="1005840"/>
+            <a:ext cx="36576" cy="1572768"/>
+          </a:xfrm>
+          <a:prstGeom prst="roundRect">
+            <a:avLst>
+              <a:gd name="adj" fmla="val 50000"/>
+            </a:avLst>
+          </a:prstGeom>
+          <a:solidFill>
+            <a:srgbClr val="0078D4"/>
+          </a:solidFill>
+          <a:ln>
+            <a:noFill/>
+          </a:ln>
+          <a:effectLst/>
+        </p:spPr>
+        <p:style>
+          <a:lnRef idx="1">
+            <a:schemeClr val="accent1"/>
+          </a:lnRef>
+          <a:fillRef idx="3">
+            <a:schemeClr val="accent1"/>
+          </a:fillRef>
+          <a:effectRef idx="2">
+            <a:schemeClr val="accent1"/>
+          </a:effectRef>
+          <a:fontRef idx="minor">
+            <a:schemeClr val="lt1"/>
+          </a:fontRef>
+        </p:style>
+        <p:txBody>
+          <a:bodyPr rtlCol="0" anchor="ctr"/>
+          <a:lstStyle/>
+          <a:p>
+            <a:pPr algn="ctr"/>
+          </a:p>
+        </p:txBody>
+      </p:sp>
+      <p:sp>
+        <p:nvSpPr>
+          <p:cNvPr id="9" name="TextBox 8"/>
+          <p:cNvSpPr txBox="1"/>
+          <p:nvPr/>
+        </p:nvSpPr>
+        <p:spPr>
+          <a:xfrm>
+            <a:off x="347472" y="1097280"/>
+            <a:ext cx="5468112" cy="219456"/>
+          </a:xfrm>
+          <a:prstGeom prst="rect">
+            <a:avLst/>
+          </a:prstGeom>
+          <a:noFill/>
+        </p:spPr>
+        <p:txBody>
+          <a:bodyPr wrap="square" lIns="0" rIns="0" tIns="0" bIns="0" anchor="t">
+            <a:noAutofit/>
+          </a:bodyPr>
+          <a:lstStyle/>
+          <a:p>
+            <a:pPr algn="l">
+              <a:lnSpc>
+                <a:spcPct val="112000"/>
+              </a:lnSpc>
+              <a:spcBef>
+                <a:spcPts val="0"/>
+              </a:spcBef>
+              <a:spcAft>
+                <a:spcPts val="0"/>
+              </a:spcAft>
+            </a:pPr>
+            <a:r>
+              <a:rPr sz="940" b="1" i="0">
+                <a:solidFill>
+                  <a:srgbClr val="0F172A"/>
+                </a:solidFill>
+                <a:latin typeface="Segoe UI"/>
+                <a:ea typeface="Microsoft YaHei"/>
+              </a:rPr>
+              <a:t>OLTP 数据库</a:t>
+            </a:r>
+          </a:p>
+        </p:txBody>
+      </p:sp>
+      <p:sp>
+        <p:nvSpPr>
+          <p:cNvPr id="10" name="TextBox 9"/>
+          <p:cNvSpPr txBox="1"/>
+          <p:nvPr/>
+        </p:nvSpPr>
+        <p:spPr>
+          <a:xfrm>
+            <a:off x="347472" y="1325880"/>
+            <a:ext cx="5468112" cy="137160"/>
+          </a:xfrm>
+          <a:prstGeom prst="rect">
+            <a:avLst/>
+          </a:prstGeom>
+          <a:noFill/>
+        </p:spPr>
+        <p:txBody>
+          <a:bodyPr wrap="square" lIns="0" rIns="0" tIns="0" bIns="0" anchor="t">
+            <a:noAutofit/>
+          </a:bodyPr>
+          <a:lstStyle/>
+          <a:p>
+            <a:pPr algn="l">
+              <a:lnSpc>
+                <a:spcPct val="112000"/>
+              </a:lnSpc>
+              <a:spcBef>
+                <a:spcPts val="0"/>
+              </a:spcBef>
+              <a:spcAft>
+                <a:spcPts val="0"/>
+              </a:spcAft>
+            </a:pPr>
+            <a:r>
+              <a:rPr sz="620" b="1" i="0">
+                <a:solidFill>
+                  <a:srgbClr val="0078D4"/>
+                </a:solidFill>
+                <a:latin typeface="Segoe UI"/>
+                <a:ea typeface="Microsoft YaHei"/>
+              </a:rPr>
+              <a:t>关系型 · +25 via JDBC</a:t>
+            </a:r>
+          </a:p>
+        </p:txBody>
+      </p:sp>
+      <p:sp>
+        <p:nvSpPr>
+          <p:cNvPr id="11" name="Rounded Rectangle 10"/>
+          <p:cNvSpPr/>
+          <p:nvPr/>
+        </p:nvSpPr>
+        <p:spPr>
+          <a:xfrm>
+            <a:off x="347472" y="1527048"/>
+            <a:ext cx="1761743" cy="420624"/>
+          </a:xfrm>
+          <a:prstGeom prst="roundRect">
+            <a:avLst>
+              <a:gd name="adj" fmla="val 10869"/>
+            </a:avLst>
+          </a:prstGeom>
+          <a:solidFill>
+            <a:srgbClr val="FFFFFF"/>
+          </a:solidFill>
+          <a:ln w="12700">
+            <a:solidFill>
+              <a:srgbClr val="BFDBFE"/>
+            </a:solidFill>
+          </a:ln>
+          <a:effectLst/>
+        </p:spPr>
+        <p:style>
+          <a:lnRef idx="1">
+            <a:schemeClr val="accent1"/>
+          </a:lnRef>
+          <a:fillRef idx="3">
+            <a:schemeClr val="accent1"/>
+          </a:fillRef>
+          <a:effectRef idx="2">
+            <a:schemeClr val="accent1"/>
+          </a:effectRef>
+          <a:fontRef idx="minor">
+            <a:schemeClr val="lt1"/>
+          </a:fontRef>
+        </p:style>
+        <p:txBody>
+          <a:bodyPr rtlCol="0" anchor="ctr"/>
+          <a:lstStyle/>
+          <a:p>
+            <a:pPr algn="ctr"/>
+          </a:p>
+        </p:txBody>
+      </p:sp>
+      <p:sp>
+        <p:nvSpPr>
+          <p:cNvPr id="12" name="TextBox 11"/>
+          <p:cNvSpPr txBox="1"/>
+          <p:nvPr/>
+        </p:nvSpPr>
+        <p:spPr>
+          <a:xfrm>
+            <a:off x="347472" y="1527048"/>
+            <a:ext cx="1761743" cy="420624"/>
+          </a:xfrm>
+          <a:prstGeom prst="rect">
+            <a:avLst/>
+          </a:prstGeom>
+          <a:noFill/>
+        </p:spPr>
+        <p:txBody>
+          <a:bodyPr wrap="square" lIns="0" rIns="0" tIns="0" bIns="0" anchor="ctr">
+            <a:noAutofit/>
+          </a:bodyPr>
+          <a:lstStyle/>
+          <a:p>
+            <a:pPr algn="ctr">
+              <a:lnSpc>
+                <a:spcPct val="112000"/>
+              </a:lnSpc>
+              <a:spcBef>
+                <a:spcPts val="0"/>
+              </a:spcBef>
+              <a:spcAft>
+                <a:spcPts val="0"/>
+              </a:spcAft>
+            </a:pPr>
+            <a:r>
+              <a:rPr sz="620" b="0" i="0">
+                <a:solidFill>
+                  <a:srgbClr val="475569"/>
+                </a:solidFill>
+                <a:latin typeface="Segoe UI"/>
+                <a:ea typeface="Microsoft YaHei"/>
+              </a:rPr>
+              <a:t>MySQL / CDC</a:t>
+            </a:r>
+          </a:p>
+        </p:txBody>
+      </p:sp>
+      <p:sp>
+        <p:nvSpPr>
+          <p:cNvPr id="13" name="Rounded Rectangle 12"/>
+          <p:cNvSpPr/>
+          <p:nvPr/>
+        </p:nvSpPr>
+        <p:spPr>
+          <a:xfrm>
+            <a:off x="2200655" y="1527048"/>
+            <a:ext cx="1761743" cy="420624"/>
+          </a:xfrm>
+          <a:prstGeom prst="roundRect">
+            <a:avLst>
+              <a:gd name="adj" fmla="val 10869"/>
+            </a:avLst>
+          </a:prstGeom>
+          <a:solidFill>
+            <a:srgbClr val="FFFFFF"/>
+          </a:solidFill>
+          <a:ln w="12700">
+            <a:solidFill>
+              <a:srgbClr val="BFDBFE"/>
+            </a:solidFill>
+          </a:ln>
+          <a:effectLst/>
+        </p:spPr>
+        <p:style>
+          <a:lnRef idx="1">
+            <a:schemeClr val="accent1"/>
+          </a:lnRef>
+          <a:fillRef idx="3">
+            <a:schemeClr val="accent1"/>
+          </a:fillRef>
+          <a:effectRef idx="2">
+            <a:schemeClr val="accent1"/>
+          </a:effectRef>
+          <a:fontRef idx="minor">
+            <a:schemeClr val="lt1"/>
+          </a:fontRef>
+        </p:style>
+        <p:txBody>
+          <a:bodyPr rtlCol="0" anchor="ctr"/>
+          <a:lstStyle/>
+          <a:p>
+            <a:pPr algn="ctr"/>
+          </a:p>
+        </p:txBody>
+      </p:sp>
+      <p:sp>
+        <p:nvSpPr>
+          <p:cNvPr id="14" name="TextBox 13"/>
+          <p:cNvSpPr txBox="1"/>
+          <p:nvPr/>
+        </p:nvSpPr>
+        <p:spPr>
+          <a:xfrm>
+            <a:off x="2200655" y="1527048"/>
+            <a:ext cx="1761743" cy="420624"/>
+          </a:xfrm>
+          <a:prstGeom prst="rect">
+            <a:avLst/>
+          </a:prstGeom>
+          <a:noFill/>
+        </p:spPr>
+        <p:txBody>
+          <a:bodyPr wrap="square" lIns="0" rIns="0" tIns="0" bIns="0" anchor="ctr">
+            <a:noAutofit/>
+          </a:bodyPr>
+          <a:lstStyle/>
+          <a:p>
+            <a:pPr algn="ctr">
+              <a:lnSpc>
+                <a:spcPct val="112000"/>
+              </a:lnSpc>
+              <a:spcBef>
+                <a:spcPts val="0"/>
+              </a:spcBef>
+              <a:spcAft>
+                <a:spcPts val="0"/>
+              </a:spcAft>
+            </a:pPr>
+            <a:r>
+              <a:rPr sz="620" b="0" i="0">
+                <a:solidFill>
+                  <a:srgbClr val="475569"/>
+                </a:solidFill>
+                <a:latin typeface="Segoe UI"/>
+                <a:ea typeface="Microsoft YaHei"/>
+              </a:rPr>
+              <a:t>PostgreSQL</a:t>
+            </a:r>
+          </a:p>
+        </p:txBody>
+      </p:sp>
+      <p:sp>
+        <p:nvSpPr>
+          <p:cNvPr id="15" name="Rounded Rectangle 14"/>
+          <p:cNvSpPr/>
+          <p:nvPr/>
+        </p:nvSpPr>
+        <p:spPr>
+          <a:xfrm>
+            <a:off x="4053839" y="1527048"/>
+            <a:ext cx="1761743" cy="420624"/>
+          </a:xfrm>
+          <a:prstGeom prst="roundRect">
+            <a:avLst>
+              <a:gd name="adj" fmla="val 10869"/>
+            </a:avLst>
+          </a:prstGeom>
+          <a:solidFill>
+            <a:srgbClr val="FFFFFF"/>
+          </a:solidFill>
+          <a:ln w="12700">
+            <a:solidFill>
+              <a:srgbClr val="BFDBFE"/>
+            </a:solidFill>
+          </a:ln>
+          <a:effectLst/>
+        </p:spPr>
+        <p:style>
+          <a:lnRef idx="1">
+            <a:schemeClr val="accent1"/>
+          </a:lnRef>
+          <a:fillRef idx="3">
+            <a:schemeClr val="accent1"/>
+          </a:fillRef>
+          <a:effectRef idx="2">
+            <a:schemeClr val="accent1"/>
+          </a:effectRef>
+          <a:fontRef idx="minor">
+            <a:schemeClr val="lt1"/>
+          </a:fontRef>
+        </p:style>
+        <p:txBody>
+          <a:bodyPr rtlCol="0" anchor="ctr"/>
+          <a:lstStyle/>
+          <a:p>
+            <a:pPr algn="ctr"/>
+          </a:p>
+        </p:txBody>
+      </p:sp>
+      <p:sp>
+        <p:nvSpPr>
+          <p:cNvPr id="16" name="TextBox 15"/>
+          <p:cNvSpPr txBox="1"/>
+          <p:nvPr/>
+        </p:nvSpPr>
+        <p:spPr>
+          <a:xfrm>
+            <a:off x="4053839" y="1527048"/>
+            <a:ext cx="1761743" cy="420624"/>
+          </a:xfrm>
+          <a:prstGeom prst="rect">
+            <a:avLst/>
+          </a:prstGeom>
+          <a:noFill/>
+        </p:spPr>
+        <p:txBody>
+          <a:bodyPr wrap="square" lIns="0" rIns="0" tIns="0" bIns="0" anchor="ctr">
+            <a:noAutofit/>
+          </a:bodyPr>
+          <a:lstStyle/>
+          <a:p>
+            <a:pPr algn="ctr">
+              <a:lnSpc>
+                <a:spcPct val="112000"/>
+              </a:lnSpc>
+              <a:spcBef>
+                <a:spcPts val="0"/>
+              </a:spcBef>
+              <a:spcAft>
+                <a:spcPts val="0"/>
+              </a:spcAft>
+            </a:pPr>
+            <a:r>
+              <a:rPr sz="620" b="0" i="0">
+                <a:solidFill>
+                  <a:srgbClr val="475569"/>
+                </a:solidFill>
+                <a:latin typeface="Segoe UI"/>
+                <a:ea typeface="Microsoft YaHei"/>
+              </a:rPr>
+              <a:t>Oracle</a:t>
+            </a:r>
+          </a:p>
+        </p:txBody>
+      </p:sp>
+      <p:sp>
+        <p:nvSpPr>
+          <p:cNvPr id="17" name="Rounded Rectangle 16"/>
+          <p:cNvSpPr/>
+          <p:nvPr/>
+        </p:nvSpPr>
+        <p:spPr>
+          <a:xfrm>
+            <a:off x="347472" y="2057400"/>
+            <a:ext cx="1761743" cy="420624"/>
+          </a:xfrm>
+          <a:prstGeom prst="roundRect">
+            <a:avLst>
+              <a:gd name="adj" fmla="val 10869"/>
+            </a:avLst>
+          </a:prstGeom>
+          <a:solidFill>
+            <a:srgbClr val="FFFFFF"/>
+          </a:solidFill>
+          <a:ln w="12700">
+            <a:solidFill>
+              <a:srgbClr val="BFDBFE"/>
+            </a:solidFill>
+          </a:ln>
+          <a:effectLst/>
+        </p:spPr>
+        <p:style>
+          <a:lnRef idx="1">
+            <a:schemeClr val="accent1"/>
+          </a:lnRef>
+          <a:fillRef idx="3">
+            <a:schemeClr val="accent1"/>
+          </a:fillRef>
+          <a:effectRef idx="2">
+            <a:schemeClr val="accent1"/>
+          </a:effectRef>
+          <a:fontRef idx="minor">
+            <a:schemeClr val="lt1"/>
+          </a:fontRef>
+        </p:style>
+        <p:txBody>
+          <a:bodyPr rtlCol="0" anchor="ctr"/>
+          <a:lstStyle/>
+          <a:p>
+            <a:pPr algn="ctr"/>
+          </a:p>
+        </p:txBody>
+      </p:sp>
+      <p:sp>
+        <p:nvSpPr>
+          <p:cNvPr id="18" name="TextBox 17"/>
+          <p:cNvSpPr txBox="1"/>
+          <p:nvPr/>
+        </p:nvSpPr>
+        <p:spPr>
+          <a:xfrm>
+            <a:off x="347472" y="2057400"/>
+            <a:ext cx="1761743" cy="420624"/>
+          </a:xfrm>
+          <a:prstGeom prst="rect">
+            <a:avLst/>
+          </a:prstGeom>
+          <a:noFill/>
+        </p:spPr>
+        <p:txBody>
+          <a:bodyPr wrap="square" lIns="0" rIns="0" tIns="0" bIns="0" anchor="ctr">
+            <a:noAutofit/>
+          </a:bodyPr>
+          <a:lstStyle/>
+          <a:p>
+            <a:pPr algn="ctr">
+              <a:lnSpc>
+                <a:spcPct val="112000"/>
+              </a:lnSpc>
+              <a:spcBef>
+                <a:spcPts val="0"/>
+              </a:spcBef>
+              <a:spcAft>
+                <a:spcPts val="0"/>
+              </a:spcAft>
+            </a:pPr>
+            <a:r>
+              <a:rPr sz="620" b="0" i="0">
+                <a:solidFill>
+                  <a:srgbClr val="475569"/>
+                </a:solidFill>
+                <a:latin typeface="Segoe UI"/>
+                <a:ea typeface="Microsoft YaHei"/>
+              </a:rPr>
+              <a:t>SQL Server</a:t>
+            </a:r>
+          </a:p>
+        </p:txBody>
+      </p:sp>
+      <p:sp>
+        <p:nvSpPr>
+          <p:cNvPr id="19" name="Rounded Rectangle 18"/>
+          <p:cNvSpPr/>
+          <p:nvPr/>
+        </p:nvSpPr>
+        <p:spPr>
+          <a:xfrm>
+            <a:off x="2200655" y="2057400"/>
+            <a:ext cx="1761743" cy="420624"/>
+          </a:xfrm>
+          <a:prstGeom prst="roundRect">
+            <a:avLst>
+              <a:gd name="adj" fmla="val 10869"/>
+            </a:avLst>
+          </a:prstGeom>
+          <a:solidFill>
+            <a:srgbClr val="FFFFFF"/>
+          </a:solidFill>
+          <a:ln w="12700">
+            <a:solidFill>
+              <a:srgbClr val="BFDBFE"/>
+            </a:solidFill>
+          </a:ln>
+          <a:effectLst/>
+        </p:spPr>
+        <p:style>
+          <a:lnRef idx="1">
+            <a:schemeClr val="accent1"/>
+          </a:lnRef>
+          <a:fillRef idx="3">
+            <a:schemeClr val="accent1"/>
+          </a:fillRef>
+          <a:effectRef idx="2">
+            <a:schemeClr val="accent1"/>
+          </a:effectRef>
+          <a:fontRef idx="minor">
+            <a:schemeClr val="lt1"/>
+          </a:fontRef>
+        </p:style>
+        <p:txBody>
+          <a:bodyPr rtlCol="0" anchor="ctr"/>
+          <a:lstStyle/>
+          <a:p>
+            <a:pPr algn="ctr"/>
+          </a:p>
+        </p:txBody>
+      </p:sp>
+      <p:sp>
+        <p:nvSpPr>
+          <p:cNvPr id="20" name="TextBox 19"/>
+          <p:cNvSpPr txBox="1"/>
+          <p:nvPr/>
+        </p:nvSpPr>
+        <p:spPr>
+          <a:xfrm>
+            <a:off x="2200655" y="2057400"/>
+            <a:ext cx="1761743" cy="420624"/>
+          </a:xfrm>
+          <a:prstGeom prst="rect">
+            <a:avLst/>
+          </a:prstGeom>
+          <a:noFill/>
+        </p:spPr>
+        <p:txBody>
+          <a:bodyPr wrap="square" lIns="0" rIns="0" tIns="0" bIns="0" anchor="ctr">
+            <a:noAutofit/>
+          </a:bodyPr>
+          <a:lstStyle/>
+          <a:p>
+            <a:pPr algn="ctr">
+              <a:lnSpc>
+                <a:spcPct val="112000"/>
+              </a:lnSpc>
+              <a:spcBef>
+                <a:spcPts val="0"/>
+              </a:spcBef>
+              <a:spcAft>
+                <a:spcPts val="0"/>
+              </a:spcAft>
+            </a:pPr>
+            <a:r>
+              <a:rPr sz="620" b="0" i="0">
+                <a:solidFill>
+                  <a:srgbClr val="475569"/>
+                </a:solidFill>
+                <a:latin typeface="Segoe UI"/>
+                <a:ea typeface="Microsoft YaHei"/>
+              </a:rPr>
+              <a:t>TiDB</a:t>
+            </a:r>
+          </a:p>
+        </p:txBody>
+      </p:sp>
+      <p:sp>
+        <p:nvSpPr>
+          <p:cNvPr id="21" name="Rounded Rectangle 20"/>
+          <p:cNvSpPr/>
+          <p:nvPr/>
+        </p:nvSpPr>
+        <p:spPr>
+          <a:xfrm>
+            <a:off x="4053839" y="2057400"/>
+            <a:ext cx="1761743" cy="420624"/>
+          </a:xfrm>
+          <a:prstGeom prst="roundRect">
+            <a:avLst>
+              <a:gd name="adj" fmla="val 10869"/>
+            </a:avLst>
+          </a:prstGeom>
+          <a:solidFill>
+            <a:srgbClr val="FFFFFF"/>
+          </a:solidFill>
+          <a:ln w="12700">
+            <a:solidFill>
+              <a:srgbClr val="BFDBFE"/>
+            </a:solidFill>
+          </a:ln>
+          <a:effectLst/>
+        </p:spPr>
+        <p:style>
+          <a:lnRef idx="1">
+            <a:schemeClr val="accent1"/>
+          </a:lnRef>
+          <a:fillRef idx="3">
+            <a:schemeClr val="accent1"/>
+          </a:fillRef>
+          <a:effectRef idx="2">
+            <a:schemeClr val="accent1"/>
+          </a:effectRef>
+          <a:fontRef idx="minor">
+            <a:schemeClr val="lt1"/>
+          </a:fontRef>
+        </p:style>
+        <p:txBody>
+          <a:bodyPr rtlCol="0" anchor="ctr"/>
+          <a:lstStyle/>
+          <a:p>
+            <a:pPr algn="ctr"/>
+          </a:p>
+        </p:txBody>
+      </p:sp>
+      <p:sp>
+        <p:nvSpPr>
+          <p:cNvPr id="22" name="TextBox 21"/>
+          <p:cNvSpPr txBox="1"/>
+          <p:nvPr/>
+        </p:nvSpPr>
+        <p:spPr>
+          <a:xfrm>
+            <a:off x="4053839" y="2057400"/>
+            <a:ext cx="1761743" cy="420624"/>
+          </a:xfrm>
+          <a:prstGeom prst="rect">
+            <a:avLst/>
+          </a:prstGeom>
+          <a:noFill/>
+        </p:spPr>
+        <p:txBody>
+          <a:bodyPr wrap="square" lIns="0" rIns="0" tIns="0" bIns="0" anchor="ctr">
+            <a:noAutofit/>
+          </a:bodyPr>
+          <a:lstStyle/>
+          <a:p>
+            <a:pPr algn="ctr">
+              <a:lnSpc>
+                <a:spcPct val="112000"/>
+              </a:lnSpc>
+              <a:spcBef>
+                <a:spcPts val="0"/>
+              </a:spcBef>
+              <a:spcAft>
+                <a:spcPts val="0"/>
+              </a:spcAft>
+            </a:pPr>
+            <a:r>
+              <a:rPr sz="620" b="0" i="0">
+                <a:solidFill>
+                  <a:srgbClr val="475569"/>
+                </a:solidFill>
+                <a:latin typeface="Segoe UI"/>
+                <a:ea typeface="Microsoft YaHei"/>
+              </a:rPr>
+              <a:t>MariaDB</a:t>
+            </a:r>
+          </a:p>
+        </p:txBody>
+      </p:sp>
+      <p:sp>
+        <p:nvSpPr>
+          <p:cNvPr id="23" name="Rounded Rectangle 22"/>
+          <p:cNvSpPr/>
+          <p:nvPr/>
+        </p:nvSpPr>
+        <p:spPr>
+          <a:xfrm>
+            <a:off x="6135624" y="1005840"/>
+            <a:ext cx="5852160" cy="1572768"/>
+          </a:xfrm>
+          <a:prstGeom prst="roundRect">
+            <a:avLst>
+              <a:gd name="adj" fmla="val 4069"/>
+            </a:avLst>
+          </a:prstGeom>
+          <a:solidFill>
+            <a:srgbClr val="FFFBEB"/>
+          </a:solidFill>
+          <a:ln w="15240">
+            <a:solidFill>
+              <a:srgbClr val="FDE68A"/>
+            </a:solidFill>
+          </a:ln>
+          <a:effectLst/>
+        </p:spPr>
+        <p:style>
+          <a:lnRef idx="1">
+            <a:schemeClr val="accent1"/>
+          </a:lnRef>
+          <a:fillRef idx="3">
+            <a:schemeClr val="accent1"/>
+          </a:fillRef>
+          <a:effectRef idx="2">
+            <a:schemeClr val="accent1"/>
+          </a:effectRef>
+          <a:fontRef idx="minor">
+            <a:schemeClr val="lt1"/>
+          </a:fontRef>
+        </p:style>
+        <p:txBody>
+          <a:bodyPr rtlCol="0" anchor="ctr"/>
+          <a:lstStyle/>
+          <a:p>
+            <a:pPr algn="ctr"/>
+          </a:p>
+        </p:txBody>
+      </p:sp>
+      <p:sp>
+        <p:nvSpPr>
+          <p:cNvPr id="24" name="Rounded Rectangle 23"/>
+          <p:cNvSpPr/>
+          <p:nvPr/>
+        </p:nvSpPr>
+        <p:spPr>
+          <a:xfrm>
+            <a:off x="6135624" y="1005840"/>
+            <a:ext cx="36576" cy="1572768"/>
+          </a:xfrm>
+          <a:prstGeom prst="roundRect">
+            <a:avLst>
+              <a:gd name="adj" fmla="val 50000"/>
+            </a:avLst>
+          </a:prstGeom>
+          <a:solidFill>
+            <a:srgbClr val="D97706"/>
+          </a:solidFill>
+          <a:ln>
+            <a:noFill/>
+          </a:ln>
+          <a:effectLst/>
+        </p:spPr>
+        <p:style>
+          <a:lnRef idx="1">
+            <a:schemeClr val="accent1"/>
+          </a:lnRef>
+          <a:fillRef idx="3">
+            <a:schemeClr val="accent1"/>
+          </a:fillRef>
+          <a:effectRef idx="2">
+            <a:schemeClr val="accent1"/>
+          </a:effectRef>
+          <a:fontRef idx="minor">
+            <a:schemeClr val="lt1"/>
+          </a:fontRef>
+        </p:style>
+        <p:txBody>
+          <a:bodyPr rtlCol="0" anchor="ctr"/>
+          <a:lstStyle/>
+          <a:p>
+            <a:pPr algn="ctr"/>
+          </a:p>
+        </p:txBody>
+      </p:sp>
+      <p:sp>
+        <p:nvSpPr>
+          <p:cNvPr id="25" name="TextBox 24"/>
+          <p:cNvSpPr txBox="1"/>
+          <p:nvPr/>
+        </p:nvSpPr>
+        <p:spPr>
+          <a:xfrm>
+            <a:off x="6281928" y="1097280"/>
+            <a:ext cx="5559552" cy="219456"/>
+          </a:xfrm>
+          <a:prstGeom prst="rect">
+            <a:avLst/>
+          </a:prstGeom>
+          <a:noFill/>
+        </p:spPr>
+        <p:txBody>
+          <a:bodyPr wrap="square" lIns="0" rIns="0" tIns="0" bIns="0" anchor="t">
+            <a:noAutofit/>
+          </a:bodyPr>
+          <a:lstStyle/>
+          <a:p>
+            <a:pPr algn="l">
+              <a:lnSpc>
+                <a:spcPct val="112000"/>
+              </a:lnSpc>
+              <a:spcBef>
+                <a:spcPts val="0"/>
+              </a:spcBef>
+              <a:spcAft>
+                <a:spcPts val="0"/>
+              </a:spcAft>
+            </a:pPr>
+            <a:r>
+              <a:rPr sz="940" b="1" i="0">
+                <a:solidFill>
+                  <a:srgbClr val="0F172A"/>
+                </a:solidFill>
+                <a:latin typeface="Segoe UI"/>
+                <a:ea typeface="Microsoft YaHei"/>
+              </a:rPr>
+              <a:t>流式与消息系统</a:t>
+            </a:r>
+          </a:p>
+        </p:txBody>
+      </p:sp>
+      <p:sp>
+        <p:nvSpPr>
+          <p:cNvPr id="26" name="TextBox 25"/>
+          <p:cNvSpPr txBox="1"/>
+          <p:nvPr/>
+        </p:nvSpPr>
+        <p:spPr>
+          <a:xfrm>
+            <a:off x="6281928" y="1325880"/>
+            <a:ext cx="5559552" cy="137160"/>
+          </a:xfrm>
+          <a:prstGeom prst="rect">
+            <a:avLst/>
+          </a:prstGeom>
+          <a:noFill/>
+        </p:spPr>
+        <p:txBody>
+          <a:bodyPr wrap="square" lIns="0" rIns="0" tIns="0" bIns="0" anchor="t">
+            <a:noAutofit/>
+          </a:bodyPr>
+          <a:lstStyle/>
+          <a:p>
+            <a:pPr algn="l">
+              <a:lnSpc>
+                <a:spcPct val="112000"/>
+              </a:lnSpc>
+              <a:spcBef>
+                <a:spcPts val="0"/>
+              </a:spcBef>
+              <a:spcAft>
+                <a:spcPts val="0"/>
+              </a:spcAft>
+            </a:pPr>
+            <a:r>
+              <a:rPr sz="620" b="1" i="0">
+                <a:solidFill>
+                  <a:srgbClr val="D97706"/>
+                </a:solidFill>
+                <a:latin typeface="Segoe UI"/>
+                <a:ea typeface="Microsoft YaHei"/>
+              </a:rPr>
+              <a:t>消息发布 / 订阅</a:t>
+            </a:r>
+          </a:p>
+        </p:txBody>
+      </p:sp>
+      <p:sp>
+        <p:nvSpPr>
+          <p:cNvPr id="27" name="Rounded Rectangle 26"/>
+          <p:cNvSpPr/>
+          <p:nvPr/>
+        </p:nvSpPr>
+        <p:spPr>
+          <a:xfrm>
+            <a:off x="6281928" y="1527048"/>
+            <a:ext cx="1792224" cy="420624"/>
+          </a:xfrm>
+          <a:prstGeom prst="roundRect">
+            <a:avLst>
+              <a:gd name="adj" fmla="val 10869"/>
+            </a:avLst>
+          </a:prstGeom>
+          <a:solidFill>
+            <a:srgbClr val="FFFFFF"/>
+          </a:solidFill>
+          <a:ln w="12700">
+            <a:solidFill>
+              <a:srgbClr val="FDE68A"/>
+            </a:solidFill>
+          </a:ln>
+          <a:effectLst/>
+        </p:spPr>
+        <p:style>
+          <a:lnRef idx="1">
+            <a:schemeClr val="accent1"/>
+          </a:lnRef>
+          <a:fillRef idx="3">
+            <a:schemeClr val="accent1"/>
+          </a:fillRef>
+          <a:effectRef idx="2">
+            <a:schemeClr val="accent1"/>
+          </a:effectRef>
+          <a:fontRef idx="minor">
+            <a:schemeClr val="lt1"/>
+          </a:fontRef>
+        </p:style>
+        <p:txBody>
+          <a:bodyPr rtlCol="0" anchor="ctr"/>
+          <a:lstStyle/>
+          <a:p>
+            <a:pPr algn="ctr"/>
+          </a:p>
+        </p:txBody>
+      </p:sp>
+      <p:sp>
+        <p:nvSpPr>
+          <p:cNvPr id="28" name="TextBox 27"/>
+          <p:cNvSpPr txBox="1"/>
+          <p:nvPr/>
+        </p:nvSpPr>
+        <p:spPr>
+          <a:xfrm>
+            <a:off x="6281928" y="1527048"/>
+            <a:ext cx="1792224" cy="420624"/>
+          </a:xfrm>
+          <a:prstGeom prst="rect">
+            <a:avLst/>
+          </a:prstGeom>
+          <a:noFill/>
+        </p:spPr>
+        <p:txBody>
+          <a:bodyPr wrap="square" lIns="0" rIns="0" tIns="0" bIns="0" anchor="ctr">
+            <a:noAutofit/>
+          </a:bodyPr>
+          <a:lstStyle/>
+          <a:p>
+            <a:pPr algn="ctr">
+              <a:lnSpc>
+                <a:spcPct val="112000"/>
+              </a:lnSpc>
+              <a:spcBef>
+                <a:spcPts val="0"/>
+              </a:spcBef>
+              <a:spcAft>
+                <a:spcPts val="0"/>
+              </a:spcAft>
+            </a:pPr>
+            <a:r>
+              <a:rPr sz="620" b="0" i="0">
+                <a:solidFill>
+                  <a:srgbClr val="475569"/>
+                </a:solidFill>
+                <a:latin typeface="Segoe UI"/>
+                <a:ea typeface="Microsoft YaHei"/>
+              </a:rPr>
+              <a:t>Apache Kafka</a:t>
+            </a:r>
+          </a:p>
+        </p:txBody>
+      </p:sp>
+      <p:sp>
+        <p:nvSpPr>
+          <p:cNvPr id="29" name="Rounded Rectangle 28"/>
+          <p:cNvSpPr/>
+          <p:nvPr/>
+        </p:nvSpPr>
+        <p:spPr>
+          <a:xfrm>
+            <a:off x="8165592" y="1527048"/>
+            <a:ext cx="1792224" cy="420624"/>
+          </a:xfrm>
+          <a:prstGeom prst="roundRect">
+            <a:avLst>
+              <a:gd name="adj" fmla="val 10869"/>
+            </a:avLst>
+          </a:prstGeom>
+          <a:solidFill>
+            <a:srgbClr val="FFFFFF"/>
+          </a:solidFill>
+          <a:ln w="12700">
+            <a:solidFill>
+              <a:srgbClr val="FDE68A"/>
+            </a:solidFill>
+          </a:ln>
+          <a:effectLst/>
+        </p:spPr>
+        <p:style>
+          <a:lnRef idx="1">
+            <a:schemeClr val="accent1"/>
+          </a:lnRef>
+          <a:fillRef idx="3">
+            <a:schemeClr val="accent1"/>
+          </a:fillRef>
+          <a:effectRef idx="2">
+            <a:schemeClr val="accent1"/>
+          </a:effectRef>
+          <a:fontRef idx="minor">
+            <a:schemeClr val="lt1"/>
+          </a:fontRef>
+        </p:style>
+        <p:txBody>
+          <a:bodyPr rtlCol="0" anchor="ctr"/>
+          <a:lstStyle/>
+          <a:p>
+            <a:pPr algn="ctr"/>
+          </a:p>
+        </p:txBody>
+      </p:sp>
+      <p:sp>
+        <p:nvSpPr>
+          <p:cNvPr id="30" name="TextBox 29"/>
+          <p:cNvSpPr txBox="1"/>
+          <p:nvPr/>
+        </p:nvSpPr>
+        <p:spPr>
+          <a:xfrm>
+            <a:off x="8165592" y="1527048"/>
+            <a:ext cx="1792224" cy="420624"/>
+          </a:xfrm>
+          <a:prstGeom prst="rect">
+            <a:avLst/>
+          </a:prstGeom>
+          <a:noFill/>
+        </p:spPr>
+        <p:txBody>
+          <a:bodyPr wrap="square" lIns="0" rIns="0" tIns="0" bIns="0" anchor="ctr">
+            <a:noAutofit/>
+          </a:bodyPr>
+          <a:lstStyle/>
+          <a:p>
+            <a:pPr algn="ctr">
+              <a:lnSpc>
+                <a:spcPct val="112000"/>
+              </a:lnSpc>
+              <a:spcBef>
+                <a:spcPts val="0"/>
+              </a:spcBef>
+              <a:spcAft>
+                <a:spcPts val="0"/>
+              </a:spcAft>
+            </a:pPr>
+            <a:r>
+              <a:rPr sz="620" b="0" i="0">
+                <a:solidFill>
+                  <a:srgbClr val="475569"/>
+                </a:solidFill>
+                <a:latin typeface="Segoe UI"/>
+                <a:ea typeface="Microsoft YaHei"/>
+              </a:rPr>
+              <a:t>Apache Pulsar</a:t>
+            </a:r>
+          </a:p>
+        </p:txBody>
+      </p:sp>
+      <p:sp>
+        <p:nvSpPr>
+          <p:cNvPr id="31" name="Rounded Rectangle 30"/>
+          <p:cNvSpPr/>
+          <p:nvPr/>
+        </p:nvSpPr>
+        <p:spPr>
+          <a:xfrm>
+            <a:off x="10049256" y="1527048"/>
+            <a:ext cx="1792224" cy="420624"/>
+          </a:xfrm>
+          <a:prstGeom prst="roundRect">
+            <a:avLst>
+              <a:gd name="adj" fmla="val 10869"/>
+            </a:avLst>
+          </a:prstGeom>
+          <a:solidFill>
+            <a:srgbClr val="FFFFFF"/>
+          </a:solidFill>
+          <a:ln w="12700">
+            <a:solidFill>
+              <a:srgbClr val="FDE68A"/>
+            </a:solidFill>
+          </a:ln>
+          <a:effectLst/>
+        </p:spPr>
+        <p:style>
+          <a:lnRef idx="1">
+            <a:schemeClr val="accent1"/>
+          </a:lnRef>
+          <a:fillRef idx="3">
+            <a:schemeClr val="accent1"/>
+          </a:fillRef>
+          <a:effectRef idx="2">
+            <a:schemeClr val="accent1"/>
+          </a:effectRef>
+          <a:fontRef idx="minor">
+            <a:schemeClr val="lt1"/>
+          </a:fontRef>
+        </p:style>
+        <p:txBody>
+          <a:bodyPr rtlCol="0" anchor="ctr"/>
+          <a:lstStyle/>
+          <a:p>
+            <a:pPr algn="ctr"/>
+          </a:p>
+        </p:txBody>
+      </p:sp>
+      <p:sp>
+        <p:nvSpPr>
+          <p:cNvPr id="32" name="TextBox 31"/>
+          <p:cNvSpPr txBox="1"/>
+          <p:nvPr/>
+        </p:nvSpPr>
+        <p:spPr>
+          <a:xfrm>
+            <a:off x="10049256" y="1527048"/>
+            <a:ext cx="1792224" cy="420624"/>
+          </a:xfrm>
+          <a:prstGeom prst="rect">
+            <a:avLst/>
+          </a:prstGeom>
+          <a:noFill/>
+        </p:spPr>
+        <p:txBody>
+          <a:bodyPr wrap="square" lIns="0" rIns="0" tIns="0" bIns="0" anchor="ctr">
+            <a:noAutofit/>
+          </a:bodyPr>
+          <a:lstStyle/>
+          <a:p>
+            <a:pPr algn="ctr">
+              <a:lnSpc>
+                <a:spcPct val="112000"/>
+              </a:lnSpc>
+              <a:spcBef>
+                <a:spcPts val="0"/>
+              </a:spcBef>
+              <a:spcAft>
+                <a:spcPts val="0"/>
+              </a:spcAft>
+            </a:pPr>
+            <a:r>
+              <a:rPr sz="620" b="0" i="0">
+                <a:solidFill>
+                  <a:srgbClr val="475569"/>
+                </a:solidFill>
+                <a:latin typeface="Segoe UI"/>
+                <a:ea typeface="Microsoft YaHei"/>
+              </a:rPr>
+              <a:t>RabbitMQ</a:t>
+            </a:r>
+          </a:p>
+        </p:txBody>
+      </p:sp>
+      <p:sp>
+        <p:nvSpPr>
+          <p:cNvPr id="33" name="Rounded Rectangle 32"/>
+          <p:cNvSpPr/>
+          <p:nvPr/>
+        </p:nvSpPr>
+        <p:spPr>
+          <a:xfrm>
+            <a:off x="6281928" y="2057400"/>
+            <a:ext cx="1792224" cy="420624"/>
+          </a:xfrm>
+          <a:prstGeom prst="roundRect">
+            <a:avLst>
+              <a:gd name="adj" fmla="val 10869"/>
+            </a:avLst>
+          </a:prstGeom>
+          <a:solidFill>
+            <a:srgbClr val="FFFFFF"/>
+          </a:solidFill>
+          <a:ln w="12700">
+            <a:solidFill>
+              <a:srgbClr val="FDE68A"/>
+            </a:solidFill>
+          </a:ln>
+          <a:effectLst/>
+        </p:spPr>
+        <p:style>
+          <a:lnRef idx="1">
+            <a:schemeClr val="accent1"/>
+          </a:lnRef>
+          <a:fillRef idx="3">
+            <a:schemeClr val="accent1"/>
+          </a:fillRef>
+          <a:effectRef idx="2">
+            <a:schemeClr val="accent1"/>
+          </a:effectRef>
+          <a:fontRef idx="minor">
+            <a:schemeClr val="lt1"/>
+          </a:fontRef>
+        </p:style>
+        <p:txBody>
+          <a:bodyPr rtlCol="0" anchor="ctr"/>
+          <a:lstStyle/>
+          <a:p>
+            <a:pPr algn="ctr"/>
+          </a:p>
+        </p:txBody>
+      </p:sp>
+      <p:sp>
+        <p:nvSpPr>
+          <p:cNvPr id="34" name="TextBox 33"/>
+          <p:cNvSpPr txBox="1"/>
+          <p:nvPr/>
+        </p:nvSpPr>
+        <p:spPr>
+          <a:xfrm>
+            <a:off x="6281928" y="2057400"/>
+            <a:ext cx="1792224" cy="420624"/>
+          </a:xfrm>
+          <a:prstGeom prst="rect">
+            <a:avLst/>
+          </a:prstGeom>
+          <a:noFill/>
+        </p:spPr>
+        <p:txBody>
+          <a:bodyPr wrap="square" lIns="0" rIns="0" tIns="0" bIns="0" anchor="ctr">
+            <a:noAutofit/>
+          </a:bodyPr>
+          <a:lstStyle/>
+          <a:p>
+            <a:pPr algn="ctr">
+              <a:lnSpc>
+                <a:spcPct val="112000"/>
+              </a:lnSpc>
+              <a:spcBef>
+                <a:spcPts val="0"/>
+              </a:spcBef>
+              <a:spcAft>
+                <a:spcPts val="0"/>
+              </a:spcAft>
+            </a:pPr>
+            <a:r>
+              <a:rPr sz="620" b="0" i="0">
+                <a:solidFill>
+                  <a:srgbClr val="475569"/>
+                </a:solidFill>
+                <a:latin typeface="Segoe UI"/>
+                <a:ea typeface="Microsoft YaHei"/>
+              </a:rPr>
+              <a:t>RocketMQ</a:t>
+            </a:r>
+          </a:p>
+        </p:txBody>
+      </p:sp>
+      <p:sp>
+        <p:nvSpPr>
+          <p:cNvPr id="35" name="Rounded Rectangle 34"/>
+          <p:cNvSpPr/>
+          <p:nvPr/>
+        </p:nvSpPr>
+        <p:spPr>
+          <a:xfrm>
+            <a:off x="8165592" y="2057400"/>
+            <a:ext cx="1792224" cy="420624"/>
+          </a:xfrm>
+          <a:prstGeom prst="roundRect">
+            <a:avLst>
+              <a:gd name="adj" fmla="val 10869"/>
+            </a:avLst>
+          </a:prstGeom>
+          <a:solidFill>
+            <a:srgbClr val="FFFFFF"/>
+          </a:solidFill>
+          <a:ln w="12700">
+            <a:solidFill>
+              <a:srgbClr val="FDE68A"/>
+            </a:solidFill>
+          </a:ln>
+          <a:effectLst/>
+        </p:spPr>
+        <p:style>
+          <a:lnRef idx="1">
+            <a:schemeClr val="accent1"/>
+          </a:lnRef>
+          <a:fillRef idx="3">
+            <a:schemeClr val="accent1"/>
+          </a:fillRef>
+          <a:effectRef idx="2">
+            <a:schemeClr val="accent1"/>
+          </a:effectRef>
+          <a:fontRef idx="minor">
+            <a:schemeClr val="lt1"/>
+          </a:fontRef>
+        </p:style>
+        <p:txBody>
+          <a:bodyPr rtlCol="0" anchor="ctr"/>
+          <a:lstStyle/>
+          <a:p>
+            <a:pPr algn="ctr"/>
+          </a:p>
+        </p:txBody>
+      </p:sp>
+      <p:sp>
+        <p:nvSpPr>
+          <p:cNvPr id="36" name="TextBox 35"/>
+          <p:cNvSpPr txBox="1"/>
+          <p:nvPr/>
+        </p:nvSpPr>
+        <p:spPr>
+          <a:xfrm>
+            <a:off x="8165592" y="2057400"/>
+            <a:ext cx="1792224" cy="420624"/>
+          </a:xfrm>
+          <a:prstGeom prst="rect">
+            <a:avLst/>
+          </a:prstGeom>
+          <a:noFill/>
+        </p:spPr>
+        <p:txBody>
+          <a:bodyPr wrap="square" lIns="0" rIns="0" tIns="0" bIns="0" anchor="ctr">
+            <a:noAutofit/>
+          </a:bodyPr>
+          <a:lstStyle/>
+          <a:p>
+            <a:pPr algn="ctr">
+              <a:lnSpc>
+                <a:spcPct val="112000"/>
+              </a:lnSpc>
+              <a:spcBef>
+                <a:spcPts val="0"/>
+              </a:spcBef>
+              <a:spcAft>
+                <a:spcPts val="0"/>
+              </a:spcAft>
+            </a:pPr>
+            <a:r>
+              <a:rPr sz="620" b="0" i="0">
+                <a:solidFill>
+                  <a:srgbClr val="475569"/>
+                </a:solidFill>
+                <a:latin typeface="Segoe UI"/>
+                <a:ea typeface="Microsoft YaHei"/>
+              </a:rPr>
+              <a:t>AWS SQS</a:t>
+            </a:r>
+          </a:p>
+        </p:txBody>
+      </p:sp>
+      <p:sp>
+        <p:nvSpPr>
+          <p:cNvPr id="37" name="Rounded Rectangle 36"/>
+          <p:cNvSpPr/>
+          <p:nvPr/>
+        </p:nvSpPr>
+        <p:spPr>
+          <a:xfrm>
+            <a:off x="10049256" y="2057400"/>
+            <a:ext cx="1792224" cy="420624"/>
+          </a:xfrm>
+          <a:prstGeom prst="roundRect">
+            <a:avLst>
+              <a:gd name="adj" fmla="val 10869"/>
+            </a:avLst>
+          </a:prstGeom>
+          <a:solidFill>
+            <a:srgbClr val="FFFFFF"/>
+          </a:solidFill>
+          <a:ln w="12700">
+            <a:solidFill>
+              <a:srgbClr val="FDE68A"/>
+            </a:solidFill>
+          </a:ln>
+          <a:effectLst/>
+        </p:spPr>
+        <p:style>
+          <a:lnRef idx="1">
+            <a:schemeClr val="accent1"/>
+          </a:lnRef>
+          <a:fillRef idx="3">
+            <a:schemeClr val="accent1"/>
+          </a:fillRef>
+          <a:effectRef idx="2">
+            <a:schemeClr val="accent1"/>
+          </a:effectRef>
+          <a:fontRef idx="minor">
+            <a:schemeClr val="lt1"/>
+          </a:fontRef>
+        </p:style>
+        <p:txBody>
+          <a:bodyPr rtlCol="0" anchor="ctr"/>
+          <a:lstStyle/>
+          <a:p>
+            <a:pPr algn="ctr"/>
+          </a:p>
+        </p:txBody>
+      </p:sp>
+      <p:sp>
+        <p:nvSpPr>
+          <p:cNvPr id="38" name="TextBox 37"/>
+          <p:cNvSpPr txBox="1"/>
+          <p:nvPr/>
+        </p:nvSpPr>
+        <p:spPr>
+          <a:xfrm>
+            <a:off x="10049256" y="2057400"/>
+            <a:ext cx="1792224" cy="420624"/>
+          </a:xfrm>
+          <a:prstGeom prst="rect">
+            <a:avLst/>
+          </a:prstGeom>
+          <a:noFill/>
+        </p:spPr>
+        <p:txBody>
+          <a:bodyPr wrap="square" lIns="0" rIns="0" tIns="0" bIns="0" anchor="ctr">
+            <a:noAutofit/>
+          </a:bodyPr>
+          <a:lstStyle/>
+          <a:p>
+            <a:pPr algn="ctr">
+              <a:lnSpc>
+                <a:spcPct val="112000"/>
+              </a:lnSpc>
+              <a:spcBef>
+                <a:spcPts val="0"/>
+              </a:spcBef>
+              <a:spcAft>
+                <a:spcPts val="0"/>
+              </a:spcAft>
+            </a:pPr>
+            <a:r>
+              <a:rPr sz="620" b="0" i="0">
+                <a:solidFill>
+                  <a:srgbClr val="475569"/>
+                </a:solidFill>
+                <a:latin typeface="Segoe UI"/>
+                <a:ea typeface="Microsoft YaHei"/>
+              </a:rPr>
+              <a:t>ActiveMQ</a:t>
+            </a:r>
+          </a:p>
+        </p:txBody>
+      </p:sp>
+      <p:sp>
+        <p:nvSpPr>
+          <p:cNvPr id="39" name="Rounded Rectangle 38"/>
+          <p:cNvSpPr/>
+          <p:nvPr/>
+        </p:nvSpPr>
+        <p:spPr>
+          <a:xfrm>
+            <a:off x="201168" y="2706624"/>
+            <a:ext cx="5760720" cy="1572768"/>
+          </a:xfrm>
+          <a:prstGeom prst="roundRect">
+            <a:avLst>
+              <a:gd name="adj" fmla="val 4069"/>
+            </a:avLst>
+          </a:prstGeom>
+          <a:solidFill>
+            <a:srgbClr val="F5F3FF"/>
+          </a:solidFill>
+          <a:ln w="15240">
+            <a:solidFill>
+              <a:srgbClr val="DDD6FE"/>
+            </a:solidFill>
+          </a:ln>
+          <a:effectLst/>
+        </p:spPr>
+        <p:style>
+          <a:lnRef idx="1">
+            <a:schemeClr val="accent1"/>
+          </a:lnRef>
+          <a:fillRef idx="3">
+            <a:schemeClr val="accent1"/>
+          </a:fillRef>
+          <a:effectRef idx="2">
+            <a:schemeClr val="accent1"/>
+          </a:effectRef>
+          <a:fontRef idx="minor">
+            <a:schemeClr val="lt1"/>
+          </a:fontRef>
+        </p:style>
+        <p:txBody>
+          <a:bodyPr rtlCol="0" anchor="ctr"/>
+          <a:lstStyle/>
+          <a:p>
+            <a:pPr algn="ctr"/>
+          </a:p>
+        </p:txBody>
+      </p:sp>
+      <p:sp>
+        <p:nvSpPr>
+          <p:cNvPr id="40" name="Rounded Rectangle 39"/>
+          <p:cNvSpPr/>
+          <p:nvPr/>
+        </p:nvSpPr>
+        <p:spPr>
+          <a:xfrm>
+            <a:off x="201168" y="2706624"/>
+            <a:ext cx="36576" cy="1572768"/>
+          </a:xfrm>
+          <a:prstGeom prst="roundRect">
+            <a:avLst>
+              <a:gd name="adj" fmla="val 50000"/>
+            </a:avLst>
+          </a:prstGeom>
+          <a:solidFill>
+            <a:srgbClr val="7C3AED"/>
+          </a:solidFill>
+          <a:ln>
+            <a:noFill/>
+          </a:ln>
+          <a:effectLst/>
+        </p:spPr>
+        <p:style>
+          <a:lnRef idx="1">
+            <a:schemeClr val="accent1"/>
+          </a:lnRef>
+          <a:fillRef idx="3">
+            <a:schemeClr val="accent1"/>
+          </a:fillRef>
+          <a:effectRef idx="2">
+            <a:schemeClr val="accent1"/>
+          </a:effectRef>
+          <a:fontRef idx="minor">
+            <a:schemeClr val="lt1"/>
+          </a:fontRef>
+        </p:style>
+        <p:txBody>
+          <a:bodyPr rtlCol="0" anchor="ctr"/>
+          <a:lstStyle/>
+          <a:p>
+            <a:pPr algn="ctr"/>
+          </a:p>
+        </p:txBody>
+      </p:sp>
+      <p:sp>
+        <p:nvSpPr>
+          <p:cNvPr id="41" name="TextBox 40"/>
+          <p:cNvSpPr txBox="1"/>
+          <p:nvPr/>
+        </p:nvSpPr>
+        <p:spPr>
+          <a:xfrm>
+            <a:off x="347472" y="2798064"/>
+            <a:ext cx="5468112" cy="219456"/>
+          </a:xfrm>
+          <a:prstGeom prst="rect">
+            <a:avLst/>
+          </a:prstGeom>
+          <a:noFill/>
+        </p:spPr>
+        <p:txBody>
+          <a:bodyPr wrap="square" lIns="0" rIns="0" tIns="0" bIns="0" anchor="t">
+            <a:noAutofit/>
+          </a:bodyPr>
+          <a:lstStyle/>
+          <a:p>
+            <a:pPr algn="l">
+              <a:lnSpc>
+                <a:spcPct val="112000"/>
+              </a:lnSpc>
+              <a:spcBef>
+                <a:spcPts val="0"/>
+              </a:spcBef>
+              <a:spcAft>
+                <a:spcPts val="0"/>
+              </a:spcAft>
+            </a:pPr>
+            <a:r>
+              <a:rPr sz="940" b="1" i="0">
+                <a:solidFill>
+                  <a:srgbClr val="0F172A"/>
+                </a:solidFill>
+                <a:latin typeface="Segoe UI"/>
+                <a:ea typeface="Microsoft YaHei"/>
+              </a:rPr>
+              <a:t>OLAP 与分析</a:t>
+            </a:r>
+          </a:p>
+        </p:txBody>
+      </p:sp>
+      <p:sp>
+        <p:nvSpPr>
+          <p:cNvPr id="42" name="TextBox 41"/>
+          <p:cNvSpPr txBox="1"/>
+          <p:nvPr/>
+        </p:nvSpPr>
+        <p:spPr>
+          <a:xfrm>
+            <a:off x="347472" y="3026664"/>
+            <a:ext cx="5468112" cy="137160"/>
+          </a:xfrm>
+          <a:prstGeom prst="rect">
+            <a:avLst/>
+          </a:prstGeom>
+          <a:noFill/>
+        </p:spPr>
+        <p:txBody>
+          <a:bodyPr wrap="square" lIns="0" rIns="0" tIns="0" bIns="0" anchor="t">
+            <a:noAutofit/>
+          </a:bodyPr>
+          <a:lstStyle/>
+          <a:p>
+            <a:pPr algn="l">
+              <a:lnSpc>
+                <a:spcPct val="112000"/>
+              </a:lnSpc>
+              <a:spcBef>
+                <a:spcPts val="0"/>
+              </a:spcBef>
+              <a:spcAft>
+                <a:spcPts val="0"/>
+              </a:spcAft>
+            </a:pPr>
+            <a:r>
+              <a:rPr sz="620" b="1" i="0">
+                <a:solidFill>
+                  <a:srgbClr val="7C3AED"/>
+                </a:solidFill>
+                <a:latin typeface="Segoe UI"/>
+                <a:ea typeface="Microsoft YaHei"/>
+              </a:rPr>
+              <a:t>分析型 OLAP 引擎</a:t>
+            </a:r>
+          </a:p>
+        </p:txBody>
+      </p:sp>
+      <p:sp>
+        <p:nvSpPr>
+          <p:cNvPr id="43" name="Rounded Rectangle 42"/>
+          <p:cNvSpPr/>
+          <p:nvPr/>
+        </p:nvSpPr>
+        <p:spPr>
+          <a:xfrm>
+            <a:off x="347472" y="3227832"/>
+            <a:ext cx="1761743" cy="420624"/>
+          </a:xfrm>
+          <a:prstGeom prst="roundRect">
+            <a:avLst>
+              <a:gd name="adj" fmla="val 10869"/>
+            </a:avLst>
+          </a:prstGeom>
+          <a:solidFill>
+            <a:srgbClr val="FFFFFF"/>
+          </a:solidFill>
+          <a:ln w="12700">
+            <a:solidFill>
+              <a:srgbClr val="DDD6FE"/>
+            </a:solidFill>
+          </a:ln>
+          <a:effectLst/>
+        </p:spPr>
+        <p:style>
+          <a:lnRef idx="1">
+            <a:schemeClr val="accent1"/>
+          </a:lnRef>
+          <a:fillRef idx="3">
+            <a:schemeClr val="accent1"/>
+          </a:fillRef>
+          <a:effectRef idx="2">
+            <a:schemeClr val="accent1"/>
+          </a:effectRef>
+          <a:fontRef idx="minor">
+            <a:schemeClr val="lt1"/>
+          </a:fontRef>
+        </p:style>
+        <p:txBody>
+          <a:bodyPr rtlCol="0" anchor="ctr"/>
+          <a:lstStyle/>
+          <a:p>
+            <a:pPr algn="ctr"/>
+          </a:p>
+        </p:txBody>
+      </p:sp>
+      <p:sp>
+        <p:nvSpPr>
+          <p:cNvPr id="44" name="TextBox 43"/>
+          <p:cNvSpPr txBox="1"/>
+          <p:nvPr/>
+        </p:nvSpPr>
+        <p:spPr>
+          <a:xfrm>
+            <a:off x="347472" y="3227832"/>
+            <a:ext cx="1761743" cy="420624"/>
+          </a:xfrm>
+          <a:prstGeom prst="rect">
+            <a:avLst/>
+          </a:prstGeom>
+          <a:noFill/>
+        </p:spPr>
+        <p:txBody>
+          <a:bodyPr wrap="square" lIns="0" rIns="0" tIns="0" bIns="0" anchor="ctr">
+            <a:noAutofit/>
+          </a:bodyPr>
+          <a:lstStyle/>
+          <a:p>
+            <a:pPr algn="ctr">
+              <a:lnSpc>
+                <a:spcPct val="112000"/>
+              </a:lnSpc>
+              <a:spcBef>
+                <a:spcPts val="0"/>
+              </a:spcBef>
+              <a:spcAft>
+                <a:spcPts val="0"/>
+              </a:spcAft>
+            </a:pPr>
+            <a:r>
+              <a:rPr sz="620" b="0" i="0">
+                <a:solidFill>
+                  <a:srgbClr val="475569"/>
+                </a:solidFill>
+                <a:latin typeface="Segoe UI"/>
+                <a:ea typeface="Microsoft YaHei"/>
+              </a:rPr>
+              <a:t>ClickHouse</a:t>
+            </a:r>
+          </a:p>
+        </p:txBody>
+      </p:sp>
+      <p:sp>
+        <p:nvSpPr>
+          <p:cNvPr id="45" name="Rounded Rectangle 44"/>
+          <p:cNvSpPr/>
+          <p:nvPr/>
+        </p:nvSpPr>
+        <p:spPr>
+          <a:xfrm>
+            <a:off x="2200655" y="3227832"/>
+            <a:ext cx="1761743" cy="420624"/>
+          </a:xfrm>
+          <a:prstGeom prst="roundRect">
+            <a:avLst>
+              <a:gd name="adj" fmla="val 10869"/>
+            </a:avLst>
+          </a:prstGeom>
+          <a:solidFill>
+            <a:srgbClr val="FFFFFF"/>
+          </a:solidFill>
+          <a:ln w="12700">
+            <a:solidFill>
+              <a:srgbClr val="DDD6FE"/>
+            </a:solidFill>
+          </a:ln>
+          <a:effectLst/>
+        </p:spPr>
+        <p:style>
+          <a:lnRef idx="1">
+            <a:schemeClr val="accent1"/>
+          </a:lnRef>
+          <a:fillRef idx="3">
+            <a:schemeClr val="accent1"/>
+          </a:fillRef>
+          <a:effectRef idx="2">
+            <a:schemeClr val="accent1"/>
+          </a:effectRef>
+          <a:fontRef idx="minor">
+            <a:schemeClr val="lt1"/>
+          </a:fontRef>
+        </p:style>
+        <p:txBody>
+          <a:bodyPr rtlCol="0" anchor="ctr"/>
+          <a:lstStyle/>
+          <a:p>
+            <a:pPr algn="ctr"/>
+          </a:p>
+        </p:txBody>
+      </p:sp>
+      <p:sp>
+        <p:nvSpPr>
+          <p:cNvPr id="46" name="TextBox 45"/>
+          <p:cNvSpPr txBox="1"/>
+          <p:nvPr/>
+        </p:nvSpPr>
+        <p:spPr>
+          <a:xfrm>
+            <a:off x="2200655" y="3227832"/>
+            <a:ext cx="1761743" cy="420624"/>
+          </a:xfrm>
+          <a:prstGeom prst="rect">
+            <a:avLst/>
+          </a:prstGeom>
+          <a:noFill/>
+        </p:spPr>
+        <p:txBody>
+          <a:bodyPr wrap="square" lIns="0" rIns="0" tIns="0" bIns="0" anchor="ctr">
+            <a:noAutofit/>
+          </a:bodyPr>
+          <a:lstStyle/>
+          <a:p>
+            <a:pPr algn="ctr">
+              <a:lnSpc>
+                <a:spcPct val="112000"/>
+              </a:lnSpc>
+              <a:spcBef>
+                <a:spcPts val="0"/>
+              </a:spcBef>
+              <a:spcAft>
+                <a:spcPts val="0"/>
+              </a:spcAft>
+            </a:pPr>
+            <a:r>
+              <a:rPr sz="620" b="0" i="0">
+                <a:solidFill>
+                  <a:srgbClr val="475569"/>
+                </a:solidFill>
+                <a:latin typeface="Segoe UI"/>
+                <a:ea typeface="Microsoft YaHei"/>
+              </a:rPr>
+              <a:t>Apache Doris</a:t>
+            </a:r>
+          </a:p>
+        </p:txBody>
+      </p:sp>
+      <p:sp>
+        <p:nvSpPr>
+          <p:cNvPr id="47" name="Rounded Rectangle 46"/>
+          <p:cNvSpPr/>
+          <p:nvPr/>
+        </p:nvSpPr>
+        <p:spPr>
+          <a:xfrm>
+            <a:off x="4053839" y="3227832"/>
+            <a:ext cx="1761743" cy="420624"/>
+          </a:xfrm>
+          <a:prstGeom prst="roundRect">
+            <a:avLst>
+              <a:gd name="adj" fmla="val 10869"/>
+            </a:avLst>
+          </a:prstGeom>
+          <a:solidFill>
+            <a:srgbClr val="FFFFFF"/>
+          </a:solidFill>
+          <a:ln w="12700">
+            <a:solidFill>
+              <a:srgbClr val="DDD6FE"/>
+            </a:solidFill>
+          </a:ln>
+          <a:effectLst/>
+        </p:spPr>
+        <p:style>
+          <a:lnRef idx="1">
+            <a:schemeClr val="accent1"/>
+          </a:lnRef>
+          <a:fillRef idx="3">
+            <a:schemeClr val="accent1"/>
+          </a:fillRef>
+          <a:effectRef idx="2">
+            <a:schemeClr val="accent1"/>
+          </a:effectRef>
+          <a:fontRef idx="minor">
+            <a:schemeClr val="lt1"/>
+          </a:fontRef>
+        </p:style>
+        <p:txBody>
+          <a:bodyPr rtlCol="0" anchor="ctr"/>
+          <a:lstStyle/>
+          <a:p>
+            <a:pPr algn="ctr"/>
+          </a:p>
+        </p:txBody>
+      </p:sp>
+      <p:sp>
+        <p:nvSpPr>
+          <p:cNvPr id="48" name="TextBox 47"/>
+          <p:cNvSpPr txBox="1"/>
+          <p:nvPr/>
+        </p:nvSpPr>
+        <p:spPr>
+          <a:xfrm>
+            <a:off x="4053839" y="3227832"/>
+            <a:ext cx="1761743" cy="420624"/>
+          </a:xfrm>
+          <a:prstGeom prst="rect">
+            <a:avLst/>
+          </a:prstGeom>
+          <a:noFill/>
+        </p:spPr>
+        <p:txBody>
+          <a:bodyPr wrap="square" lIns="0" rIns="0" tIns="0" bIns="0" anchor="ctr">
+            <a:noAutofit/>
+          </a:bodyPr>
+          <a:lstStyle/>
+          <a:p>
+            <a:pPr algn="ctr">
+              <a:lnSpc>
+                <a:spcPct val="112000"/>
+              </a:lnSpc>
+              <a:spcBef>
+                <a:spcPts val="0"/>
+              </a:spcBef>
+              <a:spcAft>
+                <a:spcPts val="0"/>
+              </a:spcAft>
+            </a:pPr>
+            <a:r>
+              <a:rPr sz="620" b="0" i="0">
+                <a:solidFill>
+                  <a:srgbClr val="475569"/>
+                </a:solidFill>
+                <a:latin typeface="Segoe UI"/>
+                <a:ea typeface="Microsoft YaHei"/>
+              </a:rPr>
+              <a:t>StarRocks</a:t>
+            </a:r>
+          </a:p>
+        </p:txBody>
+      </p:sp>
+      <p:sp>
+        <p:nvSpPr>
+          <p:cNvPr id="49" name="Rounded Rectangle 48"/>
+          <p:cNvSpPr/>
+          <p:nvPr/>
+        </p:nvSpPr>
+        <p:spPr>
+          <a:xfrm>
+            <a:off x="347472" y="3758183"/>
+            <a:ext cx="1761743" cy="420624"/>
+          </a:xfrm>
+          <a:prstGeom prst="roundRect">
+            <a:avLst>
+              <a:gd name="adj" fmla="val 10869"/>
+            </a:avLst>
+          </a:prstGeom>
+          <a:solidFill>
+            <a:srgbClr val="FFFFFF"/>
+          </a:solidFill>
+          <a:ln w="12700">
+            <a:solidFill>
+              <a:srgbClr val="DDD6FE"/>
+            </a:solidFill>
+          </a:ln>
+          <a:effectLst/>
+        </p:spPr>
+        <p:style>
+          <a:lnRef idx="1">
+            <a:schemeClr val="accent1"/>
+          </a:lnRef>
+          <a:fillRef idx="3">
+            <a:schemeClr val="accent1"/>
+          </a:fillRef>
+          <a:effectRef idx="2">
+            <a:schemeClr val="accent1"/>
+          </a:effectRef>
+          <a:fontRef idx="minor">
+            <a:schemeClr val="lt1"/>
+          </a:fontRef>
+        </p:style>
+        <p:txBody>
+          <a:bodyPr rtlCol="0" anchor="ctr"/>
+          <a:lstStyle/>
+          <a:p>
+            <a:pPr algn="ctr"/>
+          </a:p>
+        </p:txBody>
+      </p:sp>
+      <p:sp>
+        <p:nvSpPr>
+          <p:cNvPr id="50" name="TextBox 49"/>
+          <p:cNvSpPr txBox="1"/>
+          <p:nvPr/>
+        </p:nvSpPr>
+        <p:spPr>
+          <a:xfrm>
+            <a:off x="347472" y="3758183"/>
+            <a:ext cx="1761743" cy="420624"/>
+          </a:xfrm>
+          <a:prstGeom prst="rect">
+            <a:avLst/>
+          </a:prstGeom>
+          <a:noFill/>
+        </p:spPr>
+        <p:txBody>
+          <a:bodyPr wrap="square" lIns="0" rIns="0" tIns="0" bIns="0" anchor="ctr">
+            <a:noAutofit/>
+          </a:bodyPr>
+          <a:lstStyle/>
+          <a:p>
+            <a:pPr algn="ctr">
+              <a:lnSpc>
+                <a:spcPct val="112000"/>
+              </a:lnSpc>
+              <a:spcBef>
+                <a:spcPts val="0"/>
+              </a:spcBef>
+              <a:spcAft>
+                <a:spcPts val="0"/>
+              </a:spcAft>
+            </a:pPr>
+            <a:r>
+              <a:rPr sz="620" b="0" i="0">
+                <a:solidFill>
+                  <a:srgbClr val="475569"/>
+                </a:solidFill>
+                <a:latin typeface="Segoe UI"/>
+                <a:ea typeface="Microsoft YaHei"/>
+              </a:rPr>
+              <a:t>Snowflake</a:t>
+            </a:r>
+          </a:p>
+        </p:txBody>
+      </p:sp>
+      <p:sp>
+        <p:nvSpPr>
+          <p:cNvPr id="51" name="Rounded Rectangle 50"/>
+          <p:cNvSpPr/>
+          <p:nvPr/>
+        </p:nvSpPr>
+        <p:spPr>
+          <a:xfrm>
+            <a:off x="2200655" y="3758183"/>
+            <a:ext cx="1761743" cy="420624"/>
+          </a:xfrm>
+          <a:prstGeom prst="roundRect">
+            <a:avLst>
+              <a:gd name="adj" fmla="val 10869"/>
+            </a:avLst>
+          </a:prstGeom>
+          <a:solidFill>
+            <a:srgbClr val="FFFFFF"/>
+          </a:solidFill>
+          <a:ln w="12700">
+            <a:solidFill>
+              <a:srgbClr val="DDD6FE"/>
+            </a:solidFill>
+          </a:ln>
+          <a:effectLst/>
+        </p:spPr>
+        <p:style>
+          <a:lnRef idx="1">
+            <a:schemeClr val="accent1"/>
+          </a:lnRef>
+          <a:fillRef idx="3">
+            <a:schemeClr val="accent1"/>
+          </a:fillRef>
+          <a:effectRef idx="2">
+            <a:schemeClr val="accent1"/>
+          </a:effectRef>
+          <a:fontRef idx="minor">
+            <a:schemeClr val="lt1"/>
+          </a:fontRef>
+        </p:style>
+        <p:txBody>
+          <a:bodyPr rtlCol="0" anchor="ctr"/>
+          <a:lstStyle/>
+          <a:p>
+            <a:pPr algn="ctr"/>
+          </a:p>
+        </p:txBody>
+      </p:sp>
+      <p:sp>
+        <p:nvSpPr>
+          <p:cNvPr id="52" name="TextBox 51"/>
+          <p:cNvSpPr txBox="1"/>
+          <p:nvPr/>
+        </p:nvSpPr>
+        <p:spPr>
+          <a:xfrm>
+            <a:off x="2200655" y="3758183"/>
+            <a:ext cx="1761743" cy="420624"/>
+          </a:xfrm>
+          <a:prstGeom prst="rect">
+            <a:avLst/>
+          </a:prstGeom>
+          <a:noFill/>
+        </p:spPr>
+        <p:txBody>
+          <a:bodyPr wrap="square" lIns="0" rIns="0" tIns="0" bIns="0" anchor="ctr">
+            <a:noAutofit/>
+          </a:bodyPr>
+          <a:lstStyle/>
+          <a:p>
+            <a:pPr algn="ctr">
+              <a:lnSpc>
+                <a:spcPct val="112000"/>
+              </a:lnSpc>
+              <a:spcBef>
+                <a:spcPts val="0"/>
+              </a:spcBef>
+              <a:spcAft>
+                <a:spcPts val="0"/>
+              </a:spcAft>
+            </a:pPr>
+            <a:r>
+              <a:rPr sz="620" b="0" i="0">
+                <a:solidFill>
+                  <a:srgbClr val="475569"/>
+                </a:solidFill>
+                <a:latin typeface="Segoe UI"/>
+                <a:ea typeface="Microsoft YaHei"/>
+              </a:rPr>
+              <a:t>Amazon Redshift</a:t>
+            </a:r>
+          </a:p>
+        </p:txBody>
+      </p:sp>
+      <p:sp>
+        <p:nvSpPr>
+          <p:cNvPr id="53" name="Rounded Rectangle 52"/>
+          <p:cNvSpPr/>
+          <p:nvPr/>
+        </p:nvSpPr>
+        <p:spPr>
+          <a:xfrm>
+            <a:off x="4053839" y="3758183"/>
+            <a:ext cx="1761743" cy="420624"/>
+          </a:xfrm>
+          <a:prstGeom prst="roundRect">
+            <a:avLst>
+              <a:gd name="adj" fmla="val 10869"/>
+            </a:avLst>
+          </a:prstGeom>
+          <a:solidFill>
+            <a:srgbClr val="FFFFFF"/>
+          </a:solidFill>
+          <a:ln w="12700">
+            <a:solidFill>
+              <a:srgbClr val="DDD6FE"/>
+            </a:solidFill>
+          </a:ln>
+          <a:effectLst/>
+        </p:spPr>
+        <p:style>
+          <a:lnRef idx="1">
+            <a:schemeClr val="accent1"/>
+          </a:lnRef>
+          <a:fillRef idx="3">
+            <a:schemeClr val="accent1"/>
+          </a:fillRef>
+          <a:effectRef idx="2">
+            <a:schemeClr val="accent1"/>
+          </a:effectRef>
+          <a:fontRef idx="minor">
+            <a:schemeClr val="lt1"/>
+          </a:fontRef>
+        </p:style>
+        <p:txBody>
+          <a:bodyPr rtlCol="0" anchor="ctr"/>
+          <a:lstStyle/>
+          <a:p>
+            <a:pPr algn="ctr"/>
+          </a:p>
+        </p:txBody>
+      </p:sp>
+      <p:sp>
+        <p:nvSpPr>
+          <p:cNvPr id="54" name="TextBox 53"/>
+          <p:cNvSpPr txBox="1"/>
+          <p:nvPr/>
+        </p:nvSpPr>
+        <p:spPr>
+          <a:xfrm>
+            <a:off x="4053839" y="3758183"/>
+            <a:ext cx="1761743" cy="420624"/>
+          </a:xfrm>
+          <a:prstGeom prst="rect">
+            <a:avLst/>
+          </a:prstGeom>
+          <a:noFill/>
+        </p:spPr>
+        <p:txBody>
+          <a:bodyPr wrap="square" lIns="0" rIns="0" tIns="0" bIns="0" anchor="ctr">
+            <a:noAutofit/>
+          </a:bodyPr>
+          <a:lstStyle/>
+          <a:p>
+            <a:pPr algn="ctr">
+              <a:lnSpc>
+                <a:spcPct val="112000"/>
+              </a:lnSpc>
+              <a:spcBef>
+                <a:spcPts val="0"/>
+              </a:spcBef>
+              <a:spcAft>
+                <a:spcPts val="0"/>
+              </a:spcAft>
+            </a:pPr>
+            <a:r>
+              <a:rPr sz="620" b="0" i="0">
+                <a:solidFill>
+                  <a:srgbClr val="475569"/>
+                </a:solidFill>
+                <a:latin typeface="Segoe UI"/>
+                <a:ea typeface="Microsoft YaHei"/>
+              </a:rPr>
+              <a:t>Cloudberry</a:t>
+            </a:r>
+          </a:p>
+        </p:txBody>
+      </p:sp>
+      <p:sp>
+        <p:nvSpPr>
+          <p:cNvPr id="55" name="Rounded Rectangle 54"/>
+          <p:cNvSpPr/>
+          <p:nvPr/>
+        </p:nvSpPr>
+        <p:spPr>
+          <a:xfrm>
+            <a:off x="6135624" y="2706624"/>
+            <a:ext cx="5852160" cy="1572768"/>
+          </a:xfrm>
+          <a:prstGeom prst="roundRect">
+            <a:avLst>
+              <a:gd name="adj" fmla="val 4069"/>
+            </a:avLst>
+          </a:prstGeom>
+          <a:solidFill>
+            <a:srgbClr val="ECFDF5"/>
+          </a:solidFill>
+          <a:ln w="15240">
+            <a:solidFill>
+              <a:srgbClr val="A7F3D0"/>
+            </a:solidFill>
+          </a:ln>
+          <a:effectLst/>
+        </p:spPr>
+        <p:style>
+          <a:lnRef idx="1">
+            <a:schemeClr val="accent1"/>
+          </a:lnRef>
+          <a:fillRef idx="3">
+            <a:schemeClr val="accent1"/>
+          </a:fillRef>
+          <a:effectRef idx="2">
+            <a:schemeClr val="accent1"/>
+          </a:effectRef>
+          <a:fontRef idx="minor">
+            <a:schemeClr val="lt1"/>
+          </a:fontRef>
+        </p:style>
+        <p:txBody>
+          <a:bodyPr rtlCol="0" anchor="ctr"/>
+          <a:lstStyle/>
+          <a:p>
+            <a:pPr algn="ctr"/>
+          </a:p>
+        </p:txBody>
+      </p:sp>
+      <p:sp>
+        <p:nvSpPr>
+          <p:cNvPr id="56" name="Rounded Rectangle 55"/>
+          <p:cNvSpPr/>
+          <p:nvPr/>
+        </p:nvSpPr>
+        <p:spPr>
+          <a:xfrm>
+            <a:off x="6135624" y="2706624"/>
+            <a:ext cx="36576" cy="1572768"/>
+          </a:xfrm>
+          <a:prstGeom prst="roundRect">
+            <a:avLst>
+              <a:gd name="adj" fmla="val 50000"/>
+            </a:avLst>
+          </a:prstGeom>
+          <a:solidFill>
+            <a:srgbClr val="059669"/>
+          </a:solidFill>
+          <a:ln>
+            <a:noFill/>
+          </a:ln>
+          <a:effectLst/>
+        </p:spPr>
+        <p:style>
+          <a:lnRef idx="1">
+            <a:schemeClr val="accent1"/>
+          </a:lnRef>
+          <a:fillRef idx="3">
+            <a:schemeClr val="accent1"/>
+          </a:fillRef>
+          <a:effectRef idx="2">
+            <a:schemeClr val="accent1"/>
+          </a:effectRef>
+          <a:fontRef idx="minor">
+            <a:schemeClr val="lt1"/>
+          </a:fontRef>
+        </p:style>
+        <p:txBody>
+          <a:bodyPr rtlCol="0" anchor="ctr"/>
+          <a:lstStyle/>
+          <a:p>
+            <a:pPr algn="ctr"/>
+          </a:p>
+        </p:txBody>
+      </p:sp>
+      <p:sp>
+        <p:nvSpPr>
+          <p:cNvPr id="57" name="TextBox 56"/>
+          <p:cNvSpPr txBox="1"/>
+          <p:nvPr/>
+        </p:nvSpPr>
+        <p:spPr>
+          <a:xfrm>
+            <a:off x="6281928" y="2798064"/>
+            <a:ext cx="5559552" cy="219456"/>
+          </a:xfrm>
+          <a:prstGeom prst="rect">
+            <a:avLst/>
+          </a:prstGeom>
+          <a:noFill/>
+        </p:spPr>
+        <p:txBody>
+          <a:bodyPr wrap="square" lIns="0" rIns="0" tIns="0" bIns="0" anchor="t">
+            <a:noAutofit/>
+          </a:bodyPr>
+          <a:lstStyle/>
+          <a:p>
+            <a:pPr algn="l">
+              <a:lnSpc>
+                <a:spcPct val="112000"/>
+              </a:lnSpc>
+              <a:spcBef>
+                <a:spcPts val="0"/>
+              </a:spcBef>
+              <a:spcAft>
+                <a:spcPts val="0"/>
+              </a:spcAft>
+            </a:pPr>
+            <a:r>
+              <a:rPr sz="940" b="1" i="0">
+                <a:solidFill>
+                  <a:srgbClr val="0F172A"/>
+                </a:solidFill>
+                <a:latin typeface="Segoe UI"/>
+                <a:ea typeface="Microsoft YaHei"/>
+              </a:rPr>
+              <a:t>数据湖与存储</a:t>
+            </a:r>
+          </a:p>
+        </p:txBody>
+      </p:sp>
+      <p:sp>
+        <p:nvSpPr>
+          <p:cNvPr id="58" name="TextBox 57"/>
+          <p:cNvSpPr txBox="1"/>
+          <p:nvPr/>
+        </p:nvSpPr>
+        <p:spPr>
+          <a:xfrm>
+            <a:off x="6281928" y="3026664"/>
+            <a:ext cx="5559552" cy="137160"/>
+          </a:xfrm>
+          <a:prstGeom prst="rect">
+            <a:avLst/>
+          </a:prstGeom>
+          <a:noFill/>
+        </p:spPr>
+        <p:txBody>
+          <a:bodyPr wrap="square" lIns="0" rIns="0" tIns="0" bIns="0" anchor="t">
+            <a:noAutofit/>
+          </a:bodyPr>
+          <a:lstStyle/>
+          <a:p>
+            <a:pPr algn="l">
+              <a:lnSpc>
+                <a:spcPct val="112000"/>
+              </a:lnSpc>
+              <a:spcBef>
+                <a:spcPts val="0"/>
+              </a:spcBef>
+              <a:spcAft>
+                <a:spcPts val="0"/>
+              </a:spcAft>
+            </a:pPr>
+            <a:r>
+              <a:rPr sz="620" b="1" i="0">
+                <a:solidFill>
+                  <a:srgbClr val="059669"/>
+                </a:solidFill>
+                <a:latin typeface="Segoe UI"/>
+                <a:ea typeface="Microsoft YaHei"/>
+              </a:rPr>
+              <a:t>Open Table · 对象存储</a:t>
+            </a:r>
+          </a:p>
+        </p:txBody>
+      </p:sp>
+      <p:sp>
+        <p:nvSpPr>
+          <p:cNvPr id="59" name="Rounded Rectangle 58"/>
+          <p:cNvSpPr/>
+          <p:nvPr/>
+        </p:nvSpPr>
+        <p:spPr>
+          <a:xfrm>
+            <a:off x="6281928" y="3227832"/>
+            <a:ext cx="1792224" cy="420624"/>
+          </a:xfrm>
+          <a:prstGeom prst="roundRect">
+            <a:avLst>
+              <a:gd name="adj" fmla="val 10869"/>
+            </a:avLst>
+          </a:prstGeom>
+          <a:solidFill>
+            <a:srgbClr val="FFFFFF"/>
+          </a:solidFill>
+          <a:ln w="12700">
+            <a:solidFill>
+              <a:srgbClr val="A7F3D0"/>
+            </a:solidFill>
+          </a:ln>
+          <a:effectLst/>
+        </p:spPr>
+        <p:style>
+          <a:lnRef idx="1">
+            <a:schemeClr val="accent1"/>
+          </a:lnRef>
+          <a:fillRef idx="3">
+            <a:schemeClr val="accent1"/>
+          </a:fillRef>
+          <a:effectRef idx="2">
+            <a:schemeClr val="accent1"/>
+          </a:effectRef>
+          <a:fontRef idx="minor">
+            <a:schemeClr val="lt1"/>
+          </a:fontRef>
+        </p:style>
+        <p:txBody>
+          <a:bodyPr rtlCol="0" anchor="ctr"/>
+          <a:lstStyle/>
+          <a:p>
+            <a:pPr algn="ctr"/>
+          </a:p>
+        </p:txBody>
+      </p:sp>
+      <p:sp>
+        <p:nvSpPr>
+          <p:cNvPr id="60" name="TextBox 59"/>
+          <p:cNvSpPr txBox="1"/>
+          <p:nvPr/>
+        </p:nvSpPr>
+        <p:spPr>
+          <a:xfrm>
+            <a:off x="6281928" y="3227832"/>
+            <a:ext cx="1792224" cy="420624"/>
+          </a:xfrm>
+          <a:prstGeom prst="rect">
+            <a:avLst/>
+          </a:prstGeom>
+          <a:noFill/>
+        </p:spPr>
+        <p:txBody>
+          <a:bodyPr wrap="square" lIns="0" rIns="0" tIns="0" bIns="0" anchor="ctr">
+            <a:noAutofit/>
+          </a:bodyPr>
+          <a:lstStyle/>
+          <a:p>
+            <a:pPr algn="ctr">
+              <a:lnSpc>
+                <a:spcPct val="112000"/>
+              </a:lnSpc>
+              <a:spcBef>
+                <a:spcPts val="0"/>
+              </a:spcBef>
+              <a:spcAft>
+                <a:spcPts val="0"/>
+              </a:spcAft>
+            </a:pPr>
+            <a:r>
+              <a:rPr sz="620" b="0" i="0">
+                <a:solidFill>
+                  <a:srgbClr val="475569"/>
+                </a:solidFill>
+                <a:latin typeface="Segoe UI"/>
+                <a:ea typeface="Microsoft YaHei"/>
+              </a:rPr>
+              <a:t>Amazon S3</a:t>
+            </a:r>
+          </a:p>
+        </p:txBody>
+      </p:sp>
+      <p:sp>
+        <p:nvSpPr>
+          <p:cNvPr id="61" name="Rounded Rectangle 60"/>
+          <p:cNvSpPr/>
+          <p:nvPr/>
+        </p:nvSpPr>
+        <p:spPr>
+          <a:xfrm>
+            <a:off x="8165592" y="3227832"/>
+            <a:ext cx="1792224" cy="420624"/>
+          </a:xfrm>
+          <a:prstGeom prst="roundRect">
+            <a:avLst>
+              <a:gd name="adj" fmla="val 10869"/>
+            </a:avLst>
+          </a:prstGeom>
+          <a:solidFill>
+            <a:srgbClr val="FFFFFF"/>
+          </a:solidFill>
+          <a:ln w="12700">
+            <a:solidFill>
+              <a:srgbClr val="A7F3D0"/>
+            </a:solidFill>
+          </a:ln>
+          <a:effectLst/>
+        </p:spPr>
+        <p:style>
+          <a:lnRef idx="1">
+            <a:schemeClr val="accent1"/>
+          </a:lnRef>
+          <a:fillRef idx="3">
+            <a:schemeClr val="accent1"/>
+          </a:fillRef>
+          <a:effectRef idx="2">
+            <a:schemeClr val="accent1"/>
+          </a:effectRef>
+          <a:fontRef idx="minor">
+            <a:schemeClr val="lt1"/>
+          </a:fontRef>
+        </p:style>
+        <p:txBody>
+          <a:bodyPr rtlCol="0" anchor="ctr"/>
+          <a:lstStyle/>
+          <a:p>
+            <a:pPr algn="ctr"/>
+          </a:p>
+        </p:txBody>
+      </p:sp>
+      <p:sp>
+        <p:nvSpPr>
+          <p:cNvPr id="62" name="TextBox 61"/>
+          <p:cNvSpPr txBox="1"/>
+          <p:nvPr/>
+        </p:nvSpPr>
+        <p:spPr>
+          <a:xfrm>
+            <a:off x="8165592" y="3227832"/>
+            <a:ext cx="1792224" cy="420624"/>
+          </a:xfrm>
+          <a:prstGeom prst="rect">
+            <a:avLst/>
+          </a:prstGeom>
+          <a:noFill/>
+        </p:spPr>
+        <p:txBody>
+          <a:bodyPr wrap="square" lIns="0" rIns="0" tIns="0" bIns="0" anchor="ctr">
+            <a:noAutofit/>
+          </a:bodyPr>
+          <a:lstStyle/>
+          <a:p>
+            <a:pPr algn="ctr">
+              <a:lnSpc>
+                <a:spcPct val="112000"/>
+              </a:lnSpc>
+              <a:spcBef>
+                <a:spcPts val="0"/>
+              </a:spcBef>
+              <a:spcAft>
+                <a:spcPts val="0"/>
+              </a:spcAft>
+            </a:pPr>
+            <a:r>
+              <a:rPr sz="620" b="0" i="0">
+                <a:solidFill>
+                  <a:srgbClr val="475569"/>
+                </a:solidFill>
+                <a:latin typeface="Segoe UI"/>
+                <a:ea typeface="Microsoft YaHei"/>
+              </a:rPr>
+              <a:t>Alibaba OSS</a:t>
+            </a:r>
+          </a:p>
+        </p:txBody>
+      </p:sp>
+      <p:sp>
+        <p:nvSpPr>
+          <p:cNvPr id="63" name="Rounded Rectangle 62"/>
+          <p:cNvSpPr/>
+          <p:nvPr/>
+        </p:nvSpPr>
+        <p:spPr>
+          <a:xfrm>
+            <a:off x="10049256" y="3227832"/>
+            <a:ext cx="1792224" cy="420624"/>
+          </a:xfrm>
+          <a:prstGeom prst="roundRect">
+            <a:avLst>
+              <a:gd name="adj" fmla="val 10869"/>
+            </a:avLst>
+          </a:prstGeom>
+          <a:solidFill>
+            <a:srgbClr val="FFFFFF"/>
+          </a:solidFill>
+          <a:ln w="12700">
+            <a:solidFill>
+              <a:srgbClr val="A7F3D0"/>
+            </a:solidFill>
+          </a:ln>
+          <a:effectLst/>
+        </p:spPr>
+        <p:style>
+          <a:lnRef idx="1">
+            <a:schemeClr val="accent1"/>
+          </a:lnRef>
+          <a:fillRef idx="3">
+            <a:schemeClr val="accent1"/>
+          </a:fillRef>
+          <a:effectRef idx="2">
+            <a:schemeClr val="accent1"/>
+          </a:effectRef>
+          <a:fontRef idx="minor">
+            <a:schemeClr val="lt1"/>
+          </a:fontRef>
+        </p:style>
+        <p:txBody>
+          <a:bodyPr rtlCol="0" anchor="ctr"/>
+          <a:lstStyle/>
+          <a:p>
+            <a:pPr algn="ctr"/>
+          </a:p>
+        </p:txBody>
+      </p:sp>
+      <p:sp>
+        <p:nvSpPr>
+          <p:cNvPr id="64" name="TextBox 63"/>
+          <p:cNvSpPr txBox="1"/>
+          <p:nvPr/>
+        </p:nvSpPr>
+        <p:spPr>
+          <a:xfrm>
+            <a:off x="10049256" y="3227832"/>
+            <a:ext cx="1792224" cy="420624"/>
+          </a:xfrm>
+          <a:prstGeom prst="rect">
+            <a:avLst/>
+          </a:prstGeom>
+          <a:noFill/>
+        </p:spPr>
+        <p:txBody>
+          <a:bodyPr wrap="square" lIns="0" rIns="0" tIns="0" bIns="0" anchor="ctr">
+            <a:noAutofit/>
+          </a:bodyPr>
+          <a:lstStyle/>
+          <a:p>
+            <a:pPr algn="ctr">
+              <a:lnSpc>
+                <a:spcPct val="112000"/>
+              </a:lnSpc>
+              <a:spcBef>
+                <a:spcPts val="0"/>
+              </a:spcBef>
+              <a:spcAft>
+                <a:spcPts val="0"/>
+              </a:spcAft>
+            </a:pPr>
+            <a:r>
+              <a:rPr sz="620" b="0" i="0">
+                <a:solidFill>
+                  <a:srgbClr val="475569"/>
+                </a:solidFill>
+                <a:latin typeface="Segoe UI"/>
+                <a:ea typeface="Microsoft YaHei"/>
+              </a:rPr>
+              <a:t>HDFS / LocalFile</a:t>
+            </a:r>
+          </a:p>
+        </p:txBody>
+      </p:sp>
+      <p:sp>
+        <p:nvSpPr>
+          <p:cNvPr id="65" name="Rounded Rectangle 64"/>
+          <p:cNvSpPr/>
+          <p:nvPr/>
+        </p:nvSpPr>
+        <p:spPr>
+          <a:xfrm>
+            <a:off x="6281928" y="3758183"/>
+            <a:ext cx="1792224" cy="420624"/>
+          </a:xfrm>
+          <a:prstGeom prst="roundRect">
+            <a:avLst>
+              <a:gd name="adj" fmla="val 10869"/>
+            </a:avLst>
+          </a:prstGeom>
+          <a:solidFill>
+            <a:srgbClr val="ECFDF5"/>
+          </a:solidFill>
+          <a:ln w="15240">
+            <a:solidFill>
+              <a:srgbClr val="6EE7B7"/>
+            </a:solidFill>
+          </a:ln>
+          <a:effectLst/>
+        </p:spPr>
+        <p:style>
+          <a:lnRef idx="1">
+            <a:schemeClr val="accent1"/>
+          </a:lnRef>
+          <a:fillRef idx="3">
+            <a:schemeClr val="accent1"/>
+          </a:fillRef>
+          <a:effectRef idx="2">
+            <a:schemeClr val="accent1"/>
+          </a:effectRef>
+          <a:fontRef idx="minor">
+            <a:schemeClr val="lt1"/>
+          </a:fontRef>
+        </p:style>
+        <p:txBody>
+          <a:bodyPr rtlCol="0" anchor="ctr"/>
+          <a:lstStyle/>
+          <a:p>
+            <a:pPr algn="ctr"/>
+          </a:p>
+        </p:txBody>
+      </p:sp>
+      <p:sp>
+        <p:nvSpPr>
+          <p:cNvPr id="66" name="TextBox 65"/>
+          <p:cNvSpPr txBox="1"/>
+          <p:nvPr/>
+        </p:nvSpPr>
+        <p:spPr>
+          <a:xfrm>
+            <a:off x="6281928" y="3758183"/>
+            <a:ext cx="1792224" cy="420624"/>
+          </a:xfrm>
+          <a:prstGeom prst="rect">
+            <a:avLst/>
+          </a:prstGeom>
+          <a:noFill/>
+        </p:spPr>
+        <p:txBody>
+          <a:bodyPr wrap="square" lIns="0" rIns="0" tIns="0" bIns="0" anchor="ctr">
+            <a:noAutofit/>
+          </a:bodyPr>
+          <a:lstStyle/>
+          <a:p>
+            <a:pPr algn="ctr">
+              <a:lnSpc>
+                <a:spcPct val="112000"/>
+              </a:lnSpc>
+              <a:spcBef>
+                <a:spcPts val="0"/>
+              </a:spcBef>
+              <a:spcAft>
+                <a:spcPts val="0"/>
+              </a:spcAft>
+            </a:pPr>
+            <a:r>
+              <a:rPr sz="620" b="1" i="0">
+                <a:solidFill>
+                  <a:srgbClr val="047857"/>
+                </a:solidFill>
+                <a:latin typeface="Segoe UI"/>
+                <a:ea typeface="Microsoft YaHei"/>
+              </a:rPr>
+              <a:t>Apache Iceberg</a:t>
+            </a:r>
+          </a:p>
+        </p:txBody>
+      </p:sp>
+      <p:sp>
+        <p:nvSpPr>
+          <p:cNvPr id="67" name="Rounded Rectangle 66"/>
+          <p:cNvSpPr/>
+          <p:nvPr/>
+        </p:nvSpPr>
+        <p:spPr>
+          <a:xfrm>
+            <a:off x="8165592" y="3758183"/>
+            <a:ext cx="1792224" cy="420624"/>
+          </a:xfrm>
+          <a:prstGeom prst="roundRect">
+            <a:avLst>
+              <a:gd name="adj" fmla="val 10869"/>
+            </a:avLst>
+          </a:prstGeom>
+          <a:solidFill>
+            <a:srgbClr val="FFFFFF"/>
+          </a:solidFill>
+          <a:ln w="12700">
+            <a:solidFill>
+              <a:srgbClr val="A7F3D0"/>
+            </a:solidFill>
+          </a:ln>
+          <a:effectLst/>
+        </p:spPr>
+        <p:style>
+          <a:lnRef idx="1">
+            <a:schemeClr val="accent1"/>
+          </a:lnRef>
+          <a:fillRef idx="3">
+            <a:schemeClr val="accent1"/>
+          </a:fillRef>
+          <a:effectRef idx="2">
+            <a:schemeClr val="accent1"/>
+          </a:effectRef>
+          <a:fontRef idx="minor">
+            <a:schemeClr val="lt1"/>
+          </a:fontRef>
+        </p:style>
+        <p:txBody>
+          <a:bodyPr rtlCol="0" anchor="ctr"/>
+          <a:lstStyle/>
+          <a:p>
+            <a:pPr algn="ctr"/>
+          </a:p>
+        </p:txBody>
+      </p:sp>
+      <p:sp>
+        <p:nvSpPr>
+          <p:cNvPr id="68" name="TextBox 67"/>
+          <p:cNvSpPr txBox="1"/>
+          <p:nvPr/>
+        </p:nvSpPr>
+        <p:spPr>
+          <a:xfrm>
+            <a:off x="8165592" y="3758183"/>
+            <a:ext cx="1792224" cy="420624"/>
+          </a:xfrm>
+          <a:prstGeom prst="rect">
+            <a:avLst/>
+          </a:prstGeom>
+          <a:noFill/>
+        </p:spPr>
+        <p:txBody>
+          <a:bodyPr wrap="square" lIns="0" rIns="0" tIns="0" bIns="0" anchor="ctr">
+            <a:noAutofit/>
+          </a:bodyPr>
+          <a:lstStyle/>
+          <a:p>
+            <a:pPr algn="ctr">
+              <a:lnSpc>
+                <a:spcPct val="112000"/>
+              </a:lnSpc>
+              <a:spcBef>
+                <a:spcPts val="0"/>
+              </a:spcBef>
+              <a:spcAft>
+                <a:spcPts val="0"/>
+              </a:spcAft>
+            </a:pPr>
+            <a:r>
+              <a:rPr sz="620" b="0" i="0">
+                <a:solidFill>
+                  <a:srgbClr val="475569"/>
+                </a:solidFill>
+                <a:latin typeface="Segoe UI"/>
+                <a:ea typeface="Microsoft YaHei"/>
+              </a:rPr>
+              <a:t>Delta Lake</a:t>
+            </a:r>
+          </a:p>
+        </p:txBody>
+      </p:sp>
+      <p:sp>
+        <p:nvSpPr>
+          <p:cNvPr id="69" name="Rounded Rectangle 68"/>
+          <p:cNvSpPr/>
+          <p:nvPr/>
+        </p:nvSpPr>
+        <p:spPr>
+          <a:xfrm>
+            <a:off x="10049256" y="3758183"/>
+            <a:ext cx="1792224" cy="420624"/>
+          </a:xfrm>
+          <a:prstGeom prst="roundRect">
+            <a:avLst>
+              <a:gd name="adj" fmla="val 10869"/>
+            </a:avLst>
+          </a:prstGeom>
+          <a:solidFill>
+            <a:srgbClr val="FFFFFF"/>
+          </a:solidFill>
+          <a:ln w="12700">
+            <a:solidFill>
+              <a:srgbClr val="A7F3D0"/>
+            </a:solidFill>
+          </a:ln>
+          <a:effectLst/>
+        </p:spPr>
+        <p:style>
+          <a:lnRef idx="1">
+            <a:schemeClr val="accent1"/>
+          </a:lnRef>
+          <a:fillRef idx="3">
+            <a:schemeClr val="accent1"/>
+          </a:fillRef>
+          <a:effectRef idx="2">
+            <a:schemeClr val="accent1"/>
+          </a:effectRef>
+          <a:fontRef idx="minor">
+            <a:schemeClr val="lt1"/>
+          </a:fontRef>
+        </p:style>
+        <p:txBody>
+          <a:bodyPr rtlCol="0" anchor="ctr"/>
+          <a:lstStyle/>
+          <a:p>
+            <a:pPr algn="ctr"/>
+          </a:p>
+        </p:txBody>
+      </p:sp>
+      <p:sp>
+        <p:nvSpPr>
+          <p:cNvPr id="70" name="TextBox 69"/>
+          <p:cNvSpPr txBox="1"/>
+          <p:nvPr/>
+        </p:nvSpPr>
+        <p:spPr>
+          <a:xfrm>
+            <a:off x="10049256" y="3758183"/>
+            <a:ext cx="1792224" cy="420624"/>
+          </a:xfrm>
+          <a:prstGeom prst="rect">
+            <a:avLst/>
+          </a:prstGeom>
+          <a:noFill/>
+        </p:spPr>
+        <p:txBody>
+          <a:bodyPr wrap="square" lIns="0" rIns="0" tIns="0" bIns="0" anchor="ctr">
+            <a:noAutofit/>
+          </a:bodyPr>
+          <a:lstStyle/>
+          <a:p>
+            <a:pPr algn="ctr">
+              <a:lnSpc>
+                <a:spcPct val="112000"/>
+              </a:lnSpc>
+              <a:spcBef>
+                <a:spcPts val="0"/>
+              </a:spcBef>
+              <a:spcAft>
+                <a:spcPts val="0"/>
+              </a:spcAft>
+            </a:pPr>
+            <a:r>
+              <a:rPr sz="620" b="0" i="0">
+                <a:solidFill>
+                  <a:srgbClr val="475569"/>
+                </a:solidFill>
+                <a:latin typeface="Segoe UI"/>
+                <a:ea typeface="Microsoft YaHei"/>
+              </a:rPr>
+              <a:t>Apache Paimon</a:t>
+            </a:r>
+          </a:p>
+        </p:txBody>
+      </p:sp>
+      <p:sp>
+        <p:nvSpPr>
+          <p:cNvPr id="71" name="Rounded Rectangle 70"/>
+          <p:cNvSpPr/>
+          <p:nvPr/>
+        </p:nvSpPr>
+        <p:spPr>
+          <a:xfrm>
+            <a:off x="201168" y="4425696"/>
+            <a:ext cx="11786616" cy="1847088"/>
+          </a:xfrm>
+          <a:prstGeom prst="roundRect">
+            <a:avLst>
+              <a:gd name="adj" fmla="val 3465"/>
+            </a:avLst>
+          </a:prstGeom>
+          <a:solidFill>
+            <a:srgbClr val="FFFFFF"/>
+          </a:solidFill>
+          <a:ln w="15240">
+            <a:solidFill>
+              <a:srgbClr val="E2E8F0"/>
+            </a:solidFill>
+          </a:ln>
+          <a:effectLst/>
+        </p:spPr>
+        <p:style>
+          <a:lnRef idx="1">
+            <a:schemeClr val="accent1"/>
+          </a:lnRef>
+          <a:fillRef idx="3">
+            <a:schemeClr val="accent1"/>
+          </a:fillRef>
+          <a:effectRef idx="2">
+            <a:schemeClr val="accent1"/>
+          </a:effectRef>
+          <a:fontRef idx="minor">
+            <a:schemeClr val="lt1"/>
+          </a:fontRef>
+        </p:style>
+        <p:txBody>
+          <a:bodyPr rtlCol="0" anchor="ctr"/>
+          <a:lstStyle/>
+          <a:p>
+            <a:pPr algn="ctr"/>
+          </a:p>
+        </p:txBody>
+      </p:sp>
+      <p:sp>
+        <p:nvSpPr>
+          <p:cNvPr id="72" name="TextBox 71"/>
+          <p:cNvSpPr txBox="1"/>
+          <p:nvPr/>
+        </p:nvSpPr>
+        <p:spPr>
+          <a:xfrm>
+            <a:off x="347472" y="4517136"/>
+            <a:ext cx="11430000" cy="201168"/>
+          </a:xfrm>
+          <a:prstGeom prst="rect">
+            <a:avLst/>
+          </a:prstGeom>
+          <a:noFill/>
+        </p:spPr>
+        <p:txBody>
+          <a:bodyPr wrap="square" lIns="0" rIns="0" tIns="0" bIns="0" anchor="t">
+            <a:noAutofit/>
+          </a:bodyPr>
+          <a:lstStyle/>
+          <a:p>
+            <a:pPr algn="l">
+              <a:lnSpc>
+                <a:spcPct val="112000"/>
+              </a:lnSpc>
+              <a:spcBef>
+                <a:spcPts val="0"/>
+              </a:spcBef>
+              <a:spcAft>
+                <a:spcPts val="0"/>
+              </a:spcAft>
+            </a:pPr>
+            <a:r>
+              <a:rPr sz="850" b="1" i="0">
+                <a:solidFill>
+                  <a:srgbClr val="0F172A"/>
+                </a:solidFill>
+                <a:latin typeface="Segoe UI"/>
+                <a:ea typeface="Microsoft YaHei"/>
+              </a:rPr>
+              <a:t>其余连接器 · 全量约 200 个（节选）</a:t>
+            </a:r>
+          </a:p>
+        </p:txBody>
+      </p:sp>
+      <p:sp>
+        <p:nvSpPr>
+          <p:cNvPr id="73" name="TextBox 72"/>
+          <p:cNvSpPr txBox="1"/>
+          <p:nvPr/>
+        </p:nvSpPr>
+        <p:spPr>
+          <a:xfrm>
+            <a:off x="347472" y="4791456"/>
+            <a:ext cx="11430000" cy="384048"/>
+          </a:xfrm>
+          <a:prstGeom prst="rect">
+            <a:avLst/>
+          </a:prstGeom>
+          <a:noFill/>
+        </p:spPr>
+        <p:txBody>
+          <a:bodyPr wrap="square" lIns="0" rIns="0" tIns="0" bIns="0" anchor="t">
+            <a:noAutofit/>
+          </a:bodyPr>
+          <a:lstStyle/>
+          <a:p>
+            <a:pPr algn="l">
+              <a:lnSpc>
+                <a:spcPct val="125000"/>
+              </a:lnSpc>
+              <a:spcBef>
+                <a:spcPts val="0"/>
+              </a:spcBef>
+              <a:spcAft>
+                <a:spcPts val="0"/>
+              </a:spcAft>
+            </a:pPr>
+            <a:r>
+              <a:rPr sz="630" b="0" i="0">
+                <a:solidFill>
+                  <a:srgbClr val="64748B"/>
+                </a:solidFill>
+                <a:latin typeface="Segoe UI"/>
+                <a:ea typeface="Microsoft YaHei"/>
+              </a:rPr>
+              <a:t>数据库：MySQL · PostgreSQL · Oracle · SQL Server · TiDB · MariaDB · MongoDB · DynamoDB · Cassandra · HBase · Neo4j · DB2 · Greenplum · OceanBase · Redis · Aerospike</a:t>
+            </a:r>
+          </a:p>
+        </p:txBody>
+      </p:sp>
+      <p:sp>
+        <p:nvSpPr>
+          <p:cNvPr id="74" name="TextBox 73"/>
+          <p:cNvSpPr txBox="1"/>
+          <p:nvPr/>
+        </p:nvSpPr>
+        <p:spPr>
+          <a:xfrm>
+            <a:off x="347472" y="5212080"/>
+            <a:ext cx="11430000" cy="384048"/>
+          </a:xfrm>
+          <a:prstGeom prst="rect">
+            <a:avLst/>
+          </a:prstGeom>
+          <a:noFill/>
+        </p:spPr>
+        <p:txBody>
+          <a:bodyPr wrap="square" lIns="0" rIns="0" tIns="0" bIns="0" anchor="t">
+            <a:noAutofit/>
+          </a:bodyPr>
+          <a:lstStyle/>
+          <a:p>
+            <a:pPr algn="l">
+              <a:lnSpc>
+                <a:spcPct val="125000"/>
+              </a:lnSpc>
+              <a:spcBef>
+                <a:spcPts val="0"/>
+              </a:spcBef>
+              <a:spcAft>
+                <a:spcPts val="0"/>
+              </a:spcAft>
+            </a:pPr>
+            <a:r>
+              <a:rPr sz="630" b="0" i="0">
+                <a:solidFill>
+                  <a:srgbClr val="64748B"/>
+                </a:solidFill>
+                <a:latin typeface="Segoe UI"/>
+                <a:ea typeface="Microsoft YaHei"/>
+              </a:rPr>
+              <a:t>消息 / 检索 / 向量：Kafka · Pulsar · RabbitMQ · RocketMQ · ActiveMQ · SQS · Elasticsearch · Druid · Typesense · Milvus · Qdrant · Lance · HugeGraph · InfluxDB · IoTDB · TDengine</a:t>
+            </a:r>
+          </a:p>
+        </p:txBody>
+      </p:sp>
+      <p:sp>
+        <p:nvSpPr>
+          <p:cNvPr id="75" name="TextBox 74"/>
+          <p:cNvSpPr txBox="1"/>
+          <p:nvPr/>
+        </p:nvSpPr>
+        <p:spPr>
+          <a:xfrm>
+            <a:off x="347472" y="5632704"/>
+            <a:ext cx="11430000" cy="384048"/>
+          </a:xfrm>
+          <a:prstGeom prst="rect">
+            <a:avLst/>
+          </a:prstGeom>
+          <a:noFill/>
+        </p:spPr>
+        <p:txBody>
+          <a:bodyPr wrap="square" lIns="0" rIns="0" tIns="0" bIns="0" anchor="t">
+            <a:noAutofit/>
+          </a:bodyPr>
+          <a:lstStyle/>
+          <a:p>
+            <a:pPr algn="l">
+              <a:lnSpc>
+                <a:spcPct val="125000"/>
+              </a:lnSpc>
+              <a:spcBef>
+                <a:spcPts val="0"/>
+              </a:spcBef>
+              <a:spcAft>
+                <a:spcPts val="0"/>
+              </a:spcAft>
+            </a:pPr>
+            <a:r>
+              <a:rPr sz="630" b="0" i="0">
+                <a:solidFill>
+                  <a:srgbClr val="64748B"/>
+                </a:solidFill>
+                <a:latin typeface="Segoe UI"/>
+                <a:ea typeface="Microsoft YaHei"/>
+              </a:rPr>
+              <a:t>文件 / 协作 / 其他：FTP · SFTP · HTTP · GraphQL · Google Sheets · Firestore · Slack · DingTalk · Feishu · Email · MaxCompute · Prometheus · SLS · Sentry · Web3j …</a:t>
+            </a:r>
+          </a:p>
+        </p:txBody>
+      </p:sp>
+      <p:sp>
+        <p:nvSpPr>
+          <p:cNvPr id="76" name="TextBox 75"/>
+          <p:cNvSpPr txBox="1"/>
+          <p:nvPr/>
+        </p:nvSpPr>
+        <p:spPr>
+          <a:xfrm>
+            <a:off x="347472" y="6089904"/>
+            <a:ext cx="11430000" cy="128016"/>
+          </a:xfrm>
+          <a:prstGeom prst="rect">
+            <a:avLst/>
+          </a:prstGeom>
+          <a:noFill/>
+        </p:spPr>
+        <p:txBody>
+          <a:bodyPr wrap="square" lIns="0" rIns="0" tIns="0" bIns="0" anchor="t">
+            <a:noAutofit/>
+          </a:bodyPr>
+          <a:lstStyle/>
+          <a:p>
+            <a:pPr algn="l">
+              <a:lnSpc>
+                <a:spcPct val="112000"/>
+              </a:lnSpc>
+              <a:spcBef>
+                <a:spcPts val="0"/>
+              </a:spcBef>
+              <a:spcAft>
+                <a:spcPts val="0"/>
+              </a:spcAft>
+            </a:pPr>
+            <a:r>
+              <a:rPr sz="640" b="1" i="0">
+                <a:solidFill>
+                  <a:srgbClr val="059669"/>
+                </a:solidFill>
+                <a:latin typeface="Segoe UI"/>
+                <a:ea typeface="Microsoft YaHei"/>
+              </a:rPr>
+              <a:t>★ </a:t>
+            </a:r>
+            <a:r>
+              <a:rPr sz="640" b="1" i="0">
+                <a:solidFill>
+                  <a:srgbClr val="047857"/>
+                </a:solidFill>
+                <a:latin typeface="Segoe UI"/>
+                <a:ea typeface="Microsoft YaHei"/>
+              </a:rPr>
+              <a:t>Apache Iceberg</a:t>
+            </a:r>
+            <a:r>
+              <a:rPr sz="640" b="0" i="0">
+                <a:solidFill>
+                  <a:srgbClr val="64748B"/>
+                </a:solidFill>
+                <a:latin typeface="Segoe UI"/>
+                <a:ea typeface="Microsoft YaHei"/>
+              </a:rPr>
+              <a:t> 为本项目归档落地格式 · SeaTunnel 可将其作为 Sink 直接写湖</a:t>
             </a:r>
           </a:p>
         </p:txBody>
